--- a/docs/slides/cisco-home-telephony.pptx
+++ b/docs/slides/cisco-home-telephony.pptx
@@ -2,24 +2,26 @@
 <file path=ppt/presentation.xml><?xml version="1.0" encoding="utf-8"?>
 <p:presentation xmlns:p="http://schemas.openxmlformats.org/presentationml/2006/main">
   <p:sldMasterIdLst>
-    <p:sldMasterId xmlns:r="http://schemas.openxmlformats.org/officeDocument/2006/relationships" id="2147483648" r:id="R8eb79c19d9f24a6c"/>
+    <p:sldMasterId xmlns:r="http://schemas.openxmlformats.org/officeDocument/2006/relationships" id="2147483648" r:id="R17f07c020db249cb"/>
   </p:sldMasterIdLst>
   <p:notesMasterIdLst>
-    <p:notesMasterId xmlns:r="http://schemas.openxmlformats.org/officeDocument/2006/relationships" r:id="R22df47b66e0d4326"/>
+    <p:notesMasterId xmlns:r="http://schemas.openxmlformats.org/officeDocument/2006/relationships" r:id="Rf8c3627646884fc9"/>
   </p:notesMasterIdLst>
   <p:sldIdLst>
-    <p:sldId xmlns:r="http://schemas.openxmlformats.org/officeDocument/2006/relationships" id="256" r:id="R87edebc1c16942e1"/>
-    <p:sldId xmlns:r="http://schemas.openxmlformats.org/officeDocument/2006/relationships" id="257" r:id="R97b696c34b7b4354"/>
-    <p:sldId xmlns:r="http://schemas.openxmlformats.org/officeDocument/2006/relationships" id="258" r:id="R3030d9edfc414f0c"/>
-    <p:sldId xmlns:r="http://schemas.openxmlformats.org/officeDocument/2006/relationships" id="259" r:id="Rd674ef21e20e4932"/>
-    <p:sldId xmlns:r="http://schemas.openxmlformats.org/officeDocument/2006/relationships" id="260" r:id="R3059d5cb23504cc5"/>
-    <p:sldId xmlns:r="http://schemas.openxmlformats.org/officeDocument/2006/relationships" id="261" r:id="R03453cd85e294098"/>
-    <p:sldId xmlns:r="http://schemas.openxmlformats.org/officeDocument/2006/relationships" id="262" r:id="R2d3161f53d1a40a4"/>
-    <p:sldId xmlns:r="http://schemas.openxmlformats.org/officeDocument/2006/relationships" id="263" r:id="R040815f12c034ea4"/>
-    <p:sldId xmlns:r="http://schemas.openxmlformats.org/officeDocument/2006/relationships" id="264" r:id="R9038fffb58b34b21"/>
-    <p:sldId xmlns:r="http://schemas.openxmlformats.org/officeDocument/2006/relationships" id="265" r:id="R8c8224b807a84865"/>
-    <p:sldId xmlns:r="http://schemas.openxmlformats.org/officeDocument/2006/relationships" id="266" r:id="R7a72b3ddad5041a8"/>
-    <p:sldId xmlns:r="http://schemas.openxmlformats.org/officeDocument/2006/relationships" id="267" r:id="R07d957520e494b06"/>
+    <p:sldId xmlns:r="http://schemas.openxmlformats.org/officeDocument/2006/relationships" id="256" r:id="Rfc2e1e8f235d4bef"/>
+    <p:sldId xmlns:r="http://schemas.openxmlformats.org/officeDocument/2006/relationships" id="257" r:id="R28ed7e66f6e6497e"/>
+    <p:sldId xmlns:r="http://schemas.openxmlformats.org/officeDocument/2006/relationships" id="258" r:id="Re476cb9063e04473"/>
+    <p:sldId xmlns:r="http://schemas.openxmlformats.org/officeDocument/2006/relationships" id="259" r:id="R10bc742c721b420e"/>
+    <p:sldId xmlns:r="http://schemas.openxmlformats.org/officeDocument/2006/relationships" id="260" r:id="Raaa0b83498534c57"/>
+    <p:sldId xmlns:r="http://schemas.openxmlformats.org/officeDocument/2006/relationships" id="261" r:id="R2d7ab22be1fe48da"/>
+    <p:sldId xmlns:r="http://schemas.openxmlformats.org/officeDocument/2006/relationships" id="262" r:id="R552e56dc87784a3c"/>
+    <p:sldId xmlns:r="http://schemas.openxmlformats.org/officeDocument/2006/relationships" id="263" r:id="R007542d280f94dcb"/>
+    <p:sldId xmlns:r="http://schemas.openxmlformats.org/officeDocument/2006/relationships" id="264" r:id="R46672d2cfcc14238"/>
+    <p:sldId xmlns:r="http://schemas.openxmlformats.org/officeDocument/2006/relationships" id="265" r:id="R58a0b17cf5164771"/>
+    <p:sldId xmlns:r="http://schemas.openxmlformats.org/officeDocument/2006/relationships" id="266" r:id="R46146d95095d4ed3"/>
+    <p:sldId xmlns:r="http://schemas.openxmlformats.org/officeDocument/2006/relationships" id="267" r:id="Rbc5897bb481e455e"/>
+    <p:sldId xmlns:r="http://schemas.openxmlformats.org/officeDocument/2006/relationships" id="268" r:id="Rfdb524d2d18d4daa"/>
+    <p:sldId xmlns:r="http://schemas.openxmlformats.org/officeDocument/2006/relationships" id="269" r:id="R6588ffd320ef4092"/>
   </p:sldIdLst>
   <p:sldSz cx="12192000" cy="6858000"/>
   <p:notesSz cx="6858000" cy="9144000"/>
@@ -453,7 +455,7 @@
           <a:lstStyle xmlns:a="http://schemas.openxmlformats.org/drawingml/2006/main"/>
           <a:p xmlns:a="http://schemas.openxmlformats.org/drawingml/2006/main">
             <a:r>
-              <a:t>Партия: 10 × Cisco 7945G. Модель подтверждена письмом eBay о доставке от 1 декабря 2022 года. Адрес доставки и платёжные данные в репозиторий не включены. Состояние и прошивка каждого сохранившегося аппарата требуют инвентаризации. Дата подготовки: 16 октября 2026 года.</a:t>
+              <a:t>Партия: 10 × Cisco 7945G. Модель подтверждена письмом eBay о доставке от 1 декабря 2022 года. Адрес доставки и платёжные данные в репозиторий не включены. Состояние и прошивка каждого сохранившегося аппарата требуют инвентаризации. Обновлено: 17 октября 2026 года. Слайды описывают план и архитектуру, а не подтверждают установку в доме.</a:t>
             </a:r>
           </a:p>
         </p:txBody>
@@ -523,7 +525,22 @@
           <a:lstStyle xmlns:a="http://schemas.openxmlformats.org/drawingml/2006/main"/>
           <a:p xmlns:a="http://schemas.openxmlformats.org/drawingml/2006/main">
             <a:r>
-              <a:t>Критерии интеграционного тестирования проекта, а не заявление о проведённых проверках реального оборудования. Нужны два телефона. Проверить регистрацию, вызовы 201→202 и 202→201, голос в обе стороны, DTMF/echo test, hold и transfer, корректное время, перезагрузку телефона и контролируемый restart pod. Симуляция или static validation не заменяют проверку на аппаратах.</a:t>
+              <a:t>Официальная VoIP-интеграция HA: https://www.home-assistant.io/integrations/voip/</a:t>
+            </a:r>
+          </a:p>
+          <a:p xmlns:a="http://schemas.openxmlformats.org/drawingml/2006/main">
+            <a:r>
+              <a:t>Установка и приёмка: https://github.com/ha-homelab/asterisk-telephony</a:t>
+            </a:r>
+          </a:p>
+          <a:p xmlns:a="http://schemas.openxmlformats.org/drawingml/2006/main">
+            <a:r>
+              <a:t>Закреплённый Opus transcoder: https://github.com/wazo-platform/wazo-codec-opus-open-source/tree/591b6cd9b75e2b9b6d815ef364a385fccee595a7</a:t>
+            </a:r>
+          </a:p>
+          <a:p xmlns:a="http://schemas.openxmlformats.org/drawingml/2006/main">
+            <a:r>
+              <a:t>Cisco 7945G использует G.711, проверенная HA 2026.10.2 VoIP требует Opus. Asterisk транскодирует звук в обе стороны через модуль, собранный из исходников Wazo. Проверки translation paths и контейнерные smoke подтверждают серверную часть, не разговор с домашним аппаратом. SIP к Cisco по умолчанию TCP5060, к HA UDP5060 либо явно выбранный порт. PBX RTP10000–10199, у HA динамические RTP/RTCP UDP-порты. Allow calls и выбор pipeline включают для обнаруженного VoIP device. SIP From сохраняет внутренний номер, в том числе при Originate из HA. Проверить STT, ответ TTS, завершение и повторный вызов. AMI передаёт события и команды, голос не передаёт.</a:t>
             </a:r>
           </a:p>
         </p:txBody>
@@ -593,7 +610,12 @@
           <a:lstStyle xmlns:a="http://schemas.openxmlformats.org/drawingml/2006/main"/>
           <a:p xmlns:a="http://schemas.openxmlformats.org/drawingml/2006/main">
             <a:r>
-              <a:t>Проектные эксплуатационные требования. Поддерживается один узел для телефонии, это не высокая доступность. Резервная копия должна включать inventory, секреты, конфиги, persistent Asterisk data и provenance firmware, при необходимости voicemail. Проверять restore на отдельной тестовой среде. При смене LAN IP обновляют provisioning и сетевые правила. Не публиковать SIP-пароли и firmware binaries в Git.</a:t>
+              <a:t>См. README.md, docs/pbx-bootstrap.md, docs/k3s-deployment.md, docs/home-assistant.md, scripts/ и deploy/. namespace: telephony. Bootstrap означает подготовку серверной части, образов и сетевых правил до подключения проверенного телефона, а не завершённый звонок. Для него существует явный provision.py --pbx-only, без фиктивных MAC, телефонных endpoint и TFTP. Начальные allow_originate:false и assist.enabled:false сохраняются до проверки условий подключения. Локальные site/inventory и секреты не коммитятся. Перед TFTP нужен фактический инвентарь аппарата и подходящий проверенный firmware. Точные команды генерации и применения брать из актуального runbook. Одна реплика Asterisk и Recreate предотвращают конфликт hostNetwork-портов. HA-компонент сначала staging, затем отдельное окно установки в существующий HA. k3s: https://docs.k3s.io/installation/requirements</a:t>
+            </a:r>
+          </a:p>
+          <a:p xmlns:a="http://schemas.openxmlformats.org/drawingml/2006/main">
+            <a:r>
+              <a:t>HA: https://github.com/ha-homelab/asterisk-telephony</a:t>
             </a:r>
           </a:p>
         </p:txBody>
@@ -663,7 +685,147 @@
           <a:lstStyle xmlns:a="http://schemas.openxmlformats.org/drawingml/2006/main"/>
           <a:p xmlns:a="http://schemas.openxmlformats.org/drawingml/2006/main">
             <a:r>
-              <a:t>План запуска, реальные телефоны ещё не прошиты и кластер не изменён. Начать с одного аппарата, затем проверить пару, затем подключить остальные. Фактическое количество сохранившихся устройств, App Load, адрес LAN-узла, DHCP router и питание требуют локальной инвентаризации. Репозиторий содержит инструкции, сценарии, SVG и редактируемую презентацию.</a:t>
+              <a:t>Критерии проекта, а не заявление о завершённой установке в доме. Нужны два физических аппарата с проверенным инвентарём. Проверить регистрацию pjsip show contacts, вызовы 201→202 и 202→201, звук в обе стороны, DTMF/echo, hold/transfer и время. Затем состояния HA, Originate, Hangup фактического активного Channel и безопасный DTMF notification. DTMF Sent/Received определить на пилоте. Номер 630: Allow calls, pipeline, корректная отдельная идентичность каждого телефона, STT, TTS и завершение. Повторить после cold boot телефона и контролируемого restart PBX/HA. Автоматические runtime/smoke проверки не заменяют физическую приёмку. https://github.com/ha-homelab/asterisk-telephony/blob/main/docs/acceptance.md</a:t>
+            </a:r>
+          </a:p>
+        </p:txBody>
+      </p:sp>
+      <p:sp>
+        <p:nvSpPr>
+          <p:cNvPr id="4" name="Slide Number Placeholder 3"/>
+          <p:cNvSpPr>
+            <a:spLocks xmlns:a="http://schemas.openxmlformats.org/drawingml/2006/main" noGrp="1"/>
+          </p:cNvSpPr>
+          <p:nvPr>
+            <p:ph type="sldNum" idx="5"/>
+          </p:nvPr>
+        </p:nvSpPr>
+        <p:spPr/>
+        <p:txBody>
+          <a:bodyPr xmlns:a="http://schemas.openxmlformats.org/drawingml/2006/main"/>
+          <a:lstStyle xmlns:a="http://schemas.openxmlformats.org/drawingml/2006/main"/>
+          <a:p xmlns:a="http://schemas.openxmlformats.org/drawingml/2006/main"/>
+        </p:txBody>
+      </p:sp>
+    </p:spTree>
+  </p:cSld>
+  <p:clrMapOvr>
+    <a:masterClrMapping xmlns:a="http://schemas.openxmlformats.org/drawingml/2006/main"/>
+  </p:clrMapOvr>
+</p:notes>
+</file>
+
+<file path=ppt/notesSlides/notesSlide13.xml><?xml version="1.0" encoding="utf-8"?>
+<p:notes xmlns:p="http://schemas.openxmlformats.org/presentationml/2006/main">
+  <p:cSld>
+    <p:spTree>
+      <p:nvGrpSpPr>
+        <p:cNvPr id="1" name=""/>
+        <p:cNvGrpSpPr/>
+        <p:nvPr/>
+      </p:nvGrpSpPr>
+      <p:grpSpPr>
+        <a:xfrm xmlns:a="http://schemas.openxmlformats.org/drawingml/2006/main"/>
+      </p:grpSpPr>
+      <p:sp>
+        <p:nvSpPr>
+          <p:cNvPr id="2" name="Slide Image Placeholder 1"/>
+          <p:cNvSpPr>
+            <a:spLocks xmlns:a="http://schemas.openxmlformats.org/drawingml/2006/main" noGrp="1"/>
+          </p:cNvSpPr>
+          <p:nvPr>
+            <p:ph type="sldImg" idx="0"/>
+          </p:nvPr>
+        </p:nvSpPr>
+        <p:spPr/>
+      </p:sp>
+      <p:sp>
+        <p:nvSpPr>
+          <p:cNvPr id="3" name="Notes Placeholder 2"/>
+          <p:cNvSpPr>
+            <a:spLocks xmlns:a="http://schemas.openxmlformats.org/drawingml/2006/main" noGrp="1"/>
+          </p:cNvSpPr>
+          <p:nvPr>
+            <p:ph type="body" idx="1"/>
+          </p:nvPr>
+        </p:nvSpPr>
+        <p:spPr/>
+        <p:txBody>
+          <a:bodyPr xmlns:a="http://schemas.openxmlformats.org/drawingml/2006/main"/>
+          <a:lstStyle xmlns:a="http://schemas.openxmlformats.org/drawingml/2006/main"/>
+          <a:p xmlns:a="http://schemas.openxmlformats.org/drawingml/2006/main">
+            <a:r>
+              <a:t>Проектные эксплуатационные требования. Поддерживается один узел для телефонии, это не высокая доступность. Backup включает inventory, SIP/AMI секреты, конфиги, persistent Asterisk data, provenance firmware, HA config/.storage и entity mapping. Проверять restore отдельно. Не публиковать SIP/AMI пароли и firmware binaries. В HA исключить сырые DTMF/call sensors из Recorder, исключения не удаляют старую историю. Откат home_assistant.enabled:false отключает AMI и маршрут630 после генерации и применения, базовые внутренние звонки остаются. См. docs/operations.md и https://github.com/ha-homelab/asterisk-telephony/blob/main/docs/privacy.md</a:t>
+            </a:r>
+          </a:p>
+        </p:txBody>
+      </p:sp>
+      <p:sp>
+        <p:nvSpPr>
+          <p:cNvPr id="4" name="Slide Number Placeholder 3"/>
+          <p:cNvSpPr>
+            <a:spLocks xmlns:a="http://schemas.openxmlformats.org/drawingml/2006/main" noGrp="1"/>
+          </p:cNvSpPr>
+          <p:nvPr>
+            <p:ph type="sldNum" idx="5"/>
+          </p:nvPr>
+        </p:nvSpPr>
+        <p:spPr/>
+        <p:txBody>
+          <a:bodyPr xmlns:a="http://schemas.openxmlformats.org/drawingml/2006/main"/>
+          <a:lstStyle xmlns:a="http://schemas.openxmlformats.org/drawingml/2006/main"/>
+          <a:p xmlns:a="http://schemas.openxmlformats.org/drawingml/2006/main"/>
+        </p:txBody>
+      </p:sp>
+    </p:spTree>
+  </p:cSld>
+  <p:clrMapOvr>
+    <a:masterClrMapping xmlns:a="http://schemas.openxmlformats.org/drawingml/2006/main"/>
+  </p:clrMapOvr>
+</p:notes>
+</file>
+
+<file path=ppt/notesSlides/notesSlide14.xml><?xml version="1.0" encoding="utf-8"?>
+<p:notes xmlns:p="http://schemas.openxmlformats.org/presentationml/2006/main">
+  <p:cSld>
+    <p:spTree>
+      <p:nvGrpSpPr>
+        <p:cNvPr id="1" name=""/>
+        <p:cNvGrpSpPr/>
+        <p:nvPr/>
+      </p:nvGrpSpPr>
+      <p:grpSpPr>
+        <a:xfrm xmlns:a="http://schemas.openxmlformats.org/drawingml/2006/main"/>
+      </p:grpSpPr>
+      <p:sp>
+        <p:nvSpPr>
+          <p:cNvPr id="2" name="Slide Image Placeholder 1"/>
+          <p:cNvSpPr>
+            <a:spLocks xmlns:a="http://schemas.openxmlformats.org/drawingml/2006/main" noGrp="1"/>
+          </p:cNvSpPr>
+          <p:nvPr>
+            <p:ph type="sldImg" idx="0"/>
+          </p:nvPr>
+        </p:nvSpPr>
+        <p:spPr/>
+      </p:sp>
+      <p:sp>
+        <p:nvSpPr>
+          <p:cNvPr id="3" name="Notes Placeholder 2"/>
+          <p:cNvSpPr>
+            <a:spLocks xmlns:a="http://schemas.openxmlformats.org/drawingml/2006/main" noGrp="1"/>
+          </p:cNvSpPr>
+          <p:nvPr>
+            <p:ph type="body" idx="1"/>
+          </p:nvPr>
+        </p:nvSpPr>
+        <p:spPr/>
+        <p:txBody>
+          <a:bodyPr xmlns:a="http://schemas.openxmlformats.org/drawingml/2006/main"/>
+          <a:lstStyle xmlns:a="http://schemas.openxmlformats.org/drawingml/2006/main"/>
+          <a:p xmlns:a="http://schemas.openxmlformats.org/drawingml/2006/main">
+            <a:r>
+              <a:t>Состояние реального оборудования фиксируется отдельно в локальном журнале приёмки. Слайды не утверждают, что сервер уже установлен в доме или первый звонок завершён. Фактическое количество сохранившихся устройств, PID/HW/MAC, App Load, сетевые адреса и питание требуют инвентаризации. Успешные автоматические тесты подтверждают компоненты и конфигурацию. Физическая приёмка включает голос, HA call control, DTMF и Assist на реальных телефонах. После пилота подключать оставшуюся партию по одному.</a:t>
             </a:r>
           </a:p>
         </p:txBody>
@@ -813,7 +975,7 @@
           <a:lstStyle xmlns:a="http://schemas.openxmlformats.org/drawingml/2006/main"/>
           <a:p xmlns:a="http://schemas.openxmlformats.org/drawingml/2006/main">
             <a:r>
-              <a:t>Проектное решение: одна реплика Asterisk на закреплённом LAN-узле, hostNetwork, постоянный LAN IP. Router DHCP сохраняется существующим. TFTP включается по необходимости. RTP-диапазон является локально выбранным, не универсальным стандартом. Kubernetes: https://kubernetes.io/docs/concepts/workloads/controllers/deployment/</a:t>
+              <a:t>Проектное решение: одна реплика Asterisk на закреплённом LAN-узле, hostNetwork, постоянный LAN IP. Существующий router DHCP сохраняется. TFTP включается по необходимости. HA открывает TCP AMI к Asterisk. Для Assist Asterisk открывает SIP к HA VoIP, голос идёт в обе стороны. Home Assistant может работать на отдельном LAN-узле или через существующий VPN, HTTP Ingress не передаёт эти протоколы. Kubernetes: https://kubernetes.io/docs/concepts/workloads/controllers/deployment/</a:t>
             </a:r>
           </a:p>
           <a:p xmlns:a="http://schemas.openxmlformats.org/drawingml/2006/main">
@@ -823,7 +985,17 @@
           </a:p>
           <a:p xmlns:a="http://schemas.openxmlformats.org/drawingml/2006/main">
             <a:r>
-              <a:t>См. docs/k3s-deployment.md и deployment manifests.</a:t>
+              <a:t>HA: https://github.com/ha-homelab/asterisk-telephony</a:t>
+            </a:r>
+          </a:p>
+          <a:p xmlns:a="http://schemas.openxmlformats.org/drawingml/2006/main">
+            <a:r>
+              <a:t>VoIP: https://www.home-assistant.io/integrations/voip/</a:t>
+            </a:r>
+          </a:p>
+          <a:p xmlns:a="http://schemas.openxmlformats.org/drawingml/2006/main">
+            <a:r>
+              <a:t>См. docs/k3s-deployment.md и docs/home-assistant.md.</a:t>
             </a:r>
           </a:p>
         </p:txBody>
@@ -893,7 +1065,17 @@
           <a:lstStyle xmlns:a="http://schemas.openxmlformats.org/drawingml/2006/main"/>
           <a:p xmlns:a="http://schemas.openxmlformats.org/drawingml/2006/main">
             <a:r>
-              <a:t>Проектная конфигурация портов: SIP TCP и UDP 5060, RTP UDP 10000–10199. Для tftpd-hpa резервируется UDP 69 и диапазон передачи UDP 20000–20031. Разрешить доступ только нужной LAN/VLAN через host firewall: NetworkPolicy не является единственной защитой для hostNetwork. Для SIP/RTP HTTP Ingress не используется. https://docs.asterisk.org/Configuration/Channel-Drivers/SIP/Configuring-res_pjsip/res_pjsip-Configuration-Examples/</a:t>
+              <a:t>Проектные порты на PBX: SIP TCP5060 по умолчанию, UDP5060 opt-in, RTP UDP10000–10199. Для tftpd-hpa UDP69 и UDP20000–20031. AMI TCP5038 только от фактического HA IP/32. HA VoIP слушает SIP UDP5060 либо выбранный порт и динамические RTP/RTCP UDP-порты, доступные только от PBX. Cisco RTP: UDP16384–16482. Firewall должен учитывать обе стороны потока. NetworkPolicy не является единственной защитой hostNetwork. PJSIP: https://docs.asterisk.org/Configuration/Channel-Drivers/SIP/Configuring-res_pjsip/res_pjsip-Configuration-Examples/</a:t>
+            </a:r>
+          </a:p>
+          <a:p xmlns:a="http://schemas.openxmlformats.org/drawingml/2006/main">
+            <a:r>
+              <a:t>VoIP: https://www.home-assistant.io/integrations/voip/</a:t>
+            </a:r>
+          </a:p>
+          <a:p xmlns:a="http://schemas.openxmlformats.org/drawingml/2006/main">
+            <a:r>
+              <a:t>См. docs/home-assistant.md.</a:t>
             </a:r>
           </a:p>
         </p:txBody>
@@ -1198,7 +1380,7 @@
           </a:p>
           <a:p xmlns:a="http://schemas.openxmlformats.org/drawingml/2006/main">
             <a:r>
-              <a:t>Проектный baseline: endpoint/auth/aor на каждый аппарат, уникальный пароль, transport согласован с phone XML. TCP+UDP слушатели поддерживают проверку аппаратов. Кодеки G.711 ulaw/alaw, direct_media=no удерживает RTP через Asterisk. NAT-настройки не добавляют без необходимости в плоской LAN. Стартовый сценарий ограничен внутренними звонками без PSTN/SIP trunk.</a:t>
+              <a:t>Проектный baseline: endpoint/auth/aor на каждый аппарат, уникальный пароль, transport согласован с phone XML. TCP по умолчанию, UDP для телефонов включают явно. Кодеки G.711 ulaw/alaw, direct_media=no удерживает RTP через Asterisk. NAT-настройки не добавляют без необходимости в плоской LAN. Стартовый сценарий ограничен внутренними звонками без PSTN/SIP trunk. Тестовые номера 600 echo, 601 tone, 620 ring group, 630 Assist при включённой HA-интеграции.</a:t>
             </a:r>
           </a:p>
         </p:txBody>
@@ -1268,12 +1450,17 @@
           <a:lstStyle xmlns:a="http://schemas.openxmlformats.org/drawingml/2006/main"/>
           <a:p xmlns:a="http://schemas.openxmlformats.org/drawingml/2006/main">
             <a:r>
-              <a:t>См. README.md, docs/k3s-deployment.md, scripts/ и deploy/. namespace: telephony. Команды: python3 scripts/provision.py --site .local/site.json --inventory .local/phones.json; python3 scripts/verify_firmware.py --directory .local/firmware --manifest .local/firmware-manifest.json; scripts/build-images.sh; scripts/deploy.sh (dry-run по умолчанию), scripts/deploy.sh --apply (явное применение). Здесь этапы, а точные команды находятся в runbook. k3s requirements: https://docs.k3s.io/installation/requirements</a:t>
-            </a:r>
-          </a:p>
-          <a:p xmlns:a="http://schemas.openxmlformats.org/drawingml/2006/main">
-            <a:r>
-              <a:t>Закрепление узла предотвращает незаметную смену LAN IP телефонии. Одна реплика и Recreate предотвращают одновременную попытку занять hostNetwork-порты. Private registry и imagePullSecret при необходимости.</a:t>
+              <a:t>Установка и пакет HA: https://github.com/ha-homelab/asterisk-telephony</a:t>
+            </a:r>
+          </a:p>
+          <a:p xmlns:a="http://schemas.openxmlformats.org/drawingml/2006/main">
+            <a:r>
+              <a:t>Проверенная TECH7Fox Asterisk integration v1.0.5, commit: https://github.com/TECH7Fox/asterisk-hass-integration/tree/65ea9d637a58d6edb3b2bc9e8a6f90de896a9b3e</a:t>
+            </a:r>
+          </a:p>
+          <a:p xmlns:a="http://schemas.openxmlformats.org/drawingml/2006/main">
+            <a:r>
+              <a:t>HA открывает обычное TCP5038 к PBX, без TLS. Разрешён только фактический адрес источника /32 через LAN или VPN. Отдельные секреты .local/ha-ami-secret.json не входят в Git и phone XML. read=call,dtmf; write=system плюс originate только при allow_originate:true. system нужен upstream для discovery, но также разрешает Hangup и другие административные действия, поэтому это не read-only доступ. Один глобальный service asterisk.send_action на HA, без выбора нескольких PBX. DTMF timestamp-state и атрибут Digit; направления Sent/Received относятся к Asterisk. Registered вычисляется из DeviceState, не заменяет pjsip show contacts. Нужны реальные entity IDs и проверка на двух аппаратах.</a:t>
             </a:r>
           </a:p>
         </p:txBody>
@@ -1320,7 +1507,7 @@
           <p:cNvPr id="3" name="Title">
             <a:extLst xmlns:a="http://schemas.openxmlformats.org/drawingml/2006/main">
               <a:ext uri="{FF2B5EF4-FFF2-40B4-BE49-F238E27FC236}">
-                <a16:creationId xmlns:a16="http://schemas.microsoft.com/office/drawing/2014/main" id="{C0E98AFF-DB3F-4D4D-B790-192DDBC700FE}"/>
+                <a16:creationId xmlns:a16="http://schemas.microsoft.com/office/drawing/2014/main" id="{2E379697-7D0F-4023-A01C-D842D170B584}"/>
               </a:ext>
             </a:extLst>
           </p:cNvPr>
@@ -1477,7 +1664,7 @@
           <p:cNvPr id="2" name="Subtitle">
             <a:extLst xmlns:a="http://schemas.openxmlformats.org/drawingml/2006/main">
               <a:ext uri="{FF2B5EF4-FFF2-40B4-BE49-F238E27FC236}">
-                <a16:creationId xmlns:a16="http://schemas.microsoft.com/office/drawing/2014/main" id="{91B1E782-F1D0-4BAC-A2E9-3056B3ABD093}"/>
+                <a16:creationId xmlns:a16="http://schemas.microsoft.com/office/drawing/2014/main" id="{A8B12FDD-ED8C-451D-A326-DE97C9AF2B9B}"/>
               </a:ext>
             </a:extLst>
           </p:cNvPr>
@@ -1651,7 +1838,7 @@
           <p:cNvPr id="2" name="Section title">
             <a:extLst xmlns:a="http://schemas.openxmlformats.org/drawingml/2006/main">
               <a:ext uri="{FF2B5EF4-FFF2-40B4-BE49-F238E27FC236}">
-                <a16:creationId xmlns:a16="http://schemas.microsoft.com/office/drawing/2014/main" id="{2263BE92-CABD-4809-B9D4-C9823A548204}"/>
+                <a16:creationId xmlns:a16="http://schemas.microsoft.com/office/drawing/2014/main" id="{EAB3747B-20E8-4679-8047-DDA907E7F246}"/>
               </a:ext>
             </a:extLst>
           </p:cNvPr>
@@ -1825,7 +2012,7 @@
           <p:cNvPr id="3" name="Title">
             <a:extLst xmlns:a="http://schemas.openxmlformats.org/drawingml/2006/main">
               <a:ext uri="{FF2B5EF4-FFF2-40B4-BE49-F238E27FC236}">
-                <a16:creationId xmlns:a16="http://schemas.microsoft.com/office/drawing/2014/main" id="{0F02A572-3E20-4F7B-ADAD-E7A806E1DF65}"/>
+                <a16:creationId xmlns:a16="http://schemas.microsoft.com/office/drawing/2014/main" id="{E336CC91-0F06-4134-90BD-821818B2279E}"/>
               </a:ext>
             </a:extLst>
           </p:cNvPr>
@@ -1982,7 +2169,7 @@
           <p:cNvPr id="2" name="Body">
             <a:extLst xmlns:a="http://schemas.openxmlformats.org/drawingml/2006/main">
               <a:ext uri="{FF2B5EF4-FFF2-40B4-BE49-F238E27FC236}">
-                <a16:creationId xmlns:a16="http://schemas.microsoft.com/office/drawing/2014/main" id="{5F80CE2B-D69F-4050-8D77-367C10618CBF}"/>
+                <a16:creationId xmlns:a16="http://schemas.microsoft.com/office/drawing/2014/main" id="{1EBF8B9B-585F-425F-9C47-895C0290D03E}"/>
               </a:ext>
             </a:extLst>
           </p:cNvPr>
@@ -2156,7 +2343,7 @@
           <p:cNvPr id="4" name="Title">
             <a:extLst xmlns:a="http://schemas.openxmlformats.org/drawingml/2006/main">
               <a:ext uri="{FF2B5EF4-FFF2-40B4-BE49-F238E27FC236}">
-                <a16:creationId xmlns:a16="http://schemas.microsoft.com/office/drawing/2014/main" id="{E25B386F-348C-4A3A-9399-E7E21BA84A02}"/>
+                <a16:creationId xmlns:a16="http://schemas.microsoft.com/office/drawing/2014/main" id="{CD0F2D11-392E-4446-A037-D00D25E7B923}"/>
               </a:ext>
             </a:extLst>
           </p:cNvPr>
@@ -2313,7 +2500,7 @@
           <p:cNvPr id="2" name="Left column">
             <a:extLst xmlns:a="http://schemas.openxmlformats.org/drawingml/2006/main">
               <a:ext uri="{FF2B5EF4-FFF2-40B4-BE49-F238E27FC236}">
-                <a16:creationId xmlns:a16="http://schemas.microsoft.com/office/drawing/2014/main" id="{6AB0622B-09BC-4B64-8C1F-27046B4CB618}"/>
+                <a16:creationId xmlns:a16="http://schemas.microsoft.com/office/drawing/2014/main" id="{DBB423C3-35DB-4ED7-A7C9-AE50E990AB3E}"/>
               </a:ext>
             </a:extLst>
           </p:cNvPr>
@@ -2470,7 +2657,7 @@
           <p:cNvPr id="3" name="Right column">
             <a:extLst xmlns:a="http://schemas.openxmlformats.org/drawingml/2006/main">
               <a:ext uri="{FF2B5EF4-FFF2-40B4-BE49-F238E27FC236}">
-                <a16:creationId xmlns:a16="http://schemas.microsoft.com/office/drawing/2014/main" id="{1C213094-CD1D-473F-A16E-73D87D43A064}"/>
+                <a16:creationId xmlns:a16="http://schemas.microsoft.com/office/drawing/2014/main" id="{813909B4-B73F-4A29-898F-9DF1654EE742}"/>
               </a:ext>
             </a:extLst>
           </p:cNvPr>
@@ -2644,7 +2831,7 @@
           <p:cNvPr id="3" name="Title">
             <a:extLst xmlns:a="http://schemas.openxmlformats.org/drawingml/2006/main">
               <a:ext uri="{FF2B5EF4-FFF2-40B4-BE49-F238E27FC236}">
-                <a16:creationId xmlns:a16="http://schemas.microsoft.com/office/drawing/2014/main" id="{D14ABBB1-75B0-4B99-90BE-129EB84FCADD}"/>
+                <a16:creationId xmlns:a16="http://schemas.microsoft.com/office/drawing/2014/main" id="{F1E65794-4782-49D6-86D7-F62A5724AB21}"/>
               </a:ext>
             </a:extLst>
           </p:cNvPr>
@@ -2801,7 +2988,7 @@
           <p:cNvPr id="2" name="Left column">
             <a:extLst xmlns:a="http://schemas.openxmlformats.org/drawingml/2006/main">
               <a:ext uri="{FF2B5EF4-FFF2-40B4-BE49-F238E27FC236}">
-                <a16:creationId xmlns:a16="http://schemas.microsoft.com/office/drawing/2014/main" id="{A8B5242A-372D-4C55-B518-259FA209E566}"/>
+                <a16:creationId xmlns:a16="http://schemas.microsoft.com/office/drawing/2014/main" id="{508B1418-DADB-4151-A5B0-CD14A2311013}"/>
               </a:ext>
             </a:extLst>
           </p:cNvPr>
@@ -2996,12 +3183,12 @@
   </p:cSld>
   <p:clrMap bg1="lt1" tx1="dk1" bg2="lt2" tx2="dk2" accent1="accent1" accent2="accent2" accent3="accent3" accent4="accent4" accent5="accent5" accent6="accent6" hlink="hlink" folHlink="folHlink"/>
   <p:sldLayoutIdLst>
-    <p:sldLayoutId xmlns:r="http://schemas.openxmlformats.org/officeDocument/2006/relationships" id="2147483649" r:id="R8d1cda2d0418490a"/>
-    <p:sldLayoutId xmlns:r="http://schemas.openxmlformats.org/officeDocument/2006/relationships" id="2147483650" r:id="Rf97fb939aa0747bd"/>
-    <p:sldLayoutId xmlns:r="http://schemas.openxmlformats.org/officeDocument/2006/relationships" id="2147483651" r:id="Ra518c36cf60046d9"/>
-    <p:sldLayoutId xmlns:r="http://schemas.openxmlformats.org/officeDocument/2006/relationships" id="2147483652" r:id="Ra4731a0f8fb049ff"/>
-    <p:sldLayoutId xmlns:r="http://schemas.openxmlformats.org/officeDocument/2006/relationships" id="2147483653" r:id="R53ff297f803c4e48"/>
-    <p:sldLayoutId xmlns:r="http://schemas.openxmlformats.org/officeDocument/2006/relationships" id="2147483654" r:id="Rfeabee27881e47db"/>
+    <p:sldLayoutId xmlns:r="http://schemas.openxmlformats.org/officeDocument/2006/relationships" id="2147483649" r:id="R174d7d0bbc484b02"/>
+    <p:sldLayoutId xmlns:r="http://schemas.openxmlformats.org/officeDocument/2006/relationships" id="2147483650" r:id="R8e4d7040864d4139"/>
+    <p:sldLayoutId xmlns:r="http://schemas.openxmlformats.org/officeDocument/2006/relationships" id="2147483651" r:id="Re1aa3554483b4c92"/>
+    <p:sldLayoutId xmlns:r="http://schemas.openxmlformats.org/officeDocument/2006/relationships" id="2147483652" r:id="R3e73f35f951e4508"/>
+    <p:sldLayoutId xmlns:r="http://schemas.openxmlformats.org/officeDocument/2006/relationships" id="2147483653" r:id="R81670aadc5ba4719"/>
+    <p:sldLayoutId xmlns:r="http://schemas.openxmlformats.org/officeDocument/2006/relationships" id="2147483654" r:id="R4faacd52c4aa458e"/>
   </p:sldLayoutIdLst>
   <p:txStyles>
     <p:titleStyle>
@@ -3552,7 +3739,7 @@
           <p:cNvPr id="7" name="">
             <a:extLst xmlns:a="http://schemas.openxmlformats.org/drawingml/2006/main">
               <a:ext uri="{FF2B5EF4-FFF2-40B4-BE49-F238E27FC236}">
-                <a16:creationId xmlns:a16="http://schemas.microsoft.com/office/drawing/2014/main" id="{BFD52AFB-C234-418E-A1C1-95C8754DA347}"/>
+                <a16:creationId xmlns:a16="http://schemas.microsoft.com/office/drawing/2014/main" id="{C216DD3D-B939-413F-A656-833F57EF0F5C}"/>
               </a:ext>
             </a:extLst>
           </p:cNvPr>
@@ -3602,7 +3789,7 @@
           <p:cNvPr id="2" name="01">
             <a:extLst xmlns:a="http://schemas.openxmlformats.org/drawingml/2006/main">
               <a:ext uri="{FF2B5EF4-FFF2-40B4-BE49-F238E27FC236}">
-                <a16:creationId xmlns:a16="http://schemas.microsoft.com/office/drawing/2014/main" id="{049BB180-F1FA-4704-A45A-DB631FE94D0F}"/>
+                <a16:creationId xmlns:a16="http://schemas.microsoft.com/office/drawing/2014/main" id="{44014F7A-F72B-403A-8902-93A9BDCABF85}"/>
               </a:ext>
             </a:extLst>
           </p:cNvPr>
@@ -3670,7 +3857,7 @@
           <p:cNvPr id="3" name="Cisco 7945G">
             <a:extLst xmlns:a="http://schemas.openxmlformats.org/drawingml/2006/main">
               <a:ext uri="{FF2B5EF4-FFF2-40B4-BE49-F238E27FC236}">
-                <a16:creationId xmlns:a16="http://schemas.microsoft.com/office/drawing/2014/main" id="{0C76CD09-97D3-454A-B7F1-1F0B10622889}"/>
+                <a16:creationId xmlns:a16="http://schemas.microsoft.com/office/drawing/2014/main" id="{1F8D76F6-CEA0-4B14-8571-0A6B2A970898}"/>
               </a:ext>
             </a:extLst>
           </p:cNvPr>
@@ -3738,7 +3925,7 @@
           <p:cNvPr id="4" name="Домашняя телефония">
             <a:extLst xmlns:a="http://schemas.openxmlformats.org/drawingml/2006/main">
               <a:ext uri="{FF2B5EF4-FFF2-40B4-BE49-F238E27FC236}">
-                <a16:creationId xmlns:a16="http://schemas.microsoft.com/office/drawing/2014/main" id="{0CBDF87C-2937-4F65-9D64-E3D48B7ED146}"/>
+                <a16:creationId xmlns:a16="http://schemas.microsoft.com/office/drawing/2014/main" id="{27C19BF9-8566-4B6B-91DA-9806DB812ADC}"/>
               </a:ext>
             </a:extLst>
           </p:cNvPr>
@@ -3803,10 +3990,10 @@
       </p:sp>
       <p:sp>
         <p:nvSpPr>
-          <p:cNvPr id="5" name="SIP и Asterisk в k3s">
-            <a:extLst xmlns:a="http://schemas.openxmlformats.org/drawingml/2006/main">
-              <a:ext uri="{FF2B5EF4-FFF2-40B4-BE49-F238E27FC236}">
-                <a16:creationId xmlns:a16="http://schemas.microsoft.com/office/drawing/2014/main" id="{D85F72C3-F0EE-4531-833C-6FC41FB477EE}"/>
+          <p:cNvPr id="5" name="Asterisk в k3s + Home Assistant">
+            <a:extLst xmlns:a="http://schemas.openxmlformats.org/drawingml/2006/main">
+              <a:ext uri="{FF2B5EF4-FFF2-40B4-BE49-F238E27FC236}">
+                <a16:creationId xmlns:a16="http://schemas.microsoft.com/office/drawing/2014/main" id="{4FBFEAEB-B44B-4D63-A63E-F725ADDFE160}"/>
               </a:ext>
             </a:extLst>
           </p:cNvPr>
@@ -3864,7 +4051,7 @@
                 <a:ea typeface="Arial"/>
                 <a:cs typeface="Arial"/>
               </a:rPr>
-              <a:t>SIP и Asterisk в k3s</a:t>
+              <a:t>Asterisk в k3s + Home Assistant</a:t>
             </a:r>
           </a:p>
         </p:txBody>
@@ -3874,7 +4061,7 @@
           <p:cNvPr id="6" name="10 аппаратов с цветным экраном">
             <a:extLst xmlns:a="http://schemas.openxmlformats.org/drawingml/2006/main">
               <a:ext uri="{FF2B5EF4-FFF2-40B4-BE49-F238E27FC236}">
-                <a16:creationId xmlns:a16="http://schemas.microsoft.com/office/drawing/2014/main" id="{E6716786-4431-4E49-8B27-DB002B08AB8C}"/>
+                <a16:creationId xmlns:a16="http://schemas.microsoft.com/office/drawing/2014/main" id="{66FF618E-F30D-4679-824F-8C8C6C7BD23C}"/>
               </a:ext>
             </a:extLst>
           </p:cNvPr>
@@ -3940,7 +4127,7 @@
     </p:spTree>
     <p:extLst>
       <p:ext uri="{BB962C8B-B14F-4D97-AF65-F5344CB8AC3E}">
-        <p14:creationId xmlns:p14="http://schemas.microsoft.com/office/powerpoint/2010/main" val="1160816212"/>
+        <p14:creationId xmlns:p14="http://schemas.microsoft.com/office/powerpoint/2010/main" val="682050788"/>
       </p:ext>
     </p:extLst>
   </p:cSld>
@@ -3966,12 +4153,76 @@
       <p:grpSpPr>
         <a:xfrm xmlns:a="http://schemas.openxmlformats.org/drawingml/2006/main"/>
       </p:grpSpPr>
-      <p:sp>
-        <p:nvSpPr>
-          <p:cNvPr id="8" name="Критерии готовности пилота">
-            <a:extLst xmlns:a="http://schemas.openxmlformats.org/drawingml/2006/main">
-              <a:ext uri="{FF2B5EF4-FFF2-40B4-BE49-F238E27FC236}">
-                <a16:creationId xmlns:a16="http://schemas.microsoft.com/office/drawing/2014/main" id="{CAD7212A-3196-46A4-AE23-115D77F920E8}"/>
+      <p:cxnSp>
+        <p:nvCxnSpPr>
+          <p:cNvPr id="8" name="">
+            <a:extLst xmlns:a="http://schemas.openxmlformats.org/drawingml/2006/main">
+              <a:ext uri="{FF2B5EF4-FFF2-40B4-BE49-F238E27FC236}">
+                <a16:creationId xmlns:a16="http://schemas.microsoft.com/office/drawing/2014/main" id="{AF46F9D2-E5ED-4210-86FD-87F4FF1E6272}"/>
+              </a:ext>
+            </a:extLst>
+          </p:cNvPr>
+          <p:cNvCxnSpPr>
+            <a:stCxn xmlns:a="http://schemas.openxmlformats.org/drawingml/2006/main" id="4" idx="3"/>
+            <a:endCxn xmlns:a="http://schemas.openxmlformats.org/drawingml/2006/main" id="5" idx="1"/>
+          </p:cNvCxnSpPr>
+          <p:nvPr/>
+        </p:nvCxnSpPr>
+        <p:spPr>
+          <a:xfrm xmlns:a="http://schemas.openxmlformats.org/drawingml/2006/main">
+            <a:off x="7424738" y="2733675"/>
+            <a:ext cx="1328737" cy="0"/>
+          </a:xfrm>
+          <a:prstGeom xmlns:a="http://schemas.openxmlformats.org/drawingml/2006/main" prst="straightConnector1">
+            <a:avLst/>
+          </a:prstGeom>
+          <a:ln xmlns:a="http://schemas.openxmlformats.org/drawingml/2006/main" w="28575">
+            <a:solidFill>
+              <a:srgbClr val="F7CB64"/>
+            </a:solidFill>
+            <a:headEnd type="triangle" w="sm" len="sm"/>
+            <a:tailEnd type="triangle" w="sm" len="sm"/>
+          </a:ln>
+        </p:spPr>
+      </p:cxnSp>
+      <p:cxnSp>
+        <p:nvCxnSpPr>
+          <p:cNvPr id="6" name="">
+            <a:extLst xmlns:a="http://schemas.openxmlformats.org/drawingml/2006/main">
+              <a:ext uri="{FF2B5EF4-FFF2-40B4-BE49-F238E27FC236}">
+                <a16:creationId xmlns:a16="http://schemas.microsoft.com/office/drawing/2014/main" id="{108905F5-EE1A-4D95-90E9-75EC4B3B23CC}"/>
+              </a:ext>
+            </a:extLst>
+          </p:cNvPr>
+          <p:cNvCxnSpPr>
+            <a:stCxn xmlns:a="http://schemas.openxmlformats.org/drawingml/2006/main" id="3" idx="3"/>
+            <a:endCxn xmlns:a="http://schemas.openxmlformats.org/drawingml/2006/main" id="4" idx="1"/>
+          </p:cNvCxnSpPr>
+          <p:nvPr/>
+        </p:nvCxnSpPr>
+        <p:spPr>
+          <a:xfrm xmlns:a="http://schemas.openxmlformats.org/drawingml/2006/main">
+            <a:off x="3395663" y="2733675"/>
+            <a:ext cx="1328737" cy="0"/>
+          </a:xfrm>
+          <a:prstGeom xmlns:a="http://schemas.openxmlformats.org/drawingml/2006/main" prst="straightConnector1">
+            <a:avLst/>
+          </a:prstGeom>
+          <a:ln xmlns:a="http://schemas.openxmlformats.org/drawingml/2006/main" w="28575">
+            <a:solidFill>
+              <a:srgbClr val="48DDCC"/>
+            </a:solidFill>
+            <a:headEnd type="triangle" w="sm" len="sm"/>
+            <a:tailEnd type="triangle" w="sm" len="sm"/>
+          </a:ln>
+        </p:spPr>
+      </p:cxnSp>
+      <p:sp>
+        <p:nvSpPr>
+          <p:cNvPr id="12" name="630: голосовой помощник в телефоне">
+            <a:extLst xmlns:a="http://schemas.openxmlformats.org/drawingml/2006/main">
+              <a:ext uri="{FF2B5EF4-FFF2-40B4-BE49-F238E27FC236}">
+                <a16:creationId xmlns:a16="http://schemas.microsoft.com/office/drawing/2014/main" id="{232AFEA3-41D4-434C-B221-4AFDDE2D871D}"/>
               </a:ext>
             </a:extLst>
           </p:cNvPr>
@@ -4029,7 +4280,7 @@
                 <a:ea typeface="Arial"/>
                 <a:cs typeface="Arial"/>
               </a:rPr>
-              <a:t>Критерии готовности пилота</a:t>
+              <a:t>630: голосовой помощник в телефоне</a:t>
             </a:r>
           </a:p>
         </p:txBody>
@@ -4039,7 +4290,7 @@
           <p:cNvPr id="2" name="10">
             <a:extLst xmlns:a="http://schemas.openxmlformats.org/drawingml/2006/main">
               <a:ext uri="{FF2B5EF4-FFF2-40B4-BE49-F238E27FC236}">
-                <a16:creationId xmlns:a16="http://schemas.microsoft.com/office/drawing/2014/main" id="{22369810-3725-4DF6-9D09-A9B97E104E7C}"/>
+                <a16:creationId xmlns:a16="http://schemas.microsoft.com/office/drawing/2014/main" id="{062E5262-DCC1-4F0E-84EB-EEAE0E4B2DB5}"/>
               </a:ext>
             </a:extLst>
           </p:cNvPr>
@@ -4104,10 +4355,10 @@
       </p:sp>
       <p:sp>
         <p:nvSpPr>
-          <p:cNvPr id="3" name="Регистрация и два направления вызова">
-            <a:extLst xmlns:a="http://schemas.openxmlformats.org/drawingml/2006/main">
-              <a:ext uri="{FF2B5EF4-FFF2-40B4-BE49-F238E27FC236}">
-                <a16:creationId xmlns:a16="http://schemas.microsoft.com/office/drawing/2014/main" id="{5AC6A9B6-3985-44E8-9FBA-8979A3952E97}"/>
+          <p:cNvPr id="3" name="cisco">
+            <a:extLst xmlns:a="http://schemas.openxmlformats.org/drawingml/2006/main">
+              <a:ext uri="{FF2B5EF4-FFF2-40B4-BE49-F238E27FC236}">
+                <a16:creationId xmlns:a16="http://schemas.microsoft.com/office/drawing/2014/main" id="{DBB3082C-FB87-4CD9-9A4C-161CC35057C4}"/>
               </a:ext>
             </a:extLst>
           </p:cNvPr>
@@ -4118,8 +4369,550 @@
         </p:nvSpPr>
         <p:spPr>
           <a:xfrm xmlns:a="http://schemas.openxmlformats.org/drawingml/2006/main">
-            <a:off x="571500" y="1714500"/>
-            <a:ext cx="10572750" cy="819150"/>
+            <a:off x="995363" y="2133600"/>
+            <a:ext cx="2400300" cy="1200150"/>
+          </a:xfrm>
+          <a:prstGeom xmlns:a="http://schemas.openxmlformats.org/drawingml/2006/main" prst="roundRect">
+            <a:avLst>
+              <a:gd name="adj" fmla="val 7937"/>
+            </a:avLst>
+          </a:prstGeom>
+          <a:solidFill xmlns:a="http://schemas.openxmlformats.org/drawingml/2006/main">
+            <a:srgbClr val="172841"/>
+          </a:solidFill>
+          <a:ln xmlns:a="http://schemas.openxmlformats.org/drawingml/2006/main" w="19050">
+            <a:solidFill>
+              <a:srgbClr val="48DDCC"/>
+            </a:solidFill>
+          </a:ln>
+        </p:spPr>
+        <p:txBody>
+          <a:bodyPr xmlns:a="http://schemas.openxmlformats.org/drawingml/2006/main" lIns="76200" tIns="76200" rIns="76200" bIns="76200" anchor="ctr">
+            <a:noAutofit/>
+          </a:bodyPr>
+          <a:lstStyle xmlns:a="http://schemas.openxmlformats.org/drawingml/2006/main">
+            <a:defPPr algn="ctr">
+              <a:defRPr sz="1620" b="1">
+                <a:solidFill>
+                  <a:srgbClr val="F5F7FB"/>
+                </a:solidFill>
+                <a:latin typeface="Arial"/>
+                <a:ea typeface="Arial"/>
+                <a:cs typeface="Arial"/>
+              </a:defRPr>
+            </a:defPPr>
+          </a:lstStyle>
+          <a:p xmlns:a="http://schemas.openxmlformats.org/drawingml/2006/main">
+            <a:pPr algn="ctr">
+              <a:defRPr sz="1620" b="1">
+                <a:solidFill>
+                  <a:srgbClr val="F5F7FB"/>
+                </a:solidFill>
+                <a:latin typeface="Arial"/>
+                <a:ea typeface="Arial"/>
+                <a:cs typeface="Arial"/>
+              </a:defRPr>
+            </a:pPr>
+            <a:r>
+              <a:rPr sz="1620" b="1">
+                <a:solidFill>
+                  <a:srgbClr val="F5F7FB"/>
+                </a:solidFill>
+                <a:latin typeface="Arial"/>
+                <a:ea typeface="Arial"/>
+                <a:cs typeface="Arial"/>
+              </a:rPr>
+              <a:t>Cisco 7945G</a:t>
+            </a:r>
+          </a:p>
+          <a:p xmlns:a="http://schemas.openxmlformats.org/drawingml/2006/main">
+            <a:pPr algn="ctr">
+              <a:defRPr sz="1620" b="1">
+                <a:solidFill>
+                  <a:srgbClr val="F5F7FB"/>
+                </a:solidFill>
+                <a:latin typeface="Arial"/>
+                <a:ea typeface="Arial"/>
+                <a:cs typeface="Arial"/>
+              </a:defRPr>
+            </a:pPr>
+            <a:r>
+              <a:rPr sz="1620" b="1">
+                <a:solidFill>
+                  <a:srgbClr val="F5F7FB"/>
+                </a:solidFill>
+                <a:latin typeface="Arial"/>
+                <a:ea typeface="Arial"/>
+                <a:cs typeface="Arial"/>
+              </a:rPr>
+              <a:t>номер 201</a:t>
+            </a:r>
+          </a:p>
+          <a:p xmlns:a="http://schemas.openxmlformats.org/drawingml/2006/main">
+            <a:pPr algn="ctr">
+              <a:defRPr sz="1620" b="1">
+                <a:solidFill>
+                  <a:srgbClr val="F5F7FB"/>
+                </a:solidFill>
+                <a:latin typeface="Arial"/>
+                <a:ea typeface="Arial"/>
+                <a:cs typeface="Arial"/>
+              </a:defRPr>
+            </a:pPr>
+            <a:r>
+              <a:rPr sz="1620" b="1">
+                <a:solidFill>
+                  <a:srgbClr val="F5F7FB"/>
+                </a:solidFill>
+                <a:latin typeface="Arial"/>
+                <a:ea typeface="Arial"/>
+                <a:cs typeface="Arial"/>
+              </a:rPr>
+              <a:t>G.711</a:t>
+            </a:r>
+          </a:p>
+        </p:txBody>
+      </p:sp>
+      <p:sp>
+        <p:nvSpPr>
+          <p:cNvPr id="4" name="codec">
+            <a:extLst xmlns:a="http://schemas.openxmlformats.org/drawingml/2006/main">
+              <a:ext uri="{FF2B5EF4-FFF2-40B4-BE49-F238E27FC236}">
+                <a16:creationId xmlns:a16="http://schemas.microsoft.com/office/drawing/2014/main" id="{13645114-DBE0-4B02-A87E-CFD832292A95}"/>
+              </a:ext>
+            </a:extLst>
+          </p:cNvPr>
+          <p:cNvSpPr>
+            <a:spLocks xmlns:a="http://schemas.openxmlformats.org/drawingml/2006/main" noGrp="1"/>
+          </p:cNvSpPr>
+          <p:nvPr/>
+        </p:nvSpPr>
+        <p:spPr>
+          <a:xfrm xmlns:a="http://schemas.openxmlformats.org/drawingml/2006/main">
+            <a:off x="4724400" y="2133600"/>
+            <a:ext cx="2700338" cy="1200150"/>
+          </a:xfrm>
+          <a:prstGeom xmlns:a="http://schemas.openxmlformats.org/drawingml/2006/main" prst="roundRect">
+            <a:avLst>
+              <a:gd name="adj" fmla="val 7937"/>
+            </a:avLst>
+          </a:prstGeom>
+          <a:solidFill xmlns:a="http://schemas.openxmlformats.org/drawingml/2006/main">
+            <a:srgbClr val="172841"/>
+          </a:solidFill>
+          <a:ln xmlns:a="http://schemas.openxmlformats.org/drawingml/2006/main" w="19050">
+            <a:solidFill>
+              <a:srgbClr val="FF836D"/>
+            </a:solidFill>
+          </a:ln>
+        </p:spPr>
+        <p:txBody>
+          <a:bodyPr xmlns:a="http://schemas.openxmlformats.org/drawingml/2006/main" lIns="76200" tIns="76200" rIns="76200" bIns="76200" anchor="ctr">
+            <a:noAutofit/>
+          </a:bodyPr>
+          <a:lstStyle xmlns:a="http://schemas.openxmlformats.org/drawingml/2006/main">
+            <a:defPPr algn="ctr">
+              <a:defRPr sz="1620" b="1">
+                <a:solidFill>
+                  <a:srgbClr val="F5F7FB"/>
+                </a:solidFill>
+                <a:latin typeface="Arial"/>
+                <a:ea typeface="Arial"/>
+                <a:cs typeface="Arial"/>
+              </a:defRPr>
+            </a:defPPr>
+          </a:lstStyle>
+          <a:p xmlns:a="http://schemas.openxmlformats.org/drawingml/2006/main">
+            <a:pPr algn="ctr">
+              <a:defRPr sz="1620" b="1">
+                <a:solidFill>
+                  <a:srgbClr val="F5F7FB"/>
+                </a:solidFill>
+                <a:latin typeface="Arial"/>
+                <a:ea typeface="Arial"/>
+                <a:cs typeface="Arial"/>
+              </a:defRPr>
+            </a:pPr>
+            <a:r>
+              <a:rPr sz="1620" b="1">
+                <a:solidFill>
+                  <a:srgbClr val="F5F7FB"/>
+                </a:solidFill>
+                <a:latin typeface="Arial"/>
+                <a:ea typeface="Arial"/>
+                <a:cs typeface="Arial"/>
+              </a:rPr>
+              <a:t>Asterisk</a:t>
+            </a:r>
+          </a:p>
+          <a:p xmlns:a="http://schemas.openxmlformats.org/drawingml/2006/main">
+            <a:pPr algn="ctr">
+              <a:defRPr sz="1620" b="1">
+                <a:solidFill>
+                  <a:srgbClr val="F5F7FB"/>
+                </a:solidFill>
+                <a:latin typeface="Arial"/>
+                <a:ea typeface="Arial"/>
+                <a:cs typeface="Arial"/>
+              </a:defRPr>
+            </a:pPr>
+            <a:r>
+              <a:rPr sz="1620" b="1">
+                <a:solidFill>
+                  <a:srgbClr val="F5F7FB"/>
+                </a:solidFill>
+                <a:latin typeface="Arial"/>
+                <a:ea typeface="Arial"/>
+                <a:cs typeface="Arial"/>
+              </a:rPr>
+              <a:t>G.711 ↔ Opus</a:t>
+            </a:r>
+          </a:p>
+          <a:p xmlns:a="http://schemas.openxmlformats.org/drawingml/2006/main">
+            <a:pPr algn="ctr">
+              <a:defRPr sz="1620" b="1">
+                <a:solidFill>
+                  <a:srgbClr val="F5F7FB"/>
+                </a:solidFill>
+                <a:latin typeface="Arial"/>
+                <a:ea typeface="Arial"/>
+                <a:cs typeface="Arial"/>
+              </a:defRPr>
+            </a:pPr>
+            <a:r>
+              <a:rPr sz="1620" b="1">
+                <a:solidFill>
+                  <a:srgbClr val="F5F7FB"/>
+                </a:solidFill>
+                <a:latin typeface="Arial"/>
+                <a:ea typeface="Arial"/>
+                <a:cs typeface="Arial"/>
+              </a:rPr>
+              <a:t>номер 630</a:t>
+            </a:r>
+          </a:p>
+        </p:txBody>
+      </p:sp>
+      <p:sp>
+        <p:nvSpPr>
+          <p:cNvPr id="5" name="assist">
+            <a:extLst xmlns:a="http://schemas.openxmlformats.org/drawingml/2006/main">
+              <a:ext uri="{FF2B5EF4-FFF2-40B4-BE49-F238E27FC236}">
+                <a16:creationId xmlns:a16="http://schemas.microsoft.com/office/drawing/2014/main" id="{A22000A4-C9D1-45A2-872D-50AE05436051}"/>
+              </a:ext>
+            </a:extLst>
+          </p:cNvPr>
+          <p:cNvSpPr>
+            <a:spLocks xmlns:a="http://schemas.openxmlformats.org/drawingml/2006/main" noGrp="1"/>
+          </p:cNvSpPr>
+          <p:nvPr/>
+        </p:nvSpPr>
+        <p:spPr>
+          <a:xfrm xmlns:a="http://schemas.openxmlformats.org/drawingml/2006/main">
+            <a:off x="8753475" y="2133600"/>
+            <a:ext cx="2443163" cy="1200150"/>
+          </a:xfrm>
+          <a:prstGeom xmlns:a="http://schemas.openxmlformats.org/drawingml/2006/main" prst="roundRect">
+            <a:avLst>
+              <a:gd name="adj" fmla="val 7937"/>
+            </a:avLst>
+          </a:prstGeom>
+          <a:solidFill xmlns:a="http://schemas.openxmlformats.org/drawingml/2006/main">
+            <a:srgbClr val="172841"/>
+          </a:solidFill>
+          <a:ln xmlns:a="http://schemas.openxmlformats.org/drawingml/2006/main" w="19050">
+            <a:solidFill>
+              <a:srgbClr val="F7CB64"/>
+            </a:solidFill>
+          </a:ln>
+        </p:spPr>
+        <p:txBody>
+          <a:bodyPr xmlns:a="http://schemas.openxmlformats.org/drawingml/2006/main" lIns="76200" tIns="76200" rIns="76200" bIns="76200" anchor="ctr">
+            <a:noAutofit/>
+          </a:bodyPr>
+          <a:lstStyle xmlns:a="http://schemas.openxmlformats.org/drawingml/2006/main">
+            <a:defPPr algn="ctr">
+              <a:defRPr sz="1620" b="1">
+                <a:solidFill>
+                  <a:srgbClr val="F5F7FB"/>
+                </a:solidFill>
+                <a:latin typeface="Arial"/>
+                <a:ea typeface="Arial"/>
+                <a:cs typeface="Arial"/>
+              </a:defRPr>
+            </a:defPPr>
+          </a:lstStyle>
+          <a:p xmlns:a="http://schemas.openxmlformats.org/drawingml/2006/main">
+            <a:pPr algn="ctr">
+              <a:defRPr sz="1620" b="1">
+                <a:solidFill>
+                  <a:srgbClr val="F5F7FB"/>
+                </a:solidFill>
+                <a:latin typeface="Arial"/>
+                <a:ea typeface="Arial"/>
+                <a:cs typeface="Arial"/>
+              </a:defRPr>
+            </a:pPr>
+            <a:r>
+              <a:rPr sz="1620" b="1">
+                <a:solidFill>
+                  <a:srgbClr val="F5F7FB"/>
+                </a:solidFill>
+                <a:latin typeface="Arial"/>
+                <a:ea typeface="Arial"/>
+                <a:cs typeface="Arial"/>
+              </a:rPr>
+              <a:t>Home Assistant</a:t>
+            </a:r>
+          </a:p>
+          <a:p xmlns:a="http://schemas.openxmlformats.org/drawingml/2006/main">
+            <a:pPr algn="ctr">
+              <a:defRPr sz="1620" b="1">
+                <a:solidFill>
+                  <a:srgbClr val="F5F7FB"/>
+                </a:solidFill>
+                <a:latin typeface="Arial"/>
+                <a:ea typeface="Arial"/>
+                <a:cs typeface="Arial"/>
+              </a:defRPr>
+            </a:pPr>
+            <a:r>
+              <a:rPr sz="1620" b="1">
+                <a:solidFill>
+                  <a:srgbClr val="F5F7FB"/>
+                </a:solidFill>
+                <a:latin typeface="Arial"/>
+                <a:ea typeface="Arial"/>
+                <a:cs typeface="Arial"/>
+              </a:rPr>
+              <a:t>VoIP / Assist</a:t>
+            </a:r>
+          </a:p>
+          <a:p xmlns:a="http://schemas.openxmlformats.org/drawingml/2006/main">
+            <a:pPr algn="ctr">
+              <a:defRPr sz="1620" b="1">
+                <a:solidFill>
+                  <a:srgbClr val="F5F7FB"/>
+                </a:solidFill>
+                <a:latin typeface="Arial"/>
+                <a:ea typeface="Arial"/>
+                <a:cs typeface="Arial"/>
+              </a:defRPr>
+            </a:pPr>
+            <a:r>
+              <a:rPr sz="1620" b="1">
+                <a:solidFill>
+                  <a:srgbClr val="F5F7FB"/>
+                </a:solidFill>
+                <a:latin typeface="Arial"/>
+                <a:ea typeface="Arial"/>
+                <a:cs typeface="Arial"/>
+              </a:rPr>
+              <a:t>Opus</a:t>
+            </a:r>
+          </a:p>
+        </p:txBody>
+      </p:sp>
+      <p:sp>
+        <p:nvSpPr>
+          <p:cNvPr id="7" name="SIP TCP&#10;RTP">
+            <a:extLst xmlns:a="http://schemas.openxmlformats.org/drawingml/2006/main">
+              <a:ext uri="{FF2B5EF4-FFF2-40B4-BE49-F238E27FC236}">
+                <a16:creationId xmlns:a16="http://schemas.microsoft.com/office/drawing/2014/main" id="{2E1A6438-4A64-46ED-AF4F-7F00E623D867}"/>
+              </a:ext>
+            </a:extLst>
+          </p:cNvPr>
+          <p:cNvSpPr>
+            <a:spLocks xmlns:a="http://schemas.openxmlformats.org/drawingml/2006/main" noGrp="1"/>
+          </p:cNvSpPr>
+          <p:nvPr/>
+        </p:nvSpPr>
+        <p:spPr>
+          <a:xfrm xmlns:a="http://schemas.openxmlformats.org/drawingml/2006/main">
+            <a:off x="3150870" y="1666875"/>
+            <a:ext cx="1809750" cy="571500"/>
+          </a:xfrm>
+          <a:prstGeom xmlns:a="http://schemas.openxmlformats.org/drawingml/2006/main" prst="rect">
+            <a:avLst/>
+          </a:prstGeom>
+          <a:noFill xmlns:a="http://schemas.openxmlformats.org/drawingml/2006/main"/>
+          <a:ln xmlns:a="http://schemas.openxmlformats.org/drawingml/2006/main" w="0">
+            <a:noFill/>
+          </a:ln>
+        </p:spPr>
+        <p:txBody>
+          <a:bodyPr xmlns:a="http://schemas.openxmlformats.org/drawingml/2006/main" wrap="square" lIns="0" tIns="0" rIns="0" bIns="0" anchor="t">
+            <a:noAutofit/>
+          </a:bodyPr>
+          <a:lstStyle xmlns:a="http://schemas.openxmlformats.org/drawingml/2006/main">
+            <a:defPPr algn="ctr">
+              <a:defRPr sz="1350" b="0">
+                <a:solidFill>
+                  <a:srgbClr val="48DDCC"/>
+                </a:solidFill>
+                <a:latin typeface="Arial"/>
+                <a:ea typeface="Arial"/>
+                <a:cs typeface="Arial"/>
+              </a:defRPr>
+            </a:defPPr>
+          </a:lstStyle>
+          <a:p xmlns:a="http://schemas.openxmlformats.org/drawingml/2006/main">
+            <a:pPr algn="ctr">
+              <a:defRPr sz="1350" b="0">
+                <a:solidFill>
+                  <a:srgbClr val="48DDCC"/>
+                </a:solidFill>
+                <a:latin typeface="Arial"/>
+                <a:ea typeface="Arial"/>
+                <a:cs typeface="Arial"/>
+              </a:defRPr>
+            </a:pPr>
+            <a:r>
+              <a:rPr sz="1350" b="0">
+                <a:solidFill>
+                  <a:srgbClr val="48DDCC"/>
+                </a:solidFill>
+                <a:latin typeface="Arial"/>
+                <a:ea typeface="Arial"/>
+                <a:cs typeface="Arial"/>
+              </a:rPr>
+              <a:t>SIP TCP</a:t>
+            </a:r>
+          </a:p>
+          <a:p xmlns:a="http://schemas.openxmlformats.org/drawingml/2006/main">
+            <a:pPr algn="ctr">
+              <a:defRPr sz="1350" b="0">
+                <a:solidFill>
+                  <a:srgbClr val="48DDCC"/>
+                </a:solidFill>
+                <a:latin typeface="Arial"/>
+                <a:ea typeface="Arial"/>
+                <a:cs typeface="Arial"/>
+              </a:defRPr>
+            </a:pPr>
+            <a:r>
+              <a:rPr sz="1350" b="0">
+                <a:solidFill>
+                  <a:srgbClr val="48DDCC"/>
+                </a:solidFill>
+                <a:latin typeface="Arial"/>
+                <a:ea typeface="Arial"/>
+                <a:cs typeface="Arial"/>
+              </a:rPr>
+              <a:t>RTP</a:t>
+            </a:r>
+          </a:p>
+        </p:txBody>
+      </p:sp>
+      <p:sp>
+        <p:nvSpPr>
+          <p:cNvPr id="9" name="SIP UDP&#10;RTP">
+            <a:extLst xmlns:a="http://schemas.openxmlformats.org/drawingml/2006/main">
+              <a:ext uri="{FF2B5EF4-FFF2-40B4-BE49-F238E27FC236}">
+                <a16:creationId xmlns:a16="http://schemas.microsoft.com/office/drawing/2014/main" id="{3FD09714-1CFC-4A9F-B4C4-04A6729360F5}"/>
+              </a:ext>
+            </a:extLst>
+          </p:cNvPr>
+          <p:cNvSpPr>
+            <a:spLocks xmlns:a="http://schemas.openxmlformats.org/drawingml/2006/main" noGrp="1"/>
+          </p:cNvSpPr>
+          <p:nvPr/>
+        </p:nvSpPr>
+        <p:spPr>
+          <a:xfrm xmlns:a="http://schemas.openxmlformats.org/drawingml/2006/main">
+            <a:off x="7188518" y="1666875"/>
+            <a:ext cx="1809750" cy="571500"/>
+          </a:xfrm>
+          <a:prstGeom xmlns:a="http://schemas.openxmlformats.org/drawingml/2006/main" prst="rect">
+            <a:avLst/>
+          </a:prstGeom>
+          <a:noFill xmlns:a="http://schemas.openxmlformats.org/drawingml/2006/main"/>
+          <a:ln xmlns:a="http://schemas.openxmlformats.org/drawingml/2006/main" w="0">
+            <a:noFill/>
+          </a:ln>
+        </p:spPr>
+        <p:txBody>
+          <a:bodyPr xmlns:a="http://schemas.openxmlformats.org/drawingml/2006/main" wrap="square" lIns="0" tIns="0" rIns="0" bIns="0" anchor="t">
+            <a:noAutofit/>
+          </a:bodyPr>
+          <a:lstStyle xmlns:a="http://schemas.openxmlformats.org/drawingml/2006/main">
+            <a:defPPr algn="ctr">
+              <a:defRPr sz="1350" b="0">
+                <a:solidFill>
+                  <a:srgbClr val="F7CB64"/>
+                </a:solidFill>
+                <a:latin typeface="Arial"/>
+                <a:ea typeface="Arial"/>
+                <a:cs typeface="Arial"/>
+              </a:defRPr>
+            </a:defPPr>
+          </a:lstStyle>
+          <a:p xmlns:a="http://schemas.openxmlformats.org/drawingml/2006/main">
+            <a:pPr algn="ctr">
+              <a:defRPr sz="1350" b="0">
+                <a:solidFill>
+                  <a:srgbClr val="F7CB64"/>
+                </a:solidFill>
+                <a:latin typeface="Arial"/>
+                <a:ea typeface="Arial"/>
+                <a:cs typeface="Arial"/>
+              </a:defRPr>
+            </a:pPr>
+            <a:r>
+              <a:rPr sz="1350" b="0">
+                <a:solidFill>
+                  <a:srgbClr val="F7CB64"/>
+                </a:solidFill>
+                <a:latin typeface="Arial"/>
+                <a:ea typeface="Arial"/>
+                <a:cs typeface="Arial"/>
+              </a:rPr>
+              <a:t>SIP UDP</a:t>
+            </a:r>
+          </a:p>
+          <a:p xmlns:a="http://schemas.openxmlformats.org/drawingml/2006/main">
+            <a:pPr algn="ctr">
+              <a:defRPr sz="1350" b="0">
+                <a:solidFill>
+                  <a:srgbClr val="F7CB64"/>
+                </a:solidFill>
+                <a:latin typeface="Arial"/>
+                <a:ea typeface="Arial"/>
+                <a:cs typeface="Arial"/>
+              </a:defRPr>
+            </a:pPr>
+            <a:r>
+              <a:rPr sz="1350" b="0">
+                <a:solidFill>
+                  <a:srgbClr val="F7CB64"/>
+                </a:solidFill>
+                <a:latin typeface="Arial"/>
+                <a:ea typeface="Arial"/>
+                <a:cs typeface="Arial"/>
+              </a:rPr>
+              <a:t>RTP</a:t>
+            </a:r>
+          </a:p>
+        </p:txBody>
+      </p:sp>
+      <p:sp>
+        <p:nvSpPr>
+          <p:cNvPr id="10" name="Первый вызов: Allow calls и выбор pipeline в HA.&#10;Затем проверка р">
+            <a:extLst xmlns:a="http://schemas.openxmlformats.org/drawingml/2006/main">
+              <a:ext uri="{FF2B5EF4-FFF2-40B4-BE49-F238E27FC236}">
+                <a16:creationId xmlns:a16="http://schemas.microsoft.com/office/drawing/2014/main" id="{58536C40-BE11-41AB-863A-75EC7FDFC3FF}"/>
+              </a:ext>
+            </a:extLst>
+          </p:cNvPr>
+          <p:cNvSpPr>
+            <a:spLocks xmlns:a="http://schemas.openxmlformats.org/drawingml/2006/main" noGrp="1"/>
+          </p:cNvSpPr>
+          <p:nvPr/>
+        </p:nvSpPr>
+        <p:spPr>
+          <a:xfrm xmlns:a="http://schemas.openxmlformats.org/drawingml/2006/main">
+            <a:off x="995363" y="4062413"/>
+            <a:ext cx="10201275" cy="728663"/>
           </a:xfrm>
           <a:prstGeom xmlns:a="http://schemas.openxmlformats.org/drawingml/2006/main" prst="rect">
             <a:avLst/>
@@ -4135,9 +4928,9 @@
           </a:bodyPr>
           <a:lstStyle xmlns:a="http://schemas.openxmlformats.org/drawingml/2006/main">
             <a:defPPr algn="l">
-              <a:defRPr sz="2550" b="1">
-                <a:solidFill>
-                  <a:srgbClr val="48DDCC"/>
+              <a:defRPr sz="1890" b="0">
+                <a:solidFill>
+                  <a:srgbClr val="F5F7FB"/>
                 </a:solidFill>
                 <a:latin typeface="Arial"/>
                 <a:ea typeface="Arial"/>
@@ -4147,285 +4940,58 @@
           </a:lstStyle>
           <a:p xmlns:a="http://schemas.openxmlformats.org/drawingml/2006/main">
             <a:pPr algn="l">
-              <a:defRPr sz="2550" b="1">
-                <a:solidFill>
-                  <a:srgbClr val="48DDCC"/>
-                </a:solidFill>
-                <a:latin typeface="Arial"/>
-                <a:ea typeface="Arial"/>
-                <a:cs typeface="Arial"/>
-              </a:defRPr>
-            </a:pPr>
-            <a:r>
-              <a:rPr sz="2550" b="1">
-                <a:solidFill>
-                  <a:srgbClr val="48DDCC"/>
-                </a:solidFill>
-                <a:latin typeface="Arial"/>
-                <a:ea typeface="Arial"/>
-                <a:cs typeface="Arial"/>
-              </a:rPr>
-              <a:t>Регистрация и два направления вызова</a:t>
-            </a:r>
-          </a:p>
-        </p:txBody>
-      </p:sp>
-      <p:sp>
-        <p:nvSpPr>
-          <p:cNvPr id="4" name="201 вызывает 202, затем 202 вызывает 201.&#10;В каждом вызове слышны ">
-            <a:extLst xmlns:a="http://schemas.openxmlformats.org/drawingml/2006/main">
-              <a:ext uri="{FF2B5EF4-FFF2-40B4-BE49-F238E27FC236}">
-                <a16:creationId xmlns:a16="http://schemas.microsoft.com/office/drawing/2014/main" id="{8FF113FF-C621-4794-A809-25CF7CFFC23D}"/>
-              </a:ext>
-            </a:extLst>
-          </p:cNvPr>
-          <p:cNvSpPr>
-            <a:spLocks xmlns:a="http://schemas.openxmlformats.org/drawingml/2006/main" noGrp="1"/>
-          </p:cNvSpPr>
-          <p:nvPr/>
-        </p:nvSpPr>
-        <p:spPr>
-          <a:xfrm xmlns:a="http://schemas.openxmlformats.org/drawingml/2006/main">
-            <a:off x="571500" y="2333625"/>
-            <a:ext cx="10572750" cy="952500"/>
-          </a:xfrm>
-          <a:prstGeom xmlns:a="http://schemas.openxmlformats.org/drawingml/2006/main" prst="rect">
-            <a:avLst/>
-          </a:prstGeom>
-          <a:noFill xmlns:a="http://schemas.openxmlformats.org/drawingml/2006/main"/>
-          <a:ln xmlns:a="http://schemas.openxmlformats.org/drawingml/2006/main" w="0">
-            <a:noFill/>
-          </a:ln>
-        </p:spPr>
-        <p:txBody>
-          <a:bodyPr xmlns:a="http://schemas.openxmlformats.org/drawingml/2006/main" wrap="square" lIns="0" tIns="0" rIns="0" bIns="0" anchor="t">
-            <a:noAutofit/>
-          </a:bodyPr>
-          <a:lstStyle xmlns:a="http://schemas.openxmlformats.org/drawingml/2006/main">
-            <a:defPPr algn="l">
-              <a:defRPr sz="2175" b="0">
-                <a:solidFill>
-                  <a:srgbClr val="F5F7FB"/>
-                </a:solidFill>
-                <a:latin typeface="Arial"/>
-                <a:ea typeface="Arial"/>
-                <a:cs typeface="Arial"/>
-              </a:defRPr>
-            </a:defPPr>
-          </a:lstStyle>
+              <a:defRPr sz="1890" b="0">
+                <a:solidFill>
+                  <a:srgbClr val="F5F7FB"/>
+                </a:solidFill>
+                <a:latin typeface="Arial"/>
+                <a:ea typeface="Arial"/>
+                <a:cs typeface="Arial"/>
+              </a:defRPr>
+            </a:pPr>
+            <a:r>
+              <a:rPr sz="1890" b="0">
+                <a:solidFill>
+                  <a:srgbClr val="F5F7FB"/>
+                </a:solidFill>
+                <a:latin typeface="Arial"/>
+                <a:ea typeface="Arial"/>
+                <a:cs typeface="Arial"/>
+              </a:rPr>
+              <a:t>Первый вызов: Allow calls и выбор pipeline в HA.</a:t>
+            </a:r>
+          </a:p>
           <a:p xmlns:a="http://schemas.openxmlformats.org/drawingml/2006/main">
             <a:pPr algn="l">
-              <a:defRPr sz="2175" b="0">
-                <a:solidFill>
-                  <a:srgbClr val="F5F7FB"/>
-                </a:solidFill>
-                <a:latin typeface="Arial"/>
-                <a:ea typeface="Arial"/>
-                <a:cs typeface="Arial"/>
-              </a:defRPr>
-            </a:pPr>
-            <a:r>
-              <a:rPr sz="2175" b="0">
-                <a:solidFill>
-                  <a:srgbClr val="F5F7FB"/>
-                </a:solidFill>
-                <a:latin typeface="Arial"/>
-                <a:ea typeface="Arial"/>
-                <a:cs typeface="Arial"/>
-              </a:rPr>
-              <a:t>201 вызывает 202, затем 202 вызывает 201.</a:t>
-            </a:r>
-          </a:p>
-          <a:p xmlns:a="http://schemas.openxmlformats.org/drawingml/2006/main">
-            <a:pPr algn="l">
-              <a:defRPr sz="2175" b="0">
-                <a:solidFill>
-                  <a:srgbClr val="F5F7FB"/>
-                </a:solidFill>
-                <a:latin typeface="Arial"/>
-                <a:ea typeface="Arial"/>
-                <a:cs typeface="Arial"/>
-              </a:defRPr>
-            </a:pPr>
-            <a:r>
-              <a:rPr sz="2175" b="0">
-                <a:solidFill>
-                  <a:srgbClr val="F5F7FB"/>
-                </a:solidFill>
-                <a:latin typeface="Arial"/>
-                <a:ea typeface="Arial"/>
-                <a:cs typeface="Arial"/>
-              </a:rPr>
-              <a:t>В каждом вызове слышны оба участника.</a:t>
-            </a:r>
-          </a:p>
-        </p:txBody>
-      </p:sp>
-      <p:sp>
-        <p:nvSpPr>
-          <p:cNvPr id="5" name="Поведение после изменений">
-            <a:extLst xmlns:a="http://schemas.openxmlformats.org/drawingml/2006/main">
-              <a:ext uri="{FF2B5EF4-FFF2-40B4-BE49-F238E27FC236}">
-                <a16:creationId xmlns:a16="http://schemas.microsoft.com/office/drawing/2014/main" id="{D65C2C7A-15CE-4580-A42A-76C21C89299E}"/>
-              </a:ext>
-            </a:extLst>
-          </p:cNvPr>
-          <p:cNvSpPr>
-            <a:spLocks xmlns:a="http://schemas.openxmlformats.org/drawingml/2006/main" noGrp="1"/>
-          </p:cNvSpPr>
-          <p:nvPr/>
-        </p:nvSpPr>
-        <p:spPr>
-          <a:xfrm xmlns:a="http://schemas.openxmlformats.org/drawingml/2006/main">
-            <a:off x="571500" y="3810000"/>
-            <a:ext cx="10572750" cy="819150"/>
-          </a:xfrm>
-          <a:prstGeom xmlns:a="http://schemas.openxmlformats.org/drawingml/2006/main" prst="rect">
-            <a:avLst/>
-          </a:prstGeom>
-          <a:noFill xmlns:a="http://schemas.openxmlformats.org/drawingml/2006/main"/>
-          <a:ln xmlns:a="http://schemas.openxmlformats.org/drawingml/2006/main" w="0">
-            <a:noFill/>
-          </a:ln>
-        </p:spPr>
-        <p:txBody>
-          <a:bodyPr xmlns:a="http://schemas.openxmlformats.org/drawingml/2006/main" wrap="square" lIns="0" tIns="0" rIns="0" bIns="0" anchor="t">
-            <a:noAutofit/>
-          </a:bodyPr>
-          <a:lstStyle xmlns:a="http://schemas.openxmlformats.org/drawingml/2006/main">
-            <a:defPPr algn="l">
-              <a:defRPr sz="2550" b="1">
-                <a:solidFill>
-                  <a:srgbClr val="F7CB64"/>
-                </a:solidFill>
-                <a:latin typeface="Arial"/>
-                <a:ea typeface="Arial"/>
-                <a:cs typeface="Arial"/>
-              </a:defRPr>
-            </a:defPPr>
-          </a:lstStyle>
-          <a:p xmlns:a="http://schemas.openxmlformats.org/drawingml/2006/main">
-            <a:pPr algn="l">
-              <a:defRPr sz="2550" b="1">
-                <a:solidFill>
-                  <a:srgbClr val="F7CB64"/>
-                </a:solidFill>
-                <a:latin typeface="Arial"/>
-                <a:ea typeface="Arial"/>
-                <a:cs typeface="Arial"/>
-              </a:defRPr>
-            </a:pPr>
-            <a:r>
-              <a:rPr sz="2550" b="1">
-                <a:solidFill>
-                  <a:srgbClr val="F7CB64"/>
-                </a:solidFill>
-                <a:latin typeface="Arial"/>
-                <a:ea typeface="Arial"/>
-                <a:cs typeface="Arial"/>
-              </a:rPr>
-              <a:t>Поведение после изменений</a:t>
-            </a:r>
-          </a:p>
-        </p:txBody>
-      </p:sp>
-      <p:sp>
-        <p:nvSpPr>
-          <p:cNvPr id="6" name="DTMF, удержание и перевод&#10;Перезапуск телефона и Asterisk, повторн">
-            <a:extLst xmlns:a="http://schemas.openxmlformats.org/drawingml/2006/main">
-              <a:ext uri="{FF2B5EF4-FFF2-40B4-BE49-F238E27FC236}">
-                <a16:creationId xmlns:a16="http://schemas.microsoft.com/office/drawing/2014/main" id="{4F540A8D-B173-4E3F-8486-E9CE6CB1150E}"/>
-              </a:ext>
-            </a:extLst>
-          </p:cNvPr>
-          <p:cNvSpPr>
-            <a:spLocks xmlns:a="http://schemas.openxmlformats.org/drawingml/2006/main" noGrp="1"/>
-          </p:cNvSpPr>
-          <p:nvPr/>
-        </p:nvSpPr>
-        <p:spPr>
-          <a:xfrm xmlns:a="http://schemas.openxmlformats.org/drawingml/2006/main">
-            <a:off x="571500" y="4429125"/>
-            <a:ext cx="10572750" cy="1000125"/>
-          </a:xfrm>
-          <a:prstGeom xmlns:a="http://schemas.openxmlformats.org/drawingml/2006/main" prst="rect">
-            <a:avLst/>
-          </a:prstGeom>
-          <a:noFill xmlns:a="http://schemas.openxmlformats.org/drawingml/2006/main"/>
-          <a:ln xmlns:a="http://schemas.openxmlformats.org/drawingml/2006/main" w="0">
-            <a:noFill/>
-          </a:ln>
-        </p:spPr>
-        <p:txBody>
-          <a:bodyPr xmlns:a="http://schemas.openxmlformats.org/drawingml/2006/main" wrap="square" lIns="0" tIns="0" rIns="0" bIns="0" anchor="t">
-            <a:noAutofit/>
-          </a:bodyPr>
-          <a:lstStyle xmlns:a="http://schemas.openxmlformats.org/drawingml/2006/main">
-            <a:defPPr algn="l">
-              <a:defRPr sz="2175" b="0">
-                <a:solidFill>
-                  <a:srgbClr val="F5F7FB"/>
-                </a:solidFill>
-                <a:latin typeface="Arial"/>
-                <a:ea typeface="Arial"/>
-                <a:cs typeface="Arial"/>
-              </a:defRPr>
-            </a:defPPr>
-          </a:lstStyle>
-          <a:p xmlns:a="http://schemas.openxmlformats.org/drawingml/2006/main">
-            <a:pPr algn="l">
-              <a:defRPr sz="2175" b="0">
-                <a:solidFill>
-                  <a:srgbClr val="F5F7FB"/>
-                </a:solidFill>
-                <a:latin typeface="Arial"/>
-                <a:ea typeface="Arial"/>
-                <a:cs typeface="Arial"/>
-              </a:defRPr>
-            </a:pPr>
-            <a:r>
-              <a:rPr sz="2175" b="0">
-                <a:solidFill>
-                  <a:srgbClr val="F5F7FB"/>
-                </a:solidFill>
-                <a:latin typeface="Arial"/>
-                <a:ea typeface="Arial"/>
-                <a:cs typeface="Arial"/>
-              </a:rPr>
-              <a:t>DTMF, удержание и перевод</a:t>
-            </a:r>
-          </a:p>
-          <a:p xmlns:a="http://schemas.openxmlformats.org/drawingml/2006/main">
-            <a:pPr algn="l">
-              <a:defRPr sz="2175" b="0">
-                <a:solidFill>
-                  <a:srgbClr val="F5F7FB"/>
-                </a:solidFill>
-                <a:latin typeface="Arial"/>
-                <a:ea typeface="Arial"/>
-                <a:cs typeface="Arial"/>
-              </a:defRPr>
-            </a:pPr>
-            <a:r>
-              <a:rPr sz="2175" b="0">
-                <a:solidFill>
-                  <a:srgbClr val="F5F7FB"/>
-                </a:solidFill>
-                <a:latin typeface="Arial"/>
-                <a:ea typeface="Arial"/>
-                <a:cs typeface="Arial"/>
-              </a:rPr>
-              <a:t>Перезапуск телефона и Asterisk, повторная регистрация</a:t>
-            </a:r>
-          </a:p>
-        </p:txBody>
-      </p:sp>
-      <p:sp>
-        <p:nvSpPr>
-          <p:cNvPr id="7" name="Успешный deploy сам по себе не подтверждает, что голос проходит в">
-            <a:extLst xmlns:a="http://schemas.openxmlformats.org/drawingml/2006/main">
-              <a:ext uri="{FF2B5EF4-FFF2-40B4-BE49-F238E27FC236}">
-                <a16:creationId xmlns:a16="http://schemas.microsoft.com/office/drawing/2014/main" id="{3E7D0ED3-E870-436A-AA55-9BAA93BC390A}"/>
+              <a:defRPr sz="1890" b="0">
+                <a:solidFill>
+                  <a:srgbClr val="F5F7FB"/>
+                </a:solidFill>
+                <a:latin typeface="Arial"/>
+                <a:ea typeface="Arial"/>
+                <a:cs typeface="Arial"/>
+              </a:defRPr>
+            </a:pPr>
+            <a:r>
+              <a:rPr sz="1890" b="0">
+                <a:solidFill>
+                  <a:srgbClr val="F5F7FB"/>
+                </a:solidFill>
+                <a:latin typeface="Arial"/>
+                <a:ea typeface="Arial"/>
+                <a:cs typeface="Arial"/>
+              </a:rPr>
+              <a:t>Затем проверка распознавания, ответа TTS и завершения.</a:t>
+            </a:r>
+          </a:p>
+        </p:txBody>
+      </p:sp>
+      <p:sp>
+        <p:nvSpPr>
+          <p:cNvPr id="11" name="SIP From сохраняет номер телефона. На HA RTP / RTCP используют ди">
+            <a:extLst xmlns:a="http://schemas.openxmlformats.org/drawingml/2006/main">
+              <a:ext uri="{FF2B5EF4-FFF2-40B4-BE49-F238E27FC236}">
+                <a16:creationId xmlns:a16="http://schemas.microsoft.com/office/drawing/2014/main" id="{4C13B96A-6DA1-4054-AE53-C47C49331F12}"/>
               </a:ext>
             </a:extLst>
           </p:cNvPr>
@@ -4483,7 +5049,30 @@
                 <a:ea typeface="Arial"/>
                 <a:cs typeface="Arial"/>
               </a:rPr>
-              <a:t>Успешный deploy сам по себе не подтверждает, что голос проходит в обе стороны.</a:t>
+              <a:t>SIP From сохраняет номер телефона. На HA RTP / RTCP используют динамические UDP-порты.</a:t>
+            </a:r>
+          </a:p>
+          <a:p xmlns:a="http://schemas.openxmlformats.org/drawingml/2006/main">
+            <a:pPr algn="l">
+              <a:defRPr sz="1425" b="0">
+                <a:solidFill>
+                  <a:srgbClr val="AAB9D0"/>
+                </a:solidFill>
+                <a:latin typeface="Arial"/>
+                <a:ea typeface="Arial"/>
+                <a:cs typeface="Arial"/>
+              </a:defRPr>
+            </a:pPr>
+            <a:r>
+              <a:rPr sz="1425" b="0">
+                <a:solidFill>
+                  <a:srgbClr val="AAB9D0"/>
+                </a:solidFill>
+                <a:latin typeface="Arial"/>
+                <a:ea typeface="Arial"/>
+                <a:cs typeface="Arial"/>
+              </a:rPr>
+              <a:t>Настоящий разговор подтверждает пилот с телефоном, а не только readiness Pod.</a:t>
             </a:r>
           </a:p>
         </p:txBody>
@@ -4491,7 +5080,7 @@
     </p:spTree>
     <p:extLst>
       <p:ext uri="{BB962C8B-B14F-4D97-AF65-F5344CB8AC3E}">
-        <p14:creationId xmlns:p14="http://schemas.microsoft.com/office/powerpoint/2010/main" val="1558234643"/>
+        <p14:creationId xmlns:p14="http://schemas.microsoft.com/office/powerpoint/2010/main" val="1255323320"/>
       </p:ext>
     </p:extLst>
   </p:cSld>
@@ -4519,10 +5108,10 @@
       </p:grpSpPr>
       <p:sp>
         <p:nvSpPr>
-          <p:cNvPr id="8" name="Эксплуатация и восстановление">
-            <a:extLst xmlns:a="http://schemas.openxmlformats.org/drawingml/2006/main">
-              <a:ext uri="{FF2B5EF4-FFF2-40B4-BE49-F238E27FC236}">
-                <a16:creationId xmlns:a16="http://schemas.microsoft.com/office/drawing/2014/main" id="{FF2BB4C7-E915-4378-BE51-0A4590863184}"/>
+          <p:cNvPr id="15" name="Этапы развёртывания и подключения">
+            <a:extLst xmlns:a="http://schemas.openxmlformats.org/drawingml/2006/main">
+              <a:ext uri="{FF2B5EF4-FFF2-40B4-BE49-F238E27FC236}">
+                <a16:creationId xmlns:a16="http://schemas.microsoft.com/office/drawing/2014/main" id="{964AF516-C944-4532-8105-F017A208785D}"/>
               </a:ext>
             </a:extLst>
           </p:cNvPr>
@@ -4580,7 +5169,7 @@
                 <a:ea typeface="Arial"/>
                 <a:cs typeface="Arial"/>
               </a:rPr>
-              <a:t>Эксплуатация и восстановление</a:t>
+              <a:t>Этапы развёртывания и подключения</a:t>
             </a:r>
           </a:p>
         </p:txBody>
@@ -4590,7 +5179,7 @@
           <p:cNvPr id="2" name="11">
             <a:extLst xmlns:a="http://schemas.openxmlformats.org/drawingml/2006/main">
               <a:ext uri="{FF2B5EF4-FFF2-40B4-BE49-F238E27FC236}">
-                <a16:creationId xmlns:a16="http://schemas.microsoft.com/office/drawing/2014/main" id="{E52B1292-632F-41F2-9F5E-B0C33337C790}"/>
+                <a16:creationId xmlns:a16="http://schemas.microsoft.com/office/drawing/2014/main" id="{9A01A84F-AE2F-4B27-92DD-4313D69F29AA}"/>
               </a:ext>
             </a:extLst>
           </p:cNvPr>
@@ -4655,10 +5244,10 @@
       </p:sp>
       <p:sp>
         <p:nvSpPr>
-          <p:cNvPr id="3" name="Резервная копия вне Git">
-            <a:extLst xmlns:a="http://schemas.openxmlformats.org/drawingml/2006/main">
-              <a:ext uri="{FF2B5EF4-FFF2-40B4-BE49-F238E27FC236}">
-                <a16:creationId xmlns:a16="http://schemas.microsoft.com/office/drawing/2014/main" id="{595D49E1-D05A-4AAF-B049-B3D15F579CAF}"/>
+          <p:cNvPr id="3" name="01">
+            <a:extLst xmlns:a="http://schemas.openxmlformats.org/drawingml/2006/main">
+              <a:ext uri="{FF2B5EF4-FFF2-40B4-BE49-F238E27FC236}">
+                <a16:creationId xmlns:a16="http://schemas.microsoft.com/office/drawing/2014/main" id="{60CBA6A8-51B8-4F56-8DAC-2F3AEC09D954}"/>
               </a:ext>
             </a:extLst>
           </p:cNvPr>
@@ -4669,8 +5258,8 @@
         </p:nvSpPr>
         <p:spPr>
           <a:xfrm xmlns:a="http://schemas.openxmlformats.org/drawingml/2006/main">
-            <a:off x="571500" y="1762125"/>
-            <a:ext cx="10572750" cy="819150"/>
+            <a:off x="571500" y="1571625"/>
+            <a:ext cx="762000" cy="571500"/>
           </a:xfrm>
           <a:prstGeom xmlns:a="http://schemas.openxmlformats.org/drawingml/2006/main" prst="rect">
             <a:avLst/>
@@ -4686,7 +5275,7 @@
           </a:bodyPr>
           <a:lstStyle xmlns:a="http://schemas.openxmlformats.org/drawingml/2006/main">
             <a:defPPr algn="l">
-              <a:defRPr sz="2550" b="1">
+              <a:defRPr sz="3000" b="1">
                 <a:solidFill>
                   <a:srgbClr val="48DDCC"/>
                 </a:solidFill>
@@ -4698,7 +5287,7 @@
           </a:lstStyle>
           <a:p xmlns:a="http://schemas.openxmlformats.org/drawingml/2006/main">
             <a:pPr algn="l">
-              <a:defRPr sz="2550" b="1">
+              <a:defRPr sz="3000" b="1">
                 <a:solidFill>
                   <a:srgbClr val="48DDCC"/>
                 </a:solidFill>
@@ -4708,7 +5297,7 @@
               </a:defRPr>
             </a:pPr>
             <a:r>
-              <a:rPr sz="2550" b="1">
+              <a:rPr sz="3000" b="1">
                 <a:solidFill>
                   <a:srgbClr val="48DDCC"/>
                 </a:solidFill>
@@ -4716,17 +5305,17 @@
                 <a:ea typeface="Arial"/>
                 <a:cs typeface="Arial"/>
               </a:rPr>
-              <a:t>Резервная копия вне Git</a:t>
-            </a:r>
-          </a:p>
-        </p:txBody>
-      </p:sp>
-      <p:sp>
-        <p:nvSpPr>
-          <p:cNvPr id="4" name="Инвентарь, секреты, конфиги и данные Asterisk&#10;Версия образа и про">
-            <a:extLst xmlns:a="http://schemas.openxmlformats.org/drawingml/2006/main">
-              <a:ext uri="{FF2B5EF4-FFF2-40B4-BE49-F238E27FC236}">
-                <a16:creationId xmlns:a16="http://schemas.microsoft.com/office/drawing/2014/main" id="{2EF4CA76-F435-4F38-9296-E77682B1E308}"/>
+              <a:t>01</a:t>
+            </a:r>
+          </a:p>
+        </p:txBody>
+      </p:sp>
+      <p:sp>
+        <p:nvSpPr>
+          <p:cNvPr id="4" name="Bootstrap сервера">
+            <a:extLst xmlns:a="http://schemas.openxmlformats.org/drawingml/2006/main">
+              <a:ext uri="{FF2B5EF4-FFF2-40B4-BE49-F238E27FC236}">
+                <a16:creationId xmlns:a16="http://schemas.microsoft.com/office/drawing/2014/main" id="{A651F27B-6752-4AD3-BBD5-779CFB968BC0}"/>
               </a:ext>
             </a:extLst>
           </p:cNvPr>
@@ -4737,8 +5326,8 @@
         </p:nvSpPr>
         <p:spPr>
           <a:xfrm xmlns:a="http://schemas.openxmlformats.org/drawingml/2006/main">
-            <a:off x="571500" y="2381250"/>
-            <a:ext cx="10572750" cy="952500"/>
+            <a:off x="1714500" y="1571625"/>
+            <a:ext cx="9525000" cy="457200"/>
           </a:xfrm>
           <a:prstGeom xmlns:a="http://schemas.openxmlformats.org/drawingml/2006/main" prst="rect">
             <a:avLst/>
@@ -4754,7 +5343,7 @@
           </a:bodyPr>
           <a:lstStyle xmlns:a="http://schemas.openxmlformats.org/drawingml/2006/main">
             <a:defPPr algn="l">
-              <a:defRPr sz="2175" b="0">
+              <a:defRPr sz="2400" b="1">
                 <a:solidFill>
                   <a:srgbClr val="F5F7FB"/>
                 </a:solidFill>
@@ -4766,58 +5355,35 @@
           </a:lstStyle>
           <a:p xmlns:a="http://schemas.openxmlformats.org/drawingml/2006/main">
             <a:pPr algn="l">
-              <a:defRPr sz="2175" b="0">
-                <a:solidFill>
-                  <a:srgbClr val="F5F7FB"/>
-                </a:solidFill>
-                <a:latin typeface="Arial"/>
-                <a:ea typeface="Arial"/>
-                <a:cs typeface="Arial"/>
-              </a:defRPr>
-            </a:pPr>
-            <a:r>
-              <a:rPr sz="2175" b="0">
-                <a:solidFill>
-                  <a:srgbClr val="F5F7FB"/>
-                </a:solidFill>
-                <a:latin typeface="Arial"/>
-                <a:ea typeface="Arial"/>
-                <a:cs typeface="Arial"/>
-              </a:rPr>
-              <a:t>Инвентарь, секреты, конфиги и данные Asterisk</a:t>
-            </a:r>
-          </a:p>
-          <a:p xmlns:a="http://schemas.openxmlformats.org/drawingml/2006/main">
-            <a:pPr algn="l">
-              <a:defRPr sz="2175" b="0">
-                <a:solidFill>
-                  <a:srgbClr val="F5F7FB"/>
-                </a:solidFill>
-                <a:latin typeface="Arial"/>
-                <a:ea typeface="Arial"/>
-                <a:cs typeface="Arial"/>
-              </a:defRPr>
-            </a:pPr>
-            <a:r>
-              <a:rPr sz="2175" b="0">
-                <a:solidFill>
-                  <a:srgbClr val="F5F7FB"/>
-                </a:solidFill>
-                <a:latin typeface="Arial"/>
-                <a:ea typeface="Arial"/>
-                <a:cs typeface="Arial"/>
-              </a:rPr>
-              <a:t>Версия образа и происхождение firmware</a:t>
-            </a:r>
-          </a:p>
-        </p:txBody>
-      </p:sp>
-      <p:sp>
-        <p:nvSpPr>
-          <p:cNvPr id="5" name="Один узел означает одну точку отказа">
-            <a:extLst xmlns:a="http://schemas.openxmlformats.org/drawingml/2006/main">
-              <a:ext uri="{FF2B5EF4-FFF2-40B4-BE49-F238E27FC236}">
-                <a16:creationId xmlns:a16="http://schemas.microsoft.com/office/drawing/2014/main" id="{67142D06-A78D-49D8-9A3E-3651ACD1769A}"/>
+              <a:defRPr sz="2400" b="1">
+                <a:solidFill>
+                  <a:srgbClr val="F5F7FB"/>
+                </a:solidFill>
+                <a:latin typeface="Arial"/>
+                <a:ea typeface="Arial"/>
+                <a:cs typeface="Arial"/>
+              </a:defRPr>
+            </a:pPr>
+            <a:r>
+              <a:rPr sz="2400" b="1">
+                <a:solidFill>
+                  <a:srgbClr val="F5F7FB"/>
+                </a:solidFill>
+                <a:latin typeface="Arial"/>
+                <a:ea typeface="Arial"/>
+                <a:cs typeface="Arial"/>
+              </a:rPr>
+              <a:t>Bootstrap сервера</a:t>
+            </a:r>
+          </a:p>
+        </p:txBody>
+      </p:sp>
+      <p:sp>
+        <p:nvSpPr>
+          <p:cNvPr id="5" name="Образы, постоянный IP, firewall, Asterisk и Opus">
+            <a:extLst xmlns:a="http://schemas.openxmlformats.org/drawingml/2006/main">
+              <a:ext uri="{FF2B5EF4-FFF2-40B4-BE49-F238E27FC236}">
+                <a16:creationId xmlns:a16="http://schemas.microsoft.com/office/drawing/2014/main" id="{C6CFBAD9-1FF8-45C3-A4B9-7F18A038B891}"/>
               </a:ext>
             </a:extLst>
           </p:cNvPr>
@@ -4828,8 +5394,8 @@
         </p:nvSpPr>
         <p:spPr>
           <a:xfrm xmlns:a="http://schemas.openxmlformats.org/drawingml/2006/main">
-            <a:off x="571500" y="3905250"/>
-            <a:ext cx="10572750" cy="819150"/>
+            <a:off x="1714500" y="2038350"/>
+            <a:ext cx="9525000" cy="428625"/>
           </a:xfrm>
           <a:prstGeom xmlns:a="http://schemas.openxmlformats.org/drawingml/2006/main" prst="rect">
             <a:avLst/>
@@ -4845,9 +5411,9 @@
           </a:bodyPr>
           <a:lstStyle xmlns:a="http://schemas.openxmlformats.org/drawingml/2006/main">
             <a:defPPr algn="l">
-              <a:defRPr sz="2550" b="1">
-                <a:solidFill>
-                  <a:srgbClr val="FF836D"/>
+              <a:defRPr sz="1875" b="0">
+                <a:solidFill>
+                  <a:srgbClr val="AAB9D0"/>
                 </a:solidFill>
                 <a:latin typeface="Arial"/>
                 <a:ea typeface="Arial"/>
@@ -4857,35 +5423,35 @@
           </a:lstStyle>
           <a:p xmlns:a="http://schemas.openxmlformats.org/drawingml/2006/main">
             <a:pPr algn="l">
-              <a:defRPr sz="2550" b="1">
-                <a:solidFill>
-                  <a:srgbClr val="FF836D"/>
-                </a:solidFill>
-                <a:latin typeface="Arial"/>
-                <a:ea typeface="Arial"/>
-                <a:cs typeface="Arial"/>
-              </a:defRPr>
-            </a:pPr>
-            <a:r>
-              <a:rPr sz="2550" b="1">
-                <a:solidFill>
-                  <a:srgbClr val="FF836D"/>
-                </a:solidFill>
-                <a:latin typeface="Arial"/>
-                <a:ea typeface="Arial"/>
-                <a:cs typeface="Arial"/>
-              </a:rPr>
-              <a:t>Один узел означает одну точку отказа</a:t>
-            </a:r>
-          </a:p>
-        </p:txBody>
-      </p:sp>
-      <p:sp>
-        <p:nvSpPr>
-          <p:cNvPr id="6" name="UPS для сетевого оборудования и k3s-узла&#10;План восстановления с те">
-            <a:extLst xmlns:a="http://schemas.openxmlformats.org/drawingml/2006/main">
-              <a:ext uri="{FF2B5EF4-FFF2-40B4-BE49-F238E27FC236}">
-                <a16:creationId xmlns:a16="http://schemas.microsoft.com/office/drawing/2014/main" id="{5E64A018-3EA4-4C9F-888F-6B11131FD016}"/>
+              <a:defRPr sz="1875" b="0">
+                <a:solidFill>
+                  <a:srgbClr val="AAB9D0"/>
+                </a:solidFill>
+                <a:latin typeface="Arial"/>
+                <a:ea typeface="Arial"/>
+                <a:cs typeface="Arial"/>
+              </a:defRPr>
+            </a:pPr>
+            <a:r>
+              <a:rPr sz="1875" b="0">
+                <a:solidFill>
+                  <a:srgbClr val="AAB9D0"/>
+                </a:solidFill>
+                <a:latin typeface="Arial"/>
+                <a:ea typeface="Arial"/>
+                <a:cs typeface="Arial"/>
+              </a:rPr>
+              <a:t>Образы, постоянный IP, firewall, Asterisk и Opus</a:t>
+            </a:r>
+          </a:p>
+        </p:txBody>
+      </p:sp>
+      <p:sp>
+        <p:nvSpPr>
+          <p:cNvPr id="6" name="02">
+            <a:extLst xmlns:a="http://schemas.openxmlformats.org/drawingml/2006/main">
+              <a:ext uri="{FF2B5EF4-FFF2-40B4-BE49-F238E27FC236}">
+                <a16:creationId xmlns:a16="http://schemas.microsoft.com/office/drawing/2014/main" id="{5ADFFDE8-B0CF-4EA2-B100-0006A314A12A}"/>
               </a:ext>
             </a:extLst>
           </p:cNvPr>
@@ -4896,8 +5462,8 @@
         </p:nvSpPr>
         <p:spPr>
           <a:xfrm xmlns:a="http://schemas.openxmlformats.org/drawingml/2006/main">
-            <a:off x="571500" y="4524375"/>
-            <a:ext cx="10572750" cy="952500"/>
+            <a:off x="571500" y="2628900"/>
+            <a:ext cx="762000" cy="571500"/>
           </a:xfrm>
           <a:prstGeom xmlns:a="http://schemas.openxmlformats.org/drawingml/2006/main" prst="rect">
             <a:avLst/>
@@ -4913,9 +5479,9 @@
           </a:bodyPr>
           <a:lstStyle xmlns:a="http://schemas.openxmlformats.org/drawingml/2006/main">
             <a:defPPr algn="l">
-              <a:defRPr sz="2175" b="0">
-                <a:solidFill>
-                  <a:srgbClr val="F5F7FB"/>
+              <a:defRPr sz="3000" b="1">
+                <a:solidFill>
+                  <a:srgbClr val="FF836D"/>
                 </a:solidFill>
                 <a:latin typeface="Arial"/>
                 <a:ea typeface="Arial"/>
@@ -4925,58 +5491,35 @@
           </a:lstStyle>
           <a:p xmlns:a="http://schemas.openxmlformats.org/drawingml/2006/main">
             <a:pPr algn="l">
-              <a:defRPr sz="2175" b="0">
-                <a:solidFill>
-                  <a:srgbClr val="F5F7FB"/>
-                </a:solidFill>
-                <a:latin typeface="Arial"/>
-                <a:ea typeface="Arial"/>
-                <a:cs typeface="Arial"/>
-              </a:defRPr>
-            </a:pPr>
-            <a:r>
-              <a:rPr sz="2175" b="0">
-                <a:solidFill>
-                  <a:srgbClr val="F5F7FB"/>
-                </a:solidFill>
-                <a:latin typeface="Arial"/>
-                <a:ea typeface="Arial"/>
-                <a:cs typeface="Arial"/>
-              </a:rPr>
-              <a:t>UPS для сетевого оборудования и k3s-узла</a:t>
-            </a:r>
-          </a:p>
-          <a:p xmlns:a="http://schemas.openxmlformats.org/drawingml/2006/main">
-            <a:pPr algn="l">
-              <a:defRPr sz="2175" b="0">
-                <a:solidFill>
-                  <a:srgbClr val="F5F7FB"/>
-                </a:solidFill>
-                <a:latin typeface="Arial"/>
-                <a:ea typeface="Arial"/>
-                <a:cs typeface="Arial"/>
-              </a:defRPr>
-            </a:pPr>
-            <a:r>
-              <a:rPr sz="2175" b="0">
-                <a:solidFill>
-                  <a:srgbClr val="F5F7FB"/>
-                </a:solidFill>
-                <a:latin typeface="Arial"/>
-                <a:ea typeface="Arial"/>
-                <a:cs typeface="Arial"/>
-              </a:rPr>
-              <a:t>План восстановления с тем же LAN IP</a:t>
-            </a:r>
-          </a:p>
-        </p:txBody>
-      </p:sp>
-      <p:sp>
-        <p:nvSpPr>
-          <p:cNvPr id="7" name="Секреты и бинарные прошивки хранятся локально или в закрытом хран">
-            <a:extLst xmlns:a="http://schemas.openxmlformats.org/drawingml/2006/main">
-              <a:ext uri="{FF2B5EF4-FFF2-40B4-BE49-F238E27FC236}">
-                <a16:creationId xmlns:a16="http://schemas.microsoft.com/office/drawing/2014/main" id="{29548C53-7695-49EC-871B-F80DD15C7692}"/>
+              <a:defRPr sz="3000" b="1">
+                <a:solidFill>
+                  <a:srgbClr val="FF836D"/>
+                </a:solidFill>
+                <a:latin typeface="Arial"/>
+                <a:ea typeface="Arial"/>
+                <a:cs typeface="Arial"/>
+              </a:defRPr>
+            </a:pPr>
+            <a:r>
+              <a:rPr sz="3000" b="1">
+                <a:solidFill>
+                  <a:srgbClr val="FF836D"/>
+                </a:solidFill>
+                <a:latin typeface="Arial"/>
+                <a:ea typeface="Arial"/>
+                <a:cs typeface="Arial"/>
+              </a:rPr>
+              <a:t>02</a:t>
+            </a:r>
+          </a:p>
+        </p:txBody>
+      </p:sp>
+      <p:sp>
+        <p:nvSpPr>
+          <p:cNvPr id="7" name="Проверенный телефон">
+            <a:extLst xmlns:a="http://schemas.openxmlformats.org/drawingml/2006/main">
+              <a:ext uri="{FF2B5EF4-FFF2-40B4-BE49-F238E27FC236}">
+                <a16:creationId xmlns:a16="http://schemas.microsoft.com/office/drawing/2014/main" id="{7388A5DE-21E4-4B48-9E33-A62F9A8F54EB}"/>
               </a:ext>
             </a:extLst>
           </p:cNvPr>
@@ -4987,8 +5530,8 @@
         </p:nvSpPr>
         <p:spPr>
           <a:xfrm xmlns:a="http://schemas.openxmlformats.org/drawingml/2006/main">
-            <a:off x="571500" y="5953125"/>
-            <a:ext cx="10191750" cy="457200"/>
+            <a:off x="1714500" y="2628900"/>
+            <a:ext cx="9525000" cy="457200"/>
           </a:xfrm>
           <a:prstGeom xmlns:a="http://schemas.openxmlformats.org/drawingml/2006/main" prst="rect">
             <a:avLst/>
@@ -5004,9 +5547,9 @@
           </a:bodyPr>
           <a:lstStyle xmlns:a="http://schemas.openxmlformats.org/drawingml/2006/main">
             <a:defPPr algn="l">
-              <a:defRPr sz="1425" b="0">
-                <a:solidFill>
-                  <a:srgbClr val="AAB9D0"/>
+              <a:defRPr sz="2400" b="1">
+                <a:solidFill>
+                  <a:srgbClr val="F5F7FB"/>
                 </a:solidFill>
                 <a:latin typeface="Arial"/>
                 <a:ea typeface="Arial"/>
@@ -5016,7 +5559,63 @@
           </a:lstStyle>
           <a:p xmlns:a="http://schemas.openxmlformats.org/drawingml/2006/main">
             <a:pPr algn="l">
-              <a:defRPr sz="1425" b="0">
+              <a:defRPr sz="2400" b="1">
+                <a:solidFill>
+                  <a:srgbClr val="F5F7FB"/>
+                </a:solidFill>
+                <a:latin typeface="Arial"/>
+                <a:ea typeface="Arial"/>
+                <a:cs typeface="Arial"/>
+              </a:defRPr>
+            </a:pPr>
+            <a:r>
+              <a:rPr sz="2400" b="1">
+                <a:solidFill>
+                  <a:srgbClr val="F5F7FB"/>
+                </a:solidFill>
+                <a:latin typeface="Arial"/>
+                <a:ea typeface="Arial"/>
+                <a:cs typeface="Arial"/>
+              </a:rPr>
+              <a:t>Проверенный телефон</a:t>
+            </a:r>
+          </a:p>
+        </p:txBody>
+      </p:sp>
+      <p:sp>
+        <p:nvSpPr>
+          <p:cNvPr id="8" name="PID / HW / Load / MAC, SIP-профиль, временный TFTP">
+            <a:extLst xmlns:a="http://schemas.openxmlformats.org/drawingml/2006/main">
+              <a:ext uri="{FF2B5EF4-FFF2-40B4-BE49-F238E27FC236}">
+                <a16:creationId xmlns:a16="http://schemas.microsoft.com/office/drawing/2014/main" id="{B2580173-DFC9-46E9-8ED4-E64D3FD36ED6}"/>
+              </a:ext>
+            </a:extLst>
+          </p:cNvPr>
+          <p:cNvSpPr>
+            <a:spLocks xmlns:a="http://schemas.openxmlformats.org/drawingml/2006/main" noGrp="1"/>
+          </p:cNvSpPr>
+          <p:nvPr/>
+        </p:nvSpPr>
+        <p:spPr>
+          <a:xfrm xmlns:a="http://schemas.openxmlformats.org/drawingml/2006/main">
+            <a:off x="1714500" y="3095625"/>
+            <a:ext cx="9525000" cy="428625"/>
+          </a:xfrm>
+          <a:prstGeom xmlns:a="http://schemas.openxmlformats.org/drawingml/2006/main" prst="rect">
+            <a:avLst/>
+          </a:prstGeom>
+          <a:noFill xmlns:a="http://schemas.openxmlformats.org/drawingml/2006/main"/>
+          <a:ln xmlns:a="http://schemas.openxmlformats.org/drawingml/2006/main" w="0">
+            <a:noFill/>
+          </a:ln>
+        </p:spPr>
+        <p:txBody>
+          <a:bodyPr xmlns:a="http://schemas.openxmlformats.org/drawingml/2006/main" wrap="square" lIns="0" tIns="0" rIns="0" bIns="0" anchor="t">
+            <a:noAutofit/>
+          </a:bodyPr>
+          <a:lstStyle xmlns:a="http://schemas.openxmlformats.org/drawingml/2006/main">
+            <a:defPPr algn="l">
+              <a:defRPr sz="1875" b="0">
                 <a:solidFill>
                   <a:srgbClr val="AAB9D0"/>
                 </a:solidFill>
@@ -5024,17 +5623,437 @@
                 <a:ea typeface="Arial"/>
                 <a:cs typeface="Arial"/>
               </a:defRPr>
-            </a:pPr>
-            <a:r>
-              <a:rPr sz="1425" b="0">
+            </a:defPPr>
+          </a:lstStyle>
+          <a:p xmlns:a="http://schemas.openxmlformats.org/drawingml/2006/main">
+            <a:pPr algn="l">
+              <a:defRPr sz="1875" b="0">
                 <a:solidFill>
                   <a:srgbClr val="AAB9D0"/>
                 </a:solidFill>
                 <a:latin typeface="Arial"/>
                 <a:ea typeface="Arial"/>
                 <a:cs typeface="Arial"/>
-              </a:rPr>
-              <a:t>Секреты и бинарные прошивки хранятся локально или в закрытом хранилище.</a:t>
+              </a:defRPr>
+            </a:pPr>
+            <a:r>
+              <a:rPr sz="1875" b="0">
+                <a:solidFill>
+                  <a:srgbClr val="AAB9D0"/>
+                </a:solidFill>
+                <a:latin typeface="Arial"/>
+                <a:ea typeface="Arial"/>
+                <a:cs typeface="Arial"/>
+              </a:rPr>
+              <a:t>PID / HW / Load / MAC, SIP-профиль, временный TFTP</a:t>
+            </a:r>
+          </a:p>
+        </p:txBody>
+      </p:sp>
+      <p:sp>
+        <p:nvSpPr>
+          <p:cNvPr id="9" name="03">
+            <a:extLst xmlns:a="http://schemas.openxmlformats.org/drawingml/2006/main">
+              <a:ext uri="{FF2B5EF4-FFF2-40B4-BE49-F238E27FC236}">
+                <a16:creationId xmlns:a16="http://schemas.microsoft.com/office/drawing/2014/main" id="{D67DF91C-5029-4B63-92AD-1E640298622E}"/>
+              </a:ext>
+            </a:extLst>
+          </p:cNvPr>
+          <p:cNvSpPr>
+            <a:spLocks xmlns:a="http://schemas.openxmlformats.org/drawingml/2006/main" noGrp="1"/>
+          </p:cNvSpPr>
+          <p:nvPr/>
+        </p:nvSpPr>
+        <p:spPr>
+          <a:xfrm xmlns:a="http://schemas.openxmlformats.org/drawingml/2006/main">
+            <a:off x="571500" y="3686175"/>
+            <a:ext cx="762000" cy="571500"/>
+          </a:xfrm>
+          <a:prstGeom xmlns:a="http://schemas.openxmlformats.org/drawingml/2006/main" prst="rect">
+            <a:avLst/>
+          </a:prstGeom>
+          <a:noFill xmlns:a="http://schemas.openxmlformats.org/drawingml/2006/main"/>
+          <a:ln xmlns:a="http://schemas.openxmlformats.org/drawingml/2006/main" w="0">
+            <a:noFill/>
+          </a:ln>
+        </p:spPr>
+        <p:txBody>
+          <a:bodyPr xmlns:a="http://schemas.openxmlformats.org/drawingml/2006/main" wrap="square" lIns="0" tIns="0" rIns="0" bIns="0" anchor="t">
+            <a:noAutofit/>
+          </a:bodyPr>
+          <a:lstStyle xmlns:a="http://schemas.openxmlformats.org/drawingml/2006/main">
+            <a:defPPr algn="l">
+              <a:defRPr sz="3000" b="1">
+                <a:solidFill>
+                  <a:srgbClr val="F7CB64"/>
+                </a:solidFill>
+                <a:latin typeface="Arial"/>
+                <a:ea typeface="Arial"/>
+                <a:cs typeface="Arial"/>
+              </a:defRPr>
+            </a:defPPr>
+          </a:lstStyle>
+          <a:p xmlns:a="http://schemas.openxmlformats.org/drawingml/2006/main">
+            <a:pPr algn="l">
+              <a:defRPr sz="3000" b="1">
+                <a:solidFill>
+                  <a:srgbClr val="F7CB64"/>
+                </a:solidFill>
+                <a:latin typeface="Arial"/>
+                <a:ea typeface="Arial"/>
+                <a:cs typeface="Arial"/>
+              </a:defRPr>
+            </a:pPr>
+            <a:r>
+              <a:rPr sz="3000" b="1">
+                <a:solidFill>
+                  <a:srgbClr val="F7CB64"/>
+                </a:solidFill>
+                <a:latin typeface="Arial"/>
+                <a:ea typeface="Arial"/>
+                <a:cs typeface="Arial"/>
+              </a:rPr>
+              <a:t>03</a:t>
+            </a:r>
+          </a:p>
+        </p:txBody>
+      </p:sp>
+      <p:sp>
+        <p:nvSpPr>
+          <p:cNvPr id="10" name="Подключение Home Assistant">
+            <a:extLst xmlns:a="http://schemas.openxmlformats.org/drawingml/2006/main">
+              <a:ext uri="{FF2B5EF4-FFF2-40B4-BE49-F238E27FC236}">
+                <a16:creationId xmlns:a16="http://schemas.microsoft.com/office/drawing/2014/main" id="{C125559A-A6B1-499D-B829-A3F33EA0AC78}"/>
+              </a:ext>
+            </a:extLst>
+          </p:cNvPr>
+          <p:cNvSpPr>
+            <a:spLocks xmlns:a="http://schemas.openxmlformats.org/drawingml/2006/main" noGrp="1"/>
+          </p:cNvSpPr>
+          <p:nvPr/>
+        </p:nvSpPr>
+        <p:spPr>
+          <a:xfrm xmlns:a="http://schemas.openxmlformats.org/drawingml/2006/main">
+            <a:off x="1714500" y="3686175"/>
+            <a:ext cx="9525000" cy="457200"/>
+          </a:xfrm>
+          <a:prstGeom xmlns:a="http://schemas.openxmlformats.org/drawingml/2006/main" prst="rect">
+            <a:avLst/>
+          </a:prstGeom>
+          <a:noFill xmlns:a="http://schemas.openxmlformats.org/drawingml/2006/main"/>
+          <a:ln xmlns:a="http://schemas.openxmlformats.org/drawingml/2006/main" w="0">
+            <a:noFill/>
+          </a:ln>
+        </p:spPr>
+        <p:txBody>
+          <a:bodyPr xmlns:a="http://schemas.openxmlformats.org/drawingml/2006/main" wrap="square" lIns="0" tIns="0" rIns="0" bIns="0" anchor="t">
+            <a:noAutofit/>
+          </a:bodyPr>
+          <a:lstStyle xmlns:a="http://schemas.openxmlformats.org/drawingml/2006/main">
+            <a:defPPr algn="l">
+              <a:defRPr sz="2400" b="1">
+                <a:solidFill>
+                  <a:srgbClr val="F5F7FB"/>
+                </a:solidFill>
+                <a:latin typeface="Arial"/>
+                <a:ea typeface="Arial"/>
+                <a:cs typeface="Arial"/>
+              </a:defRPr>
+            </a:defPPr>
+          </a:lstStyle>
+          <a:p xmlns:a="http://schemas.openxmlformats.org/drawingml/2006/main">
+            <a:pPr algn="l">
+              <a:defRPr sz="2400" b="1">
+                <a:solidFill>
+                  <a:srgbClr val="F5F7FB"/>
+                </a:solidFill>
+                <a:latin typeface="Arial"/>
+                <a:ea typeface="Arial"/>
+                <a:cs typeface="Arial"/>
+              </a:defRPr>
+            </a:pPr>
+            <a:r>
+              <a:rPr sz="2400" b="1">
+                <a:solidFill>
+                  <a:srgbClr val="F5F7FB"/>
+                </a:solidFill>
+                <a:latin typeface="Arial"/>
+                <a:ea typeface="Arial"/>
+                <a:cs typeface="Arial"/>
+              </a:rPr>
+              <a:t>Подключение Home Assistant</a:t>
+            </a:r>
+          </a:p>
+        </p:txBody>
+      </p:sp>
+      <p:sp>
+        <p:nvSpPr>
+          <p:cNvPr id="11" name="AMI /32, секрет, реальные entity IDs и VoIP pipeline">
+            <a:extLst xmlns:a="http://schemas.openxmlformats.org/drawingml/2006/main">
+              <a:ext uri="{FF2B5EF4-FFF2-40B4-BE49-F238E27FC236}">
+                <a16:creationId xmlns:a16="http://schemas.microsoft.com/office/drawing/2014/main" id="{FDFBEEE9-D974-44AE-BA5D-F300AB130AC6}"/>
+              </a:ext>
+            </a:extLst>
+          </p:cNvPr>
+          <p:cNvSpPr>
+            <a:spLocks xmlns:a="http://schemas.openxmlformats.org/drawingml/2006/main" noGrp="1"/>
+          </p:cNvSpPr>
+          <p:nvPr/>
+        </p:nvSpPr>
+        <p:spPr>
+          <a:xfrm xmlns:a="http://schemas.openxmlformats.org/drawingml/2006/main">
+            <a:off x="1714500" y="4152900"/>
+            <a:ext cx="9525000" cy="428625"/>
+          </a:xfrm>
+          <a:prstGeom xmlns:a="http://schemas.openxmlformats.org/drawingml/2006/main" prst="rect">
+            <a:avLst/>
+          </a:prstGeom>
+          <a:noFill xmlns:a="http://schemas.openxmlformats.org/drawingml/2006/main"/>
+          <a:ln xmlns:a="http://schemas.openxmlformats.org/drawingml/2006/main" w="0">
+            <a:noFill/>
+          </a:ln>
+        </p:spPr>
+        <p:txBody>
+          <a:bodyPr xmlns:a="http://schemas.openxmlformats.org/drawingml/2006/main" wrap="square" lIns="0" tIns="0" rIns="0" bIns="0" anchor="t">
+            <a:noAutofit/>
+          </a:bodyPr>
+          <a:lstStyle xmlns:a="http://schemas.openxmlformats.org/drawingml/2006/main">
+            <a:defPPr algn="l">
+              <a:defRPr sz="1875" b="0">
+                <a:solidFill>
+                  <a:srgbClr val="AAB9D0"/>
+                </a:solidFill>
+                <a:latin typeface="Arial"/>
+                <a:ea typeface="Arial"/>
+                <a:cs typeface="Arial"/>
+              </a:defRPr>
+            </a:defPPr>
+          </a:lstStyle>
+          <a:p xmlns:a="http://schemas.openxmlformats.org/drawingml/2006/main">
+            <a:pPr algn="l">
+              <a:defRPr sz="1875" b="0">
+                <a:solidFill>
+                  <a:srgbClr val="AAB9D0"/>
+                </a:solidFill>
+                <a:latin typeface="Arial"/>
+                <a:ea typeface="Arial"/>
+                <a:cs typeface="Arial"/>
+              </a:defRPr>
+            </a:pPr>
+            <a:r>
+              <a:rPr sz="1875" b="0">
+                <a:solidFill>
+                  <a:srgbClr val="AAB9D0"/>
+                </a:solidFill>
+                <a:latin typeface="Arial"/>
+                <a:ea typeface="Arial"/>
+                <a:cs typeface="Arial"/>
+              </a:rPr>
+              <a:t>AMI /32, секрет, реальные entity IDs и VoIP pipeline</a:t>
+            </a:r>
+          </a:p>
+        </p:txBody>
+      </p:sp>
+      <p:sp>
+        <p:nvSpPr>
+          <p:cNvPr id="12" name="04">
+            <a:extLst xmlns:a="http://schemas.openxmlformats.org/drawingml/2006/main">
+              <a:ext uri="{FF2B5EF4-FFF2-40B4-BE49-F238E27FC236}">
+                <a16:creationId xmlns:a16="http://schemas.microsoft.com/office/drawing/2014/main" id="{E2235B76-4FEC-4749-B13A-A50DEF3B20C5}"/>
+              </a:ext>
+            </a:extLst>
+          </p:cNvPr>
+          <p:cNvSpPr>
+            <a:spLocks xmlns:a="http://schemas.openxmlformats.org/drawingml/2006/main" noGrp="1"/>
+          </p:cNvSpPr>
+          <p:nvPr/>
+        </p:nvSpPr>
+        <p:spPr>
+          <a:xfrm xmlns:a="http://schemas.openxmlformats.org/drawingml/2006/main">
+            <a:off x="571500" y="4743450"/>
+            <a:ext cx="762000" cy="571500"/>
+          </a:xfrm>
+          <a:prstGeom xmlns:a="http://schemas.openxmlformats.org/drawingml/2006/main" prst="rect">
+            <a:avLst/>
+          </a:prstGeom>
+          <a:noFill xmlns:a="http://schemas.openxmlformats.org/drawingml/2006/main"/>
+          <a:ln xmlns:a="http://schemas.openxmlformats.org/drawingml/2006/main" w="0">
+            <a:noFill/>
+          </a:ln>
+        </p:spPr>
+        <p:txBody>
+          <a:bodyPr xmlns:a="http://schemas.openxmlformats.org/drawingml/2006/main" wrap="square" lIns="0" tIns="0" rIns="0" bIns="0" anchor="t">
+            <a:noAutofit/>
+          </a:bodyPr>
+          <a:lstStyle xmlns:a="http://schemas.openxmlformats.org/drawingml/2006/main">
+            <a:defPPr algn="l">
+              <a:defRPr sz="3000" b="1">
+                <a:solidFill>
+                  <a:srgbClr val="48DDCC"/>
+                </a:solidFill>
+                <a:latin typeface="Arial"/>
+                <a:ea typeface="Arial"/>
+                <a:cs typeface="Arial"/>
+              </a:defRPr>
+            </a:defPPr>
+          </a:lstStyle>
+          <a:p xmlns:a="http://schemas.openxmlformats.org/drawingml/2006/main">
+            <a:pPr algn="l">
+              <a:defRPr sz="3000" b="1">
+                <a:solidFill>
+                  <a:srgbClr val="48DDCC"/>
+                </a:solidFill>
+                <a:latin typeface="Arial"/>
+                <a:ea typeface="Arial"/>
+                <a:cs typeface="Arial"/>
+              </a:defRPr>
+            </a:pPr>
+            <a:r>
+              <a:rPr sz="3000" b="1">
+                <a:solidFill>
+                  <a:srgbClr val="48DDCC"/>
+                </a:solidFill>
+                <a:latin typeface="Arial"/>
+                <a:ea typeface="Arial"/>
+                <a:cs typeface="Arial"/>
+              </a:rPr>
+              <a:t>04</a:t>
+            </a:r>
+          </a:p>
+        </p:txBody>
+      </p:sp>
+      <p:sp>
+        <p:nvSpPr>
+          <p:cNvPr id="13" name="Приёмка и расширение">
+            <a:extLst xmlns:a="http://schemas.openxmlformats.org/drawingml/2006/main">
+              <a:ext uri="{FF2B5EF4-FFF2-40B4-BE49-F238E27FC236}">
+                <a16:creationId xmlns:a16="http://schemas.microsoft.com/office/drawing/2014/main" id="{900D699D-096C-406B-A1D8-F597736FCAD2}"/>
+              </a:ext>
+            </a:extLst>
+          </p:cNvPr>
+          <p:cNvSpPr>
+            <a:spLocks xmlns:a="http://schemas.openxmlformats.org/drawingml/2006/main" noGrp="1"/>
+          </p:cNvSpPr>
+          <p:nvPr/>
+        </p:nvSpPr>
+        <p:spPr>
+          <a:xfrm xmlns:a="http://schemas.openxmlformats.org/drawingml/2006/main">
+            <a:off x="1714500" y="4743450"/>
+            <a:ext cx="9525000" cy="457200"/>
+          </a:xfrm>
+          <a:prstGeom xmlns:a="http://schemas.openxmlformats.org/drawingml/2006/main" prst="rect">
+            <a:avLst/>
+          </a:prstGeom>
+          <a:noFill xmlns:a="http://schemas.openxmlformats.org/drawingml/2006/main"/>
+          <a:ln xmlns:a="http://schemas.openxmlformats.org/drawingml/2006/main" w="0">
+            <a:noFill/>
+          </a:ln>
+        </p:spPr>
+        <p:txBody>
+          <a:bodyPr xmlns:a="http://schemas.openxmlformats.org/drawingml/2006/main" wrap="square" lIns="0" tIns="0" rIns="0" bIns="0" anchor="t">
+            <a:noAutofit/>
+          </a:bodyPr>
+          <a:lstStyle xmlns:a="http://schemas.openxmlformats.org/drawingml/2006/main">
+            <a:defPPr algn="l">
+              <a:defRPr sz="2400" b="1">
+                <a:solidFill>
+                  <a:srgbClr val="F5F7FB"/>
+                </a:solidFill>
+                <a:latin typeface="Arial"/>
+                <a:ea typeface="Arial"/>
+                <a:cs typeface="Arial"/>
+              </a:defRPr>
+            </a:defPPr>
+          </a:lstStyle>
+          <a:p xmlns:a="http://schemas.openxmlformats.org/drawingml/2006/main">
+            <a:pPr algn="l">
+              <a:defRPr sz="2400" b="1">
+                <a:solidFill>
+                  <a:srgbClr val="F5F7FB"/>
+                </a:solidFill>
+                <a:latin typeface="Arial"/>
+                <a:ea typeface="Arial"/>
+                <a:cs typeface="Arial"/>
+              </a:defRPr>
+            </a:pPr>
+            <a:r>
+              <a:rPr sz="2400" b="1">
+                <a:solidFill>
+                  <a:srgbClr val="F5F7FB"/>
+                </a:solidFill>
+                <a:latin typeface="Arial"/>
+                <a:ea typeface="Arial"/>
+                <a:cs typeface="Arial"/>
+              </a:rPr>
+              <a:t>Приёмка и расширение</a:t>
+            </a:r>
+          </a:p>
+        </p:txBody>
+      </p:sp>
+      <p:sp>
+        <p:nvSpPr>
+          <p:cNvPr id="14" name="Два аппарата, вызов 630, затем остальные телефоны">
+            <a:extLst xmlns:a="http://schemas.openxmlformats.org/drawingml/2006/main">
+              <a:ext uri="{FF2B5EF4-FFF2-40B4-BE49-F238E27FC236}">
+                <a16:creationId xmlns:a16="http://schemas.microsoft.com/office/drawing/2014/main" id="{C15E3DD9-390D-4A7C-99D9-C8BD35F53A5F}"/>
+              </a:ext>
+            </a:extLst>
+          </p:cNvPr>
+          <p:cNvSpPr>
+            <a:spLocks xmlns:a="http://schemas.openxmlformats.org/drawingml/2006/main" noGrp="1"/>
+          </p:cNvSpPr>
+          <p:nvPr/>
+        </p:nvSpPr>
+        <p:spPr>
+          <a:xfrm xmlns:a="http://schemas.openxmlformats.org/drawingml/2006/main">
+            <a:off x="1714500" y="5210175"/>
+            <a:ext cx="9525000" cy="428625"/>
+          </a:xfrm>
+          <a:prstGeom xmlns:a="http://schemas.openxmlformats.org/drawingml/2006/main" prst="rect">
+            <a:avLst/>
+          </a:prstGeom>
+          <a:noFill xmlns:a="http://schemas.openxmlformats.org/drawingml/2006/main"/>
+          <a:ln xmlns:a="http://schemas.openxmlformats.org/drawingml/2006/main" w="0">
+            <a:noFill/>
+          </a:ln>
+        </p:spPr>
+        <p:txBody>
+          <a:bodyPr xmlns:a="http://schemas.openxmlformats.org/drawingml/2006/main" wrap="square" lIns="0" tIns="0" rIns="0" bIns="0" anchor="t">
+            <a:noAutofit/>
+          </a:bodyPr>
+          <a:lstStyle xmlns:a="http://schemas.openxmlformats.org/drawingml/2006/main">
+            <a:defPPr algn="l">
+              <a:defRPr sz="1875" b="0">
+                <a:solidFill>
+                  <a:srgbClr val="AAB9D0"/>
+                </a:solidFill>
+                <a:latin typeface="Arial"/>
+                <a:ea typeface="Arial"/>
+                <a:cs typeface="Arial"/>
+              </a:defRPr>
+            </a:defPPr>
+          </a:lstStyle>
+          <a:p xmlns:a="http://schemas.openxmlformats.org/drawingml/2006/main">
+            <a:pPr algn="l">
+              <a:defRPr sz="1875" b="0">
+                <a:solidFill>
+                  <a:srgbClr val="AAB9D0"/>
+                </a:solidFill>
+                <a:latin typeface="Arial"/>
+                <a:ea typeface="Arial"/>
+                <a:cs typeface="Arial"/>
+              </a:defRPr>
+            </a:pPr>
+            <a:r>
+              <a:rPr sz="1875" b="0">
+                <a:solidFill>
+                  <a:srgbClr val="AAB9D0"/>
+                </a:solidFill>
+                <a:latin typeface="Arial"/>
+                <a:ea typeface="Arial"/>
+                <a:cs typeface="Arial"/>
+              </a:rPr>
+              <a:t>Два аппарата, вызов 630, затем остальные телефоны</a:t>
             </a:r>
           </a:p>
         </p:txBody>
@@ -5042,7 +6061,7 @@
     </p:spTree>
     <p:extLst>
       <p:ext uri="{BB962C8B-B14F-4D97-AF65-F5344CB8AC3E}">
-        <p14:creationId xmlns:p14="http://schemas.microsoft.com/office/powerpoint/2010/main" val="1417778490"/>
+        <p14:creationId xmlns:p14="http://schemas.microsoft.com/office/powerpoint/2010/main" val="50823589"/>
       </p:ext>
     </p:extLst>
   </p:cSld>
@@ -5070,10 +6089,10 @@
       </p:grpSpPr>
       <p:sp>
         <p:nvSpPr>
-          <p:cNvPr id="13" name="Запуск партии по шагам">
-            <a:extLst xmlns:a="http://schemas.openxmlformats.org/drawingml/2006/main">
-              <a:ext uri="{FF2B5EF4-FFF2-40B4-BE49-F238E27FC236}">
-                <a16:creationId xmlns:a16="http://schemas.microsoft.com/office/drawing/2014/main" id="{051274AE-DF53-476D-9612-C1D0CADF2BA6}"/>
+          <p:cNvPr id="10" name="Приёмка с реальными аппаратами">
+            <a:extLst xmlns:a="http://schemas.openxmlformats.org/drawingml/2006/main">
+              <a:ext uri="{FF2B5EF4-FFF2-40B4-BE49-F238E27FC236}">
+                <a16:creationId xmlns:a16="http://schemas.microsoft.com/office/drawing/2014/main" id="{EE2DCC34-6B82-4309-8401-706780671860}"/>
               </a:ext>
             </a:extLst>
           </p:cNvPr>
@@ -5131,7 +6150,7 @@
                 <a:ea typeface="Arial"/>
                 <a:cs typeface="Arial"/>
               </a:rPr>
-              <a:t>Запуск партии по шагам</a:t>
+              <a:t>Приёмка с реальными аппаратами</a:t>
             </a:r>
           </a:p>
         </p:txBody>
@@ -5141,7 +6160,7 @@
           <p:cNvPr id="2" name="12">
             <a:extLst xmlns:a="http://schemas.openxmlformats.org/drawingml/2006/main">
               <a:ext uri="{FF2B5EF4-FFF2-40B4-BE49-F238E27FC236}">
-                <a16:creationId xmlns:a16="http://schemas.microsoft.com/office/drawing/2014/main" id="{69798D97-3965-4037-AB92-35EC62016C19}"/>
+                <a16:creationId xmlns:a16="http://schemas.microsoft.com/office/drawing/2014/main" id="{ECC8322F-C8AC-449A-9F57-9EC928292467}"/>
               </a:ext>
             </a:extLst>
           </p:cNvPr>
@@ -5206,10 +6225,10 @@
       </p:sp>
       <p:sp>
         <p:nvSpPr>
-          <p:cNvPr id="3" name="1">
-            <a:extLst xmlns:a="http://schemas.openxmlformats.org/drawingml/2006/main">
-              <a:ext uri="{FF2B5EF4-FFF2-40B4-BE49-F238E27FC236}">
-                <a16:creationId xmlns:a16="http://schemas.microsoft.com/office/drawing/2014/main" id="{485EF641-CAC0-419D-BD5A-FB6540FD8E18}"/>
+          <p:cNvPr id="3" name="Телефония">
+            <a:extLst xmlns:a="http://schemas.openxmlformats.org/drawingml/2006/main">
+              <a:ext uri="{FF2B5EF4-FFF2-40B4-BE49-F238E27FC236}">
+                <a16:creationId xmlns:a16="http://schemas.microsoft.com/office/drawing/2014/main" id="{466DD954-9065-4961-B29C-EB4E53C14064}"/>
               </a:ext>
             </a:extLst>
           </p:cNvPr>
@@ -5220,8 +6239,8 @@
         </p:nvSpPr>
         <p:spPr>
           <a:xfrm xmlns:a="http://schemas.openxmlformats.org/drawingml/2006/main">
-            <a:off x="571500" y="1762125"/>
-            <a:ext cx="2190750" cy="1428750"/>
+            <a:off x="571500" y="1685925"/>
+            <a:ext cx="10572750" cy="819150"/>
           </a:xfrm>
           <a:prstGeom xmlns:a="http://schemas.openxmlformats.org/drawingml/2006/main" prst="rect">
             <a:avLst/>
@@ -5237,7 +6256,7 @@
           </a:bodyPr>
           <a:lstStyle xmlns:a="http://schemas.openxmlformats.org/drawingml/2006/main">
             <a:defPPr algn="l">
-              <a:defRPr sz="7875" b="1">
+              <a:defRPr sz="2550" b="1">
                 <a:solidFill>
                   <a:srgbClr val="48DDCC"/>
                 </a:solidFill>
@@ -5249,7 +6268,7 @@
           </a:lstStyle>
           <a:p xmlns:a="http://schemas.openxmlformats.org/drawingml/2006/main">
             <a:pPr algn="l">
-              <a:defRPr sz="7875" b="1">
+              <a:defRPr sz="2550" b="1">
                 <a:solidFill>
                   <a:srgbClr val="48DDCC"/>
                 </a:solidFill>
@@ -5259,7 +6278,7 @@
               </a:defRPr>
             </a:pPr>
             <a:r>
-              <a:rPr sz="7875" b="1">
+              <a:rPr sz="2550" b="1">
                 <a:solidFill>
                   <a:srgbClr val="48DDCC"/>
                 </a:solidFill>
@@ -5267,17 +6286,17 @@
                 <a:ea typeface="Arial"/>
                 <a:cs typeface="Arial"/>
               </a:rPr>
-              <a:t>1</a:t>
-            </a:r>
-          </a:p>
-        </p:txBody>
-      </p:sp>
-      <p:sp>
-        <p:nvSpPr>
-          <p:cNvPr id="4" name="2">
-            <a:extLst xmlns:a="http://schemas.openxmlformats.org/drawingml/2006/main">
-              <a:ext uri="{FF2B5EF4-FFF2-40B4-BE49-F238E27FC236}">
-                <a16:creationId xmlns:a16="http://schemas.microsoft.com/office/drawing/2014/main" id="{908849E4-D176-4212-9748-5B156A26D156}"/>
+              <a:t>Телефония</a:t>
+            </a:r>
+          </a:p>
+        </p:txBody>
+      </p:sp>
+      <p:sp>
+        <p:nvSpPr>
+          <p:cNvPr id="4" name="201 и 202: регистрация, двусторонний звук, hold / transfer">
+            <a:extLst xmlns:a="http://schemas.openxmlformats.org/drawingml/2006/main">
+              <a:ext uri="{FF2B5EF4-FFF2-40B4-BE49-F238E27FC236}">
+                <a16:creationId xmlns:a16="http://schemas.microsoft.com/office/drawing/2014/main" id="{1873D874-A559-4D5F-B97A-8AA8AF92EE7C}"/>
               </a:ext>
             </a:extLst>
           </p:cNvPr>
@@ -5288,8 +6307,8 @@
         </p:nvSpPr>
         <p:spPr>
           <a:xfrm xmlns:a="http://schemas.openxmlformats.org/drawingml/2006/main">
-            <a:off x="4476750" y="1762125"/>
-            <a:ext cx="2190750" cy="1428750"/>
+            <a:off x="571500" y="2266950"/>
+            <a:ext cx="10572750" cy="600075"/>
           </a:xfrm>
           <a:prstGeom xmlns:a="http://schemas.openxmlformats.org/drawingml/2006/main" prst="rect">
             <a:avLst/>
@@ -5305,9 +6324,9 @@
           </a:bodyPr>
           <a:lstStyle xmlns:a="http://schemas.openxmlformats.org/drawingml/2006/main">
             <a:defPPr algn="l">
-              <a:defRPr sz="7875" b="1">
-                <a:solidFill>
-                  <a:srgbClr val="FF836D"/>
+              <a:defRPr sz="2025" b="0">
+                <a:solidFill>
+                  <a:srgbClr val="F5F7FB"/>
                 </a:solidFill>
                 <a:latin typeface="Arial"/>
                 <a:ea typeface="Arial"/>
@@ -5317,35 +6336,35 @@
           </a:lstStyle>
           <a:p xmlns:a="http://schemas.openxmlformats.org/drawingml/2006/main">
             <a:pPr algn="l">
-              <a:defRPr sz="7875" b="1">
-                <a:solidFill>
-                  <a:srgbClr val="FF836D"/>
-                </a:solidFill>
-                <a:latin typeface="Arial"/>
-                <a:ea typeface="Arial"/>
-                <a:cs typeface="Arial"/>
-              </a:defRPr>
-            </a:pPr>
-            <a:r>
-              <a:rPr sz="7875" b="1">
-                <a:solidFill>
-                  <a:srgbClr val="FF836D"/>
-                </a:solidFill>
-                <a:latin typeface="Arial"/>
-                <a:ea typeface="Arial"/>
-                <a:cs typeface="Arial"/>
-              </a:rPr>
-              <a:t>2</a:t>
-            </a:r>
-          </a:p>
-        </p:txBody>
-      </p:sp>
-      <p:sp>
-        <p:nvSpPr>
-          <p:cNvPr id="5" name="10">
-            <a:extLst xmlns:a="http://schemas.openxmlformats.org/drawingml/2006/main">
-              <a:ext uri="{FF2B5EF4-FFF2-40B4-BE49-F238E27FC236}">
-                <a16:creationId xmlns:a16="http://schemas.microsoft.com/office/drawing/2014/main" id="{D6B50249-F01B-4F83-8016-F10182542F18}"/>
+              <a:defRPr sz="2025" b="0">
+                <a:solidFill>
+                  <a:srgbClr val="F5F7FB"/>
+                </a:solidFill>
+                <a:latin typeface="Arial"/>
+                <a:ea typeface="Arial"/>
+                <a:cs typeface="Arial"/>
+              </a:defRPr>
+            </a:pPr>
+            <a:r>
+              <a:rPr sz="2025" b="0">
+                <a:solidFill>
+                  <a:srgbClr val="F5F7FB"/>
+                </a:solidFill>
+                <a:latin typeface="Arial"/>
+                <a:ea typeface="Arial"/>
+                <a:cs typeface="Arial"/>
+              </a:rPr>
+              <a:t>201 и 202: регистрация, двусторонний звук, hold / transfer</a:t>
+            </a:r>
+          </a:p>
+        </p:txBody>
+      </p:sp>
+      <p:sp>
+        <p:nvSpPr>
+          <p:cNvPr id="5" name="Home Assistant">
+            <a:extLst xmlns:a="http://schemas.openxmlformats.org/drawingml/2006/main">
+              <a:ext uri="{FF2B5EF4-FFF2-40B4-BE49-F238E27FC236}">
+                <a16:creationId xmlns:a16="http://schemas.microsoft.com/office/drawing/2014/main" id="{8BBDAFB4-7645-472E-8477-A5DE91C24FAE}"/>
               </a:ext>
             </a:extLst>
           </p:cNvPr>
@@ -5356,8 +6375,8 @@
         </p:nvSpPr>
         <p:spPr>
           <a:xfrm xmlns:a="http://schemas.openxmlformats.org/drawingml/2006/main">
-            <a:off x="8382000" y="1762125"/>
-            <a:ext cx="2762250" cy="1428750"/>
+            <a:off x="571500" y="3009900"/>
+            <a:ext cx="10572750" cy="819150"/>
           </a:xfrm>
           <a:prstGeom xmlns:a="http://schemas.openxmlformats.org/drawingml/2006/main" prst="rect">
             <a:avLst/>
@@ -5373,7 +6392,7 @@
           </a:bodyPr>
           <a:lstStyle xmlns:a="http://schemas.openxmlformats.org/drawingml/2006/main">
             <a:defPPr algn="l">
-              <a:defRPr sz="7875" b="1">
+              <a:defRPr sz="2550" b="1">
                 <a:solidFill>
                   <a:srgbClr val="F7CB64"/>
                 </a:solidFill>
@@ -5385,7 +6404,7 @@
           </a:lstStyle>
           <a:p xmlns:a="http://schemas.openxmlformats.org/drawingml/2006/main">
             <a:pPr algn="l">
-              <a:defRPr sz="7875" b="1">
+              <a:defRPr sz="2550" b="1">
                 <a:solidFill>
                   <a:srgbClr val="F7CB64"/>
                 </a:solidFill>
@@ -5395,7 +6414,7 @@
               </a:defRPr>
             </a:pPr>
             <a:r>
-              <a:rPr sz="7875" b="1">
+              <a:rPr sz="2550" b="1">
                 <a:solidFill>
                   <a:srgbClr val="F7CB64"/>
                 </a:solidFill>
@@ -5403,17 +6422,17 @@
                 <a:ea typeface="Arial"/>
                 <a:cs typeface="Arial"/>
               </a:rPr>
-              <a:t>10</a:t>
-            </a:r>
-          </a:p>
-        </p:txBody>
-      </p:sp>
-      <p:sp>
-        <p:nvSpPr>
-          <p:cNvPr id="6" name="Один аппарат">
-            <a:extLst xmlns:a="http://schemas.openxmlformats.org/drawingml/2006/main">
-              <a:ext uri="{FF2B5EF4-FFF2-40B4-BE49-F238E27FC236}">
-                <a16:creationId xmlns:a16="http://schemas.microsoft.com/office/drawing/2014/main" id="{3B4CF139-CAA0-4211-B459-1A79272DAA73}"/>
+              <a:t>Home Assistant</a:t>
+            </a:r>
+          </a:p>
+        </p:txBody>
+      </p:sp>
+      <p:sp>
+        <p:nvSpPr>
+          <p:cNvPr id="6" name="Состояния, Originate, Hangup нужного Channel, DTMF">
+            <a:extLst xmlns:a="http://schemas.openxmlformats.org/drawingml/2006/main">
+              <a:ext uri="{FF2B5EF4-FFF2-40B4-BE49-F238E27FC236}">
+                <a16:creationId xmlns:a16="http://schemas.microsoft.com/office/drawing/2014/main" id="{7057260E-5741-4869-9C74-F47671EA71F0}"/>
               </a:ext>
             </a:extLst>
           </p:cNvPr>
@@ -5424,8 +6443,8 @@
         </p:nvSpPr>
         <p:spPr>
           <a:xfrm xmlns:a="http://schemas.openxmlformats.org/drawingml/2006/main">
-            <a:off x="571500" y="3524250"/>
-            <a:ext cx="3048000" cy="819150"/>
+            <a:off x="571500" y="3590925"/>
+            <a:ext cx="10572750" cy="600075"/>
           </a:xfrm>
           <a:prstGeom xmlns:a="http://schemas.openxmlformats.org/drawingml/2006/main" prst="rect">
             <a:avLst/>
@@ -5441,7 +6460,7 @@
           </a:bodyPr>
           <a:lstStyle xmlns:a="http://schemas.openxmlformats.org/drawingml/2006/main">
             <a:defPPr algn="l">
-              <a:defRPr sz="2175" b="1">
+              <a:defRPr sz="2025" b="0">
                 <a:solidFill>
                   <a:srgbClr val="F5F7FB"/>
                 </a:solidFill>
@@ -5453,35 +6472,35 @@
           </a:lstStyle>
           <a:p xmlns:a="http://schemas.openxmlformats.org/drawingml/2006/main">
             <a:pPr algn="l">
-              <a:defRPr sz="2175" b="1">
-                <a:solidFill>
-                  <a:srgbClr val="F5F7FB"/>
-                </a:solidFill>
-                <a:latin typeface="Arial"/>
-                <a:ea typeface="Arial"/>
-                <a:cs typeface="Arial"/>
-              </a:defRPr>
-            </a:pPr>
-            <a:r>
-              <a:rPr sz="2175" b="1">
-                <a:solidFill>
-                  <a:srgbClr val="F5F7FB"/>
-                </a:solidFill>
-                <a:latin typeface="Arial"/>
-                <a:ea typeface="Arial"/>
-                <a:cs typeface="Arial"/>
-              </a:rPr>
-              <a:t>Один аппарат</a:t>
-            </a:r>
-          </a:p>
-        </p:txBody>
-      </p:sp>
-      <p:sp>
-        <p:nvSpPr>
-          <p:cNvPr id="7" name="Два участника">
-            <a:extLst xmlns:a="http://schemas.openxmlformats.org/drawingml/2006/main">
-              <a:ext uri="{FF2B5EF4-FFF2-40B4-BE49-F238E27FC236}">
-                <a16:creationId xmlns:a16="http://schemas.microsoft.com/office/drawing/2014/main" id="{969912E1-B8B0-4E93-9612-7FB24E6E15E3}"/>
+              <a:defRPr sz="2025" b="0">
+                <a:solidFill>
+                  <a:srgbClr val="F5F7FB"/>
+                </a:solidFill>
+                <a:latin typeface="Arial"/>
+                <a:ea typeface="Arial"/>
+                <a:cs typeface="Arial"/>
+              </a:defRPr>
+            </a:pPr>
+            <a:r>
+              <a:rPr sz="2025" b="0">
+                <a:solidFill>
+                  <a:srgbClr val="F5F7FB"/>
+                </a:solidFill>
+                <a:latin typeface="Arial"/>
+                <a:ea typeface="Arial"/>
+                <a:cs typeface="Arial"/>
+              </a:rPr>
+              <a:t>Состояния, Originate, Hangup нужного Channel, DTMF</a:t>
+            </a:r>
+          </a:p>
+        </p:txBody>
+      </p:sp>
+      <p:sp>
+        <p:nvSpPr>
+          <p:cNvPr id="7" name="Assist 630">
+            <a:extLst xmlns:a="http://schemas.openxmlformats.org/drawingml/2006/main">
+              <a:ext uri="{FF2B5EF4-FFF2-40B4-BE49-F238E27FC236}">
+                <a16:creationId xmlns:a16="http://schemas.microsoft.com/office/drawing/2014/main" id="{0ECBC9DD-C56B-40C6-8373-A5C80C26D367}"/>
               </a:ext>
             </a:extLst>
           </p:cNvPr>
@@ -5492,8 +6511,8 @@
         </p:nvSpPr>
         <p:spPr>
           <a:xfrm xmlns:a="http://schemas.openxmlformats.org/drawingml/2006/main">
-            <a:off x="4476750" y="3524250"/>
-            <a:ext cx="3238500" cy="819150"/>
+            <a:off x="571500" y="4333875"/>
+            <a:ext cx="10572750" cy="819150"/>
           </a:xfrm>
           <a:prstGeom xmlns:a="http://schemas.openxmlformats.org/drawingml/2006/main" prst="rect">
             <a:avLst/>
@@ -5509,9 +6528,9 @@
           </a:bodyPr>
           <a:lstStyle xmlns:a="http://schemas.openxmlformats.org/drawingml/2006/main">
             <a:defPPr algn="l">
-              <a:defRPr sz="2175" b="1">
-                <a:solidFill>
-                  <a:srgbClr val="F5F7FB"/>
+              <a:defRPr sz="2550" b="1">
+                <a:solidFill>
+                  <a:srgbClr val="FF836D"/>
                 </a:solidFill>
                 <a:latin typeface="Arial"/>
                 <a:ea typeface="Arial"/>
@@ -5521,35 +6540,35 @@
           </a:lstStyle>
           <a:p xmlns:a="http://schemas.openxmlformats.org/drawingml/2006/main">
             <a:pPr algn="l">
-              <a:defRPr sz="2175" b="1">
-                <a:solidFill>
-                  <a:srgbClr val="F5F7FB"/>
-                </a:solidFill>
-                <a:latin typeface="Arial"/>
-                <a:ea typeface="Arial"/>
-                <a:cs typeface="Arial"/>
-              </a:defRPr>
-            </a:pPr>
-            <a:r>
-              <a:rPr sz="2175" b="1">
-                <a:solidFill>
-                  <a:srgbClr val="F5F7FB"/>
-                </a:solidFill>
-                <a:latin typeface="Arial"/>
-                <a:ea typeface="Arial"/>
-                <a:cs typeface="Arial"/>
-              </a:rPr>
-              <a:t>Два участника</a:t>
-            </a:r>
-          </a:p>
-        </p:txBody>
-      </p:sp>
-      <p:sp>
-        <p:nvSpPr>
-          <p:cNvPr id="8" name="Вся партия">
-            <a:extLst xmlns:a="http://schemas.openxmlformats.org/drawingml/2006/main">
-              <a:ext uri="{FF2B5EF4-FFF2-40B4-BE49-F238E27FC236}">
-                <a16:creationId xmlns:a16="http://schemas.microsoft.com/office/drawing/2014/main" id="{08263B00-0C8D-40B6-B17C-C8044A60E970}"/>
+              <a:defRPr sz="2550" b="1">
+                <a:solidFill>
+                  <a:srgbClr val="FF836D"/>
+                </a:solidFill>
+                <a:latin typeface="Arial"/>
+                <a:ea typeface="Arial"/>
+                <a:cs typeface="Arial"/>
+              </a:defRPr>
+            </a:pPr>
+            <a:r>
+              <a:rPr sz="2550" b="1">
+                <a:solidFill>
+                  <a:srgbClr val="FF836D"/>
+                </a:solidFill>
+                <a:latin typeface="Arial"/>
+                <a:ea typeface="Arial"/>
+                <a:cs typeface="Arial"/>
+              </a:rPr>
+              <a:t>Assist 630</a:t>
+            </a:r>
+          </a:p>
+        </p:txBody>
+      </p:sp>
+      <p:sp>
+        <p:nvSpPr>
+          <p:cNvPr id="8" name="Распознавание, ответ голосом и завершение разговора">
+            <a:extLst xmlns:a="http://schemas.openxmlformats.org/drawingml/2006/main">
+              <a:ext uri="{FF2B5EF4-FFF2-40B4-BE49-F238E27FC236}">
+                <a16:creationId xmlns:a16="http://schemas.microsoft.com/office/drawing/2014/main" id="{A1B7B418-D82B-4E40-BC76-245441AA0AA3}"/>
               </a:ext>
             </a:extLst>
           </p:cNvPr>
@@ -5560,8 +6579,8 @@
         </p:nvSpPr>
         <p:spPr>
           <a:xfrm xmlns:a="http://schemas.openxmlformats.org/drawingml/2006/main">
-            <a:off x="8382000" y="3524250"/>
-            <a:ext cx="2952750" cy="819150"/>
+            <a:off x="571500" y="4914900"/>
+            <a:ext cx="10572750" cy="600075"/>
           </a:xfrm>
           <a:prstGeom xmlns:a="http://schemas.openxmlformats.org/drawingml/2006/main" prst="rect">
             <a:avLst/>
@@ -5577,7 +6596,7 @@
           </a:bodyPr>
           <a:lstStyle xmlns:a="http://schemas.openxmlformats.org/drawingml/2006/main">
             <a:defPPr algn="l">
-              <a:defRPr sz="2175" b="1">
+              <a:defRPr sz="2025" b="0">
                 <a:solidFill>
                   <a:srgbClr val="F5F7FB"/>
                 </a:solidFill>
@@ -5589,308 +6608,35 @@
           </a:lstStyle>
           <a:p xmlns:a="http://schemas.openxmlformats.org/drawingml/2006/main">
             <a:pPr algn="l">
-              <a:defRPr sz="2175" b="1">
-                <a:solidFill>
-                  <a:srgbClr val="F5F7FB"/>
-                </a:solidFill>
-                <a:latin typeface="Arial"/>
-                <a:ea typeface="Arial"/>
-                <a:cs typeface="Arial"/>
-              </a:defRPr>
-            </a:pPr>
-            <a:r>
-              <a:rPr sz="2175" b="1">
-                <a:solidFill>
-                  <a:srgbClr val="F5F7FB"/>
-                </a:solidFill>
-                <a:latin typeface="Arial"/>
-                <a:ea typeface="Arial"/>
-                <a:cs typeface="Arial"/>
-              </a:rPr>
-              <a:t>Вся партия</a:t>
-            </a:r>
-          </a:p>
-        </p:txBody>
-      </p:sp>
-      <p:sp>
-        <p:nvSpPr>
-          <p:cNvPr id="9" name="Прошивка&#10;и регистрация">
-            <a:extLst xmlns:a="http://schemas.openxmlformats.org/drawingml/2006/main">
-              <a:ext uri="{FF2B5EF4-FFF2-40B4-BE49-F238E27FC236}">
-                <a16:creationId xmlns:a16="http://schemas.microsoft.com/office/drawing/2014/main" id="{94082705-85F7-490B-ABE2-64ECAA45980F}"/>
-              </a:ext>
-            </a:extLst>
-          </p:cNvPr>
-          <p:cNvSpPr>
-            <a:spLocks xmlns:a="http://schemas.openxmlformats.org/drawingml/2006/main" noGrp="1"/>
-          </p:cNvSpPr>
-          <p:nvPr/>
-        </p:nvSpPr>
-        <p:spPr>
-          <a:xfrm xmlns:a="http://schemas.openxmlformats.org/drawingml/2006/main">
-            <a:off x="571500" y="4210050"/>
-            <a:ext cx="3143250" cy="952500"/>
-          </a:xfrm>
-          <a:prstGeom xmlns:a="http://schemas.openxmlformats.org/drawingml/2006/main" prst="rect">
-            <a:avLst/>
-          </a:prstGeom>
-          <a:noFill xmlns:a="http://schemas.openxmlformats.org/drawingml/2006/main"/>
-          <a:ln xmlns:a="http://schemas.openxmlformats.org/drawingml/2006/main" w="0">
-            <a:noFill/>
-          </a:ln>
-        </p:spPr>
-        <p:txBody>
-          <a:bodyPr xmlns:a="http://schemas.openxmlformats.org/drawingml/2006/main" wrap="square" lIns="0" tIns="0" rIns="0" bIns="0" anchor="t">
-            <a:noAutofit/>
-          </a:bodyPr>
-          <a:lstStyle xmlns:a="http://schemas.openxmlformats.org/drawingml/2006/main">
-            <a:defPPr algn="l">
-              <a:defRPr sz="2100" b="0">
-                <a:solidFill>
-                  <a:srgbClr val="AAB9D0"/>
-                </a:solidFill>
-                <a:latin typeface="Arial"/>
-                <a:ea typeface="Arial"/>
-                <a:cs typeface="Arial"/>
-              </a:defRPr>
-            </a:defPPr>
-          </a:lstStyle>
-          <a:p xmlns:a="http://schemas.openxmlformats.org/drawingml/2006/main">
-            <a:pPr algn="l">
-              <a:defRPr sz="2100" b="0">
-                <a:solidFill>
-                  <a:srgbClr val="AAB9D0"/>
-                </a:solidFill>
-                <a:latin typeface="Arial"/>
-                <a:ea typeface="Arial"/>
-                <a:cs typeface="Arial"/>
-              </a:defRPr>
-            </a:pPr>
-            <a:r>
-              <a:rPr sz="2100" b="0">
-                <a:solidFill>
-                  <a:srgbClr val="AAB9D0"/>
-                </a:solidFill>
-                <a:latin typeface="Arial"/>
-                <a:ea typeface="Arial"/>
-                <a:cs typeface="Arial"/>
-              </a:rPr>
-              <a:t>Прошивка</a:t>
-            </a:r>
-          </a:p>
-          <a:p xmlns:a="http://schemas.openxmlformats.org/drawingml/2006/main">
-            <a:pPr algn="l">
-              <a:defRPr sz="2100" b="0">
-                <a:solidFill>
-                  <a:srgbClr val="AAB9D0"/>
-                </a:solidFill>
-                <a:latin typeface="Arial"/>
-                <a:ea typeface="Arial"/>
-                <a:cs typeface="Arial"/>
-              </a:defRPr>
-            </a:pPr>
-            <a:r>
-              <a:rPr sz="2100" b="0">
-                <a:solidFill>
-                  <a:srgbClr val="AAB9D0"/>
-                </a:solidFill>
-                <a:latin typeface="Arial"/>
-                <a:ea typeface="Arial"/>
-                <a:cs typeface="Arial"/>
-              </a:rPr>
-              <a:t>и регистрация</a:t>
-            </a:r>
-          </a:p>
-        </p:txBody>
-      </p:sp>
-      <p:sp>
-        <p:nvSpPr>
-          <p:cNvPr id="10" name="Двусторонний&#10;звонок и DTMF">
-            <a:extLst xmlns:a="http://schemas.openxmlformats.org/drawingml/2006/main">
-              <a:ext uri="{FF2B5EF4-FFF2-40B4-BE49-F238E27FC236}">
-                <a16:creationId xmlns:a16="http://schemas.microsoft.com/office/drawing/2014/main" id="{68EA7ABA-2500-4489-9256-8CCA598F33B1}"/>
-              </a:ext>
-            </a:extLst>
-          </p:cNvPr>
-          <p:cNvSpPr>
-            <a:spLocks xmlns:a="http://schemas.openxmlformats.org/drawingml/2006/main" noGrp="1"/>
-          </p:cNvSpPr>
-          <p:nvPr/>
-        </p:nvSpPr>
-        <p:spPr>
-          <a:xfrm xmlns:a="http://schemas.openxmlformats.org/drawingml/2006/main">
-            <a:off x="4476750" y="4210050"/>
-            <a:ext cx="3143250" cy="952500"/>
-          </a:xfrm>
-          <a:prstGeom xmlns:a="http://schemas.openxmlformats.org/drawingml/2006/main" prst="rect">
-            <a:avLst/>
-          </a:prstGeom>
-          <a:noFill xmlns:a="http://schemas.openxmlformats.org/drawingml/2006/main"/>
-          <a:ln xmlns:a="http://schemas.openxmlformats.org/drawingml/2006/main" w="0">
-            <a:noFill/>
-          </a:ln>
-        </p:spPr>
-        <p:txBody>
-          <a:bodyPr xmlns:a="http://schemas.openxmlformats.org/drawingml/2006/main" wrap="square" lIns="0" tIns="0" rIns="0" bIns="0" anchor="t">
-            <a:noAutofit/>
-          </a:bodyPr>
-          <a:lstStyle xmlns:a="http://schemas.openxmlformats.org/drawingml/2006/main">
-            <a:defPPr algn="l">
-              <a:defRPr sz="2100" b="0">
-                <a:solidFill>
-                  <a:srgbClr val="AAB9D0"/>
-                </a:solidFill>
-                <a:latin typeface="Arial"/>
-                <a:ea typeface="Arial"/>
-                <a:cs typeface="Arial"/>
-              </a:defRPr>
-            </a:defPPr>
-          </a:lstStyle>
-          <a:p xmlns:a="http://schemas.openxmlformats.org/drawingml/2006/main">
-            <a:pPr algn="l">
-              <a:defRPr sz="2100" b="0">
-                <a:solidFill>
-                  <a:srgbClr val="AAB9D0"/>
-                </a:solidFill>
-                <a:latin typeface="Arial"/>
-                <a:ea typeface="Arial"/>
-                <a:cs typeface="Arial"/>
-              </a:defRPr>
-            </a:pPr>
-            <a:r>
-              <a:rPr sz="2100" b="0">
-                <a:solidFill>
-                  <a:srgbClr val="AAB9D0"/>
-                </a:solidFill>
-                <a:latin typeface="Arial"/>
-                <a:ea typeface="Arial"/>
-                <a:cs typeface="Arial"/>
-              </a:rPr>
-              <a:t>Двусторонний</a:t>
-            </a:r>
-          </a:p>
-          <a:p xmlns:a="http://schemas.openxmlformats.org/drawingml/2006/main">
-            <a:pPr algn="l">
-              <a:defRPr sz="2100" b="0">
-                <a:solidFill>
-                  <a:srgbClr val="AAB9D0"/>
-                </a:solidFill>
-                <a:latin typeface="Arial"/>
-                <a:ea typeface="Arial"/>
-                <a:cs typeface="Arial"/>
-              </a:defRPr>
-            </a:pPr>
-            <a:r>
-              <a:rPr sz="2100" b="0">
-                <a:solidFill>
-                  <a:srgbClr val="AAB9D0"/>
-                </a:solidFill>
-                <a:latin typeface="Arial"/>
-                <a:ea typeface="Arial"/>
-                <a:cs typeface="Arial"/>
-              </a:rPr>
-              <a:t>звонок и DTMF</a:t>
-            </a:r>
-          </a:p>
-        </p:txBody>
-      </p:sp>
-      <p:sp>
-        <p:nvSpPr>
-          <p:cNvPr id="11" name="Последовательное&#10;подключение">
-            <a:extLst xmlns:a="http://schemas.openxmlformats.org/drawingml/2006/main">
-              <a:ext uri="{FF2B5EF4-FFF2-40B4-BE49-F238E27FC236}">
-                <a16:creationId xmlns:a16="http://schemas.microsoft.com/office/drawing/2014/main" id="{A6763F0F-115B-4B17-B19E-DB9220F91533}"/>
-              </a:ext>
-            </a:extLst>
-          </p:cNvPr>
-          <p:cNvSpPr>
-            <a:spLocks xmlns:a="http://schemas.openxmlformats.org/drawingml/2006/main" noGrp="1"/>
-          </p:cNvSpPr>
-          <p:nvPr/>
-        </p:nvSpPr>
-        <p:spPr>
-          <a:xfrm xmlns:a="http://schemas.openxmlformats.org/drawingml/2006/main">
-            <a:off x="8382000" y="4210050"/>
-            <a:ext cx="3143250" cy="952500"/>
-          </a:xfrm>
-          <a:prstGeom xmlns:a="http://schemas.openxmlformats.org/drawingml/2006/main" prst="rect">
-            <a:avLst/>
-          </a:prstGeom>
-          <a:noFill xmlns:a="http://schemas.openxmlformats.org/drawingml/2006/main"/>
-          <a:ln xmlns:a="http://schemas.openxmlformats.org/drawingml/2006/main" w="0">
-            <a:noFill/>
-          </a:ln>
-        </p:spPr>
-        <p:txBody>
-          <a:bodyPr xmlns:a="http://schemas.openxmlformats.org/drawingml/2006/main" wrap="square" lIns="0" tIns="0" rIns="0" bIns="0" anchor="t">
-            <a:noAutofit/>
-          </a:bodyPr>
-          <a:lstStyle xmlns:a="http://schemas.openxmlformats.org/drawingml/2006/main">
-            <a:defPPr algn="l">
-              <a:defRPr sz="2100" b="0">
-                <a:solidFill>
-                  <a:srgbClr val="AAB9D0"/>
-                </a:solidFill>
-                <a:latin typeface="Arial"/>
-                <a:ea typeface="Arial"/>
-                <a:cs typeface="Arial"/>
-              </a:defRPr>
-            </a:defPPr>
-          </a:lstStyle>
-          <a:p xmlns:a="http://schemas.openxmlformats.org/drawingml/2006/main">
-            <a:pPr algn="l">
-              <a:defRPr sz="2100" b="0">
-                <a:solidFill>
-                  <a:srgbClr val="AAB9D0"/>
-                </a:solidFill>
-                <a:latin typeface="Arial"/>
-                <a:ea typeface="Arial"/>
-                <a:cs typeface="Arial"/>
-              </a:defRPr>
-            </a:pPr>
-            <a:r>
-              <a:rPr sz="2100" b="0">
-                <a:solidFill>
-                  <a:srgbClr val="AAB9D0"/>
-                </a:solidFill>
-                <a:latin typeface="Arial"/>
-                <a:ea typeface="Arial"/>
-                <a:cs typeface="Arial"/>
-              </a:rPr>
-              <a:t>Последовательное</a:t>
-            </a:r>
-          </a:p>
-          <a:p xmlns:a="http://schemas.openxmlformats.org/drawingml/2006/main">
-            <a:pPr algn="l">
-              <a:defRPr sz="2100" b="0">
-                <a:solidFill>
-                  <a:srgbClr val="AAB9D0"/>
-                </a:solidFill>
-                <a:latin typeface="Arial"/>
-                <a:ea typeface="Arial"/>
-                <a:cs typeface="Arial"/>
-              </a:defRPr>
-            </a:pPr>
-            <a:r>
-              <a:rPr sz="2100" b="0">
-                <a:solidFill>
-                  <a:srgbClr val="AAB9D0"/>
-                </a:solidFill>
-                <a:latin typeface="Arial"/>
-                <a:ea typeface="Arial"/>
-                <a:cs typeface="Arial"/>
-              </a:rPr>
-              <a:t>подключение</a:t>
-            </a:r>
-          </a:p>
-        </p:txBody>
-      </p:sp>
-      <p:sp>
-        <p:nvSpPr>
-          <p:cNvPr id="12" name="В репозитории: runbook, scripts, manifests, SVG и эта редактируем">
-            <a:extLst xmlns:a="http://schemas.openxmlformats.org/drawingml/2006/main">
-              <a:ext uri="{FF2B5EF4-FFF2-40B4-BE49-F238E27FC236}">
-                <a16:creationId xmlns:a16="http://schemas.microsoft.com/office/drawing/2014/main" id="{6437EA08-1571-453B-AFF5-4AFD90F1C7C4}"/>
+              <a:defRPr sz="2025" b="0">
+                <a:solidFill>
+                  <a:srgbClr val="F5F7FB"/>
+                </a:solidFill>
+                <a:latin typeface="Arial"/>
+                <a:ea typeface="Arial"/>
+                <a:cs typeface="Arial"/>
+              </a:defRPr>
+            </a:pPr>
+            <a:r>
+              <a:rPr sz="2025" b="0">
+                <a:solidFill>
+                  <a:srgbClr val="F5F7FB"/>
+                </a:solidFill>
+                <a:latin typeface="Arial"/>
+                <a:ea typeface="Arial"/>
+                <a:cs typeface="Arial"/>
+              </a:rPr>
+              <a:t>Распознавание, ответ голосом и завершение разговора</a:t>
+            </a:r>
+          </a:p>
+        </p:txBody>
+      </p:sp>
+      <p:sp>
+        <p:nvSpPr>
+          <p:cNvPr id="9" name="Повторить после перезапусков телефона, PBX и HA. Readiness не под">
+            <a:extLst xmlns:a="http://schemas.openxmlformats.org/drawingml/2006/main">
+              <a:ext uri="{FF2B5EF4-FFF2-40B4-BE49-F238E27FC236}">
+                <a16:creationId xmlns:a16="http://schemas.microsoft.com/office/drawing/2014/main" id="{076C4C0F-5D83-4D4C-82DB-3B77BAE92E93}"/>
               </a:ext>
             </a:extLst>
           </p:cNvPr>
@@ -5948,7 +6694,7 @@
                 <a:ea typeface="Arial"/>
                 <a:cs typeface="Arial"/>
               </a:rPr>
-              <a:t>В репозитории: runbook, scripts, manifests, SVG и эта редактируемая презентация.</a:t>
+              <a:t>Повторить после перезапусков телефона, PBX и HA. Readiness не подтверждает звук.</a:t>
             </a:r>
           </a:p>
         </p:txBody>
@@ -5956,7 +6702,1109 @@
     </p:spTree>
     <p:extLst>
       <p:ext uri="{BB962C8B-B14F-4D97-AF65-F5344CB8AC3E}">
-        <p14:creationId xmlns:p14="http://schemas.microsoft.com/office/powerpoint/2010/main" val="1562719145"/>
+        <p14:creationId xmlns:p14="http://schemas.microsoft.com/office/powerpoint/2010/main" val="1090182417"/>
+      </p:ext>
+    </p:extLst>
+  </p:cSld>
+</p:sld>
+</file>
+
+<file path=ppt/slides/slide13.xml><?xml version="1.0" encoding="utf-8"?>
+<p:sld xmlns:p="http://schemas.openxmlformats.org/presentationml/2006/main">
+  <p:cSld>
+    <p:bg>
+      <p:bgPr>
+        <a:solidFill xmlns:a="http://schemas.openxmlformats.org/drawingml/2006/main">
+          <a:srgbClr val="101C34"/>
+        </a:solidFill>
+      </p:bgPr>
+    </p:bg>
+    <p:spTree>
+      <p:nvGrpSpPr>
+        <p:cNvPr id="1" name=""/>
+        <p:cNvGrpSpPr/>
+        <p:nvPr/>
+      </p:nvGrpSpPr>
+      <p:grpSpPr>
+        <a:xfrm xmlns:a="http://schemas.openxmlformats.org/drawingml/2006/main"/>
+      </p:grpSpPr>
+      <p:sp>
+        <p:nvSpPr>
+          <p:cNvPr id="8" name="Эксплуатация и восстановление">
+            <a:extLst xmlns:a="http://schemas.openxmlformats.org/drawingml/2006/main">
+              <a:ext uri="{FF2B5EF4-FFF2-40B4-BE49-F238E27FC236}">
+                <a16:creationId xmlns:a16="http://schemas.microsoft.com/office/drawing/2014/main" id="{71DC407F-A424-40DF-99A6-A9DD37CA2331}"/>
+              </a:ext>
+            </a:extLst>
+          </p:cNvPr>
+          <p:cNvSpPr>
+            <a:spLocks xmlns:a="http://schemas.openxmlformats.org/drawingml/2006/main" noGrp="1"/>
+          </p:cNvSpPr>
+          <p:nvPr/>
+        </p:nvSpPr>
+        <p:spPr>
+          <a:xfrm xmlns:a="http://schemas.openxmlformats.org/drawingml/2006/main">
+            <a:off x="571500" y="419100"/>
+            <a:ext cx="10953750" cy="1000125"/>
+          </a:xfrm>
+          <a:prstGeom xmlns:a="http://schemas.openxmlformats.org/drawingml/2006/main" prst="rect">
+            <a:avLst/>
+          </a:prstGeom>
+          <a:noFill xmlns:a="http://schemas.openxmlformats.org/drawingml/2006/main"/>
+          <a:ln xmlns:a="http://schemas.openxmlformats.org/drawingml/2006/main" w="0">
+            <a:noFill/>
+          </a:ln>
+        </p:spPr>
+        <p:txBody>
+          <a:bodyPr xmlns:a="http://schemas.openxmlformats.org/drawingml/2006/main" wrap="square" lIns="0" tIns="0" rIns="0" bIns="0" anchor="t">
+            <a:noAutofit/>
+          </a:bodyPr>
+          <a:lstStyle xmlns:a="http://schemas.openxmlformats.org/drawingml/2006/main">
+            <a:defPPr algn="l">
+              <a:defRPr sz="3375" b="1">
+                <a:solidFill>
+                  <a:srgbClr val="F5F7FB"/>
+                </a:solidFill>
+                <a:latin typeface="Arial"/>
+                <a:ea typeface="Arial"/>
+                <a:cs typeface="Arial"/>
+              </a:defRPr>
+            </a:defPPr>
+          </a:lstStyle>
+          <a:p xmlns:a="http://schemas.openxmlformats.org/drawingml/2006/main">
+            <a:pPr algn="l">
+              <a:defRPr sz="3375" b="1">
+                <a:solidFill>
+                  <a:srgbClr val="F5F7FB"/>
+                </a:solidFill>
+                <a:latin typeface="Arial"/>
+                <a:ea typeface="Arial"/>
+                <a:cs typeface="Arial"/>
+              </a:defRPr>
+            </a:pPr>
+            <a:r>
+              <a:rPr sz="3375" b="1">
+                <a:solidFill>
+                  <a:srgbClr val="F5F7FB"/>
+                </a:solidFill>
+                <a:latin typeface="Arial"/>
+                <a:ea typeface="Arial"/>
+                <a:cs typeface="Arial"/>
+              </a:rPr>
+              <a:t>Эксплуатация и восстановление</a:t>
+            </a:r>
+          </a:p>
+        </p:txBody>
+      </p:sp>
+      <p:sp>
+        <p:nvSpPr>
+          <p:cNvPr id="2" name="13">
+            <a:extLst xmlns:a="http://schemas.openxmlformats.org/drawingml/2006/main">
+              <a:ext uri="{FF2B5EF4-FFF2-40B4-BE49-F238E27FC236}">
+                <a16:creationId xmlns:a16="http://schemas.microsoft.com/office/drawing/2014/main" id="{3BFF78FB-BF88-4D1E-A474-4B25A29F40AC}"/>
+              </a:ext>
+            </a:extLst>
+          </p:cNvPr>
+          <p:cNvSpPr>
+            <a:spLocks xmlns:a="http://schemas.openxmlformats.org/drawingml/2006/main" noGrp="1"/>
+          </p:cNvSpPr>
+          <p:nvPr/>
+        </p:nvSpPr>
+        <p:spPr>
+          <a:xfrm xmlns:a="http://schemas.openxmlformats.org/drawingml/2006/main">
+            <a:off x="11049000" y="6362700"/>
+            <a:ext cx="571500" cy="209550"/>
+          </a:xfrm>
+          <a:prstGeom xmlns:a="http://schemas.openxmlformats.org/drawingml/2006/main" prst="rect">
+            <a:avLst/>
+          </a:prstGeom>
+          <a:noFill xmlns:a="http://schemas.openxmlformats.org/drawingml/2006/main"/>
+          <a:ln xmlns:a="http://schemas.openxmlformats.org/drawingml/2006/main" w="0">
+            <a:noFill/>
+          </a:ln>
+        </p:spPr>
+        <p:txBody>
+          <a:bodyPr xmlns:a="http://schemas.openxmlformats.org/drawingml/2006/main" wrap="square" lIns="0" tIns="0" rIns="0" bIns="0" anchor="t">
+            <a:noAutofit/>
+          </a:bodyPr>
+          <a:lstStyle xmlns:a="http://schemas.openxmlformats.org/drawingml/2006/main">
+            <a:defPPr algn="r">
+              <a:defRPr sz="1275" b="0">
+                <a:solidFill>
+                  <a:srgbClr val="AAB9D0"/>
+                </a:solidFill>
+                <a:latin typeface="Arial"/>
+                <a:ea typeface="Arial"/>
+                <a:cs typeface="Arial"/>
+              </a:defRPr>
+            </a:defPPr>
+          </a:lstStyle>
+          <a:p xmlns:a="http://schemas.openxmlformats.org/drawingml/2006/main">
+            <a:pPr algn="r">
+              <a:defRPr sz="1275" b="0">
+                <a:solidFill>
+                  <a:srgbClr val="AAB9D0"/>
+                </a:solidFill>
+                <a:latin typeface="Arial"/>
+                <a:ea typeface="Arial"/>
+                <a:cs typeface="Arial"/>
+              </a:defRPr>
+            </a:pPr>
+            <a:r>
+              <a:rPr sz="1275" b="0">
+                <a:solidFill>
+                  <a:srgbClr val="AAB9D0"/>
+                </a:solidFill>
+                <a:latin typeface="Arial"/>
+                <a:ea typeface="Arial"/>
+                <a:cs typeface="Arial"/>
+              </a:rPr>
+              <a:t>13</a:t>
+            </a:r>
+          </a:p>
+        </p:txBody>
+      </p:sp>
+      <p:sp>
+        <p:nvSpPr>
+          <p:cNvPr id="3" name="Резервная копия вне Git">
+            <a:extLst xmlns:a="http://schemas.openxmlformats.org/drawingml/2006/main">
+              <a:ext uri="{FF2B5EF4-FFF2-40B4-BE49-F238E27FC236}">
+                <a16:creationId xmlns:a16="http://schemas.microsoft.com/office/drawing/2014/main" id="{1B5B3201-96E5-458C-97C7-03A56E282920}"/>
+              </a:ext>
+            </a:extLst>
+          </p:cNvPr>
+          <p:cNvSpPr>
+            <a:spLocks xmlns:a="http://schemas.openxmlformats.org/drawingml/2006/main" noGrp="1"/>
+          </p:cNvSpPr>
+          <p:nvPr/>
+        </p:nvSpPr>
+        <p:spPr>
+          <a:xfrm xmlns:a="http://schemas.openxmlformats.org/drawingml/2006/main">
+            <a:off x="571500" y="1762125"/>
+            <a:ext cx="10572750" cy="819150"/>
+          </a:xfrm>
+          <a:prstGeom xmlns:a="http://schemas.openxmlformats.org/drawingml/2006/main" prst="rect">
+            <a:avLst/>
+          </a:prstGeom>
+          <a:noFill xmlns:a="http://schemas.openxmlformats.org/drawingml/2006/main"/>
+          <a:ln xmlns:a="http://schemas.openxmlformats.org/drawingml/2006/main" w="0">
+            <a:noFill/>
+          </a:ln>
+        </p:spPr>
+        <p:txBody>
+          <a:bodyPr xmlns:a="http://schemas.openxmlformats.org/drawingml/2006/main" wrap="square" lIns="0" tIns="0" rIns="0" bIns="0" anchor="t">
+            <a:noAutofit/>
+          </a:bodyPr>
+          <a:lstStyle xmlns:a="http://schemas.openxmlformats.org/drawingml/2006/main">
+            <a:defPPr algn="l">
+              <a:defRPr sz="2550" b="1">
+                <a:solidFill>
+                  <a:srgbClr val="48DDCC"/>
+                </a:solidFill>
+                <a:latin typeface="Arial"/>
+                <a:ea typeface="Arial"/>
+                <a:cs typeface="Arial"/>
+              </a:defRPr>
+            </a:defPPr>
+          </a:lstStyle>
+          <a:p xmlns:a="http://schemas.openxmlformats.org/drawingml/2006/main">
+            <a:pPr algn="l">
+              <a:defRPr sz="2550" b="1">
+                <a:solidFill>
+                  <a:srgbClr val="48DDCC"/>
+                </a:solidFill>
+                <a:latin typeface="Arial"/>
+                <a:ea typeface="Arial"/>
+                <a:cs typeface="Arial"/>
+              </a:defRPr>
+            </a:pPr>
+            <a:r>
+              <a:rPr sz="2550" b="1">
+                <a:solidFill>
+                  <a:srgbClr val="48DDCC"/>
+                </a:solidFill>
+                <a:latin typeface="Arial"/>
+                <a:ea typeface="Arial"/>
+                <a:cs typeface="Arial"/>
+              </a:rPr>
+              <a:t>Резервная копия вне Git</a:t>
+            </a:r>
+          </a:p>
+        </p:txBody>
+      </p:sp>
+      <p:sp>
+        <p:nvSpPr>
+          <p:cNvPr id="4" name="Инвентарь, SIP / AMI секреты и данные Asterisk&#10;HA config / .stora">
+            <a:extLst xmlns:a="http://schemas.openxmlformats.org/drawingml/2006/main">
+              <a:ext uri="{FF2B5EF4-FFF2-40B4-BE49-F238E27FC236}">
+                <a16:creationId xmlns:a16="http://schemas.microsoft.com/office/drawing/2014/main" id="{2FFBE255-8C8C-4C19-B001-EF03C68E1ED8}"/>
+              </a:ext>
+            </a:extLst>
+          </p:cNvPr>
+          <p:cNvSpPr>
+            <a:spLocks xmlns:a="http://schemas.openxmlformats.org/drawingml/2006/main" noGrp="1"/>
+          </p:cNvSpPr>
+          <p:nvPr/>
+        </p:nvSpPr>
+        <p:spPr>
+          <a:xfrm xmlns:a="http://schemas.openxmlformats.org/drawingml/2006/main">
+            <a:off x="571500" y="2381250"/>
+            <a:ext cx="10572750" cy="952500"/>
+          </a:xfrm>
+          <a:prstGeom xmlns:a="http://schemas.openxmlformats.org/drawingml/2006/main" prst="rect">
+            <a:avLst/>
+          </a:prstGeom>
+          <a:noFill xmlns:a="http://schemas.openxmlformats.org/drawingml/2006/main"/>
+          <a:ln xmlns:a="http://schemas.openxmlformats.org/drawingml/2006/main" w="0">
+            <a:noFill/>
+          </a:ln>
+        </p:spPr>
+        <p:txBody>
+          <a:bodyPr xmlns:a="http://schemas.openxmlformats.org/drawingml/2006/main" wrap="square" lIns="0" tIns="0" rIns="0" bIns="0" anchor="t">
+            <a:noAutofit/>
+          </a:bodyPr>
+          <a:lstStyle xmlns:a="http://schemas.openxmlformats.org/drawingml/2006/main">
+            <a:defPPr algn="l">
+              <a:defRPr sz="2175" b="0">
+                <a:solidFill>
+                  <a:srgbClr val="F5F7FB"/>
+                </a:solidFill>
+                <a:latin typeface="Arial"/>
+                <a:ea typeface="Arial"/>
+                <a:cs typeface="Arial"/>
+              </a:defRPr>
+            </a:defPPr>
+          </a:lstStyle>
+          <a:p xmlns:a="http://schemas.openxmlformats.org/drawingml/2006/main">
+            <a:pPr algn="l">
+              <a:defRPr sz="2175" b="0">
+                <a:solidFill>
+                  <a:srgbClr val="F5F7FB"/>
+                </a:solidFill>
+                <a:latin typeface="Arial"/>
+                <a:ea typeface="Arial"/>
+                <a:cs typeface="Arial"/>
+              </a:defRPr>
+            </a:pPr>
+            <a:r>
+              <a:rPr sz="2175" b="0">
+                <a:solidFill>
+                  <a:srgbClr val="F5F7FB"/>
+                </a:solidFill>
+                <a:latin typeface="Arial"/>
+                <a:ea typeface="Arial"/>
+                <a:cs typeface="Arial"/>
+              </a:rPr>
+              <a:t>Инвентарь, SIP / AMI секреты и данные Asterisk</a:t>
+            </a:r>
+          </a:p>
+          <a:p xmlns:a="http://schemas.openxmlformats.org/drawingml/2006/main">
+            <a:pPr algn="l">
+              <a:defRPr sz="2175" b="0">
+                <a:solidFill>
+                  <a:srgbClr val="F5F7FB"/>
+                </a:solidFill>
+                <a:latin typeface="Arial"/>
+                <a:ea typeface="Arial"/>
+                <a:cs typeface="Arial"/>
+              </a:defRPr>
+            </a:pPr>
+            <a:r>
+              <a:rPr sz="2175" b="0">
+                <a:solidFill>
+                  <a:srgbClr val="F5F7FB"/>
+                </a:solidFill>
+                <a:latin typeface="Arial"/>
+                <a:ea typeface="Arial"/>
+                <a:cs typeface="Arial"/>
+              </a:rPr>
+              <a:t>HA config / .storage, entity mapping, версии образов</a:t>
+            </a:r>
+          </a:p>
+        </p:txBody>
+      </p:sp>
+      <p:sp>
+        <p:nvSpPr>
+          <p:cNvPr id="5" name="Один узел означает одну точку отказа">
+            <a:extLst xmlns:a="http://schemas.openxmlformats.org/drawingml/2006/main">
+              <a:ext uri="{FF2B5EF4-FFF2-40B4-BE49-F238E27FC236}">
+                <a16:creationId xmlns:a16="http://schemas.microsoft.com/office/drawing/2014/main" id="{7011D6D8-4E33-4877-9A56-C0FC97445E03}"/>
+              </a:ext>
+            </a:extLst>
+          </p:cNvPr>
+          <p:cNvSpPr>
+            <a:spLocks xmlns:a="http://schemas.openxmlformats.org/drawingml/2006/main" noGrp="1"/>
+          </p:cNvSpPr>
+          <p:nvPr/>
+        </p:nvSpPr>
+        <p:spPr>
+          <a:xfrm xmlns:a="http://schemas.openxmlformats.org/drawingml/2006/main">
+            <a:off x="571500" y="3905250"/>
+            <a:ext cx="10572750" cy="819150"/>
+          </a:xfrm>
+          <a:prstGeom xmlns:a="http://schemas.openxmlformats.org/drawingml/2006/main" prst="rect">
+            <a:avLst/>
+          </a:prstGeom>
+          <a:noFill xmlns:a="http://schemas.openxmlformats.org/drawingml/2006/main"/>
+          <a:ln xmlns:a="http://schemas.openxmlformats.org/drawingml/2006/main" w="0">
+            <a:noFill/>
+          </a:ln>
+        </p:spPr>
+        <p:txBody>
+          <a:bodyPr xmlns:a="http://schemas.openxmlformats.org/drawingml/2006/main" wrap="square" lIns="0" tIns="0" rIns="0" bIns="0" anchor="t">
+            <a:noAutofit/>
+          </a:bodyPr>
+          <a:lstStyle xmlns:a="http://schemas.openxmlformats.org/drawingml/2006/main">
+            <a:defPPr algn="l">
+              <a:defRPr sz="2550" b="1">
+                <a:solidFill>
+                  <a:srgbClr val="FF836D"/>
+                </a:solidFill>
+                <a:latin typeface="Arial"/>
+                <a:ea typeface="Arial"/>
+                <a:cs typeface="Arial"/>
+              </a:defRPr>
+            </a:defPPr>
+          </a:lstStyle>
+          <a:p xmlns:a="http://schemas.openxmlformats.org/drawingml/2006/main">
+            <a:pPr algn="l">
+              <a:defRPr sz="2550" b="1">
+                <a:solidFill>
+                  <a:srgbClr val="FF836D"/>
+                </a:solidFill>
+                <a:latin typeface="Arial"/>
+                <a:ea typeface="Arial"/>
+                <a:cs typeface="Arial"/>
+              </a:defRPr>
+            </a:pPr>
+            <a:r>
+              <a:rPr sz="2550" b="1">
+                <a:solidFill>
+                  <a:srgbClr val="FF836D"/>
+                </a:solidFill>
+                <a:latin typeface="Arial"/>
+                <a:ea typeface="Arial"/>
+                <a:cs typeface="Arial"/>
+              </a:rPr>
+              <a:t>Один узел означает одну точку отказа</a:t>
+            </a:r>
+          </a:p>
+        </p:txBody>
+      </p:sp>
+      <p:sp>
+        <p:nvSpPr>
+          <p:cNvPr id="6" name="UPS для сетевого оборудования и k3s-узла&#10;План восстановления с те">
+            <a:extLst xmlns:a="http://schemas.openxmlformats.org/drawingml/2006/main">
+              <a:ext uri="{FF2B5EF4-FFF2-40B4-BE49-F238E27FC236}">
+                <a16:creationId xmlns:a16="http://schemas.microsoft.com/office/drawing/2014/main" id="{7EBAFD05-714C-4C6E-A8F5-B764417565BA}"/>
+              </a:ext>
+            </a:extLst>
+          </p:cNvPr>
+          <p:cNvSpPr>
+            <a:spLocks xmlns:a="http://schemas.openxmlformats.org/drawingml/2006/main" noGrp="1"/>
+          </p:cNvSpPr>
+          <p:nvPr/>
+        </p:nvSpPr>
+        <p:spPr>
+          <a:xfrm xmlns:a="http://schemas.openxmlformats.org/drawingml/2006/main">
+            <a:off x="571500" y="4524375"/>
+            <a:ext cx="10572750" cy="952500"/>
+          </a:xfrm>
+          <a:prstGeom xmlns:a="http://schemas.openxmlformats.org/drawingml/2006/main" prst="rect">
+            <a:avLst/>
+          </a:prstGeom>
+          <a:noFill xmlns:a="http://schemas.openxmlformats.org/drawingml/2006/main"/>
+          <a:ln xmlns:a="http://schemas.openxmlformats.org/drawingml/2006/main" w="0">
+            <a:noFill/>
+          </a:ln>
+        </p:spPr>
+        <p:txBody>
+          <a:bodyPr xmlns:a="http://schemas.openxmlformats.org/drawingml/2006/main" wrap="square" lIns="0" tIns="0" rIns="0" bIns="0" anchor="t">
+            <a:noAutofit/>
+          </a:bodyPr>
+          <a:lstStyle xmlns:a="http://schemas.openxmlformats.org/drawingml/2006/main">
+            <a:defPPr algn="l">
+              <a:defRPr sz="2175" b="0">
+                <a:solidFill>
+                  <a:srgbClr val="F5F7FB"/>
+                </a:solidFill>
+                <a:latin typeface="Arial"/>
+                <a:ea typeface="Arial"/>
+                <a:cs typeface="Arial"/>
+              </a:defRPr>
+            </a:defPPr>
+          </a:lstStyle>
+          <a:p xmlns:a="http://schemas.openxmlformats.org/drawingml/2006/main">
+            <a:pPr algn="l">
+              <a:defRPr sz="2175" b="0">
+                <a:solidFill>
+                  <a:srgbClr val="F5F7FB"/>
+                </a:solidFill>
+                <a:latin typeface="Arial"/>
+                <a:ea typeface="Arial"/>
+                <a:cs typeface="Arial"/>
+              </a:defRPr>
+            </a:pPr>
+            <a:r>
+              <a:rPr sz="2175" b="0">
+                <a:solidFill>
+                  <a:srgbClr val="F5F7FB"/>
+                </a:solidFill>
+                <a:latin typeface="Arial"/>
+                <a:ea typeface="Arial"/>
+                <a:cs typeface="Arial"/>
+              </a:rPr>
+              <a:t>UPS для сетевого оборудования и k3s-узла</a:t>
+            </a:r>
+          </a:p>
+          <a:p xmlns:a="http://schemas.openxmlformats.org/drawingml/2006/main">
+            <a:pPr algn="l">
+              <a:defRPr sz="2175" b="0">
+                <a:solidFill>
+                  <a:srgbClr val="F5F7FB"/>
+                </a:solidFill>
+                <a:latin typeface="Arial"/>
+                <a:ea typeface="Arial"/>
+                <a:cs typeface="Arial"/>
+              </a:defRPr>
+            </a:pPr>
+            <a:r>
+              <a:rPr sz="2175" b="0">
+                <a:solidFill>
+                  <a:srgbClr val="F5F7FB"/>
+                </a:solidFill>
+                <a:latin typeface="Arial"/>
+                <a:ea typeface="Arial"/>
+                <a:cs typeface="Arial"/>
+              </a:rPr>
+              <a:t>План восстановления с тем же LAN IP</a:t>
+            </a:r>
+          </a:p>
+        </p:txBody>
+      </p:sp>
+      <p:sp>
+        <p:nvSpPr>
+          <p:cNvPr id="7" name="Raw DTMF и связанные линии исключают из Recorder. Старую историю ">
+            <a:extLst xmlns:a="http://schemas.openxmlformats.org/drawingml/2006/main">
+              <a:ext uri="{FF2B5EF4-FFF2-40B4-BE49-F238E27FC236}">
+                <a16:creationId xmlns:a16="http://schemas.microsoft.com/office/drawing/2014/main" id="{6B8E5853-84D4-4DEE-9A0F-1D66B5CFD6B6}"/>
+              </a:ext>
+            </a:extLst>
+          </p:cNvPr>
+          <p:cNvSpPr>
+            <a:spLocks xmlns:a="http://schemas.openxmlformats.org/drawingml/2006/main" noGrp="1"/>
+          </p:cNvSpPr>
+          <p:nvPr/>
+        </p:nvSpPr>
+        <p:spPr>
+          <a:xfrm xmlns:a="http://schemas.openxmlformats.org/drawingml/2006/main">
+            <a:off x="571500" y="5953125"/>
+            <a:ext cx="10191750" cy="457200"/>
+          </a:xfrm>
+          <a:prstGeom xmlns:a="http://schemas.openxmlformats.org/drawingml/2006/main" prst="rect">
+            <a:avLst/>
+          </a:prstGeom>
+          <a:noFill xmlns:a="http://schemas.openxmlformats.org/drawingml/2006/main"/>
+          <a:ln xmlns:a="http://schemas.openxmlformats.org/drawingml/2006/main" w="0">
+            <a:noFill/>
+          </a:ln>
+        </p:spPr>
+        <p:txBody>
+          <a:bodyPr xmlns:a="http://schemas.openxmlformats.org/drawingml/2006/main" wrap="square" lIns="0" tIns="0" rIns="0" bIns="0" anchor="t">
+            <a:noAutofit/>
+          </a:bodyPr>
+          <a:lstStyle xmlns:a="http://schemas.openxmlformats.org/drawingml/2006/main">
+            <a:defPPr algn="l">
+              <a:defRPr sz="1425" b="0">
+                <a:solidFill>
+                  <a:srgbClr val="AAB9D0"/>
+                </a:solidFill>
+                <a:latin typeface="Arial"/>
+                <a:ea typeface="Arial"/>
+                <a:cs typeface="Arial"/>
+              </a:defRPr>
+            </a:defPPr>
+          </a:lstStyle>
+          <a:p xmlns:a="http://schemas.openxmlformats.org/drawingml/2006/main">
+            <a:pPr algn="l">
+              <a:defRPr sz="1425" b="0">
+                <a:solidFill>
+                  <a:srgbClr val="AAB9D0"/>
+                </a:solidFill>
+                <a:latin typeface="Arial"/>
+                <a:ea typeface="Arial"/>
+                <a:cs typeface="Arial"/>
+              </a:defRPr>
+            </a:pPr>
+            <a:r>
+              <a:rPr sz="1425" b="0">
+                <a:solidFill>
+                  <a:srgbClr val="AAB9D0"/>
+                </a:solidFill>
+                <a:latin typeface="Arial"/>
+                <a:ea typeface="Arial"/>
+                <a:cs typeface="Arial"/>
+              </a:rPr>
+              <a:t>Raw DTMF и связанные линии исключают из Recorder. Старую историю проверяют отдельно.</a:t>
+            </a:r>
+          </a:p>
+        </p:txBody>
+      </p:sp>
+    </p:spTree>
+    <p:extLst>
+      <p:ext uri="{BB962C8B-B14F-4D97-AF65-F5344CB8AC3E}">
+        <p14:creationId xmlns:p14="http://schemas.microsoft.com/office/powerpoint/2010/main" val="1231818260"/>
+      </p:ext>
+    </p:extLst>
+  </p:cSld>
+</p:sld>
+</file>
+
+<file path=ppt/slides/slide14.xml><?xml version="1.0" encoding="utf-8"?>
+<p:sld xmlns:p="http://schemas.openxmlformats.org/presentationml/2006/main">
+  <p:cSld>
+    <p:bg>
+      <p:bgPr>
+        <a:solidFill xmlns:a="http://schemas.openxmlformats.org/drawingml/2006/main">
+          <a:srgbClr val="101C34"/>
+        </a:solidFill>
+      </p:bgPr>
+    </p:bg>
+    <p:spTree>
+      <p:nvGrpSpPr>
+        <p:cNvPr id="1" name=""/>
+        <p:cNvGrpSpPr/>
+        <p:nvPr/>
+      </p:nvGrpSpPr>
+      <p:grpSpPr>
+        <a:xfrm xmlns:a="http://schemas.openxmlformats.org/drawingml/2006/main"/>
+      </p:grpSpPr>
+      <p:sp>
+        <p:nvSpPr>
+          <p:cNvPr id="8" name="Готовность сервера и готовность телефонии">
+            <a:extLst xmlns:a="http://schemas.openxmlformats.org/drawingml/2006/main">
+              <a:ext uri="{FF2B5EF4-FFF2-40B4-BE49-F238E27FC236}">
+                <a16:creationId xmlns:a16="http://schemas.microsoft.com/office/drawing/2014/main" id="{B9969ADC-9FEA-49C8-A1AE-696B4CBB8933}"/>
+              </a:ext>
+            </a:extLst>
+          </p:cNvPr>
+          <p:cNvSpPr>
+            <a:spLocks xmlns:a="http://schemas.openxmlformats.org/drawingml/2006/main" noGrp="1"/>
+          </p:cNvSpPr>
+          <p:nvPr/>
+        </p:nvSpPr>
+        <p:spPr>
+          <a:xfrm xmlns:a="http://schemas.openxmlformats.org/drawingml/2006/main">
+            <a:off x="571500" y="419100"/>
+            <a:ext cx="10953750" cy="1000125"/>
+          </a:xfrm>
+          <a:prstGeom xmlns:a="http://schemas.openxmlformats.org/drawingml/2006/main" prst="rect">
+            <a:avLst/>
+          </a:prstGeom>
+          <a:noFill xmlns:a="http://schemas.openxmlformats.org/drawingml/2006/main"/>
+          <a:ln xmlns:a="http://schemas.openxmlformats.org/drawingml/2006/main" w="0">
+            <a:noFill/>
+          </a:ln>
+        </p:spPr>
+        <p:txBody>
+          <a:bodyPr xmlns:a="http://schemas.openxmlformats.org/drawingml/2006/main" wrap="square" lIns="0" tIns="0" rIns="0" bIns="0" anchor="t">
+            <a:noAutofit/>
+          </a:bodyPr>
+          <a:lstStyle xmlns:a="http://schemas.openxmlformats.org/drawingml/2006/main">
+            <a:defPPr algn="l">
+              <a:defRPr sz="3375" b="1">
+                <a:solidFill>
+                  <a:srgbClr val="F5F7FB"/>
+                </a:solidFill>
+                <a:latin typeface="Arial"/>
+                <a:ea typeface="Arial"/>
+                <a:cs typeface="Arial"/>
+              </a:defRPr>
+            </a:defPPr>
+          </a:lstStyle>
+          <a:p xmlns:a="http://schemas.openxmlformats.org/drawingml/2006/main">
+            <a:pPr algn="l">
+              <a:defRPr sz="3375" b="1">
+                <a:solidFill>
+                  <a:srgbClr val="F5F7FB"/>
+                </a:solidFill>
+                <a:latin typeface="Arial"/>
+                <a:ea typeface="Arial"/>
+                <a:cs typeface="Arial"/>
+              </a:defRPr>
+            </a:pPr>
+            <a:r>
+              <a:rPr sz="3375" b="1">
+                <a:solidFill>
+                  <a:srgbClr val="F5F7FB"/>
+                </a:solidFill>
+                <a:latin typeface="Arial"/>
+                <a:ea typeface="Arial"/>
+                <a:cs typeface="Arial"/>
+              </a:rPr>
+              <a:t>Готовность сервера и готовность телефонии</a:t>
+            </a:r>
+          </a:p>
+        </p:txBody>
+      </p:sp>
+      <p:sp>
+        <p:nvSpPr>
+          <p:cNvPr id="2" name="14">
+            <a:extLst xmlns:a="http://schemas.openxmlformats.org/drawingml/2006/main">
+              <a:ext uri="{FF2B5EF4-FFF2-40B4-BE49-F238E27FC236}">
+                <a16:creationId xmlns:a16="http://schemas.microsoft.com/office/drawing/2014/main" id="{679C206E-4103-485D-B9D3-0A74DE9A16CD}"/>
+              </a:ext>
+            </a:extLst>
+          </p:cNvPr>
+          <p:cNvSpPr>
+            <a:spLocks xmlns:a="http://schemas.openxmlformats.org/drawingml/2006/main" noGrp="1"/>
+          </p:cNvSpPr>
+          <p:nvPr/>
+        </p:nvSpPr>
+        <p:spPr>
+          <a:xfrm xmlns:a="http://schemas.openxmlformats.org/drawingml/2006/main">
+            <a:off x="11049000" y="6362700"/>
+            <a:ext cx="571500" cy="209550"/>
+          </a:xfrm>
+          <a:prstGeom xmlns:a="http://schemas.openxmlformats.org/drawingml/2006/main" prst="rect">
+            <a:avLst/>
+          </a:prstGeom>
+          <a:noFill xmlns:a="http://schemas.openxmlformats.org/drawingml/2006/main"/>
+          <a:ln xmlns:a="http://schemas.openxmlformats.org/drawingml/2006/main" w="0">
+            <a:noFill/>
+          </a:ln>
+        </p:spPr>
+        <p:txBody>
+          <a:bodyPr xmlns:a="http://schemas.openxmlformats.org/drawingml/2006/main" wrap="square" lIns="0" tIns="0" rIns="0" bIns="0" anchor="t">
+            <a:noAutofit/>
+          </a:bodyPr>
+          <a:lstStyle xmlns:a="http://schemas.openxmlformats.org/drawingml/2006/main">
+            <a:defPPr algn="r">
+              <a:defRPr sz="1275" b="0">
+                <a:solidFill>
+                  <a:srgbClr val="AAB9D0"/>
+                </a:solidFill>
+                <a:latin typeface="Arial"/>
+                <a:ea typeface="Arial"/>
+                <a:cs typeface="Arial"/>
+              </a:defRPr>
+            </a:defPPr>
+          </a:lstStyle>
+          <a:p xmlns:a="http://schemas.openxmlformats.org/drawingml/2006/main">
+            <a:pPr algn="r">
+              <a:defRPr sz="1275" b="0">
+                <a:solidFill>
+                  <a:srgbClr val="AAB9D0"/>
+                </a:solidFill>
+                <a:latin typeface="Arial"/>
+                <a:ea typeface="Arial"/>
+                <a:cs typeface="Arial"/>
+              </a:defRPr>
+            </a:pPr>
+            <a:r>
+              <a:rPr sz="1275" b="0">
+                <a:solidFill>
+                  <a:srgbClr val="AAB9D0"/>
+                </a:solidFill>
+                <a:latin typeface="Arial"/>
+                <a:ea typeface="Arial"/>
+                <a:cs typeface="Arial"/>
+              </a:rPr>
+              <a:t>14</a:t>
+            </a:r>
+          </a:p>
+        </p:txBody>
+      </p:sp>
+      <p:sp>
+        <p:nvSpPr>
+          <p:cNvPr id="3" name="Сервер можно подготовить первым">
+            <a:extLst xmlns:a="http://schemas.openxmlformats.org/drawingml/2006/main">
+              <a:ext uri="{FF2B5EF4-FFF2-40B4-BE49-F238E27FC236}">
+                <a16:creationId xmlns:a16="http://schemas.microsoft.com/office/drawing/2014/main" id="{6CC17E19-005E-46AE-BA8A-BF7D5AB5C78E}"/>
+              </a:ext>
+            </a:extLst>
+          </p:cNvPr>
+          <p:cNvSpPr>
+            <a:spLocks xmlns:a="http://schemas.openxmlformats.org/drawingml/2006/main" noGrp="1"/>
+          </p:cNvSpPr>
+          <p:nvPr/>
+        </p:nvSpPr>
+        <p:spPr>
+          <a:xfrm xmlns:a="http://schemas.openxmlformats.org/drawingml/2006/main">
+            <a:off x="571500" y="1714500"/>
+            <a:ext cx="10572750" cy="819150"/>
+          </a:xfrm>
+          <a:prstGeom xmlns:a="http://schemas.openxmlformats.org/drawingml/2006/main" prst="rect">
+            <a:avLst/>
+          </a:prstGeom>
+          <a:noFill xmlns:a="http://schemas.openxmlformats.org/drawingml/2006/main"/>
+          <a:ln xmlns:a="http://schemas.openxmlformats.org/drawingml/2006/main" w="0">
+            <a:noFill/>
+          </a:ln>
+        </p:spPr>
+        <p:txBody>
+          <a:bodyPr xmlns:a="http://schemas.openxmlformats.org/drawingml/2006/main" wrap="square" lIns="0" tIns="0" rIns="0" bIns="0" anchor="t">
+            <a:noAutofit/>
+          </a:bodyPr>
+          <a:lstStyle xmlns:a="http://schemas.openxmlformats.org/drawingml/2006/main">
+            <a:defPPr algn="l">
+              <a:defRPr sz="2700" b="1">
+                <a:solidFill>
+                  <a:srgbClr val="48DDCC"/>
+                </a:solidFill>
+                <a:latin typeface="Arial"/>
+                <a:ea typeface="Arial"/>
+                <a:cs typeface="Arial"/>
+              </a:defRPr>
+            </a:defPPr>
+          </a:lstStyle>
+          <a:p xmlns:a="http://schemas.openxmlformats.org/drawingml/2006/main">
+            <a:pPr algn="l">
+              <a:defRPr sz="2700" b="1">
+                <a:solidFill>
+                  <a:srgbClr val="48DDCC"/>
+                </a:solidFill>
+                <a:latin typeface="Arial"/>
+                <a:ea typeface="Arial"/>
+                <a:cs typeface="Arial"/>
+              </a:defRPr>
+            </a:pPr>
+            <a:r>
+              <a:rPr sz="2700" b="1">
+                <a:solidFill>
+                  <a:srgbClr val="48DDCC"/>
+                </a:solidFill>
+                <a:latin typeface="Arial"/>
+                <a:ea typeface="Arial"/>
+                <a:cs typeface="Arial"/>
+              </a:rPr>
+              <a:t>Сервер можно подготовить первым</a:t>
+            </a:r>
+          </a:p>
+        </p:txBody>
+      </p:sp>
+      <p:sp>
+        <p:nvSpPr>
+          <p:cNvPr id="4" name="Образы, конфигурация, AMI и Opus&#10;Проверки подтверждают серверные ">
+            <a:extLst xmlns:a="http://schemas.openxmlformats.org/drawingml/2006/main">
+              <a:ext uri="{FF2B5EF4-FFF2-40B4-BE49-F238E27FC236}">
+                <a16:creationId xmlns:a16="http://schemas.microsoft.com/office/drawing/2014/main" id="{72992023-270F-45EB-9827-F53D5D9165EB}"/>
+              </a:ext>
+            </a:extLst>
+          </p:cNvPr>
+          <p:cNvSpPr>
+            <a:spLocks xmlns:a="http://schemas.openxmlformats.org/drawingml/2006/main" noGrp="1"/>
+          </p:cNvSpPr>
+          <p:nvPr/>
+        </p:nvSpPr>
+        <p:spPr>
+          <a:xfrm xmlns:a="http://schemas.openxmlformats.org/drawingml/2006/main">
+            <a:off x="571500" y="2362200"/>
+            <a:ext cx="10572750" cy="952500"/>
+          </a:xfrm>
+          <a:prstGeom xmlns:a="http://schemas.openxmlformats.org/drawingml/2006/main" prst="rect">
+            <a:avLst/>
+          </a:prstGeom>
+          <a:noFill xmlns:a="http://schemas.openxmlformats.org/drawingml/2006/main"/>
+          <a:ln xmlns:a="http://schemas.openxmlformats.org/drawingml/2006/main" w="0">
+            <a:noFill/>
+          </a:ln>
+        </p:spPr>
+        <p:txBody>
+          <a:bodyPr xmlns:a="http://schemas.openxmlformats.org/drawingml/2006/main" wrap="square" lIns="0" tIns="0" rIns="0" bIns="0" anchor="t">
+            <a:noAutofit/>
+          </a:bodyPr>
+          <a:lstStyle xmlns:a="http://schemas.openxmlformats.org/drawingml/2006/main">
+            <a:defPPr algn="l">
+              <a:defRPr sz="2175" b="0">
+                <a:solidFill>
+                  <a:srgbClr val="F5F7FB"/>
+                </a:solidFill>
+                <a:latin typeface="Arial"/>
+                <a:ea typeface="Arial"/>
+                <a:cs typeface="Arial"/>
+              </a:defRPr>
+            </a:defPPr>
+          </a:lstStyle>
+          <a:p xmlns:a="http://schemas.openxmlformats.org/drawingml/2006/main">
+            <a:pPr algn="l">
+              <a:defRPr sz="2175" b="0">
+                <a:solidFill>
+                  <a:srgbClr val="F5F7FB"/>
+                </a:solidFill>
+                <a:latin typeface="Arial"/>
+                <a:ea typeface="Arial"/>
+                <a:cs typeface="Arial"/>
+              </a:defRPr>
+            </a:pPr>
+            <a:r>
+              <a:rPr sz="2175" b="0">
+                <a:solidFill>
+                  <a:srgbClr val="F5F7FB"/>
+                </a:solidFill>
+                <a:latin typeface="Arial"/>
+                <a:ea typeface="Arial"/>
+                <a:cs typeface="Arial"/>
+              </a:rPr>
+              <a:t>Образы, конфигурация, AMI и Opus</a:t>
+            </a:r>
+          </a:p>
+          <a:p xmlns:a="http://schemas.openxmlformats.org/drawingml/2006/main">
+            <a:pPr algn="l">
+              <a:defRPr sz="2175" b="0">
+                <a:solidFill>
+                  <a:srgbClr val="F5F7FB"/>
+                </a:solidFill>
+                <a:latin typeface="Arial"/>
+                <a:ea typeface="Arial"/>
+                <a:cs typeface="Arial"/>
+              </a:defRPr>
+            </a:pPr>
+            <a:r>
+              <a:rPr sz="2175" b="0">
+                <a:solidFill>
+                  <a:srgbClr val="F5F7FB"/>
+                </a:solidFill>
+                <a:latin typeface="Arial"/>
+                <a:ea typeface="Arial"/>
+                <a:cs typeface="Arial"/>
+              </a:rPr>
+              <a:t>Проверки подтверждают серверные компоненты</a:t>
+            </a:r>
+          </a:p>
+        </p:txBody>
+      </p:sp>
+      <p:sp>
+        <p:nvSpPr>
+          <p:cNvPr id="5" name="Телефонию подтверждает пилот">
+            <a:extLst xmlns:a="http://schemas.openxmlformats.org/drawingml/2006/main">
+              <a:ext uri="{FF2B5EF4-FFF2-40B4-BE49-F238E27FC236}">
+                <a16:creationId xmlns:a16="http://schemas.microsoft.com/office/drawing/2014/main" id="{42FD1E6B-8FBF-41B5-8365-8494880B4DDE}"/>
+              </a:ext>
+            </a:extLst>
+          </p:cNvPr>
+          <p:cNvSpPr>
+            <a:spLocks xmlns:a="http://schemas.openxmlformats.org/drawingml/2006/main" noGrp="1"/>
+          </p:cNvSpPr>
+          <p:nvPr/>
+        </p:nvSpPr>
+        <p:spPr>
+          <a:xfrm xmlns:a="http://schemas.openxmlformats.org/drawingml/2006/main">
+            <a:off x="571500" y="3790950"/>
+            <a:ext cx="10572750" cy="819150"/>
+          </a:xfrm>
+          <a:prstGeom xmlns:a="http://schemas.openxmlformats.org/drawingml/2006/main" prst="rect">
+            <a:avLst/>
+          </a:prstGeom>
+          <a:noFill xmlns:a="http://schemas.openxmlformats.org/drawingml/2006/main"/>
+          <a:ln xmlns:a="http://schemas.openxmlformats.org/drawingml/2006/main" w="0">
+            <a:noFill/>
+          </a:ln>
+        </p:spPr>
+        <p:txBody>
+          <a:bodyPr xmlns:a="http://schemas.openxmlformats.org/drawingml/2006/main" wrap="square" lIns="0" tIns="0" rIns="0" bIns="0" anchor="t">
+            <a:noAutofit/>
+          </a:bodyPr>
+          <a:lstStyle xmlns:a="http://schemas.openxmlformats.org/drawingml/2006/main">
+            <a:defPPr algn="l">
+              <a:defRPr sz="2700" b="1">
+                <a:solidFill>
+                  <a:srgbClr val="FF836D"/>
+                </a:solidFill>
+                <a:latin typeface="Arial"/>
+                <a:ea typeface="Arial"/>
+                <a:cs typeface="Arial"/>
+              </a:defRPr>
+            </a:defPPr>
+          </a:lstStyle>
+          <a:p xmlns:a="http://schemas.openxmlformats.org/drawingml/2006/main">
+            <a:pPr algn="l">
+              <a:defRPr sz="2700" b="1">
+                <a:solidFill>
+                  <a:srgbClr val="FF836D"/>
+                </a:solidFill>
+                <a:latin typeface="Arial"/>
+                <a:ea typeface="Arial"/>
+                <a:cs typeface="Arial"/>
+              </a:defRPr>
+            </a:pPr>
+            <a:r>
+              <a:rPr sz="2700" b="1">
+                <a:solidFill>
+                  <a:srgbClr val="FF836D"/>
+                </a:solidFill>
+                <a:latin typeface="Arial"/>
+                <a:ea typeface="Arial"/>
+                <a:cs typeface="Arial"/>
+              </a:rPr>
+              <a:t>Телефонию подтверждает пилот</a:t>
+            </a:r>
+          </a:p>
+        </p:txBody>
+      </p:sp>
+      <p:sp>
+        <p:nvSpPr>
+          <p:cNvPr id="6" name="Инвентарь аппарата, звонок двух участников и Assist&#10;После приёмки">
+            <a:extLst xmlns:a="http://schemas.openxmlformats.org/drawingml/2006/main">
+              <a:ext uri="{FF2B5EF4-FFF2-40B4-BE49-F238E27FC236}">
+                <a16:creationId xmlns:a16="http://schemas.microsoft.com/office/drawing/2014/main" id="{FBCAD4DB-6529-4151-A74F-CD12716682D0}"/>
+              </a:ext>
+            </a:extLst>
+          </p:cNvPr>
+          <p:cNvSpPr>
+            <a:spLocks xmlns:a="http://schemas.openxmlformats.org/drawingml/2006/main" noGrp="1"/>
+          </p:cNvSpPr>
+          <p:nvPr/>
+        </p:nvSpPr>
+        <p:spPr>
+          <a:xfrm xmlns:a="http://schemas.openxmlformats.org/drawingml/2006/main">
+            <a:off x="571500" y="4438650"/>
+            <a:ext cx="10572750" cy="952500"/>
+          </a:xfrm>
+          <a:prstGeom xmlns:a="http://schemas.openxmlformats.org/drawingml/2006/main" prst="rect">
+            <a:avLst/>
+          </a:prstGeom>
+          <a:noFill xmlns:a="http://schemas.openxmlformats.org/drawingml/2006/main"/>
+          <a:ln xmlns:a="http://schemas.openxmlformats.org/drawingml/2006/main" w="0">
+            <a:noFill/>
+          </a:ln>
+        </p:spPr>
+        <p:txBody>
+          <a:bodyPr xmlns:a="http://schemas.openxmlformats.org/drawingml/2006/main" wrap="square" lIns="0" tIns="0" rIns="0" bIns="0" anchor="t">
+            <a:noAutofit/>
+          </a:bodyPr>
+          <a:lstStyle xmlns:a="http://schemas.openxmlformats.org/drawingml/2006/main">
+            <a:defPPr algn="l">
+              <a:defRPr sz="2175" b="0">
+                <a:solidFill>
+                  <a:srgbClr val="F5F7FB"/>
+                </a:solidFill>
+                <a:latin typeface="Arial"/>
+                <a:ea typeface="Arial"/>
+                <a:cs typeface="Arial"/>
+              </a:defRPr>
+            </a:defPPr>
+          </a:lstStyle>
+          <a:p xmlns:a="http://schemas.openxmlformats.org/drawingml/2006/main">
+            <a:pPr algn="l">
+              <a:defRPr sz="2175" b="0">
+                <a:solidFill>
+                  <a:srgbClr val="F5F7FB"/>
+                </a:solidFill>
+                <a:latin typeface="Arial"/>
+                <a:ea typeface="Arial"/>
+                <a:cs typeface="Arial"/>
+              </a:defRPr>
+            </a:pPr>
+            <a:r>
+              <a:rPr sz="2175" b="0">
+                <a:solidFill>
+                  <a:srgbClr val="F5F7FB"/>
+                </a:solidFill>
+                <a:latin typeface="Arial"/>
+                <a:ea typeface="Arial"/>
+                <a:cs typeface="Arial"/>
+              </a:rPr>
+              <a:t>Инвентарь аппарата, звонок двух участников и Assist</a:t>
+            </a:r>
+          </a:p>
+          <a:p xmlns:a="http://schemas.openxmlformats.org/drawingml/2006/main">
+            <a:pPr algn="l">
+              <a:defRPr sz="2175" b="0">
+                <a:solidFill>
+                  <a:srgbClr val="F5F7FB"/>
+                </a:solidFill>
+                <a:latin typeface="Arial"/>
+                <a:ea typeface="Arial"/>
+                <a:cs typeface="Arial"/>
+              </a:defRPr>
+            </a:pPr>
+            <a:r>
+              <a:rPr sz="2175" b="0">
+                <a:solidFill>
+                  <a:srgbClr val="F5F7FB"/>
+                </a:solidFill>
+                <a:latin typeface="Arial"/>
+                <a:ea typeface="Arial"/>
+                <a:cs typeface="Arial"/>
+              </a:rPr>
+              <a:t>После приёмки подключаются остальные телефоны</a:t>
+            </a:r>
+          </a:p>
+        </p:txBody>
+      </p:sp>
+      <p:sp>
+        <p:nvSpPr>
+          <p:cNvPr id="7" name="Физическая приёмка остаётся отдельным этапом. Результаты заносятс">
+            <a:extLst xmlns:a="http://schemas.openxmlformats.org/drawingml/2006/main">
+              <a:ext uri="{FF2B5EF4-FFF2-40B4-BE49-F238E27FC236}">
+                <a16:creationId xmlns:a16="http://schemas.microsoft.com/office/drawing/2014/main" id="{FBEEE31A-4577-42F4-9422-37DB65AF5637}"/>
+              </a:ext>
+            </a:extLst>
+          </p:cNvPr>
+          <p:cNvSpPr>
+            <a:spLocks xmlns:a="http://schemas.openxmlformats.org/drawingml/2006/main" noGrp="1"/>
+          </p:cNvSpPr>
+          <p:nvPr/>
+        </p:nvSpPr>
+        <p:spPr>
+          <a:xfrm xmlns:a="http://schemas.openxmlformats.org/drawingml/2006/main">
+            <a:off x="571500" y="5953125"/>
+            <a:ext cx="10191750" cy="457200"/>
+          </a:xfrm>
+          <a:prstGeom xmlns:a="http://schemas.openxmlformats.org/drawingml/2006/main" prst="rect">
+            <a:avLst/>
+          </a:prstGeom>
+          <a:noFill xmlns:a="http://schemas.openxmlformats.org/drawingml/2006/main"/>
+          <a:ln xmlns:a="http://schemas.openxmlformats.org/drawingml/2006/main" w="0">
+            <a:noFill/>
+          </a:ln>
+        </p:spPr>
+        <p:txBody>
+          <a:bodyPr xmlns:a="http://schemas.openxmlformats.org/drawingml/2006/main" wrap="square" lIns="0" tIns="0" rIns="0" bIns="0" anchor="t">
+            <a:noAutofit/>
+          </a:bodyPr>
+          <a:lstStyle xmlns:a="http://schemas.openxmlformats.org/drawingml/2006/main">
+            <a:defPPr algn="l">
+              <a:defRPr sz="1425" b="0">
+                <a:solidFill>
+                  <a:srgbClr val="AAB9D0"/>
+                </a:solidFill>
+                <a:latin typeface="Arial"/>
+                <a:ea typeface="Arial"/>
+                <a:cs typeface="Arial"/>
+              </a:defRPr>
+            </a:defPPr>
+          </a:lstStyle>
+          <a:p xmlns:a="http://schemas.openxmlformats.org/drawingml/2006/main">
+            <a:pPr algn="l">
+              <a:defRPr sz="1425" b="0">
+                <a:solidFill>
+                  <a:srgbClr val="AAB9D0"/>
+                </a:solidFill>
+                <a:latin typeface="Arial"/>
+                <a:ea typeface="Arial"/>
+                <a:cs typeface="Arial"/>
+              </a:defRPr>
+            </a:pPr>
+            <a:r>
+              <a:rPr sz="1425" b="0">
+                <a:solidFill>
+                  <a:srgbClr val="AAB9D0"/>
+                </a:solidFill>
+                <a:latin typeface="Arial"/>
+                <a:ea typeface="Arial"/>
+                <a:cs typeface="Arial"/>
+              </a:rPr>
+              <a:t>Физическая приёмка остаётся отдельным этапом. Результаты заносятся в локальный журнал.</a:t>
+            </a:r>
+          </a:p>
+        </p:txBody>
+      </p:sp>
+    </p:spTree>
+    <p:extLst>
+      <p:ext uri="{BB962C8B-B14F-4D97-AF65-F5344CB8AC3E}">
+        <p14:creationId xmlns:p14="http://schemas.microsoft.com/office/powerpoint/2010/main" val="439065639"/>
       </p:ext>
     </p:extLst>
   </p:cSld>
@@ -5987,7 +7835,7 @@
           <p:cNvPr id="9" name="Наша партия: 10 × Cisco 7945G">
             <a:extLst xmlns:a="http://schemas.openxmlformats.org/drawingml/2006/main">
               <a:ext uri="{FF2B5EF4-FFF2-40B4-BE49-F238E27FC236}">
-                <a16:creationId xmlns:a16="http://schemas.microsoft.com/office/drawing/2014/main" id="{86F3384D-9E69-4E87-A730-3717CB7D39F8}"/>
+                <a16:creationId xmlns:a16="http://schemas.microsoft.com/office/drawing/2014/main" id="{B95F85FF-4464-479B-AEA1-F6F4E1044038}"/>
               </a:ext>
             </a:extLst>
           </p:cNvPr>
@@ -6055,7 +7903,7 @@
           <p:cNvPr id="2" name="02">
             <a:extLst xmlns:a="http://schemas.openxmlformats.org/drawingml/2006/main">
               <a:ext uri="{FF2B5EF4-FFF2-40B4-BE49-F238E27FC236}">
-                <a16:creationId xmlns:a16="http://schemas.microsoft.com/office/drawing/2014/main" id="{7F851AD9-C05C-400E-9C9F-25B148DA6C2F}"/>
+                <a16:creationId xmlns:a16="http://schemas.microsoft.com/office/drawing/2014/main" id="{00E49DFB-0E45-481B-86F6-123FE6D2D882}"/>
               </a:ext>
             </a:extLst>
           </p:cNvPr>
@@ -6123,7 +7971,7 @@
           <p:cNvPr id="3" name="10">
             <a:extLst xmlns:a="http://schemas.openxmlformats.org/drawingml/2006/main">
               <a:ext uri="{FF2B5EF4-FFF2-40B4-BE49-F238E27FC236}">
-                <a16:creationId xmlns:a16="http://schemas.microsoft.com/office/drawing/2014/main" id="{63C8E71A-97DD-4744-8F16-CB64814A9F9C}"/>
+                <a16:creationId xmlns:a16="http://schemas.microsoft.com/office/drawing/2014/main" id="{737E7DAD-7261-43EE-9C29-46B004EEA1F8}"/>
               </a:ext>
             </a:extLst>
           </p:cNvPr>
@@ -6191,7 +8039,7 @@
           <p:cNvPr id="4" name="телефонов">
             <a:extLst xmlns:a="http://schemas.openxmlformats.org/drawingml/2006/main">
               <a:ext uri="{FF2B5EF4-FFF2-40B4-BE49-F238E27FC236}">
-                <a16:creationId xmlns:a16="http://schemas.microsoft.com/office/drawing/2014/main" id="{2E9F7942-2978-4901-85A2-86ED72BB8C39}"/>
+                <a16:creationId xmlns:a16="http://schemas.microsoft.com/office/drawing/2014/main" id="{441F36B9-8182-46C7-9ED5-323247CCB282}"/>
               </a:ext>
             </a:extLst>
           </p:cNvPr>
@@ -6259,7 +8107,7 @@
           <p:cNvPr id="5" name="SIP-прошивка семейства 7945_7965">
             <a:extLst xmlns:a="http://schemas.openxmlformats.org/drawingml/2006/main">
               <a:ext uri="{FF2B5EF4-FFF2-40B4-BE49-F238E27FC236}">
-                <a16:creationId xmlns:a16="http://schemas.microsoft.com/office/drawing/2014/main" id="{590D9D60-25F8-4EFF-8490-3F308ABFD11D}"/>
+                <a16:creationId xmlns:a16="http://schemas.microsoft.com/office/drawing/2014/main" id="{7878C64C-5385-4D5C-8DF0-B27F7694F3E8}"/>
               </a:ext>
             </a:extLst>
           </p:cNvPr>
@@ -6327,7 +8175,7 @@
           <p:cNvPr id="6" name="Если сейчас SCCP, нужен переход на SIP.&#10;MPP-конверсия этой модели">
             <a:extLst xmlns:a="http://schemas.openxmlformats.org/drawingml/2006/main">
               <a:ext uri="{FF2B5EF4-FFF2-40B4-BE49-F238E27FC236}">
-                <a16:creationId xmlns:a16="http://schemas.microsoft.com/office/drawing/2014/main" id="{D71D83EA-A670-4D60-BA9E-230178EF59F7}"/>
+                <a16:creationId xmlns:a16="http://schemas.microsoft.com/office/drawing/2014/main" id="{905225CB-9350-4670-AE90-AD0D215223FF}"/>
               </a:ext>
             </a:extLst>
           </p:cNvPr>
@@ -6418,7 +8266,7 @@
           <p:cNvPr id="7" name="Перед работой">
             <a:extLst xmlns:a="http://schemas.openxmlformats.org/drawingml/2006/main">
               <a:ext uri="{FF2B5EF4-FFF2-40B4-BE49-F238E27FC236}">
-                <a16:creationId xmlns:a16="http://schemas.microsoft.com/office/drawing/2014/main" id="{834DBC09-ACD0-403E-BABD-55CC65A4461E}"/>
+                <a16:creationId xmlns:a16="http://schemas.microsoft.com/office/drawing/2014/main" id="{41EAA175-F5AD-4AB4-B70F-56F878517780}"/>
               </a:ext>
             </a:extLst>
           </p:cNvPr>
@@ -6486,7 +8334,7 @@
           <p:cNvPr id="8" name="С каждого телефона: PID, VID/HW, MAC,&#10;App Load, Boot Load, IP и T">
             <a:extLst xmlns:a="http://schemas.openxmlformats.org/drawingml/2006/main">
               <a:ext uri="{FF2B5EF4-FFF2-40B4-BE49-F238E27FC236}">
-                <a16:creationId xmlns:a16="http://schemas.microsoft.com/office/drawing/2014/main" id="{9B865B72-F164-44D4-A1E9-D74268F2255E}"/>
+                <a16:creationId xmlns:a16="http://schemas.microsoft.com/office/drawing/2014/main" id="{C19C5111-B570-43D6-842D-834CF0F03BB2}"/>
               </a:ext>
             </a:extLst>
           </p:cNvPr>
@@ -6575,7 +8423,7 @@
     </p:spTree>
     <p:extLst>
       <p:ext uri="{BB962C8B-B14F-4D97-AF65-F5344CB8AC3E}">
-        <p14:creationId xmlns:p14="http://schemas.microsoft.com/office/powerpoint/2010/main" val="1126616984"/>
+        <p14:creationId xmlns:p14="http://schemas.microsoft.com/office/powerpoint/2010/main" val="1744530034"/>
       </p:ext>
     </p:extLst>
   </p:cSld>
@@ -6603,28 +8451,58 @@
       </p:grpSpPr>
       <p:cxnSp>
         <p:nvCxnSpPr>
-          <p:cNvPr id="15" name="">
-            <a:extLst xmlns:a="http://schemas.openxmlformats.org/drawingml/2006/main">
-              <a:ext uri="{FF2B5EF4-FFF2-40B4-BE49-F238E27FC236}">
-                <a16:creationId xmlns:a16="http://schemas.microsoft.com/office/drawing/2014/main" id="{1CF8C426-1C98-4254-AC7B-9F5310587E79}"/>
+          <p:cNvPr id="17" name="">
+            <a:extLst xmlns:a="http://schemas.openxmlformats.org/drawingml/2006/main">
+              <a:ext uri="{FF2B5EF4-FFF2-40B4-BE49-F238E27FC236}">
+                <a16:creationId xmlns:a16="http://schemas.microsoft.com/office/drawing/2014/main" id="{054AFF8A-C78B-4941-BDDE-4A3C6995C82F}"/>
               </a:ext>
             </a:extLst>
           </p:cNvPr>
           <p:cNvCxnSpPr>
-            <a:stCxn xmlns:a="http://schemas.openxmlformats.org/drawingml/2006/main" id="6" idx="3"/>
-            <a:endCxn xmlns:a="http://schemas.openxmlformats.org/drawingml/2006/main" id="9" idx="1"/>
+            <a:stCxn xmlns:a="http://schemas.openxmlformats.org/drawingml/2006/main" id="5" idx="2"/>
+            <a:endCxn xmlns:a="http://schemas.openxmlformats.org/drawingml/2006/main" id="8" idx="0"/>
           </p:cNvCxnSpPr>
           <p:nvPr/>
         </p:nvCxnSpPr>
         <p:spPr>
           <a:xfrm xmlns:a="http://schemas.openxmlformats.org/drawingml/2006/main">
-            <a:off x="5881688" y="3333750"/>
-            <a:ext cx="1843087" cy="1264445"/>
-          </a:xfrm>
-          <a:prstGeom xmlns:a="http://schemas.openxmlformats.org/drawingml/2006/main" prst="bentConnector3">
-            <a:avLst>
-              <a:gd name="adj1" fmla="val 12403"/>
-            </a:avLst>
+            <a:off x="9739313" y="2947988"/>
+            <a:ext cx="0" cy="1157287"/>
+          </a:xfrm>
+          <a:prstGeom xmlns:a="http://schemas.openxmlformats.org/drawingml/2006/main" prst="straightConnector1">
+            <a:avLst/>
+          </a:prstGeom>
+          <a:ln xmlns:a="http://schemas.openxmlformats.org/drawingml/2006/main" w="28575">
+            <a:solidFill>
+              <a:srgbClr val="F7CB64"/>
+            </a:solidFill>
+            <a:headEnd type="triangle" w="sm" len="sm"/>
+            <a:tailEnd type="triangle" w="sm" len="sm"/>
+          </a:ln>
+        </p:spPr>
+      </p:cxnSp>
+      <p:cxnSp>
+        <p:nvCxnSpPr>
+          <p:cNvPr id="15" name="">
+            <a:extLst xmlns:a="http://schemas.openxmlformats.org/drawingml/2006/main">
+              <a:ext uri="{FF2B5EF4-FFF2-40B4-BE49-F238E27FC236}">
+                <a16:creationId xmlns:a16="http://schemas.microsoft.com/office/drawing/2014/main" id="{CF865F25-E42B-4415-8997-E23160023BEA}"/>
+              </a:ext>
+            </a:extLst>
+          </p:cNvPr>
+          <p:cNvCxnSpPr>
+            <a:stCxn xmlns:a="http://schemas.openxmlformats.org/drawingml/2006/main" id="7" idx="0"/>
+            <a:endCxn xmlns:a="http://schemas.openxmlformats.org/drawingml/2006/main" id="3" idx="2"/>
+          </p:cNvCxnSpPr>
+          <p:nvPr/>
+        </p:nvCxnSpPr>
+        <p:spPr>
+          <a:xfrm xmlns:a="http://schemas.openxmlformats.org/drawingml/2006/main" flipV="1">
+            <a:off x="2131220" y="2947988"/>
+            <a:ext cx="0" cy="1157287"/>
+          </a:xfrm>
+          <a:prstGeom xmlns:a="http://schemas.openxmlformats.org/drawingml/2006/main" prst="straightConnector1">
+            <a:avLst/>
           </a:prstGeom>
           <a:ln xmlns:a="http://schemas.openxmlformats.org/drawingml/2006/main" w="28575">
             <a:solidFill>
@@ -6639,53 +8517,20 @@
           <p:cNvPr id="13" name="">
             <a:extLst xmlns:a="http://schemas.openxmlformats.org/drawingml/2006/main">
               <a:ext uri="{FF2B5EF4-FFF2-40B4-BE49-F238E27FC236}">
-                <a16:creationId xmlns:a16="http://schemas.microsoft.com/office/drawing/2014/main" id="{71171F5E-FDF5-48C5-BC83-CE8CFD329ABF}"/>
+                <a16:creationId xmlns:a16="http://schemas.microsoft.com/office/drawing/2014/main" id="{0EC2A84F-48FA-4743-8978-C22BE57FC5B2}"/>
               </a:ext>
             </a:extLst>
           </p:cNvPr>
           <p:cNvCxnSpPr>
-            <a:stCxn xmlns:a="http://schemas.openxmlformats.org/drawingml/2006/main" id="6" idx="3"/>
-            <a:endCxn xmlns:a="http://schemas.openxmlformats.org/drawingml/2006/main" id="8" idx="1"/>
+            <a:stCxn xmlns:a="http://schemas.openxmlformats.org/drawingml/2006/main" id="6" idx="0"/>
+            <a:endCxn xmlns:a="http://schemas.openxmlformats.org/drawingml/2006/main" id="4" idx="2"/>
           </p:cNvCxnSpPr>
           <p:nvPr/>
         </p:nvCxnSpPr>
         <p:spPr>
           <a:xfrm xmlns:a="http://schemas.openxmlformats.org/drawingml/2006/main" flipV="1">
-            <a:off x="5881688" y="2905126"/>
-            <a:ext cx="1843087" cy="428625"/>
-          </a:xfrm>
-          <a:prstGeom xmlns:a="http://schemas.openxmlformats.org/drawingml/2006/main" prst="bentConnector3">
-            <a:avLst>
-              <a:gd name="adj1" fmla="val 50000"/>
-            </a:avLst>
-          </a:prstGeom>
-          <a:ln xmlns:a="http://schemas.openxmlformats.org/drawingml/2006/main" w="28575">
-            <a:solidFill>
-              <a:srgbClr val="48DDCC"/>
-            </a:solidFill>
-            <a:tailEnd type="triangle" w="sm" len="sm"/>
-          </a:ln>
-        </p:spPr>
-      </p:cxnSp>
-      <p:cxnSp>
-        <p:nvCxnSpPr>
-          <p:cNvPr id="11" name="">
-            <a:extLst xmlns:a="http://schemas.openxmlformats.org/drawingml/2006/main">
-              <a:ext uri="{FF2B5EF4-FFF2-40B4-BE49-F238E27FC236}">
-                <a16:creationId xmlns:a16="http://schemas.microsoft.com/office/drawing/2014/main" id="{71E6F03F-DA00-49F1-8ED8-6A649046BA4C}"/>
-              </a:ext>
-            </a:extLst>
-          </p:cNvPr>
-          <p:cNvCxnSpPr>
-            <a:stCxn xmlns:a="http://schemas.openxmlformats.org/drawingml/2006/main" id="7" idx="2"/>
-            <a:endCxn xmlns:a="http://schemas.openxmlformats.org/drawingml/2006/main" id="6" idx="0"/>
-          </p:cNvCxnSpPr>
-          <p:nvPr/>
-        </p:nvCxnSpPr>
-        <p:spPr>
-          <a:xfrm xmlns:a="http://schemas.openxmlformats.org/drawingml/2006/main">
-            <a:off x="4745832" y="2219325"/>
-            <a:ext cx="0" cy="600075"/>
+            <a:off x="5753100" y="2947988"/>
+            <a:ext cx="0" cy="1157287"/>
           </a:xfrm>
           <a:prstGeom xmlns:a="http://schemas.openxmlformats.org/drawingml/2006/main" prst="straightConnector1">
             <a:avLst/>
@@ -6700,23 +8545,23 @@
       </p:cxnSp>
       <p:cxnSp>
         <p:nvCxnSpPr>
-          <p:cNvPr id="10" name="">
-            <a:extLst xmlns:a="http://schemas.openxmlformats.org/drawingml/2006/main">
-              <a:ext uri="{FF2B5EF4-FFF2-40B4-BE49-F238E27FC236}">
-                <a16:creationId xmlns:a16="http://schemas.microsoft.com/office/drawing/2014/main" id="{7549E33D-A37A-434A-A332-464F57ECA283}"/>
+          <p:cNvPr id="11" name="">
+            <a:extLst xmlns:a="http://schemas.openxmlformats.org/drawingml/2006/main">
+              <a:ext uri="{FF2B5EF4-FFF2-40B4-BE49-F238E27FC236}">
+                <a16:creationId xmlns:a16="http://schemas.microsoft.com/office/drawing/2014/main" id="{FD6B7569-679E-4FFF-BAF3-C620BA8BA352}"/>
               </a:ext>
             </a:extLst>
           </p:cNvPr>
           <p:cNvCxnSpPr>
-            <a:stCxn xmlns:a="http://schemas.openxmlformats.org/drawingml/2006/main" id="5" idx="3"/>
-            <a:endCxn xmlns:a="http://schemas.openxmlformats.org/drawingml/2006/main" id="6" idx="1"/>
+            <a:stCxn xmlns:a="http://schemas.openxmlformats.org/drawingml/2006/main" id="4" idx="3"/>
+            <a:endCxn xmlns:a="http://schemas.openxmlformats.org/drawingml/2006/main" id="5" idx="1"/>
           </p:cNvCxnSpPr>
           <p:nvPr/>
         </p:nvCxnSpPr>
         <p:spPr>
           <a:xfrm xmlns:a="http://schemas.openxmlformats.org/drawingml/2006/main">
-            <a:off x="3138488" y="3333750"/>
-            <a:ext cx="471487" cy="0"/>
+            <a:off x="6996113" y="2433638"/>
+            <a:ext cx="1328737" cy="0"/>
           </a:xfrm>
           <a:prstGeom xmlns:a="http://schemas.openxmlformats.org/drawingml/2006/main" prst="straightConnector1">
             <a:avLst/>
@@ -6725,16 +8570,49 @@
             <a:solidFill>
               <a:srgbClr val="48DDCC"/>
             </a:solidFill>
+            <a:headEnd type="triangle" w="sm" len="sm"/>
             <a:tailEnd type="triangle" w="sm" len="sm"/>
           </a:ln>
         </p:spPr>
       </p:cxnSp>
-      <p:sp>
-        <p:nvSpPr>
-          <p:cNvPr id="18" name="Cisco 7945G в домашней сети">
-            <a:extLst xmlns:a="http://schemas.openxmlformats.org/drawingml/2006/main">
-              <a:ext uri="{FF2B5EF4-FFF2-40B4-BE49-F238E27FC236}">
-                <a16:creationId xmlns:a16="http://schemas.microsoft.com/office/drawing/2014/main" id="{2DD9F9B3-C649-49DF-B23A-B6690975248D}"/>
+      <p:cxnSp>
+        <p:nvCxnSpPr>
+          <p:cNvPr id="9" name="">
+            <a:extLst xmlns:a="http://schemas.openxmlformats.org/drawingml/2006/main">
+              <a:ext uri="{FF2B5EF4-FFF2-40B4-BE49-F238E27FC236}">
+                <a16:creationId xmlns:a16="http://schemas.microsoft.com/office/drawing/2014/main" id="{AF88188D-22D9-47C1-97D6-A5C37471B3A2}"/>
+              </a:ext>
+            </a:extLst>
+          </p:cNvPr>
+          <p:cNvCxnSpPr>
+            <a:stCxn xmlns:a="http://schemas.openxmlformats.org/drawingml/2006/main" id="3" idx="3"/>
+            <a:endCxn xmlns:a="http://schemas.openxmlformats.org/drawingml/2006/main" id="4" idx="1"/>
+          </p:cNvCxnSpPr>
+          <p:nvPr/>
+        </p:nvCxnSpPr>
+        <p:spPr>
+          <a:xfrm xmlns:a="http://schemas.openxmlformats.org/drawingml/2006/main">
+            <a:off x="3267076" y="2433638"/>
+            <a:ext cx="1243012" cy="0"/>
+          </a:xfrm>
+          <a:prstGeom xmlns:a="http://schemas.openxmlformats.org/drawingml/2006/main" prst="straightConnector1">
+            <a:avLst/>
+          </a:prstGeom>
+          <a:ln xmlns:a="http://schemas.openxmlformats.org/drawingml/2006/main" w="28575">
+            <a:solidFill>
+              <a:srgbClr val="48DDCC"/>
+            </a:solidFill>
+            <a:headEnd type="triangle" w="sm" len="sm"/>
+            <a:tailEnd type="triangle" w="sm" len="sm"/>
+          </a:ln>
+        </p:spPr>
+      </p:cxnSp>
+      <p:sp>
+        <p:nvSpPr>
+          <p:cNvPr id="20" name="Cisco, Asterisk и Home Assistant">
+            <a:extLst xmlns:a="http://schemas.openxmlformats.org/drawingml/2006/main">
+              <a:ext uri="{FF2B5EF4-FFF2-40B4-BE49-F238E27FC236}">
+                <a16:creationId xmlns:a16="http://schemas.microsoft.com/office/drawing/2014/main" id="{DA5995D9-70EA-465B-AD38-740267776D7C}"/>
               </a:ext>
             </a:extLst>
           </p:cNvPr>
@@ -6792,7 +8670,7 @@
                 <a:ea typeface="Arial"/>
                 <a:cs typeface="Arial"/>
               </a:rPr>
-              <a:t>Cisco 7945G в домашней сети</a:t>
+              <a:t>Cisco, Asterisk и Home Assistant</a:t>
             </a:r>
           </a:p>
         </p:txBody>
@@ -6802,7 +8680,7 @@
           <p:cNvPr id="2" name="03">
             <a:extLst xmlns:a="http://schemas.openxmlformats.org/drawingml/2006/main">
               <a:ext uri="{FF2B5EF4-FFF2-40B4-BE49-F238E27FC236}">
-                <a16:creationId xmlns:a16="http://schemas.microsoft.com/office/drawing/2014/main" id="{E8866123-EC7D-4A7B-A6E9-E147671338F1}"/>
+                <a16:creationId xmlns:a16="http://schemas.microsoft.com/office/drawing/2014/main" id="{5EDBAC82-7B95-4142-A214-1F648F3DFD3B}"/>
               </a:ext>
             </a:extLst>
           </p:cNvPr>
@@ -6867,10 +8745,10 @@
       </p:sp>
       <p:sp>
         <p:nvSpPr>
-          <p:cNvPr id="3" name="">
-            <a:extLst xmlns:a="http://schemas.openxmlformats.org/drawingml/2006/main">
-              <a:ext uri="{FF2B5EF4-FFF2-40B4-BE49-F238E27FC236}">
-                <a16:creationId xmlns:a16="http://schemas.microsoft.com/office/drawing/2014/main" id="{D14E76D8-2514-454F-B9FC-A1600268E4B1}"/>
+          <p:cNvPr id="3" name="phones">
+            <a:extLst xmlns:a="http://schemas.openxmlformats.org/drawingml/2006/main">
+              <a:ext uri="{FF2B5EF4-FFF2-40B4-BE49-F238E27FC236}">
+                <a16:creationId xmlns:a16="http://schemas.microsoft.com/office/drawing/2014/main" id="{3BE2E3A0-1A71-48F2-AB5E-863268EE9BD9}"/>
               </a:ext>
             </a:extLst>
           </p:cNvPr>
@@ -6881,109 +8759,8 @@
         </p:nvSpPr>
         <p:spPr>
           <a:xfrm xmlns:a="http://schemas.openxmlformats.org/drawingml/2006/main">
-            <a:off x="7639050" y="1876425"/>
-            <a:ext cx="3343275" cy="3343275"/>
-          </a:xfrm>
-          <a:prstGeom xmlns:a="http://schemas.openxmlformats.org/drawingml/2006/main" prst="roundRect">
-            <a:avLst>
-              <a:gd name="adj" fmla="val 2279"/>
-            </a:avLst>
-          </a:prstGeom>
-          <a:noFill xmlns:a="http://schemas.openxmlformats.org/drawingml/2006/main"/>
-          <a:ln xmlns:a="http://schemas.openxmlformats.org/drawingml/2006/main" w="9525">
-            <a:solidFill>
-              <a:srgbClr val="AAB9D0"/>
-            </a:solidFill>
-            <a:prstDash val="dash"/>
-          </a:ln>
-        </p:spPr>
-      </p:sp>
-      <p:sp>
-        <p:nvSpPr>
-          <p:cNvPr id="4" name="k3s: фиксированный LAN-узел">
-            <a:extLst xmlns:a="http://schemas.openxmlformats.org/drawingml/2006/main">
-              <a:ext uri="{FF2B5EF4-FFF2-40B4-BE49-F238E27FC236}">
-                <a16:creationId xmlns:a16="http://schemas.microsoft.com/office/drawing/2014/main" id="{4D039F68-B9DE-4688-AD57-035A3F82791C}"/>
-              </a:ext>
-            </a:extLst>
-          </p:cNvPr>
-          <p:cNvSpPr>
-            <a:spLocks xmlns:a="http://schemas.openxmlformats.org/drawingml/2006/main" noGrp="1"/>
-          </p:cNvSpPr>
-          <p:nvPr/>
-        </p:nvSpPr>
-        <p:spPr>
-          <a:xfrm xmlns:a="http://schemas.openxmlformats.org/drawingml/2006/main">
-            <a:off x="7772400" y="2000250"/>
-            <a:ext cx="3152775" cy="333375"/>
-          </a:xfrm>
-          <a:prstGeom xmlns:a="http://schemas.openxmlformats.org/drawingml/2006/main" prst="rect">
-            <a:avLst/>
-          </a:prstGeom>
-          <a:noFill xmlns:a="http://schemas.openxmlformats.org/drawingml/2006/main"/>
-          <a:ln xmlns:a="http://schemas.openxmlformats.org/drawingml/2006/main" w="0">
-            <a:noFill/>
-          </a:ln>
-        </p:spPr>
-        <p:txBody>
-          <a:bodyPr xmlns:a="http://schemas.openxmlformats.org/drawingml/2006/main" wrap="square" lIns="0" tIns="0" rIns="0" bIns="0" anchor="t">
-            <a:noAutofit/>
-          </a:bodyPr>
-          <a:lstStyle xmlns:a="http://schemas.openxmlformats.org/drawingml/2006/main">
-            <a:defPPr algn="l">
-              <a:defRPr sz="1500" b="0">
-                <a:solidFill>
-                  <a:srgbClr val="AAB9D0"/>
-                </a:solidFill>
-                <a:latin typeface="Arial"/>
-                <a:ea typeface="Arial"/>
-                <a:cs typeface="Arial"/>
-              </a:defRPr>
-            </a:defPPr>
-          </a:lstStyle>
-          <a:p xmlns:a="http://schemas.openxmlformats.org/drawingml/2006/main">
-            <a:pPr algn="l">
-              <a:defRPr sz="1500" b="0">
-                <a:solidFill>
-                  <a:srgbClr val="AAB9D0"/>
-                </a:solidFill>
-                <a:latin typeface="Arial"/>
-                <a:ea typeface="Arial"/>
-                <a:cs typeface="Arial"/>
-              </a:defRPr>
-            </a:pPr>
-            <a:r>
-              <a:rPr sz="1500" b="0">
-                <a:solidFill>
-                  <a:srgbClr val="AAB9D0"/>
-                </a:solidFill>
-                <a:latin typeface="Arial"/>
-                <a:ea typeface="Arial"/>
-                <a:cs typeface="Arial"/>
-              </a:rPr>
-              <a:t>k3s: фиксированный LAN-узел</a:t>
-            </a:r>
-          </a:p>
-        </p:txBody>
-      </p:sp>
-      <p:sp>
-        <p:nvSpPr>
-          <p:cNvPr id="5" name="phones">
-            <a:extLst xmlns:a="http://schemas.openxmlformats.org/drawingml/2006/main">
-              <a:ext uri="{FF2B5EF4-FFF2-40B4-BE49-F238E27FC236}">
-                <a16:creationId xmlns:a16="http://schemas.microsoft.com/office/drawing/2014/main" id="{3FFC155A-BA1F-42B2-9819-565B8725B01D}"/>
-              </a:ext>
-            </a:extLst>
-          </p:cNvPr>
-          <p:cNvSpPr>
-            <a:spLocks xmlns:a="http://schemas.openxmlformats.org/drawingml/2006/main" noGrp="1"/>
-          </p:cNvSpPr>
-          <p:nvPr/>
-        </p:nvSpPr>
-        <p:spPr>
-          <a:xfrm xmlns:a="http://schemas.openxmlformats.org/drawingml/2006/main">
-            <a:off x="1038225" y="2819400"/>
-            <a:ext cx="2100263" cy="1028700"/>
+            <a:off x="995363" y="1919288"/>
+            <a:ext cx="2271713" cy="1028700"/>
           </a:xfrm>
           <a:prstGeom xmlns:a="http://schemas.openxmlformats.org/drawingml/2006/main" prst="roundRect">
             <a:avLst>
@@ -7065,10 +8842,10 @@
       </p:sp>
       <p:sp>
         <p:nvSpPr>
-          <p:cNvPr id="6" name="switch">
-            <a:extLst xmlns:a="http://schemas.openxmlformats.org/drawingml/2006/main">
-              <a:ext uri="{FF2B5EF4-FFF2-40B4-BE49-F238E27FC236}">
-                <a16:creationId xmlns:a16="http://schemas.microsoft.com/office/drawing/2014/main" id="{60569EB5-9740-445B-8FBF-D218F9F970B3}"/>
+          <p:cNvPr id="4" name="switch">
+            <a:extLst xmlns:a="http://schemas.openxmlformats.org/drawingml/2006/main">
+              <a:ext uri="{FF2B5EF4-FFF2-40B4-BE49-F238E27FC236}">
+                <a16:creationId xmlns:a16="http://schemas.microsoft.com/office/drawing/2014/main" id="{CB69E69C-9F2D-4B3A-906C-4228192FD16B}"/>
               </a:ext>
             </a:extLst>
           </p:cNvPr>
@@ -7079,8 +8856,8 @@
         </p:nvSpPr>
         <p:spPr>
           <a:xfrm xmlns:a="http://schemas.openxmlformats.org/drawingml/2006/main">
-            <a:off x="3609975" y="2819400"/>
-            <a:ext cx="2271713" cy="1028700"/>
+            <a:off x="4510088" y="1919288"/>
+            <a:ext cx="2486025" cy="1028700"/>
           </a:xfrm>
           <a:prstGeom xmlns:a="http://schemas.openxmlformats.org/drawingml/2006/main" prst="roundRect">
             <a:avLst>
@@ -7132,7 +8909,7 @@
                 <a:ea typeface="Arial"/>
                 <a:cs typeface="Arial"/>
               </a:rPr>
-              <a:t>Коммутатор PoE</a:t>
+              <a:t>PoE-коммутатор</a:t>
             </a:r>
           </a:p>
           <a:p xmlns:a="http://schemas.openxmlformats.org/drawingml/2006/main">
@@ -7162,10 +8939,10 @@
       </p:sp>
       <p:sp>
         <p:nvSpPr>
-          <p:cNvPr id="7" name="router">
-            <a:extLst xmlns:a="http://schemas.openxmlformats.org/drawingml/2006/main">
-              <a:ext uri="{FF2B5EF4-FFF2-40B4-BE49-F238E27FC236}">
-                <a16:creationId xmlns:a16="http://schemas.microsoft.com/office/drawing/2014/main" id="{C7D6EF7E-ACAD-46A3-8594-BF2E38A0605D}"/>
+          <p:cNvPr id="5" name="ast">
+            <a:extLst xmlns:a="http://schemas.openxmlformats.org/drawingml/2006/main">
+              <a:ext uri="{FF2B5EF4-FFF2-40B4-BE49-F238E27FC236}">
+                <a16:creationId xmlns:a16="http://schemas.microsoft.com/office/drawing/2014/main" id="{C254C9C4-2471-40D8-8A42-799126E0BCA4}"/>
               </a:ext>
             </a:extLst>
           </p:cNvPr>
@@ -7176,12 +8953,109 @@
         </p:nvSpPr>
         <p:spPr>
           <a:xfrm xmlns:a="http://schemas.openxmlformats.org/drawingml/2006/main">
-            <a:off x="3609975" y="1362075"/>
-            <a:ext cx="2271713" cy="857250"/>
+            <a:off x="8324850" y="1919288"/>
+            <a:ext cx="2828925" cy="1028700"/>
           </a:xfrm>
           <a:prstGeom xmlns:a="http://schemas.openxmlformats.org/drawingml/2006/main" prst="roundRect">
             <a:avLst>
-              <a:gd name="adj" fmla="val 11111"/>
+              <a:gd name="adj" fmla="val 9259"/>
+            </a:avLst>
+          </a:prstGeom>
+          <a:solidFill xmlns:a="http://schemas.openxmlformats.org/drawingml/2006/main">
+            <a:srgbClr val="172841"/>
+          </a:solidFill>
+          <a:ln xmlns:a="http://schemas.openxmlformats.org/drawingml/2006/main" w="19050">
+            <a:solidFill>
+              <a:srgbClr val="48DDCC"/>
+            </a:solidFill>
+          </a:ln>
+        </p:spPr>
+        <p:txBody>
+          <a:bodyPr xmlns:a="http://schemas.openxmlformats.org/drawingml/2006/main" lIns="76200" tIns="76200" rIns="76200" bIns="76200" anchor="ctr">
+            <a:noAutofit/>
+          </a:bodyPr>
+          <a:lstStyle xmlns:a="http://schemas.openxmlformats.org/drawingml/2006/main">
+            <a:defPPr algn="ctr">
+              <a:defRPr sz="1620" b="1">
+                <a:solidFill>
+                  <a:srgbClr val="F5F7FB"/>
+                </a:solidFill>
+                <a:latin typeface="Arial"/>
+                <a:ea typeface="Arial"/>
+                <a:cs typeface="Arial"/>
+              </a:defRPr>
+            </a:defPPr>
+          </a:lstStyle>
+          <a:p xmlns:a="http://schemas.openxmlformats.org/drawingml/2006/main">
+            <a:pPr algn="ctr">
+              <a:defRPr sz="1620" b="1">
+                <a:solidFill>
+                  <a:srgbClr val="F5F7FB"/>
+                </a:solidFill>
+                <a:latin typeface="Arial"/>
+                <a:ea typeface="Arial"/>
+                <a:cs typeface="Arial"/>
+              </a:defRPr>
+            </a:pPr>
+            <a:r>
+              <a:rPr sz="1620" b="1">
+                <a:solidFill>
+                  <a:srgbClr val="F5F7FB"/>
+                </a:solidFill>
+                <a:latin typeface="Arial"/>
+                <a:ea typeface="Arial"/>
+                <a:cs typeface="Arial"/>
+              </a:rPr>
+              <a:t>Asterisk / PJSIP</a:t>
+            </a:r>
+          </a:p>
+          <a:p xmlns:a="http://schemas.openxmlformats.org/drawingml/2006/main">
+            <a:pPr algn="ctr">
+              <a:defRPr sz="1620" b="1">
+                <a:solidFill>
+                  <a:srgbClr val="F5F7FB"/>
+                </a:solidFill>
+                <a:latin typeface="Arial"/>
+                <a:ea typeface="Arial"/>
+                <a:cs typeface="Arial"/>
+              </a:defRPr>
+            </a:pPr>
+            <a:r>
+              <a:rPr sz="1620" b="1">
+                <a:solidFill>
+                  <a:srgbClr val="F5F7FB"/>
+                </a:solidFill>
+                <a:latin typeface="Arial"/>
+                <a:ea typeface="Arial"/>
+                <a:cs typeface="Arial"/>
+              </a:rPr>
+              <a:t>фиксированный IP</a:t>
+            </a:r>
+          </a:p>
+        </p:txBody>
+      </p:sp>
+      <p:sp>
+        <p:nvSpPr>
+          <p:cNvPr id="6" name="router">
+            <a:extLst xmlns:a="http://schemas.openxmlformats.org/drawingml/2006/main">
+              <a:ext uri="{FF2B5EF4-FFF2-40B4-BE49-F238E27FC236}">
+                <a16:creationId xmlns:a16="http://schemas.microsoft.com/office/drawing/2014/main" id="{4AE89BA2-B4A3-4FD6-823B-3891D2F088A5}"/>
+              </a:ext>
+            </a:extLst>
+          </p:cNvPr>
+          <p:cNvSpPr>
+            <a:spLocks xmlns:a="http://schemas.openxmlformats.org/drawingml/2006/main" noGrp="1"/>
+          </p:cNvSpPr>
+          <p:nvPr/>
+        </p:nvSpPr>
+        <p:spPr>
+          <a:xfrm xmlns:a="http://schemas.openxmlformats.org/drawingml/2006/main">
+            <a:off x="4510088" y="4105275"/>
+            <a:ext cx="2486025" cy="942975"/>
+          </a:xfrm>
+          <a:prstGeom xmlns:a="http://schemas.openxmlformats.org/drawingml/2006/main" prst="roundRect">
+            <a:avLst>
+              <a:gd name="adj" fmla="val 10101"/>
             </a:avLst>
           </a:prstGeom>
           <a:solidFill xmlns:a="http://schemas.openxmlformats.org/drawingml/2006/main">
@@ -7259,10 +9133,10 @@
       </p:sp>
       <p:sp>
         <p:nvSpPr>
-          <p:cNvPr id="8" name="ast">
-            <a:extLst xmlns:a="http://schemas.openxmlformats.org/drawingml/2006/main">
-              <a:ext uri="{FF2B5EF4-FFF2-40B4-BE49-F238E27FC236}">
-                <a16:creationId xmlns:a16="http://schemas.microsoft.com/office/drawing/2014/main" id="{6D50C821-188A-4206-8A28-754574C2EB21}"/>
+          <p:cNvPr id="7" name="tftp">
+            <a:extLst xmlns:a="http://schemas.openxmlformats.org/drawingml/2006/main">
+              <a:ext uri="{FF2B5EF4-FFF2-40B4-BE49-F238E27FC236}">
+                <a16:creationId xmlns:a16="http://schemas.microsoft.com/office/drawing/2014/main" id="{93585BD0-0191-4DA3-89CC-84E5DD40E122}"/>
               </a:ext>
             </a:extLst>
           </p:cNvPr>
@@ -7273,132 +9147,12 @@
         </p:nvSpPr>
         <p:spPr>
           <a:xfrm xmlns:a="http://schemas.openxmlformats.org/drawingml/2006/main">
-            <a:off x="7724775" y="2347913"/>
-            <a:ext cx="3128963" cy="1114425"/>
+            <a:off x="995363" y="4105275"/>
+            <a:ext cx="2271713" cy="942975"/>
           </a:xfrm>
           <a:prstGeom xmlns:a="http://schemas.openxmlformats.org/drawingml/2006/main" prst="roundRect">
             <a:avLst>
-              <a:gd name="adj" fmla="val 8547"/>
-            </a:avLst>
-          </a:prstGeom>
-          <a:solidFill xmlns:a="http://schemas.openxmlformats.org/drawingml/2006/main">
-            <a:srgbClr val="172841"/>
-          </a:solidFill>
-          <a:ln xmlns:a="http://schemas.openxmlformats.org/drawingml/2006/main" w="19050">
-            <a:solidFill>
-              <a:srgbClr val="48DDCC"/>
-            </a:solidFill>
-          </a:ln>
-        </p:spPr>
-        <p:txBody>
-          <a:bodyPr xmlns:a="http://schemas.openxmlformats.org/drawingml/2006/main" lIns="76200" tIns="76200" rIns="76200" bIns="76200" anchor="ctr">
-            <a:noAutofit/>
-          </a:bodyPr>
-          <a:lstStyle xmlns:a="http://schemas.openxmlformats.org/drawingml/2006/main">
-            <a:defPPr algn="ctr">
-              <a:defRPr sz="1620" b="1">
-                <a:solidFill>
-                  <a:srgbClr val="F5F7FB"/>
-                </a:solidFill>
-                <a:latin typeface="Arial"/>
-                <a:ea typeface="Arial"/>
-                <a:cs typeface="Arial"/>
-              </a:defRPr>
-            </a:defPPr>
-          </a:lstStyle>
-          <a:p xmlns:a="http://schemas.openxmlformats.org/drawingml/2006/main">
-            <a:pPr algn="ctr">
-              <a:defRPr sz="1620" b="1">
-                <a:solidFill>
-                  <a:srgbClr val="F5F7FB"/>
-                </a:solidFill>
-                <a:latin typeface="Arial"/>
-                <a:ea typeface="Arial"/>
-                <a:cs typeface="Arial"/>
-              </a:defRPr>
-            </a:pPr>
-            <a:r>
-              <a:rPr sz="1620" b="1">
-                <a:solidFill>
-                  <a:srgbClr val="F5F7FB"/>
-                </a:solidFill>
-                <a:latin typeface="Arial"/>
-                <a:ea typeface="Arial"/>
-                <a:cs typeface="Arial"/>
-              </a:rPr>
-              <a:t>Asterisk / PJSIP</a:t>
-            </a:r>
-          </a:p>
-          <a:p xmlns:a="http://schemas.openxmlformats.org/drawingml/2006/main">
-            <a:pPr algn="ctr">
-              <a:defRPr sz="1620" b="1">
-                <a:solidFill>
-                  <a:srgbClr val="F5F7FB"/>
-                </a:solidFill>
-                <a:latin typeface="Arial"/>
-                <a:ea typeface="Arial"/>
-                <a:cs typeface="Arial"/>
-              </a:defRPr>
-            </a:pPr>
-            <a:r>
-              <a:rPr sz="1620" b="1">
-                <a:solidFill>
-                  <a:srgbClr val="F5F7FB"/>
-                </a:solidFill>
-                <a:latin typeface="Arial"/>
-                <a:ea typeface="Arial"/>
-                <a:cs typeface="Arial"/>
-              </a:rPr>
-              <a:t>SIP TCP+UDP 5060</a:t>
-            </a:r>
-          </a:p>
-          <a:p xmlns:a="http://schemas.openxmlformats.org/drawingml/2006/main">
-            <a:pPr algn="ctr">
-              <a:defRPr sz="1620" b="1">
-                <a:solidFill>
-                  <a:srgbClr val="F5F7FB"/>
-                </a:solidFill>
-                <a:latin typeface="Arial"/>
-                <a:ea typeface="Arial"/>
-                <a:cs typeface="Arial"/>
-              </a:defRPr>
-            </a:pPr>
-            <a:r>
-              <a:rPr sz="1620" b="1">
-                <a:solidFill>
-                  <a:srgbClr val="F5F7FB"/>
-                </a:solidFill>
-                <a:latin typeface="Arial"/>
-                <a:ea typeface="Arial"/>
-                <a:cs typeface="Arial"/>
-              </a:rPr>
-              <a:t>RTP UDP 10000–10199</a:t>
-            </a:r>
-          </a:p>
-        </p:txBody>
-      </p:sp>
-      <p:sp>
-        <p:nvSpPr>
-          <p:cNvPr id="9" name="tftp">
-            <a:extLst xmlns:a="http://schemas.openxmlformats.org/drawingml/2006/main">
-              <a:ext uri="{FF2B5EF4-FFF2-40B4-BE49-F238E27FC236}">
-                <a16:creationId xmlns:a16="http://schemas.microsoft.com/office/drawing/2014/main" id="{0D49CB5B-D3DA-4126-81DB-3E50DE26B530}"/>
-              </a:ext>
-            </a:extLst>
-          </p:cNvPr>
-          <p:cNvSpPr>
-            <a:spLocks xmlns:a="http://schemas.openxmlformats.org/drawingml/2006/main" noGrp="1"/>
-          </p:cNvSpPr>
-          <p:nvPr/>
-        </p:nvSpPr>
-        <p:spPr>
-          <a:xfrm xmlns:a="http://schemas.openxmlformats.org/drawingml/2006/main">
-            <a:off x="7724775" y="4148138"/>
-            <a:ext cx="3128963" cy="900113"/>
-          </a:xfrm>
-          <a:prstGeom xmlns:a="http://schemas.openxmlformats.org/drawingml/2006/main" prst="roundRect">
-            <a:avLst>
-              <a:gd name="adj" fmla="val 10582"/>
+              <a:gd name="adj" fmla="val 10101"/>
             </a:avLst>
           </a:prstGeom>
           <a:solidFill xmlns:a="http://schemas.openxmlformats.org/drawingml/2006/main">
@@ -7469,17 +9223,17 @@
                 <a:ea typeface="Arial"/>
                 <a:cs typeface="Arial"/>
               </a:rPr>
-              <a:t>UDP 69 + 20000–20031</a:t>
-            </a:r>
-          </a:p>
-        </p:txBody>
-      </p:sp>
-      <p:sp>
-        <p:nvSpPr>
-          <p:cNvPr id="12" name="DHCP">
-            <a:extLst xmlns:a="http://schemas.openxmlformats.org/drawingml/2006/main">
-              <a:ext uri="{FF2B5EF4-FFF2-40B4-BE49-F238E27FC236}">
-                <a16:creationId xmlns:a16="http://schemas.microsoft.com/office/drawing/2014/main" id="{CCD0E573-803F-4957-994C-A7AA2574A74D}"/>
+              <a:t>прошивка и XML</a:t>
+            </a:r>
+          </a:p>
+        </p:txBody>
+      </p:sp>
+      <p:sp>
+        <p:nvSpPr>
+          <p:cNvPr id="8" name="ha">
+            <a:extLst xmlns:a="http://schemas.openxmlformats.org/drawingml/2006/main">
+              <a:ext uri="{FF2B5EF4-FFF2-40B4-BE49-F238E27FC236}">
+                <a16:creationId xmlns:a16="http://schemas.microsoft.com/office/drawing/2014/main" id="{B86FF74A-8840-4E57-92FD-9957DD4F1652}"/>
               </a:ext>
             </a:extLst>
           </p:cNvPr>
@@ -7490,8 +9244,105 @@
         </p:nvSpPr>
         <p:spPr>
           <a:xfrm xmlns:a="http://schemas.openxmlformats.org/drawingml/2006/main">
-            <a:off x="4933950" y="2324100"/>
-            <a:ext cx="952500" cy="304800"/>
+            <a:off x="8324850" y="4105275"/>
+            <a:ext cx="2828925" cy="942975"/>
+          </a:xfrm>
+          <a:prstGeom xmlns:a="http://schemas.openxmlformats.org/drawingml/2006/main" prst="roundRect">
+            <a:avLst>
+              <a:gd name="adj" fmla="val 10101"/>
+            </a:avLst>
+          </a:prstGeom>
+          <a:solidFill xmlns:a="http://schemas.openxmlformats.org/drawingml/2006/main">
+            <a:srgbClr val="172841"/>
+          </a:solidFill>
+          <a:ln xmlns:a="http://schemas.openxmlformats.org/drawingml/2006/main" w="19050">
+            <a:solidFill>
+              <a:srgbClr val="F7CB64"/>
+            </a:solidFill>
+          </a:ln>
+        </p:spPr>
+        <p:txBody>
+          <a:bodyPr xmlns:a="http://schemas.openxmlformats.org/drawingml/2006/main" lIns="76200" tIns="76200" rIns="76200" bIns="76200" anchor="ctr">
+            <a:noAutofit/>
+          </a:bodyPr>
+          <a:lstStyle xmlns:a="http://schemas.openxmlformats.org/drawingml/2006/main">
+            <a:defPPr algn="ctr">
+              <a:defRPr sz="1620" b="1">
+                <a:solidFill>
+                  <a:srgbClr val="F5F7FB"/>
+                </a:solidFill>
+                <a:latin typeface="Arial"/>
+                <a:ea typeface="Arial"/>
+                <a:cs typeface="Arial"/>
+              </a:defRPr>
+            </a:defPPr>
+          </a:lstStyle>
+          <a:p xmlns:a="http://schemas.openxmlformats.org/drawingml/2006/main">
+            <a:pPr algn="ctr">
+              <a:defRPr sz="1620" b="1">
+                <a:solidFill>
+                  <a:srgbClr val="F5F7FB"/>
+                </a:solidFill>
+                <a:latin typeface="Arial"/>
+                <a:ea typeface="Arial"/>
+                <a:cs typeface="Arial"/>
+              </a:defRPr>
+            </a:pPr>
+            <a:r>
+              <a:rPr sz="1620" b="1">
+                <a:solidFill>
+                  <a:srgbClr val="F5F7FB"/>
+                </a:solidFill>
+                <a:latin typeface="Arial"/>
+                <a:ea typeface="Arial"/>
+                <a:cs typeface="Arial"/>
+              </a:rPr>
+              <a:t>Home Assistant</a:t>
+            </a:r>
+          </a:p>
+          <a:p xmlns:a="http://schemas.openxmlformats.org/drawingml/2006/main">
+            <a:pPr algn="ctr">
+              <a:defRPr sz="1620" b="1">
+                <a:solidFill>
+                  <a:srgbClr val="F5F7FB"/>
+                </a:solidFill>
+                <a:latin typeface="Arial"/>
+                <a:ea typeface="Arial"/>
+                <a:cs typeface="Arial"/>
+              </a:defRPr>
+            </a:pPr>
+            <a:r>
+              <a:rPr sz="1620" b="1">
+                <a:solidFill>
+                  <a:srgbClr val="F5F7FB"/>
+                </a:solidFill>
+                <a:latin typeface="Arial"/>
+                <a:ea typeface="Arial"/>
+                <a:cs typeface="Arial"/>
+              </a:rPr>
+              <a:t>AMI + VoIP / Assist</a:t>
+            </a:r>
+          </a:p>
+        </p:txBody>
+      </p:sp>
+      <p:sp>
+        <p:nvSpPr>
+          <p:cNvPr id="10" name="Ethernet">
+            <a:extLst xmlns:a="http://schemas.openxmlformats.org/drawingml/2006/main">
+              <a:ext uri="{FF2B5EF4-FFF2-40B4-BE49-F238E27FC236}">
+                <a16:creationId xmlns:a16="http://schemas.microsoft.com/office/drawing/2014/main" id="{9BAA5727-B6CC-4F2C-85EC-185474FA5254}"/>
+              </a:ext>
+            </a:extLst>
+          </p:cNvPr>
+          <p:cNvSpPr>
+            <a:spLocks xmlns:a="http://schemas.openxmlformats.org/drawingml/2006/main" noGrp="1"/>
+          </p:cNvSpPr>
+          <p:nvPr/>
+        </p:nvSpPr>
+        <p:spPr>
+          <a:xfrm xmlns:a="http://schemas.openxmlformats.org/drawingml/2006/main">
+            <a:off x="2983706" y="2086928"/>
+            <a:ext cx="1809750" cy="571500"/>
           </a:xfrm>
           <a:prstGeom xmlns:a="http://schemas.openxmlformats.org/drawingml/2006/main" prst="rect">
             <a:avLst/>
@@ -7509,7 +9360,7 @@
             <a:defPPr algn="ctr">
               <a:defRPr sz="1350" b="0">
                 <a:solidFill>
-                  <a:srgbClr val="F7CB64"/>
+                  <a:srgbClr val="48DDCC"/>
                 </a:solidFill>
                 <a:latin typeface="Arial"/>
                 <a:ea typeface="Arial"/>
@@ -7521,7 +9372,7 @@
             <a:pPr algn="ctr">
               <a:defRPr sz="1350" b="0">
                 <a:solidFill>
-                  <a:srgbClr val="F7CB64"/>
+                  <a:srgbClr val="48DDCC"/>
                 </a:solidFill>
                 <a:latin typeface="Arial"/>
                 <a:ea typeface="Arial"/>
@@ -7531,23 +9382,23 @@
             <a:r>
               <a:rPr sz="1350" b="0">
                 <a:solidFill>
-                  <a:srgbClr val="F7CB64"/>
-                </a:solidFill>
-                <a:latin typeface="Arial"/>
-                <a:ea typeface="Arial"/>
-                <a:cs typeface="Arial"/>
-              </a:rPr>
-              <a:t>DHCP</a:t>
-            </a:r>
-          </a:p>
-        </p:txBody>
-      </p:sp>
-      <p:sp>
-        <p:nvSpPr>
-          <p:cNvPr id="14" name="SIP + RTP">
-            <a:extLst xmlns:a="http://schemas.openxmlformats.org/drawingml/2006/main">
-              <a:ext uri="{FF2B5EF4-FFF2-40B4-BE49-F238E27FC236}">
-                <a16:creationId xmlns:a16="http://schemas.microsoft.com/office/drawing/2014/main" id="{8A3DF65A-1320-43FA-8254-C0EA9CB0E37C}"/>
+                  <a:srgbClr val="48DDCC"/>
+                </a:solidFill>
+                <a:latin typeface="Arial"/>
+                <a:ea typeface="Arial"/>
+                <a:cs typeface="Arial"/>
+              </a:rPr>
+              <a:t>Ethernet</a:t>
+            </a:r>
+          </a:p>
+        </p:txBody>
+      </p:sp>
+      <p:sp>
+        <p:nvSpPr>
+          <p:cNvPr id="12" name="SIP / RTP">
+            <a:extLst xmlns:a="http://schemas.openxmlformats.org/drawingml/2006/main">
+              <a:ext uri="{FF2B5EF4-FFF2-40B4-BE49-F238E27FC236}">
+                <a16:creationId xmlns:a16="http://schemas.microsoft.com/office/drawing/2014/main" id="{D0F58FB1-DEDC-4133-B78B-487A7AF0AF95}"/>
               </a:ext>
             </a:extLst>
           </p:cNvPr>
@@ -7558,8 +9409,8 @@
         </p:nvSpPr>
         <p:spPr>
           <a:xfrm xmlns:a="http://schemas.openxmlformats.org/drawingml/2006/main">
-            <a:off x="6134100" y="2505075"/>
-            <a:ext cx="1619250" cy="304800"/>
+            <a:off x="6755606" y="2086928"/>
+            <a:ext cx="1809750" cy="571500"/>
           </a:xfrm>
           <a:prstGeom xmlns:a="http://schemas.openxmlformats.org/drawingml/2006/main" prst="rect">
             <a:avLst/>
@@ -7605,17 +9456,17 @@
                 <a:ea typeface="Arial"/>
                 <a:cs typeface="Arial"/>
               </a:rPr>
-              <a:t>SIP + RTP</a:t>
-            </a:r>
-          </a:p>
-        </p:txBody>
-      </p:sp>
-      <p:sp>
-        <p:nvSpPr>
-          <p:cNvPr id="16" name="загрузка">
-            <a:extLst xmlns:a="http://schemas.openxmlformats.org/drawingml/2006/main">
-              <a:ext uri="{FF2B5EF4-FFF2-40B4-BE49-F238E27FC236}">
-                <a16:creationId xmlns:a16="http://schemas.microsoft.com/office/drawing/2014/main" id="{EA15B3D5-EC52-462D-9ECF-72788D19AC56}"/>
+              <a:t>SIP / RTP</a:t>
+            </a:r>
+          </a:p>
+        </p:txBody>
+      </p:sp>
+      <p:sp>
+        <p:nvSpPr>
+          <p:cNvPr id="14" name="DHCP">
+            <a:extLst xmlns:a="http://schemas.openxmlformats.org/drawingml/2006/main">
+              <a:ext uri="{FF2B5EF4-FFF2-40B4-BE49-F238E27FC236}">
+                <a16:creationId xmlns:a16="http://schemas.microsoft.com/office/drawing/2014/main" id="{8E719149-34BA-4C37-963C-6396AC0C74F9}"/>
               </a:ext>
             </a:extLst>
           </p:cNvPr>
@@ -7626,8 +9477,8 @@
         </p:nvSpPr>
         <p:spPr>
           <a:xfrm xmlns:a="http://schemas.openxmlformats.org/drawingml/2006/main">
-            <a:off x="6877050" y="3714750"/>
-            <a:ext cx="1428750" cy="304800"/>
+            <a:off x="5405438" y="3398520"/>
+            <a:ext cx="1809750" cy="571500"/>
           </a:xfrm>
           <a:prstGeom xmlns:a="http://schemas.openxmlformats.org/drawingml/2006/main" prst="rect">
             <a:avLst/>
@@ -7645,7 +9496,7 @@
             <a:defPPr algn="ctr">
               <a:defRPr sz="1350" b="0">
                 <a:solidFill>
-                  <a:srgbClr val="FF836D"/>
+                  <a:srgbClr val="F7CB64"/>
                 </a:solidFill>
                 <a:latin typeface="Arial"/>
                 <a:ea typeface="Arial"/>
@@ -7657,12 +9508,80 @@
             <a:pPr algn="ctr">
               <a:defRPr sz="1350" b="0">
                 <a:solidFill>
+                  <a:srgbClr val="F7CB64"/>
+                </a:solidFill>
+                <a:latin typeface="Arial"/>
+                <a:ea typeface="Arial"/>
+                <a:cs typeface="Arial"/>
+              </a:defRPr>
+            </a:pPr>
+            <a:r>
+              <a:rPr sz="1350" b="0">
+                <a:solidFill>
+                  <a:srgbClr val="F7CB64"/>
+                </a:solidFill>
+                <a:latin typeface="Arial"/>
+                <a:ea typeface="Arial"/>
+                <a:cs typeface="Arial"/>
+              </a:rPr>
+              <a:t>DHCP</a:t>
+            </a:r>
+          </a:p>
+        </p:txBody>
+      </p:sp>
+      <p:sp>
+        <p:nvSpPr>
+          <p:cNvPr id="16" name="загрузка">
+            <a:extLst xmlns:a="http://schemas.openxmlformats.org/drawingml/2006/main">
+              <a:ext uri="{FF2B5EF4-FFF2-40B4-BE49-F238E27FC236}">
+                <a16:creationId xmlns:a16="http://schemas.microsoft.com/office/drawing/2014/main" id="{AC580300-713D-4F4F-B230-8D1BD293DDA6}"/>
+              </a:ext>
+            </a:extLst>
+          </p:cNvPr>
+          <p:cNvSpPr>
+            <a:spLocks xmlns:a="http://schemas.openxmlformats.org/drawingml/2006/main" noGrp="1"/>
+          </p:cNvSpPr>
+          <p:nvPr/>
+        </p:nvSpPr>
+        <p:spPr>
+          <a:xfrm xmlns:a="http://schemas.openxmlformats.org/drawingml/2006/main">
+            <a:off x="1719263" y="3398520"/>
+            <a:ext cx="1809750" cy="571500"/>
+          </a:xfrm>
+          <a:prstGeom xmlns:a="http://schemas.openxmlformats.org/drawingml/2006/main" prst="rect">
+            <a:avLst/>
+          </a:prstGeom>
+          <a:noFill xmlns:a="http://schemas.openxmlformats.org/drawingml/2006/main"/>
+          <a:ln xmlns:a="http://schemas.openxmlformats.org/drawingml/2006/main" w="0">
+            <a:noFill/>
+          </a:ln>
+        </p:spPr>
+        <p:txBody>
+          <a:bodyPr xmlns:a="http://schemas.openxmlformats.org/drawingml/2006/main" wrap="square" lIns="0" tIns="0" rIns="0" bIns="0" anchor="t">
+            <a:noAutofit/>
+          </a:bodyPr>
+          <a:lstStyle xmlns:a="http://schemas.openxmlformats.org/drawingml/2006/main">
+            <a:defPPr algn="ctr">
+              <a:defRPr sz="1350" b="0">
+                <a:solidFill>
                   <a:srgbClr val="FF836D"/>
                 </a:solidFill>
                 <a:latin typeface="Arial"/>
                 <a:ea typeface="Arial"/>
                 <a:cs typeface="Arial"/>
               </a:defRPr>
+            </a:defPPr>
+          </a:lstStyle>
+          <a:p xmlns:a="http://schemas.openxmlformats.org/drawingml/2006/main">
+            <a:pPr algn="ctr">
+              <a:defRPr sz="1350" b="0">
+                <a:solidFill>
+                  <a:srgbClr val="FF836D"/>
+                </a:solidFill>
+                <a:latin typeface="Arial"/>
+                <a:ea typeface="Arial"/>
+                <a:cs typeface="Arial"/>
+              </a:defRPr>
             </a:pPr>
             <a:r>
               <a:rPr sz="1350" b="0">
@@ -7680,10 +9599,101 @@
       </p:sp>
       <p:sp>
         <p:nvSpPr>
-          <p:cNvPr id="17" name="hostNetwork  /  одна реплика Asterisk  /  постоянный LAN IP  /  б">
-            <a:extLst xmlns:a="http://schemas.openxmlformats.org/drawingml/2006/main">
-              <a:ext uri="{FF2B5EF4-FFF2-40B4-BE49-F238E27FC236}">
-                <a16:creationId xmlns:a16="http://schemas.microsoft.com/office/drawing/2014/main" id="{221081D1-D959-462B-8139-97C5B909C815}"/>
+          <p:cNvPr id="18" name="AMI&#10;SIP / RTP">
+            <a:extLst xmlns:a="http://schemas.openxmlformats.org/drawingml/2006/main">
+              <a:ext uri="{FF2B5EF4-FFF2-40B4-BE49-F238E27FC236}">
+                <a16:creationId xmlns:a16="http://schemas.microsoft.com/office/drawing/2014/main" id="{83D1D87F-DE00-471D-B2FB-1CFCCB5AE5EA}"/>
+              </a:ext>
+            </a:extLst>
+          </p:cNvPr>
+          <p:cNvSpPr>
+            <a:spLocks xmlns:a="http://schemas.openxmlformats.org/drawingml/2006/main" noGrp="1"/>
+          </p:cNvSpPr>
+          <p:nvPr/>
+        </p:nvSpPr>
+        <p:spPr>
+          <a:xfrm xmlns:a="http://schemas.openxmlformats.org/drawingml/2006/main">
+            <a:off x="9648825" y="3209925"/>
+            <a:ext cx="1809750" cy="571500"/>
+          </a:xfrm>
+          <a:prstGeom xmlns:a="http://schemas.openxmlformats.org/drawingml/2006/main" prst="rect">
+            <a:avLst/>
+          </a:prstGeom>
+          <a:noFill xmlns:a="http://schemas.openxmlformats.org/drawingml/2006/main"/>
+          <a:ln xmlns:a="http://schemas.openxmlformats.org/drawingml/2006/main" w="0">
+            <a:noFill/>
+          </a:ln>
+        </p:spPr>
+        <p:txBody>
+          <a:bodyPr xmlns:a="http://schemas.openxmlformats.org/drawingml/2006/main" wrap="square" lIns="0" tIns="0" rIns="0" bIns="0" anchor="t">
+            <a:noAutofit/>
+          </a:bodyPr>
+          <a:lstStyle xmlns:a="http://schemas.openxmlformats.org/drawingml/2006/main">
+            <a:defPPr algn="ctr">
+              <a:defRPr sz="1350" b="0">
+                <a:solidFill>
+                  <a:srgbClr val="F7CB64"/>
+                </a:solidFill>
+                <a:latin typeface="Arial"/>
+                <a:ea typeface="Arial"/>
+                <a:cs typeface="Arial"/>
+              </a:defRPr>
+            </a:defPPr>
+          </a:lstStyle>
+          <a:p xmlns:a="http://schemas.openxmlformats.org/drawingml/2006/main">
+            <a:pPr algn="ctr">
+              <a:defRPr sz="1350" b="0">
+                <a:solidFill>
+                  <a:srgbClr val="F7CB64"/>
+                </a:solidFill>
+                <a:latin typeface="Arial"/>
+                <a:ea typeface="Arial"/>
+                <a:cs typeface="Arial"/>
+              </a:defRPr>
+            </a:pPr>
+            <a:r>
+              <a:rPr sz="1350" b="0">
+                <a:solidFill>
+                  <a:srgbClr val="F7CB64"/>
+                </a:solidFill>
+                <a:latin typeface="Arial"/>
+                <a:ea typeface="Arial"/>
+                <a:cs typeface="Arial"/>
+              </a:rPr>
+              <a:t>AMI</a:t>
+            </a:r>
+          </a:p>
+          <a:p xmlns:a="http://schemas.openxmlformats.org/drawingml/2006/main">
+            <a:pPr algn="ctr">
+              <a:defRPr sz="1350" b="0">
+                <a:solidFill>
+                  <a:srgbClr val="F7CB64"/>
+                </a:solidFill>
+                <a:latin typeface="Arial"/>
+                <a:ea typeface="Arial"/>
+                <a:cs typeface="Arial"/>
+              </a:defRPr>
+            </a:pPr>
+            <a:r>
+              <a:rPr sz="1350" b="0">
+                <a:solidFill>
+                  <a:srgbClr val="F7CB64"/>
+                </a:solidFill>
+                <a:latin typeface="Arial"/>
+                <a:ea typeface="Arial"/>
+                <a:cs typeface="Arial"/>
+              </a:rPr>
+              <a:t>SIP / RTP</a:t>
+            </a:r>
+          </a:p>
+        </p:txBody>
+      </p:sp>
+      <p:sp>
+        <p:nvSpPr>
+          <p:cNvPr id="19" name="Asterisk: hostNetwork и одна реплика. HA открывает AMI-соединение">
+            <a:extLst xmlns:a="http://schemas.openxmlformats.org/drawingml/2006/main">
+              <a:ext uri="{FF2B5EF4-FFF2-40B4-BE49-F238E27FC236}">
+                <a16:creationId xmlns:a16="http://schemas.microsoft.com/office/drawing/2014/main" id="{17E4B55B-6BB6-48C6-B664-4D57E4F2C0B1}"/>
               </a:ext>
             </a:extLst>
           </p:cNvPr>
@@ -7741,7 +9751,30 @@
                 <a:ea typeface="Arial"/>
                 <a:cs typeface="Arial"/>
               </a:rPr>
-              <a:t>hostNetwork  /  одна реплика Asterisk  /  постоянный LAN IP  /  без Ingress для SIP/RTP</a:t>
+              <a:t>Asterisk: hostNetwork и одна реплика. HA открывает AMI-соединение к PBX.</a:t>
+            </a:r>
+          </a:p>
+          <a:p xmlns:a="http://schemas.openxmlformats.org/drawingml/2006/main">
+            <a:pPr algn="l">
+              <a:defRPr sz="1425" b="0">
+                <a:solidFill>
+                  <a:srgbClr val="AAB9D0"/>
+                </a:solidFill>
+                <a:latin typeface="Arial"/>
+                <a:ea typeface="Arial"/>
+                <a:cs typeface="Arial"/>
+              </a:defRPr>
+            </a:pPr>
+            <a:r>
+              <a:rPr sz="1425" b="0">
+                <a:solidFill>
+                  <a:srgbClr val="AAB9D0"/>
+                </a:solidFill>
+                <a:latin typeface="Arial"/>
+                <a:ea typeface="Arial"/>
+                <a:cs typeface="Arial"/>
+              </a:rPr>
+              <a:t>TFTP доступен только при provisioning. SIP, RTP и AMI остаются в LAN / VPN.</a:t>
             </a:r>
           </a:p>
         </p:txBody>
@@ -7749,7 +9782,7 @@
     </p:spTree>
     <p:extLst>
       <p:ext uri="{BB962C8B-B14F-4D97-AF65-F5344CB8AC3E}">
-        <p14:creationId xmlns:p14="http://schemas.microsoft.com/office/powerpoint/2010/main" val="1054128241"/>
+        <p14:creationId xmlns:p14="http://schemas.microsoft.com/office/powerpoint/2010/main" val="1920374137"/>
       </p:ext>
     </p:extLst>
   </p:cSld>
@@ -7777,10 +9810,10 @@
       </p:grpSpPr>
       <p:sp>
         <p:nvSpPr>
-          <p:cNvPr id="13" name="Сеть для сигнализации и голоса">
-            <a:extLst xmlns:a="http://schemas.openxmlformats.org/drawingml/2006/main">
-              <a:ext uri="{FF2B5EF4-FFF2-40B4-BE49-F238E27FC236}">
-                <a16:creationId xmlns:a16="http://schemas.microsoft.com/office/drawing/2014/main" id="{342D0041-40D7-4E93-9137-106B0C2CCABF}"/>
+          <p:cNvPr id="16" name="Сеть для сигнализации и голоса">
+            <a:extLst xmlns:a="http://schemas.openxmlformats.org/drawingml/2006/main">
+              <a:ext uri="{FF2B5EF4-FFF2-40B4-BE49-F238E27FC236}">
+                <a16:creationId xmlns:a16="http://schemas.microsoft.com/office/drawing/2014/main" id="{868E3ABC-376A-4CBD-8006-E38B77B2E69A}"/>
               </a:ext>
             </a:extLst>
           </p:cNvPr>
@@ -7848,7 +9881,7 @@
           <p:cNvPr id="2" name="04">
             <a:extLst xmlns:a="http://schemas.openxmlformats.org/drawingml/2006/main">
               <a:ext uri="{FF2B5EF4-FFF2-40B4-BE49-F238E27FC236}">
-                <a16:creationId xmlns:a16="http://schemas.microsoft.com/office/drawing/2014/main" id="{7DD993B8-FCA0-4F44-8B04-F20EC3B055A3}"/>
+                <a16:creationId xmlns:a16="http://schemas.microsoft.com/office/drawing/2014/main" id="{92743D5D-6004-4287-AEE0-F0B2FA80E63F}"/>
               </a:ext>
             </a:extLst>
           </p:cNvPr>
@@ -7916,7 +9949,7 @@
           <p:cNvPr id="3" name="5060">
             <a:extLst xmlns:a="http://schemas.openxmlformats.org/drawingml/2006/main">
               <a:ext uri="{FF2B5EF4-FFF2-40B4-BE49-F238E27FC236}">
-                <a16:creationId xmlns:a16="http://schemas.microsoft.com/office/drawing/2014/main" id="{60CB92F0-7B07-4E31-AD2E-DA746876D957}"/>
+                <a16:creationId xmlns:a16="http://schemas.microsoft.com/office/drawing/2014/main" id="{4E8F08E6-EA6C-4D89-A674-60C7EA3EFF90}"/>
               </a:ext>
             </a:extLst>
           </p:cNvPr>
@@ -7927,8 +9960,8 @@
         </p:nvSpPr>
         <p:spPr>
           <a:xfrm xmlns:a="http://schemas.openxmlformats.org/drawingml/2006/main">
-            <a:off x="571500" y="1714500"/>
-            <a:ext cx="4714875" cy="571500"/>
+            <a:off x="571500" y="1619250"/>
+            <a:ext cx="4667250" cy="571500"/>
           </a:xfrm>
           <a:prstGeom xmlns:a="http://schemas.openxmlformats.org/drawingml/2006/main" prst="rect">
             <a:avLst/>
@@ -7944,7 +9977,7 @@
           </a:bodyPr>
           <a:lstStyle xmlns:a="http://schemas.openxmlformats.org/drawingml/2006/main">
             <a:defPPr algn="l">
-              <a:defRPr sz="3225" b="1">
+              <a:defRPr sz="3075" b="1">
                 <a:solidFill>
                   <a:srgbClr val="48DDCC"/>
                 </a:solidFill>
@@ -7956,7 +9989,7 @@
           </a:lstStyle>
           <a:p xmlns:a="http://schemas.openxmlformats.org/drawingml/2006/main">
             <a:pPr algn="l">
-              <a:defRPr sz="3225" b="1">
+              <a:defRPr sz="3075" b="1">
                 <a:solidFill>
                   <a:srgbClr val="48DDCC"/>
                 </a:solidFill>
@@ -7966,7 +9999,7 @@
               </a:defRPr>
             </a:pPr>
             <a:r>
-              <a:rPr sz="3225" b="1">
+              <a:rPr sz="3075" b="1">
                 <a:solidFill>
                   <a:srgbClr val="48DDCC"/>
                 </a:solidFill>
@@ -7981,10 +10014,10 @@
       </p:sp>
       <p:sp>
         <p:nvSpPr>
-          <p:cNvPr id="4" name="TCP + UDP">
-            <a:extLst xmlns:a="http://schemas.openxmlformats.org/drawingml/2006/main">
-              <a:ext uri="{FF2B5EF4-FFF2-40B4-BE49-F238E27FC236}">
-                <a16:creationId xmlns:a16="http://schemas.microsoft.com/office/drawing/2014/main" id="{F2B9FDBC-440A-4DCA-BC6B-04778250E89A}"/>
+          <p:cNvPr id="4" name="TCP / UDP">
+            <a:extLst xmlns:a="http://schemas.openxmlformats.org/drawingml/2006/main">
+              <a:ext uri="{FF2B5EF4-FFF2-40B4-BE49-F238E27FC236}">
+                <a16:creationId xmlns:a16="http://schemas.microsoft.com/office/drawing/2014/main" id="{0E6A24A1-D186-4EB0-8459-ACFE293E27A6}"/>
               </a:ext>
             </a:extLst>
           </p:cNvPr>
@@ -7995,8 +10028,8 @@
         </p:nvSpPr>
         <p:spPr>
           <a:xfrm xmlns:a="http://schemas.openxmlformats.org/drawingml/2006/main">
-            <a:off x="5524500" y="1781175"/>
-            <a:ext cx="2000250" cy="428625"/>
+            <a:off x="5429250" y="1685925"/>
+            <a:ext cx="2143125" cy="428625"/>
           </a:xfrm>
           <a:prstGeom xmlns:a="http://schemas.openxmlformats.org/drawingml/2006/main" prst="rect">
             <a:avLst/>
@@ -8012,7 +10045,7 @@
           </a:bodyPr>
           <a:lstStyle xmlns:a="http://schemas.openxmlformats.org/drawingml/2006/main">
             <a:defPPr algn="l">
-              <a:defRPr sz="2100" b="0">
+              <a:defRPr sz="1950" b="0">
                 <a:solidFill>
                   <a:srgbClr val="F5F7FB"/>
                 </a:solidFill>
@@ -8024,35 +10057,35 @@
           </a:lstStyle>
           <a:p xmlns:a="http://schemas.openxmlformats.org/drawingml/2006/main">
             <a:pPr algn="l">
-              <a:defRPr sz="2100" b="0">
-                <a:solidFill>
-                  <a:srgbClr val="F5F7FB"/>
-                </a:solidFill>
-                <a:latin typeface="Arial"/>
-                <a:ea typeface="Arial"/>
-                <a:cs typeface="Arial"/>
-              </a:defRPr>
-            </a:pPr>
-            <a:r>
-              <a:rPr sz="2100" b="0">
-                <a:solidFill>
-                  <a:srgbClr val="F5F7FB"/>
-                </a:solidFill>
-                <a:latin typeface="Arial"/>
-                <a:ea typeface="Arial"/>
-                <a:cs typeface="Arial"/>
-              </a:rPr>
-              <a:t>TCP + UDP</a:t>
-            </a:r>
-          </a:p>
-        </p:txBody>
-      </p:sp>
-      <p:sp>
-        <p:nvSpPr>
-          <p:cNvPr id="5" name="SIP / регистрация">
-            <a:extLst xmlns:a="http://schemas.openxmlformats.org/drawingml/2006/main">
-              <a:ext uri="{FF2B5EF4-FFF2-40B4-BE49-F238E27FC236}">
-                <a16:creationId xmlns:a16="http://schemas.microsoft.com/office/drawing/2014/main" id="{4A163FB7-56F4-4B15-B776-3E9743FD9C97}"/>
+              <a:defRPr sz="1950" b="0">
+                <a:solidFill>
+                  <a:srgbClr val="F5F7FB"/>
+                </a:solidFill>
+                <a:latin typeface="Arial"/>
+                <a:ea typeface="Arial"/>
+                <a:cs typeface="Arial"/>
+              </a:defRPr>
+            </a:pPr>
+            <a:r>
+              <a:rPr sz="1950" b="0">
+                <a:solidFill>
+                  <a:srgbClr val="F5F7FB"/>
+                </a:solidFill>
+                <a:latin typeface="Arial"/>
+                <a:ea typeface="Arial"/>
+                <a:cs typeface="Arial"/>
+              </a:rPr>
+              <a:t>TCP / UDP</a:t>
+            </a:r>
+          </a:p>
+        </p:txBody>
+      </p:sp>
+      <p:sp>
+        <p:nvSpPr>
+          <p:cNvPr id="5" name="SIP: Cisco TCP, HA UDP">
+            <a:extLst xmlns:a="http://schemas.openxmlformats.org/drawingml/2006/main">
+              <a:ext uri="{FF2B5EF4-FFF2-40B4-BE49-F238E27FC236}">
+                <a16:creationId xmlns:a16="http://schemas.microsoft.com/office/drawing/2014/main" id="{0E7BF4D0-D50D-4772-82E7-F3821DA3D8BF}"/>
               </a:ext>
             </a:extLst>
           </p:cNvPr>
@@ -8063,8 +10096,8 @@
         </p:nvSpPr>
         <p:spPr>
           <a:xfrm xmlns:a="http://schemas.openxmlformats.org/drawingml/2006/main">
-            <a:off x="7667625" y="1781175"/>
-            <a:ext cx="3905250" cy="571500"/>
+            <a:off x="7667625" y="1685925"/>
+            <a:ext cx="4000500" cy="571500"/>
           </a:xfrm>
           <a:prstGeom xmlns:a="http://schemas.openxmlformats.org/drawingml/2006/main" prst="rect">
             <a:avLst/>
@@ -8080,7 +10113,7 @@
           </a:bodyPr>
           <a:lstStyle xmlns:a="http://schemas.openxmlformats.org/drawingml/2006/main">
             <a:defPPr algn="l">
-              <a:defRPr sz="2100" b="0">
+              <a:defRPr sz="1875" b="0">
                 <a:solidFill>
                   <a:srgbClr val="AAB9D0"/>
                 </a:solidFill>
@@ -8092,7 +10125,7 @@
           </a:lstStyle>
           <a:p xmlns:a="http://schemas.openxmlformats.org/drawingml/2006/main">
             <a:pPr algn="l">
-              <a:defRPr sz="2100" b="0">
+              <a:defRPr sz="1875" b="0">
                 <a:solidFill>
                   <a:srgbClr val="AAB9D0"/>
                 </a:solidFill>
@@ -8102,7 +10135,7 @@
               </a:defRPr>
             </a:pPr>
             <a:r>
-              <a:rPr sz="2100" b="0">
+              <a:rPr sz="1875" b="0">
                 <a:solidFill>
                   <a:srgbClr val="AAB9D0"/>
                 </a:solidFill>
@@ -8110,7 +10143,7 @@
                 <a:ea typeface="Arial"/>
                 <a:cs typeface="Arial"/>
               </a:rPr>
-              <a:t>SIP / регистрация</a:t>
+              <a:t>SIP: Cisco TCP, HA UDP</a:t>
             </a:r>
           </a:p>
         </p:txBody>
@@ -8120,7 +10153,7 @@
           <p:cNvPr id="6" name="10000–10199">
             <a:extLst xmlns:a="http://schemas.openxmlformats.org/drawingml/2006/main">
               <a:ext uri="{FF2B5EF4-FFF2-40B4-BE49-F238E27FC236}">
-                <a16:creationId xmlns:a16="http://schemas.microsoft.com/office/drawing/2014/main" id="{C8244D03-023B-44FD-B792-57BD1C15B664}"/>
+                <a16:creationId xmlns:a16="http://schemas.microsoft.com/office/drawing/2014/main" id="{466FFEF7-4448-4C7F-BC5B-316939711D9E}"/>
               </a:ext>
             </a:extLst>
           </p:cNvPr>
@@ -8131,8 +10164,8 @@
         </p:nvSpPr>
         <p:spPr>
           <a:xfrm xmlns:a="http://schemas.openxmlformats.org/drawingml/2006/main">
-            <a:off x="571500" y="2952750"/>
-            <a:ext cx="4714875" cy="571500"/>
+            <a:off x="571500" y="2590800"/>
+            <a:ext cx="4667250" cy="571500"/>
           </a:xfrm>
           <a:prstGeom xmlns:a="http://schemas.openxmlformats.org/drawingml/2006/main" prst="rect">
             <a:avLst/>
@@ -8148,7 +10181,7 @@
           </a:bodyPr>
           <a:lstStyle xmlns:a="http://schemas.openxmlformats.org/drawingml/2006/main">
             <a:defPPr algn="l">
-              <a:defRPr sz="3225" b="1">
+              <a:defRPr sz="3075" b="1">
                 <a:solidFill>
                   <a:srgbClr val="48DDCC"/>
                 </a:solidFill>
@@ -8160,7 +10193,7 @@
           </a:lstStyle>
           <a:p xmlns:a="http://schemas.openxmlformats.org/drawingml/2006/main">
             <a:pPr algn="l">
-              <a:defRPr sz="3225" b="1">
+              <a:defRPr sz="3075" b="1">
                 <a:solidFill>
                   <a:srgbClr val="48DDCC"/>
                 </a:solidFill>
@@ -8170,7 +10203,7 @@
               </a:defRPr>
             </a:pPr>
             <a:r>
-              <a:rPr sz="3225" b="1">
+              <a:rPr sz="3075" b="1">
                 <a:solidFill>
                   <a:srgbClr val="48DDCC"/>
                 </a:solidFill>
@@ -8185,10 +10218,10 @@
       </p:sp>
       <p:sp>
         <p:nvSpPr>
-          <p:cNvPr id="7" name="UDP">
-            <a:extLst xmlns:a="http://schemas.openxmlformats.org/drawingml/2006/main">
-              <a:ext uri="{FF2B5EF4-FFF2-40B4-BE49-F238E27FC236}">
-                <a16:creationId xmlns:a16="http://schemas.microsoft.com/office/drawing/2014/main" id="{5A047A1A-1C88-48E2-B1CC-53257A5FF2FE}"/>
+          <p:cNvPr id="7" name="UDP на PBX">
+            <a:extLst xmlns:a="http://schemas.openxmlformats.org/drawingml/2006/main">
+              <a:ext uri="{FF2B5EF4-FFF2-40B4-BE49-F238E27FC236}">
+                <a16:creationId xmlns:a16="http://schemas.microsoft.com/office/drawing/2014/main" id="{05FB8CC9-D19E-4450-B71B-685ED15183F9}"/>
               </a:ext>
             </a:extLst>
           </p:cNvPr>
@@ -8199,8 +10232,8 @@
         </p:nvSpPr>
         <p:spPr>
           <a:xfrm xmlns:a="http://schemas.openxmlformats.org/drawingml/2006/main">
-            <a:off x="5524500" y="3019425"/>
-            <a:ext cx="2000250" cy="428625"/>
+            <a:off x="5429250" y="2657475"/>
+            <a:ext cx="2143125" cy="428625"/>
           </a:xfrm>
           <a:prstGeom xmlns:a="http://schemas.openxmlformats.org/drawingml/2006/main" prst="rect">
             <a:avLst/>
@@ -8216,7 +10249,7 @@
           </a:bodyPr>
           <a:lstStyle xmlns:a="http://schemas.openxmlformats.org/drawingml/2006/main">
             <a:defPPr algn="l">
-              <a:defRPr sz="2100" b="0">
+              <a:defRPr sz="1950" b="0">
                 <a:solidFill>
                   <a:srgbClr val="F5F7FB"/>
                 </a:solidFill>
@@ -8228,25 +10261,25 @@
           </a:lstStyle>
           <a:p xmlns:a="http://schemas.openxmlformats.org/drawingml/2006/main">
             <a:pPr algn="l">
-              <a:defRPr sz="2100" b="0">
-                <a:solidFill>
-                  <a:srgbClr val="F5F7FB"/>
-                </a:solidFill>
-                <a:latin typeface="Arial"/>
-                <a:ea typeface="Arial"/>
-                <a:cs typeface="Arial"/>
-              </a:defRPr>
-            </a:pPr>
-            <a:r>
-              <a:rPr sz="2100" b="0">
-                <a:solidFill>
-                  <a:srgbClr val="F5F7FB"/>
-                </a:solidFill>
-                <a:latin typeface="Arial"/>
-                <a:ea typeface="Arial"/>
-                <a:cs typeface="Arial"/>
-              </a:rPr>
-              <a:t>UDP</a:t>
+              <a:defRPr sz="1950" b="0">
+                <a:solidFill>
+                  <a:srgbClr val="F5F7FB"/>
+                </a:solidFill>
+                <a:latin typeface="Arial"/>
+                <a:ea typeface="Arial"/>
+                <a:cs typeface="Arial"/>
+              </a:defRPr>
+            </a:pPr>
+            <a:r>
+              <a:rPr sz="1950" b="0">
+                <a:solidFill>
+                  <a:srgbClr val="F5F7FB"/>
+                </a:solidFill>
+                <a:latin typeface="Arial"/>
+                <a:ea typeface="Arial"/>
+                <a:cs typeface="Arial"/>
+              </a:rPr>
+              <a:t>UDP на PBX</a:t>
             </a:r>
           </a:p>
         </p:txBody>
@@ -8256,7 +10289,7 @@
           <p:cNvPr id="8" name="RTP / голос">
             <a:extLst xmlns:a="http://schemas.openxmlformats.org/drawingml/2006/main">
               <a:ext uri="{FF2B5EF4-FFF2-40B4-BE49-F238E27FC236}">
-                <a16:creationId xmlns:a16="http://schemas.microsoft.com/office/drawing/2014/main" id="{26BBDCFE-67A0-4739-A18A-54D7F993E106}"/>
+                <a16:creationId xmlns:a16="http://schemas.microsoft.com/office/drawing/2014/main" id="{397E0A6A-D826-47D3-9FBA-DCDDD6B1E2FA}"/>
               </a:ext>
             </a:extLst>
           </p:cNvPr>
@@ -8267,8 +10300,8 @@
         </p:nvSpPr>
         <p:spPr>
           <a:xfrm xmlns:a="http://schemas.openxmlformats.org/drawingml/2006/main">
-            <a:off x="7667625" y="3019425"/>
-            <a:ext cx="3905250" cy="571500"/>
+            <a:off x="7667625" y="2657475"/>
+            <a:ext cx="4000500" cy="571500"/>
           </a:xfrm>
           <a:prstGeom xmlns:a="http://schemas.openxmlformats.org/drawingml/2006/main" prst="rect">
             <a:avLst/>
@@ -8284,7 +10317,7 @@
           </a:bodyPr>
           <a:lstStyle xmlns:a="http://schemas.openxmlformats.org/drawingml/2006/main">
             <a:defPPr algn="l">
-              <a:defRPr sz="2100" b="0">
+              <a:defRPr sz="1875" b="0">
                 <a:solidFill>
                   <a:srgbClr val="AAB9D0"/>
                 </a:solidFill>
@@ -8296,7 +10329,7 @@
           </a:lstStyle>
           <a:p xmlns:a="http://schemas.openxmlformats.org/drawingml/2006/main">
             <a:pPr algn="l">
-              <a:defRPr sz="2100" b="0">
+              <a:defRPr sz="1875" b="0">
                 <a:solidFill>
                   <a:srgbClr val="AAB9D0"/>
                 </a:solidFill>
@@ -8306,7 +10339,7 @@
               </a:defRPr>
             </a:pPr>
             <a:r>
-              <a:rPr sz="2100" b="0">
+              <a:rPr sz="1875" b="0">
                 <a:solidFill>
                   <a:srgbClr val="AAB9D0"/>
                 </a:solidFill>
@@ -8321,10 +10354,10 @@
       </p:sp>
       <p:sp>
         <p:nvSpPr>
-          <p:cNvPr id="9" name="69 + 20000–20031">
-            <a:extLst xmlns:a="http://schemas.openxmlformats.org/drawingml/2006/main">
-              <a:ext uri="{FF2B5EF4-FFF2-40B4-BE49-F238E27FC236}">
-                <a16:creationId xmlns:a16="http://schemas.microsoft.com/office/drawing/2014/main" id="{A662EC56-6F37-43D6-AA24-FDF6EC950077}"/>
+          <p:cNvPr id="9" name="5038">
+            <a:extLst xmlns:a="http://schemas.openxmlformats.org/drawingml/2006/main">
+              <a:ext uri="{FF2B5EF4-FFF2-40B4-BE49-F238E27FC236}">
+                <a16:creationId xmlns:a16="http://schemas.microsoft.com/office/drawing/2014/main" id="{80B6DA00-B72A-4699-B497-B9462AB440A4}"/>
               </a:ext>
             </a:extLst>
           </p:cNvPr>
@@ -8335,8 +10368,8 @@
         </p:nvSpPr>
         <p:spPr>
           <a:xfrm xmlns:a="http://schemas.openxmlformats.org/drawingml/2006/main">
-            <a:off x="571500" y="4191000"/>
-            <a:ext cx="4714875" cy="571500"/>
+            <a:off x="571500" y="3562350"/>
+            <a:ext cx="4667250" cy="571500"/>
           </a:xfrm>
           <a:prstGeom xmlns:a="http://schemas.openxmlformats.org/drawingml/2006/main" prst="rect">
             <a:avLst/>
@@ -8352,9 +10385,9 @@
           </a:bodyPr>
           <a:lstStyle xmlns:a="http://schemas.openxmlformats.org/drawingml/2006/main">
             <a:defPPr algn="l">
-              <a:defRPr sz="2700" b="1">
-                <a:solidFill>
-                  <a:srgbClr val="FF836D"/>
+              <a:defRPr sz="3075" b="1">
+                <a:solidFill>
+                  <a:srgbClr val="F7CB64"/>
                 </a:solidFill>
                 <a:latin typeface="Arial"/>
                 <a:ea typeface="Arial"/>
@@ -8364,35 +10397,35 @@
           </a:lstStyle>
           <a:p xmlns:a="http://schemas.openxmlformats.org/drawingml/2006/main">
             <a:pPr algn="l">
-              <a:defRPr sz="2700" b="1">
-                <a:solidFill>
-                  <a:srgbClr val="FF836D"/>
-                </a:solidFill>
-                <a:latin typeface="Arial"/>
-                <a:ea typeface="Arial"/>
-                <a:cs typeface="Arial"/>
-              </a:defRPr>
-            </a:pPr>
-            <a:r>
-              <a:rPr sz="2700" b="1">
-                <a:solidFill>
-                  <a:srgbClr val="FF836D"/>
-                </a:solidFill>
-                <a:latin typeface="Arial"/>
-                <a:ea typeface="Arial"/>
-                <a:cs typeface="Arial"/>
-              </a:rPr>
-              <a:t>69 + 20000–20031</a:t>
-            </a:r>
-          </a:p>
-        </p:txBody>
-      </p:sp>
-      <p:sp>
-        <p:nvSpPr>
-          <p:cNvPr id="10" name="UDP">
-            <a:extLst xmlns:a="http://schemas.openxmlformats.org/drawingml/2006/main">
-              <a:ext uri="{FF2B5EF4-FFF2-40B4-BE49-F238E27FC236}">
-                <a16:creationId xmlns:a16="http://schemas.microsoft.com/office/drawing/2014/main" id="{9AD79342-8218-4C40-ABC1-FE519E31E7A1}"/>
+              <a:defRPr sz="3075" b="1">
+                <a:solidFill>
+                  <a:srgbClr val="F7CB64"/>
+                </a:solidFill>
+                <a:latin typeface="Arial"/>
+                <a:ea typeface="Arial"/>
+                <a:cs typeface="Arial"/>
+              </a:defRPr>
+            </a:pPr>
+            <a:r>
+              <a:rPr sz="3075" b="1">
+                <a:solidFill>
+                  <a:srgbClr val="F7CB64"/>
+                </a:solidFill>
+                <a:latin typeface="Arial"/>
+                <a:ea typeface="Arial"/>
+                <a:cs typeface="Arial"/>
+              </a:rPr>
+              <a:t>5038</a:t>
+            </a:r>
+          </a:p>
+        </p:txBody>
+      </p:sp>
+      <p:sp>
+        <p:nvSpPr>
+          <p:cNvPr id="10" name="TCP на PBX">
+            <a:extLst xmlns:a="http://schemas.openxmlformats.org/drawingml/2006/main">
+              <a:ext uri="{FF2B5EF4-FFF2-40B4-BE49-F238E27FC236}">
+                <a16:creationId xmlns:a16="http://schemas.microsoft.com/office/drawing/2014/main" id="{A938738F-F617-4356-AFE2-62F8906E7B31}"/>
               </a:ext>
             </a:extLst>
           </p:cNvPr>
@@ -8403,8 +10436,8 @@
         </p:nvSpPr>
         <p:spPr>
           <a:xfrm xmlns:a="http://schemas.openxmlformats.org/drawingml/2006/main">
-            <a:off x="5524500" y="4257675"/>
-            <a:ext cx="2000250" cy="428625"/>
+            <a:off x="5429250" y="3629025"/>
+            <a:ext cx="2143125" cy="428625"/>
           </a:xfrm>
           <a:prstGeom xmlns:a="http://schemas.openxmlformats.org/drawingml/2006/main" prst="rect">
             <a:avLst/>
@@ -8420,7 +10453,7 @@
           </a:bodyPr>
           <a:lstStyle xmlns:a="http://schemas.openxmlformats.org/drawingml/2006/main">
             <a:defPPr algn="l">
-              <a:defRPr sz="2100" b="0">
+              <a:defRPr sz="1950" b="0">
                 <a:solidFill>
                   <a:srgbClr val="F5F7FB"/>
                 </a:solidFill>
@@ -8432,35 +10465,35 @@
           </a:lstStyle>
           <a:p xmlns:a="http://schemas.openxmlformats.org/drawingml/2006/main">
             <a:pPr algn="l">
-              <a:defRPr sz="2100" b="0">
-                <a:solidFill>
-                  <a:srgbClr val="F5F7FB"/>
-                </a:solidFill>
-                <a:latin typeface="Arial"/>
-                <a:ea typeface="Arial"/>
-                <a:cs typeface="Arial"/>
-              </a:defRPr>
-            </a:pPr>
-            <a:r>
-              <a:rPr sz="2100" b="0">
-                <a:solidFill>
-                  <a:srgbClr val="F5F7FB"/>
-                </a:solidFill>
-                <a:latin typeface="Arial"/>
-                <a:ea typeface="Arial"/>
-                <a:cs typeface="Arial"/>
-              </a:rPr>
-              <a:t>UDP</a:t>
-            </a:r>
-          </a:p>
-        </p:txBody>
-      </p:sp>
-      <p:sp>
-        <p:nvSpPr>
-          <p:cNvPr id="11" name="TFTP / временно">
-            <a:extLst xmlns:a="http://schemas.openxmlformats.org/drawingml/2006/main">
-              <a:ext uri="{FF2B5EF4-FFF2-40B4-BE49-F238E27FC236}">
-                <a16:creationId xmlns:a16="http://schemas.microsoft.com/office/drawing/2014/main" id="{817D9182-E6F3-49A0-8EFE-DD7D3911F0B3}"/>
+              <a:defRPr sz="1950" b="0">
+                <a:solidFill>
+                  <a:srgbClr val="F5F7FB"/>
+                </a:solidFill>
+                <a:latin typeface="Arial"/>
+                <a:ea typeface="Arial"/>
+                <a:cs typeface="Arial"/>
+              </a:defRPr>
+            </a:pPr>
+            <a:r>
+              <a:rPr sz="1950" b="0">
+                <a:solidFill>
+                  <a:srgbClr val="F5F7FB"/>
+                </a:solidFill>
+                <a:latin typeface="Arial"/>
+                <a:ea typeface="Arial"/>
+                <a:cs typeface="Arial"/>
+              </a:rPr>
+              <a:t>TCP на PBX</a:t>
+            </a:r>
+          </a:p>
+        </p:txBody>
+      </p:sp>
+      <p:sp>
+        <p:nvSpPr>
+          <p:cNvPr id="11" name="AMI, только HA IP /32">
+            <a:extLst xmlns:a="http://schemas.openxmlformats.org/drawingml/2006/main">
+              <a:ext uri="{FF2B5EF4-FFF2-40B4-BE49-F238E27FC236}">
+                <a16:creationId xmlns:a16="http://schemas.microsoft.com/office/drawing/2014/main" id="{A5593897-2C09-4222-B3FB-929EB1A521E9}"/>
               </a:ext>
             </a:extLst>
           </p:cNvPr>
@@ -8471,8 +10504,8 @@
         </p:nvSpPr>
         <p:spPr>
           <a:xfrm xmlns:a="http://schemas.openxmlformats.org/drawingml/2006/main">
-            <a:off x="7667625" y="4257675"/>
-            <a:ext cx="3905250" cy="571500"/>
+            <a:off x="7667625" y="3629025"/>
+            <a:ext cx="4000500" cy="571500"/>
           </a:xfrm>
           <a:prstGeom xmlns:a="http://schemas.openxmlformats.org/drawingml/2006/main" prst="rect">
             <a:avLst/>
@@ -8488,7 +10521,7 @@
           </a:bodyPr>
           <a:lstStyle xmlns:a="http://schemas.openxmlformats.org/drawingml/2006/main">
             <a:defPPr algn="l">
-              <a:defRPr sz="2100" b="0">
+              <a:defRPr sz="1875" b="0">
                 <a:solidFill>
                   <a:srgbClr val="AAB9D0"/>
                 </a:solidFill>
@@ -8500,7 +10533,7 @@
           </a:lstStyle>
           <a:p xmlns:a="http://schemas.openxmlformats.org/drawingml/2006/main">
             <a:pPr algn="l">
-              <a:defRPr sz="2100" b="0">
+              <a:defRPr sz="1875" b="0">
                 <a:solidFill>
                   <a:srgbClr val="AAB9D0"/>
                 </a:solidFill>
@@ -8510,7 +10543,7 @@
               </a:defRPr>
             </a:pPr>
             <a:r>
-              <a:rPr sz="2100" b="0">
+              <a:rPr sz="1875" b="0">
                 <a:solidFill>
                   <a:srgbClr val="AAB9D0"/>
                 </a:solidFill>
@@ -8518,6 +10551,210 @@
                 <a:ea typeface="Arial"/>
                 <a:cs typeface="Arial"/>
               </a:rPr>
+              <a:t>AMI, только HA IP /32</a:t>
+            </a:r>
+          </a:p>
+        </p:txBody>
+      </p:sp>
+      <p:sp>
+        <p:nvSpPr>
+          <p:cNvPr id="12" name="69 + 20000–20031">
+            <a:extLst xmlns:a="http://schemas.openxmlformats.org/drawingml/2006/main">
+              <a:ext uri="{FF2B5EF4-FFF2-40B4-BE49-F238E27FC236}">
+                <a16:creationId xmlns:a16="http://schemas.microsoft.com/office/drawing/2014/main" id="{58A7F9A8-4494-47D7-A057-77822FFCB157}"/>
+              </a:ext>
+            </a:extLst>
+          </p:cNvPr>
+          <p:cNvSpPr>
+            <a:spLocks xmlns:a="http://schemas.openxmlformats.org/drawingml/2006/main" noGrp="1"/>
+          </p:cNvSpPr>
+          <p:nvPr/>
+        </p:nvSpPr>
+        <p:spPr>
+          <a:xfrm xmlns:a="http://schemas.openxmlformats.org/drawingml/2006/main">
+            <a:off x="571500" y="4533900"/>
+            <a:ext cx="4667250" cy="571500"/>
+          </a:xfrm>
+          <a:prstGeom xmlns:a="http://schemas.openxmlformats.org/drawingml/2006/main" prst="rect">
+            <a:avLst/>
+          </a:prstGeom>
+          <a:noFill xmlns:a="http://schemas.openxmlformats.org/drawingml/2006/main"/>
+          <a:ln xmlns:a="http://schemas.openxmlformats.org/drawingml/2006/main" w="0">
+            <a:noFill/>
+          </a:ln>
+        </p:spPr>
+        <p:txBody>
+          <a:bodyPr xmlns:a="http://schemas.openxmlformats.org/drawingml/2006/main" wrap="square" lIns="0" tIns="0" rIns="0" bIns="0" anchor="t">
+            <a:noAutofit/>
+          </a:bodyPr>
+          <a:lstStyle xmlns:a="http://schemas.openxmlformats.org/drawingml/2006/main">
+            <a:defPPr algn="l">
+              <a:defRPr sz="2475" b="1">
+                <a:solidFill>
+                  <a:srgbClr val="FF836D"/>
+                </a:solidFill>
+                <a:latin typeface="Arial"/>
+                <a:ea typeface="Arial"/>
+                <a:cs typeface="Arial"/>
+              </a:defRPr>
+            </a:defPPr>
+          </a:lstStyle>
+          <a:p xmlns:a="http://schemas.openxmlformats.org/drawingml/2006/main">
+            <a:pPr algn="l">
+              <a:defRPr sz="2475" b="1">
+                <a:solidFill>
+                  <a:srgbClr val="FF836D"/>
+                </a:solidFill>
+                <a:latin typeface="Arial"/>
+                <a:ea typeface="Arial"/>
+                <a:cs typeface="Arial"/>
+              </a:defRPr>
+            </a:pPr>
+            <a:r>
+              <a:rPr sz="2475" b="1">
+                <a:solidFill>
+                  <a:srgbClr val="FF836D"/>
+                </a:solidFill>
+                <a:latin typeface="Arial"/>
+                <a:ea typeface="Arial"/>
+                <a:cs typeface="Arial"/>
+              </a:rPr>
+              <a:t>69 + 20000–20031</a:t>
+            </a:r>
+          </a:p>
+        </p:txBody>
+      </p:sp>
+      <p:sp>
+        <p:nvSpPr>
+          <p:cNvPr id="13" name="UDP на PBX">
+            <a:extLst xmlns:a="http://schemas.openxmlformats.org/drawingml/2006/main">
+              <a:ext uri="{FF2B5EF4-FFF2-40B4-BE49-F238E27FC236}">
+                <a16:creationId xmlns:a16="http://schemas.microsoft.com/office/drawing/2014/main" id="{F7C93562-0590-4060-BF4E-9544E497C774}"/>
+              </a:ext>
+            </a:extLst>
+          </p:cNvPr>
+          <p:cNvSpPr>
+            <a:spLocks xmlns:a="http://schemas.openxmlformats.org/drawingml/2006/main" noGrp="1"/>
+          </p:cNvSpPr>
+          <p:nvPr/>
+        </p:nvSpPr>
+        <p:spPr>
+          <a:xfrm xmlns:a="http://schemas.openxmlformats.org/drawingml/2006/main">
+            <a:off x="5429250" y="4600575"/>
+            <a:ext cx="2143125" cy="428625"/>
+          </a:xfrm>
+          <a:prstGeom xmlns:a="http://schemas.openxmlformats.org/drawingml/2006/main" prst="rect">
+            <a:avLst/>
+          </a:prstGeom>
+          <a:noFill xmlns:a="http://schemas.openxmlformats.org/drawingml/2006/main"/>
+          <a:ln xmlns:a="http://schemas.openxmlformats.org/drawingml/2006/main" w="0">
+            <a:noFill/>
+          </a:ln>
+        </p:spPr>
+        <p:txBody>
+          <a:bodyPr xmlns:a="http://schemas.openxmlformats.org/drawingml/2006/main" wrap="square" lIns="0" tIns="0" rIns="0" bIns="0" anchor="t">
+            <a:noAutofit/>
+          </a:bodyPr>
+          <a:lstStyle xmlns:a="http://schemas.openxmlformats.org/drawingml/2006/main">
+            <a:defPPr algn="l">
+              <a:defRPr sz="1950" b="0">
+                <a:solidFill>
+                  <a:srgbClr val="F5F7FB"/>
+                </a:solidFill>
+                <a:latin typeface="Arial"/>
+                <a:ea typeface="Arial"/>
+                <a:cs typeface="Arial"/>
+              </a:defRPr>
+            </a:defPPr>
+          </a:lstStyle>
+          <a:p xmlns:a="http://schemas.openxmlformats.org/drawingml/2006/main">
+            <a:pPr algn="l">
+              <a:defRPr sz="1950" b="0">
+                <a:solidFill>
+                  <a:srgbClr val="F5F7FB"/>
+                </a:solidFill>
+                <a:latin typeface="Arial"/>
+                <a:ea typeface="Arial"/>
+                <a:cs typeface="Arial"/>
+              </a:defRPr>
+            </a:pPr>
+            <a:r>
+              <a:rPr sz="1950" b="0">
+                <a:solidFill>
+                  <a:srgbClr val="F5F7FB"/>
+                </a:solidFill>
+                <a:latin typeface="Arial"/>
+                <a:ea typeface="Arial"/>
+                <a:cs typeface="Arial"/>
+              </a:rPr>
+              <a:t>UDP на PBX</a:t>
+            </a:r>
+          </a:p>
+        </p:txBody>
+      </p:sp>
+      <p:sp>
+        <p:nvSpPr>
+          <p:cNvPr id="14" name="TFTP / временно">
+            <a:extLst xmlns:a="http://schemas.openxmlformats.org/drawingml/2006/main">
+              <a:ext uri="{FF2B5EF4-FFF2-40B4-BE49-F238E27FC236}">
+                <a16:creationId xmlns:a16="http://schemas.microsoft.com/office/drawing/2014/main" id="{BB5D5DCF-800D-4F1C-BFD3-1780FD61812C}"/>
+              </a:ext>
+            </a:extLst>
+          </p:cNvPr>
+          <p:cNvSpPr>
+            <a:spLocks xmlns:a="http://schemas.openxmlformats.org/drawingml/2006/main" noGrp="1"/>
+          </p:cNvSpPr>
+          <p:nvPr/>
+        </p:nvSpPr>
+        <p:spPr>
+          <a:xfrm xmlns:a="http://schemas.openxmlformats.org/drawingml/2006/main">
+            <a:off x="7667625" y="4600575"/>
+            <a:ext cx="4000500" cy="571500"/>
+          </a:xfrm>
+          <a:prstGeom xmlns:a="http://schemas.openxmlformats.org/drawingml/2006/main" prst="rect">
+            <a:avLst/>
+          </a:prstGeom>
+          <a:noFill xmlns:a="http://schemas.openxmlformats.org/drawingml/2006/main"/>
+          <a:ln xmlns:a="http://schemas.openxmlformats.org/drawingml/2006/main" w="0">
+            <a:noFill/>
+          </a:ln>
+        </p:spPr>
+        <p:txBody>
+          <a:bodyPr xmlns:a="http://schemas.openxmlformats.org/drawingml/2006/main" wrap="square" lIns="0" tIns="0" rIns="0" bIns="0" anchor="t">
+            <a:noAutofit/>
+          </a:bodyPr>
+          <a:lstStyle xmlns:a="http://schemas.openxmlformats.org/drawingml/2006/main">
+            <a:defPPr algn="l">
+              <a:defRPr sz="1875" b="0">
+                <a:solidFill>
+                  <a:srgbClr val="AAB9D0"/>
+                </a:solidFill>
+                <a:latin typeface="Arial"/>
+                <a:ea typeface="Arial"/>
+                <a:cs typeface="Arial"/>
+              </a:defRPr>
+            </a:defPPr>
+          </a:lstStyle>
+          <a:p xmlns:a="http://schemas.openxmlformats.org/drawingml/2006/main">
+            <a:pPr algn="l">
+              <a:defRPr sz="1875" b="0">
+                <a:solidFill>
+                  <a:srgbClr val="AAB9D0"/>
+                </a:solidFill>
+                <a:latin typeface="Arial"/>
+                <a:ea typeface="Arial"/>
+                <a:cs typeface="Arial"/>
+              </a:defRPr>
+            </a:pPr>
+            <a:r>
+              <a:rPr sz="1875" b="0">
+                <a:solidFill>
+                  <a:srgbClr val="AAB9D0"/>
+                </a:solidFill>
+                <a:latin typeface="Arial"/>
+                <a:ea typeface="Arial"/>
+                <a:cs typeface="Arial"/>
+              </a:rPr>
               <a:t>TFTP / временно</a:t>
             </a:r>
           </a:p>
@@ -8525,10 +10762,10 @@
       </p:sp>
       <p:sp>
         <p:nvSpPr>
-          <p:cNvPr id="12" name="Host firewall разрешает телефонную LAN/VLAN. SIP и TFTP не публик">
-            <a:extLst xmlns:a="http://schemas.openxmlformats.org/drawingml/2006/main">
-              <a:ext uri="{FF2B5EF4-FFF2-40B4-BE49-F238E27FC236}">
-                <a16:creationId xmlns:a16="http://schemas.microsoft.com/office/drawing/2014/main" id="{77AF7EFF-1F5C-4B83-A027-BCB2F9CA6341}"/>
+          <p:cNvPr id="15" name="На HA RTP / RTCP динамические. Разрешения firewall ограничивают н">
+            <a:extLst xmlns:a="http://schemas.openxmlformats.org/drawingml/2006/main">
+              <a:ext uri="{FF2B5EF4-FFF2-40B4-BE49-F238E27FC236}">
+                <a16:creationId xmlns:a16="http://schemas.microsoft.com/office/drawing/2014/main" id="{F3951CA2-8331-4C39-8843-8AB11956877C}"/>
               </a:ext>
             </a:extLst>
           </p:cNvPr>
@@ -8586,7 +10823,7 @@
                 <a:ea typeface="Arial"/>
                 <a:cs typeface="Arial"/>
               </a:rPr>
-              <a:t>Host firewall разрешает телефонную LAN/VLAN. SIP и TFTP не публикуются в интернет.</a:t>
+              <a:t>На HA RTP / RTCP динамические. Разрешения firewall ограничивают нужными IP.</a:t>
             </a:r>
           </a:p>
         </p:txBody>
@@ -8594,7 +10831,7 @@
     </p:spTree>
     <p:extLst>
       <p:ext uri="{BB962C8B-B14F-4D97-AF65-F5344CB8AC3E}">
-        <p14:creationId xmlns:p14="http://schemas.microsoft.com/office/powerpoint/2010/main" val="147433706"/>
+        <p14:creationId xmlns:p14="http://schemas.microsoft.com/office/powerpoint/2010/main" val="667188580"/>
       </p:ext>
     </p:extLst>
   </p:cSld>
@@ -8625,7 +10862,7 @@
           <p:cNvPr id="12" name="">
             <a:extLst xmlns:a="http://schemas.openxmlformats.org/drawingml/2006/main">
               <a:ext uri="{FF2B5EF4-FFF2-40B4-BE49-F238E27FC236}">
-                <a16:creationId xmlns:a16="http://schemas.microsoft.com/office/drawing/2014/main" id="{344DF720-A6FE-4360-8471-2EB54DF6C190}"/>
+                <a16:creationId xmlns:a16="http://schemas.microsoft.com/office/drawing/2014/main" id="{B7B2EA67-464F-44D1-81FC-D410E488D77E}"/>
               </a:ext>
             </a:extLst>
           </p:cNvPr>
@@ -8656,7 +10893,7 @@
           <p:cNvPr id="10" name="">
             <a:extLst xmlns:a="http://schemas.openxmlformats.org/drawingml/2006/main">
               <a:ext uri="{FF2B5EF4-FFF2-40B4-BE49-F238E27FC236}">
-                <a16:creationId xmlns:a16="http://schemas.microsoft.com/office/drawing/2014/main" id="{4093AAE1-61BD-43A7-AE2E-A4803AD30582}"/>
+                <a16:creationId xmlns:a16="http://schemas.microsoft.com/office/drawing/2014/main" id="{712B716C-C7A8-41E4-AA3D-574AD8353E55}"/>
               </a:ext>
             </a:extLst>
           </p:cNvPr>
@@ -8687,7 +10924,7 @@
           <p:cNvPr id="8" name="">
             <a:extLst xmlns:a="http://schemas.openxmlformats.org/drawingml/2006/main">
               <a:ext uri="{FF2B5EF4-FFF2-40B4-BE49-F238E27FC236}">
-                <a16:creationId xmlns:a16="http://schemas.microsoft.com/office/drawing/2014/main" id="{5CA79932-F5AC-43EF-9084-FD4A9CAFBBA2}"/>
+                <a16:creationId xmlns:a16="http://schemas.microsoft.com/office/drawing/2014/main" id="{32729BF5-21E4-47F3-A266-1A14CE4137C3}"/>
               </a:ext>
             </a:extLst>
           </p:cNvPr>
@@ -8718,7 +10955,7 @@
           <p:cNvPr id="15" name="7945G поддерживает PoE без переделки">
             <a:extLst xmlns:a="http://schemas.openxmlformats.org/drawingml/2006/main">
               <a:ext uri="{FF2B5EF4-FFF2-40B4-BE49-F238E27FC236}">
-                <a16:creationId xmlns:a16="http://schemas.microsoft.com/office/drawing/2014/main" id="{547F0F52-84D3-4D49-BE2F-D777FE95CFD7}"/>
+                <a16:creationId xmlns:a16="http://schemas.microsoft.com/office/drawing/2014/main" id="{6393AEA3-C2E6-46F1-BDA3-479EDA4FFCC5}"/>
               </a:ext>
             </a:extLst>
           </p:cNvPr>
@@ -8786,7 +11023,7 @@
           <p:cNvPr id="2" name="05">
             <a:extLst xmlns:a="http://schemas.openxmlformats.org/drawingml/2006/main">
               <a:ext uri="{FF2B5EF4-FFF2-40B4-BE49-F238E27FC236}">
-                <a16:creationId xmlns:a16="http://schemas.microsoft.com/office/drawing/2014/main" id="{0E86C75E-78D0-487D-A50C-79DDC54851C5}"/>
+                <a16:creationId xmlns:a16="http://schemas.microsoft.com/office/drawing/2014/main" id="{59BC1DA5-F956-4EF8-8BD7-9D1C5C3095AC}"/>
               </a:ext>
             </a:extLst>
           </p:cNvPr>
@@ -8854,7 +11091,7 @@
           <p:cNvPr id="3" name="poe">
             <a:extLst xmlns:a="http://schemas.openxmlformats.org/drawingml/2006/main">
               <a:ext uri="{FF2B5EF4-FFF2-40B4-BE49-F238E27FC236}">
-                <a16:creationId xmlns:a16="http://schemas.microsoft.com/office/drawing/2014/main" id="{17DA3DC2-73B6-417E-8868-60F27BE2E9E4}"/>
+                <a16:creationId xmlns:a16="http://schemas.microsoft.com/office/drawing/2014/main" id="{68796E8D-C90A-47E2-B837-74C7DF9C086E}"/>
               </a:ext>
             </a:extLst>
           </p:cNvPr>
@@ -8951,7 +11188,7 @@
           <p:cNvPr id="4" name="phone1">
             <a:extLst xmlns:a="http://schemas.openxmlformats.org/drawingml/2006/main">
               <a:ext uri="{FF2B5EF4-FFF2-40B4-BE49-F238E27FC236}">
-                <a16:creationId xmlns:a16="http://schemas.microsoft.com/office/drawing/2014/main" id="{237304A5-4F8F-4684-B5BC-36016D25F3B0}"/>
+                <a16:creationId xmlns:a16="http://schemas.microsoft.com/office/drawing/2014/main" id="{9E6A82C1-6E5F-48A6-B0DA-9CCC90066C05}"/>
               </a:ext>
             </a:extLst>
           </p:cNvPr>
@@ -9048,7 +11285,7 @@
           <p:cNvPr id="5" name="lan">
             <a:extLst xmlns:a="http://schemas.openxmlformats.org/drawingml/2006/main">
               <a:ext uri="{FF2B5EF4-FFF2-40B4-BE49-F238E27FC236}">
-                <a16:creationId xmlns:a16="http://schemas.microsoft.com/office/drawing/2014/main" id="{9EDD097D-B855-4229-9E03-D343D01EAD5E}"/>
+                <a16:creationId xmlns:a16="http://schemas.microsoft.com/office/drawing/2014/main" id="{CBC4F08D-10EA-42C6-9AA2-4C696EC85FD8}"/>
               </a:ext>
             </a:extLst>
           </p:cNvPr>
@@ -9145,7 +11382,7 @@
           <p:cNvPr id="6" name="injector">
             <a:extLst xmlns:a="http://schemas.openxmlformats.org/drawingml/2006/main">
               <a:ext uri="{FF2B5EF4-FFF2-40B4-BE49-F238E27FC236}">
-                <a16:creationId xmlns:a16="http://schemas.microsoft.com/office/drawing/2014/main" id="{98BED1DE-BCCC-40DA-837B-C4796CB085D5}"/>
+                <a16:creationId xmlns:a16="http://schemas.microsoft.com/office/drawing/2014/main" id="{41A2B733-D936-4980-BF21-0C71A5BFAEED}"/>
               </a:ext>
             </a:extLst>
           </p:cNvPr>
@@ -9242,7 +11479,7 @@
           <p:cNvPr id="7" name="phone2">
             <a:extLst xmlns:a="http://schemas.openxmlformats.org/drawingml/2006/main">
               <a:ext uri="{FF2B5EF4-FFF2-40B4-BE49-F238E27FC236}">
-                <a16:creationId xmlns:a16="http://schemas.microsoft.com/office/drawing/2014/main" id="{9FBDFF34-C1DB-4105-99F0-97C6BA564DC5}"/>
+                <a16:creationId xmlns:a16="http://schemas.microsoft.com/office/drawing/2014/main" id="{BD4791D3-8074-483E-846B-F0C7B6D29236}"/>
               </a:ext>
             </a:extLst>
           </p:cNvPr>
@@ -9339,7 +11576,7 @@
           <p:cNvPr id="9" name="данные + питание">
             <a:extLst xmlns:a="http://schemas.openxmlformats.org/drawingml/2006/main">
               <a:ext uri="{FF2B5EF4-FFF2-40B4-BE49-F238E27FC236}">
-                <a16:creationId xmlns:a16="http://schemas.microsoft.com/office/drawing/2014/main" id="{635870F3-C204-4391-8497-68864E339949}"/>
+                <a16:creationId xmlns:a16="http://schemas.microsoft.com/office/drawing/2014/main" id="{C0F6E715-8F81-47BB-BD54-4710823F8078}"/>
               </a:ext>
             </a:extLst>
           </p:cNvPr>
@@ -9350,8 +11587,8 @@
         </p:nvSpPr>
         <p:spPr>
           <a:xfrm xmlns:a="http://schemas.openxmlformats.org/drawingml/2006/main">
-            <a:off x="4981575" y="2100263"/>
-            <a:ext cx="2057400" cy="304800"/>
+            <a:off x="5105400" y="2086928"/>
+            <a:ext cx="1809750" cy="571500"/>
           </a:xfrm>
           <a:prstGeom xmlns:a="http://schemas.openxmlformats.org/drawingml/2006/main" prst="rect">
             <a:avLst/>
@@ -9407,7 +11644,7 @@
           <p:cNvPr id="11" name="данные">
             <a:extLst xmlns:a="http://schemas.openxmlformats.org/drawingml/2006/main">
               <a:ext uri="{FF2B5EF4-FFF2-40B4-BE49-F238E27FC236}">
-                <a16:creationId xmlns:a16="http://schemas.microsoft.com/office/drawing/2014/main" id="{B1536DD6-3A55-44F7-8B27-597A75778D0D}"/>
+                <a16:creationId xmlns:a16="http://schemas.microsoft.com/office/drawing/2014/main" id="{1774B50D-C73B-465C-A192-1260BE24A78A}"/>
               </a:ext>
             </a:extLst>
           </p:cNvPr>
@@ -9418,8 +11655,8 @@
         </p:nvSpPr>
         <p:spPr>
           <a:xfrm xmlns:a="http://schemas.openxmlformats.org/drawingml/2006/main">
-            <a:off x="3181350" y="4264819"/>
-            <a:ext cx="2057400" cy="304800"/>
+            <a:off x="3305175" y="4251484"/>
+            <a:ext cx="1809750" cy="571500"/>
           </a:xfrm>
           <a:prstGeom xmlns:a="http://schemas.openxmlformats.org/drawingml/2006/main" prst="rect">
             <a:avLst/>
@@ -9475,7 +11712,7 @@
           <p:cNvPr id="13" name="PoE">
             <a:extLst xmlns:a="http://schemas.openxmlformats.org/drawingml/2006/main">
               <a:ext uri="{FF2B5EF4-FFF2-40B4-BE49-F238E27FC236}">
-                <a16:creationId xmlns:a16="http://schemas.microsoft.com/office/drawing/2014/main" id="{536B052F-BEBB-409F-87B7-3751B94BEC15}"/>
+                <a16:creationId xmlns:a16="http://schemas.microsoft.com/office/drawing/2014/main" id="{281583AE-9368-4B96-AC86-274D722AA010}"/>
               </a:ext>
             </a:extLst>
           </p:cNvPr>
@@ -9486,8 +11723,8 @@
         </p:nvSpPr>
         <p:spPr>
           <a:xfrm xmlns:a="http://schemas.openxmlformats.org/drawingml/2006/main">
-            <a:off x="6781800" y="4264819"/>
-            <a:ext cx="2057400" cy="304800"/>
+            <a:off x="6905625" y="4251484"/>
+            <a:ext cx="1809750" cy="571500"/>
           </a:xfrm>
           <a:prstGeom xmlns:a="http://schemas.openxmlformats.org/drawingml/2006/main" prst="rect">
             <a:avLst/>
@@ -9543,7 +11780,7 @@
           <p:cNvPr id="14" name="Пассивный 24 V инжектор не подходит. UPS питает также PoE-коммута">
             <a:extLst xmlns:a="http://schemas.openxmlformats.org/drawingml/2006/main">
               <a:ext uri="{FF2B5EF4-FFF2-40B4-BE49-F238E27FC236}">
-                <a16:creationId xmlns:a16="http://schemas.microsoft.com/office/drawing/2014/main" id="{15970A64-286A-4FBE-8FD9-22EAFBC5D93E}"/>
+                <a16:creationId xmlns:a16="http://schemas.microsoft.com/office/drawing/2014/main" id="{6F3A9C63-2777-4798-9ECE-3AA09E3C510A}"/>
               </a:ext>
             </a:extLst>
           </p:cNvPr>
@@ -9609,7 +11846,7 @@
     </p:spTree>
     <p:extLst>
       <p:ext uri="{BB962C8B-B14F-4D97-AF65-F5344CB8AC3E}">
-        <p14:creationId xmlns:p14="http://schemas.microsoft.com/office/powerpoint/2010/main" val="848046088"/>
+        <p14:creationId xmlns:p14="http://schemas.microsoft.com/office/powerpoint/2010/main" val="1492748825"/>
       </p:ext>
     </p:extLst>
   </p:cSld>
@@ -9640,7 +11877,7 @@
           <p:cNvPr id="13" name="">
             <a:extLst xmlns:a="http://schemas.openxmlformats.org/drawingml/2006/main">
               <a:ext uri="{FF2B5EF4-FFF2-40B4-BE49-F238E27FC236}">
-                <a16:creationId xmlns:a16="http://schemas.microsoft.com/office/drawing/2014/main" id="{C638784D-358B-4D22-B917-E5D50A76A553}"/>
+                <a16:creationId xmlns:a16="http://schemas.microsoft.com/office/drawing/2014/main" id="{305B94F8-AEEF-4675-BD35-87FB6BBE5371}"/>
               </a:ext>
             </a:extLst>
           </p:cNvPr>
@@ -9671,7 +11908,7 @@
           <p:cNvPr id="12" name="">
             <a:extLst xmlns:a="http://schemas.openxmlformats.org/drawingml/2006/main">
               <a:ext uri="{FF2B5EF4-FFF2-40B4-BE49-F238E27FC236}">
-                <a16:creationId xmlns:a16="http://schemas.microsoft.com/office/drawing/2014/main" id="{E5859D48-C111-49FE-BF9E-19324CF3E8CB}"/>
+                <a16:creationId xmlns:a16="http://schemas.microsoft.com/office/drawing/2014/main" id="{4F0BDF9F-5F8E-4518-99D4-957EADA997CC}"/>
               </a:ext>
             </a:extLst>
           </p:cNvPr>
@@ -9702,7 +11939,7 @@
           <p:cNvPr id="11" name="">
             <a:extLst xmlns:a="http://schemas.openxmlformats.org/drawingml/2006/main">
               <a:ext uri="{FF2B5EF4-FFF2-40B4-BE49-F238E27FC236}">
-                <a16:creationId xmlns:a16="http://schemas.microsoft.com/office/drawing/2014/main" id="{097AC1CB-D780-4644-8947-61E48BCCEA8F}"/>
+                <a16:creationId xmlns:a16="http://schemas.microsoft.com/office/drawing/2014/main" id="{CAF070AC-2D72-4963-BF45-BFB68C9DF2E5}"/>
               </a:ext>
             </a:extLst>
           </p:cNvPr>
@@ -9733,7 +11970,7 @@
           <p:cNvPr id="10" name="">
             <a:extLst xmlns:a="http://schemas.openxmlformats.org/drawingml/2006/main">
               <a:ext uri="{FF2B5EF4-FFF2-40B4-BE49-F238E27FC236}">
-                <a16:creationId xmlns:a16="http://schemas.microsoft.com/office/drawing/2014/main" id="{89120B9C-AD44-4EF8-B005-E1ACD70FD1CF}"/>
+                <a16:creationId xmlns:a16="http://schemas.microsoft.com/office/drawing/2014/main" id="{BFE91867-322D-4F2B-982D-D4A52E00EEAA}"/>
               </a:ext>
             </a:extLst>
           </p:cNvPr>
@@ -9764,7 +12001,7 @@
           <p:cNvPr id="9" name="">
             <a:extLst xmlns:a="http://schemas.openxmlformats.org/drawingml/2006/main">
               <a:ext uri="{FF2B5EF4-FFF2-40B4-BE49-F238E27FC236}">
-                <a16:creationId xmlns:a16="http://schemas.microsoft.com/office/drawing/2014/main" id="{4BD29729-5C87-4855-8EA5-57D39EA3CA32}"/>
+                <a16:creationId xmlns:a16="http://schemas.microsoft.com/office/drawing/2014/main" id="{48C98A0E-0B62-4D92-905B-9B4E029ADD4A}"/>
               </a:ext>
             </a:extLst>
           </p:cNvPr>
@@ -9795,7 +12032,7 @@
           <p:cNvPr id="15" name="Один телефон до всей партии">
             <a:extLst xmlns:a="http://schemas.openxmlformats.org/drawingml/2006/main">
               <a:ext uri="{FF2B5EF4-FFF2-40B4-BE49-F238E27FC236}">
-                <a16:creationId xmlns:a16="http://schemas.microsoft.com/office/drawing/2014/main" id="{B0380793-8402-461E-A45E-55F68836BADD}"/>
+                <a16:creationId xmlns:a16="http://schemas.microsoft.com/office/drawing/2014/main" id="{89B6EBF7-FE8B-4445-A6A8-72A0F6B70372}"/>
               </a:ext>
             </a:extLst>
           </p:cNvPr>
@@ -9863,7 +12100,7 @@
           <p:cNvPr id="2" name="06">
             <a:extLst xmlns:a="http://schemas.openxmlformats.org/drawingml/2006/main">
               <a:ext uri="{FF2B5EF4-FFF2-40B4-BE49-F238E27FC236}">
-                <a16:creationId xmlns:a16="http://schemas.microsoft.com/office/drawing/2014/main" id="{064D8A90-2EBC-4FCC-9AB8-7395626223BB}"/>
+                <a16:creationId xmlns:a16="http://schemas.microsoft.com/office/drawing/2014/main" id="{25BE4B72-1415-4CDA-BC28-F8E822F81387}"/>
               </a:ext>
             </a:extLst>
           </p:cNvPr>
@@ -9931,7 +12168,7 @@
           <p:cNvPr id="3" name="inventory">
             <a:extLst xmlns:a="http://schemas.openxmlformats.org/drawingml/2006/main">
               <a:ext uri="{FF2B5EF4-FFF2-40B4-BE49-F238E27FC236}">
-                <a16:creationId xmlns:a16="http://schemas.microsoft.com/office/drawing/2014/main" id="{62117F00-1D69-46ED-BC8D-F9CAFC752EED}"/>
+                <a16:creationId xmlns:a16="http://schemas.microsoft.com/office/drawing/2014/main" id="{99D100F6-1A73-4B86-9965-9B4DB14B0C65}"/>
               </a:ext>
             </a:extLst>
           </p:cNvPr>
@@ -10028,7 +12265,7 @@
           <p:cNvPr id="4" name="firmware">
             <a:extLst xmlns:a="http://schemas.openxmlformats.org/drawingml/2006/main">
               <a:ext uri="{FF2B5EF4-FFF2-40B4-BE49-F238E27FC236}">
-                <a16:creationId xmlns:a16="http://schemas.microsoft.com/office/drawing/2014/main" id="{3B8E1371-3147-4D53-A265-1C7697D7C9BF}"/>
+                <a16:creationId xmlns:a16="http://schemas.microsoft.com/office/drawing/2014/main" id="{71E1BFE0-8F9F-409B-9C7F-0E5E3350FAFC}"/>
               </a:ext>
             </a:extLst>
           </p:cNvPr>
@@ -10125,7 +12362,7 @@
           <p:cNvPr id="5" name="tftp">
             <a:extLst xmlns:a="http://schemas.openxmlformats.org/drawingml/2006/main">
               <a:ext uri="{FF2B5EF4-FFF2-40B4-BE49-F238E27FC236}">
-                <a16:creationId xmlns:a16="http://schemas.microsoft.com/office/drawing/2014/main" id="{15B95017-6E54-4890-B7FB-DA24FB270E38}"/>
+                <a16:creationId xmlns:a16="http://schemas.microsoft.com/office/drawing/2014/main" id="{71125CE1-6727-46EC-8ABF-6C5FC23344C3}"/>
               </a:ext>
             </a:extLst>
           </p:cNvPr>
@@ -10222,7 +12459,7 @@
           <p:cNvPr id="6" name="pilot">
             <a:extLst xmlns:a="http://schemas.openxmlformats.org/drawingml/2006/main">
               <a:ext uri="{FF2B5EF4-FFF2-40B4-BE49-F238E27FC236}">
-                <a16:creationId xmlns:a16="http://schemas.microsoft.com/office/drawing/2014/main" id="{99D48039-2DB4-48E8-9C65-EFB3E6ABFFF6}"/>
+                <a16:creationId xmlns:a16="http://schemas.microsoft.com/office/drawing/2014/main" id="{9AE7011E-EC37-45B4-94EC-2A651F8D4069}"/>
               </a:ext>
             </a:extLst>
           </p:cNvPr>
@@ -10319,7 +12556,7 @@
           <p:cNvPr id="7" name="accept">
             <a:extLst xmlns:a="http://schemas.openxmlformats.org/drawingml/2006/main">
               <a:ext uri="{FF2B5EF4-FFF2-40B4-BE49-F238E27FC236}">
-                <a16:creationId xmlns:a16="http://schemas.microsoft.com/office/drawing/2014/main" id="{13DC4038-CDC9-4BEC-8DB9-A4E38CD44076}"/>
+                <a16:creationId xmlns:a16="http://schemas.microsoft.com/office/drawing/2014/main" id="{C1D56AB3-F41D-4422-ACBC-074EFB82C259}"/>
               </a:ext>
             </a:extLst>
           </p:cNvPr>
@@ -10416,7 +12653,7 @@
           <p:cNvPr id="8" name="fleet">
             <a:extLst xmlns:a="http://schemas.openxmlformats.org/drawingml/2006/main">
               <a:ext uri="{FF2B5EF4-FFF2-40B4-BE49-F238E27FC236}">
-                <a16:creationId xmlns:a16="http://schemas.microsoft.com/office/drawing/2014/main" id="{BA7D570D-99D5-4E8B-9DCD-B0163CA97D38}"/>
+                <a16:creationId xmlns:a16="http://schemas.microsoft.com/office/drawing/2014/main" id="{B8770CD3-FBBB-47CC-8DA2-37B66BA72EE5}"/>
               </a:ext>
             </a:extLst>
           </p:cNvPr>
@@ -10513,7 +12750,7 @@
           <p:cNvPr id="14" name="HW 13.0+: минимум 9.3(1)SR3. Цепочка обновления зависит от текуще">
             <a:extLst xmlns:a="http://schemas.openxmlformats.org/drawingml/2006/main">
               <a:ext uri="{FF2B5EF4-FFF2-40B4-BE49-F238E27FC236}">
-                <a16:creationId xmlns:a16="http://schemas.microsoft.com/office/drawing/2014/main" id="{BC7E349A-56FC-4DA0-86C9-946A31F1BAE2}"/>
+                <a16:creationId xmlns:a16="http://schemas.microsoft.com/office/drawing/2014/main" id="{D22A684B-229F-4E39-ACCC-9BF42F90F2E8}"/>
               </a:ext>
             </a:extLst>
           </p:cNvPr>
@@ -10602,7 +12839,7 @@
     </p:spTree>
     <p:extLst>
       <p:ext uri="{BB962C8B-B14F-4D97-AF65-F5344CB8AC3E}">
-        <p14:creationId xmlns:p14="http://schemas.microsoft.com/office/powerpoint/2010/main" val="1308961255"/>
+        <p14:creationId xmlns:p14="http://schemas.microsoft.com/office/powerpoint/2010/main" val="1340400737"/>
       </p:ext>
     </p:extLst>
   </p:cSld>
@@ -10633,7 +12870,7 @@
           <p:cNvPr id="8" name="TFTP до первого перезапуска">
             <a:extLst xmlns:a="http://schemas.openxmlformats.org/drawingml/2006/main">
               <a:ext uri="{FF2B5EF4-FFF2-40B4-BE49-F238E27FC236}">
-                <a16:creationId xmlns:a16="http://schemas.microsoft.com/office/drawing/2014/main" id="{7F5FB806-E44E-4E00-92E3-1D041538A690}"/>
+                <a16:creationId xmlns:a16="http://schemas.microsoft.com/office/drawing/2014/main" id="{3D5DF232-3BF3-48A5-B2A7-921BD06E7C66}"/>
               </a:ext>
             </a:extLst>
           </p:cNvPr>
@@ -10701,7 +12938,7 @@
           <p:cNvPr id="2" name="07">
             <a:extLst xmlns:a="http://schemas.openxmlformats.org/drawingml/2006/main">
               <a:ext uri="{FF2B5EF4-FFF2-40B4-BE49-F238E27FC236}">
-                <a16:creationId xmlns:a16="http://schemas.microsoft.com/office/drawing/2014/main" id="{2036398D-4A87-4EFA-88E1-4063E5BB9525}"/>
+                <a16:creationId xmlns:a16="http://schemas.microsoft.com/office/drawing/2014/main" id="{335AAA56-B476-47F7-86AA-9ECF762B8A9C}"/>
               </a:ext>
             </a:extLst>
           </p:cNvPr>
@@ -10769,7 +13006,7 @@
           <p:cNvPr id="3" name="Полный официальный пакет">
             <a:extLst xmlns:a="http://schemas.openxmlformats.org/drawingml/2006/main">
               <a:ext uri="{FF2B5EF4-FFF2-40B4-BE49-F238E27FC236}">
-                <a16:creationId xmlns:a16="http://schemas.microsoft.com/office/drawing/2014/main" id="{852989BE-2070-4CC3-AF1A-4FF52490EBF7}"/>
+                <a16:creationId xmlns:a16="http://schemas.microsoft.com/office/drawing/2014/main" id="{96487268-C2EC-4117-9F67-513F7F978135}"/>
               </a:ext>
             </a:extLst>
           </p:cNvPr>
@@ -10837,7 +13074,7 @@
           <p:cNvPr id="4" name=".loads и все связанные бинарные файлы&#10;с оригинальными именами и р">
             <a:extLst xmlns:a="http://schemas.openxmlformats.org/drawingml/2006/main">
               <a:ext uri="{FF2B5EF4-FFF2-40B4-BE49-F238E27FC236}">
-                <a16:creationId xmlns:a16="http://schemas.microsoft.com/office/drawing/2014/main" id="{BC3C14C5-2A62-454F-9DD1-D8ED079C53A4}"/>
+                <a16:creationId xmlns:a16="http://schemas.microsoft.com/office/drawing/2014/main" id="{BC881BE5-552E-4E9A-B29E-8EE5939339E7}"/>
               </a:ext>
             </a:extLst>
           </p:cNvPr>
@@ -10928,7 +13165,7 @@
           <p:cNvPr id="5" name="SEP&lt;MAC&gt;.cnf.xml">
             <a:extLst xmlns:a="http://schemas.openxmlformats.org/drawingml/2006/main">
               <a:ext uri="{FF2B5EF4-FFF2-40B4-BE49-F238E27FC236}">
-                <a16:creationId xmlns:a16="http://schemas.microsoft.com/office/drawing/2014/main" id="{E49C9038-D011-4715-B267-47FDFE122C2E}"/>
+                <a16:creationId xmlns:a16="http://schemas.microsoft.com/office/drawing/2014/main" id="{BA82B9E0-6482-458A-A4D7-853107BA6CB3}"/>
               </a:ext>
             </a:extLst>
           </p:cNvPr>
@@ -10996,7 +13233,7 @@
           <p:cNvPr id="6" name="SIP-сервер, внутренний номер и отдельный пароль&#10;Load ID только дл">
             <a:extLst xmlns:a="http://schemas.openxmlformats.org/drawingml/2006/main">
               <a:ext uri="{FF2B5EF4-FFF2-40B4-BE49-F238E27FC236}">
-                <a16:creationId xmlns:a16="http://schemas.microsoft.com/office/drawing/2014/main" id="{81B535A1-C010-4421-87E8-940F5B5C2718}"/>
+                <a16:creationId xmlns:a16="http://schemas.microsoft.com/office/drawing/2014/main" id="{9F132D07-984C-48E2-9DF0-6C38A7FF7609}"/>
               </a:ext>
             </a:extLst>
           </p:cNvPr>
@@ -11087,7 +13324,7 @@
           <p:cNvPr id="7" name="DHCP option 150 на домашнем маршрутизаторе или Alternate TFTP на ">
             <a:extLst xmlns:a="http://schemas.openxmlformats.org/drawingml/2006/main">
               <a:ext uri="{FF2B5EF4-FFF2-40B4-BE49-F238E27FC236}">
-                <a16:creationId xmlns:a16="http://schemas.microsoft.com/office/drawing/2014/main" id="{B4983E6E-8B9F-454D-A8F9-0788911C60F1}"/>
+                <a16:creationId xmlns:a16="http://schemas.microsoft.com/office/drawing/2014/main" id="{B8E97584-171C-4660-8B29-4544520E1F7C}"/>
               </a:ext>
             </a:extLst>
           </p:cNvPr>
@@ -11153,7 +13390,7 @@
     </p:spTree>
     <p:extLst>
       <p:ext uri="{BB962C8B-B14F-4D97-AF65-F5344CB8AC3E}">
-        <p14:creationId xmlns:p14="http://schemas.microsoft.com/office/powerpoint/2010/main" val="856121502"/>
+        <p14:creationId xmlns:p14="http://schemas.microsoft.com/office/powerpoint/2010/main" val="1309082801"/>
       </p:ext>
     </p:extLst>
   </p:cSld>
@@ -11184,7 +13421,7 @@
           <p:cNvPr id="9" name="Asterisk: свой номер для каждого телефона">
             <a:extLst xmlns:a="http://schemas.openxmlformats.org/drawingml/2006/main">
               <a:ext uri="{FF2B5EF4-FFF2-40B4-BE49-F238E27FC236}">
-                <a16:creationId xmlns:a16="http://schemas.microsoft.com/office/drawing/2014/main" id="{B4F82D32-283E-4561-817B-6EC119FB04F9}"/>
+                <a16:creationId xmlns:a16="http://schemas.microsoft.com/office/drawing/2014/main" id="{399A4333-AF2E-4A9E-A0E9-10398EC938F6}"/>
               </a:ext>
             </a:extLst>
           </p:cNvPr>
@@ -11252,7 +13489,7 @@
           <p:cNvPr id="2" name="08">
             <a:extLst xmlns:a="http://schemas.openxmlformats.org/drawingml/2006/main">
               <a:ext uri="{FF2B5EF4-FFF2-40B4-BE49-F238E27FC236}">
-                <a16:creationId xmlns:a16="http://schemas.microsoft.com/office/drawing/2014/main" id="{86F2159F-EA4E-42DC-9448-BC5541367752}"/>
+                <a16:creationId xmlns:a16="http://schemas.microsoft.com/office/drawing/2014/main" id="{FC53A6BC-47B4-44CA-A16B-3B3A2C4C36A8}"/>
               </a:ext>
             </a:extLst>
           </p:cNvPr>
@@ -11320,7 +13557,7 @@
           <p:cNvPr id="3" name="201">
             <a:extLst xmlns:a="http://schemas.openxmlformats.org/drawingml/2006/main">
               <a:ext uri="{FF2B5EF4-FFF2-40B4-BE49-F238E27FC236}">
-                <a16:creationId xmlns:a16="http://schemas.microsoft.com/office/drawing/2014/main" id="{1592D694-CD47-4A8C-B54C-973F8914C2F8}"/>
+                <a16:creationId xmlns:a16="http://schemas.microsoft.com/office/drawing/2014/main" id="{C8AAA91A-7E0F-46E9-89A6-928AC9739D23}"/>
               </a:ext>
             </a:extLst>
           </p:cNvPr>
@@ -11388,7 +13625,7 @@
           <p:cNvPr id="4" name="202">
             <a:extLst xmlns:a="http://schemas.openxmlformats.org/drawingml/2006/main">
               <a:ext uri="{FF2B5EF4-FFF2-40B4-BE49-F238E27FC236}">
-                <a16:creationId xmlns:a16="http://schemas.microsoft.com/office/drawing/2014/main" id="{7A819C70-6EBA-4B2E-B2E4-4295711BAD88}"/>
+                <a16:creationId xmlns:a16="http://schemas.microsoft.com/office/drawing/2014/main" id="{E3F52FAD-8ED6-44DF-AAAA-2E71E9238643}"/>
               </a:ext>
             </a:extLst>
           </p:cNvPr>
@@ -11456,7 +13693,7 @@
           <p:cNvPr id="5" name="…210">
             <a:extLst xmlns:a="http://schemas.openxmlformats.org/drawingml/2006/main">
               <a:ext uri="{FF2B5EF4-FFF2-40B4-BE49-F238E27FC236}">
-                <a16:creationId xmlns:a16="http://schemas.microsoft.com/office/drawing/2014/main" id="{83BDAF07-2B89-4A7F-BEFA-84BD71517900}"/>
+                <a16:creationId xmlns:a16="http://schemas.microsoft.com/office/drawing/2014/main" id="{57403F65-9B4B-4AF2-88D7-5B65835E1256}"/>
               </a:ext>
             </a:extLst>
           </p:cNvPr>
@@ -11524,7 +13761,7 @@
           <p:cNvPr id="6" name="TCP, отдельные endpoint, auth и AOR&#10;Уникальный пароль на каждом а">
             <a:extLst xmlns:a="http://schemas.openxmlformats.org/drawingml/2006/main">
               <a:ext uri="{FF2B5EF4-FFF2-40B4-BE49-F238E27FC236}">
-                <a16:creationId xmlns:a16="http://schemas.microsoft.com/office/drawing/2014/main" id="{4E19AB6F-AAE4-4ECC-9983-91AC0B454F8C}"/>
+                <a16:creationId xmlns:a16="http://schemas.microsoft.com/office/drawing/2014/main" id="{DD4B9F1D-20D6-4B50-9DDE-5E41595F4866}"/>
               </a:ext>
             </a:extLst>
           </p:cNvPr>
@@ -11615,7 +13852,7 @@
           <p:cNvPr id="7" name="G.711 ulaw / alaw&#10;direct_media=no для RTP через Asterisk">
             <a:extLst xmlns:a="http://schemas.openxmlformats.org/drawingml/2006/main">
               <a:ext uri="{FF2B5EF4-FFF2-40B4-BE49-F238E27FC236}">
-                <a16:creationId xmlns:a16="http://schemas.microsoft.com/office/drawing/2014/main" id="{E7BF6D36-3E57-49D3-AED5-229A2C64A1C5}"/>
+                <a16:creationId xmlns:a16="http://schemas.microsoft.com/office/drawing/2014/main" id="{566701BD-D729-4F05-BC27-1B4F892CD8F2}"/>
               </a:ext>
             </a:extLst>
           </p:cNvPr>
@@ -11703,10 +13940,10 @@
       </p:sp>
       <p:sp>
         <p:nvSpPr>
-          <p:cNvPr id="8" name="Первый этап: внутренние звонки в доме. Внешний SIP trunk настраив">
-            <a:extLst xmlns:a="http://schemas.openxmlformats.org/drawingml/2006/main">
-              <a:ext uri="{FF2B5EF4-FFF2-40B4-BE49-F238E27FC236}">
-                <a16:creationId xmlns:a16="http://schemas.microsoft.com/office/drawing/2014/main" id="{EE7574DF-E400-457E-BC4D-E34A4224ED68}"/>
+          <p:cNvPr id="8" name="600 echo, 601 tone, 620 группа. Номер 630 доступен при включённом">
+            <a:extLst xmlns:a="http://schemas.openxmlformats.org/drawingml/2006/main">
+              <a:ext uri="{FF2B5EF4-FFF2-40B4-BE49-F238E27FC236}">
+                <a16:creationId xmlns:a16="http://schemas.microsoft.com/office/drawing/2014/main" id="{D42261DB-0930-492D-9DF4-78FF1208913D}"/>
               </a:ext>
             </a:extLst>
           </p:cNvPr>
@@ -11764,7 +14001,7 @@
                 <a:ea typeface="Arial"/>
                 <a:cs typeface="Arial"/>
               </a:rPr>
-              <a:t>Первый этап: внутренние звонки в доме. Внешний SIP trunk настраивается отдельно.</a:t>
+              <a:t>600 echo, 601 tone, 620 группа. Номер 630 доступен при включённом Assist.</a:t>
             </a:r>
           </a:p>
         </p:txBody>
@@ -11772,7 +14009,7 @@
     </p:spTree>
     <p:extLst>
       <p:ext uri="{BB962C8B-B14F-4D97-AF65-F5344CB8AC3E}">
-        <p14:creationId xmlns:p14="http://schemas.microsoft.com/office/powerpoint/2010/main" val="1127362171"/>
+        <p14:creationId xmlns:p14="http://schemas.microsoft.com/office/powerpoint/2010/main" val="222839065"/>
       </p:ext>
     </p:extLst>
   </p:cSld>
@@ -11800,10 +14037,10 @@
       </p:grpSpPr>
       <p:sp>
         <p:nvSpPr>
-          <p:cNvPr id="15" name="Развёртывание в домашнем k3s">
-            <a:extLst xmlns:a="http://schemas.openxmlformats.org/drawingml/2006/main">
-              <a:ext uri="{FF2B5EF4-FFF2-40B4-BE49-F238E27FC236}">
-                <a16:creationId xmlns:a16="http://schemas.microsoft.com/office/drawing/2014/main" id="{B6F34DD0-B2BF-4FFB-A044-835CB92F0795}"/>
+          <p:cNvPr id="8" name="AMI: состояния и управление вызовами">
+            <a:extLst xmlns:a="http://schemas.openxmlformats.org/drawingml/2006/main">
+              <a:ext uri="{FF2B5EF4-FFF2-40B4-BE49-F238E27FC236}">
+                <a16:creationId xmlns:a16="http://schemas.microsoft.com/office/drawing/2014/main" id="{CF06706C-B747-4232-B994-5D89093F4781}"/>
               </a:ext>
             </a:extLst>
           </p:cNvPr>
@@ -11861,7 +14098,7 @@
                 <a:ea typeface="Arial"/>
                 <a:cs typeface="Arial"/>
               </a:rPr>
-              <a:t>Развёртывание в домашнем k3s</a:t>
+              <a:t>AMI: состояния и управление вызовами</a:t>
             </a:r>
           </a:p>
         </p:txBody>
@@ -11871,7 +14108,7 @@
           <p:cNvPr id="2" name="09">
             <a:extLst xmlns:a="http://schemas.openxmlformats.org/drawingml/2006/main">
               <a:ext uri="{FF2B5EF4-FFF2-40B4-BE49-F238E27FC236}">
-                <a16:creationId xmlns:a16="http://schemas.microsoft.com/office/drawing/2014/main" id="{5BBA7006-C07E-42D0-A26F-578A05343232}"/>
+                <a16:creationId xmlns:a16="http://schemas.microsoft.com/office/drawing/2014/main" id="{6A5D5AD7-5AC5-4074-BC8D-E7A5A39385DB}"/>
               </a:ext>
             </a:extLst>
           </p:cNvPr>
@@ -11936,10 +14173,10 @@
       </p:sp>
       <p:sp>
         <p:nvSpPr>
-          <p:cNvPr id="3" name="01">
-            <a:extLst xmlns:a="http://schemas.openxmlformats.org/drawingml/2006/main">
-              <a:ext uri="{FF2B5EF4-FFF2-40B4-BE49-F238E27FC236}">
-                <a16:creationId xmlns:a16="http://schemas.microsoft.com/office/drawing/2014/main" id="{684B1C67-F6C6-49FE-AB9F-113870936E84}"/>
+          <p:cNvPr id="3" name="Home Assistant подключается к PBX:5038">
+            <a:extLst xmlns:a="http://schemas.openxmlformats.org/drawingml/2006/main">
+              <a:ext uri="{FF2B5EF4-FFF2-40B4-BE49-F238E27FC236}">
+                <a16:creationId xmlns:a16="http://schemas.microsoft.com/office/drawing/2014/main" id="{18602007-92C7-4B57-A401-AE3D9F0E1C95}"/>
               </a:ext>
             </a:extLst>
           </p:cNvPr>
@@ -11950,8 +14187,8 @@
         </p:nvSpPr>
         <p:spPr>
           <a:xfrm xmlns:a="http://schemas.openxmlformats.org/drawingml/2006/main">
-            <a:off x="571500" y="1571625"/>
-            <a:ext cx="762000" cy="571500"/>
+            <a:off x="571500" y="1666875"/>
+            <a:ext cx="10572750" cy="819150"/>
           </a:xfrm>
           <a:prstGeom xmlns:a="http://schemas.openxmlformats.org/drawingml/2006/main" prst="rect">
             <a:avLst/>
@@ -11967,7 +14204,7 @@
           </a:bodyPr>
           <a:lstStyle xmlns:a="http://schemas.openxmlformats.org/drawingml/2006/main">
             <a:defPPr algn="l">
-              <a:defRPr sz="3000" b="1">
+              <a:defRPr sz="2550" b="1">
                 <a:solidFill>
                   <a:srgbClr val="48DDCC"/>
                 </a:solidFill>
@@ -11979,7 +14216,7 @@
           </a:lstStyle>
           <a:p xmlns:a="http://schemas.openxmlformats.org/drawingml/2006/main">
             <a:pPr algn="l">
-              <a:defRPr sz="3000" b="1">
+              <a:defRPr sz="2550" b="1">
                 <a:solidFill>
                   <a:srgbClr val="48DDCC"/>
                 </a:solidFill>
@@ -11989,7 +14226,7 @@
               </a:defRPr>
             </a:pPr>
             <a:r>
-              <a:rPr sz="3000" b="1">
+              <a:rPr sz="2550" b="1">
                 <a:solidFill>
                   <a:srgbClr val="48DDCC"/>
                 </a:solidFill>
@@ -11997,17 +14234,17 @@
                 <a:ea typeface="Arial"/>
                 <a:cs typeface="Arial"/>
               </a:rPr>
-              <a:t>01</a:t>
-            </a:r>
-          </a:p>
-        </p:txBody>
-      </p:sp>
-      <p:sp>
-        <p:nvSpPr>
-          <p:cNvPr id="4" name="LAN IP + k3s-узел">
-            <a:extLst xmlns:a="http://schemas.openxmlformats.org/drawingml/2006/main">
-              <a:ext uri="{FF2B5EF4-FFF2-40B4-BE49-F238E27FC236}">
-                <a16:creationId xmlns:a16="http://schemas.microsoft.com/office/drawing/2014/main" id="{345C7B7A-A0B0-45C1-9070-EE9F00F743B5}"/>
+              <a:t>Home Assistant подключается к PBX:5038</a:t>
+            </a:r>
+          </a:p>
+        </p:txBody>
+      </p:sp>
+      <p:sp>
+        <p:nvSpPr>
+          <p:cNvPr id="4" name="Статус, связанная линия и DTMF&#10;Фактические entity IDs из вашего H">
+            <a:extLst xmlns:a="http://schemas.openxmlformats.org/drawingml/2006/main">
+              <a:ext uri="{FF2B5EF4-FFF2-40B4-BE49-F238E27FC236}">
+                <a16:creationId xmlns:a16="http://schemas.microsoft.com/office/drawing/2014/main" id="{8D890262-2444-4469-AEA3-F55C26AB62AE}"/>
               </a:ext>
             </a:extLst>
           </p:cNvPr>
@@ -12018,8 +14255,8 @@
         </p:nvSpPr>
         <p:spPr>
           <a:xfrm xmlns:a="http://schemas.openxmlformats.org/drawingml/2006/main">
-            <a:off x="1714500" y="1571625"/>
-            <a:ext cx="9525000" cy="457200"/>
+            <a:off x="571500" y="2266950"/>
+            <a:ext cx="10572750" cy="952500"/>
           </a:xfrm>
           <a:prstGeom xmlns:a="http://schemas.openxmlformats.org/drawingml/2006/main" prst="rect">
             <a:avLst/>
@@ -12035,7 +14272,7 @@
           </a:bodyPr>
           <a:lstStyle xmlns:a="http://schemas.openxmlformats.org/drawingml/2006/main">
             <a:defPPr algn="l">
-              <a:defRPr sz="2400" b="1">
+              <a:defRPr sz="2175" b="0">
                 <a:solidFill>
                   <a:srgbClr val="F5F7FB"/>
                 </a:solidFill>
@@ -12047,35 +14284,58 @@
           </a:lstStyle>
           <a:p xmlns:a="http://schemas.openxmlformats.org/drawingml/2006/main">
             <a:pPr algn="l">
-              <a:defRPr sz="2400" b="1">
-                <a:solidFill>
-                  <a:srgbClr val="F5F7FB"/>
-                </a:solidFill>
-                <a:latin typeface="Arial"/>
-                <a:ea typeface="Arial"/>
-                <a:cs typeface="Arial"/>
-              </a:defRPr>
-            </a:pPr>
-            <a:r>
-              <a:rPr sz="2400" b="1">
-                <a:solidFill>
-                  <a:srgbClr val="F5F7FB"/>
-                </a:solidFill>
-                <a:latin typeface="Arial"/>
-                <a:ea typeface="Arial"/>
-                <a:cs typeface="Arial"/>
-              </a:rPr>
-              <a:t>LAN IP + k3s-узел</a:t>
-            </a:r>
-          </a:p>
-        </p:txBody>
-      </p:sp>
-      <p:sp>
-        <p:nvSpPr>
-          <p:cNvPr id="5" name="Фиксированный LAN-узел, проверка свободных портов">
-            <a:extLst xmlns:a="http://schemas.openxmlformats.org/drawingml/2006/main">
-              <a:ext uri="{FF2B5EF4-FFF2-40B4-BE49-F238E27FC236}">
-                <a16:creationId xmlns:a16="http://schemas.microsoft.com/office/drawing/2014/main" id="{7C81D1A3-BE9A-4F95-B9A2-61B14E42D69D}"/>
+              <a:defRPr sz="2175" b="0">
+                <a:solidFill>
+                  <a:srgbClr val="F5F7FB"/>
+                </a:solidFill>
+                <a:latin typeface="Arial"/>
+                <a:ea typeface="Arial"/>
+                <a:cs typeface="Arial"/>
+              </a:defRPr>
+            </a:pPr>
+            <a:r>
+              <a:rPr sz="2175" b="0">
+                <a:solidFill>
+                  <a:srgbClr val="F5F7FB"/>
+                </a:solidFill>
+                <a:latin typeface="Arial"/>
+                <a:ea typeface="Arial"/>
+                <a:cs typeface="Arial"/>
+              </a:rPr>
+              <a:t>Статус, связанная линия и DTMF</a:t>
+            </a:r>
+          </a:p>
+          <a:p xmlns:a="http://schemas.openxmlformats.org/drawingml/2006/main">
+            <a:pPr algn="l">
+              <a:defRPr sz="2175" b="0">
+                <a:solidFill>
+                  <a:srgbClr val="F5F7FB"/>
+                </a:solidFill>
+                <a:latin typeface="Arial"/>
+                <a:ea typeface="Arial"/>
+                <a:cs typeface="Arial"/>
+              </a:defRPr>
+            </a:pPr>
+            <a:r>
+              <a:rPr sz="2175" b="0">
+                <a:solidFill>
+                  <a:srgbClr val="F5F7FB"/>
+                </a:solidFill>
+                <a:latin typeface="Arial"/>
+                <a:ea typeface="Arial"/>
+                <a:cs typeface="Arial"/>
+              </a:rPr>
+              <a:t>Фактические entity IDs из вашего HA</a:t>
+            </a:r>
+          </a:p>
+        </p:txBody>
+      </p:sp>
+      <p:sp>
+        <p:nvSpPr>
+          <p:cNvPr id="5" name="Вызов и завершение конкретного канала">
+            <a:extLst xmlns:a="http://schemas.openxmlformats.org/drawingml/2006/main">
+              <a:ext uri="{FF2B5EF4-FFF2-40B4-BE49-F238E27FC236}">
+                <a16:creationId xmlns:a16="http://schemas.microsoft.com/office/drawing/2014/main" id="{31D35E07-D1DC-49B1-9596-5B2497AB6B49}"/>
               </a:ext>
             </a:extLst>
           </p:cNvPr>
@@ -12086,8 +14346,8 @@
         </p:nvSpPr>
         <p:spPr>
           <a:xfrm xmlns:a="http://schemas.openxmlformats.org/drawingml/2006/main">
-            <a:off x="1714500" y="2038350"/>
-            <a:ext cx="9525000" cy="428625"/>
+            <a:off x="571500" y="3667125"/>
+            <a:ext cx="10572750" cy="819150"/>
           </a:xfrm>
           <a:prstGeom xmlns:a="http://schemas.openxmlformats.org/drawingml/2006/main" prst="rect">
             <a:avLst/>
@@ -12103,9 +14363,9 @@
           </a:bodyPr>
           <a:lstStyle xmlns:a="http://schemas.openxmlformats.org/drawingml/2006/main">
             <a:defPPr algn="l">
-              <a:defRPr sz="1875" b="0">
-                <a:solidFill>
-                  <a:srgbClr val="AAB9D0"/>
+              <a:defRPr sz="2475" b="1">
+                <a:solidFill>
+                  <a:srgbClr val="F7CB64"/>
                 </a:solidFill>
                 <a:latin typeface="Arial"/>
                 <a:ea typeface="Arial"/>
@@ -12115,35 +14375,35 @@
           </a:lstStyle>
           <a:p xmlns:a="http://schemas.openxmlformats.org/drawingml/2006/main">
             <a:pPr algn="l">
-              <a:defRPr sz="1875" b="0">
-                <a:solidFill>
-                  <a:srgbClr val="AAB9D0"/>
-                </a:solidFill>
-                <a:latin typeface="Arial"/>
-                <a:ea typeface="Arial"/>
-                <a:cs typeface="Arial"/>
-              </a:defRPr>
-            </a:pPr>
-            <a:r>
-              <a:rPr sz="1875" b="0">
-                <a:solidFill>
-                  <a:srgbClr val="AAB9D0"/>
-                </a:solidFill>
-                <a:latin typeface="Arial"/>
-                <a:ea typeface="Arial"/>
-                <a:cs typeface="Arial"/>
-              </a:rPr>
-              <a:t>Фиксированный LAN-узел, проверка свободных портов</a:t>
-            </a:r>
-          </a:p>
-        </p:txBody>
-      </p:sp>
-      <p:sp>
-        <p:nvSpPr>
-          <p:cNvPr id="6" name="02">
-            <a:extLst xmlns:a="http://schemas.openxmlformats.org/drawingml/2006/main">
-              <a:ext uri="{FF2B5EF4-FFF2-40B4-BE49-F238E27FC236}">
-                <a16:creationId xmlns:a16="http://schemas.microsoft.com/office/drawing/2014/main" id="{368C85D2-387B-4AD4-B9F4-BE3F1D1689B9}"/>
+              <a:defRPr sz="2475" b="1">
+                <a:solidFill>
+                  <a:srgbClr val="F7CB64"/>
+                </a:solidFill>
+                <a:latin typeface="Arial"/>
+                <a:ea typeface="Arial"/>
+                <a:cs typeface="Arial"/>
+              </a:defRPr>
+            </a:pPr>
+            <a:r>
+              <a:rPr sz="2475" b="1">
+                <a:solidFill>
+                  <a:srgbClr val="F7CB64"/>
+                </a:solidFill>
+                <a:latin typeface="Arial"/>
+                <a:ea typeface="Arial"/>
+                <a:cs typeface="Arial"/>
+              </a:rPr>
+              <a:t>Вызов и завершение конкретного канала</a:t>
+            </a:r>
+          </a:p>
+        </p:txBody>
+      </p:sp>
+      <p:sp>
+        <p:nvSpPr>
+          <p:cNvPr id="6" name="asterisk.send_action: Originate / Hangup&#10;DTMF-пример отправляет б">
+            <a:extLst xmlns:a="http://schemas.openxmlformats.org/drawingml/2006/main">
+              <a:ext uri="{FF2B5EF4-FFF2-40B4-BE49-F238E27FC236}">
+                <a16:creationId xmlns:a16="http://schemas.microsoft.com/office/drawing/2014/main" id="{231F3FFD-A781-4C99-9884-51B298CEB564}"/>
               </a:ext>
             </a:extLst>
           </p:cNvPr>
@@ -12154,8 +14414,8 @@
         </p:nvSpPr>
         <p:spPr>
           <a:xfrm xmlns:a="http://schemas.openxmlformats.org/drawingml/2006/main">
-            <a:off x="571500" y="2628900"/>
-            <a:ext cx="762000" cy="571500"/>
+            <a:off x="571500" y="4295775"/>
+            <a:ext cx="10572750" cy="1047750"/>
           </a:xfrm>
           <a:prstGeom xmlns:a="http://schemas.openxmlformats.org/drawingml/2006/main" prst="rect">
             <a:avLst/>
@@ -12171,9 +14431,9 @@
           </a:bodyPr>
           <a:lstStyle xmlns:a="http://schemas.openxmlformats.org/drawingml/2006/main">
             <a:defPPr algn="l">
-              <a:defRPr sz="3000" b="1">
-                <a:solidFill>
-                  <a:srgbClr val="FF836D"/>
+              <a:defRPr sz="2100" b="0">
+                <a:solidFill>
+                  <a:srgbClr val="F5F7FB"/>
                 </a:solidFill>
                 <a:latin typeface="Arial"/>
                 <a:ea typeface="Arial"/>
@@ -12183,35 +14443,58 @@
           </a:lstStyle>
           <a:p xmlns:a="http://schemas.openxmlformats.org/drawingml/2006/main">
             <a:pPr algn="l">
-              <a:defRPr sz="3000" b="1">
-                <a:solidFill>
-                  <a:srgbClr val="FF836D"/>
-                </a:solidFill>
-                <a:latin typeface="Arial"/>
-                <a:ea typeface="Arial"/>
-                <a:cs typeface="Arial"/>
-              </a:defRPr>
-            </a:pPr>
-            <a:r>
-              <a:rPr sz="3000" b="1">
-                <a:solidFill>
-                  <a:srgbClr val="FF836D"/>
-                </a:solidFill>
-                <a:latin typeface="Arial"/>
-                <a:ea typeface="Arial"/>
-                <a:cs typeface="Arial"/>
-              </a:rPr>
-              <a:t>02</a:t>
-            </a:r>
-          </a:p>
-        </p:txBody>
-      </p:sp>
-      <p:sp>
-        <p:nvSpPr>
-          <p:cNvPr id="7" name="Локальный render">
-            <a:extLst xmlns:a="http://schemas.openxmlformats.org/drawingml/2006/main">
-              <a:ext uri="{FF2B5EF4-FFF2-40B4-BE49-F238E27FC236}">
-                <a16:creationId xmlns:a16="http://schemas.microsoft.com/office/drawing/2014/main" id="{A54BDE17-333F-464A-ADFD-13097FA3B438}"/>
+              <a:defRPr sz="2100" b="0">
+                <a:solidFill>
+                  <a:srgbClr val="F5F7FB"/>
+                </a:solidFill>
+                <a:latin typeface="Arial"/>
+                <a:ea typeface="Arial"/>
+                <a:cs typeface="Arial"/>
+              </a:defRPr>
+            </a:pPr>
+            <a:r>
+              <a:rPr sz="2100" b="0">
+                <a:solidFill>
+                  <a:srgbClr val="F5F7FB"/>
+                </a:solidFill>
+                <a:latin typeface="Arial"/>
+                <a:ea typeface="Arial"/>
+                <a:cs typeface="Arial"/>
+              </a:rPr>
+              <a:t>asterisk.send_action: Originate / Hangup</a:t>
+            </a:r>
+          </a:p>
+          <a:p xmlns:a="http://schemas.openxmlformats.org/drawingml/2006/main">
+            <a:pPr algn="l">
+              <a:defRPr sz="2100" b="0">
+                <a:solidFill>
+                  <a:srgbClr val="F5F7FB"/>
+                </a:solidFill>
+                <a:latin typeface="Arial"/>
+                <a:ea typeface="Arial"/>
+                <a:cs typeface="Arial"/>
+              </a:defRPr>
+            </a:pPr>
+            <a:r>
+              <a:rPr sz="2100" b="0">
+                <a:solidFill>
+                  <a:srgbClr val="F5F7FB"/>
+                </a:solidFill>
+                <a:latin typeface="Arial"/>
+                <a:ea typeface="Arial"/>
+                <a:cs typeface="Arial"/>
+              </a:rPr>
+              <a:t>DTMF-пример отправляет безопасное уведомление</a:t>
+            </a:r>
+          </a:p>
+        </p:txBody>
+      </p:sp>
+      <p:sp>
+        <p:nvSpPr>
+          <p:cNvPr id="7" name="Отдельный секрет и ACL /32. Право system даёт административные де">
+            <a:extLst xmlns:a="http://schemas.openxmlformats.org/drawingml/2006/main">
+              <a:ext uri="{FF2B5EF4-FFF2-40B4-BE49-F238E27FC236}">
+                <a16:creationId xmlns:a16="http://schemas.microsoft.com/office/drawing/2014/main" id="{FBAA98DE-6526-44EE-AA51-3052271B027E}"/>
               </a:ext>
             </a:extLst>
           </p:cNvPr>
@@ -12222,8 +14505,8 @@
         </p:nvSpPr>
         <p:spPr>
           <a:xfrm xmlns:a="http://schemas.openxmlformats.org/drawingml/2006/main">
-            <a:off x="1714500" y="2628900"/>
-            <a:ext cx="9525000" cy="457200"/>
+            <a:off x="571500" y="5953125"/>
+            <a:ext cx="10191750" cy="457200"/>
           </a:xfrm>
           <a:prstGeom xmlns:a="http://schemas.openxmlformats.org/drawingml/2006/main" prst="rect">
             <a:avLst/>
@@ -12239,9 +14522,9 @@
           </a:bodyPr>
           <a:lstStyle xmlns:a="http://schemas.openxmlformats.org/drawingml/2006/main">
             <a:defPPr algn="l">
-              <a:defRPr sz="2400" b="1">
-                <a:solidFill>
-                  <a:srgbClr val="F5F7FB"/>
+              <a:defRPr sz="1425" b="0">
+                <a:solidFill>
+                  <a:srgbClr val="AAB9D0"/>
                 </a:solidFill>
                 <a:latin typeface="Arial"/>
                 <a:ea typeface="Arial"/>
@@ -12251,63 +14534,7 @@
           </a:lstStyle>
           <a:p xmlns:a="http://schemas.openxmlformats.org/drawingml/2006/main">
             <a:pPr algn="l">
-              <a:defRPr sz="2400" b="1">
-                <a:solidFill>
-                  <a:srgbClr val="F5F7FB"/>
-                </a:solidFill>
-                <a:latin typeface="Arial"/>
-                <a:ea typeface="Arial"/>
-                <a:cs typeface="Arial"/>
-              </a:defRPr>
-            </a:pPr>
-            <a:r>
-              <a:rPr sz="2400" b="1">
-                <a:solidFill>
-                  <a:srgbClr val="F5F7FB"/>
-                </a:solidFill>
-                <a:latin typeface="Arial"/>
-                <a:ea typeface="Arial"/>
-                <a:cs typeface="Arial"/>
-              </a:rPr>
-              <a:t>Локальный render</a:t>
-            </a:r>
-          </a:p>
-        </p:txBody>
-      </p:sp>
-      <p:sp>
-        <p:nvSpPr>
-          <p:cNvPr id="8" name="Инвентарь, конфиги, секреты и image digest">
-            <a:extLst xmlns:a="http://schemas.openxmlformats.org/drawingml/2006/main">
-              <a:ext uri="{FF2B5EF4-FFF2-40B4-BE49-F238E27FC236}">
-                <a16:creationId xmlns:a16="http://schemas.microsoft.com/office/drawing/2014/main" id="{43673023-D841-4F65-9B9D-36C16854A042}"/>
-              </a:ext>
-            </a:extLst>
-          </p:cNvPr>
-          <p:cNvSpPr>
-            <a:spLocks xmlns:a="http://schemas.openxmlformats.org/drawingml/2006/main" noGrp="1"/>
-          </p:cNvSpPr>
-          <p:nvPr/>
-        </p:nvSpPr>
-        <p:spPr>
-          <a:xfrm xmlns:a="http://schemas.openxmlformats.org/drawingml/2006/main">
-            <a:off x="1714500" y="3095625"/>
-            <a:ext cx="9525000" cy="428625"/>
-          </a:xfrm>
-          <a:prstGeom xmlns:a="http://schemas.openxmlformats.org/drawingml/2006/main" prst="rect">
-            <a:avLst/>
-          </a:prstGeom>
-          <a:noFill xmlns:a="http://schemas.openxmlformats.org/drawingml/2006/main"/>
-          <a:ln xmlns:a="http://schemas.openxmlformats.org/drawingml/2006/main" w="0">
-            <a:noFill/>
-          </a:ln>
-        </p:spPr>
-        <p:txBody>
-          <a:bodyPr xmlns:a="http://schemas.openxmlformats.org/drawingml/2006/main" wrap="square" lIns="0" tIns="0" rIns="0" bIns="0" anchor="t">
-            <a:noAutofit/>
-          </a:bodyPr>
-          <a:lstStyle xmlns:a="http://schemas.openxmlformats.org/drawingml/2006/main">
-            <a:defPPr algn="l">
-              <a:defRPr sz="1875" b="0">
+              <a:defRPr sz="1425" b="0">
                 <a:solidFill>
                   <a:srgbClr val="AAB9D0"/>
                 </a:solidFill>
@@ -12315,437 +14542,17 @@
                 <a:ea typeface="Arial"/>
                 <a:cs typeface="Arial"/>
               </a:defRPr>
-            </a:defPPr>
-          </a:lstStyle>
-          <a:p xmlns:a="http://schemas.openxmlformats.org/drawingml/2006/main">
-            <a:pPr algn="l">
-              <a:defRPr sz="1875" b="0">
+            </a:pPr>
+            <a:r>
+              <a:rPr sz="1425" b="0">
                 <a:solidFill>
                   <a:srgbClr val="AAB9D0"/>
                 </a:solidFill>
                 <a:latin typeface="Arial"/>
                 <a:ea typeface="Arial"/>
                 <a:cs typeface="Arial"/>
-              </a:defRPr>
-            </a:pPr>
-            <a:r>
-              <a:rPr sz="1875" b="0">
-                <a:solidFill>
-                  <a:srgbClr val="AAB9D0"/>
-                </a:solidFill>
-                <a:latin typeface="Arial"/>
-                <a:ea typeface="Arial"/>
-                <a:cs typeface="Arial"/>
-              </a:rPr>
-              <a:t>Инвентарь, конфиги, секреты и image digest</a:t>
-            </a:r>
-          </a:p>
-        </p:txBody>
-      </p:sp>
-      <p:sp>
-        <p:nvSpPr>
-          <p:cNvPr id="9" name="03">
-            <a:extLst xmlns:a="http://schemas.openxmlformats.org/drawingml/2006/main">
-              <a:ext uri="{FF2B5EF4-FFF2-40B4-BE49-F238E27FC236}">
-                <a16:creationId xmlns:a16="http://schemas.microsoft.com/office/drawing/2014/main" id="{45916C30-7B2B-48E7-BDBA-A0EFE807A88F}"/>
-              </a:ext>
-            </a:extLst>
-          </p:cNvPr>
-          <p:cNvSpPr>
-            <a:spLocks xmlns:a="http://schemas.openxmlformats.org/drawingml/2006/main" noGrp="1"/>
-          </p:cNvSpPr>
-          <p:nvPr/>
-        </p:nvSpPr>
-        <p:spPr>
-          <a:xfrm xmlns:a="http://schemas.openxmlformats.org/drawingml/2006/main">
-            <a:off x="571500" y="3686175"/>
-            <a:ext cx="762000" cy="571500"/>
-          </a:xfrm>
-          <a:prstGeom xmlns:a="http://schemas.openxmlformats.org/drawingml/2006/main" prst="rect">
-            <a:avLst/>
-          </a:prstGeom>
-          <a:noFill xmlns:a="http://schemas.openxmlformats.org/drawingml/2006/main"/>
-          <a:ln xmlns:a="http://schemas.openxmlformats.org/drawingml/2006/main" w="0">
-            <a:noFill/>
-          </a:ln>
-        </p:spPr>
-        <p:txBody>
-          <a:bodyPr xmlns:a="http://schemas.openxmlformats.org/drawingml/2006/main" wrap="square" lIns="0" tIns="0" rIns="0" bIns="0" anchor="t">
-            <a:noAutofit/>
-          </a:bodyPr>
-          <a:lstStyle xmlns:a="http://schemas.openxmlformats.org/drawingml/2006/main">
-            <a:defPPr algn="l">
-              <a:defRPr sz="3000" b="1">
-                <a:solidFill>
-                  <a:srgbClr val="F7CB64"/>
-                </a:solidFill>
-                <a:latin typeface="Arial"/>
-                <a:ea typeface="Arial"/>
-                <a:cs typeface="Arial"/>
-              </a:defRPr>
-            </a:defPPr>
-          </a:lstStyle>
-          <a:p xmlns:a="http://schemas.openxmlformats.org/drawingml/2006/main">
-            <a:pPr algn="l">
-              <a:defRPr sz="3000" b="1">
-                <a:solidFill>
-                  <a:srgbClr val="F7CB64"/>
-                </a:solidFill>
-                <a:latin typeface="Arial"/>
-                <a:ea typeface="Arial"/>
-                <a:cs typeface="Arial"/>
-              </a:defRPr>
-            </a:pPr>
-            <a:r>
-              <a:rPr sz="3000" b="1">
-                <a:solidFill>
-                  <a:srgbClr val="F7CB64"/>
-                </a:solidFill>
-                <a:latin typeface="Arial"/>
-                <a:ea typeface="Arial"/>
-                <a:cs typeface="Arial"/>
-              </a:rPr>
-              <a:t>03</a:t>
-            </a:r>
-          </a:p>
-        </p:txBody>
-      </p:sp>
-      <p:sp>
-        <p:nvSpPr>
-          <p:cNvPr id="10" name="Asterisk">
-            <a:extLst xmlns:a="http://schemas.openxmlformats.org/drawingml/2006/main">
-              <a:ext uri="{FF2B5EF4-FFF2-40B4-BE49-F238E27FC236}">
-                <a16:creationId xmlns:a16="http://schemas.microsoft.com/office/drawing/2014/main" id="{F859FACA-AD3C-4B3F-A1A5-B75FE0E83E1E}"/>
-              </a:ext>
-            </a:extLst>
-          </p:cNvPr>
-          <p:cNvSpPr>
-            <a:spLocks xmlns:a="http://schemas.openxmlformats.org/drawingml/2006/main" noGrp="1"/>
-          </p:cNvSpPr>
-          <p:nvPr/>
-        </p:nvSpPr>
-        <p:spPr>
-          <a:xfrm xmlns:a="http://schemas.openxmlformats.org/drawingml/2006/main">
-            <a:off x="1714500" y="3686175"/>
-            <a:ext cx="9525000" cy="457200"/>
-          </a:xfrm>
-          <a:prstGeom xmlns:a="http://schemas.openxmlformats.org/drawingml/2006/main" prst="rect">
-            <a:avLst/>
-          </a:prstGeom>
-          <a:noFill xmlns:a="http://schemas.openxmlformats.org/drawingml/2006/main"/>
-          <a:ln xmlns:a="http://schemas.openxmlformats.org/drawingml/2006/main" w="0">
-            <a:noFill/>
-          </a:ln>
-        </p:spPr>
-        <p:txBody>
-          <a:bodyPr xmlns:a="http://schemas.openxmlformats.org/drawingml/2006/main" wrap="square" lIns="0" tIns="0" rIns="0" bIns="0" anchor="t">
-            <a:noAutofit/>
-          </a:bodyPr>
-          <a:lstStyle xmlns:a="http://schemas.openxmlformats.org/drawingml/2006/main">
-            <a:defPPr algn="l">
-              <a:defRPr sz="2400" b="1">
-                <a:solidFill>
-                  <a:srgbClr val="F5F7FB"/>
-                </a:solidFill>
-                <a:latin typeface="Arial"/>
-                <a:ea typeface="Arial"/>
-                <a:cs typeface="Arial"/>
-              </a:defRPr>
-            </a:defPPr>
-          </a:lstStyle>
-          <a:p xmlns:a="http://schemas.openxmlformats.org/drawingml/2006/main">
-            <a:pPr algn="l">
-              <a:defRPr sz="2400" b="1">
-                <a:solidFill>
-                  <a:srgbClr val="F5F7FB"/>
-                </a:solidFill>
-                <a:latin typeface="Arial"/>
-                <a:ea typeface="Arial"/>
-                <a:cs typeface="Arial"/>
-              </a:defRPr>
-            </a:pPr>
-            <a:r>
-              <a:rPr sz="2400" b="1">
-                <a:solidFill>
-                  <a:srgbClr val="F5F7FB"/>
-                </a:solidFill>
-                <a:latin typeface="Arial"/>
-                <a:ea typeface="Arial"/>
-                <a:cs typeface="Arial"/>
-              </a:rPr>
-              <a:t>Asterisk</a:t>
-            </a:r>
-          </a:p>
-        </p:txBody>
-      </p:sp>
-      <p:sp>
-        <p:nvSpPr>
-          <p:cNvPr id="11" name="Одна реплика, постоянные данные, health check">
-            <a:extLst xmlns:a="http://schemas.openxmlformats.org/drawingml/2006/main">
-              <a:ext uri="{FF2B5EF4-FFF2-40B4-BE49-F238E27FC236}">
-                <a16:creationId xmlns:a16="http://schemas.microsoft.com/office/drawing/2014/main" id="{5AE925C0-EFEC-4993-95A2-29D0CF6E033B}"/>
-              </a:ext>
-            </a:extLst>
-          </p:cNvPr>
-          <p:cNvSpPr>
-            <a:spLocks xmlns:a="http://schemas.openxmlformats.org/drawingml/2006/main" noGrp="1"/>
-          </p:cNvSpPr>
-          <p:nvPr/>
-        </p:nvSpPr>
-        <p:spPr>
-          <a:xfrm xmlns:a="http://schemas.openxmlformats.org/drawingml/2006/main">
-            <a:off x="1714500" y="4152900"/>
-            <a:ext cx="9525000" cy="428625"/>
-          </a:xfrm>
-          <a:prstGeom xmlns:a="http://schemas.openxmlformats.org/drawingml/2006/main" prst="rect">
-            <a:avLst/>
-          </a:prstGeom>
-          <a:noFill xmlns:a="http://schemas.openxmlformats.org/drawingml/2006/main"/>
-          <a:ln xmlns:a="http://schemas.openxmlformats.org/drawingml/2006/main" w="0">
-            <a:noFill/>
-          </a:ln>
-        </p:spPr>
-        <p:txBody>
-          <a:bodyPr xmlns:a="http://schemas.openxmlformats.org/drawingml/2006/main" wrap="square" lIns="0" tIns="0" rIns="0" bIns="0" anchor="t">
-            <a:noAutofit/>
-          </a:bodyPr>
-          <a:lstStyle xmlns:a="http://schemas.openxmlformats.org/drawingml/2006/main">
-            <a:defPPr algn="l">
-              <a:defRPr sz="1875" b="0">
-                <a:solidFill>
-                  <a:srgbClr val="AAB9D0"/>
-                </a:solidFill>
-                <a:latin typeface="Arial"/>
-                <a:ea typeface="Arial"/>
-                <a:cs typeface="Arial"/>
-              </a:defRPr>
-            </a:defPPr>
-          </a:lstStyle>
-          <a:p xmlns:a="http://schemas.openxmlformats.org/drawingml/2006/main">
-            <a:pPr algn="l">
-              <a:defRPr sz="1875" b="0">
-                <a:solidFill>
-                  <a:srgbClr val="AAB9D0"/>
-                </a:solidFill>
-                <a:latin typeface="Arial"/>
-                <a:ea typeface="Arial"/>
-                <a:cs typeface="Arial"/>
-              </a:defRPr>
-            </a:pPr>
-            <a:r>
-              <a:rPr sz="1875" b="0">
-                <a:solidFill>
-                  <a:srgbClr val="AAB9D0"/>
-                </a:solidFill>
-                <a:latin typeface="Arial"/>
-                <a:ea typeface="Arial"/>
-                <a:cs typeface="Arial"/>
-              </a:rPr>
-              <a:t>Одна реплика, постоянные данные, health check</a:t>
-            </a:r>
-          </a:p>
-        </p:txBody>
-      </p:sp>
-      <p:sp>
-        <p:nvSpPr>
-          <p:cNvPr id="12" name="04">
-            <a:extLst xmlns:a="http://schemas.openxmlformats.org/drawingml/2006/main">
-              <a:ext uri="{FF2B5EF4-FFF2-40B4-BE49-F238E27FC236}">
-                <a16:creationId xmlns:a16="http://schemas.microsoft.com/office/drawing/2014/main" id="{74A64671-7D86-4CA2-A3B1-542AC119AC88}"/>
-              </a:ext>
-            </a:extLst>
-          </p:cNvPr>
-          <p:cNvSpPr>
-            <a:spLocks xmlns:a="http://schemas.openxmlformats.org/drawingml/2006/main" noGrp="1"/>
-          </p:cNvSpPr>
-          <p:nvPr/>
-        </p:nvSpPr>
-        <p:spPr>
-          <a:xfrm xmlns:a="http://schemas.openxmlformats.org/drawingml/2006/main">
-            <a:off x="571500" y="4743450"/>
-            <a:ext cx="762000" cy="571500"/>
-          </a:xfrm>
-          <a:prstGeom xmlns:a="http://schemas.openxmlformats.org/drawingml/2006/main" prst="rect">
-            <a:avLst/>
-          </a:prstGeom>
-          <a:noFill xmlns:a="http://schemas.openxmlformats.org/drawingml/2006/main"/>
-          <a:ln xmlns:a="http://schemas.openxmlformats.org/drawingml/2006/main" w="0">
-            <a:noFill/>
-          </a:ln>
-        </p:spPr>
-        <p:txBody>
-          <a:bodyPr xmlns:a="http://schemas.openxmlformats.org/drawingml/2006/main" wrap="square" lIns="0" tIns="0" rIns="0" bIns="0" anchor="t">
-            <a:noAutofit/>
-          </a:bodyPr>
-          <a:lstStyle xmlns:a="http://schemas.openxmlformats.org/drawingml/2006/main">
-            <a:defPPr algn="l">
-              <a:defRPr sz="3000" b="1">
-                <a:solidFill>
-                  <a:srgbClr val="48DDCC"/>
-                </a:solidFill>
-                <a:latin typeface="Arial"/>
-                <a:ea typeface="Arial"/>
-                <a:cs typeface="Arial"/>
-              </a:defRPr>
-            </a:defPPr>
-          </a:lstStyle>
-          <a:p xmlns:a="http://schemas.openxmlformats.org/drawingml/2006/main">
-            <a:pPr algn="l">
-              <a:defRPr sz="3000" b="1">
-                <a:solidFill>
-                  <a:srgbClr val="48DDCC"/>
-                </a:solidFill>
-                <a:latin typeface="Arial"/>
-                <a:ea typeface="Arial"/>
-                <a:cs typeface="Arial"/>
-              </a:defRPr>
-            </a:pPr>
-            <a:r>
-              <a:rPr sz="3000" b="1">
-                <a:solidFill>
-                  <a:srgbClr val="48DDCC"/>
-                </a:solidFill>
-                <a:latin typeface="Arial"/>
-                <a:ea typeface="Arial"/>
-                <a:cs typeface="Arial"/>
-              </a:rPr>
-              <a:t>04</a:t>
-            </a:r>
-          </a:p>
-        </p:txBody>
-      </p:sp>
-      <p:sp>
-        <p:nvSpPr>
-          <p:cNvPr id="13" name="TFTP + пилот">
-            <a:extLst xmlns:a="http://schemas.openxmlformats.org/drawingml/2006/main">
-              <a:ext uri="{FF2B5EF4-FFF2-40B4-BE49-F238E27FC236}">
-                <a16:creationId xmlns:a16="http://schemas.microsoft.com/office/drawing/2014/main" id="{8DEAD21C-AC03-4441-A7CC-33B0D2CB507A}"/>
-              </a:ext>
-            </a:extLst>
-          </p:cNvPr>
-          <p:cNvSpPr>
-            <a:spLocks xmlns:a="http://schemas.openxmlformats.org/drawingml/2006/main" noGrp="1"/>
-          </p:cNvSpPr>
-          <p:nvPr/>
-        </p:nvSpPr>
-        <p:spPr>
-          <a:xfrm xmlns:a="http://schemas.openxmlformats.org/drawingml/2006/main">
-            <a:off x="1714500" y="4743450"/>
-            <a:ext cx="9525000" cy="457200"/>
-          </a:xfrm>
-          <a:prstGeom xmlns:a="http://schemas.openxmlformats.org/drawingml/2006/main" prst="rect">
-            <a:avLst/>
-          </a:prstGeom>
-          <a:noFill xmlns:a="http://schemas.openxmlformats.org/drawingml/2006/main"/>
-          <a:ln xmlns:a="http://schemas.openxmlformats.org/drawingml/2006/main" w="0">
-            <a:noFill/>
-          </a:ln>
-        </p:spPr>
-        <p:txBody>
-          <a:bodyPr xmlns:a="http://schemas.openxmlformats.org/drawingml/2006/main" wrap="square" lIns="0" tIns="0" rIns="0" bIns="0" anchor="t">
-            <a:noAutofit/>
-          </a:bodyPr>
-          <a:lstStyle xmlns:a="http://schemas.openxmlformats.org/drawingml/2006/main">
-            <a:defPPr algn="l">
-              <a:defRPr sz="2400" b="1">
-                <a:solidFill>
-                  <a:srgbClr val="F5F7FB"/>
-                </a:solidFill>
-                <a:latin typeface="Arial"/>
-                <a:ea typeface="Arial"/>
-                <a:cs typeface="Arial"/>
-              </a:defRPr>
-            </a:defPPr>
-          </a:lstStyle>
-          <a:p xmlns:a="http://schemas.openxmlformats.org/drawingml/2006/main">
-            <a:pPr algn="l">
-              <a:defRPr sz="2400" b="1">
-                <a:solidFill>
-                  <a:srgbClr val="F5F7FB"/>
-                </a:solidFill>
-                <a:latin typeface="Arial"/>
-                <a:ea typeface="Arial"/>
-                <a:cs typeface="Arial"/>
-              </a:defRPr>
-            </a:pPr>
-            <a:r>
-              <a:rPr sz="2400" b="1">
-                <a:solidFill>
-                  <a:srgbClr val="F5F7FB"/>
-                </a:solidFill>
-                <a:latin typeface="Arial"/>
-                <a:ea typeface="Arial"/>
-                <a:cs typeface="Arial"/>
-              </a:rPr>
-              <a:t>TFTP + пилот</a:t>
-            </a:r>
-          </a:p>
-        </p:txBody>
-      </p:sp>
-      <p:sp>
-        <p:nvSpPr>
-          <p:cNvPr id="14" name="Временный provisioning, затем тесты звонков">
-            <a:extLst xmlns:a="http://schemas.openxmlformats.org/drawingml/2006/main">
-              <a:ext uri="{FF2B5EF4-FFF2-40B4-BE49-F238E27FC236}">
-                <a16:creationId xmlns:a16="http://schemas.microsoft.com/office/drawing/2014/main" id="{24C95DA1-A7E8-45A3-8800-A03675E16FAD}"/>
-              </a:ext>
-            </a:extLst>
-          </p:cNvPr>
-          <p:cNvSpPr>
-            <a:spLocks xmlns:a="http://schemas.openxmlformats.org/drawingml/2006/main" noGrp="1"/>
-          </p:cNvSpPr>
-          <p:nvPr/>
-        </p:nvSpPr>
-        <p:spPr>
-          <a:xfrm xmlns:a="http://schemas.openxmlformats.org/drawingml/2006/main">
-            <a:off x="1714500" y="5210175"/>
-            <a:ext cx="9525000" cy="428625"/>
-          </a:xfrm>
-          <a:prstGeom xmlns:a="http://schemas.openxmlformats.org/drawingml/2006/main" prst="rect">
-            <a:avLst/>
-          </a:prstGeom>
-          <a:noFill xmlns:a="http://schemas.openxmlformats.org/drawingml/2006/main"/>
-          <a:ln xmlns:a="http://schemas.openxmlformats.org/drawingml/2006/main" w="0">
-            <a:noFill/>
-          </a:ln>
-        </p:spPr>
-        <p:txBody>
-          <a:bodyPr xmlns:a="http://schemas.openxmlformats.org/drawingml/2006/main" wrap="square" lIns="0" tIns="0" rIns="0" bIns="0" anchor="t">
-            <a:noAutofit/>
-          </a:bodyPr>
-          <a:lstStyle xmlns:a="http://schemas.openxmlformats.org/drawingml/2006/main">
-            <a:defPPr algn="l">
-              <a:defRPr sz="1875" b="0">
-                <a:solidFill>
-                  <a:srgbClr val="AAB9D0"/>
-                </a:solidFill>
-                <a:latin typeface="Arial"/>
-                <a:ea typeface="Arial"/>
-                <a:cs typeface="Arial"/>
-              </a:defRPr>
-            </a:defPPr>
-          </a:lstStyle>
-          <a:p xmlns:a="http://schemas.openxmlformats.org/drawingml/2006/main">
-            <a:pPr algn="l">
-              <a:defRPr sz="1875" b="0">
-                <a:solidFill>
-                  <a:srgbClr val="AAB9D0"/>
-                </a:solidFill>
-                <a:latin typeface="Arial"/>
-                <a:ea typeface="Arial"/>
-                <a:cs typeface="Arial"/>
-              </a:defRPr>
-            </a:pPr>
-            <a:r>
-              <a:rPr sz="1875" b="0">
-                <a:solidFill>
-                  <a:srgbClr val="AAB9D0"/>
-                </a:solidFill>
-                <a:latin typeface="Arial"/>
-                <a:ea typeface="Arial"/>
-                <a:cs typeface="Arial"/>
-              </a:rPr>
-              <a:t>Временный provisioning, затем тесты звонков</a:t>
+              </a:rPr>
+              <a:t>Отдельный секрет и ACL /32. Право system даёт административные действия.</a:t>
             </a:r>
           </a:p>
         </p:txBody>
@@ -12753,7 +14560,7 @@
     </p:spTree>
     <p:extLst>
       <p:ext uri="{BB962C8B-B14F-4D97-AF65-F5344CB8AC3E}">
-        <p14:creationId xmlns:p14="http://schemas.microsoft.com/office/powerpoint/2010/main" val="366735307"/>
+        <p14:creationId xmlns:p14="http://schemas.microsoft.com/office/powerpoint/2010/main" val="454348720"/>
       </p:ext>
     </p:extLst>
   </p:cSld>

--- a/docs/slides/cisco-home-telephony.pptx
+++ b/docs/slides/cisco-home-telephony.pptx
@@ -2,30 +2,30 @@
 <file path=ppt/presentation.xml><?xml version="1.0" encoding="utf-8"?>
 <p:presentation xmlns:p="http://schemas.openxmlformats.org/presentationml/2006/main">
   <p:sldMasterIdLst>
-    <p:sldMasterId xmlns:r="http://schemas.openxmlformats.org/officeDocument/2006/relationships" id="2147483648" r:id="Ra80a938e42ac4512"/>
+    <p:sldMasterId xmlns:r="http://schemas.openxmlformats.org/officeDocument/2006/relationships" id="2147483648" r:id="Rc60615b1ea994c6e"/>
   </p:sldMasterIdLst>
   <p:notesMasterIdLst>
-    <p:notesMasterId xmlns:r="http://schemas.openxmlformats.org/officeDocument/2006/relationships" r:id="R9eca0e15447e4bc0"/>
+    <p:notesMasterId xmlns:r="http://schemas.openxmlformats.org/officeDocument/2006/relationships" r:id="Red0308d7f24a42f7"/>
   </p:notesMasterIdLst>
   <p:sldIdLst>
-    <p:sldId xmlns:r="http://schemas.openxmlformats.org/officeDocument/2006/relationships" id="256" r:id="R278d9568bea141d6"/>
-    <p:sldId xmlns:r="http://schemas.openxmlformats.org/officeDocument/2006/relationships" id="257" r:id="R05c5268c6f864440"/>
-    <p:sldId xmlns:r="http://schemas.openxmlformats.org/officeDocument/2006/relationships" id="258" r:id="R57edc19640bb4a19"/>
-    <p:sldId xmlns:r="http://schemas.openxmlformats.org/officeDocument/2006/relationships" id="259" r:id="R3a1dba5b40664d7c"/>
-    <p:sldId xmlns:r="http://schemas.openxmlformats.org/officeDocument/2006/relationships" id="260" r:id="R0411dea0fa3e425b"/>
-    <p:sldId xmlns:r="http://schemas.openxmlformats.org/officeDocument/2006/relationships" id="261" r:id="R7050e9602cd7419e"/>
-    <p:sldId xmlns:r="http://schemas.openxmlformats.org/officeDocument/2006/relationships" id="262" r:id="R3f2e8f5aedb248ee"/>
-    <p:sldId xmlns:r="http://schemas.openxmlformats.org/officeDocument/2006/relationships" id="263" r:id="R86d9345c78f84dd0"/>
-    <p:sldId xmlns:r="http://schemas.openxmlformats.org/officeDocument/2006/relationships" id="264" r:id="R8a17a9014e264060"/>
-    <p:sldId xmlns:r="http://schemas.openxmlformats.org/officeDocument/2006/relationships" id="265" r:id="R46bae09052504a17"/>
-    <p:sldId xmlns:r="http://schemas.openxmlformats.org/officeDocument/2006/relationships" id="266" r:id="R0db2c9aa171d4046"/>
-    <p:sldId xmlns:r="http://schemas.openxmlformats.org/officeDocument/2006/relationships" id="267" r:id="Rbb76095bf9964d33"/>
-    <p:sldId xmlns:r="http://schemas.openxmlformats.org/officeDocument/2006/relationships" id="268" r:id="Rb6cc4cf71ff641d8"/>
-    <p:sldId xmlns:r="http://schemas.openxmlformats.org/officeDocument/2006/relationships" id="269" r:id="R4f25602663b24b1a"/>
-    <p:sldId xmlns:r="http://schemas.openxmlformats.org/officeDocument/2006/relationships" id="270" r:id="R82f9b173acd24727"/>
-    <p:sldId xmlns:r="http://schemas.openxmlformats.org/officeDocument/2006/relationships" id="271" r:id="R2828495136d24bd9"/>
-    <p:sldId xmlns:r="http://schemas.openxmlformats.org/officeDocument/2006/relationships" id="272" r:id="R290e82c1513c4c1a"/>
-    <p:sldId xmlns:r="http://schemas.openxmlformats.org/officeDocument/2006/relationships" id="273" r:id="R19b3fd6628c94dcf"/>
+    <p:sldId xmlns:r="http://schemas.openxmlformats.org/officeDocument/2006/relationships" id="256" r:id="Rf680a2e95ae44a2a"/>
+    <p:sldId xmlns:r="http://schemas.openxmlformats.org/officeDocument/2006/relationships" id="257" r:id="Rbe3a4dbc74da42eb"/>
+    <p:sldId xmlns:r="http://schemas.openxmlformats.org/officeDocument/2006/relationships" id="258" r:id="R9a56e51a9a1b4c92"/>
+    <p:sldId xmlns:r="http://schemas.openxmlformats.org/officeDocument/2006/relationships" id="259" r:id="R4a6853c181ec49b7"/>
+    <p:sldId xmlns:r="http://schemas.openxmlformats.org/officeDocument/2006/relationships" id="260" r:id="R6ac73f7ae48948dd"/>
+    <p:sldId xmlns:r="http://schemas.openxmlformats.org/officeDocument/2006/relationships" id="261" r:id="R13a62048ce3d49fb"/>
+    <p:sldId xmlns:r="http://schemas.openxmlformats.org/officeDocument/2006/relationships" id="262" r:id="Rb1a076189df7400c"/>
+    <p:sldId xmlns:r="http://schemas.openxmlformats.org/officeDocument/2006/relationships" id="263" r:id="R8f46d56bf77c408b"/>
+    <p:sldId xmlns:r="http://schemas.openxmlformats.org/officeDocument/2006/relationships" id="264" r:id="Rbc4d8875a1f14856"/>
+    <p:sldId xmlns:r="http://schemas.openxmlformats.org/officeDocument/2006/relationships" id="265" r:id="Re916562666994f3b"/>
+    <p:sldId xmlns:r="http://schemas.openxmlformats.org/officeDocument/2006/relationships" id="266" r:id="Re86db2a43cd44283"/>
+    <p:sldId xmlns:r="http://schemas.openxmlformats.org/officeDocument/2006/relationships" id="267" r:id="R0baad21cfc02454d"/>
+    <p:sldId xmlns:r="http://schemas.openxmlformats.org/officeDocument/2006/relationships" id="268" r:id="R011339494f074099"/>
+    <p:sldId xmlns:r="http://schemas.openxmlformats.org/officeDocument/2006/relationships" id="269" r:id="Rc421db799f6641b5"/>
+    <p:sldId xmlns:r="http://schemas.openxmlformats.org/officeDocument/2006/relationships" id="270" r:id="R70feb78dd01b4be6"/>
+    <p:sldId xmlns:r="http://schemas.openxmlformats.org/officeDocument/2006/relationships" id="271" r:id="Rdfaf4f82ae4b4d4a"/>
+    <p:sldId xmlns:r="http://schemas.openxmlformats.org/officeDocument/2006/relationships" id="272" r:id="R46fa2b66ee454dcb"/>
+    <p:sldId xmlns:r="http://schemas.openxmlformats.org/officeDocument/2006/relationships" id="273" r:id="Re798a9f0e11045da"/>
   </p:sldIdLst>
   <p:sldSz cx="12192000" cy="6858000"/>
   <p:notesSz cx="6858000" cy="9144000"/>
@@ -1109,7 +1109,7 @@
           <a:lstStyle xmlns:a="http://schemas.openxmlformats.org/drawingml/2006/main"/>
           <a:p xmlns:a="http://schemas.openxmlformats.org/drawingml/2006/main">
             <a:r>
-              <a:t>Status snapshot: October 17, 2026. SIP2SIP and Linphone account activation completed. Callcentric IP Freedom account activation completed with a $0 plan and $0 balance. The provider dashboard blocks outbound calls pending risk review by support. The profile stays disabled. SIP credential verification and PBX registration remain pending. Free accounts do not imply free PSTN calls. SIP2SIP 802 uses the official 4444 echo destination. Callcentric 801 uses its official 17771234567 test account once enabled. Linphone requires an explicitly verified free peer, with no invented echo number. FWD issued credentials but its mandatory identity-verification flow opened a Verification Fee checkout, so activation stopped. Google Voice supplies no official free generic Asterisk SIP trunk. Working external calls require actual REGISTER, answer and bidirectional RTP evidence. Sources: https://sip2sip.info/help/ ; https://www.callcentric.com/rate/plans/ip_freedom/ ; https://www.callcentric.com/support/device/asterisk/17_pjsip ; https://www.linphone.org/en/faq/ ; https://www.fwdialup.com/mission ; https://knowledge.workspace.google.com/admin/voice/sip-link-requirements ; docs/external-sip.md and docs/extended-services-research.md.</a:t>
+              <a:t>Status snapshot: October 17, 2026. SIP2SIP, Callcentric and Linphone all reached Registered in the live Asterisk instance. Callcentric IP Freedom account activation completed with a $0 plan and $0 balance, but the provider dashboard blocks outbound calls pending risk review by support. Callcentric and Linphone are registration-only, with no active 801 or 803 dial route; Linphone still needs an explicitly verified free peer. SIP2SIP 802 targets the official 4444 echo destination. Its external audio pilot was deferred at the user's request, so registration is verified but external call media is not. Free accounts do not imply free PSTN calls. FWD issued credentials but its mandatory identity-verification flow opened a Verification Fee checkout, so activation stopped. Google Voice supplies no official free generic Asterisk SIP trunk. Working external calls require an answered call and bidirectional RTP evidence in addition to REGISTER. Sources: https://sip2sip.info/help/ ; https://www.callcentric.com/rate/plans/ip_freedom/ ; https://www.callcentric.com/support/device/asterisk/17_pjsip ; https://www.linphone.org/en/faq/ ; https://www.fwdialup.com/mission ; https://knowledge.workspace.google.com/admin/voice/sip-link-requirements ; docs/external-sip.md and docs/extended-services-research.md.</a:t>
             </a:r>
           </a:p>
         </p:txBody>
@@ -1791,7 +1791,7 @@
           <p:cNvPr id="3" name="Title">
             <a:extLst xmlns:a="http://schemas.openxmlformats.org/drawingml/2006/main">
               <a:ext uri="{FF2B5EF4-FFF2-40B4-BE49-F238E27FC236}">
-                <a16:creationId xmlns:a16="http://schemas.microsoft.com/office/drawing/2014/main" id="{E040781D-80A3-4945-877E-B66414BCCC23}"/>
+                <a16:creationId xmlns:a16="http://schemas.microsoft.com/office/drawing/2014/main" id="{1AD149AB-ABB9-4042-B0D9-2434C853CEDB}"/>
               </a:ext>
             </a:extLst>
           </p:cNvPr>
@@ -2020,7 +2020,7 @@
           <p:cNvPr id="2" name="Subtitle">
             <a:extLst xmlns:a="http://schemas.openxmlformats.org/drawingml/2006/main">
               <a:ext uri="{FF2B5EF4-FFF2-40B4-BE49-F238E27FC236}">
-                <a16:creationId xmlns:a16="http://schemas.microsoft.com/office/drawing/2014/main" id="{1F47C90D-2AF4-4C25-93B3-443617218020}"/>
+                <a16:creationId xmlns:a16="http://schemas.microsoft.com/office/drawing/2014/main" id="{859D3B9E-F704-4EB2-9D99-7E8914737A18}"/>
               </a:ext>
             </a:extLst>
           </p:cNvPr>
@@ -2266,7 +2266,7 @@
           <p:cNvPr id="2" name="Section title">
             <a:extLst xmlns:a="http://schemas.openxmlformats.org/drawingml/2006/main">
               <a:ext uri="{FF2B5EF4-FFF2-40B4-BE49-F238E27FC236}">
-                <a16:creationId xmlns:a16="http://schemas.microsoft.com/office/drawing/2014/main" id="{CA3CF43E-93F8-4476-BA65-993018897952}"/>
+                <a16:creationId xmlns:a16="http://schemas.microsoft.com/office/drawing/2014/main" id="{7B1AEB8A-A6E4-4478-89DB-99E2D48075E1}"/>
               </a:ext>
             </a:extLst>
           </p:cNvPr>
@@ -2512,7 +2512,7 @@
           <p:cNvPr id="3" name="Title">
             <a:extLst xmlns:a="http://schemas.openxmlformats.org/drawingml/2006/main">
               <a:ext uri="{FF2B5EF4-FFF2-40B4-BE49-F238E27FC236}">
-                <a16:creationId xmlns:a16="http://schemas.microsoft.com/office/drawing/2014/main" id="{C461CD8A-FFD3-4ABF-8A67-C263244E6B2D}"/>
+                <a16:creationId xmlns:a16="http://schemas.microsoft.com/office/drawing/2014/main" id="{0A75401D-4611-4749-B64B-8A843DE419A1}"/>
               </a:ext>
             </a:extLst>
           </p:cNvPr>
@@ -2741,7 +2741,7 @@
           <p:cNvPr id="2" name="Body">
             <a:extLst xmlns:a="http://schemas.openxmlformats.org/drawingml/2006/main">
               <a:ext uri="{FF2B5EF4-FFF2-40B4-BE49-F238E27FC236}">
-                <a16:creationId xmlns:a16="http://schemas.microsoft.com/office/drawing/2014/main" id="{CA35D21E-F24F-4F37-B384-494A913ED9A2}"/>
+                <a16:creationId xmlns:a16="http://schemas.microsoft.com/office/drawing/2014/main" id="{7C5EEA92-2B24-4097-8B88-97478A0B1366}"/>
               </a:ext>
             </a:extLst>
           </p:cNvPr>
@@ -2987,7 +2987,7 @@
           <p:cNvPr id="4" name="Title">
             <a:extLst xmlns:a="http://schemas.openxmlformats.org/drawingml/2006/main">
               <a:ext uri="{FF2B5EF4-FFF2-40B4-BE49-F238E27FC236}">
-                <a16:creationId xmlns:a16="http://schemas.microsoft.com/office/drawing/2014/main" id="{57892153-305A-4F9E-A978-2BD603EB8FE5}"/>
+                <a16:creationId xmlns:a16="http://schemas.microsoft.com/office/drawing/2014/main" id="{2473EB3C-A760-4EB7-AF42-F1B00BA7BD91}"/>
               </a:ext>
             </a:extLst>
           </p:cNvPr>
@@ -3216,7 +3216,7 @@
           <p:cNvPr id="2" name="Left column">
             <a:extLst xmlns:a="http://schemas.openxmlformats.org/drawingml/2006/main">
               <a:ext uri="{FF2B5EF4-FFF2-40B4-BE49-F238E27FC236}">
-                <a16:creationId xmlns:a16="http://schemas.microsoft.com/office/drawing/2014/main" id="{9791A854-1833-42BF-9394-A610F2D2A2A6}"/>
+                <a16:creationId xmlns:a16="http://schemas.microsoft.com/office/drawing/2014/main" id="{1D21B46E-AE81-42D1-9624-ED0FDB6980B4}"/>
               </a:ext>
             </a:extLst>
           </p:cNvPr>
@@ -3445,7 +3445,7 @@
           <p:cNvPr id="3" name="Right column">
             <a:extLst xmlns:a="http://schemas.openxmlformats.org/drawingml/2006/main">
               <a:ext uri="{FF2B5EF4-FFF2-40B4-BE49-F238E27FC236}">
-                <a16:creationId xmlns:a16="http://schemas.microsoft.com/office/drawing/2014/main" id="{3C7AE063-CB92-4808-B9FF-C6C3779F05FB}"/>
+                <a16:creationId xmlns:a16="http://schemas.microsoft.com/office/drawing/2014/main" id="{C374C08D-B727-44B9-97C1-47F34023BF58}"/>
               </a:ext>
             </a:extLst>
           </p:cNvPr>
@@ -3691,7 +3691,7 @@
           <p:cNvPr id="3" name="Title">
             <a:extLst xmlns:a="http://schemas.openxmlformats.org/drawingml/2006/main">
               <a:ext uri="{FF2B5EF4-FFF2-40B4-BE49-F238E27FC236}">
-                <a16:creationId xmlns:a16="http://schemas.microsoft.com/office/drawing/2014/main" id="{5D290ADC-CFF5-4ADA-9400-BA4CB466CAD1}"/>
+                <a16:creationId xmlns:a16="http://schemas.microsoft.com/office/drawing/2014/main" id="{83F6A7C2-853E-4B03-85E6-B862B4CBE038}"/>
               </a:ext>
             </a:extLst>
           </p:cNvPr>
@@ -3920,7 +3920,7 @@
           <p:cNvPr id="2" name="Left column">
             <a:extLst xmlns:a="http://schemas.openxmlformats.org/drawingml/2006/main">
               <a:ext uri="{FF2B5EF4-FFF2-40B4-BE49-F238E27FC236}">
-                <a16:creationId xmlns:a16="http://schemas.microsoft.com/office/drawing/2014/main" id="{60A07F59-E7C1-4454-AE45-CA9481CFCD51}"/>
+                <a16:creationId xmlns:a16="http://schemas.microsoft.com/office/drawing/2014/main" id="{CE5044DC-D96E-4A6F-AD97-DBB76BB65751}"/>
               </a:ext>
             </a:extLst>
           </p:cNvPr>
@@ -4187,12 +4187,12 @@
   </p:cSld>
   <p:clrMap bg1="lt1" tx1="dk1" bg2="lt2" tx2="dk2" accent1="accent1" accent2="accent2" accent3="accent3" accent4="accent4" accent5="accent5" accent6="accent6" hlink="hlink" folHlink="folHlink"/>
   <p:sldLayoutIdLst>
-    <p:sldLayoutId xmlns:r="http://schemas.openxmlformats.org/officeDocument/2006/relationships" id="2147483649" r:id="Rf8cc51be5b7043e6"/>
-    <p:sldLayoutId xmlns:r="http://schemas.openxmlformats.org/officeDocument/2006/relationships" id="2147483650" r:id="R44df3f11c46e44a5"/>
-    <p:sldLayoutId xmlns:r="http://schemas.openxmlformats.org/officeDocument/2006/relationships" id="2147483651" r:id="Rd67cf15e1b1440e7"/>
-    <p:sldLayoutId xmlns:r="http://schemas.openxmlformats.org/officeDocument/2006/relationships" id="2147483652" r:id="Rf1b6e85625d0435d"/>
-    <p:sldLayoutId xmlns:r="http://schemas.openxmlformats.org/officeDocument/2006/relationships" id="2147483653" r:id="Ra55d744493444dc9"/>
-    <p:sldLayoutId xmlns:r="http://schemas.openxmlformats.org/officeDocument/2006/relationships" id="2147483654" r:id="R1f5b5ebe926e4d06"/>
+    <p:sldLayoutId xmlns:r="http://schemas.openxmlformats.org/officeDocument/2006/relationships" id="2147483649" r:id="Rde5d239d68234a9b"/>
+    <p:sldLayoutId xmlns:r="http://schemas.openxmlformats.org/officeDocument/2006/relationships" id="2147483650" r:id="R5d3d64e130a84a15"/>
+    <p:sldLayoutId xmlns:r="http://schemas.openxmlformats.org/officeDocument/2006/relationships" id="2147483651" r:id="R15b2b6745c574089"/>
+    <p:sldLayoutId xmlns:r="http://schemas.openxmlformats.org/officeDocument/2006/relationships" id="2147483652" r:id="R870dc5cffd124297"/>
+    <p:sldLayoutId xmlns:r="http://schemas.openxmlformats.org/officeDocument/2006/relationships" id="2147483653" r:id="R656aacb3f90f4641"/>
+    <p:sldLayoutId xmlns:r="http://schemas.openxmlformats.org/officeDocument/2006/relationships" id="2147483654" r:id="Rbc1bb7cb833e491f"/>
   </p:sldLayoutIdLst>
   <p:txStyles>
     <p:titleStyle>
@@ -4743,7 +4743,7 @@
           <p:cNvPr id="7" name="">
             <a:extLst xmlns:a="http://schemas.openxmlformats.org/drawingml/2006/main">
               <a:ext uri="{FF2B5EF4-FFF2-40B4-BE49-F238E27FC236}">
-                <a16:creationId xmlns:a16="http://schemas.microsoft.com/office/drawing/2014/main" id="{7AE9306F-9517-4424-B311-130691B31798}"/>
+                <a16:creationId xmlns:a16="http://schemas.microsoft.com/office/drawing/2014/main" id="{7C8EBC48-80CB-4929-B6CF-7F225CD6FCF7}"/>
               </a:ext>
             </a:extLst>
           </p:cNvPr>
@@ -4883,7 +4883,7 @@
           <p:cNvPr id="2" name="01">
             <a:extLst xmlns:a="http://schemas.openxmlformats.org/drawingml/2006/main">
               <a:ext uri="{FF2B5EF4-FFF2-40B4-BE49-F238E27FC236}">
-                <a16:creationId xmlns:a16="http://schemas.microsoft.com/office/drawing/2014/main" id="{6A10F5D1-BAF3-44DD-A24D-B7EDA3C25D5E}"/>
+                <a16:creationId xmlns:a16="http://schemas.microsoft.com/office/drawing/2014/main" id="{2541CC7F-7BEF-4B38-951C-2C03E13EDD07}"/>
               </a:ext>
             </a:extLst>
           </p:cNvPr>
@@ -5041,7 +5041,7 @@
           <p:cNvPr id="3" name="Cisco 7945G">
             <a:extLst xmlns:a="http://schemas.openxmlformats.org/drawingml/2006/main">
               <a:ext uri="{FF2B5EF4-FFF2-40B4-BE49-F238E27FC236}">
-                <a16:creationId xmlns:a16="http://schemas.microsoft.com/office/drawing/2014/main" id="{9B97AFDA-D9A2-4962-98F0-B484EB8BB564}"/>
+                <a16:creationId xmlns:a16="http://schemas.microsoft.com/office/drawing/2014/main" id="{1A889EAD-9F45-488B-BED6-F6DFA6BD848D}"/>
               </a:ext>
             </a:extLst>
           </p:cNvPr>
@@ -5199,7 +5199,7 @@
           <p:cNvPr id="4" name="Home telephony">
             <a:extLst xmlns:a="http://schemas.openxmlformats.org/drawingml/2006/main">
               <a:ext uri="{FF2B5EF4-FFF2-40B4-BE49-F238E27FC236}">
-                <a16:creationId xmlns:a16="http://schemas.microsoft.com/office/drawing/2014/main" id="{4ABC8F87-4959-4CA9-9D44-F5F61C56D544}"/>
+                <a16:creationId xmlns:a16="http://schemas.microsoft.com/office/drawing/2014/main" id="{32CCFCE1-DC68-4314-A8CC-08885F58BF96}"/>
               </a:ext>
             </a:extLst>
           </p:cNvPr>
@@ -5357,7 +5357,7 @@
           <p:cNvPr id="5" name="Asterisk in k3s + Home Assistant">
             <a:extLst xmlns:a="http://schemas.openxmlformats.org/drawingml/2006/main">
               <a:ext uri="{FF2B5EF4-FFF2-40B4-BE49-F238E27FC236}">
-                <a16:creationId xmlns:a16="http://schemas.microsoft.com/office/drawing/2014/main" id="{B8A9DE72-280F-44BA-9F1A-87B3CE8D9AF3}"/>
+                <a16:creationId xmlns:a16="http://schemas.microsoft.com/office/drawing/2014/main" id="{524CBB45-1AC0-4264-9193-9D52FFD455A4}"/>
               </a:ext>
             </a:extLst>
           </p:cNvPr>
@@ -5515,7 +5515,7 @@
           <p:cNvPr id="6" name="10 phones with color displays">
             <a:extLst xmlns:a="http://schemas.openxmlformats.org/drawingml/2006/main">
               <a:ext uri="{FF2B5EF4-FFF2-40B4-BE49-F238E27FC236}">
-                <a16:creationId xmlns:a16="http://schemas.microsoft.com/office/drawing/2014/main" id="{E599A5BC-472F-4603-8ADE-FA03E0A05D49}"/>
+                <a16:creationId xmlns:a16="http://schemas.microsoft.com/office/drawing/2014/main" id="{4C13FBAF-DDEA-4A4C-B48B-2F7F7B8EE1B0}"/>
               </a:ext>
             </a:extLst>
           </p:cNvPr>
@@ -5671,7 +5671,7 @@
     </p:spTree>
     <p:extLst>
       <p:ext uri="{BB962C8B-B14F-4D97-AF65-F5344CB8AC3E}">
-        <p14:creationId xmlns:p14="http://schemas.microsoft.com/office/powerpoint/2010/main" val="725406725"/>
+        <p14:creationId xmlns:p14="http://schemas.microsoft.com/office/powerpoint/2010/main" val="750955465"/>
       </p:ext>
     </p:extLst>
   </p:cSld>
@@ -5702,7 +5702,7 @@
           <p:cNvPr id="8" name="">
             <a:extLst xmlns:a="http://schemas.openxmlformats.org/drawingml/2006/main">
               <a:ext uri="{FF2B5EF4-FFF2-40B4-BE49-F238E27FC236}">
-                <a16:creationId xmlns:a16="http://schemas.microsoft.com/office/drawing/2014/main" id="{10D563FB-F8C6-452E-B285-A4D6F626C128}"/>
+                <a16:creationId xmlns:a16="http://schemas.microsoft.com/office/drawing/2014/main" id="{F488C894-9C9B-4837-A2DB-CD16A47A52E6}"/>
               </a:ext>
             </a:extLst>
           </p:cNvPr>
@@ -5734,7 +5734,7 @@
           <p:cNvPr id="6" name="">
             <a:extLst xmlns:a="http://schemas.openxmlformats.org/drawingml/2006/main">
               <a:ext uri="{FF2B5EF4-FFF2-40B4-BE49-F238E27FC236}">
-                <a16:creationId xmlns:a16="http://schemas.microsoft.com/office/drawing/2014/main" id="{4DF22F72-81D5-4529-824E-574CE6234572}"/>
+                <a16:creationId xmlns:a16="http://schemas.microsoft.com/office/drawing/2014/main" id="{BC5F423D-BB1C-4BF2-A2F3-ABD4D02E9194}"/>
               </a:ext>
             </a:extLst>
           </p:cNvPr>
@@ -5766,7 +5766,7 @@
           <p:cNvPr id="12" name="630: voice assistant on the phone">
             <a:extLst xmlns:a="http://schemas.openxmlformats.org/drawingml/2006/main">
               <a:ext uri="{FF2B5EF4-FFF2-40B4-BE49-F238E27FC236}">
-                <a16:creationId xmlns:a16="http://schemas.microsoft.com/office/drawing/2014/main" id="{8F49C05E-325B-48BF-BD1A-317D8869F744}"/>
+                <a16:creationId xmlns:a16="http://schemas.microsoft.com/office/drawing/2014/main" id="{2A14ED1B-3755-4C25-B907-973D3483BDC5}"/>
               </a:ext>
             </a:extLst>
           </p:cNvPr>
@@ -5924,7 +5924,7 @@
           <p:cNvPr id="2" name="10">
             <a:extLst xmlns:a="http://schemas.openxmlformats.org/drawingml/2006/main">
               <a:ext uri="{FF2B5EF4-FFF2-40B4-BE49-F238E27FC236}">
-                <a16:creationId xmlns:a16="http://schemas.microsoft.com/office/drawing/2014/main" id="{5FC536F3-53A0-4924-BD72-3AADBB8B1CED}"/>
+                <a16:creationId xmlns:a16="http://schemas.microsoft.com/office/drawing/2014/main" id="{5ADC4242-02E7-4E37-92A9-46D63C0F7E03}"/>
               </a:ext>
             </a:extLst>
           </p:cNvPr>
@@ -6082,7 +6082,7 @@
           <p:cNvPr id="3" name="cisco">
             <a:extLst xmlns:a="http://schemas.openxmlformats.org/drawingml/2006/main">
               <a:ext uri="{FF2B5EF4-FFF2-40B4-BE49-F238E27FC236}">
-                <a16:creationId xmlns:a16="http://schemas.microsoft.com/office/drawing/2014/main" id="{4A5A18E4-4101-4F31-B1DC-D1B323D14FD6}"/>
+                <a16:creationId xmlns:a16="http://schemas.microsoft.com/office/drawing/2014/main" id="{98BD7DE8-7124-4242-8866-FE4EFACF98B3}"/>
               </a:ext>
             </a:extLst>
           </p:cNvPr>
@@ -6292,7 +6292,7 @@
           <p:cNvPr id="4" name="codec">
             <a:extLst xmlns:a="http://schemas.openxmlformats.org/drawingml/2006/main">
               <a:ext uri="{FF2B5EF4-FFF2-40B4-BE49-F238E27FC236}">
-                <a16:creationId xmlns:a16="http://schemas.microsoft.com/office/drawing/2014/main" id="{77AFCB5E-B3DD-44FE-A55F-6BF19E02065A}"/>
+                <a16:creationId xmlns:a16="http://schemas.microsoft.com/office/drawing/2014/main" id="{96850ACD-1DD4-4EC3-9A58-2E0BEF594AFC}"/>
               </a:ext>
             </a:extLst>
           </p:cNvPr>
@@ -6502,7 +6502,7 @@
           <p:cNvPr id="5" name="assist">
             <a:extLst xmlns:a="http://schemas.openxmlformats.org/drawingml/2006/main">
               <a:ext uri="{FF2B5EF4-FFF2-40B4-BE49-F238E27FC236}">
-                <a16:creationId xmlns:a16="http://schemas.microsoft.com/office/drawing/2014/main" id="{D61D3749-C630-402A-847B-6A55A92E8377}"/>
+                <a16:creationId xmlns:a16="http://schemas.microsoft.com/office/drawing/2014/main" id="{D8C4A134-B44A-41DB-B4E1-737807D36A6F}"/>
               </a:ext>
             </a:extLst>
           </p:cNvPr>
@@ -6712,7 +6712,7 @@
           <p:cNvPr id="7" name="SIP TCP&#10;RTP">
             <a:extLst xmlns:a="http://schemas.openxmlformats.org/drawingml/2006/main">
               <a:ext uri="{FF2B5EF4-FFF2-40B4-BE49-F238E27FC236}">
-                <a16:creationId xmlns:a16="http://schemas.microsoft.com/office/drawing/2014/main" id="{455E7EB5-D454-4699-B144-5AB003BBAD93}"/>
+                <a16:creationId xmlns:a16="http://schemas.microsoft.com/office/drawing/2014/main" id="{73F96A49-028A-4802-BEDF-B155E75CA08A}"/>
               </a:ext>
             </a:extLst>
           </p:cNvPr>
@@ -6893,7 +6893,7 @@
           <p:cNvPr id="9" name="SIP UDP&#10;RTP">
             <a:extLst xmlns:a="http://schemas.openxmlformats.org/drawingml/2006/main">
               <a:ext uri="{FF2B5EF4-FFF2-40B4-BE49-F238E27FC236}">
-                <a16:creationId xmlns:a16="http://schemas.microsoft.com/office/drawing/2014/main" id="{651295FF-FEC5-47ED-B328-A678D4C1EB4E}"/>
+                <a16:creationId xmlns:a16="http://schemas.microsoft.com/office/drawing/2014/main" id="{5C5B67BF-C164-40B7-BE3D-BB941AE6E115}"/>
               </a:ext>
             </a:extLst>
           </p:cNvPr>
@@ -7074,7 +7074,7 @@
           <p:cNvPr id="10" name="First call: enable Allow calls and select a pipeline in HA.&#10;Then ">
             <a:extLst xmlns:a="http://schemas.openxmlformats.org/drawingml/2006/main">
               <a:ext uri="{FF2B5EF4-FFF2-40B4-BE49-F238E27FC236}">
-                <a16:creationId xmlns:a16="http://schemas.microsoft.com/office/drawing/2014/main" id="{4BB7A289-640B-4ADC-95EB-E279DD08E47C}"/>
+                <a16:creationId xmlns:a16="http://schemas.microsoft.com/office/drawing/2014/main" id="{07E209F2-BE8F-4045-8D2F-9F9C5BDFE7AC}"/>
               </a:ext>
             </a:extLst>
           </p:cNvPr>
@@ -7255,7 +7255,7 @@
           <p:cNvPr id="11" name="SIP From retains the phone extension. HA uses dynamic UDP ports f">
             <a:extLst xmlns:a="http://schemas.openxmlformats.org/drawingml/2006/main">
               <a:ext uri="{FF2B5EF4-FFF2-40B4-BE49-F238E27FC236}">
-                <a16:creationId xmlns:a16="http://schemas.microsoft.com/office/drawing/2014/main" id="{8BFB153B-3FB0-44BC-B260-2552DF6DD0DF}"/>
+                <a16:creationId xmlns:a16="http://schemas.microsoft.com/office/drawing/2014/main" id="{19E7FC60-419B-4AC2-B9AE-2F558E9AE395}"/>
               </a:ext>
             </a:extLst>
           </p:cNvPr>
@@ -7434,7 +7434,7 @@
     </p:spTree>
     <p:extLst>
       <p:ext uri="{BB962C8B-B14F-4D97-AF65-F5344CB8AC3E}">
-        <p14:creationId xmlns:p14="http://schemas.microsoft.com/office/powerpoint/2010/main" val="864769615"/>
+        <p14:creationId xmlns:p14="http://schemas.microsoft.com/office/powerpoint/2010/main" val="1758282477"/>
       </p:ext>
     </p:extLst>
   </p:cSld>
@@ -7465,7 +7465,7 @@
           <p:cNvPr id="15" name="Deployment and commissioning">
             <a:extLst xmlns:a="http://schemas.openxmlformats.org/drawingml/2006/main">
               <a:ext uri="{FF2B5EF4-FFF2-40B4-BE49-F238E27FC236}">
-                <a16:creationId xmlns:a16="http://schemas.microsoft.com/office/drawing/2014/main" id="{E8132D40-CB57-44DB-BA94-2A48743389DB}"/>
+                <a16:creationId xmlns:a16="http://schemas.microsoft.com/office/drawing/2014/main" id="{C58AA45C-7DFA-47F5-94A9-EADF9A3ED7F4}"/>
               </a:ext>
             </a:extLst>
           </p:cNvPr>
@@ -7623,7 +7623,7 @@
           <p:cNvPr id="2" name="11">
             <a:extLst xmlns:a="http://schemas.openxmlformats.org/drawingml/2006/main">
               <a:ext uri="{FF2B5EF4-FFF2-40B4-BE49-F238E27FC236}">
-                <a16:creationId xmlns:a16="http://schemas.microsoft.com/office/drawing/2014/main" id="{0B0F6691-FA0E-4CB1-AD44-A56163507F0E}"/>
+                <a16:creationId xmlns:a16="http://schemas.microsoft.com/office/drawing/2014/main" id="{590E6E3E-07A5-4FC8-8AB2-755D85ACD349}"/>
               </a:ext>
             </a:extLst>
           </p:cNvPr>
@@ -7781,7 +7781,7 @@
           <p:cNvPr id="3" name="01">
             <a:extLst xmlns:a="http://schemas.openxmlformats.org/drawingml/2006/main">
               <a:ext uri="{FF2B5EF4-FFF2-40B4-BE49-F238E27FC236}">
-                <a16:creationId xmlns:a16="http://schemas.microsoft.com/office/drawing/2014/main" id="{7BA7ECBF-C4AD-4945-A8A5-4654D841618B}"/>
+                <a16:creationId xmlns:a16="http://schemas.microsoft.com/office/drawing/2014/main" id="{8D63FE95-B6A5-46DD-B49D-2B7A35CD82C9}"/>
               </a:ext>
             </a:extLst>
           </p:cNvPr>
@@ -7939,7 +7939,7 @@
           <p:cNvPr id="4" name="Server bootstrap">
             <a:extLst xmlns:a="http://schemas.openxmlformats.org/drawingml/2006/main">
               <a:ext uri="{FF2B5EF4-FFF2-40B4-BE49-F238E27FC236}">
-                <a16:creationId xmlns:a16="http://schemas.microsoft.com/office/drawing/2014/main" id="{CBAB7A75-D842-4988-9B30-3E0476725870}"/>
+                <a16:creationId xmlns:a16="http://schemas.microsoft.com/office/drawing/2014/main" id="{3C20DC89-41BB-4F8E-A359-53545C8C36C3}"/>
               </a:ext>
             </a:extLst>
           </p:cNvPr>
@@ -8097,7 +8097,7 @@
           <p:cNvPr id="5" name="Images, static IP, firewall, Asterisk and Opus">
             <a:extLst xmlns:a="http://schemas.openxmlformats.org/drawingml/2006/main">
               <a:ext uri="{FF2B5EF4-FFF2-40B4-BE49-F238E27FC236}">
-                <a16:creationId xmlns:a16="http://schemas.microsoft.com/office/drawing/2014/main" id="{E1FA4BC8-C5B7-483C-B595-38687AD3A7D1}"/>
+                <a16:creationId xmlns:a16="http://schemas.microsoft.com/office/drawing/2014/main" id="{F7CF5DB1-6896-4F21-967A-CB0D24478B4C}"/>
               </a:ext>
             </a:extLst>
           </p:cNvPr>
@@ -8255,7 +8255,7 @@
           <p:cNvPr id="6" name="02">
             <a:extLst xmlns:a="http://schemas.openxmlformats.org/drawingml/2006/main">
               <a:ext uri="{FF2B5EF4-FFF2-40B4-BE49-F238E27FC236}">
-                <a16:creationId xmlns:a16="http://schemas.microsoft.com/office/drawing/2014/main" id="{11CF4403-8116-43ED-8DB1-94941DDE5A59}"/>
+                <a16:creationId xmlns:a16="http://schemas.microsoft.com/office/drawing/2014/main" id="{E1B92D30-136C-4719-8C18-1BD662FBA369}"/>
               </a:ext>
             </a:extLst>
           </p:cNvPr>
@@ -8413,7 +8413,7 @@
           <p:cNvPr id="7" name="Verified pilot phone">
             <a:extLst xmlns:a="http://schemas.openxmlformats.org/drawingml/2006/main">
               <a:ext uri="{FF2B5EF4-FFF2-40B4-BE49-F238E27FC236}">
-                <a16:creationId xmlns:a16="http://schemas.microsoft.com/office/drawing/2014/main" id="{A8048148-36E0-483F-8E53-BCE30ECBAC91}"/>
+                <a16:creationId xmlns:a16="http://schemas.microsoft.com/office/drawing/2014/main" id="{877E6FF2-557E-433E-A9BC-EF0AA497FDBF}"/>
               </a:ext>
             </a:extLst>
           </p:cNvPr>
@@ -8571,7 +8571,7 @@
           <p:cNvPr id="8" name="PID / HW / Load / MAC, SIP profile, temporary TFTP">
             <a:extLst xmlns:a="http://schemas.openxmlformats.org/drawingml/2006/main">
               <a:ext uri="{FF2B5EF4-FFF2-40B4-BE49-F238E27FC236}">
-                <a16:creationId xmlns:a16="http://schemas.microsoft.com/office/drawing/2014/main" id="{EEFE0C16-3C22-4080-B463-83528AA7AFF7}"/>
+                <a16:creationId xmlns:a16="http://schemas.microsoft.com/office/drawing/2014/main" id="{CAEA80FA-2FCD-4E66-8E3D-F219894DBA2C}"/>
               </a:ext>
             </a:extLst>
           </p:cNvPr>
@@ -8729,7 +8729,7 @@
           <p:cNvPr id="9" name="03">
             <a:extLst xmlns:a="http://schemas.openxmlformats.org/drawingml/2006/main">
               <a:ext uri="{FF2B5EF4-FFF2-40B4-BE49-F238E27FC236}">
-                <a16:creationId xmlns:a16="http://schemas.microsoft.com/office/drawing/2014/main" id="{98E62D10-3DD0-4194-841A-4155FC67E3A2}"/>
+                <a16:creationId xmlns:a16="http://schemas.microsoft.com/office/drawing/2014/main" id="{C8ED6196-B91F-4D23-AF8D-AAFACBAC2985}"/>
               </a:ext>
             </a:extLst>
           </p:cNvPr>
@@ -8887,7 +8887,7 @@
           <p:cNvPr id="10" name="Home Assistant setup">
             <a:extLst xmlns:a="http://schemas.openxmlformats.org/drawingml/2006/main">
               <a:ext uri="{FF2B5EF4-FFF2-40B4-BE49-F238E27FC236}">
-                <a16:creationId xmlns:a16="http://schemas.microsoft.com/office/drawing/2014/main" id="{2A069F76-C89D-4DCA-91E7-9698FFC04099}"/>
+                <a16:creationId xmlns:a16="http://schemas.microsoft.com/office/drawing/2014/main" id="{82A581E3-960B-45A8-B7EA-6A14A9E6494D}"/>
               </a:ext>
             </a:extLst>
           </p:cNvPr>
@@ -9045,7 +9045,7 @@
           <p:cNvPr id="11" name="AMI /32, secret, actual entity IDs and VoIP pipeline">
             <a:extLst xmlns:a="http://schemas.openxmlformats.org/drawingml/2006/main">
               <a:ext uri="{FF2B5EF4-FFF2-40B4-BE49-F238E27FC236}">
-                <a16:creationId xmlns:a16="http://schemas.microsoft.com/office/drawing/2014/main" id="{C494E040-BC69-4448-8CC8-E16EE991E40A}"/>
+                <a16:creationId xmlns:a16="http://schemas.microsoft.com/office/drawing/2014/main" id="{FD5476ED-EDF8-4298-815B-377229E2822A}"/>
               </a:ext>
             </a:extLst>
           </p:cNvPr>
@@ -9203,7 +9203,7 @@
           <p:cNvPr id="12" name="04">
             <a:extLst xmlns:a="http://schemas.openxmlformats.org/drawingml/2006/main">
               <a:ext uri="{FF2B5EF4-FFF2-40B4-BE49-F238E27FC236}">
-                <a16:creationId xmlns:a16="http://schemas.microsoft.com/office/drawing/2014/main" id="{AF46B131-7E4C-4081-B15A-448E765FC4AE}"/>
+                <a16:creationId xmlns:a16="http://schemas.microsoft.com/office/drawing/2014/main" id="{87F0EA83-9897-4B07-B72D-A0EA00AA9924}"/>
               </a:ext>
             </a:extLst>
           </p:cNvPr>
@@ -9361,7 +9361,7 @@
           <p:cNvPr id="13" name="Acceptance and rollout">
             <a:extLst xmlns:a="http://schemas.openxmlformats.org/drawingml/2006/main">
               <a:ext uri="{FF2B5EF4-FFF2-40B4-BE49-F238E27FC236}">
-                <a16:creationId xmlns:a16="http://schemas.microsoft.com/office/drawing/2014/main" id="{77F1B106-AC5D-4805-B292-39FD99392FEF}"/>
+                <a16:creationId xmlns:a16="http://schemas.microsoft.com/office/drawing/2014/main" id="{37DE7174-D6F9-44EC-B08D-E5932177CB68}"/>
               </a:ext>
             </a:extLst>
           </p:cNvPr>
@@ -9519,7 +9519,7 @@
           <p:cNvPr id="14" name="Two phones, a call to 630, then the remaining phones">
             <a:extLst xmlns:a="http://schemas.openxmlformats.org/drawingml/2006/main">
               <a:ext uri="{FF2B5EF4-FFF2-40B4-BE49-F238E27FC236}">
-                <a16:creationId xmlns:a16="http://schemas.microsoft.com/office/drawing/2014/main" id="{55DB505A-2288-40A5-A522-6310165FBA3D}"/>
+                <a16:creationId xmlns:a16="http://schemas.microsoft.com/office/drawing/2014/main" id="{81722C06-24C5-46FE-B8E1-A47AD803D67A}"/>
               </a:ext>
             </a:extLst>
           </p:cNvPr>
@@ -9675,7 +9675,7 @@
     </p:spTree>
     <p:extLst>
       <p:ext uri="{BB962C8B-B14F-4D97-AF65-F5344CB8AC3E}">
-        <p14:creationId xmlns:p14="http://schemas.microsoft.com/office/powerpoint/2010/main" val="1738679576"/>
+        <p14:creationId xmlns:p14="http://schemas.microsoft.com/office/powerpoint/2010/main" val="236585482"/>
       </p:ext>
     </p:extLst>
   </p:cSld>
@@ -9706,7 +9706,7 @@
           <p:cNvPr id="10" name="Acceptance tests on real phones">
             <a:extLst xmlns:a="http://schemas.openxmlformats.org/drawingml/2006/main">
               <a:ext uri="{FF2B5EF4-FFF2-40B4-BE49-F238E27FC236}">
-                <a16:creationId xmlns:a16="http://schemas.microsoft.com/office/drawing/2014/main" id="{145E89EB-AB45-4F49-98D0-1C4B535C253C}"/>
+                <a16:creationId xmlns:a16="http://schemas.microsoft.com/office/drawing/2014/main" id="{0813D1DE-6347-4B38-85F6-2E563E426959}"/>
               </a:ext>
             </a:extLst>
           </p:cNvPr>
@@ -9864,7 +9864,7 @@
           <p:cNvPr id="2" name="12">
             <a:extLst xmlns:a="http://schemas.openxmlformats.org/drawingml/2006/main">
               <a:ext uri="{FF2B5EF4-FFF2-40B4-BE49-F238E27FC236}">
-                <a16:creationId xmlns:a16="http://schemas.microsoft.com/office/drawing/2014/main" id="{E17EA55D-34FB-4A1B-BE7B-9EB338EED4CB}"/>
+                <a16:creationId xmlns:a16="http://schemas.microsoft.com/office/drawing/2014/main" id="{E760D1BB-7EA3-4C3E-B20F-497CB68DCDD9}"/>
               </a:ext>
             </a:extLst>
           </p:cNvPr>
@@ -10022,7 +10022,7 @@
           <p:cNvPr id="3" name="Telephony">
             <a:extLst xmlns:a="http://schemas.openxmlformats.org/drawingml/2006/main">
               <a:ext uri="{FF2B5EF4-FFF2-40B4-BE49-F238E27FC236}">
-                <a16:creationId xmlns:a16="http://schemas.microsoft.com/office/drawing/2014/main" id="{07F0A8E6-4A22-4FE6-A772-847AFB48C2E7}"/>
+                <a16:creationId xmlns:a16="http://schemas.microsoft.com/office/drawing/2014/main" id="{F970A5A6-D068-40C8-96DA-A61AD18ED71C}"/>
               </a:ext>
             </a:extLst>
           </p:cNvPr>
@@ -10180,7 +10180,7 @@
           <p:cNvPr id="4" name="201 and 203: cross-phone audio, hold / transfer">
             <a:extLst xmlns:a="http://schemas.openxmlformats.org/drawingml/2006/main">
               <a:ext uri="{FF2B5EF4-FFF2-40B4-BE49-F238E27FC236}">
-                <a16:creationId xmlns:a16="http://schemas.microsoft.com/office/drawing/2014/main" id="{F8CD80F7-EDD9-43B0-8EA7-20BD309EB7B3}"/>
+                <a16:creationId xmlns:a16="http://schemas.microsoft.com/office/drawing/2014/main" id="{F89D4367-192A-41CF-A527-F6B5DF969386}"/>
               </a:ext>
             </a:extLst>
           </p:cNvPr>
@@ -10338,7 +10338,7 @@
           <p:cNvPr id="5" name="Home Assistant">
             <a:extLst xmlns:a="http://schemas.openxmlformats.org/drawingml/2006/main">
               <a:ext uri="{FF2B5EF4-FFF2-40B4-BE49-F238E27FC236}">
-                <a16:creationId xmlns:a16="http://schemas.microsoft.com/office/drawing/2014/main" id="{44FE1A50-F676-470E-A996-5485B1CAA9A5}"/>
+                <a16:creationId xmlns:a16="http://schemas.microsoft.com/office/drawing/2014/main" id="{B06DD50A-9001-49C8-83E1-7D2A232380E3}"/>
               </a:ext>
             </a:extLst>
           </p:cNvPr>
@@ -10496,7 +10496,7 @@
           <p:cNvPr id="6" name="States, Originate, Hangup on the correct Channel, DTMF">
             <a:extLst xmlns:a="http://schemas.openxmlformats.org/drawingml/2006/main">
               <a:ext uri="{FF2B5EF4-FFF2-40B4-BE49-F238E27FC236}">
-                <a16:creationId xmlns:a16="http://schemas.microsoft.com/office/drawing/2014/main" id="{A08ABB71-DBD0-4E6F-9ADE-6AACF6C3571A}"/>
+                <a16:creationId xmlns:a16="http://schemas.microsoft.com/office/drawing/2014/main" id="{7420FEDD-3541-4648-984C-5A0A9529B6E8}"/>
               </a:ext>
             </a:extLst>
           </p:cNvPr>
@@ -10654,7 +10654,7 @@
           <p:cNvPr id="7" name="Assist 630">
             <a:extLst xmlns:a="http://schemas.openxmlformats.org/drawingml/2006/main">
               <a:ext uri="{FF2B5EF4-FFF2-40B4-BE49-F238E27FC236}">
-                <a16:creationId xmlns:a16="http://schemas.microsoft.com/office/drawing/2014/main" id="{D977814E-1669-4CC0-A4EC-587D4A49DD31}"/>
+                <a16:creationId xmlns:a16="http://schemas.microsoft.com/office/drawing/2014/main" id="{FC6A8BF8-BDCA-416B-821E-C6E5DC721CC7}"/>
               </a:ext>
             </a:extLst>
           </p:cNvPr>
@@ -10812,7 +10812,7 @@
           <p:cNvPr id="8" name="Speech recognition, spoken reply and hangup">
             <a:extLst xmlns:a="http://schemas.openxmlformats.org/drawingml/2006/main">
               <a:ext uri="{FF2B5EF4-FFF2-40B4-BE49-F238E27FC236}">
-                <a16:creationId xmlns:a16="http://schemas.microsoft.com/office/drawing/2014/main" id="{733D2F4A-1911-4EBD-A796-9032F2ADA7F7}"/>
+                <a16:creationId xmlns:a16="http://schemas.microsoft.com/office/drawing/2014/main" id="{AF09562B-6925-4B39-853A-32AA036CA69D}"/>
               </a:ext>
             </a:extLst>
           </p:cNvPr>
@@ -10970,7 +10970,7 @@
           <p:cNvPr id="9" name="Repeat after phone, PBX and HA restarts. Readiness does not verif">
             <a:extLst xmlns:a="http://schemas.openxmlformats.org/drawingml/2006/main">
               <a:ext uri="{FF2B5EF4-FFF2-40B4-BE49-F238E27FC236}">
-                <a16:creationId xmlns:a16="http://schemas.microsoft.com/office/drawing/2014/main" id="{C53D19CD-FF33-4913-B396-361FBD3636DF}"/>
+                <a16:creationId xmlns:a16="http://schemas.microsoft.com/office/drawing/2014/main" id="{0588556C-6052-42D3-9829-11048A8139A7}"/>
               </a:ext>
             </a:extLst>
           </p:cNvPr>
@@ -11126,7 +11126,7 @@
     </p:spTree>
     <p:extLst>
       <p:ext uri="{BB962C8B-B14F-4D97-AF65-F5344CB8AC3E}">
-        <p14:creationId xmlns:p14="http://schemas.microsoft.com/office/powerpoint/2010/main" val="1234310202"/>
+        <p14:creationId xmlns:p14="http://schemas.microsoft.com/office/powerpoint/2010/main" val="215596244"/>
       </p:ext>
     </p:extLst>
   </p:cSld>
@@ -11157,7 +11157,7 @@
           <p:cNvPr id="8" name="Operations and recovery">
             <a:extLst xmlns:a="http://schemas.openxmlformats.org/drawingml/2006/main">
               <a:ext uri="{FF2B5EF4-FFF2-40B4-BE49-F238E27FC236}">
-                <a16:creationId xmlns:a16="http://schemas.microsoft.com/office/drawing/2014/main" id="{66D9B554-33E0-4414-9F84-B8027E7DAC99}"/>
+                <a16:creationId xmlns:a16="http://schemas.microsoft.com/office/drawing/2014/main" id="{C24D2E1C-F15A-447D-9AAD-7AEAF6AB38B0}"/>
               </a:ext>
             </a:extLst>
           </p:cNvPr>
@@ -11315,7 +11315,7 @@
           <p:cNvPr id="2" name="13">
             <a:extLst xmlns:a="http://schemas.openxmlformats.org/drawingml/2006/main">
               <a:ext uri="{FF2B5EF4-FFF2-40B4-BE49-F238E27FC236}">
-                <a16:creationId xmlns:a16="http://schemas.microsoft.com/office/drawing/2014/main" id="{2BF3AC90-0E33-404B-AC19-B860382B1E5F}"/>
+                <a16:creationId xmlns:a16="http://schemas.microsoft.com/office/drawing/2014/main" id="{39CEA8A3-79EE-4E69-AAB5-BA61A215941A}"/>
               </a:ext>
             </a:extLst>
           </p:cNvPr>
@@ -11473,7 +11473,7 @@
           <p:cNvPr id="3" name="Private backups outside Git">
             <a:extLst xmlns:a="http://schemas.openxmlformats.org/drawingml/2006/main">
               <a:ext uri="{FF2B5EF4-FFF2-40B4-BE49-F238E27FC236}">
-                <a16:creationId xmlns:a16="http://schemas.microsoft.com/office/drawing/2014/main" id="{5A9CF2D9-37BC-422D-A738-D5F0B37A2420}"/>
+                <a16:creationId xmlns:a16="http://schemas.microsoft.com/office/drawing/2014/main" id="{4B7A7CB4-E4DD-47B9-991D-ACC292E7AEB9}"/>
               </a:ext>
             </a:extLst>
           </p:cNvPr>
@@ -11631,7 +11631,7 @@
           <p:cNvPr id="4" name="Inventory, SIP / AMI secrets and Asterisk data&#10;HA config / .stora">
             <a:extLst xmlns:a="http://schemas.openxmlformats.org/drawingml/2006/main">
               <a:ext uri="{FF2B5EF4-FFF2-40B4-BE49-F238E27FC236}">
-                <a16:creationId xmlns:a16="http://schemas.microsoft.com/office/drawing/2014/main" id="{B59560AA-F9E3-4312-AE1C-F7C65A0673EA}"/>
+                <a16:creationId xmlns:a16="http://schemas.microsoft.com/office/drawing/2014/main" id="{9F419D33-F43D-4120-BF4C-9B4507D27DD5}"/>
               </a:ext>
             </a:extLst>
           </p:cNvPr>
@@ -11812,7 +11812,7 @@
           <p:cNvPr id="5" name="One node is a single point of failure">
             <a:extLst xmlns:a="http://schemas.openxmlformats.org/drawingml/2006/main">
               <a:ext uri="{FF2B5EF4-FFF2-40B4-BE49-F238E27FC236}">
-                <a16:creationId xmlns:a16="http://schemas.microsoft.com/office/drawing/2014/main" id="{DCF8BF93-8947-4604-A201-01750FBCD1C0}"/>
+                <a16:creationId xmlns:a16="http://schemas.microsoft.com/office/drawing/2014/main" id="{A4AEF8FD-E48A-496C-A91D-F5D89E15992E}"/>
               </a:ext>
             </a:extLst>
           </p:cNvPr>
@@ -11970,7 +11970,7 @@
           <p:cNvPr id="6" name="UPS for network equipment and the k3s node&#10;A recovery plan that p">
             <a:extLst xmlns:a="http://schemas.openxmlformats.org/drawingml/2006/main">
               <a:ext uri="{FF2B5EF4-FFF2-40B4-BE49-F238E27FC236}">
-                <a16:creationId xmlns:a16="http://schemas.microsoft.com/office/drawing/2014/main" id="{F8994F72-6232-49E7-9594-3734895D6DD8}"/>
+                <a16:creationId xmlns:a16="http://schemas.microsoft.com/office/drawing/2014/main" id="{A6324C31-EC18-45A8-8031-0111A43DA4D1}"/>
               </a:ext>
             </a:extLst>
           </p:cNvPr>
@@ -12151,7 +12151,7 @@
           <p:cNvPr id="7" name="Exclude raw DTMF and connected-line data from Recorder. Review ex">
             <a:extLst xmlns:a="http://schemas.openxmlformats.org/drawingml/2006/main">
               <a:ext uri="{FF2B5EF4-FFF2-40B4-BE49-F238E27FC236}">
-                <a16:creationId xmlns:a16="http://schemas.microsoft.com/office/drawing/2014/main" id="{BD93447F-F793-4B27-B31B-56F5DE1CB9F0}"/>
+                <a16:creationId xmlns:a16="http://schemas.microsoft.com/office/drawing/2014/main" id="{6D2EF800-D559-4199-9C23-B457779F2C5C}"/>
               </a:ext>
             </a:extLst>
           </p:cNvPr>
@@ -12307,7 +12307,7 @@
     </p:spTree>
     <p:extLst>
       <p:ext uri="{BB962C8B-B14F-4D97-AF65-F5344CB8AC3E}">
-        <p14:creationId xmlns:p14="http://schemas.microsoft.com/office/powerpoint/2010/main" val="1087590109"/>
+        <p14:creationId xmlns:p14="http://schemas.microsoft.com/office/powerpoint/2010/main" val="2146920185"/>
       </p:ext>
     </p:extLst>
   </p:cSld>
@@ -12338,7 +12338,7 @@
           <p:cNvPr id="8" name="Server readiness and phone acceptance">
             <a:extLst xmlns:a="http://schemas.openxmlformats.org/drawingml/2006/main">
               <a:ext uri="{FF2B5EF4-FFF2-40B4-BE49-F238E27FC236}">
-                <a16:creationId xmlns:a16="http://schemas.microsoft.com/office/drawing/2014/main" id="{27F81A1C-0ADA-4712-9E36-50087E6CCC97}"/>
+                <a16:creationId xmlns:a16="http://schemas.microsoft.com/office/drawing/2014/main" id="{1D4EC317-8460-4BA4-B4F2-D6623A211ACD}"/>
               </a:ext>
             </a:extLst>
           </p:cNvPr>
@@ -12496,7 +12496,7 @@
           <p:cNvPr id="2" name="14">
             <a:extLst xmlns:a="http://schemas.openxmlformats.org/drawingml/2006/main">
               <a:ext uri="{FF2B5EF4-FFF2-40B4-BE49-F238E27FC236}">
-                <a16:creationId xmlns:a16="http://schemas.microsoft.com/office/drawing/2014/main" id="{7CA63ED7-672C-4D25-B596-8C93648AA8AD}"/>
+                <a16:creationId xmlns:a16="http://schemas.microsoft.com/office/drawing/2014/main" id="{B619D9D5-8BFF-4E2F-B251-97FCEA260E51}"/>
               </a:ext>
             </a:extLst>
           </p:cNvPr>
@@ -12654,7 +12654,7 @@
           <p:cNvPr id="3" name="Server preparation can come first">
             <a:extLst xmlns:a="http://schemas.openxmlformats.org/drawingml/2006/main">
               <a:ext uri="{FF2B5EF4-FFF2-40B4-BE49-F238E27FC236}">
-                <a16:creationId xmlns:a16="http://schemas.microsoft.com/office/drawing/2014/main" id="{0FC45210-693C-477C-8ABF-5B4706F2C365}"/>
+                <a16:creationId xmlns:a16="http://schemas.microsoft.com/office/drawing/2014/main" id="{BDB36C04-971E-4008-852B-670F62310EB0}"/>
               </a:ext>
             </a:extLst>
           </p:cNvPr>
@@ -12812,7 +12812,7 @@
           <p:cNvPr id="4" name="Images, configuration, AMI and Opus&#10;Tests verify the server compo">
             <a:extLst xmlns:a="http://schemas.openxmlformats.org/drawingml/2006/main">
               <a:ext uri="{FF2B5EF4-FFF2-40B4-BE49-F238E27FC236}">
-                <a16:creationId xmlns:a16="http://schemas.microsoft.com/office/drawing/2014/main" id="{3ED6EB5A-5C7A-4A44-AB90-24EDBC6A5FB4}"/>
+                <a16:creationId xmlns:a16="http://schemas.microsoft.com/office/drawing/2014/main" id="{4587F99D-5664-45C1-9A4E-D7D4BE8E2AFE}"/>
               </a:ext>
             </a:extLst>
           </p:cNvPr>
@@ -12993,7 +12993,7 @@
           <p:cNvPr id="5" name="A pilot verifies the phone experience">
             <a:extLst xmlns:a="http://schemas.openxmlformats.org/drawingml/2006/main">
               <a:ext uri="{FF2B5EF4-FFF2-40B4-BE49-F238E27FC236}">
-                <a16:creationId xmlns:a16="http://schemas.microsoft.com/office/drawing/2014/main" id="{957DCA45-2C48-4949-B9C9-1F2A357A5051}"/>
+                <a16:creationId xmlns:a16="http://schemas.microsoft.com/office/drawing/2014/main" id="{3C08A8C3-3654-4625-83F8-692593B1B16A}"/>
               </a:ext>
             </a:extLst>
           </p:cNvPr>
@@ -13151,7 +13151,7 @@
           <p:cNvPr id="6" name="Phone inventory, a two-party call and Assist&#10;Add the remaining ph">
             <a:extLst xmlns:a="http://schemas.openxmlformats.org/drawingml/2006/main">
               <a:ext uri="{FF2B5EF4-FFF2-40B4-BE49-F238E27FC236}">
-                <a16:creationId xmlns:a16="http://schemas.microsoft.com/office/drawing/2014/main" id="{B660A870-89C5-4485-82D6-210BA062A043}"/>
+                <a16:creationId xmlns:a16="http://schemas.microsoft.com/office/drawing/2014/main" id="{CE7DE7C2-0A9B-4C0B-8874-2390F1CCC80B}"/>
               </a:ext>
             </a:extLst>
           </p:cNvPr>
@@ -13332,7 +13332,7 @@
           <p:cNvPr id="7" name="Physical acceptance is a separate step. Keep the results in the p">
             <a:extLst xmlns:a="http://schemas.openxmlformats.org/drawingml/2006/main">
               <a:ext uri="{FF2B5EF4-FFF2-40B4-BE49-F238E27FC236}">
-                <a16:creationId xmlns:a16="http://schemas.microsoft.com/office/drawing/2014/main" id="{AB4BE523-9165-4CCE-89EF-911357150053}"/>
+                <a16:creationId xmlns:a16="http://schemas.microsoft.com/office/drawing/2014/main" id="{A3F5C605-D3FE-43A2-8888-4BADFB7FCE96}"/>
               </a:ext>
             </a:extLst>
           </p:cNvPr>
@@ -13488,7 +13488,7 @@
     </p:spTree>
     <p:extLst>
       <p:ext uri="{BB962C8B-B14F-4D97-AF65-F5344CB8AC3E}">
-        <p14:creationId xmlns:p14="http://schemas.microsoft.com/office/powerpoint/2010/main" val="1077921682"/>
+        <p14:creationId xmlns:p14="http://schemas.microsoft.com/office/powerpoint/2010/main" val="533164249"/>
       </p:ext>
     </p:extLst>
   </p:cSld>
@@ -13519,7 +13519,7 @@
           <p:cNvPr id="18" name="Four phones, eight independent lines">
             <a:extLst xmlns:a="http://schemas.openxmlformats.org/drawingml/2006/main">
               <a:ext uri="{FF2B5EF4-FFF2-40B4-BE49-F238E27FC236}">
-                <a16:creationId xmlns:a16="http://schemas.microsoft.com/office/drawing/2014/main" id="{747D527D-432F-4667-A6A8-E2328D8EBD72}"/>
+                <a16:creationId xmlns:a16="http://schemas.microsoft.com/office/drawing/2014/main" id="{92DE0B55-07F4-4F6F-9073-101EA5E54ECB}"/>
               </a:ext>
             </a:extLst>
           </p:cNvPr>
@@ -13677,7 +13677,7 @@
           <p:cNvPr id="2" name="15">
             <a:extLst xmlns:a="http://schemas.openxmlformats.org/drawingml/2006/main">
               <a:ext uri="{FF2B5EF4-FFF2-40B4-BE49-F238E27FC236}">
-                <a16:creationId xmlns:a16="http://schemas.microsoft.com/office/drawing/2014/main" id="{AAE457C8-3367-4130-9740-A49A9ECFACF9}"/>
+                <a16:creationId xmlns:a16="http://schemas.microsoft.com/office/drawing/2014/main" id="{6F28F66C-7D1C-4DFD-82F2-D559493F497B}"/>
               </a:ext>
             </a:extLst>
           </p:cNvPr>
@@ -13835,7 +13835,7 @@
           <p:cNvPr id="3" name="PHONE A">
             <a:extLst xmlns:a="http://schemas.openxmlformats.org/drawingml/2006/main">
               <a:ext uri="{FF2B5EF4-FFF2-40B4-BE49-F238E27FC236}">
-                <a16:creationId xmlns:a16="http://schemas.microsoft.com/office/drawing/2014/main" id="{FB219DBB-4F69-4314-A898-0FEBE9C764F9}"/>
+                <a16:creationId xmlns:a16="http://schemas.microsoft.com/office/drawing/2014/main" id="{4C1F95C6-2081-4256-A952-2FEFBF8380AB}"/>
               </a:ext>
             </a:extLst>
           </p:cNvPr>
@@ -13993,7 +13993,7 @@
           <p:cNvPr id="4" name="201">
             <a:extLst xmlns:a="http://schemas.openxmlformats.org/drawingml/2006/main">
               <a:ext uri="{FF2B5EF4-FFF2-40B4-BE49-F238E27FC236}">
-                <a16:creationId xmlns:a16="http://schemas.microsoft.com/office/drawing/2014/main" id="{3DD23062-F32B-46A5-B3E0-8D0A04689633}"/>
+                <a16:creationId xmlns:a16="http://schemas.microsoft.com/office/drawing/2014/main" id="{65C060EC-C8CE-47B9-9F62-3E6D9A783578}"/>
               </a:ext>
             </a:extLst>
           </p:cNvPr>
@@ -14151,7 +14151,7 @@
           <p:cNvPr id="5" name="202">
             <a:extLst xmlns:a="http://schemas.openxmlformats.org/drawingml/2006/main">
               <a:ext uri="{FF2B5EF4-FFF2-40B4-BE49-F238E27FC236}">
-                <a16:creationId xmlns:a16="http://schemas.microsoft.com/office/drawing/2014/main" id="{B17C04FC-AF24-4355-B645-B3F8EABA7A2B}"/>
+                <a16:creationId xmlns:a16="http://schemas.microsoft.com/office/drawing/2014/main" id="{266BC443-27EF-4597-9AF3-86FF0606F56C}"/>
               </a:ext>
             </a:extLst>
           </p:cNvPr>
@@ -14309,7 +14309,7 @@
           <p:cNvPr id="6" name="PHONE B">
             <a:extLst xmlns:a="http://schemas.openxmlformats.org/drawingml/2006/main">
               <a:ext uri="{FF2B5EF4-FFF2-40B4-BE49-F238E27FC236}">
-                <a16:creationId xmlns:a16="http://schemas.microsoft.com/office/drawing/2014/main" id="{AF6BCB42-3C65-49B2-980D-AE4F1A5F6AAF}"/>
+                <a16:creationId xmlns:a16="http://schemas.microsoft.com/office/drawing/2014/main" id="{8CED992B-42B6-4090-B588-83B6A98F8166}"/>
               </a:ext>
             </a:extLst>
           </p:cNvPr>
@@ -14467,7 +14467,7 @@
           <p:cNvPr id="7" name="203">
             <a:extLst xmlns:a="http://schemas.openxmlformats.org/drawingml/2006/main">
               <a:ext uri="{FF2B5EF4-FFF2-40B4-BE49-F238E27FC236}">
-                <a16:creationId xmlns:a16="http://schemas.microsoft.com/office/drawing/2014/main" id="{5CD603FC-6A7B-40C4-A365-403A8AEFF700}"/>
+                <a16:creationId xmlns:a16="http://schemas.microsoft.com/office/drawing/2014/main" id="{B8C81212-CCD8-47E0-9EBA-9648071DA55E}"/>
               </a:ext>
             </a:extLst>
           </p:cNvPr>
@@ -14625,7 +14625,7 @@
           <p:cNvPr id="8" name="204">
             <a:extLst xmlns:a="http://schemas.openxmlformats.org/drawingml/2006/main">
               <a:ext uri="{FF2B5EF4-FFF2-40B4-BE49-F238E27FC236}">
-                <a16:creationId xmlns:a16="http://schemas.microsoft.com/office/drawing/2014/main" id="{D61FC127-F71A-4EAB-ACA0-D29B6159D86B}"/>
+                <a16:creationId xmlns:a16="http://schemas.microsoft.com/office/drawing/2014/main" id="{8E504E36-2B64-4661-B86F-01894489F64C}"/>
               </a:ext>
             </a:extLst>
           </p:cNvPr>
@@ -14783,7 +14783,7 @@
           <p:cNvPr id="9" name="PHONE C">
             <a:extLst xmlns:a="http://schemas.openxmlformats.org/drawingml/2006/main">
               <a:ext uri="{FF2B5EF4-FFF2-40B4-BE49-F238E27FC236}">
-                <a16:creationId xmlns:a16="http://schemas.microsoft.com/office/drawing/2014/main" id="{258D6F67-9C5A-4D71-B8E8-45AAE0973C6A}"/>
+                <a16:creationId xmlns:a16="http://schemas.microsoft.com/office/drawing/2014/main" id="{2B73034C-F59B-4534-9AF6-83725E64A983}"/>
               </a:ext>
             </a:extLst>
           </p:cNvPr>
@@ -14941,7 +14941,7 @@
           <p:cNvPr id="10" name="205">
             <a:extLst xmlns:a="http://schemas.openxmlformats.org/drawingml/2006/main">
               <a:ext uri="{FF2B5EF4-FFF2-40B4-BE49-F238E27FC236}">
-                <a16:creationId xmlns:a16="http://schemas.microsoft.com/office/drawing/2014/main" id="{EB42C512-FA0C-4A9D-A388-BDDC679729AC}"/>
+                <a16:creationId xmlns:a16="http://schemas.microsoft.com/office/drawing/2014/main" id="{4A9775FA-AE2C-4BAD-ADF7-F281E9936932}"/>
               </a:ext>
             </a:extLst>
           </p:cNvPr>
@@ -15099,7 +15099,7 @@
           <p:cNvPr id="11" name="206">
             <a:extLst xmlns:a="http://schemas.openxmlformats.org/drawingml/2006/main">
               <a:ext uri="{FF2B5EF4-FFF2-40B4-BE49-F238E27FC236}">
-                <a16:creationId xmlns:a16="http://schemas.microsoft.com/office/drawing/2014/main" id="{0F81837F-FA0F-462F-944B-7695A7F1BD73}"/>
+                <a16:creationId xmlns:a16="http://schemas.microsoft.com/office/drawing/2014/main" id="{FB6EF497-BAC4-42BE-A94E-6AAAE8A91148}"/>
               </a:ext>
             </a:extLst>
           </p:cNvPr>
@@ -15257,7 +15257,7 @@
           <p:cNvPr id="12" name="PHONE D">
             <a:extLst xmlns:a="http://schemas.openxmlformats.org/drawingml/2006/main">
               <a:ext uri="{FF2B5EF4-FFF2-40B4-BE49-F238E27FC236}">
-                <a16:creationId xmlns:a16="http://schemas.microsoft.com/office/drawing/2014/main" id="{9AF870F0-56CB-4885-81EE-E078976DBC34}"/>
+                <a16:creationId xmlns:a16="http://schemas.microsoft.com/office/drawing/2014/main" id="{9FF49ACD-1BFA-4F7E-8A72-E25C4936FDE5}"/>
               </a:ext>
             </a:extLst>
           </p:cNvPr>
@@ -15415,7 +15415,7 @@
           <p:cNvPr id="13" name="207">
             <a:extLst xmlns:a="http://schemas.openxmlformats.org/drawingml/2006/main">
               <a:ext uri="{FF2B5EF4-FFF2-40B4-BE49-F238E27FC236}">
-                <a16:creationId xmlns:a16="http://schemas.microsoft.com/office/drawing/2014/main" id="{F413BDCD-4A1D-4707-89D8-B42D145D5624}"/>
+                <a16:creationId xmlns:a16="http://schemas.microsoft.com/office/drawing/2014/main" id="{741267F3-6078-4189-BCBB-4B6B4A9B8BEF}"/>
               </a:ext>
             </a:extLst>
           </p:cNvPr>
@@ -15573,7 +15573,7 @@
           <p:cNvPr id="14" name="208">
             <a:extLst xmlns:a="http://schemas.openxmlformats.org/drawingml/2006/main">
               <a:ext uri="{FF2B5EF4-FFF2-40B4-BE49-F238E27FC236}">
-                <a16:creationId xmlns:a16="http://schemas.microsoft.com/office/drawing/2014/main" id="{CF1F7962-A1EE-4CAD-AD41-42CF02C7CD51}"/>
+                <a16:creationId xmlns:a16="http://schemas.microsoft.com/office/drawing/2014/main" id="{5B797D5E-1BC1-4F62-915D-C1573602126D}"/>
               </a:ext>
             </a:extLst>
           </p:cNvPr>
@@ -15731,7 +15731,7 @@
           <p:cNvPr id="15" name="620 rings the primary line of each phone">
             <a:extLst xmlns:a="http://schemas.openxmlformats.org/drawingml/2006/main">
               <a:ext uri="{FF2B5EF4-FFF2-40B4-BE49-F238E27FC236}">
-                <a16:creationId xmlns:a16="http://schemas.microsoft.com/office/drawing/2014/main" id="{C6E49998-E763-4760-A036-CA4FFAB467DE}"/>
+                <a16:creationId xmlns:a16="http://schemas.microsoft.com/office/drawing/2014/main" id="{5827F399-1889-44AA-A44F-C58B675EAF4E}"/>
               </a:ext>
             </a:extLst>
           </p:cNvPr>
@@ -15889,7 +15889,7 @@
           <p:cNvPr id="16" name="201, 203, 205 and 207 share the group. DND skips that phone.">
             <a:extLst xmlns:a="http://schemas.openxmlformats.org/drawingml/2006/main">
               <a:ext uri="{FF2B5EF4-FFF2-40B4-BE49-F238E27FC236}">
-                <a16:creationId xmlns:a16="http://schemas.microsoft.com/office/drawing/2014/main" id="{21F63598-8156-4707-98A9-8DC93793ABEF}"/>
+                <a16:creationId xmlns:a16="http://schemas.microsoft.com/office/drawing/2014/main" id="{109A847C-3482-4979-BFB0-265FEB722652}"/>
               </a:ext>
             </a:extLst>
           </p:cNvPr>
@@ -16047,7 +16047,7 @@
           <p:cNvPr id="17" name="Eight registrations and local call checks passed. Broader accepta">
             <a:extLst xmlns:a="http://schemas.openxmlformats.org/drawingml/2006/main">
               <a:ext uri="{FF2B5EF4-FFF2-40B4-BE49-F238E27FC236}">
-                <a16:creationId xmlns:a16="http://schemas.microsoft.com/office/drawing/2014/main" id="{F4F02B15-BCB0-40E8-82B5-F8591EBB1776}"/>
+                <a16:creationId xmlns:a16="http://schemas.microsoft.com/office/drawing/2014/main" id="{B7599784-F8FE-4E02-91A5-C5E323882FE3}"/>
               </a:ext>
             </a:extLst>
           </p:cNvPr>
@@ -16203,7 +16203,7 @@
     </p:spTree>
     <p:extLst>
       <p:ext uri="{BB962C8B-B14F-4D97-AF65-F5344CB8AC3E}">
-        <p14:creationId xmlns:p14="http://schemas.microsoft.com/office/powerpoint/2010/main" val="1527900855"/>
+        <p14:creationId xmlns:p14="http://schemas.microsoft.com/office/powerpoint/2010/main" val="1684131079"/>
       </p:ext>
     </p:extLst>
   </p:cSld>
@@ -16234,7 +16234,7 @@
           <p:cNvPr id="14" name="Home Assistant phone controls">
             <a:extLst xmlns:a="http://schemas.openxmlformats.org/drawingml/2006/main">
               <a:ext uri="{FF2B5EF4-FFF2-40B4-BE49-F238E27FC236}">
-                <a16:creationId xmlns:a16="http://schemas.microsoft.com/office/drawing/2014/main" id="{F1EEDC7D-A2B7-403D-A507-E85E3E0D5F2C}"/>
+                <a16:creationId xmlns:a16="http://schemas.microsoft.com/office/drawing/2014/main" id="{28644324-7B9D-4D14-86D1-0A58BBBAD2A1}"/>
               </a:ext>
             </a:extLst>
           </p:cNvPr>
@@ -16392,7 +16392,7 @@
           <p:cNvPr id="2" name="16">
             <a:extLst xmlns:a="http://schemas.openxmlformats.org/drawingml/2006/main">
               <a:ext uri="{FF2B5EF4-FFF2-40B4-BE49-F238E27FC236}">
-                <a16:creationId xmlns:a16="http://schemas.microsoft.com/office/drawing/2014/main" id="{06C533A9-E065-46DE-9CAD-FADEAF95E508}"/>
+                <a16:creationId xmlns:a16="http://schemas.microsoft.com/office/drawing/2014/main" id="{15F6AA9C-8FC1-4A4D-9403-CD8B77CD6B5B}"/>
               </a:ext>
             </a:extLst>
           </p:cNvPr>
@@ -16550,7 +16550,7 @@
           <p:cNvPr id="3" name="120">
             <a:extLst xmlns:a="http://schemas.openxmlformats.org/drawingml/2006/main">
               <a:ext uri="{FF2B5EF4-FFF2-40B4-BE49-F238E27FC236}">
-                <a16:creationId xmlns:a16="http://schemas.microsoft.com/office/drawing/2014/main" id="{197DFAF6-F3F5-4DB5-B1EA-7A27DFCF1D2A}"/>
+                <a16:creationId xmlns:a16="http://schemas.microsoft.com/office/drawing/2014/main" id="{79B8E6BD-7875-46B2-B624-25559C27037C}"/>
               </a:ext>
             </a:extLst>
           </p:cNvPr>
@@ -16708,7 +16708,7 @@
           <p:cNvPr id="4" name="control entities">
             <a:extLst xmlns:a="http://schemas.openxmlformats.org/drawingml/2006/main">
               <a:ext uri="{FF2B5EF4-FFF2-40B4-BE49-F238E27FC236}">
-                <a16:creationId xmlns:a16="http://schemas.microsoft.com/office/drawing/2014/main" id="{0BD76EA1-094C-4FF4-B5B2-49422E928A5D}"/>
+                <a16:creationId xmlns:a16="http://schemas.microsoft.com/office/drawing/2014/main" id="{A02195AA-96DF-40BD-8195-AAFD0E271115}"/>
               </a:ext>
             </a:extLst>
           </p:cNvPr>
@@ -16866,7 +16866,7 @@
           <p:cNvPr id="5" name="Call controls">
             <a:extLst xmlns:a="http://schemas.openxmlformats.org/drawingml/2006/main">
               <a:ext uri="{FF2B5EF4-FFF2-40B4-BE49-F238E27FC236}">
-                <a16:creationId xmlns:a16="http://schemas.microsoft.com/office/drawing/2014/main" id="{0D81A9BB-0BD7-4EAF-B500-1FEACA944D86}"/>
+                <a16:creationId xmlns:a16="http://schemas.microsoft.com/office/drawing/2014/main" id="{0EBF8A80-362D-4E66-AD24-3E95EB1AF420}"/>
               </a:ext>
             </a:extLst>
           </p:cNvPr>
@@ -17024,7 +17024,7 @@
           <p:cNvPr id="6" name="Line, dial, answer and exact-channel hangup">
             <a:extLst xmlns:a="http://schemas.openxmlformats.org/drawingml/2006/main">
               <a:ext uri="{FF2B5EF4-FFF2-40B4-BE49-F238E27FC236}">
-                <a16:creationId xmlns:a16="http://schemas.microsoft.com/office/drawing/2014/main" id="{B0E28669-BD1C-4456-900A-A02D16A3AA63}"/>
+                <a16:creationId xmlns:a16="http://schemas.microsoft.com/office/drawing/2014/main" id="{6638CFEA-10DA-4389-8968-B7E0C3D61041}"/>
               </a:ext>
             </a:extLst>
           </p:cNvPr>
@@ -17182,7 +17182,7 @@
           <p:cNvPr id="7" name="Personal settings">
             <a:extLst xmlns:a="http://schemas.openxmlformats.org/drawingml/2006/main">
               <a:ext uri="{FF2B5EF4-FFF2-40B4-BE49-F238E27FC236}">
-                <a16:creationId xmlns:a16="http://schemas.microsoft.com/office/drawing/2014/main" id="{2F4FF31A-C264-4BF9-B930-A159418F6914}"/>
+                <a16:creationId xmlns:a16="http://schemas.microsoft.com/office/drawing/2014/main" id="{F69BD520-71A4-4D54-BAB4-11B5D8A89682}"/>
               </a:ext>
             </a:extLst>
           </p:cNvPr>
@@ -17340,7 +17340,7 @@
           <p:cNvPr id="8" name="PBX DND and opt-in gateway auto-answer">
             <a:extLst xmlns:a="http://schemas.openxmlformats.org/drawingml/2006/main">
               <a:ext uri="{FF2B5EF4-FFF2-40B4-BE49-F238E27FC236}">
-                <a16:creationId xmlns:a16="http://schemas.microsoft.com/office/drawing/2014/main" id="{3076B0C3-1AFE-4159-92C7-B43F8A237577}"/>
+                <a16:creationId xmlns:a16="http://schemas.microsoft.com/office/drawing/2014/main" id="{9B106CB0-A83E-492A-8663-1CF42DFE459C}"/>
               </a:ext>
             </a:extLst>
           </p:cNvPr>
@@ -17498,7 +17498,7 @@
           <p:cNvPr id="9" name="Schedules">
             <a:extLst xmlns:a="http://schemas.openxmlformats.org/drawingml/2006/main">
               <a:ext uri="{FF2B5EF4-FFF2-40B4-BE49-F238E27FC236}">
-                <a16:creationId xmlns:a16="http://schemas.microsoft.com/office/drawing/2014/main" id="{D132E6A3-1442-44E4-A75B-B088B5D92484}"/>
+                <a16:creationId xmlns:a16="http://schemas.microsoft.com/office/drawing/2014/main" id="{D161E8CF-C32E-454B-812A-8DF88EA3823D}"/>
               </a:ext>
             </a:extLst>
           </p:cNvPr>
@@ -17656,7 +17656,7 @@
           <p:cNvPr id="10" name="Countdown timers and chosen weekdays">
             <a:extLst xmlns:a="http://schemas.openxmlformats.org/drawingml/2006/main">
               <a:ext uri="{FF2B5EF4-FFF2-40B4-BE49-F238E27FC236}">
-                <a16:creationId xmlns:a16="http://schemas.microsoft.com/office/drawing/2014/main" id="{55E1EC13-2947-4E0A-98C3-E3510D96D25B}"/>
+                <a16:creationId xmlns:a16="http://schemas.microsoft.com/office/drawing/2014/main" id="{9E6F3904-0B86-4A92-92D8-A2850A284335}"/>
               </a:ext>
             </a:extLst>
           </p:cNvPr>
@@ -17814,7 +17814,7 @@
           <p:cNvPr id="11" name="Phone screen">
             <a:extLst xmlns:a="http://schemas.openxmlformats.org/drawingml/2006/main">
               <a:ext uri="{FF2B5EF4-FFF2-40B4-BE49-F238E27FC236}">
-                <a16:creationId xmlns:a16="http://schemas.microsoft.com/office/drawing/2014/main" id="{FC9E81FD-92EA-4945-9B12-8D2D7D4327D7}"/>
+                <a16:creationId xmlns:a16="http://schemas.microsoft.com/office/drawing/2014/main" id="{E6EEE2C3-6CF7-4387-99AD-E35A849673DA}"/>
               </a:ext>
             </a:extLst>
           </p:cNvPr>
@@ -17972,7 +17972,7 @@
           <p:cNvPr id="12" name="Authenticated text and approved images">
             <a:extLst xmlns:a="http://schemas.openxmlformats.org/drawingml/2006/main">
               <a:ext uri="{FF2B5EF4-FFF2-40B4-BE49-F238E27FC236}">
-                <a16:creationId xmlns:a16="http://schemas.microsoft.com/office/drawing/2014/main" id="{18468E00-9279-43A0-8D7C-BCD1DA5C9042}"/>
+                <a16:creationId xmlns:a16="http://schemas.microsoft.com/office/drawing/2014/main" id="{590D4A54-E437-47B5-A7D1-B5C0F8E5D38E}"/>
               </a:ext>
             </a:extLst>
           </p:cNvPr>
@@ -18130,7 +18130,7 @@
           <p:cNvPr id="13" name="Fresh call-state checks protect active calls. Live feature accept">
             <a:extLst xmlns:a="http://schemas.openxmlformats.org/drawingml/2006/main">
               <a:ext uri="{FF2B5EF4-FFF2-40B4-BE49-F238E27FC236}">
-                <a16:creationId xmlns:a16="http://schemas.microsoft.com/office/drawing/2014/main" id="{1411F88B-6FCC-47AC-9CCB-AEFFDE73DC9B}"/>
+                <a16:creationId xmlns:a16="http://schemas.microsoft.com/office/drawing/2014/main" id="{11D10C55-AD3E-4495-8E60-686CEB7F7B3B}"/>
               </a:ext>
             </a:extLst>
           </p:cNvPr>
@@ -18286,7 +18286,7 @@
     </p:spTree>
     <p:extLst>
       <p:ext uri="{BB962C8B-B14F-4D97-AF65-F5344CB8AC3E}">
-        <p14:creationId xmlns:p14="http://schemas.microsoft.com/office/powerpoint/2010/main" val="248565774"/>
+        <p14:creationId xmlns:p14="http://schemas.microsoft.com/office/powerpoint/2010/main" val="2027182359"/>
       </p:ext>
     </p:extLst>
   </p:cSld>
@@ -18317,7 +18317,7 @@
           <p:cNvPr id="22" name="Radio and scheduled calls">
             <a:extLst xmlns:a="http://schemas.openxmlformats.org/drawingml/2006/main">
               <a:ext uri="{FF2B5EF4-FFF2-40B4-BE49-F238E27FC236}">
-                <a16:creationId xmlns:a16="http://schemas.microsoft.com/office/drawing/2014/main" id="{452AE017-3F92-4468-9429-37E61EDC6A15}"/>
+                <a16:creationId xmlns:a16="http://schemas.microsoft.com/office/drawing/2014/main" id="{D035768D-6740-448F-BA32-71976397E813}"/>
               </a:ext>
             </a:extLst>
           </p:cNvPr>
@@ -18475,7 +18475,7 @@
           <p:cNvPr id="2" name="17">
             <a:extLst xmlns:a="http://schemas.openxmlformats.org/drawingml/2006/main">
               <a:ext uri="{FF2B5EF4-FFF2-40B4-BE49-F238E27FC236}">
-                <a16:creationId xmlns:a16="http://schemas.microsoft.com/office/drawing/2014/main" id="{802ECCDA-3B08-471B-ABC4-EBA233C61585}"/>
+                <a16:creationId xmlns:a16="http://schemas.microsoft.com/office/drawing/2014/main" id="{A0EF1DD5-3CFA-49A9-BB1B-16D4C65382C0}"/>
               </a:ext>
             </a:extLst>
           </p:cNvPr>
@@ -18633,7 +18633,7 @@
           <p:cNvPr id="3" name="640">
             <a:extLst xmlns:a="http://schemas.openxmlformats.org/drawingml/2006/main">
               <a:ext uri="{FF2B5EF4-FFF2-40B4-BE49-F238E27FC236}">
-                <a16:creationId xmlns:a16="http://schemas.microsoft.com/office/drawing/2014/main" id="{296F091D-BA7A-4F47-8BAA-54B2380C01B7}"/>
+                <a16:creationId xmlns:a16="http://schemas.microsoft.com/office/drawing/2014/main" id="{72805B55-24BF-47FC-9981-9C503513616A}"/>
               </a:ext>
             </a:extLst>
           </p:cNvPr>
@@ -18791,7 +18791,7 @@
           <p:cNvPr id="4" name="Alarm tone">
             <a:extLst xmlns:a="http://schemas.openxmlformats.org/drawingml/2006/main">
               <a:ext uri="{FF2B5EF4-FFF2-40B4-BE49-F238E27FC236}">
-                <a16:creationId xmlns:a16="http://schemas.microsoft.com/office/drawing/2014/main" id="{0E8D01B1-4DC1-4159-9149-744EC828EEC4}"/>
+                <a16:creationId xmlns:a16="http://schemas.microsoft.com/office/drawing/2014/main" id="{53FAE97A-7022-4C25-AA4F-D211BC20AB3D}"/>
               </a:ext>
             </a:extLst>
           </p:cNvPr>
@@ -18949,7 +18949,7 @@
           <p:cNvPr id="5" name="Up to 30 seconds&#10;Ends after playback">
             <a:extLst xmlns:a="http://schemas.openxmlformats.org/drawingml/2006/main">
               <a:ext uri="{FF2B5EF4-FFF2-40B4-BE49-F238E27FC236}">
-                <a16:creationId xmlns:a16="http://schemas.microsoft.com/office/drawing/2014/main" id="{BC9BB4CD-B142-4FAA-ABF6-B409A28B7242}"/>
+                <a16:creationId xmlns:a16="http://schemas.microsoft.com/office/drawing/2014/main" id="{0C192520-3D40-4882-B0A5-8CDC1E62D4BB}"/>
               </a:ext>
             </a:extLst>
           </p:cNvPr>
@@ -19130,7 +19130,7 @@
           <p:cNvPr id="6" name="Radio fetches only&#10;during an active call">
             <a:extLst xmlns:a="http://schemas.openxmlformats.org/drawingml/2006/main">
               <a:ext uri="{FF2B5EF4-FFF2-40B4-BE49-F238E27FC236}">
-                <a16:creationId xmlns:a16="http://schemas.microsoft.com/office/drawing/2014/main" id="{64207CBA-38D8-4439-90A6-8F33AB7AC76D}"/>
+                <a16:creationId xmlns:a16="http://schemas.microsoft.com/office/drawing/2014/main" id="{F638EE0F-AAA4-4DA7-A20C-62941903FCB0}"/>
               </a:ext>
             </a:extLst>
           </p:cNvPr>
@@ -19311,7 +19311,7 @@
           <p:cNvPr id="7" name="701">
             <a:extLst xmlns:a="http://schemas.openxmlformats.org/drawingml/2006/main">
               <a:ext uri="{FF2B5EF4-FFF2-40B4-BE49-F238E27FC236}">
-                <a16:creationId xmlns:a16="http://schemas.microsoft.com/office/drawing/2014/main" id="{1EE1A28A-4514-4B32-9879-BD27B9AAB192}"/>
+                <a16:creationId xmlns:a16="http://schemas.microsoft.com/office/drawing/2014/main" id="{F3F07658-52B5-4475-BAF7-B18C6584199B}"/>
               </a:ext>
             </a:extLst>
           </p:cNvPr>
@@ -19469,7 +19469,7 @@
           <p:cNvPr id="8" name="Matryoshka Radio">
             <a:extLst xmlns:a="http://schemas.openxmlformats.org/drawingml/2006/main">
               <a:ext uri="{FF2B5EF4-FFF2-40B4-BE49-F238E27FC236}">
-                <a16:creationId xmlns:a16="http://schemas.microsoft.com/office/drawing/2014/main" id="{E9AB9DEF-E16B-4FDE-98C9-CF0D70123491}"/>
+                <a16:creationId xmlns:a16="http://schemas.microsoft.com/office/drawing/2014/main" id="{3BD1E7F5-3342-4FDF-8231-ECAC9FE947BD}"/>
               </a:ext>
             </a:extLst>
           </p:cNvPr>
@@ -19627,7 +19627,7 @@
           <p:cNvPr id="9" name="702">
             <a:extLst xmlns:a="http://schemas.openxmlformats.org/drawingml/2006/main">
               <a:ext uri="{FF2B5EF4-FFF2-40B4-BE49-F238E27FC236}">
-                <a16:creationId xmlns:a16="http://schemas.microsoft.com/office/drawing/2014/main" id="{35C8FA89-5C16-493E-B34F-7C44A9088B88}"/>
+                <a16:creationId xmlns:a16="http://schemas.microsoft.com/office/drawing/2014/main" id="{B605D583-7831-4A66-A976-E9CE7AEB6FAA}"/>
               </a:ext>
             </a:extLst>
           </p:cNvPr>
@@ -19785,7 +19785,7 @@
           <p:cNvPr id="10" name="Echo online">
             <a:extLst xmlns:a="http://schemas.openxmlformats.org/drawingml/2006/main">
               <a:ext uri="{FF2B5EF4-FFF2-40B4-BE49-F238E27FC236}">
-                <a16:creationId xmlns:a16="http://schemas.microsoft.com/office/drawing/2014/main" id="{1167695B-40D5-4049-B7FF-D86D8A11D113}"/>
+                <a16:creationId xmlns:a16="http://schemas.microsoft.com/office/drawing/2014/main" id="{4D71E6D1-49C2-4ABE-B958-A6472BA39C82}"/>
               </a:ext>
             </a:extLst>
           </p:cNvPr>
@@ -19943,7 +19943,7 @@
           <p:cNvPr id="11" name="703">
             <a:extLst xmlns:a="http://schemas.openxmlformats.org/drawingml/2006/main">
               <a:ext uri="{FF2B5EF4-FFF2-40B4-BE49-F238E27FC236}">
-                <a16:creationId xmlns:a16="http://schemas.microsoft.com/office/drawing/2014/main" id="{0711F97F-2408-4D7E-B89B-4EEBCE112492}"/>
+                <a16:creationId xmlns:a16="http://schemas.microsoft.com/office/drawing/2014/main" id="{D4E68F28-4B0E-45A6-A0C4-6050888E2655}"/>
               </a:ext>
             </a:extLst>
           </p:cNvPr>
@@ -20101,7 +20101,7 @@
           <p:cNvPr id="12" name="RADIO BOB! Rock">
             <a:extLst xmlns:a="http://schemas.openxmlformats.org/drawingml/2006/main">
               <a:ext uri="{FF2B5EF4-FFF2-40B4-BE49-F238E27FC236}">
-                <a16:creationId xmlns:a16="http://schemas.microsoft.com/office/drawing/2014/main" id="{F194194D-6BAF-4055-B290-E29A6B7B3C97}"/>
+                <a16:creationId xmlns:a16="http://schemas.microsoft.com/office/drawing/2014/main" id="{D8C7ACD4-4132-435B-8341-995FFB13FF8F}"/>
               </a:ext>
             </a:extLst>
           </p:cNvPr>
@@ -20259,7 +20259,7 @@
           <p:cNvPr id="13" name="704">
             <a:extLst xmlns:a="http://schemas.openxmlformats.org/drawingml/2006/main">
               <a:ext uri="{FF2B5EF4-FFF2-40B4-BE49-F238E27FC236}">
-                <a16:creationId xmlns:a16="http://schemas.microsoft.com/office/drawing/2014/main" id="{2D4293F1-3AF2-44E5-8AD7-0CF660BB0379}"/>
+                <a16:creationId xmlns:a16="http://schemas.microsoft.com/office/drawing/2014/main" id="{55B181AB-55A7-4807-93A5-C892ABDAF286}"/>
               </a:ext>
             </a:extLst>
           </p:cNvPr>
@@ -20417,7 +20417,7 @@
           <p:cNvPr id="14" name="RADIO BOB! Metal">
             <a:extLst xmlns:a="http://schemas.openxmlformats.org/drawingml/2006/main">
               <a:ext uri="{FF2B5EF4-FFF2-40B4-BE49-F238E27FC236}">
-                <a16:creationId xmlns:a16="http://schemas.microsoft.com/office/drawing/2014/main" id="{510F2BCA-995B-4D6E-A1C8-14CB20A0A177}"/>
+                <a16:creationId xmlns:a16="http://schemas.microsoft.com/office/drawing/2014/main" id="{AF6FBB85-D39C-4414-A862-4E46B253CDC1}"/>
               </a:ext>
             </a:extLst>
           </p:cNvPr>
@@ -20575,7 +20575,7 @@
           <p:cNvPr id="15" name="705">
             <a:extLst xmlns:a="http://schemas.openxmlformats.org/drawingml/2006/main">
               <a:ext uri="{FF2B5EF4-FFF2-40B4-BE49-F238E27FC236}">
-                <a16:creationId xmlns:a16="http://schemas.microsoft.com/office/drawing/2014/main" id="{817005B0-3A9F-42E6-B503-D2F2B253DDBF}"/>
+                <a16:creationId xmlns:a16="http://schemas.microsoft.com/office/drawing/2014/main" id="{1024FEBF-3033-4230-9865-C7AB5EA7C7C2}"/>
               </a:ext>
             </a:extLst>
           </p:cNvPr>
@@ -20733,7 +20733,7 @@
           <p:cNvPr id="16" name="RADIO BOB! Gothic">
             <a:extLst xmlns:a="http://schemas.openxmlformats.org/drawingml/2006/main">
               <a:ext uri="{FF2B5EF4-FFF2-40B4-BE49-F238E27FC236}">
-                <a16:creationId xmlns:a16="http://schemas.microsoft.com/office/drawing/2014/main" id="{34D6686F-C23D-4F8D-817D-622872EDD7B7}"/>
+                <a16:creationId xmlns:a16="http://schemas.microsoft.com/office/drawing/2014/main" id="{218B0684-2BB5-4187-9C00-D304099AA120}"/>
               </a:ext>
             </a:extLst>
           </p:cNvPr>
@@ -20891,7 +20891,7 @@
           <p:cNvPr id="17" name="706">
             <a:extLst xmlns:a="http://schemas.openxmlformats.org/drawingml/2006/main">
               <a:ext uri="{FF2B5EF4-FFF2-40B4-BE49-F238E27FC236}">
-                <a16:creationId xmlns:a16="http://schemas.microsoft.com/office/drawing/2014/main" id="{75890F9C-B604-4D85-A554-152CFA492B12}"/>
+                <a16:creationId xmlns:a16="http://schemas.microsoft.com/office/drawing/2014/main" id="{5F43D29D-1D79-45C4-A54C-A6390E6055D6}"/>
               </a:ext>
             </a:extLst>
           </p:cNvPr>
@@ -21049,7 +21049,7 @@
           <p:cNvPr id="18" name="SomaFM PopTron">
             <a:extLst xmlns:a="http://schemas.openxmlformats.org/drawingml/2006/main">
               <a:ext uri="{FF2B5EF4-FFF2-40B4-BE49-F238E27FC236}">
-                <a16:creationId xmlns:a16="http://schemas.microsoft.com/office/drawing/2014/main" id="{0068DF96-5700-480F-9BA3-BF2EF6A6DE2E}"/>
+                <a16:creationId xmlns:a16="http://schemas.microsoft.com/office/drawing/2014/main" id="{CBE1AE80-3101-4B8C-887B-5A090D79BADC}"/>
               </a:ext>
             </a:extLst>
           </p:cNvPr>
@@ -21207,7 +21207,7 @@
           <p:cNvPr id="19" name="707">
             <a:extLst xmlns:a="http://schemas.openxmlformats.org/drawingml/2006/main">
               <a:ext uri="{FF2B5EF4-FFF2-40B4-BE49-F238E27FC236}">
-                <a16:creationId xmlns:a16="http://schemas.microsoft.com/office/drawing/2014/main" id="{893FAF3E-14C5-482C-A8E5-A645F87A2CF2}"/>
+                <a16:creationId xmlns:a16="http://schemas.microsoft.com/office/drawing/2014/main" id="{005D21B9-F37A-4F40-B4CC-BF5D7C5660B4}"/>
               </a:ext>
             </a:extLst>
           </p:cNvPr>
@@ -21365,7 +21365,7 @@
           <p:cNvPr id="20" name="Radyo Viva / Turkish">
             <a:extLst xmlns:a="http://schemas.openxmlformats.org/drawingml/2006/main">
               <a:ext uri="{FF2B5EF4-FFF2-40B4-BE49-F238E27FC236}">
-                <a16:creationId xmlns:a16="http://schemas.microsoft.com/office/drawing/2014/main" id="{BDA89A4B-9235-403D-98A1-54F1AAB721BA}"/>
+                <a16:creationId xmlns:a16="http://schemas.microsoft.com/office/drawing/2014/main" id="{C7507CE6-530A-4696-AF3B-B43B5CDC50EF}"/>
               </a:ext>
             </a:extLst>
           </p:cNvPr>
@@ -21523,7 +21523,7 @@
           <p:cNvPr id="21" name="Official streams decoded successfully. Handset radio and alarm te">
             <a:extLst xmlns:a="http://schemas.openxmlformats.org/drawingml/2006/main">
               <a:ext uri="{FF2B5EF4-FFF2-40B4-BE49-F238E27FC236}">
-                <a16:creationId xmlns:a16="http://schemas.microsoft.com/office/drawing/2014/main" id="{569BA18C-BBDA-420C-8DAD-CC8EE7385B8B}"/>
+                <a16:creationId xmlns:a16="http://schemas.microsoft.com/office/drawing/2014/main" id="{C56628E3-1936-4FFA-924A-553DD71EC30C}"/>
               </a:ext>
             </a:extLst>
           </p:cNvPr>
@@ -21679,7 +21679,7 @@
     </p:spTree>
     <p:extLst>
       <p:ext uri="{BB962C8B-B14F-4D97-AF65-F5344CB8AC3E}">
-        <p14:creationId xmlns:p14="http://schemas.microsoft.com/office/powerpoint/2010/main" val="1179318966"/>
+        <p14:creationId xmlns:p14="http://schemas.microsoft.com/office/powerpoint/2010/main" val="2064023368"/>
       </p:ext>
     </p:extLst>
   </p:cSld>
@@ -21710,7 +21710,7 @@
           <p:cNvPr id="14" name="Free SIP account status">
             <a:extLst xmlns:a="http://schemas.openxmlformats.org/drawingml/2006/main">
               <a:ext uri="{FF2B5EF4-FFF2-40B4-BE49-F238E27FC236}">
-                <a16:creationId xmlns:a16="http://schemas.microsoft.com/office/drawing/2014/main" id="{46B94495-CE8E-41D1-AE33-667FDB755DB6}"/>
+                <a16:creationId xmlns:a16="http://schemas.microsoft.com/office/drawing/2014/main" id="{AB75C41D-7D05-41B3-A731-0A5AF0499436}"/>
               </a:ext>
             </a:extLst>
           </p:cNvPr>
@@ -21868,7 +21868,7 @@
           <p:cNvPr id="2" name="18">
             <a:extLst xmlns:a="http://schemas.openxmlformats.org/drawingml/2006/main">
               <a:ext uri="{FF2B5EF4-FFF2-40B4-BE49-F238E27FC236}">
-                <a16:creationId xmlns:a16="http://schemas.microsoft.com/office/drawing/2014/main" id="{94908625-0EBA-475A-964B-98601E3AD81C}"/>
+                <a16:creationId xmlns:a16="http://schemas.microsoft.com/office/drawing/2014/main" id="{D10A52C8-A56E-4899-ADD8-F97DB0942B1C}"/>
               </a:ext>
             </a:extLst>
           </p:cNvPr>
@@ -22026,7 +22026,7 @@
           <p:cNvPr id="3" name="SIP2SIP">
             <a:extLst xmlns:a="http://schemas.openxmlformats.org/drawingml/2006/main">
               <a:ext uri="{FF2B5EF4-FFF2-40B4-BE49-F238E27FC236}">
-                <a16:creationId xmlns:a16="http://schemas.microsoft.com/office/drawing/2014/main" id="{7A2F4B31-94FE-4460-ACEA-2EFA8017EB82}"/>
+                <a16:creationId xmlns:a16="http://schemas.microsoft.com/office/drawing/2014/main" id="{8C99E4F2-EC92-44CF-9194-40DFCAA4D237}"/>
               </a:ext>
             </a:extLst>
           </p:cNvPr>
@@ -22181,10 +22181,10 @@
       </p:sp>
       <p:sp>
         <p:nvSpPr>
-          <p:cNvPr id="4" name="Account active, 802 echo checks underway">
+          <p:cNvPr id="4" name="Registered; 802 audio test deferred">
             <a:extLst xmlns:a="http://schemas.openxmlformats.org/drawingml/2006/main">
               <a:ext uri="{FF2B5EF4-FFF2-40B4-BE49-F238E27FC236}">
-                <a16:creationId xmlns:a16="http://schemas.microsoft.com/office/drawing/2014/main" id="{83BB0960-C8B3-422B-A547-2573A5C2544F}"/>
+                <a16:creationId xmlns:a16="http://schemas.microsoft.com/office/drawing/2014/main" id="{5CD1A6CF-0854-441B-A040-2CA370522F86}"/>
               </a:ext>
             </a:extLst>
           </p:cNvPr>
@@ -22332,7 +22332,7 @@
                 <a:ea typeface="Arial"/>
                 <a:cs typeface="Arial"/>
               </a:rPr>
-              <a:t>Account active, 802 echo checks underway</a:t>
+              <a:t>Registered; 802 audio test deferred</a:t>
             </a:r>
           </a:p>
         </p:txBody>
@@ -22342,7 +22342,7 @@
           <p:cNvPr id="5" name="Callcentric">
             <a:extLst xmlns:a="http://schemas.openxmlformats.org/drawingml/2006/main">
               <a:ext uri="{FF2B5EF4-FFF2-40B4-BE49-F238E27FC236}">
-                <a16:creationId xmlns:a16="http://schemas.microsoft.com/office/drawing/2014/main" id="{2D6AEED1-26BA-47CE-94F7-773EE9C0D261}"/>
+                <a16:creationId xmlns:a16="http://schemas.microsoft.com/office/drawing/2014/main" id="{93C4F66D-DA57-419F-928B-136B2F1FB8C7}"/>
               </a:ext>
             </a:extLst>
           </p:cNvPr>
@@ -22497,10 +22497,10 @@
       </p:sp>
       <p:sp>
         <p:nvSpPr>
-          <p:cNvPr id="6" name="Account active, outbound review required">
+          <p:cNvPr id="6" name="Registered; outbound review required">
             <a:extLst xmlns:a="http://schemas.openxmlformats.org/drawingml/2006/main">
               <a:ext uri="{FF2B5EF4-FFF2-40B4-BE49-F238E27FC236}">
-                <a16:creationId xmlns:a16="http://schemas.microsoft.com/office/drawing/2014/main" id="{564F9B2C-0629-485A-9708-0BA7C30F333B}"/>
+                <a16:creationId xmlns:a16="http://schemas.microsoft.com/office/drawing/2014/main" id="{F5876147-BD2D-4E60-93D2-4E0504728D97}"/>
               </a:ext>
             </a:extLst>
           </p:cNvPr>
@@ -22648,7 +22648,7 @@
                 <a:ea typeface="Arial"/>
                 <a:cs typeface="Arial"/>
               </a:rPr>
-              <a:t>Account active, outbound review required</a:t>
+              <a:t>Registered; outbound review required</a:t>
             </a:r>
           </a:p>
         </p:txBody>
@@ -22658,7 +22658,7 @@
           <p:cNvPr id="7" name="Linphone">
             <a:extLst xmlns:a="http://schemas.openxmlformats.org/drawingml/2006/main">
               <a:ext uri="{FF2B5EF4-FFF2-40B4-BE49-F238E27FC236}">
-                <a16:creationId xmlns:a16="http://schemas.microsoft.com/office/drawing/2014/main" id="{D73A0080-316F-4FB4-8A86-4C981514CC27}"/>
+                <a16:creationId xmlns:a16="http://schemas.microsoft.com/office/drawing/2014/main" id="{1ADDCED0-A021-404B-99AC-554839AFF184}"/>
               </a:ext>
             </a:extLst>
           </p:cNvPr>
@@ -22813,10 +22813,10 @@
       </p:sp>
       <p:sp>
         <p:nvSpPr>
-          <p:cNvPr id="8" name="Account active, verified peer still needed">
+          <p:cNvPr id="8" name="Registered; verified peer still needed">
             <a:extLst xmlns:a="http://schemas.openxmlformats.org/drawingml/2006/main">
               <a:ext uri="{FF2B5EF4-FFF2-40B4-BE49-F238E27FC236}">
-                <a16:creationId xmlns:a16="http://schemas.microsoft.com/office/drawing/2014/main" id="{2D1E03A5-C91F-472D-AAD6-8141922D1AD2}"/>
+                <a16:creationId xmlns:a16="http://schemas.microsoft.com/office/drawing/2014/main" id="{CA15DC05-1B75-44F5-8C88-22B5561A8AE2}"/>
               </a:ext>
             </a:extLst>
           </p:cNvPr>
@@ -22964,7 +22964,7 @@
                 <a:ea typeface="Arial"/>
                 <a:cs typeface="Arial"/>
               </a:rPr>
-              <a:t>Account active, verified peer still needed</a:t>
+              <a:t>Registered; verified peer still needed</a:t>
             </a:r>
           </a:p>
         </p:txBody>
@@ -22974,7 +22974,7 @@
           <p:cNvPr id="9" name="FWD">
             <a:extLst xmlns:a="http://schemas.openxmlformats.org/drawingml/2006/main">
               <a:ext uri="{FF2B5EF4-FFF2-40B4-BE49-F238E27FC236}">
-                <a16:creationId xmlns:a16="http://schemas.microsoft.com/office/drawing/2014/main" id="{E749B63E-B634-445E-B12E-D13B37C1A8FB}"/>
+                <a16:creationId xmlns:a16="http://schemas.microsoft.com/office/drawing/2014/main" id="{CF1FC03C-BE24-47DA-A2A3-6B9D756612EC}"/>
               </a:ext>
             </a:extLst>
           </p:cNvPr>
@@ -23132,7 +23132,7 @@
           <p:cNvPr id="10" name="Stopped at mandatory Verification Fee">
             <a:extLst xmlns:a="http://schemas.openxmlformats.org/drawingml/2006/main">
               <a:ext uri="{FF2B5EF4-FFF2-40B4-BE49-F238E27FC236}">
-                <a16:creationId xmlns:a16="http://schemas.microsoft.com/office/drawing/2014/main" id="{1A21A9FF-51BD-48D7-9C40-9CA3AB4B0C4A}"/>
+                <a16:creationId xmlns:a16="http://schemas.microsoft.com/office/drawing/2014/main" id="{ACB6DF7C-9964-4D9A-9E6F-1114DCD89800}"/>
               </a:ext>
             </a:extLst>
           </p:cNvPr>
@@ -23290,7 +23290,7 @@
           <p:cNvPr id="11" name="Google Voice">
             <a:extLst xmlns:a="http://schemas.openxmlformats.org/drawingml/2006/main">
               <a:ext uri="{FF2B5EF4-FFF2-40B4-BE49-F238E27FC236}">
-                <a16:creationId xmlns:a16="http://schemas.microsoft.com/office/drawing/2014/main" id="{D57A962F-58AF-4AE1-918E-A484390448F4}"/>
+                <a16:creationId xmlns:a16="http://schemas.microsoft.com/office/drawing/2014/main" id="{953E0917-DBCA-4C4E-A015-ED141DD7CFFE}"/>
               </a:ext>
             </a:extLst>
           </p:cNvPr>
@@ -23448,7 +23448,7 @@
           <p:cNvPr id="12" name="No official free Asterisk SIP trunk">
             <a:extLst xmlns:a="http://schemas.openxmlformats.org/drawingml/2006/main">
               <a:ext uri="{FF2B5EF4-FFF2-40B4-BE49-F238E27FC236}">
-                <a16:creationId xmlns:a16="http://schemas.microsoft.com/office/drawing/2014/main" id="{50B9546D-D2F4-4BB3-BE6B-668F54A2F884}"/>
+                <a16:creationId xmlns:a16="http://schemas.microsoft.com/office/drawing/2014/main" id="{3FCE805B-C7DD-4006-AE9F-D47FE8D363F6}"/>
               </a:ext>
             </a:extLst>
           </p:cNvPr>
@@ -23603,10 +23603,10 @@
       </p:sp>
       <p:sp>
         <p:nvSpPr>
-          <p:cNvPr id="13" name="Account activation, SIP registration and a working audio call nee">
+          <p:cNvPr id="13" name="REGISTER succeeded for three providers. External audio remains un">
             <a:extLst xmlns:a="http://schemas.openxmlformats.org/drawingml/2006/main">
               <a:ext uri="{FF2B5EF4-FFF2-40B4-BE49-F238E27FC236}">
-                <a16:creationId xmlns:a16="http://schemas.microsoft.com/office/drawing/2014/main" id="{874DB959-EB6E-4496-9D53-C52763BEDCD7}"/>
+                <a16:creationId xmlns:a16="http://schemas.microsoft.com/office/drawing/2014/main" id="{1BF48E69-F87E-46F6-9467-57CBB39C0A43}"/>
               </a:ext>
             </a:extLst>
           </p:cNvPr>
@@ -23754,7 +23754,7 @@
                 <a:ea typeface="Arial"/>
                 <a:cs typeface="Arial"/>
               </a:rPr>
-              <a:t>Account activation, SIP registration and a working audio call need separate evidence.</a:t>
+              <a:t>REGISTER succeeded for three providers. External audio remains unverified.</a:t>
             </a:r>
           </a:p>
         </p:txBody>
@@ -23762,7 +23762,7 @@
     </p:spTree>
     <p:extLst>
       <p:ext uri="{BB962C8B-B14F-4D97-AF65-F5344CB8AC3E}">
-        <p14:creationId xmlns:p14="http://schemas.microsoft.com/office/powerpoint/2010/main" val="1050786795"/>
+        <p14:creationId xmlns:p14="http://schemas.microsoft.com/office/powerpoint/2010/main" val="842947939"/>
       </p:ext>
     </p:extLst>
   </p:cSld>
@@ -23793,7 +23793,7 @@
           <p:cNvPr id="9" name="Our lot: 10 Cisco 7945G phones">
             <a:extLst xmlns:a="http://schemas.openxmlformats.org/drawingml/2006/main">
               <a:ext uri="{FF2B5EF4-FFF2-40B4-BE49-F238E27FC236}">
-                <a16:creationId xmlns:a16="http://schemas.microsoft.com/office/drawing/2014/main" id="{103CBD91-B208-4392-B15D-BF4326E066D7}"/>
+                <a16:creationId xmlns:a16="http://schemas.microsoft.com/office/drawing/2014/main" id="{E7927487-16E0-4683-A1C6-B29856A52BD1}"/>
               </a:ext>
             </a:extLst>
           </p:cNvPr>
@@ -23951,7 +23951,7 @@
           <p:cNvPr id="2" name="02">
             <a:extLst xmlns:a="http://schemas.openxmlformats.org/drawingml/2006/main">
               <a:ext uri="{FF2B5EF4-FFF2-40B4-BE49-F238E27FC236}">
-                <a16:creationId xmlns:a16="http://schemas.microsoft.com/office/drawing/2014/main" id="{1D82F0D8-5886-4D71-B3FD-9D5EE9519B6F}"/>
+                <a16:creationId xmlns:a16="http://schemas.microsoft.com/office/drawing/2014/main" id="{FC0648A3-9C18-4C47-B95E-1B7D035E2FA4}"/>
               </a:ext>
             </a:extLst>
           </p:cNvPr>
@@ -24109,7 +24109,7 @@
           <p:cNvPr id="3" name="10">
             <a:extLst xmlns:a="http://schemas.openxmlformats.org/drawingml/2006/main">
               <a:ext uri="{FF2B5EF4-FFF2-40B4-BE49-F238E27FC236}">
-                <a16:creationId xmlns:a16="http://schemas.microsoft.com/office/drawing/2014/main" id="{C0B7C9C7-5718-4CCC-A71D-A7EAC25551E1}"/>
+                <a16:creationId xmlns:a16="http://schemas.microsoft.com/office/drawing/2014/main" id="{1F4EEE4D-2403-4504-A244-198547DBAFA7}"/>
               </a:ext>
             </a:extLst>
           </p:cNvPr>
@@ -24267,7 +24267,7 @@
           <p:cNvPr id="4" name="phones">
             <a:extLst xmlns:a="http://schemas.openxmlformats.org/drawingml/2006/main">
               <a:ext uri="{FF2B5EF4-FFF2-40B4-BE49-F238E27FC236}">
-                <a16:creationId xmlns:a16="http://schemas.microsoft.com/office/drawing/2014/main" id="{24BC7FDB-6987-488F-961A-31E85C14FDD8}"/>
+                <a16:creationId xmlns:a16="http://schemas.microsoft.com/office/drawing/2014/main" id="{2D6CD629-C482-4025-BC09-1BBB5954D603}"/>
               </a:ext>
             </a:extLst>
           </p:cNvPr>
@@ -24425,7 +24425,7 @@
           <p:cNvPr id="5" name="7945_7965 SIP firmware family">
             <a:extLst xmlns:a="http://schemas.openxmlformats.org/drawingml/2006/main">
               <a:ext uri="{FF2B5EF4-FFF2-40B4-BE49-F238E27FC236}">
-                <a16:creationId xmlns:a16="http://schemas.microsoft.com/office/drawing/2014/main" id="{7FB888B1-C44D-4833-B796-5A30C171BFA0}"/>
+                <a16:creationId xmlns:a16="http://schemas.microsoft.com/office/drawing/2014/main" id="{DFC131D0-7944-459A-8051-9D20444D6451}"/>
               </a:ext>
             </a:extLst>
           </p:cNvPr>
@@ -24583,7 +24583,7 @@
           <p:cNvPr id="6" name="A phone running SCCP needs SIP firmware.&#10;This model does not need">
             <a:extLst xmlns:a="http://schemas.openxmlformats.org/drawingml/2006/main">
               <a:ext uri="{FF2B5EF4-FFF2-40B4-BE49-F238E27FC236}">
-                <a16:creationId xmlns:a16="http://schemas.microsoft.com/office/drawing/2014/main" id="{A9D9C08A-2AFD-4BD6-8B75-0AF83AB2F5E7}"/>
+                <a16:creationId xmlns:a16="http://schemas.microsoft.com/office/drawing/2014/main" id="{0EF79E79-C4F3-4F8E-BAFD-073249D6BF7D}"/>
               </a:ext>
             </a:extLst>
           </p:cNvPr>
@@ -24764,7 +24764,7 @@
           <p:cNvPr id="7" name="Before starting">
             <a:extLst xmlns:a="http://schemas.openxmlformats.org/drawingml/2006/main">
               <a:ext uri="{FF2B5EF4-FFF2-40B4-BE49-F238E27FC236}">
-                <a16:creationId xmlns:a16="http://schemas.microsoft.com/office/drawing/2014/main" id="{4B24F2DE-2C98-452E-A579-71B1391D307D}"/>
+                <a16:creationId xmlns:a16="http://schemas.microsoft.com/office/drawing/2014/main" id="{6C02651A-89DB-4474-B1A2-56CD3E95B49A}"/>
               </a:ext>
             </a:extLst>
           </p:cNvPr>
@@ -24922,7 +24922,7 @@
           <p:cNvPr id="8" name="Record PID, VID/HW, MAC, App Load,&#10;Boot Load, IP and TFTP for eve">
             <a:extLst xmlns:a="http://schemas.openxmlformats.org/drawingml/2006/main">
               <a:ext uri="{FF2B5EF4-FFF2-40B4-BE49-F238E27FC236}">
-                <a16:creationId xmlns:a16="http://schemas.microsoft.com/office/drawing/2014/main" id="{24B474E1-8F56-4F4E-8A4C-187FD552C190}"/>
+                <a16:creationId xmlns:a16="http://schemas.microsoft.com/office/drawing/2014/main" id="{0FBAC547-9AA3-4D2D-88DA-09A576041A62}"/>
               </a:ext>
             </a:extLst>
           </p:cNvPr>
@@ -25101,7 +25101,7 @@
     </p:spTree>
     <p:extLst>
       <p:ext uri="{BB962C8B-B14F-4D97-AF65-F5344CB8AC3E}">
-        <p14:creationId xmlns:p14="http://schemas.microsoft.com/office/powerpoint/2010/main" val="521451717"/>
+        <p14:creationId xmlns:p14="http://schemas.microsoft.com/office/powerpoint/2010/main" val="978914116"/>
       </p:ext>
     </p:extLst>
   </p:cSld>
@@ -25132,7 +25132,7 @@
           <p:cNvPr id="17" name="">
             <a:extLst xmlns:a="http://schemas.openxmlformats.org/drawingml/2006/main">
               <a:ext uri="{FF2B5EF4-FFF2-40B4-BE49-F238E27FC236}">
-                <a16:creationId xmlns:a16="http://schemas.microsoft.com/office/drawing/2014/main" id="{317B4DA3-AF61-4684-8EBD-9CFD09EB1338}"/>
+                <a16:creationId xmlns:a16="http://schemas.microsoft.com/office/drawing/2014/main" id="{CE3982E9-2FE8-49B8-AED7-93424012679B}"/>
               </a:ext>
             </a:extLst>
           </p:cNvPr>
@@ -25164,7 +25164,7 @@
           <p:cNvPr id="15" name="">
             <a:extLst xmlns:a="http://schemas.openxmlformats.org/drawingml/2006/main">
               <a:ext uri="{FF2B5EF4-FFF2-40B4-BE49-F238E27FC236}">
-                <a16:creationId xmlns:a16="http://schemas.microsoft.com/office/drawing/2014/main" id="{FE898B9E-786A-49D2-A7D7-9702E46B16A4}"/>
+                <a16:creationId xmlns:a16="http://schemas.microsoft.com/office/drawing/2014/main" id="{9F4A4DEE-6822-46A7-B36F-760FF17F25A3}"/>
               </a:ext>
             </a:extLst>
           </p:cNvPr>
@@ -25195,7 +25195,7 @@
           <p:cNvPr id="13" name="">
             <a:extLst xmlns:a="http://schemas.openxmlformats.org/drawingml/2006/main">
               <a:ext uri="{FF2B5EF4-FFF2-40B4-BE49-F238E27FC236}">
-                <a16:creationId xmlns:a16="http://schemas.microsoft.com/office/drawing/2014/main" id="{8077D1F2-D9CC-4133-9762-20AA7B456351}"/>
+                <a16:creationId xmlns:a16="http://schemas.microsoft.com/office/drawing/2014/main" id="{D6ED84FD-EFFC-4344-98B3-298F0BF15A58}"/>
               </a:ext>
             </a:extLst>
           </p:cNvPr>
@@ -25226,7 +25226,7 @@
           <p:cNvPr id="11" name="">
             <a:extLst xmlns:a="http://schemas.openxmlformats.org/drawingml/2006/main">
               <a:ext uri="{FF2B5EF4-FFF2-40B4-BE49-F238E27FC236}">
-                <a16:creationId xmlns:a16="http://schemas.microsoft.com/office/drawing/2014/main" id="{5DB0174C-54DE-41AA-A769-CFF75C3C471C}"/>
+                <a16:creationId xmlns:a16="http://schemas.microsoft.com/office/drawing/2014/main" id="{32FCD77C-D8AC-4879-A753-7F26DC8DEA11}"/>
               </a:ext>
             </a:extLst>
           </p:cNvPr>
@@ -25258,7 +25258,7 @@
           <p:cNvPr id="9" name="">
             <a:extLst xmlns:a="http://schemas.openxmlformats.org/drawingml/2006/main">
               <a:ext uri="{FF2B5EF4-FFF2-40B4-BE49-F238E27FC236}">
-                <a16:creationId xmlns:a16="http://schemas.microsoft.com/office/drawing/2014/main" id="{95412C07-C4E2-497B-B5E0-00050A6A6C80}"/>
+                <a16:creationId xmlns:a16="http://schemas.microsoft.com/office/drawing/2014/main" id="{B86A86E2-8A9A-43F2-A361-4A03EAA38D26}"/>
               </a:ext>
             </a:extLst>
           </p:cNvPr>
@@ -25290,7 +25290,7 @@
           <p:cNvPr id="20" name="Cisco, Asterisk and Home Assistant">
             <a:extLst xmlns:a="http://schemas.openxmlformats.org/drawingml/2006/main">
               <a:ext uri="{FF2B5EF4-FFF2-40B4-BE49-F238E27FC236}">
-                <a16:creationId xmlns:a16="http://schemas.microsoft.com/office/drawing/2014/main" id="{B50144F7-FAB5-41C3-B32F-5FF0BD92A70F}"/>
+                <a16:creationId xmlns:a16="http://schemas.microsoft.com/office/drawing/2014/main" id="{BE3E1350-33A2-4F83-AB6F-B466435BD57F}"/>
               </a:ext>
             </a:extLst>
           </p:cNvPr>
@@ -25448,7 +25448,7 @@
           <p:cNvPr id="2" name="03">
             <a:extLst xmlns:a="http://schemas.openxmlformats.org/drawingml/2006/main">
               <a:ext uri="{FF2B5EF4-FFF2-40B4-BE49-F238E27FC236}">
-                <a16:creationId xmlns:a16="http://schemas.microsoft.com/office/drawing/2014/main" id="{9DC822DF-3C8B-490F-82F4-0A9A753DCF69}"/>
+                <a16:creationId xmlns:a16="http://schemas.microsoft.com/office/drawing/2014/main" id="{7350C261-1B32-4D4B-8F9D-6074B4214F6D}"/>
               </a:ext>
             </a:extLst>
           </p:cNvPr>
@@ -25606,7 +25606,7 @@
           <p:cNvPr id="3" name="phones">
             <a:extLst xmlns:a="http://schemas.openxmlformats.org/drawingml/2006/main">
               <a:ext uri="{FF2B5EF4-FFF2-40B4-BE49-F238E27FC236}">
-                <a16:creationId xmlns:a16="http://schemas.microsoft.com/office/drawing/2014/main" id="{E6E72A84-F46B-4E2C-9CFC-1D9CD6CCF1CB}"/>
+                <a16:creationId xmlns:a16="http://schemas.microsoft.com/office/drawing/2014/main" id="{4F85B5B7-6D2F-4D1C-B184-D3CA00E03F17}"/>
               </a:ext>
             </a:extLst>
           </p:cNvPr>
@@ -25793,7 +25793,7 @@
           <p:cNvPr id="4" name="switch">
             <a:extLst xmlns:a="http://schemas.openxmlformats.org/drawingml/2006/main">
               <a:ext uri="{FF2B5EF4-FFF2-40B4-BE49-F238E27FC236}">
-                <a16:creationId xmlns:a16="http://schemas.microsoft.com/office/drawing/2014/main" id="{D46879C5-91C1-4B0D-A056-6486CC1DC0B8}"/>
+                <a16:creationId xmlns:a16="http://schemas.microsoft.com/office/drawing/2014/main" id="{947B203D-4422-4F4D-B309-AE8D5AAE0793}"/>
               </a:ext>
             </a:extLst>
           </p:cNvPr>
@@ -25980,7 +25980,7 @@
           <p:cNvPr id="5" name="ast">
             <a:extLst xmlns:a="http://schemas.openxmlformats.org/drawingml/2006/main">
               <a:ext uri="{FF2B5EF4-FFF2-40B4-BE49-F238E27FC236}">
-                <a16:creationId xmlns:a16="http://schemas.microsoft.com/office/drawing/2014/main" id="{D24F5286-761B-4C19-BFB8-1B6ADCC65A3E}"/>
+                <a16:creationId xmlns:a16="http://schemas.microsoft.com/office/drawing/2014/main" id="{30CB5646-00D6-46E3-9598-613B5BF9A8C7}"/>
               </a:ext>
             </a:extLst>
           </p:cNvPr>
@@ -26167,7 +26167,7 @@
           <p:cNvPr id="6" name="router">
             <a:extLst xmlns:a="http://schemas.openxmlformats.org/drawingml/2006/main">
               <a:ext uri="{FF2B5EF4-FFF2-40B4-BE49-F238E27FC236}">
-                <a16:creationId xmlns:a16="http://schemas.microsoft.com/office/drawing/2014/main" id="{6DBF3684-A070-4044-B2CF-E884E1F56BFD}"/>
+                <a16:creationId xmlns:a16="http://schemas.microsoft.com/office/drawing/2014/main" id="{E52BA8DD-AC3E-447E-83AF-F497E2C1F784}"/>
               </a:ext>
             </a:extLst>
           </p:cNvPr>
@@ -26354,7 +26354,7 @@
           <p:cNvPr id="7" name="tftp">
             <a:extLst xmlns:a="http://schemas.openxmlformats.org/drawingml/2006/main">
               <a:ext uri="{FF2B5EF4-FFF2-40B4-BE49-F238E27FC236}">
-                <a16:creationId xmlns:a16="http://schemas.microsoft.com/office/drawing/2014/main" id="{EE7DDF17-D980-422B-AC5C-D71BEFE5103D}"/>
+                <a16:creationId xmlns:a16="http://schemas.microsoft.com/office/drawing/2014/main" id="{355C3591-FB26-413B-95F2-7185895F1680}"/>
               </a:ext>
             </a:extLst>
           </p:cNvPr>
@@ -26541,7 +26541,7 @@
           <p:cNvPr id="8" name="ha">
             <a:extLst xmlns:a="http://schemas.openxmlformats.org/drawingml/2006/main">
               <a:ext uri="{FF2B5EF4-FFF2-40B4-BE49-F238E27FC236}">
-                <a16:creationId xmlns:a16="http://schemas.microsoft.com/office/drawing/2014/main" id="{92852FC6-390E-4448-AA98-884BA6AEA1B5}"/>
+                <a16:creationId xmlns:a16="http://schemas.microsoft.com/office/drawing/2014/main" id="{3B947029-CA56-4245-874B-3DC06685C1C4}"/>
               </a:ext>
             </a:extLst>
           </p:cNvPr>
@@ -26728,7 +26728,7 @@
           <p:cNvPr id="10" name="Ethernet">
             <a:extLst xmlns:a="http://schemas.openxmlformats.org/drawingml/2006/main">
               <a:ext uri="{FF2B5EF4-FFF2-40B4-BE49-F238E27FC236}">
-                <a16:creationId xmlns:a16="http://schemas.microsoft.com/office/drawing/2014/main" id="{FADDABA4-2EBC-43F9-9669-CF955D1DD40E}"/>
+                <a16:creationId xmlns:a16="http://schemas.microsoft.com/office/drawing/2014/main" id="{7D9E3536-2CD2-4B27-B149-439E959C223A}"/>
               </a:ext>
             </a:extLst>
           </p:cNvPr>
@@ -26886,7 +26886,7 @@
           <p:cNvPr id="12" name="SIP / RTP">
             <a:extLst xmlns:a="http://schemas.openxmlformats.org/drawingml/2006/main">
               <a:ext uri="{FF2B5EF4-FFF2-40B4-BE49-F238E27FC236}">
-                <a16:creationId xmlns:a16="http://schemas.microsoft.com/office/drawing/2014/main" id="{01B2C562-7294-4BD4-BE2A-7DAF557184D4}"/>
+                <a16:creationId xmlns:a16="http://schemas.microsoft.com/office/drawing/2014/main" id="{E56B4EAF-0DFE-4BF2-8D5D-63F93088545F}"/>
               </a:ext>
             </a:extLst>
           </p:cNvPr>
@@ -27044,7 +27044,7 @@
           <p:cNvPr id="14" name="DHCP">
             <a:extLst xmlns:a="http://schemas.openxmlformats.org/drawingml/2006/main">
               <a:ext uri="{FF2B5EF4-FFF2-40B4-BE49-F238E27FC236}">
-                <a16:creationId xmlns:a16="http://schemas.microsoft.com/office/drawing/2014/main" id="{5D6336E4-27FA-4F9F-856B-6AC1CC49DCB4}"/>
+                <a16:creationId xmlns:a16="http://schemas.microsoft.com/office/drawing/2014/main" id="{5581DA60-A3F1-4952-B2AB-440A962E2404}"/>
               </a:ext>
             </a:extLst>
           </p:cNvPr>
@@ -27202,7 +27202,7 @@
           <p:cNvPr id="16" name="download">
             <a:extLst xmlns:a="http://schemas.openxmlformats.org/drawingml/2006/main">
               <a:ext uri="{FF2B5EF4-FFF2-40B4-BE49-F238E27FC236}">
-                <a16:creationId xmlns:a16="http://schemas.microsoft.com/office/drawing/2014/main" id="{C289AB31-3E68-4A41-9D7B-C22C60AED9F8}"/>
+                <a16:creationId xmlns:a16="http://schemas.microsoft.com/office/drawing/2014/main" id="{78831A5C-3D51-4C94-BDE7-75BEBB4CE5AC}"/>
               </a:ext>
             </a:extLst>
           </p:cNvPr>
@@ -27360,7 +27360,7 @@
           <p:cNvPr id="18" name="AMI&#10;SIP / RTP">
             <a:extLst xmlns:a="http://schemas.openxmlformats.org/drawingml/2006/main">
               <a:ext uri="{FF2B5EF4-FFF2-40B4-BE49-F238E27FC236}">
-                <a16:creationId xmlns:a16="http://schemas.microsoft.com/office/drawing/2014/main" id="{5BB30124-63DD-49B5-9770-0EC87DE915A2}"/>
+                <a16:creationId xmlns:a16="http://schemas.microsoft.com/office/drawing/2014/main" id="{EBA3D6E9-BF96-4257-A6B5-2399CF3ACF5F}"/>
               </a:ext>
             </a:extLst>
           </p:cNvPr>
@@ -27541,7 +27541,7 @@
           <p:cNvPr id="19" name="Asterisk uses hostNetwork and one replica. HA opens the AMI conne">
             <a:extLst xmlns:a="http://schemas.openxmlformats.org/drawingml/2006/main">
               <a:ext uri="{FF2B5EF4-FFF2-40B4-BE49-F238E27FC236}">
-                <a16:creationId xmlns:a16="http://schemas.microsoft.com/office/drawing/2014/main" id="{94DA5DB5-1BBE-4B4E-8C8E-B5E047C54074}"/>
+                <a16:creationId xmlns:a16="http://schemas.microsoft.com/office/drawing/2014/main" id="{7DB7ADF8-0514-4D18-B080-F70546D86ECF}"/>
               </a:ext>
             </a:extLst>
           </p:cNvPr>
@@ -27720,7 +27720,7 @@
     </p:spTree>
     <p:extLst>
       <p:ext uri="{BB962C8B-B14F-4D97-AF65-F5344CB8AC3E}">
-        <p14:creationId xmlns:p14="http://schemas.microsoft.com/office/powerpoint/2010/main" val="2093619344"/>
+        <p14:creationId xmlns:p14="http://schemas.microsoft.com/office/powerpoint/2010/main" val="626408807"/>
       </p:ext>
     </p:extLst>
   </p:cSld>
@@ -27751,7 +27751,7 @@
           <p:cNvPr id="16" name="Signaling and audio ports">
             <a:extLst xmlns:a="http://schemas.openxmlformats.org/drawingml/2006/main">
               <a:ext uri="{FF2B5EF4-FFF2-40B4-BE49-F238E27FC236}">
-                <a16:creationId xmlns:a16="http://schemas.microsoft.com/office/drawing/2014/main" id="{DA3841BB-A263-42A0-BC46-ED094CE74457}"/>
+                <a16:creationId xmlns:a16="http://schemas.microsoft.com/office/drawing/2014/main" id="{36DA5A74-F7C9-4831-986C-598D316E263B}"/>
               </a:ext>
             </a:extLst>
           </p:cNvPr>
@@ -27909,7 +27909,7 @@
           <p:cNvPr id="2" name="04">
             <a:extLst xmlns:a="http://schemas.openxmlformats.org/drawingml/2006/main">
               <a:ext uri="{FF2B5EF4-FFF2-40B4-BE49-F238E27FC236}">
-                <a16:creationId xmlns:a16="http://schemas.microsoft.com/office/drawing/2014/main" id="{DC3557F0-29E6-44F7-A75B-3D98FF20A981}"/>
+                <a16:creationId xmlns:a16="http://schemas.microsoft.com/office/drawing/2014/main" id="{31254EAB-A7A8-44D8-874F-87D692A32EE7}"/>
               </a:ext>
             </a:extLst>
           </p:cNvPr>
@@ -28067,7 +28067,7 @@
           <p:cNvPr id="3" name="5060">
             <a:extLst xmlns:a="http://schemas.openxmlformats.org/drawingml/2006/main">
               <a:ext uri="{FF2B5EF4-FFF2-40B4-BE49-F238E27FC236}">
-                <a16:creationId xmlns:a16="http://schemas.microsoft.com/office/drawing/2014/main" id="{8A78CB2E-5993-47A9-870D-164206419942}"/>
+                <a16:creationId xmlns:a16="http://schemas.microsoft.com/office/drawing/2014/main" id="{7B5BCFFA-1FA1-4554-AEE2-098AB73DAA42}"/>
               </a:ext>
             </a:extLst>
           </p:cNvPr>
@@ -28225,7 +28225,7 @@
           <p:cNvPr id="4" name="TCP / UDP">
             <a:extLst xmlns:a="http://schemas.openxmlformats.org/drawingml/2006/main">
               <a:ext uri="{FF2B5EF4-FFF2-40B4-BE49-F238E27FC236}">
-                <a16:creationId xmlns:a16="http://schemas.microsoft.com/office/drawing/2014/main" id="{7AA26A26-5B46-4A82-A311-D65811D3261E}"/>
+                <a16:creationId xmlns:a16="http://schemas.microsoft.com/office/drawing/2014/main" id="{C1B70CEA-FD12-40CB-87E9-014DBA4B4140}"/>
               </a:ext>
             </a:extLst>
           </p:cNvPr>
@@ -28383,7 +28383,7 @@
           <p:cNvPr id="5" name="SIP: Cisco TCP, HA UDP">
             <a:extLst xmlns:a="http://schemas.openxmlformats.org/drawingml/2006/main">
               <a:ext uri="{FF2B5EF4-FFF2-40B4-BE49-F238E27FC236}">
-                <a16:creationId xmlns:a16="http://schemas.microsoft.com/office/drawing/2014/main" id="{F7EE262F-EE91-4B38-AB2C-AD5455B41355}"/>
+                <a16:creationId xmlns:a16="http://schemas.microsoft.com/office/drawing/2014/main" id="{E53B88CA-0B2B-4B40-8C1B-B79672486930}"/>
               </a:ext>
             </a:extLst>
           </p:cNvPr>
@@ -28541,7 +28541,7 @@
           <p:cNvPr id="6" name="10000–10199">
             <a:extLst xmlns:a="http://schemas.openxmlformats.org/drawingml/2006/main">
               <a:ext uri="{FF2B5EF4-FFF2-40B4-BE49-F238E27FC236}">
-                <a16:creationId xmlns:a16="http://schemas.microsoft.com/office/drawing/2014/main" id="{B719EDF1-B4FC-4842-AB02-D7CB350CEA76}"/>
+                <a16:creationId xmlns:a16="http://schemas.microsoft.com/office/drawing/2014/main" id="{DAE76A24-A57E-4A59-A031-7EFC64216EF7}"/>
               </a:ext>
             </a:extLst>
           </p:cNvPr>
@@ -28699,7 +28699,7 @@
           <p:cNvPr id="7" name="UDP on PBX">
             <a:extLst xmlns:a="http://schemas.openxmlformats.org/drawingml/2006/main">
               <a:ext uri="{FF2B5EF4-FFF2-40B4-BE49-F238E27FC236}">
-                <a16:creationId xmlns:a16="http://schemas.microsoft.com/office/drawing/2014/main" id="{3AE5AB31-ED9C-4FFB-A84F-CA716183DB97}"/>
+                <a16:creationId xmlns:a16="http://schemas.microsoft.com/office/drawing/2014/main" id="{757BE8FF-0FA1-48A4-A0F1-754FA758B3F3}"/>
               </a:ext>
             </a:extLst>
           </p:cNvPr>
@@ -28857,7 +28857,7 @@
           <p:cNvPr id="8" name="RTP / audio">
             <a:extLst xmlns:a="http://schemas.openxmlformats.org/drawingml/2006/main">
               <a:ext uri="{FF2B5EF4-FFF2-40B4-BE49-F238E27FC236}">
-                <a16:creationId xmlns:a16="http://schemas.microsoft.com/office/drawing/2014/main" id="{39A80282-4F63-44AE-8CD2-512395870BB9}"/>
+                <a16:creationId xmlns:a16="http://schemas.microsoft.com/office/drawing/2014/main" id="{35040A92-170C-4206-A0E5-D516BEF68DC3}"/>
               </a:ext>
             </a:extLst>
           </p:cNvPr>
@@ -29015,7 +29015,7 @@
           <p:cNvPr id="9" name="5038">
             <a:extLst xmlns:a="http://schemas.openxmlformats.org/drawingml/2006/main">
               <a:ext uri="{FF2B5EF4-FFF2-40B4-BE49-F238E27FC236}">
-                <a16:creationId xmlns:a16="http://schemas.microsoft.com/office/drawing/2014/main" id="{046FBF1F-BFDB-4AD4-8024-56FAA532592E}"/>
+                <a16:creationId xmlns:a16="http://schemas.microsoft.com/office/drawing/2014/main" id="{7BE7FC2E-1768-4045-89C5-83BCB17EF66F}"/>
               </a:ext>
             </a:extLst>
           </p:cNvPr>
@@ -29173,7 +29173,7 @@
           <p:cNvPr id="10" name="TCP on PBX">
             <a:extLst xmlns:a="http://schemas.openxmlformats.org/drawingml/2006/main">
               <a:ext uri="{FF2B5EF4-FFF2-40B4-BE49-F238E27FC236}">
-                <a16:creationId xmlns:a16="http://schemas.microsoft.com/office/drawing/2014/main" id="{99192404-F171-41F1-B30A-B7FFEABD29C8}"/>
+                <a16:creationId xmlns:a16="http://schemas.microsoft.com/office/drawing/2014/main" id="{5209D094-91F8-4082-AC31-F8920FC2B282}"/>
               </a:ext>
             </a:extLst>
           </p:cNvPr>
@@ -29331,7 +29331,7 @@
           <p:cNvPr id="11" name="AMI: HA / gateway /32">
             <a:extLst xmlns:a="http://schemas.openxmlformats.org/drawingml/2006/main">
               <a:ext uri="{FF2B5EF4-FFF2-40B4-BE49-F238E27FC236}">
-                <a16:creationId xmlns:a16="http://schemas.microsoft.com/office/drawing/2014/main" id="{D8C89334-A0A5-4441-8B9F-DBCE4D4C9CCF}"/>
+                <a16:creationId xmlns:a16="http://schemas.microsoft.com/office/drawing/2014/main" id="{CEA40994-49E2-490F-AEA0-6EFD3286B5EE}"/>
               </a:ext>
             </a:extLst>
           </p:cNvPr>
@@ -29489,7 +29489,7 @@
           <p:cNvPr id="12" name="69 + 20000–20031">
             <a:extLst xmlns:a="http://schemas.openxmlformats.org/drawingml/2006/main">
               <a:ext uri="{FF2B5EF4-FFF2-40B4-BE49-F238E27FC236}">
-                <a16:creationId xmlns:a16="http://schemas.microsoft.com/office/drawing/2014/main" id="{096CD57B-8E60-4C77-9F31-C033F947D0AD}"/>
+                <a16:creationId xmlns:a16="http://schemas.microsoft.com/office/drawing/2014/main" id="{D3AC3EFD-9C3D-4ED0-B93A-ED37CF2508ED}"/>
               </a:ext>
             </a:extLst>
           </p:cNvPr>
@@ -29647,7 +29647,7 @@
           <p:cNvPr id="13" name="UDP on PBX">
             <a:extLst xmlns:a="http://schemas.openxmlformats.org/drawingml/2006/main">
               <a:ext uri="{FF2B5EF4-FFF2-40B4-BE49-F238E27FC236}">
-                <a16:creationId xmlns:a16="http://schemas.microsoft.com/office/drawing/2014/main" id="{948631FD-098E-468C-A1B7-BBB0330274FC}"/>
+                <a16:creationId xmlns:a16="http://schemas.microsoft.com/office/drawing/2014/main" id="{EA88BE0B-076C-472E-A790-37A9E5D22145}"/>
               </a:ext>
             </a:extLst>
           </p:cNvPr>
@@ -29805,7 +29805,7 @@
           <p:cNvPr id="14" name="Temporary TFTP">
             <a:extLst xmlns:a="http://schemas.openxmlformats.org/drawingml/2006/main">
               <a:ext uri="{FF2B5EF4-FFF2-40B4-BE49-F238E27FC236}">
-                <a16:creationId xmlns:a16="http://schemas.microsoft.com/office/drawing/2014/main" id="{66C04D71-EEB3-48BA-A091-5472DFFE7680}"/>
+                <a16:creationId xmlns:a16="http://schemas.microsoft.com/office/drawing/2014/main" id="{D44B2D7E-27FC-449E-AC81-C2D3056DD4AF}"/>
               </a:ext>
             </a:extLst>
           </p:cNvPr>
@@ -29963,7 +29963,7 @@
           <p:cNvPr id="15" name="HA uses dynamic RTP / RTCP ports. Restrict firewall rules to the ">
             <a:extLst xmlns:a="http://schemas.openxmlformats.org/drawingml/2006/main">
               <a:ext uri="{FF2B5EF4-FFF2-40B4-BE49-F238E27FC236}">
-                <a16:creationId xmlns:a16="http://schemas.microsoft.com/office/drawing/2014/main" id="{A40B4816-FDF1-4B5E-A0D1-AF2DDCCBA6D5}"/>
+                <a16:creationId xmlns:a16="http://schemas.microsoft.com/office/drawing/2014/main" id="{865F9729-059C-42EF-AABF-E8D65AB74C3F}"/>
               </a:ext>
             </a:extLst>
           </p:cNvPr>
@@ -30119,7 +30119,7 @@
     </p:spTree>
     <p:extLst>
       <p:ext uri="{BB962C8B-B14F-4D97-AF65-F5344CB8AC3E}">
-        <p14:creationId xmlns:p14="http://schemas.microsoft.com/office/powerpoint/2010/main" val="1899970596"/>
+        <p14:creationId xmlns:p14="http://schemas.microsoft.com/office/powerpoint/2010/main" val="2062194378"/>
       </p:ext>
     </p:extLst>
   </p:cSld>
@@ -30150,7 +30150,7 @@
           <p:cNvPr id="12" name="">
             <a:extLst xmlns:a="http://schemas.openxmlformats.org/drawingml/2006/main">
               <a:ext uri="{FF2B5EF4-FFF2-40B4-BE49-F238E27FC236}">
-                <a16:creationId xmlns:a16="http://schemas.microsoft.com/office/drawing/2014/main" id="{1E13E860-EC1C-42D5-8423-275D3D7739FB}"/>
+                <a16:creationId xmlns:a16="http://schemas.microsoft.com/office/drawing/2014/main" id="{123C9C0D-ECFB-4D4F-A9DD-546F778B8AC0}"/>
               </a:ext>
             </a:extLst>
           </p:cNvPr>
@@ -30181,7 +30181,7 @@
           <p:cNvPr id="10" name="">
             <a:extLst xmlns:a="http://schemas.openxmlformats.org/drawingml/2006/main">
               <a:ext uri="{FF2B5EF4-FFF2-40B4-BE49-F238E27FC236}">
-                <a16:creationId xmlns:a16="http://schemas.microsoft.com/office/drawing/2014/main" id="{A22BCC19-463D-4283-86A1-44482825C899}"/>
+                <a16:creationId xmlns:a16="http://schemas.microsoft.com/office/drawing/2014/main" id="{D3B8E16B-97AD-475E-BFC7-AFE38991F3DC}"/>
               </a:ext>
             </a:extLst>
           </p:cNvPr>
@@ -30212,7 +30212,7 @@
           <p:cNvPr id="8" name="">
             <a:extLst xmlns:a="http://schemas.openxmlformats.org/drawingml/2006/main">
               <a:ext uri="{FF2B5EF4-FFF2-40B4-BE49-F238E27FC236}">
-                <a16:creationId xmlns:a16="http://schemas.microsoft.com/office/drawing/2014/main" id="{96FA15F4-566C-4D58-81FB-4663EDC1CE23}"/>
+                <a16:creationId xmlns:a16="http://schemas.microsoft.com/office/drawing/2014/main" id="{72BF1FC1-EC3F-40EA-B0FF-4D6D69E6BC83}"/>
               </a:ext>
             </a:extLst>
           </p:cNvPr>
@@ -30243,7 +30243,7 @@
           <p:cNvPr id="15" name="7945G has built-in PoE support">
             <a:extLst xmlns:a="http://schemas.openxmlformats.org/drawingml/2006/main">
               <a:ext uri="{FF2B5EF4-FFF2-40B4-BE49-F238E27FC236}">
-                <a16:creationId xmlns:a16="http://schemas.microsoft.com/office/drawing/2014/main" id="{B9A3D916-4B6D-4BEB-B452-0C55939D2EC8}"/>
+                <a16:creationId xmlns:a16="http://schemas.microsoft.com/office/drawing/2014/main" id="{E63E84E4-DBBD-4E6C-AE94-619DE9480D95}"/>
               </a:ext>
             </a:extLst>
           </p:cNvPr>
@@ -30401,7 +30401,7 @@
           <p:cNvPr id="2" name="05">
             <a:extLst xmlns:a="http://schemas.openxmlformats.org/drawingml/2006/main">
               <a:ext uri="{FF2B5EF4-FFF2-40B4-BE49-F238E27FC236}">
-                <a16:creationId xmlns:a16="http://schemas.microsoft.com/office/drawing/2014/main" id="{F0816E23-3B3E-4264-A0E7-E27D86516D14}"/>
+                <a16:creationId xmlns:a16="http://schemas.microsoft.com/office/drawing/2014/main" id="{F7EB0D69-20D1-4987-922F-C275DF5F751F}"/>
               </a:ext>
             </a:extLst>
           </p:cNvPr>
@@ -30559,7 +30559,7 @@
           <p:cNvPr id="3" name="poe">
             <a:extLst xmlns:a="http://schemas.openxmlformats.org/drawingml/2006/main">
               <a:ext uri="{FF2B5EF4-FFF2-40B4-BE49-F238E27FC236}">
-                <a16:creationId xmlns:a16="http://schemas.microsoft.com/office/drawing/2014/main" id="{B9E012EC-43D1-44B2-9FC7-11EBC05668D5}"/>
+                <a16:creationId xmlns:a16="http://schemas.microsoft.com/office/drawing/2014/main" id="{1561CBD6-8354-49B0-A782-E642A38D7EDA}"/>
               </a:ext>
             </a:extLst>
           </p:cNvPr>
@@ -30746,7 +30746,7 @@
           <p:cNvPr id="4" name="phone1">
             <a:extLst xmlns:a="http://schemas.openxmlformats.org/drawingml/2006/main">
               <a:ext uri="{FF2B5EF4-FFF2-40B4-BE49-F238E27FC236}">
-                <a16:creationId xmlns:a16="http://schemas.microsoft.com/office/drawing/2014/main" id="{F1E3CADD-AC55-4F92-8D17-D21DFA2C93D9}"/>
+                <a16:creationId xmlns:a16="http://schemas.microsoft.com/office/drawing/2014/main" id="{64985894-9E18-4A0C-91FA-910F2A1242E9}"/>
               </a:ext>
             </a:extLst>
           </p:cNvPr>
@@ -30933,7 +30933,7 @@
           <p:cNvPr id="5" name="lan">
             <a:extLst xmlns:a="http://schemas.openxmlformats.org/drawingml/2006/main">
               <a:ext uri="{FF2B5EF4-FFF2-40B4-BE49-F238E27FC236}">
-                <a16:creationId xmlns:a16="http://schemas.microsoft.com/office/drawing/2014/main" id="{DEEEA451-D819-4D60-A1C9-04B57D9CC7BE}"/>
+                <a16:creationId xmlns:a16="http://schemas.microsoft.com/office/drawing/2014/main" id="{93A3454E-EE51-4693-83F4-E26019D86E2B}"/>
               </a:ext>
             </a:extLst>
           </p:cNvPr>
@@ -31120,7 +31120,7 @@
           <p:cNvPr id="6" name="injector">
             <a:extLst xmlns:a="http://schemas.openxmlformats.org/drawingml/2006/main">
               <a:ext uri="{FF2B5EF4-FFF2-40B4-BE49-F238E27FC236}">
-                <a16:creationId xmlns:a16="http://schemas.microsoft.com/office/drawing/2014/main" id="{2DD20694-B1CD-4CDC-B029-9128F9DA542F}"/>
+                <a16:creationId xmlns:a16="http://schemas.microsoft.com/office/drawing/2014/main" id="{01EE1972-9FD7-407C-9635-26D1AB3696E0}"/>
               </a:ext>
             </a:extLst>
           </p:cNvPr>
@@ -31307,7 +31307,7 @@
           <p:cNvPr id="7" name="phone2">
             <a:extLst xmlns:a="http://schemas.openxmlformats.org/drawingml/2006/main">
               <a:ext uri="{FF2B5EF4-FFF2-40B4-BE49-F238E27FC236}">
-                <a16:creationId xmlns:a16="http://schemas.microsoft.com/office/drawing/2014/main" id="{F76D44A5-31F5-436B-B194-ED3A1165109E}"/>
+                <a16:creationId xmlns:a16="http://schemas.microsoft.com/office/drawing/2014/main" id="{3556FE2F-EF4A-4C3A-AA64-2C117239CCCC}"/>
               </a:ext>
             </a:extLst>
           </p:cNvPr>
@@ -31494,7 +31494,7 @@
           <p:cNvPr id="9" name="data + power">
             <a:extLst xmlns:a="http://schemas.openxmlformats.org/drawingml/2006/main">
               <a:ext uri="{FF2B5EF4-FFF2-40B4-BE49-F238E27FC236}">
-                <a16:creationId xmlns:a16="http://schemas.microsoft.com/office/drawing/2014/main" id="{966CB941-CFE0-431F-B776-E620ACA2846F}"/>
+                <a16:creationId xmlns:a16="http://schemas.microsoft.com/office/drawing/2014/main" id="{323846DB-A2C7-4D04-90EB-2284D1BEC20E}"/>
               </a:ext>
             </a:extLst>
           </p:cNvPr>
@@ -31652,7 +31652,7 @@
           <p:cNvPr id="11" name="data">
             <a:extLst xmlns:a="http://schemas.openxmlformats.org/drawingml/2006/main">
               <a:ext uri="{FF2B5EF4-FFF2-40B4-BE49-F238E27FC236}">
-                <a16:creationId xmlns:a16="http://schemas.microsoft.com/office/drawing/2014/main" id="{167B680B-9F9D-4A60-973F-0E132B5E96F1}"/>
+                <a16:creationId xmlns:a16="http://schemas.microsoft.com/office/drawing/2014/main" id="{EFCF0623-DB06-45D8-9A3B-0390A6B0F723}"/>
               </a:ext>
             </a:extLst>
           </p:cNvPr>
@@ -31810,7 +31810,7 @@
           <p:cNvPr id="13" name="PoE">
             <a:extLst xmlns:a="http://schemas.openxmlformats.org/drawingml/2006/main">
               <a:ext uri="{FF2B5EF4-FFF2-40B4-BE49-F238E27FC236}">
-                <a16:creationId xmlns:a16="http://schemas.microsoft.com/office/drawing/2014/main" id="{01FF36A6-680D-41D8-AA7C-68EF79E7247C}"/>
+                <a16:creationId xmlns:a16="http://schemas.microsoft.com/office/drawing/2014/main" id="{9B8BB2C4-A6FE-44BC-B52B-0A74599BF581}"/>
               </a:ext>
             </a:extLst>
           </p:cNvPr>
@@ -31968,7 +31968,7 @@
           <p:cNvPr id="14" name="A passive 24 V injector is unsuitable. The UPS also needs to powe">
             <a:extLst xmlns:a="http://schemas.openxmlformats.org/drawingml/2006/main">
               <a:ext uri="{FF2B5EF4-FFF2-40B4-BE49-F238E27FC236}">
-                <a16:creationId xmlns:a16="http://schemas.microsoft.com/office/drawing/2014/main" id="{40EE6EFE-D81F-4288-9CB4-77F944FAE048}"/>
+                <a16:creationId xmlns:a16="http://schemas.microsoft.com/office/drawing/2014/main" id="{6A3D1533-7F25-4FC3-93A5-F0C882E295D4}"/>
               </a:ext>
             </a:extLst>
           </p:cNvPr>
@@ -32124,7 +32124,7 @@
     </p:spTree>
     <p:extLst>
       <p:ext uri="{BB962C8B-B14F-4D97-AF65-F5344CB8AC3E}">
-        <p14:creationId xmlns:p14="http://schemas.microsoft.com/office/powerpoint/2010/main" val="438418735"/>
+        <p14:creationId xmlns:p14="http://schemas.microsoft.com/office/powerpoint/2010/main" val="1986188370"/>
       </p:ext>
     </p:extLst>
   </p:cSld>
@@ -32155,7 +32155,7 @@
           <p:cNvPr id="13" name="">
             <a:extLst xmlns:a="http://schemas.openxmlformats.org/drawingml/2006/main">
               <a:ext uri="{FF2B5EF4-FFF2-40B4-BE49-F238E27FC236}">
-                <a16:creationId xmlns:a16="http://schemas.microsoft.com/office/drawing/2014/main" id="{3AE26BB7-F6E9-467B-99FB-4957138A2710}"/>
+                <a16:creationId xmlns:a16="http://schemas.microsoft.com/office/drawing/2014/main" id="{8CB7EFBA-BEAD-4DFF-905E-E388173AA0C3}"/>
               </a:ext>
             </a:extLst>
           </p:cNvPr>
@@ -32186,7 +32186,7 @@
           <p:cNvPr id="12" name="">
             <a:extLst xmlns:a="http://schemas.openxmlformats.org/drawingml/2006/main">
               <a:ext uri="{FF2B5EF4-FFF2-40B4-BE49-F238E27FC236}">
-                <a16:creationId xmlns:a16="http://schemas.microsoft.com/office/drawing/2014/main" id="{FBE081B2-D08E-4833-8218-DEEBCA0AC092}"/>
+                <a16:creationId xmlns:a16="http://schemas.microsoft.com/office/drawing/2014/main" id="{4848B036-E6B4-43F8-9BA2-CFBFBE2374B1}"/>
               </a:ext>
             </a:extLst>
           </p:cNvPr>
@@ -32217,7 +32217,7 @@
           <p:cNvPr id="11" name="">
             <a:extLst xmlns:a="http://schemas.openxmlformats.org/drawingml/2006/main">
               <a:ext uri="{FF2B5EF4-FFF2-40B4-BE49-F238E27FC236}">
-                <a16:creationId xmlns:a16="http://schemas.microsoft.com/office/drawing/2014/main" id="{82BE0346-D970-40FA-9327-84510F47FEB2}"/>
+                <a16:creationId xmlns:a16="http://schemas.microsoft.com/office/drawing/2014/main" id="{28AF98C0-C452-43AE-B5AA-287547D48C5F}"/>
               </a:ext>
             </a:extLst>
           </p:cNvPr>
@@ -32248,7 +32248,7 @@
           <p:cNvPr id="10" name="">
             <a:extLst xmlns:a="http://schemas.openxmlformats.org/drawingml/2006/main">
               <a:ext uri="{FF2B5EF4-FFF2-40B4-BE49-F238E27FC236}">
-                <a16:creationId xmlns:a16="http://schemas.microsoft.com/office/drawing/2014/main" id="{0B70BB1C-9645-43C0-9A2A-6662B06CC306}"/>
+                <a16:creationId xmlns:a16="http://schemas.microsoft.com/office/drawing/2014/main" id="{D74320BE-3AC7-450B-A274-080CF50CF77E}"/>
               </a:ext>
             </a:extLst>
           </p:cNvPr>
@@ -32279,7 +32279,7 @@
           <p:cNvPr id="9" name="">
             <a:extLst xmlns:a="http://schemas.openxmlformats.org/drawingml/2006/main">
               <a:ext uri="{FF2B5EF4-FFF2-40B4-BE49-F238E27FC236}">
-                <a16:creationId xmlns:a16="http://schemas.microsoft.com/office/drawing/2014/main" id="{8A7898F4-47F6-460F-AEA4-74F053E376B5}"/>
+                <a16:creationId xmlns:a16="http://schemas.microsoft.com/office/drawing/2014/main" id="{A1B9A0BE-5FA5-4ED1-94C7-99EF42E7BCDA}"/>
               </a:ext>
             </a:extLst>
           </p:cNvPr>
@@ -32310,7 +32310,7 @@
           <p:cNvPr id="15" name="One pilot phone before the full fleet">
             <a:extLst xmlns:a="http://schemas.openxmlformats.org/drawingml/2006/main">
               <a:ext uri="{FF2B5EF4-FFF2-40B4-BE49-F238E27FC236}">
-                <a16:creationId xmlns:a16="http://schemas.microsoft.com/office/drawing/2014/main" id="{FD2EA523-187F-43BC-9A12-3F1D4AAAC924}"/>
+                <a16:creationId xmlns:a16="http://schemas.microsoft.com/office/drawing/2014/main" id="{D381A7D3-4468-4982-B3B2-A1E0287B7226}"/>
               </a:ext>
             </a:extLst>
           </p:cNvPr>
@@ -32468,7 +32468,7 @@
           <p:cNvPr id="2" name="06">
             <a:extLst xmlns:a="http://schemas.openxmlformats.org/drawingml/2006/main">
               <a:ext uri="{FF2B5EF4-FFF2-40B4-BE49-F238E27FC236}">
-                <a16:creationId xmlns:a16="http://schemas.microsoft.com/office/drawing/2014/main" id="{8DC054FA-556C-42AF-88F6-DFF419291E85}"/>
+                <a16:creationId xmlns:a16="http://schemas.microsoft.com/office/drawing/2014/main" id="{D8A479D8-7178-4245-B385-9D37465D935D}"/>
               </a:ext>
             </a:extLst>
           </p:cNvPr>
@@ -32626,7 +32626,7 @@
           <p:cNvPr id="3" name="inventory">
             <a:extLst xmlns:a="http://schemas.openxmlformats.org/drawingml/2006/main">
               <a:ext uri="{FF2B5EF4-FFF2-40B4-BE49-F238E27FC236}">
-                <a16:creationId xmlns:a16="http://schemas.microsoft.com/office/drawing/2014/main" id="{4B458B6F-C648-4A4D-87AA-D14A93D58FE9}"/>
+                <a16:creationId xmlns:a16="http://schemas.microsoft.com/office/drawing/2014/main" id="{DCFF4C67-5C57-4E1D-80A8-7FD7810E508F}"/>
               </a:ext>
             </a:extLst>
           </p:cNvPr>
@@ -32813,7 +32813,7 @@
           <p:cNvPr id="4" name="firmware">
             <a:extLst xmlns:a="http://schemas.openxmlformats.org/drawingml/2006/main">
               <a:ext uri="{FF2B5EF4-FFF2-40B4-BE49-F238E27FC236}">
-                <a16:creationId xmlns:a16="http://schemas.microsoft.com/office/drawing/2014/main" id="{01A9BC1E-5626-40D6-B85C-1EE895DE0930}"/>
+                <a16:creationId xmlns:a16="http://schemas.microsoft.com/office/drawing/2014/main" id="{E6AA1520-2849-4183-A8F4-969924D561FB}"/>
               </a:ext>
             </a:extLst>
           </p:cNvPr>
@@ -33000,7 +33000,7 @@
           <p:cNvPr id="5" name="tftp">
             <a:extLst xmlns:a="http://schemas.openxmlformats.org/drawingml/2006/main">
               <a:ext uri="{FF2B5EF4-FFF2-40B4-BE49-F238E27FC236}">
-                <a16:creationId xmlns:a16="http://schemas.microsoft.com/office/drawing/2014/main" id="{A10F8696-AA28-454B-AADF-32C632749725}"/>
+                <a16:creationId xmlns:a16="http://schemas.microsoft.com/office/drawing/2014/main" id="{CA43B387-5D5A-4C76-BB51-7FAB3B42242A}"/>
               </a:ext>
             </a:extLst>
           </p:cNvPr>
@@ -33187,7 +33187,7 @@
           <p:cNvPr id="6" name="pilot">
             <a:extLst xmlns:a="http://schemas.openxmlformats.org/drawingml/2006/main">
               <a:ext uri="{FF2B5EF4-FFF2-40B4-BE49-F238E27FC236}">
-                <a16:creationId xmlns:a16="http://schemas.microsoft.com/office/drawing/2014/main" id="{DAEC2F56-7F06-43DA-B3F2-6571D1D41806}"/>
+                <a16:creationId xmlns:a16="http://schemas.microsoft.com/office/drawing/2014/main" id="{4994A53E-DCDE-45EC-BF61-D561D281F2A3}"/>
               </a:ext>
             </a:extLst>
           </p:cNvPr>
@@ -33374,7 +33374,7 @@
           <p:cNvPr id="7" name="accept">
             <a:extLst xmlns:a="http://schemas.openxmlformats.org/drawingml/2006/main">
               <a:ext uri="{FF2B5EF4-FFF2-40B4-BE49-F238E27FC236}">
-                <a16:creationId xmlns:a16="http://schemas.microsoft.com/office/drawing/2014/main" id="{DE441AC1-3F46-468B-8F7F-20757000E49A}"/>
+                <a16:creationId xmlns:a16="http://schemas.microsoft.com/office/drawing/2014/main" id="{8181EA64-6DB4-43A9-89BD-66B1C44A549F}"/>
               </a:ext>
             </a:extLst>
           </p:cNvPr>
@@ -33561,7 +33561,7 @@
           <p:cNvPr id="8" name="fleet">
             <a:extLst xmlns:a="http://schemas.openxmlformats.org/drawingml/2006/main">
               <a:ext uri="{FF2B5EF4-FFF2-40B4-BE49-F238E27FC236}">
-                <a16:creationId xmlns:a16="http://schemas.microsoft.com/office/drawing/2014/main" id="{7E54E41F-2031-41E7-9463-EFBEB93DEE0A}"/>
+                <a16:creationId xmlns:a16="http://schemas.microsoft.com/office/drawing/2014/main" id="{CD1F521C-7015-4895-9BB6-FB54656BAA10}"/>
               </a:ext>
             </a:extLst>
           </p:cNvPr>
@@ -33748,7 +33748,7 @@
           <p:cNvPr id="14" name="HW 13.0+ requires at least 9.3(1)SR3. The upgrade path depends on">
             <a:extLst xmlns:a="http://schemas.openxmlformats.org/drawingml/2006/main">
               <a:ext uri="{FF2B5EF4-FFF2-40B4-BE49-F238E27FC236}">
-                <a16:creationId xmlns:a16="http://schemas.microsoft.com/office/drawing/2014/main" id="{7657AF4C-D3E2-4183-B4A0-3451A7EB5AAD}"/>
+                <a16:creationId xmlns:a16="http://schemas.microsoft.com/office/drawing/2014/main" id="{D0DFA3DE-2911-47C0-B948-B13580D0A967}"/>
               </a:ext>
             </a:extLst>
           </p:cNvPr>
@@ -33927,7 +33927,7 @@
     </p:spTree>
     <p:extLst>
       <p:ext uri="{BB962C8B-B14F-4D97-AF65-F5344CB8AC3E}">
-        <p14:creationId xmlns:p14="http://schemas.microsoft.com/office/powerpoint/2010/main" val="1991470394"/>
+        <p14:creationId xmlns:p14="http://schemas.microsoft.com/office/powerpoint/2010/main" val="1012363617"/>
       </p:ext>
     </p:extLst>
   </p:cSld>
@@ -33958,7 +33958,7 @@
           <p:cNvPr id="8" name="TFTP preparation before restart">
             <a:extLst xmlns:a="http://schemas.openxmlformats.org/drawingml/2006/main">
               <a:ext uri="{FF2B5EF4-FFF2-40B4-BE49-F238E27FC236}">
-                <a16:creationId xmlns:a16="http://schemas.microsoft.com/office/drawing/2014/main" id="{BA5F6F6E-B424-41C6-BFDD-274CF08C30EE}"/>
+                <a16:creationId xmlns:a16="http://schemas.microsoft.com/office/drawing/2014/main" id="{D121789E-9C8C-4042-BC6C-F6D1893FEEE4}"/>
               </a:ext>
             </a:extLst>
           </p:cNvPr>
@@ -34116,7 +34116,7 @@
           <p:cNvPr id="2" name="07">
             <a:extLst xmlns:a="http://schemas.openxmlformats.org/drawingml/2006/main">
               <a:ext uri="{FF2B5EF4-FFF2-40B4-BE49-F238E27FC236}">
-                <a16:creationId xmlns:a16="http://schemas.microsoft.com/office/drawing/2014/main" id="{21FCB8D7-5F0C-4E20-95C7-491BA6A1F06D}"/>
+                <a16:creationId xmlns:a16="http://schemas.microsoft.com/office/drawing/2014/main" id="{0422F7D5-2F0F-4C4D-BBA2-F123595AA4A3}"/>
               </a:ext>
             </a:extLst>
           </p:cNvPr>
@@ -34274,7 +34274,7 @@
           <p:cNvPr id="3" name="Complete official firmware bundle">
             <a:extLst xmlns:a="http://schemas.openxmlformats.org/drawingml/2006/main">
               <a:ext uri="{FF2B5EF4-FFF2-40B4-BE49-F238E27FC236}">
-                <a16:creationId xmlns:a16="http://schemas.microsoft.com/office/drawing/2014/main" id="{6CD1B4C3-BC4E-4949-B308-FDB1D9A22727}"/>
+                <a16:creationId xmlns:a16="http://schemas.microsoft.com/office/drawing/2014/main" id="{73BCE527-9339-4709-9B5C-357571F04536}"/>
               </a:ext>
             </a:extLst>
           </p:cNvPr>
@@ -34432,7 +34432,7 @@
           <p:cNvPr id="4" name=".loads and every referenced binary file&#10;with the original filenam">
             <a:extLst xmlns:a="http://schemas.openxmlformats.org/drawingml/2006/main">
               <a:ext uri="{FF2B5EF4-FFF2-40B4-BE49-F238E27FC236}">
-                <a16:creationId xmlns:a16="http://schemas.microsoft.com/office/drawing/2014/main" id="{3C25F913-3545-4315-9851-45BD96677D06}"/>
+                <a16:creationId xmlns:a16="http://schemas.microsoft.com/office/drawing/2014/main" id="{3DD0297D-0441-4EBB-BFFF-C459A5D759D3}"/>
               </a:ext>
             </a:extLst>
           </p:cNvPr>
@@ -34613,7 +34613,7 @@
           <p:cNvPr id="5" name="SEP&lt;MAC&gt;.cnf.xml">
             <a:extLst xmlns:a="http://schemas.openxmlformats.org/drawingml/2006/main">
               <a:ext uri="{FF2B5EF4-FFF2-40B4-BE49-F238E27FC236}">
-                <a16:creationId xmlns:a16="http://schemas.microsoft.com/office/drawing/2014/main" id="{0E64AC24-2C8F-4CA8-BA5D-15B815E9D651}"/>
+                <a16:creationId xmlns:a16="http://schemas.microsoft.com/office/drawing/2014/main" id="{8A2D981F-2F1A-433F-963D-8EEC6014DC50}"/>
               </a:ext>
             </a:extLst>
           </p:cNvPr>
@@ -34771,7 +34771,7 @@
           <p:cNvPr id="6" name="SIP server, extension and a unique password&#10;Load ID from the sele">
             <a:extLst xmlns:a="http://schemas.openxmlformats.org/drawingml/2006/main">
               <a:ext uri="{FF2B5EF4-FFF2-40B4-BE49-F238E27FC236}">
-                <a16:creationId xmlns:a16="http://schemas.microsoft.com/office/drawing/2014/main" id="{FC52C4CF-2906-42AC-A729-FD64EF4216C7}"/>
+                <a16:creationId xmlns:a16="http://schemas.microsoft.com/office/drawing/2014/main" id="{6F753FE9-998C-450C-A05E-50153A02BD7D}"/>
               </a:ext>
             </a:extLst>
           </p:cNvPr>
@@ -34952,7 +34952,7 @@
           <p:cNvPr id="7" name="Use DHCP option 150 on the home router or Alternate TFTP on the p">
             <a:extLst xmlns:a="http://schemas.openxmlformats.org/drawingml/2006/main">
               <a:ext uri="{FF2B5EF4-FFF2-40B4-BE49-F238E27FC236}">
-                <a16:creationId xmlns:a16="http://schemas.microsoft.com/office/drawing/2014/main" id="{F0023F81-85A3-47BB-8685-0CF9714AA1FF}"/>
+                <a16:creationId xmlns:a16="http://schemas.microsoft.com/office/drawing/2014/main" id="{C8289C49-7291-4E53-87A1-6C5032EF6104}"/>
               </a:ext>
             </a:extLst>
           </p:cNvPr>
@@ -35108,7 +35108,7 @@
     </p:spTree>
     <p:extLst>
       <p:ext uri="{BB962C8B-B14F-4D97-AF65-F5344CB8AC3E}">
-        <p14:creationId xmlns:p14="http://schemas.microsoft.com/office/powerpoint/2010/main" val="2018942248"/>
+        <p14:creationId xmlns:p14="http://schemas.microsoft.com/office/powerpoint/2010/main" val="2056708704"/>
       </p:ext>
     </p:extLst>
   </p:cSld>
@@ -35139,7 +35139,7 @@
           <p:cNvPr id="8" name="Asterisk: independent SIP lines">
             <a:extLst xmlns:a="http://schemas.openxmlformats.org/drawingml/2006/main">
               <a:ext uri="{FF2B5EF4-FFF2-40B4-BE49-F238E27FC236}">
-                <a16:creationId xmlns:a16="http://schemas.microsoft.com/office/drawing/2014/main" id="{C4C9C4D3-558D-486C-AF19-906FB52D2B0B}"/>
+                <a16:creationId xmlns:a16="http://schemas.microsoft.com/office/drawing/2014/main" id="{A55D4030-EE85-4A4D-9C97-9321FD56CD4A}"/>
               </a:ext>
             </a:extLst>
           </p:cNvPr>
@@ -35297,7 +35297,7 @@
           <p:cNvPr id="2" name="08">
             <a:extLst xmlns:a="http://schemas.openxmlformats.org/drawingml/2006/main">
               <a:ext uri="{FF2B5EF4-FFF2-40B4-BE49-F238E27FC236}">
-                <a16:creationId xmlns:a16="http://schemas.microsoft.com/office/drawing/2014/main" id="{F5FEFFE2-C7C4-4981-9167-37E1CD15B756}"/>
+                <a16:creationId xmlns:a16="http://schemas.microsoft.com/office/drawing/2014/main" id="{BB51C624-FEEC-499E-A6C7-93607785DA9F}"/>
               </a:ext>
             </a:extLst>
           </p:cNvPr>
@@ -35455,7 +35455,7 @@
           <p:cNvPr id="3" name="201 / 202">
             <a:extLst xmlns:a="http://schemas.openxmlformats.org/drawingml/2006/main">
               <a:ext uri="{FF2B5EF4-FFF2-40B4-BE49-F238E27FC236}">
-                <a16:creationId xmlns:a16="http://schemas.microsoft.com/office/drawing/2014/main" id="{22E53C16-E913-411E-A67D-166199E8C556}"/>
+                <a16:creationId xmlns:a16="http://schemas.microsoft.com/office/drawing/2014/main" id="{D6609192-D19B-4BF2-B266-E5E2709AF5B1}"/>
               </a:ext>
             </a:extLst>
           </p:cNvPr>
@@ -35613,7 +35613,7 @@
           <p:cNvPr id="4" name="one phone">
             <a:extLst xmlns:a="http://schemas.openxmlformats.org/drawingml/2006/main">
               <a:ext uri="{FF2B5EF4-FFF2-40B4-BE49-F238E27FC236}">
-                <a16:creationId xmlns:a16="http://schemas.microsoft.com/office/drawing/2014/main" id="{E81BAD60-550A-4F22-A315-5ADB489FE3E3}"/>
+                <a16:creationId xmlns:a16="http://schemas.microsoft.com/office/drawing/2014/main" id="{D2149388-87DE-4035-8819-E1059B7794EF}"/>
               </a:ext>
             </a:extLst>
           </p:cNvPr>
@@ -35771,7 +35771,7 @@
           <p:cNvPr id="5" name="One endpoint, auth and AOR per line&#10;A unique password for each li">
             <a:extLst xmlns:a="http://schemas.openxmlformats.org/drawingml/2006/main">
               <a:ext uri="{FF2B5EF4-FFF2-40B4-BE49-F238E27FC236}">
-                <a16:creationId xmlns:a16="http://schemas.microsoft.com/office/drawing/2014/main" id="{430CE8A9-AA7F-477A-A487-29C33944C4BF}"/>
+                <a16:creationId xmlns:a16="http://schemas.microsoft.com/office/drawing/2014/main" id="{B7240942-777C-472A-864D-2E252CD84B26}"/>
               </a:ext>
             </a:extLst>
           </p:cNvPr>
@@ -35952,7 +35952,7 @@
           <p:cNvPr id="6" name="G.711 ulaw / alaw&#10;direct_media=no keeps RTP on Asterisk">
             <a:extLst xmlns:a="http://schemas.openxmlformats.org/drawingml/2006/main">
               <a:ext uri="{FF2B5EF4-FFF2-40B4-BE49-F238E27FC236}">
-                <a16:creationId xmlns:a16="http://schemas.microsoft.com/office/drawing/2014/main" id="{FCDDCAD0-92B5-4B2D-91CF-EF32AD52E544}"/>
+                <a16:creationId xmlns:a16="http://schemas.microsoft.com/office/drawing/2014/main" id="{17A1816F-6485-4E83-B6A4-FFCC54C34D61}"/>
               </a:ext>
             </a:extLst>
           </p:cNvPr>
@@ -36133,7 +36133,7 @@
           <p:cNvPr id="7" name="600 echo, 601 tone, 620 ring group. Extension 630 requires Assist">
             <a:extLst xmlns:a="http://schemas.openxmlformats.org/drawingml/2006/main">
               <a:ext uri="{FF2B5EF4-FFF2-40B4-BE49-F238E27FC236}">
-                <a16:creationId xmlns:a16="http://schemas.microsoft.com/office/drawing/2014/main" id="{AFF78423-FDAB-4CFD-9FF3-5CEA09162914}"/>
+                <a16:creationId xmlns:a16="http://schemas.microsoft.com/office/drawing/2014/main" id="{C1F2ECFD-52B7-4668-A8BF-30B68D02044F}"/>
               </a:ext>
             </a:extLst>
           </p:cNvPr>
@@ -36289,7 +36289,7 @@
     </p:spTree>
     <p:extLst>
       <p:ext uri="{BB962C8B-B14F-4D97-AF65-F5344CB8AC3E}">
-        <p14:creationId xmlns:p14="http://schemas.microsoft.com/office/powerpoint/2010/main" val="1282098564"/>
+        <p14:creationId xmlns:p14="http://schemas.microsoft.com/office/powerpoint/2010/main" val="2084766836"/>
       </p:ext>
     </p:extLst>
   </p:cSld>
@@ -36320,7 +36320,7 @@
           <p:cNvPr id="8" name="AMI: status and call control">
             <a:extLst xmlns:a="http://schemas.openxmlformats.org/drawingml/2006/main">
               <a:ext uri="{FF2B5EF4-FFF2-40B4-BE49-F238E27FC236}">
-                <a16:creationId xmlns:a16="http://schemas.microsoft.com/office/drawing/2014/main" id="{FC7B78A1-008A-418F-9962-D09DB2E583A7}"/>
+                <a16:creationId xmlns:a16="http://schemas.microsoft.com/office/drawing/2014/main" id="{BA971710-F646-4791-9A08-479A5F72824C}"/>
               </a:ext>
             </a:extLst>
           </p:cNvPr>
@@ -36478,7 +36478,7 @@
           <p:cNvPr id="2" name="09">
             <a:extLst xmlns:a="http://schemas.openxmlformats.org/drawingml/2006/main">
               <a:ext uri="{FF2B5EF4-FFF2-40B4-BE49-F238E27FC236}">
-                <a16:creationId xmlns:a16="http://schemas.microsoft.com/office/drawing/2014/main" id="{90AC7923-4663-4EE6-99FF-37687135F54E}"/>
+                <a16:creationId xmlns:a16="http://schemas.microsoft.com/office/drawing/2014/main" id="{466F114C-89BF-49B7-A46E-56A8F450787C}"/>
               </a:ext>
             </a:extLst>
           </p:cNvPr>
@@ -36636,7 +36636,7 @@
           <p:cNvPr id="3" name="Home Assistant connects to PBX:5038">
             <a:extLst xmlns:a="http://schemas.openxmlformats.org/drawingml/2006/main">
               <a:ext uri="{FF2B5EF4-FFF2-40B4-BE49-F238E27FC236}">
-                <a16:creationId xmlns:a16="http://schemas.microsoft.com/office/drawing/2014/main" id="{A51954D8-7D0E-4F16-815A-048DD8E19D01}"/>
+                <a16:creationId xmlns:a16="http://schemas.microsoft.com/office/drawing/2014/main" id="{5E67E888-C76C-44B2-A6BB-B82DEEB5AEFC}"/>
               </a:ext>
             </a:extLst>
           </p:cNvPr>
@@ -36794,7 +36794,7 @@
           <p:cNvPr id="4" name="Status, connected line and DTMF&#10;Actual entity IDs from your HA in">
             <a:extLst xmlns:a="http://schemas.openxmlformats.org/drawingml/2006/main">
               <a:ext uri="{FF2B5EF4-FFF2-40B4-BE49-F238E27FC236}">
-                <a16:creationId xmlns:a16="http://schemas.microsoft.com/office/drawing/2014/main" id="{712E1CFD-5512-4235-8644-6518B50D6237}"/>
+                <a16:creationId xmlns:a16="http://schemas.microsoft.com/office/drawing/2014/main" id="{B466EF99-84A6-43D4-8B68-702795F8B347}"/>
               </a:ext>
             </a:extLst>
           </p:cNvPr>
@@ -36975,7 +36975,7 @@
           <p:cNvPr id="5" name="Place calls and hang up a specific channel">
             <a:extLst xmlns:a="http://schemas.openxmlformats.org/drawingml/2006/main">
               <a:ext uri="{FF2B5EF4-FFF2-40B4-BE49-F238E27FC236}">
-                <a16:creationId xmlns:a16="http://schemas.microsoft.com/office/drawing/2014/main" id="{D678AF2D-6ABD-4BD4-8A73-FFFBA836629C}"/>
+                <a16:creationId xmlns:a16="http://schemas.microsoft.com/office/drawing/2014/main" id="{A45D67E9-A117-4F23-BCFE-A4C8BF6A3834}"/>
               </a:ext>
             </a:extLst>
           </p:cNvPr>
@@ -37133,7 +37133,7 @@
           <p:cNvPr id="6" name="asterisk.send_action: Originate / Hangup&#10;The DTMF example sends a">
             <a:extLst xmlns:a="http://schemas.openxmlformats.org/drawingml/2006/main">
               <a:ext uri="{FF2B5EF4-FFF2-40B4-BE49-F238E27FC236}">
-                <a16:creationId xmlns:a16="http://schemas.microsoft.com/office/drawing/2014/main" id="{793AC797-B6C1-4B83-B111-2BBBAB84AC4B}"/>
+                <a16:creationId xmlns:a16="http://schemas.microsoft.com/office/drawing/2014/main" id="{D9CE9CAA-C411-4148-BA15-F94545993208}"/>
               </a:ext>
             </a:extLst>
           </p:cNvPr>
@@ -37314,7 +37314,7 @@
           <p:cNvPr id="7" name="Use a separate secret and a /32 ACL. The system permission allows">
             <a:extLst xmlns:a="http://schemas.openxmlformats.org/drawingml/2006/main">
               <a:ext uri="{FF2B5EF4-FFF2-40B4-BE49-F238E27FC236}">
-                <a16:creationId xmlns:a16="http://schemas.microsoft.com/office/drawing/2014/main" id="{0913D359-75D6-4CA2-BA40-0DB67ED196A7}"/>
+                <a16:creationId xmlns:a16="http://schemas.microsoft.com/office/drawing/2014/main" id="{2E546900-950C-42E4-BD85-51449C192582}"/>
               </a:ext>
             </a:extLst>
           </p:cNvPr>
@@ -37470,7 +37470,7 @@
     </p:spTree>
     <p:extLst>
       <p:ext uri="{BB962C8B-B14F-4D97-AF65-F5344CB8AC3E}">
-        <p14:creationId xmlns:p14="http://schemas.microsoft.com/office/powerpoint/2010/main" val="1482419160"/>
+        <p14:creationId xmlns:p14="http://schemas.microsoft.com/office/powerpoint/2010/main" val="1676028873"/>
       </p:ext>
     </p:extLst>
   </p:cSld>

--- a/docs/slides/cisco-home-telephony.pptx
+++ b/docs/slides/cisco-home-telephony.pptx
@@ -2,30 +2,30 @@
 <file path=ppt/presentation.xml><?xml version="1.0" encoding="utf-8"?>
 <p:presentation xmlns:p="http://schemas.openxmlformats.org/presentationml/2006/main">
   <p:sldMasterIdLst>
-    <p:sldMasterId xmlns:r="http://schemas.openxmlformats.org/officeDocument/2006/relationships" id="2147483648" r:id="Rc60615b1ea994c6e"/>
+    <p:sldMasterId xmlns:r="http://schemas.openxmlformats.org/officeDocument/2006/relationships" id="2147483648" r:id="R6b1d9439fcfc432d"/>
   </p:sldMasterIdLst>
   <p:notesMasterIdLst>
-    <p:notesMasterId xmlns:r="http://schemas.openxmlformats.org/officeDocument/2006/relationships" r:id="Red0308d7f24a42f7"/>
+    <p:notesMasterId xmlns:r="http://schemas.openxmlformats.org/officeDocument/2006/relationships" r:id="Re762431093b2428b"/>
   </p:notesMasterIdLst>
   <p:sldIdLst>
-    <p:sldId xmlns:r="http://schemas.openxmlformats.org/officeDocument/2006/relationships" id="256" r:id="Rf680a2e95ae44a2a"/>
-    <p:sldId xmlns:r="http://schemas.openxmlformats.org/officeDocument/2006/relationships" id="257" r:id="Rbe3a4dbc74da42eb"/>
-    <p:sldId xmlns:r="http://schemas.openxmlformats.org/officeDocument/2006/relationships" id="258" r:id="R9a56e51a9a1b4c92"/>
-    <p:sldId xmlns:r="http://schemas.openxmlformats.org/officeDocument/2006/relationships" id="259" r:id="R4a6853c181ec49b7"/>
-    <p:sldId xmlns:r="http://schemas.openxmlformats.org/officeDocument/2006/relationships" id="260" r:id="R6ac73f7ae48948dd"/>
-    <p:sldId xmlns:r="http://schemas.openxmlformats.org/officeDocument/2006/relationships" id="261" r:id="R13a62048ce3d49fb"/>
-    <p:sldId xmlns:r="http://schemas.openxmlformats.org/officeDocument/2006/relationships" id="262" r:id="Rb1a076189df7400c"/>
-    <p:sldId xmlns:r="http://schemas.openxmlformats.org/officeDocument/2006/relationships" id="263" r:id="R8f46d56bf77c408b"/>
-    <p:sldId xmlns:r="http://schemas.openxmlformats.org/officeDocument/2006/relationships" id="264" r:id="Rbc4d8875a1f14856"/>
-    <p:sldId xmlns:r="http://schemas.openxmlformats.org/officeDocument/2006/relationships" id="265" r:id="Re916562666994f3b"/>
-    <p:sldId xmlns:r="http://schemas.openxmlformats.org/officeDocument/2006/relationships" id="266" r:id="Re86db2a43cd44283"/>
-    <p:sldId xmlns:r="http://schemas.openxmlformats.org/officeDocument/2006/relationships" id="267" r:id="R0baad21cfc02454d"/>
-    <p:sldId xmlns:r="http://schemas.openxmlformats.org/officeDocument/2006/relationships" id="268" r:id="R011339494f074099"/>
-    <p:sldId xmlns:r="http://schemas.openxmlformats.org/officeDocument/2006/relationships" id="269" r:id="Rc421db799f6641b5"/>
-    <p:sldId xmlns:r="http://schemas.openxmlformats.org/officeDocument/2006/relationships" id="270" r:id="R70feb78dd01b4be6"/>
-    <p:sldId xmlns:r="http://schemas.openxmlformats.org/officeDocument/2006/relationships" id="271" r:id="Rdfaf4f82ae4b4d4a"/>
-    <p:sldId xmlns:r="http://schemas.openxmlformats.org/officeDocument/2006/relationships" id="272" r:id="R46fa2b66ee454dcb"/>
-    <p:sldId xmlns:r="http://schemas.openxmlformats.org/officeDocument/2006/relationships" id="273" r:id="Re798a9f0e11045da"/>
+    <p:sldId xmlns:r="http://schemas.openxmlformats.org/officeDocument/2006/relationships" id="256" r:id="R738a6ac365354f8f"/>
+    <p:sldId xmlns:r="http://schemas.openxmlformats.org/officeDocument/2006/relationships" id="257" r:id="R87a285ce105240d5"/>
+    <p:sldId xmlns:r="http://schemas.openxmlformats.org/officeDocument/2006/relationships" id="258" r:id="Rb05e1d6956c24400"/>
+    <p:sldId xmlns:r="http://schemas.openxmlformats.org/officeDocument/2006/relationships" id="259" r:id="R2eb1a21fe75c43e9"/>
+    <p:sldId xmlns:r="http://schemas.openxmlformats.org/officeDocument/2006/relationships" id="260" r:id="Rc6bb8c5a300446ff"/>
+    <p:sldId xmlns:r="http://schemas.openxmlformats.org/officeDocument/2006/relationships" id="261" r:id="R6acb425a66f64d77"/>
+    <p:sldId xmlns:r="http://schemas.openxmlformats.org/officeDocument/2006/relationships" id="262" r:id="R1974764f0de244d4"/>
+    <p:sldId xmlns:r="http://schemas.openxmlformats.org/officeDocument/2006/relationships" id="263" r:id="R5144dc86c67c4646"/>
+    <p:sldId xmlns:r="http://schemas.openxmlformats.org/officeDocument/2006/relationships" id="264" r:id="R9550e6cd3a8d435e"/>
+    <p:sldId xmlns:r="http://schemas.openxmlformats.org/officeDocument/2006/relationships" id="265" r:id="R3d13d94e4d4b41d0"/>
+    <p:sldId xmlns:r="http://schemas.openxmlformats.org/officeDocument/2006/relationships" id="266" r:id="Rb83da82ba9244179"/>
+    <p:sldId xmlns:r="http://schemas.openxmlformats.org/officeDocument/2006/relationships" id="267" r:id="R3c17022989f74b47"/>
+    <p:sldId xmlns:r="http://schemas.openxmlformats.org/officeDocument/2006/relationships" id="268" r:id="Rbbe016339ad74f1a"/>
+    <p:sldId xmlns:r="http://schemas.openxmlformats.org/officeDocument/2006/relationships" id="269" r:id="Rb701a190f29249da"/>
+    <p:sldId xmlns:r="http://schemas.openxmlformats.org/officeDocument/2006/relationships" id="270" r:id="Rbfea24c8d99a45c8"/>
+    <p:sldId xmlns:r="http://schemas.openxmlformats.org/officeDocument/2006/relationships" id="271" r:id="Rdde9d8f79934451a"/>
+    <p:sldId xmlns:r="http://schemas.openxmlformats.org/officeDocument/2006/relationships" id="272" r:id="Ree2640ddacdd424a"/>
+    <p:sldId xmlns:r="http://schemas.openxmlformats.org/officeDocument/2006/relationships" id="273" r:id="R8085a85832a94cb0"/>
   </p:sldIdLst>
   <p:sldSz cx="12192000" cy="6858000"/>
   <p:notesSz cx="6858000" cy="9144000"/>
@@ -459,7 +459,7 @@
           <a:lstStyle xmlns:a="http://schemas.openxmlformats.org/drawingml/2006/main"/>
           <a:p xmlns:a="http://schemas.openxmlformats.org/drawingml/2006/main">
             <a:r>
-              <a:t>The purchased lot contained 10 Cisco 7945G phones. The eBay delivery email dated December 1, 2022 confirms the model. Shipping and payment details are excluded from the repository. Inventory each remaining phone to establish its condition and firmware. Updated October 17, 2026. These slides describe the architecture and deployment process. Actual installation and call results belong in the separate acceptance record.</a:t>
+              <a:t>Cisco 7945G phones provide a color display, two line buttons and native IEEE 802.3af PoE. This project uses one or two independently authenticated SIP lines per phone, Asterisk in k3s and Home Assistant. Verify the model, hardware revision and installed firmware on each physical phone before generating its configuration. These slides describe the architecture and deployment process. The acceptance record separates component tests from actual call and audio results.</a:t>
             </a:r>
           </a:p>
         </p:txBody>
@@ -829,7 +829,7 @@
           <a:lstStyle xmlns:a="http://schemas.openxmlformats.org/drawingml/2006/main"/>
           <a:p xmlns:a="http://schemas.openxmlformats.org/drawingml/2006/main">
             <a:r>
-              <a:t>Record actual hardware results in a separate private acceptance log. These slides describe preparation and acceptance criteria. Inventory the surviving devices to record PID/HW/MAC, App Load, network addresses and power. Automated tests verify components and configuration. Physical acceptance covers audio, HA call control, DTMF and Assist on real phones. After the pilot passes, add the remaining phones one at a time.</a:t>
+              <a:t>Record actual hardware results in a separate private acceptance log. These slides describe preparation and acceptance criteria. Inventory each device to record PID/HW/MAC, App Load, network addresses and power. Automated tests verify components and configuration. Physical acceptance covers audio, HA call control, DTMF and Assist on real phones. After the pilot passes, add the remaining phones one at a time.</a:t>
             </a:r>
           </a:p>
         </p:txBody>
@@ -969,7 +969,7 @@
           <a:lstStyle xmlns:a="http://schemas.openxmlformats.org/drawingml/2006/main"/>
           <a:p xmlns:a="http://schemas.openxmlformats.org/drawingml/2006/main">
             <a:r>
-              <a:t>The four-phone control integration exposes 120 entities. It preserves the separate TECH7Fox Asterisk and native HA VoIP integrations. Timers and weekday alarms persist and record each occurrence before a single ring request. Missed events, busy phones, DND and ambiguous API results do not retry automatically. DND is a persistent gateway/PBX preference restored after Asterisk restart. Gateway auto-answer is opt-in, off by default, and acts only on one fresh incoming Ringing channel. Text and local approved images use authenticated phone CGI with short-lived source-restricted content. Exclude text and countdown entities from Recorder. Live feature acceptance remains underway. Sources: https://github.com/ha-homelab/asterisk-telephony/blob/main/docs/phone-controls.md and https://github.com/4alvit/cisco-home-telephony/blob/main/docs/phone-gateway.md</a:t>
+              <a:t>The updated four-phone integration defines 116 entities. Deployment and live acceptance of the revised alert contract are pending. It removes Alarm sound and Timer sound selectors and adds Stop alert. Timers and weekday alarms keep ringing until a person answers or rejects at the phone, presses Stop alert, cancels the active timer, or disables the active alarm. They never auto-answer and play no audio after answering. HA Answer is blocked for alert channels. The gateway persists alert identities and reconciles the same channels after a gateway restart without replaying events after PBX or power loss. Normal calls retain optional auto-answer, off by default. The separate TECH7Fox Asterisk and native HA VoIP integrations remain in use. Earlier finite-tone tests do not validate the new behavior. Existing saved pilot evidence covers normal gateway calls, exact-channel Hangup, DND and displayed text/PNG content. Sources: docs/server-validation.md, docs/phone-gateway.md and https://github.com/ha-homelab/asterisk-telephony/blob/main/docs/phone-controls.md .</a:t>
             </a:r>
           </a:p>
         </p:txBody>
@@ -1039,7 +1039,7 @@
           <a:lstStyle xmlns:a="http://schemas.openxmlformats.org/drawingml/2006/main"/>
           <a:p xmlns:a="http://schemas.openxmlformats.org/drawingml/2006/main">
             <a:r>
-              <a:t>Alarm640 plays a finite local tone on answer, capped at 30 seconds, then hangs up. HA rings for up to 20 seconds and does not retry busy, DND or missed events. Radio is opt-in and starts a bounded FFmpeg/AudioSocket worker only for the active call. The default limit is 30 minutes, with 2 concurrent streams. Stream host allowlists and network validation prevent arbitrary URL fetching. The seven official stream sources decoded successfully in the worker probe on October 17, 2026. That is distinct from each handset's live audio acceptance, which remains underway. Source documentation: https://github.com/4alvit/cisco-home-telephony/blob/main/docs/radio-and-alarms.md . Official stations: https://matryoshka.fm/ , https://echofm.online/ , https://streams.radiobob.de/ , https://somafm.com/poptron/directstreamlinks.html , https://www.radyoviva.com.tr/ .</a:t>
+              <a:t>The new timer/alarm contract rings until a person answers, rejects or stops the alert. It never auto-answers or plays after-answer audio. Deployment and live acceptance of that revised behavior are pending. A private Asterisk Local helper omits Dial timeout, ignores forwarding and uses WaitForSignal without an interval. The five-second AMI timeout bounds only the initial Local answer, not handset ringing. Manual 640 remains a finite tone test and the old 20-second ring API remains a legacy finite call, neither used by the new scheduler. Radio is unchanged: an opt-in FFmpeg/AudioSocket worker runs only for the active call, with a default 30-minute limit and two concurrent streams. All seven official streams decoded in the saved probe, and radio 701 reached Up with increasing bidirectional RTP counters and exact-channel cleanup. Human confirmation of radio audibility remains separate. Sources: docs/server-validation.md and docs/radio-and-alarms.md . Official stations: https://matryoshka.fm/ , https://echofm.online/ , https://streams.radiobob.de/ , https://somafm.com/poptron/directstreamlinks.html , https://www.radyoviva.com.tr/ .</a:t>
             </a:r>
           </a:p>
         </p:txBody>
@@ -1109,7 +1109,7 @@
           <a:lstStyle xmlns:a="http://schemas.openxmlformats.org/drawingml/2006/main"/>
           <a:p xmlns:a="http://schemas.openxmlformats.org/drawingml/2006/main">
             <a:r>
-              <a:t>Status snapshot: October 17, 2026. SIP2SIP, Callcentric and Linphone all reached Registered in the live Asterisk instance. Callcentric IP Freedom account activation completed with a $0 plan and $0 balance, but the provider dashboard blocks outbound calls pending risk review by support. Callcentric and Linphone are registration-only, with no active 801 or 803 dial route; Linphone still needs an explicitly verified free peer. SIP2SIP 802 targets the official 4444 echo destination. Its external audio pilot was deferred at the user's request, so registration is verified but external call media is not. Free accounts do not imply free PSTN calls. FWD issued credentials but its mandatory identity-verification flow opened a Verification Fee checkout, so activation stopped. Google Voice supplies no official free generic Asterisk SIP trunk. Working external calls require an answered call and bidirectional RTP evidence in addition to REGISTER. Sources: https://sip2sip.info/help/ ; https://www.callcentric.com/rate/plans/ip_freedom/ ; https://www.callcentric.com/support/device/asterisk/17_pjsip ; https://www.linphone.org/en/faq/ ; https://www.fwdialup.com/mission ; https://knowledge.workspace.google.com/admin/voice/sip-link-requirements ; docs/external-sip.md and docs/extended-services-research.md.</a:t>
+              <a:t>Status snapshot: October 17, 2026. SIP2SIP, Callcentric and Linphone all reached Registered in the live Asterisk instance. Callcentric IP Freedom has a $0 plan and $0 balance, but outbound calls require provider risk review. Callcentric and Linphone remain registration-only with no active 801/803 route, and Linphone needs a verified free peer. The bounded SIP2SIP 802 call to its fixed 4444 echo destination answered and exchanged RTP in both directions. Local receive-loss counts increased from 42 to 91 between samples, reporting 49 additional missing packets. These samples do not establish an exact overall loss percentage or cause. Reported RTT was about 155 ms. All eight local lines remained available and owned channels were cleaned up. Human listening and satisfactory external audio quality are not claimed. Free accounts do not imply free PSTN. FWD stopped at its mandatory Verification Fee checkout. Google Voice supplies no official free generic Asterisk SIP trunk. Sources: https://sip2sip.info/help/ ; https://www.callcentric.com/rate/plans/ip_freedom/ ; https://www.callcentric.com/support/device/asterisk/17_pjsip ; https://www.linphone.org/en/faq/ ; https://www.fwdialup.com/mission ; https://knowledge.workspace.google.com/admin/voice/sip-link-requirements ; docs/server-validation.md and docs/external-sip.md .</a:t>
             </a:r>
           </a:p>
         </p:txBody>
@@ -1179,7 +1179,7 @@
           <a:lstStyle xmlns:a="http://schemas.openxmlformats.org/drawingml/2006/main"/>
           <a:p xmlns:a="http://schemas.openxmlformats.org/drawingml/2006/main">
             <a:r>
-              <a:t>The eBay delivery email dated December 1, 2022 confirms the model and quantity. Cisco firmware family 7945_7965: https://www.cisco.com/web/software/282074288/128566/cmterm-7945_7965-sip.9-4-2SR2-2-readme.html</a:t>
+              <a:t>The Cisco 7945G has two line buttons, a color display and native IEEE 802.3af PoE. The generator supports one or two independent SIP lines with separate credentials, preserving existing passwords when another line is added. Confirm PID, VID/HW, MAC and firmware directly on each phone. Cisco firmware family 7945_7965: https://www.cisco.com/web/software/282074288/128566/cmterm-7945_7965-sip.9-4-2SR2-2-readme.html</a:t>
             </a:r>
           </a:p>
           <a:p xmlns:a="http://schemas.openxmlformats.org/drawingml/2006/main">
@@ -1791,7 +1791,7 @@
           <p:cNvPr id="3" name="Title">
             <a:extLst xmlns:a="http://schemas.openxmlformats.org/drawingml/2006/main">
               <a:ext uri="{FF2B5EF4-FFF2-40B4-BE49-F238E27FC236}">
-                <a16:creationId xmlns:a16="http://schemas.microsoft.com/office/drawing/2014/main" id="{1AD149AB-ABB9-4042-B0D9-2434C853CEDB}"/>
+                <a16:creationId xmlns:a16="http://schemas.microsoft.com/office/drawing/2014/main" id="{8A4AE083-E773-4FCA-9A3F-15379D621CE2}"/>
               </a:ext>
             </a:extLst>
           </p:cNvPr>
@@ -2020,7 +2020,7 @@
           <p:cNvPr id="2" name="Subtitle">
             <a:extLst xmlns:a="http://schemas.openxmlformats.org/drawingml/2006/main">
               <a:ext uri="{FF2B5EF4-FFF2-40B4-BE49-F238E27FC236}">
-                <a16:creationId xmlns:a16="http://schemas.microsoft.com/office/drawing/2014/main" id="{859D3B9E-F704-4EB2-9D99-7E8914737A18}"/>
+                <a16:creationId xmlns:a16="http://schemas.microsoft.com/office/drawing/2014/main" id="{CF51AB31-9FC6-4775-87A1-DE09FE35EFAE}"/>
               </a:ext>
             </a:extLst>
           </p:cNvPr>
@@ -2266,7 +2266,7 @@
           <p:cNvPr id="2" name="Section title">
             <a:extLst xmlns:a="http://schemas.openxmlformats.org/drawingml/2006/main">
               <a:ext uri="{FF2B5EF4-FFF2-40B4-BE49-F238E27FC236}">
-                <a16:creationId xmlns:a16="http://schemas.microsoft.com/office/drawing/2014/main" id="{7B1AEB8A-A6E4-4478-89DB-99E2D48075E1}"/>
+                <a16:creationId xmlns:a16="http://schemas.microsoft.com/office/drawing/2014/main" id="{C7FC7E64-167B-4C39-8671-F216B5DB5F20}"/>
               </a:ext>
             </a:extLst>
           </p:cNvPr>
@@ -2512,7 +2512,7 @@
           <p:cNvPr id="3" name="Title">
             <a:extLst xmlns:a="http://schemas.openxmlformats.org/drawingml/2006/main">
               <a:ext uri="{FF2B5EF4-FFF2-40B4-BE49-F238E27FC236}">
-                <a16:creationId xmlns:a16="http://schemas.microsoft.com/office/drawing/2014/main" id="{0A75401D-4611-4749-B64B-8A843DE419A1}"/>
+                <a16:creationId xmlns:a16="http://schemas.microsoft.com/office/drawing/2014/main" id="{87B066BE-A106-4BE0-BECA-D9927784AD6F}"/>
               </a:ext>
             </a:extLst>
           </p:cNvPr>
@@ -2741,7 +2741,7 @@
           <p:cNvPr id="2" name="Body">
             <a:extLst xmlns:a="http://schemas.openxmlformats.org/drawingml/2006/main">
               <a:ext uri="{FF2B5EF4-FFF2-40B4-BE49-F238E27FC236}">
-                <a16:creationId xmlns:a16="http://schemas.microsoft.com/office/drawing/2014/main" id="{7C5EEA92-2B24-4097-8B88-97478A0B1366}"/>
+                <a16:creationId xmlns:a16="http://schemas.microsoft.com/office/drawing/2014/main" id="{D594AE61-EE91-4925-BC7F-249734BA9D39}"/>
               </a:ext>
             </a:extLst>
           </p:cNvPr>
@@ -2987,7 +2987,7 @@
           <p:cNvPr id="4" name="Title">
             <a:extLst xmlns:a="http://schemas.openxmlformats.org/drawingml/2006/main">
               <a:ext uri="{FF2B5EF4-FFF2-40B4-BE49-F238E27FC236}">
-                <a16:creationId xmlns:a16="http://schemas.microsoft.com/office/drawing/2014/main" id="{2473EB3C-A760-4EB7-AF42-F1B00BA7BD91}"/>
+                <a16:creationId xmlns:a16="http://schemas.microsoft.com/office/drawing/2014/main" id="{B33D108E-1E13-49AA-82CC-2BE6928CBA43}"/>
               </a:ext>
             </a:extLst>
           </p:cNvPr>
@@ -3216,7 +3216,7 @@
           <p:cNvPr id="2" name="Left column">
             <a:extLst xmlns:a="http://schemas.openxmlformats.org/drawingml/2006/main">
               <a:ext uri="{FF2B5EF4-FFF2-40B4-BE49-F238E27FC236}">
-                <a16:creationId xmlns:a16="http://schemas.microsoft.com/office/drawing/2014/main" id="{1D21B46E-AE81-42D1-9624-ED0FDB6980B4}"/>
+                <a16:creationId xmlns:a16="http://schemas.microsoft.com/office/drawing/2014/main" id="{C68AC5DE-15F9-4A6D-B145-C2E0C7968C55}"/>
               </a:ext>
             </a:extLst>
           </p:cNvPr>
@@ -3445,7 +3445,7 @@
           <p:cNvPr id="3" name="Right column">
             <a:extLst xmlns:a="http://schemas.openxmlformats.org/drawingml/2006/main">
               <a:ext uri="{FF2B5EF4-FFF2-40B4-BE49-F238E27FC236}">
-                <a16:creationId xmlns:a16="http://schemas.microsoft.com/office/drawing/2014/main" id="{C374C08D-B727-44B9-97C1-47F34023BF58}"/>
+                <a16:creationId xmlns:a16="http://schemas.microsoft.com/office/drawing/2014/main" id="{AB9D3ADF-90C9-4962-93CB-C5E2688EE844}"/>
               </a:ext>
             </a:extLst>
           </p:cNvPr>
@@ -3691,7 +3691,7 @@
           <p:cNvPr id="3" name="Title">
             <a:extLst xmlns:a="http://schemas.openxmlformats.org/drawingml/2006/main">
               <a:ext uri="{FF2B5EF4-FFF2-40B4-BE49-F238E27FC236}">
-                <a16:creationId xmlns:a16="http://schemas.microsoft.com/office/drawing/2014/main" id="{83F6A7C2-853E-4B03-85E6-B862B4CBE038}"/>
+                <a16:creationId xmlns:a16="http://schemas.microsoft.com/office/drawing/2014/main" id="{D021B72D-7A9D-42FC-973F-E7EAD54C04FE}"/>
               </a:ext>
             </a:extLst>
           </p:cNvPr>
@@ -3920,7 +3920,7 @@
           <p:cNvPr id="2" name="Left column">
             <a:extLst xmlns:a="http://schemas.openxmlformats.org/drawingml/2006/main">
               <a:ext uri="{FF2B5EF4-FFF2-40B4-BE49-F238E27FC236}">
-                <a16:creationId xmlns:a16="http://schemas.microsoft.com/office/drawing/2014/main" id="{CE5044DC-D96E-4A6F-AD97-DBB76BB65751}"/>
+                <a16:creationId xmlns:a16="http://schemas.microsoft.com/office/drawing/2014/main" id="{D501A880-2006-4E84-9E45-6CD1C4F51D63}"/>
               </a:ext>
             </a:extLst>
           </p:cNvPr>
@@ -4187,12 +4187,12 @@
   </p:cSld>
   <p:clrMap bg1="lt1" tx1="dk1" bg2="lt2" tx2="dk2" accent1="accent1" accent2="accent2" accent3="accent3" accent4="accent4" accent5="accent5" accent6="accent6" hlink="hlink" folHlink="folHlink"/>
   <p:sldLayoutIdLst>
-    <p:sldLayoutId xmlns:r="http://schemas.openxmlformats.org/officeDocument/2006/relationships" id="2147483649" r:id="Rde5d239d68234a9b"/>
-    <p:sldLayoutId xmlns:r="http://schemas.openxmlformats.org/officeDocument/2006/relationships" id="2147483650" r:id="R5d3d64e130a84a15"/>
-    <p:sldLayoutId xmlns:r="http://schemas.openxmlformats.org/officeDocument/2006/relationships" id="2147483651" r:id="R15b2b6745c574089"/>
-    <p:sldLayoutId xmlns:r="http://schemas.openxmlformats.org/officeDocument/2006/relationships" id="2147483652" r:id="R870dc5cffd124297"/>
-    <p:sldLayoutId xmlns:r="http://schemas.openxmlformats.org/officeDocument/2006/relationships" id="2147483653" r:id="R656aacb3f90f4641"/>
-    <p:sldLayoutId xmlns:r="http://schemas.openxmlformats.org/officeDocument/2006/relationships" id="2147483654" r:id="Rbc1bb7cb833e491f"/>
+    <p:sldLayoutId xmlns:r="http://schemas.openxmlformats.org/officeDocument/2006/relationships" id="2147483649" r:id="R01bbb42a282b444a"/>
+    <p:sldLayoutId xmlns:r="http://schemas.openxmlformats.org/officeDocument/2006/relationships" id="2147483650" r:id="R17a9f149abda441d"/>
+    <p:sldLayoutId xmlns:r="http://schemas.openxmlformats.org/officeDocument/2006/relationships" id="2147483651" r:id="R7d05ba6bdf5e4253"/>
+    <p:sldLayoutId xmlns:r="http://schemas.openxmlformats.org/officeDocument/2006/relationships" id="2147483652" r:id="Rb4aa8b3c4d4e4f96"/>
+    <p:sldLayoutId xmlns:r="http://schemas.openxmlformats.org/officeDocument/2006/relationships" id="2147483653" r:id="R6b971fc6e0464367"/>
+    <p:sldLayoutId xmlns:r="http://schemas.openxmlformats.org/officeDocument/2006/relationships" id="2147483654" r:id="R7d2b9a81dbef4196"/>
   </p:sldLayoutIdLst>
   <p:txStyles>
     <p:titleStyle>
@@ -4743,7 +4743,7 @@
           <p:cNvPr id="7" name="">
             <a:extLst xmlns:a="http://schemas.openxmlformats.org/drawingml/2006/main">
               <a:ext uri="{FF2B5EF4-FFF2-40B4-BE49-F238E27FC236}">
-                <a16:creationId xmlns:a16="http://schemas.microsoft.com/office/drawing/2014/main" id="{7C8EBC48-80CB-4929-B6CF-7F225CD6FCF7}"/>
+                <a16:creationId xmlns:a16="http://schemas.microsoft.com/office/drawing/2014/main" id="{1AADA708-8FE7-423D-A0C5-594AC3A2771B}"/>
               </a:ext>
             </a:extLst>
           </p:cNvPr>
@@ -4883,7 +4883,7 @@
           <p:cNvPr id="2" name="01">
             <a:extLst xmlns:a="http://schemas.openxmlformats.org/drawingml/2006/main">
               <a:ext uri="{FF2B5EF4-FFF2-40B4-BE49-F238E27FC236}">
-                <a16:creationId xmlns:a16="http://schemas.microsoft.com/office/drawing/2014/main" id="{2541CC7F-7BEF-4B38-951C-2C03E13EDD07}"/>
+                <a16:creationId xmlns:a16="http://schemas.microsoft.com/office/drawing/2014/main" id="{C23F6607-E4A4-415C-85E2-59377A50D274}"/>
               </a:ext>
             </a:extLst>
           </p:cNvPr>
@@ -5041,7 +5041,7 @@
           <p:cNvPr id="3" name="Cisco 7945G">
             <a:extLst xmlns:a="http://schemas.openxmlformats.org/drawingml/2006/main">
               <a:ext uri="{FF2B5EF4-FFF2-40B4-BE49-F238E27FC236}">
-                <a16:creationId xmlns:a16="http://schemas.microsoft.com/office/drawing/2014/main" id="{1A889EAD-9F45-488B-BED6-F6DFA6BD848D}"/>
+                <a16:creationId xmlns:a16="http://schemas.microsoft.com/office/drawing/2014/main" id="{87F4F466-2743-4D70-88ED-BF900E44AD64}"/>
               </a:ext>
             </a:extLst>
           </p:cNvPr>
@@ -5199,7 +5199,7 @@
           <p:cNvPr id="4" name="Home telephony">
             <a:extLst xmlns:a="http://schemas.openxmlformats.org/drawingml/2006/main">
               <a:ext uri="{FF2B5EF4-FFF2-40B4-BE49-F238E27FC236}">
-                <a16:creationId xmlns:a16="http://schemas.microsoft.com/office/drawing/2014/main" id="{32CCFCE1-DC68-4314-A8CC-08885F58BF96}"/>
+                <a16:creationId xmlns:a16="http://schemas.microsoft.com/office/drawing/2014/main" id="{6C280C33-2E90-4A0A-8B4B-D0DBBC04FCDF}"/>
               </a:ext>
             </a:extLst>
           </p:cNvPr>
@@ -5357,7 +5357,7 @@
           <p:cNvPr id="5" name="Asterisk in k3s + Home Assistant">
             <a:extLst xmlns:a="http://schemas.openxmlformats.org/drawingml/2006/main">
               <a:ext uri="{FF2B5EF4-FFF2-40B4-BE49-F238E27FC236}">
-                <a16:creationId xmlns:a16="http://schemas.microsoft.com/office/drawing/2014/main" id="{524CBB45-1AC0-4264-9193-9D52FFD455A4}"/>
+                <a16:creationId xmlns:a16="http://schemas.microsoft.com/office/drawing/2014/main" id="{2F777557-8AB4-4258-A014-2239C4AD23A7}"/>
               </a:ext>
             </a:extLst>
           </p:cNvPr>
@@ -5512,10 +5512,10 @@
       </p:sp>
       <p:sp>
         <p:nvSpPr>
-          <p:cNvPr id="6" name="10 phones with color displays">
+          <p:cNvPr id="6" name="Two SIP lines, color display and native PoE">
             <a:extLst xmlns:a="http://schemas.openxmlformats.org/drawingml/2006/main">
               <a:ext uri="{FF2B5EF4-FFF2-40B4-BE49-F238E27FC236}">
-                <a16:creationId xmlns:a16="http://schemas.microsoft.com/office/drawing/2014/main" id="{4C13FBAF-DDEA-4A4C-B48B-2F7F7B8EE1B0}"/>
+                <a16:creationId xmlns:a16="http://schemas.microsoft.com/office/drawing/2014/main" id="{DF60E4C8-349D-4CAE-BE1D-3367BA7EB5E8}"/>
               </a:ext>
             </a:extLst>
           </p:cNvPr>
@@ -5663,7 +5663,7 @@
                 <a:ea typeface="Arial"/>
                 <a:cs typeface="Arial"/>
               </a:rPr>
-              <a:t>10 phones with color displays</a:t>
+              <a:t>Two SIP lines, color display and native PoE</a:t>
             </a:r>
           </a:p>
         </p:txBody>
@@ -5671,7 +5671,7 @@
     </p:spTree>
     <p:extLst>
       <p:ext uri="{BB962C8B-B14F-4D97-AF65-F5344CB8AC3E}">
-        <p14:creationId xmlns:p14="http://schemas.microsoft.com/office/powerpoint/2010/main" val="750955465"/>
+        <p14:creationId xmlns:p14="http://schemas.microsoft.com/office/powerpoint/2010/main" val="1876094407"/>
       </p:ext>
     </p:extLst>
   </p:cSld>
@@ -5702,7 +5702,7 @@
           <p:cNvPr id="8" name="">
             <a:extLst xmlns:a="http://schemas.openxmlformats.org/drawingml/2006/main">
               <a:ext uri="{FF2B5EF4-FFF2-40B4-BE49-F238E27FC236}">
-                <a16:creationId xmlns:a16="http://schemas.microsoft.com/office/drawing/2014/main" id="{F488C894-9C9B-4837-A2DB-CD16A47A52E6}"/>
+                <a16:creationId xmlns:a16="http://schemas.microsoft.com/office/drawing/2014/main" id="{71F3638D-5753-42B3-8776-ED988551E847}"/>
               </a:ext>
             </a:extLst>
           </p:cNvPr>
@@ -5734,7 +5734,7 @@
           <p:cNvPr id="6" name="">
             <a:extLst xmlns:a="http://schemas.openxmlformats.org/drawingml/2006/main">
               <a:ext uri="{FF2B5EF4-FFF2-40B4-BE49-F238E27FC236}">
-                <a16:creationId xmlns:a16="http://schemas.microsoft.com/office/drawing/2014/main" id="{BC5F423D-BB1C-4BF2-A2F3-ABD4D02E9194}"/>
+                <a16:creationId xmlns:a16="http://schemas.microsoft.com/office/drawing/2014/main" id="{87AD7674-32BD-49C4-9460-A4B70BA207B5}"/>
               </a:ext>
             </a:extLst>
           </p:cNvPr>
@@ -5766,7 +5766,7 @@
           <p:cNvPr id="12" name="630: voice assistant on the phone">
             <a:extLst xmlns:a="http://schemas.openxmlformats.org/drawingml/2006/main">
               <a:ext uri="{FF2B5EF4-FFF2-40B4-BE49-F238E27FC236}">
-                <a16:creationId xmlns:a16="http://schemas.microsoft.com/office/drawing/2014/main" id="{2A14ED1B-3755-4C25-B907-973D3483BDC5}"/>
+                <a16:creationId xmlns:a16="http://schemas.microsoft.com/office/drawing/2014/main" id="{5FE4BFFD-0EF3-42D9-A183-8DBD38FF9272}"/>
               </a:ext>
             </a:extLst>
           </p:cNvPr>
@@ -5924,7 +5924,7 @@
           <p:cNvPr id="2" name="10">
             <a:extLst xmlns:a="http://schemas.openxmlformats.org/drawingml/2006/main">
               <a:ext uri="{FF2B5EF4-FFF2-40B4-BE49-F238E27FC236}">
-                <a16:creationId xmlns:a16="http://schemas.microsoft.com/office/drawing/2014/main" id="{5ADC4242-02E7-4E37-92A9-46D63C0F7E03}"/>
+                <a16:creationId xmlns:a16="http://schemas.microsoft.com/office/drawing/2014/main" id="{9740FD00-D03A-45E3-8CA8-053867DF616E}"/>
               </a:ext>
             </a:extLst>
           </p:cNvPr>
@@ -6082,7 +6082,7 @@
           <p:cNvPr id="3" name="cisco">
             <a:extLst xmlns:a="http://schemas.openxmlformats.org/drawingml/2006/main">
               <a:ext uri="{FF2B5EF4-FFF2-40B4-BE49-F238E27FC236}">
-                <a16:creationId xmlns:a16="http://schemas.microsoft.com/office/drawing/2014/main" id="{98BD7DE8-7124-4242-8866-FE4EFACF98B3}"/>
+                <a16:creationId xmlns:a16="http://schemas.microsoft.com/office/drawing/2014/main" id="{4EB28B63-AC93-483B-824F-43D7C661192E}"/>
               </a:ext>
             </a:extLst>
           </p:cNvPr>
@@ -6292,7 +6292,7 @@
           <p:cNvPr id="4" name="codec">
             <a:extLst xmlns:a="http://schemas.openxmlformats.org/drawingml/2006/main">
               <a:ext uri="{FF2B5EF4-FFF2-40B4-BE49-F238E27FC236}">
-                <a16:creationId xmlns:a16="http://schemas.microsoft.com/office/drawing/2014/main" id="{96850ACD-1DD4-4EC3-9A58-2E0BEF594AFC}"/>
+                <a16:creationId xmlns:a16="http://schemas.microsoft.com/office/drawing/2014/main" id="{70F68679-3C4B-4584-9F54-D356C659CB82}"/>
               </a:ext>
             </a:extLst>
           </p:cNvPr>
@@ -6502,7 +6502,7 @@
           <p:cNvPr id="5" name="assist">
             <a:extLst xmlns:a="http://schemas.openxmlformats.org/drawingml/2006/main">
               <a:ext uri="{FF2B5EF4-FFF2-40B4-BE49-F238E27FC236}">
-                <a16:creationId xmlns:a16="http://schemas.microsoft.com/office/drawing/2014/main" id="{D8C4A134-B44A-41DB-B4E1-737807D36A6F}"/>
+                <a16:creationId xmlns:a16="http://schemas.microsoft.com/office/drawing/2014/main" id="{C0155203-9CA4-4810-A946-56093ADF57C0}"/>
               </a:ext>
             </a:extLst>
           </p:cNvPr>
@@ -6712,7 +6712,7 @@
           <p:cNvPr id="7" name="SIP TCP&#10;RTP">
             <a:extLst xmlns:a="http://schemas.openxmlformats.org/drawingml/2006/main">
               <a:ext uri="{FF2B5EF4-FFF2-40B4-BE49-F238E27FC236}">
-                <a16:creationId xmlns:a16="http://schemas.microsoft.com/office/drawing/2014/main" id="{73F96A49-028A-4802-BEDF-B155E75CA08A}"/>
+                <a16:creationId xmlns:a16="http://schemas.microsoft.com/office/drawing/2014/main" id="{868EF98B-507F-4F1C-BC62-C8A15671FF85}"/>
               </a:ext>
             </a:extLst>
           </p:cNvPr>
@@ -6893,7 +6893,7 @@
           <p:cNvPr id="9" name="SIP UDP&#10;RTP">
             <a:extLst xmlns:a="http://schemas.openxmlformats.org/drawingml/2006/main">
               <a:ext uri="{FF2B5EF4-FFF2-40B4-BE49-F238E27FC236}">
-                <a16:creationId xmlns:a16="http://schemas.microsoft.com/office/drawing/2014/main" id="{5C5B67BF-C164-40B7-BE3D-BB941AE6E115}"/>
+                <a16:creationId xmlns:a16="http://schemas.microsoft.com/office/drawing/2014/main" id="{A8752E6B-6565-48A5-AE03-3C113E9C6AB4}"/>
               </a:ext>
             </a:extLst>
           </p:cNvPr>
@@ -7074,7 +7074,7 @@
           <p:cNvPr id="10" name="First call: enable Allow calls and select a pipeline in HA.&#10;Then ">
             <a:extLst xmlns:a="http://schemas.openxmlformats.org/drawingml/2006/main">
               <a:ext uri="{FF2B5EF4-FFF2-40B4-BE49-F238E27FC236}">
-                <a16:creationId xmlns:a16="http://schemas.microsoft.com/office/drawing/2014/main" id="{07E209F2-BE8F-4045-8D2F-9F9C5BDFE7AC}"/>
+                <a16:creationId xmlns:a16="http://schemas.microsoft.com/office/drawing/2014/main" id="{435155FB-E3C8-4C79-BF45-9FA0290FF0D9}"/>
               </a:ext>
             </a:extLst>
           </p:cNvPr>
@@ -7255,7 +7255,7 @@
           <p:cNvPr id="11" name="SIP From retains the phone extension. HA uses dynamic UDP ports f">
             <a:extLst xmlns:a="http://schemas.openxmlformats.org/drawingml/2006/main">
               <a:ext uri="{FF2B5EF4-FFF2-40B4-BE49-F238E27FC236}">
-                <a16:creationId xmlns:a16="http://schemas.microsoft.com/office/drawing/2014/main" id="{19E7FC60-419B-4AC2-B9AE-2F558E9AE395}"/>
+                <a16:creationId xmlns:a16="http://schemas.microsoft.com/office/drawing/2014/main" id="{C5A084BC-1C04-4056-8857-E19B62C5DC38}"/>
               </a:ext>
             </a:extLst>
           </p:cNvPr>
@@ -7434,7 +7434,7 @@
     </p:spTree>
     <p:extLst>
       <p:ext uri="{BB962C8B-B14F-4D97-AF65-F5344CB8AC3E}">
-        <p14:creationId xmlns:p14="http://schemas.microsoft.com/office/powerpoint/2010/main" val="1758282477"/>
+        <p14:creationId xmlns:p14="http://schemas.microsoft.com/office/powerpoint/2010/main" val="2051003519"/>
       </p:ext>
     </p:extLst>
   </p:cSld>
@@ -7465,7 +7465,7 @@
           <p:cNvPr id="15" name="Deployment and commissioning">
             <a:extLst xmlns:a="http://schemas.openxmlformats.org/drawingml/2006/main">
               <a:ext uri="{FF2B5EF4-FFF2-40B4-BE49-F238E27FC236}">
-                <a16:creationId xmlns:a16="http://schemas.microsoft.com/office/drawing/2014/main" id="{C58AA45C-7DFA-47F5-94A9-EADF9A3ED7F4}"/>
+                <a16:creationId xmlns:a16="http://schemas.microsoft.com/office/drawing/2014/main" id="{71D6346B-3382-4CD1-90CC-4F08C4F72840}"/>
               </a:ext>
             </a:extLst>
           </p:cNvPr>
@@ -7623,7 +7623,7 @@
           <p:cNvPr id="2" name="11">
             <a:extLst xmlns:a="http://schemas.openxmlformats.org/drawingml/2006/main">
               <a:ext uri="{FF2B5EF4-FFF2-40B4-BE49-F238E27FC236}">
-                <a16:creationId xmlns:a16="http://schemas.microsoft.com/office/drawing/2014/main" id="{590E6E3E-07A5-4FC8-8AB2-755D85ACD349}"/>
+                <a16:creationId xmlns:a16="http://schemas.microsoft.com/office/drawing/2014/main" id="{90BF3AE8-0BDC-4EFE-98D6-085E428FFAD9}"/>
               </a:ext>
             </a:extLst>
           </p:cNvPr>
@@ -7781,7 +7781,7 @@
           <p:cNvPr id="3" name="01">
             <a:extLst xmlns:a="http://schemas.openxmlformats.org/drawingml/2006/main">
               <a:ext uri="{FF2B5EF4-FFF2-40B4-BE49-F238E27FC236}">
-                <a16:creationId xmlns:a16="http://schemas.microsoft.com/office/drawing/2014/main" id="{8D63FE95-B6A5-46DD-B49D-2B7A35CD82C9}"/>
+                <a16:creationId xmlns:a16="http://schemas.microsoft.com/office/drawing/2014/main" id="{16DE0BCF-CCFD-40EA-9C25-3398219AE48E}"/>
               </a:ext>
             </a:extLst>
           </p:cNvPr>
@@ -7939,7 +7939,7 @@
           <p:cNvPr id="4" name="Server bootstrap">
             <a:extLst xmlns:a="http://schemas.openxmlformats.org/drawingml/2006/main">
               <a:ext uri="{FF2B5EF4-FFF2-40B4-BE49-F238E27FC236}">
-                <a16:creationId xmlns:a16="http://schemas.microsoft.com/office/drawing/2014/main" id="{3C20DC89-41BB-4F8E-A359-53545C8C36C3}"/>
+                <a16:creationId xmlns:a16="http://schemas.microsoft.com/office/drawing/2014/main" id="{99EFD531-EBD8-4973-A047-500EFAFCD4D2}"/>
               </a:ext>
             </a:extLst>
           </p:cNvPr>
@@ -8097,7 +8097,7 @@
           <p:cNvPr id="5" name="Images, static IP, firewall, Asterisk and Opus">
             <a:extLst xmlns:a="http://schemas.openxmlformats.org/drawingml/2006/main">
               <a:ext uri="{FF2B5EF4-FFF2-40B4-BE49-F238E27FC236}">
-                <a16:creationId xmlns:a16="http://schemas.microsoft.com/office/drawing/2014/main" id="{F7CF5DB1-6896-4F21-967A-CB0D24478B4C}"/>
+                <a16:creationId xmlns:a16="http://schemas.microsoft.com/office/drawing/2014/main" id="{4F737562-E2E1-487B-98A5-4A09DA45AC59}"/>
               </a:ext>
             </a:extLst>
           </p:cNvPr>
@@ -8255,7 +8255,7 @@
           <p:cNvPr id="6" name="02">
             <a:extLst xmlns:a="http://schemas.openxmlformats.org/drawingml/2006/main">
               <a:ext uri="{FF2B5EF4-FFF2-40B4-BE49-F238E27FC236}">
-                <a16:creationId xmlns:a16="http://schemas.microsoft.com/office/drawing/2014/main" id="{E1B92D30-136C-4719-8C18-1BD662FBA369}"/>
+                <a16:creationId xmlns:a16="http://schemas.microsoft.com/office/drawing/2014/main" id="{716EB2A6-5F64-4B02-A3A1-B758036FBA2C}"/>
               </a:ext>
             </a:extLst>
           </p:cNvPr>
@@ -8413,7 +8413,7 @@
           <p:cNvPr id="7" name="Verified pilot phone">
             <a:extLst xmlns:a="http://schemas.openxmlformats.org/drawingml/2006/main">
               <a:ext uri="{FF2B5EF4-FFF2-40B4-BE49-F238E27FC236}">
-                <a16:creationId xmlns:a16="http://schemas.microsoft.com/office/drawing/2014/main" id="{877E6FF2-557E-433E-A9BC-EF0AA497FDBF}"/>
+                <a16:creationId xmlns:a16="http://schemas.microsoft.com/office/drawing/2014/main" id="{48012EB7-E2A9-496F-88E2-D6632F6F7B18}"/>
               </a:ext>
             </a:extLst>
           </p:cNvPr>
@@ -8571,7 +8571,7 @@
           <p:cNvPr id="8" name="PID / HW / Load / MAC, SIP profile, temporary TFTP">
             <a:extLst xmlns:a="http://schemas.openxmlformats.org/drawingml/2006/main">
               <a:ext uri="{FF2B5EF4-FFF2-40B4-BE49-F238E27FC236}">
-                <a16:creationId xmlns:a16="http://schemas.microsoft.com/office/drawing/2014/main" id="{CAEA80FA-2FCD-4E66-8E3D-F219894DBA2C}"/>
+                <a16:creationId xmlns:a16="http://schemas.microsoft.com/office/drawing/2014/main" id="{678C2B8B-103E-4EF0-8841-821F5E39EF0C}"/>
               </a:ext>
             </a:extLst>
           </p:cNvPr>
@@ -8729,7 +8729,7 @@
           <p:cNvPr id="9" name="03">
             <a:extLst xmlns:a="http://schemas.openxmlformats.org/drawingml/2006/main">
               <a:ext uri="{FF2B5EF4-FFF2-40B4-BE49-F238E27FC236}">
-                <a16:creationId xmlns:a16="http://schemas.microsoft.com/office/drawing/2014/main" id="{C8ED6196-B91F-4D23-AF8D-AAFACBAC2985}"/>
+                <a16:creationId xmlns:a16="http://schemas.microsoft.com/office/drawing/2014/main" id="{515E78CA-AD00-4EAF-841D-1ABE86EA68C3}"/>
               </a:ext>
             </a:extLst>
           </p:cNvPr>
@@ -8887,7 +8887,7 @@
           <p:cNvPr id="10" name="Home Assistant setup">
             <a:extLst xmlns:a="http://schemas.openxmlformats.org/drawingml/2006/main">
               <a:ext uri="{FF2B5EF4-FFF2-40B4-BE49-F238E27FC236}">
-                <a16:creationId xmlns:a16="http://schemas.microsoft.com/office/drawing/2014/main" id="{82A581E3-960B-45A8-B7EA-6A14A9E6494D}"/>
+                <a16:creationId xmlns:a16="http://schemas.microsoft.com/office/drawing/2014/main" id="{7EFBAFF6-7093-4666-957B-FB96B56C60B8}"/>
               </a:ext>
             </a:extLst>
           </p:cNvPr>
@@ -9045,7 +9045,7 @@
           <p:cNvPr id="11" name="AMI /32, secret, actual entity IDs and VoIP pipeline">
             <a:extLst xmlns:a="http://schemas.openxmlformats.org/drawingml/2006/main">
               <a:ext uri="{FF2B5EF4-FFF2-40B4-BE49-F238E27FC236}">
-                <a16:creationId xmlns:a16="http://schemas.microsoft.com/office/drawing/2014/main" id="{FD5476ED-EDF8-4298-815B-377229E2822A}"/>
+                <a16:creationId xmlns:a16="http://schemas.microsoft.com/office/drawing/2014/main" id="{5AEF5BA0-5439-4EE8-9878-6CCCC6E55A56}"/>
               </a:ext>
             </a:extLst>
           </p:cNvPr>
@@ -9203,7 +9203,7 @@
           <p:cNvPr id="12" name="04">
             <a:extLst xmlns:a="http://schemas.openxmlformats.org/drawingml/2006/main">
               <a:ext uri="{FF2B5EF4-FFF2-40B4-BE49-F238E27FC236}">
-                <a16:creationId xmlns:a16="http://schemas.microsoft.com/office/drawing/2014/main" id="{87F0EA83-9897-4B07-B72D-A0EA00AA9924}"/>
+                <a16:creationId xmlns:a16="http://schemas.microsoft.com/office/drawing/2014/main" id="{5A4FEDDE-0432-4BF7-852B-8E90E73337BB}"/>
               </a:ext>
             </a:extLst>
           </p:cNvPr>
@@ -9361,7 +9361,7 @@
           <p:cNvPr id="13" name="Acceptance and rollout">
             <a:extLst xmlns:a="http://schemas.openxmlformats.org/drawingml/2006/main">
               <a:ext uri="{FF2B5EF4-FFF2-40B4-BE49-F238E27FC236}">
-                <a16:creationId xmlns:a16="http://schemas.microsoft.com/office/drawing/2014/main" id="{37DE7174-D6F9-44EC-B08D-E5932177CB68}"/>
+                <a16:creationId xmlns:a16="http://schemas.microsoft.com/office/drawing/2014/main" id="{53F4B4A8-3A34-4A06-A068-F969553D73AF}"/>
               </a:ext>
             </a:extLst>
           </p:cNvPr>
@@ -9519,7 +9519,7 @@
           <p:cNvPr id="14" name="Two phones, a call to 630, then the remaining phones">
             <a:extLst xmlns:a="http://schemas.openxmlformats.org/drawingml/2006/main">
               <a:ext uri="{FF2B5EF4-FFF2-40B4-BE49-F238E27FC236}">
-                <a16:creationId xmlns:a16="http://schemas.microsoft.com/office/drawing/2014/main" id="{81722C06-24C5-46FE-B8E1-A47AD803D67A}"/>
+                <a16:creationId xmlns:a16="http://schemas.microsoft.com/office/drawing/2014/main" id="{CC185171-23F3-4D7D-9AF3-9FECDF803581}"/>
               </a:ext>
             </a:extLst>
           </p:cNvPr>
@@ -9675,7 +9675,7 @@
     </p:spTree>
     <p:extLst>
       <p:ext uri="{BB962C8B-B14F-4D97-AF65-F5344CB8AC3E}">
-        <p14:creationId xmlns:p14="http://schemas.microsoft.com/office/powerpoint/2010/main" val="236585482"/>
+        <p14:creationId xmlns:p14="http://schemas.microsoft.com/office/powerpoint/2010/main" val="574822645"/>
       </p:ext>
     </p:extLst>
   </p:cSld>
@@ -9706,7 +9706,7 @@
           <p:cNvPr id="10" name="Acceptance tests on real phones">
             <a:extLst xmlns:a="http://schemas.openxmlformats.org/drawingml/2006/main">
               <a:ext uri="{FF2B5EF4-FFF2-40B4-BE49-F238E27FC236}">
-                <a16:creationId xmlns:a16="http://schemas.microsoft.com/office/drawing/2014/main" id="{0813D1DE-6347-4B38-85F6-2E563E426959}"/>
+                <a16:creationId xmlns:a16="http://schemas.microsoft.com/office/drawing/2014/main" id="{0B3864ED-B5B2-4F87-A015-89F180A20480}"/>
               </a:ext>
             </a:extLst>
           </p:cNvPr>
@@ -9864,7 +9864,7 @@
           <p:cNvPr id="2" name="12">
             <a:extLst xmlns:a="http://schemas.openxmlformats.org/drawingml/2006/main">
               <a:ext uri="{FF2B5EF4-FFF2-40B4-BE49-F238E27FC236}">
-                <a16:creationId xmlns:a16="http://schemas.microsoft.com/office/drawing/2014/main" id="{E760D1BB-7EA3-4C3E-B20F-497CB68DCDD9}"/>
+                <a16:creationId xmlns:a16="http://schemas.microsoft.com/office/drawing/2014/main" id="{E5568135-B418-4692-8188-6DD2B9C8F804}"/>
               </a:ext>
             </a:extLst>
           </p:cNvPr>
@@ -10022,7 +10022,7 @@
           <p:cNvPr id="3" name="Telephony">
             <a:extLst xmlns:a="http://schemas.openxmlformats.org/drawingml/2006/main">
               <a:ext uri="{FF2B5EF4-FFF2-40B4-BE49-F238E27FC236}">
-                <a16:creationId xmlns:a16="http://schemas.microsoft.com/office/drawing/2014/main" id="{F970A5A6-D068-40C8-96DA-A61AD18ED71C}"/>
+                <a16:creationId xmlns:a16="http://schemas.microsoft.com/office/drawing/2014/main" id="{FE10E025-C93B-4053-8569-DFEFF7DA80E1}"/>
               </a:ext>
             </a:extLst>
           </p:cNvPr>
@@ -10180,7 +10180,7 @@
           <p:cNvPr id="4" name="201 and 203: cross-phone audio, hold / transfer">
             <a:extLst xmlns:a="http://schemas.openxmlformats.org/drawingml/2006/main">
               <a:ext uri="{FF2B5EF4-FFF2-40B4-BE49-F238E27FC236}">
-                <a16:creationId xmlns:a16="http://schemas.microsoft.com/office/drawing/2014/main" id="{F89D4367-192A-41CF-A527-F6B5DF969386}"/>
+                <a16:creationId xmlns:a16="http://schemas.microsoft.com/office/drawing/2014/main" id="{4D0FF99A-E008-4BF3-86A2-547F3D198CA4}"/>
               </a:ext>
             </a:extLst>
           </p:cNvPr>
@@ -10338,7 +10338,7 @@
           <p:cNvPr id="5" name="Home Assistant">
             <a:extLst xmlns:a="http://schemas.openxmlformats.org/drawingml/2006/main">
               <a:ext uri="{FF2B5EF4-FFF2-40B4-BE49-F238E27FC236}">
-                <a16:creationId xmlns:a16="http://schemas.microsoft.com/office/drawing/2014/main" id="{B06DD50A-9001-49C8-83E1-7D2A232380E3}"/>
+                <a16:creationId xmlns:a16="http://schemas.microsoft.com/office/drawing/2014/main" id="{121A8BCE-B7FB-40D2-892B-0175D7A34055}"/>
               </a:ext>
             </a:extLst>
           </p:cNvPr>
@@ -10496,7 +10496,7 @@
           <p:cNvPr id="6" name="States, Originate, Hangup on the correct Channel, DTMF">
             <a:extLst xmlns:a="http://schemas.openxmlformats.org/drawingml/2006/main">
               <a:ext uri="{FF2B5EF4-FFF2-40B4-BE49-F238E27FC236}">
-                <a16:creationId xmlns:a16="http://schemas.microsoft.com/office/drawing/2014/main" id="{7420FEDD-3541-4648-984C-5A0A9529B6E8}"/>
+                <a16:creationId xmlns:a16="http://schemas.microsoft.com/office/drawing/2014/main" id="{A7C0760D-7A0C-4AA5-A1EC-1AF608FF716E}"/>
               </a:ext>
             </a:extLst>
           </p:cNvPr>
@@ -10654,7 +10654,7 @@
           <p:cNvPr id="7" name="Assist 630">
             <a:extLst xmlns:a="http://schemas.openxmlformats.org/drawingml/2006/main">
               <a:ext uri="{FF2B5EF4-FFF2-40B4-BE49-F238E27FC236}">
-                <a16:creationId xmlns:a16="http://schemas.microsoft.com/office/drawing/2014/main" id="{FC6A8BF8-BDCA-416B-821E-C6E5DC721CC7}"/>
+                <a16:creationId xmlns:a16="http://schemas.microsoft.com/office/drawing/2014/main" id="{C538B1E4-A492-4898-9174-CF6CCAC41ACF}"/>
               </a:ext>
             </a:extLst>
           </p:cNvPr>
@@ -10812,7 +10812,7 @@
           <p:cNvPr id="8" name="Speech recognition, spoken reply and hangup">
             <a:extLst xmlns:a="http://schemas.openxmlformats.org/drawingml/2006/main">
               <a:ext uri="{FF2B5EF4-FFF2-40B4-BE49-F238E27FC236}">
-                <a16:creationId xmlns:a16="http://schemas.microsoft.com/office/drawing/2014/main" id="{AF09562B-6925-4B39-853A-32AA036CA69D}"/>
+                <a16:creationId xmlns:a16="http://schemas.microsoft.com/office/drawing/2014/main" id="{F31C0FCD-8443-41F7-8EBC-355551556AAA}"/>
               </a:ext>
             </a:extLst>
           </p:cNvPr>
@@ -10970,7 +10970,7 @@
           <p:cNvPr id="9" name="Repeat after phone, PBX and HA restarts. Readiness does not verif">
             <a:extLst xmlns:a="http://schemas.openxmlformats.org/drawingml/2006/main">
               <a:ext uri="{FF2B5EF4-FFF2-40B4-BE49-F238E27FC236}">
-                <a16:creationId xmlns:a16="http://schemas.microsoft.com/office/drawing/2014/main" id="{0588556C-6052-42D3-9829-11048A8139A7}"/>
+                <a16:creationId xmlns:a16="http://schemas.microsoft.com/office/drawing/2014/main" id="{F52AE53E-C6AB-42B6-A156-E6457895ADFC}"/>
               </a:ext>
             </a:extLst>
           </p:cNvPr>
@@ -11126,7 +11126,7 @@
     </p:spTree>
     <p:extLst>
       <p:ext uri="{BB962C8B-B14F-4D97-AF65-F5344CB8AC3E}">
-        <p14:creationId xmlns:p14="http://schemas.microsoft.com/office/powerpoint/2010/main" val="215596244"/>
+        <p14:creationId xmlns:p14="http://schemas.microsoft.com/office/powerpoint/2010/main" val="1030009289"/>
       </p:ext>
     </p:extLst>
   </p:cSld>
@@ -11157,7 +11157,7 @@
           <p:cNvPr id="8" name="Operations and recovery">
             <a:extLst xmlns:a="http://schemas.openxmlformats.org/drawingml/2006/main">
               <a:ext uri="{FF2B5EF4-FFF2-40B4-BE49-F238E27FC236}">
-                <a16:creationId xmlns:a16="http://schemas.microsoft.com/office/drawing/2014/main" id="{C24D2E1C-F15A-447D-9AAD-7AEAF6AB38B0}"/>
+                <a16:creationId xmlns:a16="http://schemas.microsoft.com/office/drawing/2014/main" id="{3617DF14-0C1F-47C5-84EA-9CD60E2464DF}"/>
               </a:ext>
             </a:extLst>
           </p:cNvPr>
@@ -11315,7 +11315,7 @@
           <p:cNvPr id="2" name="13">
             <a:extLst xmlns:a="http://schemas.openxmlformats.org/drawingml/2006/main">
               <a:ext uri="{FF2B5EF4-FFF2-40B4-BE49-F238E27FC236}">
-                <a16:creationId xmlns:a16="http://schemas.microsoft.com/office/drawing/2014/main" id="{39CEA8A3-79EE-4E69-AAB5-BA61A215941A}"/>
+                <a16:creationId xmlns:a16="http://schemas.microsoft.com/office/drawing/2014/main" id="{E3B6D3B1-D62B-482A-A82C-5E99FF62D3A3}"/>
               </a:ext>
             </a:extLst>
           </p:cNvPr>
@@ -11473,7 +11473,7 @@
           <p:cNvPr id="3" name="Private backups outside Git">
             <a:extLst xmlns:a="http://schemas.openxmlformats.org/drawingml/2006/main">
               <a:ext uri="{FF2B5EF4-FFF2-40B4-BE49-F238E27FC236}">
-                <a16:creationId xmlns:a16="http://schemas.microsoft.com/office/drawing/2014/main" id="{4B7A7CB4-E4DD-47B9-991D-ACC292E7AEB9}"/>
+                <a16:creationId xmlns:a16="http://schemas.microsoft.com/office/drawing/2014/main" id="{65D9903D-1E90-41C9-8276-B850F06C9BFA}"/>
               </a:ext>
             </a:extLst>
           </p:cNvPr>
@@ -11631,7 +11631,7 @@
           <p:cNvPr id="4" name="Inventory, SIP / AMI secrets and Asterisk data&#10;HA config / .stora">
             <a:extLst xmlns:a="http://schemas.openxmlformats.org/drawingml/2006/main">
               <a:ext uri="{FF2B5EF4-FFF2-40B4-BE49-F238E27FC236}">
-                <a16:creationId xmlns:a16="http://schemas.microsoft.com/office/drawing/2014/main" id="{9F419D33-F43D-4120-BF4C-9B4507D27DD5}"/>
+                <a16:creationId xmlns:a16="http://schemas.microsoft.com/office/drawing/2014/main" id="{8F2FEF72-3639-4D41-9030-CB53878C1573}"/>
               </a:ext>
             </a:extLst>
           </p:cNvPr>
@@ -11812,7 +11812,7 @@
           <p:cNvPr id="5" name="One node is a single point of failure">
             <a:extLst xmlns:a="http://schemas.openxmlformats.org/drawingml/2006/main">
               <a:ext uri="{FF2B5EF4-FFF2-40B4-BE49-F238E27FC236}">
-                <a16:creationId xmlns:a16="http://schemas.microsoft.com/office/drawing/2014/main" id="{A4AEF8FD-E48A-496C-A91D-F5D89E15992E}"/>
+                <a16:creationId xmlns:a16="http://schemas.microsoft.com/office/drawing/2014/main" id="{A4062DAE-9F02-4180-AD9D-392572F9915A}"/>
               </a:ext>
             </a:extLst>
           </p:cNvPr>
@@ -11970,7 +11970,7 @@
           <p:cNvPr id="6" name="UPS for network equipment and the k3s node&#10;A recovery plan that p">
             <a:extLst xmlns:a="http://schemas.openxmlformats.org/drawingml/2006/main">
               <a:ext uri="{FF2B5EF4-FFF2-40B4-BE49-F238E27FC236}">
-                <a16:creationId xmlns:a16="http://schemas.microsoft.com/office/drawing/2014/main" id="{A6324C31-EC18-45A8-8031-0111A43DA4D1}"/>
+                <a16:creationId xmlns:a16="http://schemas.microsoft.com/office/drawing/2014/main" id="{EACF9DF1-CF73-4262-BCFE-A3CE2C18BC22}"/>
               </a:ext>
             </a:extLst>
           </p:cNvPr>
@@ -12151,7 +12151,7 @@
           <p:cNvPr id="7" name="Exclude raw DTMF and connected-line data from Recorder. Review ex">
             <a:extLst xmlns:a="http://schemas.openxmlformats.org/drawingml/2006/main">
               <a:ext uri="{FF2B5EF4-FFF2-40B4-BE49-F238E27FC236}">
-                <a16:creationId xmlns:a16="http://schemas.microsoft.com/office/drawing/2014/main" id="{6D2EF800-D559-4199-9C23-B457779F2C5C}"/>
+                <a16:creationId xmlns:a16="http://schemas.microsoft.com/office/drawing/2014/main" id="{36AA9368-4C64-4660-A614-18E80191D9AC}"/>
               </a:ext>
             </a:extLst>
           </p:cNvPr>
@@ -12307,7 +12307,7 @@
     </p:spTree>
     <p:extLst>
       <p:ext uri="{BB962C8B-B14F-4D97-AF65-F5344CB8AC3E}">
-        <p14:creationId xmlns:p14="http://schemas.microsoft.com/office/powerpoint/2010/main" val="2146920185"/>
+        <p14:creationId xmlns:p14="http://schemas.microsoft.com/office/powerpoint/2010/main" val="1048075586"/>
       </p:ext>
     </p:extLst>
   </p:cSld>
@@ -12338,7 +12338,7 @@
           <p:cNvPr id="8" name="Server readiness and phone acceptance">
             <a:extLst xmlns:a="http://schemas.openxmlformats.org/drawingml/2006/main">
               <a:ext uri="{FF2B5EF4-FFF2-40B4-BE49-F238E27FC236}">
-                <a16:creationId xmlns:a16="http://schemas.microsoft.com/office/drawing/2014/main" id="{1D4EC317-8460-4BA4-B4F2-D6623A211ACD}"/>
+                <a16:creationId xmlns:a16="http://schemas.microsoft.com/office/drawing/2014/main" id="{B8460912-EAB3-449A-B7AC-0E27622B5487}"/>
               </a:ext>
             </a:extLst>
           </p:cNvPr>
@@ -12496,7 +12496,7 @@
           <p:cNvPr id="2" name="14">
             <a:extLst xmlns:a="http://schemas.openxmlformats.org/drawingml/2006/main">
               <a:ext uri="{FF2B5EF4-FFF2-40B4-BE49-F238E27FC236}">
-                <a16:creationId xmlns:a16="http://schemas.microsoft.com/office/drawing/2014/main" id="{B619D9D5-8BFF-4E2F-B251-97FCEA260E51}"/>
+                <a16:creationId xmlns:a16="http://schemas.microsoft.com/office/drawing/2014/main" id="{9EFAAB93-DD54-4F4C-A9C6-68ADDCDAC458}"/>
               </a:ext>
             </a:extLst>
           </p:cNvPr>
@@ -12654,7 +12654,7 @@
           <p:cNvPr id="3" name="Server preparation can come first">
             <a:extLst xmlns:a="http://schemas.openxmlformats.org/drawingml/2006/main">
               <a:ext uri="{FF2B5EF4-FFF2-40B4-BE49-F238E27FC236}">
-                <a16:creationId xmlns:a16="http://schemas.microsoft.com/office/drawing/2014/main" id="{BDB36C04-971E-4008-852B-670F62310EB0}"/>
+                <a16:creationId xmlns:a16="http://schemas.microsoft.com/office/drawing/2014/main" id="{99AFC3E5-DEAF-49E5-B97B-08686116525B}"/>
               </a:ext>
             </a:extLst>
           </p:cNvPr>
@@ -12812,7 +12812,7 @@
           <p:cNvPr id="4" name="Images, configuration, AMI and Opus&#10;Tests verify the server compo">
             <a:extLst xmlns:a="http://schemas.openxmlformats.org/drawingml/2006/main">
               <a:ext uri="{FF2B5EF4-FFF2-40B4-BE49-F238E27FC236}">
-                <a16:creationId xmlns:a16="http://schemas.microsoft.com/office/drawing/2014/main" id="{4587F99D-5664-45C1-9A4E-D7D4BE8E2AFE}"/>
+                <a16:creationId xmlns:a16="http://schemas.microsoft.com/office/drawing/2014/main" id="{68671710-7B58-4C64-9607-A00F361E2B6E}"/>
               </a:ext>
             </a:extLst>
           </p:cNvPr>
@@ -12993,7 +12993,7 @@
           <p:cNvPr id="5" name="A pilot verifies the phone experience">
             <a:extLst xmlns:a="http://schemas.openxmlformats.org/drawingml/2006/main">
               <a:ext uri="{FF2B5EF4-FFF2-40B4-BE49-F238E27FC236}">
-                <a16:creationId xmlns:a16="http://schemas.microsoft.com/office/drawing/2014/main" id="{3C08A8C3-3654-4625-83F8-692593B1B16A}"/>
+                <a16:creationId xmlns:a16="http://schemas.microsoft.com/office/drawing/2014/main" id="{DF27BBE3-CE78-4B8A-BF02-D113EA79E56E}"/>
               </a:ext>
             </a:extLst>
           </p:cNvPr>
@@ -13151,7 +13151,7 @@
           <p:cNvPr id="6" name="Phone inventory, a two-party call and Assist&#10;Add the remaining ph">
             <a:extLst xmlns:a="http://schemas.openxmlformats.org/drawingml/2006/main">
               <a:ext uri="{FF2B5EF4-FFF2-40B4-BE49-F238E27FC236}">
-                <a16:creationId xmlns:a16="http://schemas.microsoft.com/office/drawing/2014/main" id="{CE7DE7C2-0A9B-4C0B-8874-2390F1CCC80B}"/>
+                <a16:creationId xmlns:a16="http://schemas.microsoft.com/office/drawing/2014/main" id="{2BBB6678-AFC4-4708-9C99-2F0721E7BB19}"/>
               </a:ext>
             </a:extLst>
           </p:cNvPr>
@@ -13332,7 +13332,7 @@
           <p:cNvPr id="7" name="Physical acceptance is a separate step. Keep the results in the p">
             <a:extLst xmlns:a="http://schemas.openxmlformats.org/drawingml/2006/main">
               <a:ext uri="{FF2B5EF4-FFF2-40B4-BE49-F238E27FC236}">
-                <a16:creationId xmlns:a16="http://schemas.microsoft.com/office/drawing/2014/main" id="{A3F5C605-D3FE-43A2-8888-4BADFB7FCE96}"/>
+                <a16:creationId xmlns:a16="http://schemas.microsoft.com/office/drawing/2014/main" id="{55EE1244-065D-4904-AB30-9A6EF6457CEE}"/>
               </a:ext>
             </a:extLst>
           </p:cNvPr>
@@ -13488,7 +13488,7 @@
     </p:spTree>
     <p:extLst>
       <p:ext uri="{BB962C8B-B14F-4D97-AF65-F5344CB8AC3E}">
-        <p14:creationId xmlns:p14="http://schemas.microsoft.com/office/powerpoint/2010/main" val="533164249"/>
+        <p14:creationId xmlns:p14="http://schemas.microsoft.com/office/powerpoint/2010/main" val="1263947407"/>
       </p:ext>
     </p:extLst>
   </p:cSld>
@@ -13519,7 +13519,7 @@
           <p:cNvPr id="18" name="Four phones, eight independent lines">
             <a:extLst xmlns:a="http://schemas.openxmlformats.org/drawingml/2006/main">
               <a:ext uri="{FF2B5EF4-FFF2-40B4-BE49-F238E27FC236}">
-                <a16:creationId xmlns:a16="http://schemas.microsoft.com/office/drawing/2014/main" id="{92DE0B55-07F4-4F6F-9073-101EA5E54ECB}"/>
+                <a16:creationId xmlns:a16="http://schemas.microsoft.com/office/drawing/2014/main" id="{715582E9-6622-4467-A6EB-E35D81300FD5}"/>
               </a:ext>
             </a:extLst>
           </p:cNvPr>
@@ -13677,7 +13677,7 @@
           <p:cNvPr id="2" name="15">
             <a:extLst xmlns:a="http://schemas.openxmlformats.org/drawingml/2006/main">
               <a:ext uri="{FF2B5EF4-FFF2-40B4-BE49-F238E27FC236}">
-                <a16:creationId xmlns:a16="http://schemas.microsoft.com/office/drawing/2014/main" id="{6F28F66C-7D1C-4DFD-82F2-D559493F497B}"/>
+                <a16:creationId xmlns:a16="http://schemas.microsoft.com/office/drawing/2014/main" id="{53258F1E-9423-4A14-9CD2-7A455985C414}"/>
               </a:ext>
             </a:extLst>
           </p:cNvPr>
@@ -13835,7 +13835,7 @@
           <p:cNvPr id="3" name="PHONE A">
             <a:extLst xmlns:a="http://schemas.openxmlformats.org/drawingml/2006/main">
               <a:ext uri="{FF2B5EF4-FFF2-40B4-BE49-F238E27FC236}">
-                <a16:creationId xmlns:a16="http://schemas.microsoft.com/office/drawing/2014/main" id="{4C1F95C6-2081-4256-A952-2FEFBF8380AB}"/>
+                <a16:creationId xmlns:a16="http://schemas.microsoft.com/office/drawing/2014/main" id="{7A0AB815-2A94-4423-8CCA-3AADD64CA312}"/>
               </a:ext>
             </a:extLst>
           </p:cNvPr>
@@ -13993,7 +13993,7 @@
           <p:cNvPr id="4" name="201">
             <a:extLst xmlns:a="http://schemas.openxmlformats.org/drawingml/2006/main">
               <a:ext uri="{FF2B5EF4-FFF2-40B4-BE49-F238E27FC236}">
-                <a16:creationId xmlns:a16="http://schemas.microsoft.com/office/drawing/2014/main" id="{65C060EC-C8CE-47B9-9F62-3E6D9A783578}"/>
+                <a16:creationId xmlns:a16="http://schemas.microsoft.com/office/drawing/2014/main" id="{5A5FF80A-0703-4A87-BF96-6651D637F322}"/>
               </a:ext>
             </a:extLst>
           </p:cNvPr>
@@ -14151,7 +14151,7 @@
           <p:cNvPr id="5" name="202">
             <a:extLst xmlns:a="http://schemas.openxmlformats.org/drawingml/2006/main">
               <a:ext uri="{FF2B5EF4-FFF2-40B4-BE49-F238E27FC236}">
-                <a16:creationId xmlns:a16="http://schemas.microsoft.com/office/drawing/2014/main" id="{266BC443-27EF-4597-9AF3-86FF0606F56C}"/>
+                <a16:creationId xmlns:a16="http://schemas.microsoft.com/office/drawing/2014/main" id="{3EB389CE-757C-4C13-9D76-B3C91766C12F}"/>
               </a:ext>
             </a:extLst>
           </p:cNvPr>
@@ -14309,7 +14309,7 @@
           <p:cNvPr id="6" name="PHONE B">
             <a:extLst xmlns:a="http://schemas.openxmlformats.org/drawingml/2006/main">
               <a:ext uri="{FF2B5EF4-FFF2-40B4-BE49-F238E27FC236}">
-                <a16:creationId xmlns:a16="http://schemas.microsoft.com/office/drawing/2014/main" id="{8CED992B-42B6-4090-B588-83B6A98F8166}"/>
+                <a16:creationId xmlns:a16="http://schemas.microsoft.com/office/drawing/2014/main" id="{252675E0-72ED-4679-ACA4-C8B9750D7577}"/>
               </a:ext>
             </a:extLst>
           </p:cNvPr>
@@ -14467,7 +14467,7 @@
           <p:cNvPr id="7" name="203">
             <a:extLst xmlns:a="http://schemas.openxmlformats.org/drawingml/2006/main">
               <a:ext uri="{FF2B5EF4-FFF2-40B4-BE49-F238E27FC236}">
-                <a16:creationId xmlns:a16="http://schemas.microsoft.com/office/drawing/2014/main" id="{B8C81212-CCD8-47E0-9EBA-9648071DA55E}"/>
+                <a16:creationId xmlns:a16="http://schemas.microsoft.com/office/drawing/2014/main" id="{9B36E4D8-2641-4516-A7B9-E3B7B2E39CFB}"/>
               </a:ext>
             </a:extLst>
           </p:cNvPr>
@@ -14625,7 +14625,7 @@
           <p:cNvPr id="8" name="204">
             <a:extLst xmlns:a="http://schemas.openxmlformats.org/drawingml/2006/main">
               <a:ext uri="{FF2B5EF4-FFF2-40B4-BE49-F238E27FC236}">
-                <a16:creationId xmlns:a16="http://schemas.microsoft.com/office/drawing/2014/main" id="{8E504E36-2B64-4661-B86F-01894489F64C}"/>
+                <a16:creationId xmlns:a16="http://schemas.microsoft.com/office/drawing/2014/main" id="{C5B072E6-A391-4AD9-A979-6A232CC0529E}"/>
               </a:ext>
             </a:extLst>
           </p:cNvPr>
@@ -14783,7 +14783,7 @@
           <p:cNvPr id="9" name="PHONE C">
             <a:extLst xmlns:a="http://schemas.openxmlformats.org/drawingml/2006/main">
               <a:ext uri="{FF2B5EF4-FFF2-40B4-BE49-F238E27FC236}">
-                <a16:creationId xmlns:a16="http://schemas.microsoft.com/office/drawing/2014/main" id="{2B73034C-F59B-4534-9AF6-83725E64A983}"/>
+                <a16:creationId xmlns:a16="http://schemas.microsoft.com/office/drawing/2014/main" id="{9FA2A778-0409-4E00-9DA7-F4635D79DA6F}"/>
               </a:ext>
             </a:extLst>
           </p:cNvPr>
@@ -14941,7 +14941,7 @@
           <p:cNvPr id="10" name="205">
             <a:extLst xmlns:a="http://schemas.openxmlformats.org/drawingml/2006/main">
               <a:ext uri="{FF2B5EF4-FFF2-40B4-BE49-F238E27FC236}">
-                <a16:creationId xmlns:a16="http://schemas.microsoft.com/office/drawing/2014/main" id="{4A9775FA-AE2C-4BAD-ADF7-F281E9936932}"/>
+                <a16:creationId xmlns:a16="http://schemas.microsoft.com/office/drawing/2014/main" id="{AD5D6962-B72E-48D5-8FC5-CFB6F071B0D4}"/>
               </a:ext>
             </a:extLst>
           </p:cNvPr>
@@ -15099,7 +15099,7 @@
           <p:cNvPr id="11" name="206">
             <a:extLst xmlns:a="http://schemas.openxmlformats.org/drawingml/2006/main">
               <a:ext uri="{FF2B5EF4-FFF2-40B4-BE49-F238E27FC236}">
-                <a16:creationId xmlns:a16="http://schemas.microsoft.com/office/drawing/2014/main" id="{FB6EF497-BAC4-42BE-A94E-6AAAE8A91148}"/>
+                <a16:creationId xmlns:a16="http://schemas.microsoft.com/office/drawing/2014/main" id="{C50481F3-B843-46EA-96E9-7F08C55677BB}"/>
               </a:ext>
             </a:extLst>
           </p:cNvPr>
@@ -15257,7 +15257,7 @@
           <p:cNvPr id="12" name="PHONE D">
             <a:extLst xmlns:a="http://schemas.openxmlformats.org/drawingml/2006/main">
               <a:ext uri="{FF2B5EF4-FFF2-40B4-BE49-F238E27FC236}">
-                <a16:creationId xmlns:a16="http://schemas.microsoft.com/office/drawing/2014/main" id="{9FF49ACD-1BFA-4F7E-8A72-E25C4936FDE5}"/>
+                <a16:creationId xmlns:a16="http://schemas.microsoft.com/office/drawing/2014/main" id="{97A495A3-78FC-4BAA-AB7F-46443791709D}"/>
               </a:ext>
             </a:extLst>
           </p:cNvPr>
@@ -15415,7 +15415,7 @@
           <p:cNvPr id="13" name="207">
             <a:extLst xmlns:a="http://schemas.openxmlformats.org/drawingml/2006/main">
               <a:ext uri="{FF2B5EF4-FFF2-40B4-BE49-F238E27FC236}">
-                <a16:creationId xmlns:a16="http://schemas.microsoft.com/office/drawing/2014/main" id="{741267F3-6078-4189-BCBB-4B6B4A9B8BEF}"/>
+                <a16:creationId xmlns:a16="http://schemas.microsoft.com/office/drawing/2014/main" id="{76FF8D3D-E9FE-4A69-ABE1-A451D0C724FB}"/>
               </a:ext>
             </a:extLst>
           </p:cNvPr>
@@ -15573,7 +15573,7 @@
           <p:cNvPr id="14" name="208">
             <a:extLst xmlns:a="http://schemas.openxmlformats.org/drawingml/2006/main">
               <a:ext uri="{FF2B5EF4-FFF2-40B4-BE49-F238E27FC236}">
-                <a16:creationId xmlns:a16="http://schemas.microsoft.com/office/drawing/2014/main" id="{5B797D5E-1BC1-4F62-915D-C1573602126D}"/>
+                <a16:creationId xmlns:a16="http://schemas.microsoft.com/office/drawing/2014/main" id="{3099E1AD-CB7A-4312-B4ED-31F5EA65C518}"/>
               </a:ext>
             </a:extLst>
           </p:cNvPr>
@@ -15731,7 +15731,7 @@
           <p:cNvPr id="15" name="620 rings the primary line of each phone">
             <a:extLst xmlns:a="http://schemas.openxmlformats.org/drawingml/2006/main">
               <a:ext uri="{FF2B5EF4-FFF2-40B4-BE49-F238E27FC236}">
-                <a16:creationId xmlns:a16="http://schemas.microsoft.com/office/drawing/2014/main" id="{5827F399-1889-44AA-A44F-C58B675EAF4E}"/>
+                <a16:creationId xmlns:a16="http://schemas.microsoft.com/office/drawing/2014/main" id="{C4CA8DF7-A0DB-443A-B92D-53AD3509AF9C}"/>
               </a:ext>
             </a:extLst>
           </p:cNvPr>
@@ -15889,7 +15889,7 @@
           <p:cNvPr id="16" name="201, 203, 205 and 207 share the group. DND skips that phone.">
             <a:extLst xmlns:a="http://schemas.openxmlformats.org/drawingml/2006/main">
               <a:ext uri="{FF2B5EF4-FFF2-40B4-BE49-F238E27FC236}">
-                <a16:creationId xmlns:a16="http://schemas.microsoft.com/office/drawing/2014/main" id="{109A847C-3482-4979-BFB0-265FEB722652}"/>
+                <a16:creationId xmlns:a16="http://schemas.microsoft.com/office/drawing/2014/main" id="{AC80570C-E62B-4C93-93E5-4D77455596EE}"/>
               </a:ext>
             </a:extLst>
           </p:cNvPr>
@@ -16044,10 +16044,10 @@
       </p:sp>
       <p:sp>
         <p:nvSpPr>
-          <p:cNvPr id="17" name="Eight registrations and local call checks passed. Broader accepta">
+          <p:cNvPr id="17" name="Eight registrations and local call checks passed. Cross-phone tes">
             <a:extLst xmlns:a="http://schemas.openxmlformats.org/drawingml/2006/main">
               <a:ext uri="{FF2B5EF4-FFF2-40B4-BE49-F238E27FC236}">
-                <a16:creationId xmlns:a16="http://schemas.microsoft.com/office/drawing/2014/main" id="{B7599784-F8FE-4E02-91A5-C5E323882FE3}"/>
+                <a16:creationId xmlns:a16="http://schemas.microsoft.com/office/drawing/2014/main" id="{ECC84B2D-9B5D-475B-B220-0AEB5A028975}"/>
               </a:ext>
             </a:extLst>
           </p:cNvPr>
@@ -16195,7 +16195,7 @@
                 <a:ea typeface="Arial"/>
                 <a:cs typeface="Arial"/>
               </a:rPr>
-              <a:t>Eight registrations and local call checks passed. Broader acceptance continues.</a:t>
+              <a:t>Eight registrations and local call checks passed. Cross-phone tests remain separate.</a:t>
             </a:r>
           </a:p>
         </p:txBody>
@@ -16203,7 +16203,7 @@
     </p:spTree>
     <p:extLst>
       <p:ext uri="{BB962C8B-B14F-4D97-AF65-F5344CB8AC3E}">
-        <p14:creationId xmlns:p14="http://schemas.microsoft.com/office/powerpoint/2010/main" val="1684131079"/>
+        <p14:creationId xmlns:p14="http://schemas.microsoft.com/office/powerpoint/2010/main" val="1990192390"/>
       </p:ext>
     </p:extLst>
   </p:cSld>
@@ -16234,7 +16234,7 @@
           <p:cNvPr id="14" name="Home Assistant phone controls">
             <a:extLst xmlns:a="http://schemas.openxmlformats.org/drawingml/2006/main">
               <a:ext uri="{FF2B5EF4-FFF2-40B4-BE49-F238E27FC236}">
-                <a16:creationId xmlns:a16="http://schemas.microsoft.com/office/drawing/2014/main" id="{28644324-7B9D-4D14-86D1-0A58BBBAD2A1}"/>
+                <a16:creationId xmlns:a16="http://schemas.microsoft.com/office/drawing/2014/main" id="{3A91B740-6F4E-4E3C-8CED-A12D4CEE83E8}"/>
               </a:ext>
             </a:extLst>
           </p:cNvPr>
@@ -16392,7 +16392,7 @@
           <p:cNvPr id="2" name="16">
             <a:extLst xmlns:a="http://schemas.openxmlformats.org/drawingml/2006/main">
               <a:ext uri="{FF2B5EF4-FFF2-40B4-BE49-F238E27FC236}">
-                <a16:creationId xmlns:a16="http://schemas.microsoft.com/office/drawing/2014/main" id="{15F6AA9C-8FC1-4A4D-9403-CD8B77CD6B5B}"/>
+                <a16:creationId xmlns:a16="http://schemas.microsoft.com/office/drawing/2014/main" id="{BA606C63-00B3-40C6-95A0-E3C6B4ABB3A0}"/>
               </a:ext>
             </a:extLst>
           </p:cNvPr>
@@ -16547,10 +16547,10 @@
       </p:sp>
       <p:sp>
         <p:nvSpPr>
-          <p:cNvPr id="3" name="120">
+          <p:cNvPr id="3" name="116">
             <a:extLst xmlns:a="http://schemas.openxmlformats.org/drawingml/2006/main">
               <a:ext uri="{FF2B5EF4-FFF2-40B4-BE49-F238E27FC236}">
-                <a16:creationId xmlns:a16="http://schemas.microsoft.com/office/drawing/2014/main" id="{79B8E6BD-7875-46B2-B624-25559C27037C}"/>
+                <a16:creationId xmlns:a16="http://schemas.microsoft.com/office/drawing/2014/main" id="{CE523432-D045-4212-AE35-019B91964C4A}"/>
               </a:ext>
             </a:extLst>
           </p:cNvPr>
@@ -16698,7 +16698,7 @@
                 <a:ea typeface="Arial"/>
                 <a:cs typeface="Arial"/>
               </a:rPr>
-              <a:t>120</a:t>
+              <a:t>116</a:t>
             </a:r>
           </a:p>
         </p:txBody>
@@ -16708,7 +16708,7 @@
           <p:cNvPr id="4" name="control entities">
             <a:extLst xmlns:a="http://schemas.openxmlformats.org/drawingml/2006/main">
               <a:ext uri="{FF2B5EF4-FFF2-40B4-BE49-F238E27FC236}">
-                <a16:creationId xmlns:a16="http://schemas.microsoft.com/office/drawing/2014/main" id="{A02195AA-96DF-40BD-8195-AAFD0E271115}"/>
+                <a16:creationId xmlns:a16="http://schemas.microsoft.com/office/drawing/2014/main" id="{E5FFD2B9-94C1-4364-8EB8-AC63BBABAC13}"/>
               </a:ext>
             </a:extLst>
           </p:cNvPr>
@@ -16866,7 +16866,7 @@
           <p:cNvPr id="5" name="Call controls">
             <a:extLst xmlns:a="http://schemas.openxmlformats.org/drawingml/2006/main">
               <a:ext uri="{FF2B5EF4-FFF2-40B4-BE49-F238E27FC236}">
-                <a16:creationId xmlns:a16="http://schemas.microsoft.com/office/drawing/2014/main" id="{0EBF8A80-362D-4E66-AD24-3E95EB1AF420}"/>
+                <a16:creationId xmlns:a16="http://schemas.microsoft.com/office/drawing/2014/main" id="{A23B0723-44B6-42E7-8248-8BDF1C70EEB2}"/>
               </a:ext>
             </a:extLst>
           </p:cNvPr>
@@ -17024,7 +17024,7 @@
           <p:cNvPr id="6" name="Line, dial, answer and exact-channel hangup">
             <a:extLst xmlns:a="http://schemas.openxmlformats.org/drawingml/2006/main">
               <a:ext uri="{FF2B5EF4-FFF2-40B4-BE49-F238E27FC236}">
-                <a16:creationId xmlns:a16="http://schemas.microsoft.com/office/drawing/2014/main" id="{6638CFEA-10DA-4389-8968-B7E0C3D61041}"/>
+                <a16:creationId xmlns:a16="http://schemas.microsoft.com/office/drawing/2014/main" id="{5E4C5AB1-3189-483B-84C8-F5B30BB25C6F}"/>
               </a:ext>
             </a:extLst>
           </p:cNvPr>
@@ -17182,7 +17182,7 @@
           <p:cNvPr id="7" name="Personal settings">
             <a:extLst xmlns:a="http://schemas.openxmlformats.org/drawingml/2006/main">
               <a:ext uri="{FF2B5EF4-FFF2-40B4-BE49-F238E27FC236}">
-                <a16:creationId xmlns:a16="http://schemas.microsoft.com/office/drawing/2014/main" id="{F69BD520-71A4-4D54-BAB4-11B5D8A89682}"/>
+                <a16:creationId xmlns:a16="http://schemas.microsoft.com/office/drawing/2014/main" id="{30D88A6F-E57A-433F-A162-38108A56941F}"/>
               </a:ext>
             </a:extLst>
           </p:cNvPr>
@@ -17337,10 +17337,10 @@
       </p:sp>
       <p:sp>
         <p:nvSpPr>
-          <p:cNvPr id="8" name="PBX DND and opt-in gateway auto-answer">
+          <p:cNvPr id="8" name="PBX DND and optional normal-call auto-answer">
             <a:extLst xmlns:a="http://schemas.openxmlformats.org/drawingml/2006/main">
               <a:ext uri="{FF2B5EF4-FFF2-40B4-BE49-F238E27FC236}">
-                <a16:creationId xmlns:a16="http://schemas.microsoft.com/office/drawing/2014/main" id="{9B106CB0-A83E-492A-8663-1CF42DFE459C}"/>
+                <a16:creationId xmlns:a16="http://schemas.microsoft.com/office/drawing/2014/main" id="{C7D1A554-6EC3-4105-9281-C4E68C2018B4}"/>
               </a:ext>
             </a:extLst>
           </p:cNvPr>
@@ -17488,7 +17488,7 @@
                 <a:ea typeface="Arial"/>
                 <a:cs typeface="Arial"/>
               </a:rPr>
-              <a:t>PBX DND and opt-in gateway auto-answer</a:t>
+              <a:t>PBX DND and optional normal-call auto-answer</a:t>
             </a:r>
           </a:p>
         </p:txBody>
@@ -17498,7 +17498,7 @@
           <p:cNvPr id="9" name="Schedules">
             <a:extLst xmlns:a="http://schemas.openxmlformats.org/drawingml/2006/main">
               <a:ext uri="{FF2B5EF4-FFF2-40B4-BE49-F238E27FC236}">
-                <a16:creationId xmlns:a16="http://schemas.microsoft.com/office/drawing/2014/main" id="{D161E8CF-C32E-454B-812A-8DF88EA3823D}"/>
+                <a16:creationId xmlns:a16="http://schemas.microsoft.com/office/drawing/2014/main" id="{AB52DBF3-4716-4C98-BBC3-F305EF1CDB56}"/>
               </a:ext>
             </a:extLst>
           </p:cNvPr>
@@ -17653,10 +17653,10 @@
       </p:sp>
       <p:sp>
         <p:nvSpPr>
-          <p:cNvPr id="10" name="Countdown timers and chosen weekdays">
+          <p:cNvPr id="10" name="Timers and weekdays with a Stop alert control">
             <a:extLst xmlns:a="http://schemas.openxmlformats.org/drawingml/2006/main">
               <a:ext uri="{FF2B5EF4-FFF2-40B4-BE49-F238E27FC236}">
-                <a16:creationId xmlns:a16="http://schemas.microsoft.com/office/drawing/2014/main" id="{9E6F3904-0B86-4A92-92D8-A2850A284335}"/>
+                <a16:creationId xmlns:a16="http://schemas.microsoft.com/office/drawing/2014/main" id="{18D52542-F49C-4543-A443-D179BC43A4FD}"/>
               </a:ext>
             </a:extLst>
           </p:cNvPr>
@@ -17804,7 +17804,7 @@
                 <a:ea typeface="Arial"/>
                 <a:cs typeface="Arial"/>
               </a:rPr>
-              <a:t>Countdown timers and chosen weekdays</a:t>
+              <a:t>Timers and weekdays with a Stop alert control</a:t>
             </a:r>
           </a:p>
         </p:txBody>
@@ -17814,7 +17814,7 @@
           <p:cNvPr id="11" name="Phone screen">
             <a:extLst xmlns:a="http://schemas.openxmlformats.org/drawingml/2006/main">
               <a:ext uri="{FF2B5EF4-FFF2-40B4-BE49-F238E27FC236}">
-                <a16:creationId xmlns:a16="http://schemas.microsoft.com/office/drawing/2014/main" id="{E6EEE2C3-6CF7-4387-99AD-E35A849673DA}"/>
+                <a16:creationId xmlns:a16="http://schemas.microsoft.com/office/drawing/2014/main" id="{D0571B3B-79BD-4BAE-A075-B1AEFB85A3C6}"/>
               </a:ext>
             </a:extLst>
           </p:cNvPr>
@@ -17972,7 +17972,7 @@
           <p:cNvPr id="12" name="Authenticated text and approved images">
             <a:extLst xmlns:a="http://schemas.openxmlformats.org/drawingml/2006/main">
               <a:ext uri="{FF2B5EF4-FFF2-40B4-BE49-F238E27FC236}">
-                <a16:creationId xmlns:a16="http://schemas.microsoft.com/office/drawing/2014/main" id="{590D4A54-E437-47B5-A7D1-B5C0F8E5D38E}"/>
+                <a16:creationId xmlns:a16="http://schemas.microsoft.com/office/drawing/2014/main" id="{8EAD403B-283A-4A5F-BBDC-CF66510AE4F5}"/>
               </a:ext>
             </a:extLst>
           </p:cNvPr>
@@ -18127,10 +18127,10 @@
       </p:sp>
       <p:sp>
         <p:nvSpPr>
-          <p:cNvPr id="13" name="Fresh call-state checks protect active calls. Live feature accept">
+          <p:cNvPr id="13" name="New alert controls await deployment and live acceptance.">
             <a:extLst xmlns:a="http://schemas.openxmlformats.org/drawingml/2006/main">
               <a:ext uri="{FF2B5EF4-FFF2-40B4-BE49-F238E27FC236}">
-                <a16:creationId xmlns:a16="http://schemas.microsoft.com/office/drawing/2014/main" id="{11D10C55-AD3E-4495-8E60-686CEB7F7B3B}"/>
+                <a16:creationId xmlns:a16="http://schemas.microsoft.com/office/drawing/2014/main" id="{87A6F19F-4606-41A3-9A69-98CB3397EC96}"/>
               </a:ext>
             </a:extLst>
           </p:cNvPr>
@@ -18278,7 +18278,7 @@
                 <a:ea typeface="Arial"/>
                 <a:cs typeface="Arial"/>
               </a:rPr>
-              <a:t>Fresh call-state checks protect active calls. Live feature acceptance remains underway.</a:t>
+              <a:t>New alert controls await deployment and live acceptance.</a:t>
             </a:r>
           </a:p>
         </p:txBody>
@@ -18286,7 +18286,7 @@
     </p:spTree>
     <p:extLst>
       <p:ext uri="{BB962C8B-B14F-4D97-AF65-F5344CB8AC3E}">
-        <p14:creationId xmlns:p14="http://schemas.microsoft.com/office/powerpoint/2010/main" val="2027182359"/>
+        <p14:creationId xmlns:p14="http://schemas.microsoft.com/office/powerpoint/2010/main" val="695774530"/>
       </p:ext>
     </p:extLst>
   </p:cSld>
@@ -18314,10 +18314,10 @@
       </p:grpSpPr>
       <p:sp>
         <p:nvSpPr>
-          <p:cNvPr id="22" name="Radio and scheduled calls">
+          <p:cNvPr id="22" name="Radio and scheduled alerts">
             <a:extLst xmlns:a="http://schemas.openxmlformats.org/drawingml/2006/main">
               <a:ext uri="{FF2B5EF4-FFF2-40B4-BE49-F238E27FC236}">
-                <a16:creationId xmlns:a16="http://schemas.microsoft.com/office/drawing/2014/main" id="{D035768D-6740-448F-BA32-71976397E813}"/>
+                <a16:creationId xmlns:a16="http://schemas.microsoft.com/office/drawing/2014/main" id="{B81178FB-1116-4785-9BB5-F9EC27D6C809}"/>
               </a:ext>
             </a:extLst>
           </p:cNvPr>
@@ -18465,7 +18465,7 @@
                 <a:ea typeface="Arial"/>
                 <a:cs typeface="Arial"/>
               </a:rPr>
-              <a:t>Radio and scheduled calls</a:t>
+              <a:t>Radio and scheduled alerts</a:t>
             </a:r>
           </a:p>
         </p:txBody>
@@ -18475,7 +18475,7 @@
           <p:cNvPr id="2" name="17">
             <a:extLst xmlns:a="http://schemas.openxmlformats.org/drawingml/2006/main">
               <a:ext uri="{FF2B5EF4-FFF2-40B4-BE49-F238E27FC236}">
-                <a16:creationId xmlns:a16="http://schemas.microsoft.com/office/drawing/2014/main" id="{A0EF1DD5-3CFA-49A9-BB1B-16D4C65382C0}"/>
+                <a16:creationId xmlns:a16="http://schemas.microsoft.com/office/drawing/2014/main" id="{34163F6C-A776-4248-A35A-F487C1344B95}"/>
               </a:ext>
             </a:extLst>
           </p:cNvPr>
@@ -18630,10 +18630,10 @@
       </p:sp>
       <p:sp>
         <p:nvSpPr>
-          <p:cNvPr id="3" name="640">
+          <p:cNvPr id="3" name="RING">
             <a:extLst xmlns:a="http://schemas.openxmlformats.org/drawingml/2006/main">
               <a:ext uri="{FF2B5EF4-FFF2-40B4-BE49-F238E27FC236}">
-                <a16:creationId xmlns:a16="http://schemas.microsoft.com/office/drawing/2014/main" id="{72805B55-24BF-47FC-9981-9C503513616A}"/>
+                <a16:creationId xmlns:a16="http://schemas.microsoft.com/office/drawing/2014/main" id="{1BEFDFEB-AA97-4A92-B2E8-1BFB945F5B31}"/>
               </a:ext>
             </a:extLst>
           </p:cNvPr>
@@ -18781,17 +18781,17 @@
                 <a:ea typeface="Arial"/>
                 <a:cs typeface="Arial"/>
               </a:rPr>
-              <a:t>640</a:t>
+              <a:t>RING</a:t>
             </a:r>
           </a:p>
         </p:txBody>
       </p:sp>
       <p:sp>
         <p:nvSpPr>
-          <p:cNvPr id="4" name="Alarm tone">
+          <p:cNvPr id="4" name="Until you stop it">
             <a:extLst xmlns:a="http://schemas.openxmlformats.org/drawingml/2006/main">
               <a:ext uri="{FF2B5EF4-FFF2-40B4-BE49-F238E27FC236}">
-                <a16:creationId xmlns:a16="http://schemas.microsoft.com/office/drawing/2014/main" id="{53FAE97A-7022-4C25-AA4F-D211BC20AB3D}"/>
+                <a16:creationId xmlns:a16="http://schemas.microsoft.com/office/drawing/2014/main" id="{A878FFAE-C628-4FA7-AC52-FA6911F6F3FB}"/>
               </a:ext>
             </a:extLst>
           </p:cNvPr>
@@ -18939,17 +18939,17 @@
                 <a:ea typeface="Arial"/>
                 <a:cs typeface="Arial"/>
               </a:rPr>
-              <a:t>Alarm tone</a:t>
+              <a:t>Until you stop it</a:t>
             </a:r>
           </a:p>
         </p:txBody>
       </p:sp>
       <p:sp>
         <p:nvSpPr>
-          <p:cNvPr id="5" name="Up to 30 seconds&#10;Ends after playback">
+          <p:cNvPr id="5" name="Answer / reject&#10;or press Stop alert">
             <a:extLst xmlns:a="http://schemas.openxmlformats.org/drawingml/2006/main">
               <a:ext uri="{FF2B5EF4-FFF2-40B4-BE49-F238E27FC236}">
-                <a16:creationId xmlns:a16="http://schemas.microsoft.com/office/drawing/2014/main" id="{0C192520-3D40-4882-B0A5-8CDC1E62D4BB}"/>
+                <a16:creationId xmlns:a16="http://schemas.microsoft.com/office/drawing/2014/main" id="{2358550B-1FCB-4083-9B5E-31A614C0955B}"/>
               </a:ext>
             </a:extLst>
           </p:cNvPr>
@@ -19097,7 +19097,7 @@
                 <a:ea typeface="Arial"/>
                 <a:cs typeface="Arial"/>
               </a:rPr>
-              <a:t>Up to 30 seconds</a:t>
+              <a:t>Answer / reject</a:t>
             </a:r>
           </a:p>
           <a:p xmlns:a="http://schemas.openxmlformats.org/drawingml/2006/main">
@@ -19120,17 +19120,17 @@
                 <a:ea typeface="Arial"/>
                 <a:cs typeface="Arial"/>
               </a:rPr>
-              <a:t>Ends after playback</a:t>
+              <a:t>or press Stop alert</a:t>
             </a:r>
           </a:p>
         </p:txBody>
       </p:sp>
       <p:sp>
         <p:nvSpPr>
-          <p:cNvPr id="6" name="Radio fetches only&#10;during an active call">
+          <p:cNvPr id="6" name="No auto-answer&#10;No after-answer audio">
             <a:extLst xmlns:a="http://schemas.openxmlformats.org/drawingml/2006/main">
               <a:ext uri="{FF2B5EF4-FFF2-40B4-BE49-F238E27FC236}">
-                <a16:creationId xmlns:a16="http://schemas.microsoft.com/office/drawing/2014/main" id="{F638EE0F-AAA4-4DA7-A20C-62941903FCB0}"/>
+                <a16:creationId xmlns:a16="http://schemas.microsoft.com/office/drawing/2014/main" id="{FF721422-B5B4-4A08-8C4E-D7D84E5CF695}"/>
               </a:ext>
             </a:extLst>
           </p:cNvPr>
@@ -19278,7 +19278,7 @@
                 <a:ea typeface="Arial"/>
                 <a:cs typeface="Arial"/>
               </a:rPr>
-              <a:t>Radio fetches only</a:t>
+              <a:t>No auto-answer</a:t>
             </a:r>
           </a:p>
           <a:p xmlns:a="http://schemas.openxmlformats.org/drawingml/2006/main">
@@ -19301,7 +19301,7 @@
                 <a:ea typeface="Arial"/>
                 <a:cs typeface="Arial"/>
               </a:rPr>
-              <a:t>during an active call</a:t>
+              <a:t>No after-answer audio</a:t>
             </a:r>
           </a:p>
         </p:txBody>
@@ -19311,7 +19311,7 @@
           <p:cNvPr id="7" name="701">
             <a:extLst xmlns:a="http://schemas.openxmlformats.org/drawingml/2006/main">
               <a:ext uri="{FF2B5EF4-FFF2-40B4-BE49-F238E27FC236}">
-                <a16:creationId xmlns:a16="http://schemas.microsoft.com/office/drawing/2014/main" id="{F3F07658-52B5-4475-BAF7-B18C6584199B}"/>
+                <a16:creationId xmlns:a16="http://schemas.microsoft.com/office/drawing/2014/main" id="{2493BAA6-7778-4724-832E-83FE0F20069C}"/>
               </a:ext>
             </a:extLst>
           </p:cNvPr>
@@ -19469,7 +19469,7 @@
           <p:cNvPr id="8" name="Matryoshka Radio">
             <a:extLst xmlns:a="http://schemas.openxmlformats.org/drawingml/2006/main">
               <a:ext uri="{FF2B5EF4-FFF2-40B4-BE49-F238E27FC236}">
-                <a16:creationId xmlns:a16="http://schemas.microsoft.com/office/drawing/2014/main" id="{3BD1E7F5-3342-4FDF-8231-ECAC9FE947BD}"/>
+                <a16:creationId xmlns:a16="http://schemas.microsoft.com/office/drawing/2014/main" id="{4449D4E5-3372-4A8B-A665-9ACE4848A053}"/>
               </a:ext>
             </a:extLst>
           </p:cNvPr>
@@ -19627,7 +19627,7 @@
           <p:cNvPr id="9" name="702">
             <a:extLst xmlns:a="http://schemas.openxmlformats.org/drawingml/2006/main">
               <a:ext uri="{FF2B5EF4-FFF2-40B4-BE49-F238E27FC236}">
-                <a16:creationId xmlns:a16="http://schemas.microsoft.com/office/drawing/2014/main" id="{B605D583-7831-4A66-A976-E9CE7AEB6FAA}"/>
+                <a16:creationId xmlns:a16="http://schemas.microsoft.com/office/drawing/2014/main" id="{EF407A98-762C-430A-A3F8-783BAF62CCB2}"/>
               </a:ext>
             </a:extLst>
           </p:cNvPr>
@@ -19785,7 +19785,7 @@
           <p:cNvPr id="10" name="Echo online">
             <a:extLst xmlns:a="http://schemas.openxmlformats.org/drawingml/2006/main">
               <a:ext uri="{FF2B5EF4-FFF2-40B4-BE49-F238E27FC236}">
-                <a16:creationId xmlns:a16="http://schemas.microsoft.com/office/drawing/2014/main" id="{4D71E6D1-49C2-4ABE-B958-A6472BA39C82}"/>
+                <a16:creationId xmlns:a16="http://schemas.microsoft.com/office/drawing/2014/main" id="{5D80B8FD-A2B1-4F00-A7F7-9412093764CE}"/>
               </a:ext>
             </a:extLst>
           </p:cNvPr>
@@ -19943,7 +19943,7 @@
           <p:cNvPr id="11" name="703">
             <a:extLst xmlns:a="http://schemas.openxmlformats.org/drawingml/2006/main">
               <a:ext uri="{FF2B5EF4-FFF2-40B4-BE49-F238E27FC236}">
-                <a16:creationId xmlns:a16="http://schemas.microsoft.com/office/drawing/2014/main" id="{D4E68F28-4B0E-45A6-A0C4-6050888E2655}"/>
+                <a16:creationId xmlns:a16="http://schemas.microsoft.com/office/drawing/2014/main" id="{49533832-32BF-4065-80C2-40C3289E03D3}"/>
               </a:ext>
             </a:extLst>
           </p:cNvPr>
@@ -20101,7 +20101,7 @@
           <p:cNvPr id="12" name="RADIO BOB! Rock">
             <a:extLst xmlns:a="http://schemas.openxmlformats.org/drawingml/2006/main">
               <a:ext uri="{FF2B5EF4-FFF2-40B4-BE49-F238E27FC236}">
-                <a16:creationId xmlns:a16="http://schemas.microsoft.com/office/drawing/2014/main" id="{D8C7ACD4-4132-435B-8341-995FFB13FF8F}"/>
+                <a16:creationId xmlns:a16="http://schemas.microsoft.com/office/drawing/2014/main" id="{5D611BF4-4F4D-4DC8-8C55-67762B47EEB4}"/>
               </a:ext>
             </a:extLst>
           </p:cNvPr>
@@ -20259,7 +20259,7 @@
           <p:cNvPr id="13" name="704">
             <a:extLst xmlns:a="http://schemas.openxmlformats.org/drawingml/2006/main">
               <a:ext uri="{FF2B5EF4-FFF2-40B4-BE49-F238E27FC236}">
-                <a16:creationId xmlns:a16="http://schemas.microsoft.com/office/drawing/2014/main" id="{55B181AB-55A7-4807-93A5-C892ABDAF286}"/>
+                <a16:creationId xmlns:a16="http://schemas.microsoft.com/office/drawing/2014/main" id="{99AF90E4-B08C-4C32-889D-926F9B04C9F5}"/>
               </a:ext>
             </a:extLst>
           </p:cNvPr>
@@ -20417,7 +20417,7 @@
           <p:cNvPr id="14" name="RADIO BOB! Metal">
             <a:extLst xmlns:a="http://schemas.openxmlformats.org/drawingml/2006/main">
               <a:ext uri="{FF2B5EF4-FFF2-40B4-BE49-F238E27FC236}">
-                <a16:creationId xmlns:a16="http://schemas.microsoft.com/office/drawing/2014/main" id="{AF6FBB85-D39C-4414-A862-4E46B253CDC1}"/>
+                <a16:creationId xmlns:a16="http://schemas.microsoft.com/office/drawing/2014/main" id="{0F094306-08CC-4C86-A96F-84E6796A9C9A}"/>
               </a:ext>
             </a:extLst>
           </p:cNvPr>
@@ -20575,7 +20575,7 @@
           <p:cNvPr id="15" name="705">
             <a:extLst xmlns:a="http://schemas.openxmlformats.org/drawingml/2006/main">
               <a:ext uri="{FF2B5EF4-FFF2-40B4-BE49-F238E27FC236}">
-                <a16:creationId xmlns:a16="http://schemas.microsoft.com/office/drawing/2014/main" id="{1024FEBF-3033-4230-9865-C7AB5EA7C7C2}"/>
+                <a16:creationId xmlns:a16="http://schemas.microsoft.com/office/drawing/2014/main" id="{1D256B4C-47FC-4AE5-ACA0-56575CE995E8}"/>
               </a:ext>
             </a:extLst>
           </p:cNvPr>
@@ -20733,7 +20733,7 @@
           <p:cNvPr id="16" name="RADIO BOB! Gothic">
             <a:extLst xmlns:a="http://schemas.openxmlformats.org/drawingml/2006/main">
               <a:ext uri="{FF2B5EF4-FFF2-40B4-BE49-F238E27FC236}">
-                <a16:creationId xmlns:a16="http://schemas.microsoft.com/office/drawing/2014/main" id="{218B0684-2BB5-4187-9C00-D304099AA120}"/>
+                <a16:creationId xmlns:a16="http://schemas.microsoft.com/office/drawing/2014/main" id="{33D51150-CCC3-4F74-8A9C-641F3089823D}"/>
               </a:ext>
             </a:extLst>
           </p:cNvPr>
@@ -20891,7 +20891,7 @@
           <p:cNvPr id="17" name="706">
             <a:extLst xmlns:a="http://schemas.openxmlformats.org/drawingml/2006/main">
               <a:ext uri="{FF2B5EF4-FFF2-40B4-BE49-F238E27FC236}">
-                <a16:creationId xmlns:a16="http://schemas.microsoft.com/office/drawing/2014/main" id="{5F43D29D-1D79-45C4-A54C-A6390E6055D6}"/>
+                <a16:creationId xmlns:a16="http://schemas.microsoft.com/office/drawing/2014/main" id="{4B4831E2-C979-456D-ADF8-F27F61C5A766}"/>
               </a:ext>
             </a:extLst>
           </p:cNvPr>
@@ -21049,7 +21049,7 @@
           <p:cNvPr id="18" name="SomaFM PopTron">
             <a:extLst xmlns:a="http://schemas.openxmlformats.org/drawingml/2006/main">
               <a:ext uri="{FF2B5EF4-FFF2-40B4-BE49-F238E27FC236}">
-                <a16:creationId xmlns:a16="http://schemas.microsoft.com/office/drawing/2014/main" id="{CBE1AE80-3101-4B8C-887B-5A090D79BADC}"/>
+                <a16:creationId xmlns:a16="http://schemas.microsoft.com/office/drawing/2014/main" id="{5B2CDE62-82A5-40B3-A58F-6E1C8B231440}"/>
               </a:ext>
             </a:extLst>
           </p:cNvPr>
@@ -21207,7 +21207,7 @@
           <p:cNvPr id="19" name="707">
             <a:extLst xmlns:a="http://schemas.openxmlformats.org/drawingml/2006/main">
               <a:ext uri="{FF2B5EF4-FFF2-40B4-BE49-F238E27FC236}">
-                <a16:creationId xmlns:a16="http://schemas.microsoft.com/office/drawing/2014/main" id="{005D21B9-F37A-4F40-B4CC-BF5D7C5660B4}"/>
+                <a16:creationId xmlns:a16="http://schemas.microsoft.com/office/drawing/2014/main" id="{EE8BE85C-2D99-4A4C-9669-CB1F911C8200}"/>
               </a:ext>
             </a:extLst>
           </p:cNvPr>
@@ -21365,7 +21365,7 @@
           <p:cNvPr id="20" name="Radyo Viva / Turkish">
             <a:extLst xmlns:a="http://schemas.openxmlformats.org/drawingml/2006/main">
               <a:ext uri="{FF2B5EF4-FFF2-40B4-BE49-F238E27FC236}">
-                <a16:creationId xmlns:a16="http://schemas.microsoft.com/office/drawing/2014/main" id="{C7507CE6-530A-4696-AF3B-B43B5CDC50EF}"/>
+                <a16:creationId xmlns:a16="http://schemas.microsoft.com/office/drawing/2014/main" id="{61B9343B-9FBB-4492-9D63-9CD8D2D84A33}"/>
               </a:ext>
             </a:extLst>
           </p:cNvPr>
@@ -21520,10 +21520,10 @@
       </p:sp>
       <p:sp>
         <p:nvSpPr>
-          <p:cNvPr id="21" name="Official streams decoded successfully. Handset radio and alarm te">
+          <p:cNvPr id="21" name="640 remains a manual tone test. New alert behavior awaits deploym">
             <a:extLst xmlns:a="http://schemas.openxmlformats.org/drawingml/2006/main">
               <a:ext uri="{FF2B5EF4-FFF2-40B4-BE49-F238E27FC236}">
-                <a16:creationId xmlns:a16="http://schemas.microsoft.com/office/drawing/2014/main" id="{C56628E3-1936-4FFA-924A-553DD71EC30C}"/>
+                <a16:creationId xmlns:a16="http://schemas.microsoft.com/office/drawing/2014/main" id="{7F112327-5FB4-469D-81A2-9A1D3FCCF767}"/>
               </a:ext>
             </a:extLst>
           </p:cNvPr>
@@ -21671,7 +21671,7 @@
                 <a:ea typeface="Arial"/>
                 <a:cs typeface="Arial"/>
               </a:rPr>
-              <a:t>Official streams decoded successfully. Handset radio and alarm tests continue.</a:t>
+              <a:t>640 remains a manual tone test. New alert behavior awaits deployment and live acceptance.</a:t>
             </a:r>
           </a:p>
         </p:txBody>
@@ -21679,7 +21679,7 @@
     </p:spTree>
     <p:extLst>
       <p:ext uri="{BB962C8B-B14F-4D97-AF65-F5344CB8AC3E}">
-        <p14:creationId xmlns:p14="http://schemas.microsoft.com/office/powerpoint/2010/main" val="2064023368"/>
+        <p14:creationId xmlns:p14="http://schemas.microsoft.com/office/powerpoint/2010/main" val="492685547"/>
       </p:ext>
     </p:extLst>
   </p:cSld>
@@ -21710,7 +21710,7 @@
           <p:cNvPr id="14" name="Free SIP account status">
             <a:extLst xmlns:a="http://schemas.openxmlformats.org/drawingml/2006/main">
               <a:ext uri="{FF2B5EF4-FFF2-40B4-BE49-F238E27FC236}">
-                <a16:creationId xmlns:a16="http://schemas.microsoft.com/office/drawing/2014/main" id="{AB75C41D-7D05-41B3-A731-0A5AF0499436}"/>
+                <a16:creationId xmlns:a16="http://schemas.microsoft.com/office/drawing/2014/main" id="{10CA7F7D-D3F8-4249-B599-51575CA32150}"/>
               </a:ext>
             </a:extLst>
           </p:cNvPr>
@@ -21868,7 +21868,7 @@
           <p:cNvPr id="2" name="18">
             <a:extLst xmlns:a="http://schemas.openxmlformats.org/drawingml/2006/main">
               <a:ext uri="{FF2B5EF4-FFF2-40B4-BE49-F238E27FC236}">
-                <a16:creationId xmlns:a16="http://schemas.microsoft.com/office/drawing/2014/main" id="{D10A52C8-A56E-4899-ADD8-F97DB0942B1C}"/>
+                <a16:creationId xmlns:a16="http://schemas.microsoft.com/office/drawing/2014/main" id="{8A08B38D-A66C-42F0-898A-A150F07B787D}"/>
               </a:ext>
             </a:extLst>
           </p:cNvPr>
@@ -22026,7 +22026,7 @@
           <p:cNvPr id="3" name="SIP2SIP">
             <a:extLst xmlns:a="http://schemas.openxmlformats.org/drawingml/2006/main">
               <a:ext uri="{FF2B5EF4-FFF2-40B4-BE49-F238E27FC236}">
-                <a16:creationId xmlns:a16="http://schemas.microsoft.com/office/drawing/2014/main" id="{8C99E4F2-EC92-44CF-9194-40DFCAA4D237}"/>
+                <a16:creationId xmlns:a16="http://schemas.microsoft.com/office/drawing/2014/main" id="{2A51D442-9F07-4033-8DE7-BB3C57AB885E}"/>
               </a:ext>
             </a:extLst>
           </p:cNvPr>
@@ -22056,7 +22056,7 @@
             <a:defPPr algn="l">
               <a:defRPr sz="2250" b="1">
                 <a:solidFill>
-                  <a:srgbClr val="48DDCC"/>
+                  <a:srgbClr val="F7CB64"/>
                 </a:solidFill>
                 <a:latin typeface="Arial"/>
                 <a:ea typeface="Arial"/>
@@ -22066,7 +22066,7 @@
             <a:lvl1pPr algn="l">
               <a:defRPr sz="2250" b="1">
                 <a:solidFill>
-                  <a:srgbClr val="48DDCC"/>
+                  <a:srgbClr val="F7CB64"/>
                 </a:solidFill>
                 <a:latin typeface="Arial"/>
                 <a:ea typeface="Arial"/>
@@ -22076,7 +22076,7 @@
             <a:lvl2pPr algn="l">
               <a:defRPr sz="2250" b="1">
                 <a:solidFill>
-                  <a:srgbClr val="48DDCC"/>
+                  <a:srgbClr val="F7CB64"/>
                 </a:solidFill>
                 <a:latin typeface="Arial"/>
                 <a:ea typeface="Arial"/>
@@ -22086,7 +22086,7 @@
             <a:lvl3pPr algn="l">
               <a:defRPr sz="2250" b="1">
                 <a:solidFill>
-                  <a:srgbClr val="48DDCC"/>
+                  <a:srgbClr val="F7CB64"/>
                 </a:solidFill>
                 <a:latin typeface="Arial"/>
                 <a:ea typeface="Arial"/>
@@ -22096,7 +22096,7 @@
             <a:lvl4pPr algn="l">
               <a:defRPr sz="2250" b="1">
                 <a:solidFill>
-                  <a:srgbClr val="48DDCC"/>
+                  <a:srgbClr val="F7CB64"/>
                 </a:solidFill>
                 <a:latin typeface="Arial"/>
                 <a:ea typeface="Arial"/>
@@ -22106,7 +22106,7 @@
             <a:lvl5pPr algn="l">
               <a:defRPr sz="2250" b="1">
                 <a:solidFill>
-                  <a:srgbClr val="48DDCC"/>
+                  <a:srgbClr val="F7CB64"/>
                 </a:solidFill>
                 <a:latin typeface="Arial"/>
                 <a:ea typeface="Arial"/>
@@ -22116,7 +22116,7 @@
             <a:lvl6pPr algn="l">
               <a:defRPr sz="2250" b="1">
                 <a:solidFill>
-                  <a:srgbClr val="48DDCC"/>
+                  <a:srgbClr val="F7CB64"/>
                 </a:solidFill>
                 <a:latin typeface="Arial"/>
                 <a:ea typeface="Arial"/>
@@ -22126,7 +22126,7 @@
             <a:lvl7pPr algn="l">
               <a:defRPr sz="2250" b="1">
                 <a:solidFill>
-                  <a:srgbClr val="48DDCC"/>
+                  <a:srgbClr val="F7CB64"/>
                 </a:solidFill>
                 <a:latin typeface="Arial"/>
                 <a:ea typeface="Arial"/>
@@ -22136,7 +22136,7 @@
             <a:lvl8pPr algn="l">
               <a:defRPr sz="2250" b="1">
                 <a:solidFill>
-                  <a:srgbClr val="48DDCC"/>
+                  <a:srgbClr val="F7CB64"/>
                 </a:solidFill>
                 <a:latin typeface="Arial"/>
                 <a:ea typeface="Arial"/>
@@ -22146,7 +22146,7 @@
             <a:lvl9pPr algn="l">
               <a:defRPr sz="2250" b="1">
                 <a:solidFill>
-                  <a:srgbClr val="48DDCC"/>
+                  <a:srgbClr val="F7CB64"/>
                 </a:solidFill>
                 <a:latin typeface="Arial"/>
                 <a:ea typeface="Arial"/>
@@ -22158,7 +22158,7 @@
             <a:pPr algn="l">
               <a:defRPr sz="2250" b="1">
                 <a:solidFill>
-                  <a:srgbClr val="48DDCC"/>
+                  <a:srgbClr val="F7CB64"/>
                 </a:solidFill>
                 <a:latin typeface="Arial"/>
                 <a:ea typeface="Arial"/>
@@ -22168,7 +22168,7 @@
             <a:r>
               <a:rPr sz="2250" b="1">
                 <a:solidFill>
-                  <a:srgbClr val="48DDCC"/>
+                  <a:srgbClr val="F7CB64"/>
                 </a:solidFill>
                 <a:latin typeface="Arial"/>
                 <a:ea typeface="Arial"/>
@@ -22181,10 +22181,10 @@
       </p:sp>
       <p:sp>
         <p:nvSpPr>
-          <p:cNvPr id="4" name="Registered; 802 audio test deferred">
+          <p:cNvPr id="4" name="Echo answered, RTP loss observed">
             <a:extLst xmlns:a="http://schemas.openxmlformats.org/drawingml/2006/main">
               <a:ext uri="{FF2B5EF4-FFF2-40B4-BE49-F238E27FC236}">
-                <a16:creationId xmlns:a16="http://schemas.microsoft.com/office/drawing/2014/main" id="{5CD1A6CF-0854-441B-A040-2CA370522F86}"/>
+                <a16:creationId xmlns:a16="http://schemas.microsoft.com/office/drawing/2014/main" id="{8A94B71F-7B66-4ECA-B9FF-EECF89BDCBA1}"/>
               </a:ext>
             </a:extLst>
           </p:cNvPr>
@@ -22332,7 +22332,7 @@
                 <a:ea typeface="Arial"/>
                 <a:cs typeface="Arial"/>
               </a:rPr>
-              <a:t>Registered; 802 audio test deferred</a:t>
+              <a:t>Echo answered, RTP loss observed</a:t>
             </a:r>
           </a:p>
         </p:txBody>
@@ -22342,7 +22342,7 @@
           <p:cNvPr id="5" name="Callcentric">
             <a:extLst xmlns:a="http://schemas.openxmlformats.org/drawingml/2006/main">
               <a:ext uri="{FF2B5EF4-FFF2-40B4-BE49-F238E27FC236}">
-                <a16:creationId xmlns:a16="http://schemas.microsoft.com/office/drawing/2014/main" id="{93C4F66D-DA57-419F-928B-136B2F1FB8C7}"/>
+                <a16:creationId xmlns:a16="http://schemas.microsoft.com/office/drawing/2014/main" id="{54EEFE34-3C33-4D4F-82CC-832650836B9C}"/>
               </a:ext>
             </a:extLst>
           </p:cNvPr>
@@ -22497,10 +22497,10 @@
       </p:sp>
       <p:sp>
         <p:nvSpPr>
-          <p:cNvPr id="6" name="Registered; outbound review required">
+          <p:cNvPr id="6" name="Registered, outbound review required">
             <a:extLst xmlns:a="http://schemas.openxmlformats.org/drawingml/2006/main">
               <a:ext uri="{FF2B5EF4-FFF2-40B4-BE49-F238E27FC236}">
-                <a16:creationId xmlns:a16="http://schemas.microsoft.com/office/drawing/2014/main" id="{F5876147-BD2D-4E60-93D2-4E0504728D97}"/>
+                <a16:creationId xmlns:a16="http://schemas.microsoft.com/office/drawing/2014/main" id="{55ACC906-0FF8-40B4-B38A-D62E34FC447F}"/>
               </a:ext>
             </a:extLst>
           </p:cNvPr>
@@ -22648,7 +22648,7 @@
                 <a:ea typeface="Arial"/>
                 <a:cs typeface="Arial"/>
               </a:rPr>
-              <a:t>Registered; outbound review required</a:t>
+              <a:t>Registered, outbound review required</a:t>
             </a:r>
           </a:p>
         </p:txBody>
@@ -22658,7 +22658,7 @@
           <p:cNvPr id="7" name="Linphone">
             <a:extLst xmlns:a="http://schemas.openxmlformats.org/drawingml/2006/main">
               <a:ext uri="{FF2B5EF4-FFF2-40B4-BE49-F238E27FC236}">
-                <a16:creationId xmlns:a16="http://schemas.microsoft.com/office/drawing/2014/main" id="{1ADDCED0-A021-404B-99AC-554839AFF184}"/>
+                <a16:creationId xmlns:a16="http://schemas.microsoft.com/office/drawing/2014/main" id="{5CBC1CC4-5B72-4CBB-BF97-862A3C6D16B1}"/>
               </a:ext>
             </a:extLst>
           </p:cNvPr>
@@ -22813,10 +22813,10 @@
       </p:sp>
       <p:sp>
         <p:nvSpPr>
-          <p:cNvPr id="8" name="Registered; verified peer still needed">
+          <p:cNvPr id="8" name="Registered, verified peer still needed">
             <a:extLst xmlns:a="http://schemas.openxmlformats.org/drawingml/2006/main">
               <a:ext uri="{FF2B5EF4-FFF2-40B4-BE49-F238E27FC236}">
-                <a16:creationId xmlns:a16="http://schemas.microsoft.com/office/drawing/2014/main" id="{CA15DC05-1B75-44F5-8C88-22B5561A8AE2}"/>
+                <a16:creationId xmlns:a16="http://schemas.microsoft.com/office/drawing/2014/main" id="{F45F6876-940D-4EB6-9DBC-CE71014ECA5B}"/>
               </a:ext>
             </a:extLst>
           </p:cNvPr>
@@ -22964,7 +22964,7 @@
                 <a:ea typeface="Arial"/>
                 <a:cs typeface="Arial"/>
               </a:rPr>
-              <a:t>Registered; verified peer still needed</a:t>
+              <a:t>Registered, verified peer still needed</a:t>
             </a:r>
           </a:p>
         </p:txBody>
@@ -22974,7 +22974,7 @@
           <p:cNvPr id="9" name="FWD">
             <a:extLst xmlns:a="http://schemas.openxmlformats.org/drawingml/2006/main">
               <a:ext uri="{FF2B5EF4-FFF2-40B4-BE49-F238E27FC236}">
-                <a16:creationId xmlns:a16="http://schemas.microsoft.com/office/drawing/2014/main" id="{CF1FC03C-BE24-47DA-A2A3-6B9D756612EC}"/>
+                <a16:creationId xmlns:a16="http://schemas.microsoft.com/office/drawing/2014/main" id="{1A8858C2-30A1-4E06-8DDA-39D4660791B2}"/>
               </a:ext>
             </a:extLst>
           </p:cNvPr>
@@ -23132,7 +23132,7 @@
           <p:cNvPr id="10" name="Stopped at mandatory Verification Fee">
             <a:extLst xmlns:a="http://schemas.openxmlformats.org/drawingml/2006/main">
               <a:ext uri="{FF2B5EF4-FFF2-40B4-BE49-F238E27FC236}">
-                <a16:creationId xmlns:a16="http://schemas.microsoft.com/office/drawing/2014/main" id="{ACB6DF7C-9964-4D9A-9E6F-1114DCD89800}"/>
+                <a16:creationId xmlns:a16="http://schemas.microsoft.com/office/drawing/2014/main" id="{2ACAF121-710A-4DB6-BCE8-5F1107C72B57}"/>
               </a:ext>
             </a:extLst>
           </p:cNvPr>
@@ -23290,7 +23290,7 @@
           <p:cNvPr id="11" name="Google Voice">
             <a:extLst xmlns:a="http://schemas.openxmlformats.org/drawingml/2006/main">
               <a:ext uri="{FF2B5EF4-FFF2-40B4-BE49-F238E27FC236}">
-                <a16:creationId xmlns:a16="http://schemas.microsoft.com/office/drawing/2014/main" id="{953E0917-DBCA-4C4E-A015-ED141DD7CFFE}"/>
+                <a16:creationId xmlns:a16="http://schemas.microsoft.com/office/drawing/2014/main" id="{FA599304-FBBD-4765-B09B-C2B228B4C6FE}"/>
               </a:ext>
             </a:extLst>
           </p:cNvPr>
@@ -23448,7 +23448,7 @@
           <p:cNvPr id="12" name="No official free Asterisk SIP trunk">
             <a:extLst xmlns:a="http://schemas.openxmlformats.org/drawingml/2006/main">
               <a:ext uri="{FF2B5EF4-FFF2-40B4-BE49-F238E27FC236}">
-                <a16:creationId xmlns:a16="http://schemas.microsoft.com/office/drawing/2014/main" id="{3FCE805B-C7DD-4006-AE9F-D47FE8D363F6}"/>
+                <a16:creationId xmlns:a16="http://schemas.microsoft.com/office/drawing/2014/main" id="{2D3E0154-72DF-4FC3-832F-900D7ED0B921}"/>
               </a:ext>
             </a:extLst>
           </p:cNvPr>
@@ -23603,10 +23603,10 @@
       </p:sp>
       <p:sp>
         <p:nvSpPr>
-          <p:cNvPr id="13" name="REGISTER succeeded for three providers. External audio remains un">
+          <p:cNvPr id="13" name="Three providers registered. External media quality still needs ve">
             <a:extLst xmlns:a="http://schemas.openxmlformats.org/drawingml/2006/main">
               <a:ext uri="{FF2B5EF4-FFF2-40B4-BE49-F238E27FC236}">
-                <a16:creationId xmlns:a16="http://schemas.microsoft.com/office/drawing/2014/main" id="{1BF48E69-F87E-46F6-9467-57CBB39C0A43}"/>
+                <a16:creationId xmlns:a16="http://schemas.microsoft.com/office/drawing/2014/main" id="{1D5C1C08-452F-4CF3-AA34-49628FDC1344}"/>
               </a:ext>
             </a:extLst>
           </p:cNvPr>
@@ -23754,7 +23754,7 @@
                 <a:ea typeface="Arial"/>
                 <a:cs typeface="Arial"/>
               </a:rPr>
-              <a:t>REGISTER succeeded for three providers. External audio remains unverified.</a:t>
+              <a:t>Three providers registered. External media quality still needs verification.</a:t>
             </a:r>
           </a:p>
         </p:txBody>
@@ -23762,7 +23762,7 @@
     </p:spTree>
     <p:extLst>
       <p:ext uri="{BB962C8B-B14F-4D97-AF65-F5344CB8AC3E}">
-        <p14:creationId xmlns:p14="http://schemas.microsoft.com/office/powerpoint/2010/main" val="842947939"/>
+        <p14:creationId xmlns:p14="http://schemas.microsoft.com/office/powerpoint/2010/main" val="1544945871"/>
       </p:ext>
     </p:extLst>
   </p:cSld>
@@ -23790,10 +23790,10 @@
       </p:grpSpPr>
       <p:sp>
         <p:nvSpPr>
-          <p:cNvPr id="9" name="Our lot: 10 Cisco 7945G phones">
+          <p:cNvPr id="10" name="Cisco 7945G: model and inventory">
             <a:extLst xmlns:a="http://schemas.openxmlformats.org/drawingml/2006/main">
               <a:ext uri="{FF2B5EF4-FFF2-40B4-BE49-F238E27FC236}">
-                <a16:creationId xmlns:a16="http://schemas.microsoft.com/office/drawing/2014/main" id="{E7927487-16E0-4683-A1C6-B29856A52BD1}"/>
+                <a16:creationId xmlns:a16="http://schemas.microsoft.com/office/drawing/2014/main" id="{EA7F30C2-ADBC-4599-AE0B-993411115035}"/>
               </a:ext>
             </a:extLst>
           </p:cNvPr>
@@ -23941,7 +23941,7 @@
                 <a:ea typeface="Arial"/>
                 <a:cs typeface="Arial"/>
               </a:rPr>
-              <a:t>Our lot: 10 Cisco 7945G phones</a:t>
+              <a:t>Cisco 7945G: model and inventory</a:t>
             </a:r>
           </a:p>
         </p:txBody>
@@ -23951,7 +23951,7 @@
           <p:cNvPr id="2" name="02">
             <a:extLst xmlns:a="http://schemas.openxmlformats.org/drawingml/2006/main">
               <a:ext uri="{FF2B5EF4-FFF2-40B4-BE49-F238E27FC236}">
-                <a16:creationId xmlns:a16="http://schemas.microsoft.com/office/drawing/2014/main" id="{FC0648A3-9C18-4C47-B95E-1B7D035E2FA4}"/>
+                <a16:creationId xmlns:a16="http://schemas.microsoft.com/office/drawing/2014/main" id="{565E4BBB-1CD7-4B7F-93CE-3A9C84123272}"/>
               </a:ext>
             </a:extLst>
           </p:cNvPr>
@@ -24106,10 +24106,10 @@
       </p:sp>
       <p:sp>
         <p:nvSpPr>
-          <p:cNvPr id="3" name="10">
+          <p:cNvPr id="3" name="2">
             <a:extLst xmlns:a="http://schemas.openxmlformats.org/drawingml/2006/main">
               <a:ext uri="{FF2B5EF4-FFF2-40B4-BE49-F238E27FC236}">
-                <a16:creationId xmlns:a16="http://schemas.microsoft.com/office/drawing/2014/main" id="{1F4EEE4D-2403-4504-A244-198547DBAFA7}"/>
+                <a16:creationId xmlns:a16="http://schemas.microsoft.com/office/drawing/2014/main" id="{087518B4-AB4F-43CD-87A2-21D30B17C945}"/>
               </a:ext>
             </a:extLst>
           </p:cNvPr>
@@ -24257,17 +24257,17 @@
                 <a:ea typeface="Arial"/>
                 <a:cs typeface="Arial"/>
               </a:rPr>
-              <a:t>10</a:t>
+              <a:t>2</a:t>
             </a:r>
           </a:p>
         </p:txBody>
       </p:sp>
       <p:sp>
         <p:nvSpPr>
-          <p:cNvPr id="4" name="phones">
+          <p:cNvPr id="4" name="SIP lines">
             <a:extLst xmlns:a="http://schemas.openxmlformats.org/drawingml/2006/main">
               <a:ext uri="{FF2B5EF4-FFF2-40B4-BE49-F238E27FC236}">
-                <a16:creationId xmlns:a16="http://schemas.microsoft.com/office/drawing/2014/main" id="{2D6CD629-C482-4025-BC09-1BBB5954D603}"/>
+                <a16:creationId xmlns:a16="http://schemas.microsoft.com/office/drawing/2014/main" id="{B959A578-D332-415D-9B6B-C2E11175144C}"/>
               </a:ext>
             </a:extLst>
           </p:cNvPr>
@@ -24415,17 +24415,175 @@
                 <a:ea typeface="Arial"/>
                 <a:cs typeface="Arial"/>
               </a:rPr>
-              <a:t>phones</a:t>
+              <a:t>SIP lines</a:t>
             </a:r>
           </a:p>
         </p:txBody>
       </p:sp>
       <p:sp>
         <p:nvSpPr>
-          <p:cNvPr id="5" name="7945_7965 SIP firmware family">
+          <p:cNvPr id="5" name="Native 802.3af">
             <a:extLst xmlns:a="http://schemas.openxmlformats.org/drawingml/2006/main">
               <a:ext uri="{FF2B5EF4-FFF2-40B4-BE49-F238E27FC236}">
-                <a16:creationId xmlns:a16="http://schemas.microsoft.com/office/drawing/2014/main" id="{DFC131D0-7944-459A-8051-9D20444D6451}"/>
+                <a16:creationId xmlns:a16="http://schemas.microsoft.com/office/drawing/2014/main" id="{42CEB3B2-BBD5-49B6-BE2A-1CE4E6574E69}"/>
+              </a:ext>
+            </a:extLst>
+          </p:cNvPr>
+          <p:cNvSpPr>
+            <a:spLocks xmlns:a="http://schemas.openxmlformats.org/drawingml/2006/main" noGrp="1"/>
+          </p:cNvSpPr>
+          <p:nvPr/>
+        </p:nvSpPr>
+        <p:spPr>
+          <a:xfrm xmlns:a="http://schemas.openxmlformats.org/drawingml/2006/main">
+            <a:off x="666750" y="4429125"/>
+            <a:ext cx="2524125" cy="523875"/>
+          </a:xfrm>
+          <a:prstGeom xmlns:a="http://schemas.openxmlformats.org/drawingml/2006/main" prst="rect">
+            <a:avLst/>
+          </a:prstGeom>
+          <a:noFill xmlns:a="http://schemas.openxmlformats.org/drawingml/2006/main"/>
+          <a:ln xmlns:a="http://schemas.openxmlformats.org/drawingml/2006/main" w="0">
+            <a:noFill/>
+          </a:ln>
+        </p:spPr>
+        <p:txBody>
+          <a:bodyPr xmlns:a="http://schemas.openxmlformats.org/drawingml/2006/main" wrap="square" lIns="0" tIns="0" rIns="0" bIns="0" anchor="t">
+            <a:noAutofit/>
+          </a:bodyPr>
+          <a:lstStyle xmlns:a="http://schemas.openxmlformats.org/drawingml/2006/main">
+            <a:defPPr algn="l">
+              <a:defRPr sz="1875" b="0">
+                <a:solidFill>
+                  <a:srgbClr val="48DDCC"/>
+                </a:solidFill>
+                <a:latin typeface="Arial"/>
+                <a:ea typeface="Arial"/>
+                <a:cs typeface="Arial"/>
+              </a:defRPr>
+            </a:defPPr>
+            <a:lvl1pPr algn="l">
+              <a:defRPr sz="1875" b="0">
+                <a:solidFill>
+                  <a:srgbClr val="48DDCC"/>
+                </a:solidFill>
+                <a:latin typeface="Arial"/>
+                <a:ea typeface="Arial"/>
+                <a:cs typeface="Arial"/>
+              </a:defRPr>
+            </a:lvl1pPr>
+            <a:lvl2pPr algn="l">
+              <a:defRPr sz="1875" b="0">
+                <a:solidFill>
+                  <a:srgbClr val="48DDCC"/>
+                </a:solidFill>
+                <a:latin typeface="Arial"/>
+                <a:ea typeface="Arial"/>
+                <a:cs typeface="Arial"/>
+              </a:defRPr>
+            </a:lvl2pPr>
+            <a:lvl3pPr algn="l">
+              <a:defRPr sz="1875" b="0">
+                <a:solidFill>
+                  <a:srgbClr val="48DDCC"/>
+                </a:solidFill>
+                <a:latin typeface="Arial"/>
+                <a:ea typeface="Arial"/>
+                <a:cs typeface="Arial"/>
+              </a:defRPr>
+            </a:lvl3pPr>
+            <a:lvl4pPr algn="l">
+              <a:defRPr sz="1875" b="0">
+                <a:solidFill>
+                  <a:srgbClr val="48DDCC"/>
+                </a:solidFill>
+                <a:latin typeface="Arial"/>
+                <a:ea typeface="Arial"/>
+                <a:cs typeface="Arial"/>
+              </a:defRPr>
+            </a:lvl4pPr>
+            <a:lvl5pPr algn="l">
+              <a:defRPr sz="1875" b="0">
+                <a:solidFill>
+                  <a:srgbClr val="48DDCC"/>
+                </a:solidFill>
+                <a:latin typeface="Arial"/>
+                <a:ea typeface="Arial"/>
+                <a:cs typeface="Arial"/>
+              </a:defRPr>
+            </a:lvl5pPr>
+            <a:lvl6pPr algn="l">
+              <a:defRPr sz="1875" b="0">
+                <a:solidFill>
+                  <a:srgbClr val="48DDCC"/>
+                </a:solidFill>
+                <a:latin typeface="Arial"/>
+                <a:ea typeface="Arial"/>
+                <a:cs typeface="Arial"/>
+              </a:defRPr>
+            </a:lvl6pPr>
+            <a:lvl7pPr algn="l">
+              <a:defRPr sz="1875" b="0">
+                <a:solidFill>
+                  <a:srgbClr val="48DDCC"/>
+                </a:solidFill>
+                <a:latin typeface="Arial"/>
+                <a:ea typeface="Arial"/>
+                <a:cs typeface="Arial"/>
+              </a:defRPr>
+            </a:lvl7pPr>
+            <a:lvl8pPr algn="l">
+              <a:defRPr sz="1875" b="0">
+                <a:solidFill>
+                  <a:srgbClr val="48DDCC"/>
+                </a:solidFill>
+                <a:latin typeface="Arial"/>
+                <a:ea typeface="Arial"/>
+                <a:cs typeface="Arial"/>
+              </a:defRPr>
+            </a:lvl8pPr>
+            <a:lvl9pPr algn="l">
+              <a:defRPr sz="1875" b="0">
+                <a:solidFill>
+                  <a:srgbClr val="48DDCC"/>
+                </a:solidFill>
+                <a:latin typeface="Arial"/>
+                <a:ea typeface="Arial"/>
+                <a:cs typeface="Arial"/>
+              </a:defRPr>
+            </a:lvl9pPr>
+          </a:lstStyle>
+          <a:p xmlns:a="http://schemas.openxmlformats.org/drawingml/2006/main">
+            <a:pPr algn="l">
+              <a:defRPr sz="1875" b="0">
+                <a:solidFill>
+                  <a:srgbClr val="48DDCC"/>
+                </a:solidFill>
+                <a:latin typeface="Arial"/>
+                <a:ea typeface="Arial"/>
+                <a:cs typeface="Arial"/>
+              </a:defRPr>
+            </a:pPr>
+            <a:r>
+              <a:rPr sz="1875" b="0">
+                <a:solidFill>
+                  <a:srgbClr val="48DDCC"/>
+                </a:solidFill>
+                <a:latin typeface="Arial"/>
+                <a:ea typeface="Arial"/>
+                <a:cs typeface="Arial"/>
+              </a:rPr>
+              <a:t>Native 802.3af</a:t>
+            </a:r>
+          </a:p>
+        </p:txBody>
+      </p:sp>
+      <p:sp>
+        <p:nvSpPr>
+          <p:cNvPr id="6" name="7945_7965 SIP firmware family">
+            <a:extLst xmlns:a="http://schemas.openxmlformats.org/drawingml/2006/main">
+              <a:ext uri="{FF2B5EF4-FFF2-40B4-BE49-F238E27FC236}">
+                <a16:creationId xmlns:a16="http://schemas.microsoft.com/office/drawing/2014/main" id="{255DE698-683F-4948-9E97-510EA7839021}"/>
               </a:ext>
             </a:extLst>
           </p:cNvPr>
@@ -24580,10 +24738,10 @@
       </p:sp>
       <p:sp>
         <p:nvSpPr>
-          <p:cNvPr id="6" name="A phone running SCCP needs SIP firmware.&#10;This model does not need">
+          <p:cNvPr id="7" name="A phone running SCCP needs SIP firmware.&#10;This model does not need">
             <a:extLst xmlns:a="http://schemas.openxmlformats.org/drawingml/2006/main">
               <a:ext uri="{FF2B5EF4-FFF2-40B4-BE49-F238E27FC236}">
-                <a16:creationId xmlns:a16="http://schemas.microsoft.com/office/drawing/2014/main" id="{0EF79E79-C4F3-4F8E-BAFD-073249D6BF7D}"/>
+                <a16:creationId xmlns:a16="http://schemas.microsoft.com/office/drawing/2014/main" id="{54F53E53-68DF-4A7D-96D4-D4D9FC598245}"/>
               </a:ext>
             </a:extLst>
           </p:cNvPr>
@@ -24761,10 +24919,10 @@
       </p:sp>
       <p:sp>
         <p:nvSpPr>
-          <p:cNvPr id="7" name="Before starting">
+          <p:cNvPr id="8" name="Before starting">
             <a:extLst xmlns:a="http://schemas.openxmlformats.org/drawingml/2006/main">
               <a:ext uri="{FF2B5EF4-FFF2-40B4-BE49-F238E27FC236}">
-                <a16:creationId xmlns:a16="http://schemas.microsoft.com/office/drawing/2014/main" id="{6C02651A-89DB-4474-B1A2-56CD3E95B49A}"/>
+                <a16:creationId xmlns:a16="http://schemas.microsoft.com/office/drawing/2014/main" id="{FE2BBD6F-C1B7-474A-A072-03AE8AC9979C}"/>
               </a:ext>
             </a:extLst>
           </p:cNvPr>
@@ -24919,10 +25077,10 @@
       </p:sp>
       <p:sp>
         <p:nvSpPr>
-          <p:cNvPr id="8" name="Record PID, VID/HW, MAC, App Load,&#10;Boot Load, IP and TFTP for eve">
+          <p:cNvPr id="9" name="Record PID, VID/HW, MAC, App Load,&#10;Boot Load, IP and TFTP for eve">
             <a:extLst xmlns:a="http://schemas.openxmlformats.org/drawingml/2006/main">
               <a:ext uri="{FF2B5EF4-FFF2-40B4-BE49-F238E27FC236}">
-                <a16:creationId xmlns:a16="http://schemas.microsoft.com/office/drawing/2014/main" id="{0FBAC547-9AA3-4D2D-88DA-09A576041A62}"/>
+                <a16:creationId xmlns:a16="http://schemas.microsoft.com/office/drawing/2014/main" id="{9C6FDD4E-A84F-49F6-9440-F577C78B4D21}"/>
               </a:ext>
             </a:extLst>
           </p:cNvPr>
@@ -25101,7 +25259,7 @@
     </p:spTree>
     <p:extLst>
       <p:ext uri="{BB962C8B-B14F-4D97-AF65-F5344CB8AC3E}">
-        <p14:creationId xmlns:p14="http://schemas.microsoft.com/office/powerpoint/2010/main" val="978914116"/>
+        <p14:creationId xmlns:p14="http://schemas.microsoft.com/office/powerpoint/2010/main" val="2049865143"/>
       </p:ext>
     </p:extLst>
   </p:cSld>
@@ -25132,7 +25290,7 @@
           <p:cNvPr id="17" name="">
             <a:extLst xmlns:a="http://schemas.openxmlformats.org/drawingml/2006/main">
               <a:ext uri="{FF2B5EF4-FFF2-40B4-BE49-F238E27FC236}">
-                <a16:creationId xmlns:a16="http://schemas.microsoft.com/office/drawing/2014/main" id="{CE3982E9-2FE8-49B8-AED7-93424012679B}"/>
+                <a16:creationId xmlns:a16="http://schemas.microsoft.com/office/drawing/2014/main" id="{E86DB7DF-B13D-4F73-BE32-FB84E9AC6CF3}"/>
               </a:ext>
             </a:extLst>
           </p:cNvPr>
@@ -25164,7 +25322,7 @@
           <p:cNvPr id="15" name="">
             <a:extLst xmlns:a="http://schemas.openxmlformats.org/drawingml/2006/main">
               <a:ext uri="{FF2B5EF4-FFF2-40B4-BE49-F238E27FC236}">
-                <a16:creationId xmlns:a16="http://schemas.microsoft.com/office/drawing/2014/main" id="{9F4A4DEE-6822-46A7-B36F-760FF17F25A3}"/>
+                <a16:creationId xmlns:a16="http://schemas.microsoft.com/office/drawing/2014/main" id="{00CB4E05-E778-4B7A-9BE6-43D8E4414E89}"/>
               </a:ext>
             </a:extLst>
           </p:cNvPr>
@@ -25195,7 +25353,7 @@
           <p:cNvPr id="13" name="">
             <a:extLst xmlns:a="http://schemas.openxmlformats.org/drawingml/2006/main">
               <a:ext uri="{FF2B5EF4-FFF2-40B4-BE49-F238E27FC236}">
-                <a16:creationId xmlns:a16="http://schemas.microsoft.com/office/drawing/2014/main" id="{D6ED84FD-EFFC-4344-98B3-298F0BF15A58}"/>
+                <a16:creationId xmlns:a16="http://schemas.microsoft.com/office/drawing/2014/main" id="{40E763BD-0F50-436A-8C26-F3ACCC23C7B1}"/>
               </a:ext>
             </a:extLst>
           </p:cNvPr>
@@ -25226,7 +25384,7 @@
           <p:cNvPr id="11" name="">
             <a:extLst xmlns:a="http://schemas.openxmlformats.org/drawingml/2006/main">
               <a:ext uri="{FF2B5EF4-FFF2-40B4-BE49-F238E27FC236}">
-                <a16:creationId xmlns:a16="http://schemas.microsoft.com/office/drawing/2014/main" id="{32FCD77C-D8AC-4879-A753-7F26DC8DEA11}"/>
+                <a16:creationId xmlns:a16="http://schemas.microsoft.com/office/drawing/2014/main" id="{13F66212-6E94-4910-9FA9-8B3A32DFB782}"/>
               </a:ext>
             </a:extLst>
           </p:cNvPr>
@@ -25258,7 +25416,7 @@
           <p:cNvPr id="9" name="">
             <a:extLst xmlns:a="http://schemas.openxmlformats.org/drawingml/2006/main">
               <a:ext uri="{FF2B5EF4-FFF2-40B4-BE49-F238E27FC236}">
-                <a16:creationId xmlns:a16="http://schemas.microsoft.com/office/drawing/2014/main" id="{B86A86E2-8A9A-43F2-A361-4A03EAA38D26}"/>
+                <a16:creationId xmlns:a16="http://schemas.microsoft.com/office/drawing/2014/main" id="{7351127B-A954-4213-81DE-BB77D7A4B9F8}"/>
               </a:ext>
             </a:extLst>
           </p:cNvPr>
@@ -25290,7 +25448,7 @@
           <p:cNvPr id="20" name="Cisco, Asterisk and Home Assistant">
             <a:extLst xmlns:a="http://schemas.openxmlformats.org/drawingml/2006/main">
               <a:ext uri="{FF2B5EF4-FFF2-40B4-BE49-F238E27FC236}">
-                <a16:creationId xmlns:a16="http://schemas.microsoft.com/office/drawing/2014/main" id="{BE3E1350-33A2-4F83-AB6F-B466435BD57F}"/>
+                <a16:creationId xmlns:a16="http://schemas.microsoft.com/office/drawing/2014/main" id="{A7A35E63-F20A-41FF-9BA1-DB971B388669}"/>
               </a:ext>
             </a:extLst>
           </p:cNvPr>
@@ -25448,7 +25606,7 @@
           <p:cNvPr id="2" name="03">
             <a:extLst xmlns:a="http://schemas.openxmlformats.org/drawingml/2006/main">
               <a:ext uri="{FF2B5EF4-FFF2-40B4-BE49-F238E27FC236}">
-                <a16:creationId xmlns:a16="http://schemas.microsoft.com/office/drawing/2014/main" id="{7350C261-1B32-4D4B-8F9D-6074B4214F6D}"/>
+                <a16:creationId xmlns:a16="http://schemas.microsoft.com/office/drawing/2014/main" id="{682B9FA1-2276-425E-A6E7-65EF69AD8636}"/>
               </a:ext>
             </a:extLst>
           </p:cNvPr>
@@ -25606,7 +25764,7 @@
           <p:cNvPr id="3" name="phones">
             <a:extLst xmlns:a="http://schemas.openxmlformats.org/drawingml/2006/main">
               <a:ext uri="{FF2B5EF4-FFF2-40B4-BE49-F238E27FC236}">
-                <a16:creationId xmlns:a16="http://schemas.microsoft.com/office/drawing/2014/main" id="{4F85B5B7-6D2F-4D1C-B184-D3CA00E03F17}"/>
+                <a16:creationId xmlns:a16="http://schemas.microsoft.com/office/drawing/2014/main" id="{AE5DAFC7-6E32-4C3B-9978-FC2913A03536}"/>
               </a:ext>
             </a:extLst>
           </p:cNvPr>
@@ -25793,7 +25951,7 @@
           <p:cNvPr id="4" name="switch">
             <a:extLst xmlns:a="http://schemas.openxmlformats.org/drawingml/2006/main">
               <a:ext uri="{FF2B5EF4-FFF2-40B4-BE49-F238E27FC236}">
-                <a16:creationId xmlns:a16="http://schemas.microsoft.com/office/drawing/2014/main" id="{947B203D-4422-4F4D-B309-AE8D5AAE0793}"/>
+                <a16:creationId xmlns:a16="http://schemas.microsoft.com/office/drawing/2014/main" id="{97E1CB08-C1A9-4809-946D-C7463329BAE8}"/>
               </a:ext>
             </a:extLst>
           </p:cNvPr>
@@ -25980,7 +26138,7 @@
           <p:cNvPr id="5" name="ast">
             <a:extLst xmlns:a="http://schemas.openxmlformats.org/drawingml/2006/main">
               <a:ext uri="{FF2B5EF4-FFF2-40B4-BE49-F238E27FC236}">
-                <a16:creationId xmlns:a16="http://schemas.microsoft.com/office/drawing/2014/main" id="{30CB5646-00D6-46E3-9598-613B5BF9A8C7}"/>
+                <a16:creationId xmlns:a16="http://schemas.microsoft.com/office/drawing/2014/main" id="{3E2F9064-05C9-4169-BB8C-AF9BB3E0C162}"/>
               </a:ext>
             </a:extLst>
           </p:cNvPr>
@@ -26167,7 +26325,7 @@
           <p:cNvPr id="6" name="router">
             <a:extLst xmlns:a="http://schemas.openxmlformats.org/drawingml/2006/main">
               <a:ext uri="{FF2B5EF4-FFF2-40B4-BE49-F238E27FC236}">
-                <a16:creationId xmlns:a16="http://schemas.microsoft.com/office/drawing/2014/main" id="{E52BA8DD-AC3E-447E-83AF-F497E2C1F784}"/>
+                <a16:creationId xmlns:a16="http://schemas.microsoft.com/office/drawing/2014/main" id="{9B7DB5F8-289F-4732-B41E-E4DAEFB88ACB}"/>
               </a:ext>
             </a:extLst>
           </p:cNvPr>
@@ -26354,7 +26512,7 @@
           <p:cNvPr id="7" name="tftp">
             <a:extLst xmlns:a="http://schemas.openxmlformats.org/drawingml/2006/main">
               <a:ext uri="{FF2B5EF4-FFF2-40B4-BE49-F238E27FC236}">
-                <a16:creationId xmlns:a16="http://schemas.microsoft.com/office/drawing/2014/main" id="{355C3591-FB26-413B-95F2-7185895F1680}"/>
+                <a16:creationId xmlns:a16="http://schemas.microsoft.com/office/drawing/2014/main" id="{80BF09A9-EBD2-4A75-AE2D-E3580104F179}"/>
               </a:ext>
             </a:extLst>
           </p:cNvPr>
@@ -26541,7 +26699,7 @@
           <p:cNvPr id="8" name="ha">
             <a:extLst xmlns:a="http://schemas.openxmlformats.org/drawingml/2006/main">
               <a:ext uri="{FF2B5EF4-FFF2-40B4-BE49-F238E27FC236}">
-                <a16:creationId xmlns:a16="http://schemas.microsoft.com/office/drawing/2014/main" id="{3B947029-CA56-4245-874B-3DC06685C1C4}"/>
+                <a16:creationId xmlns:a16="http://schemas.microsoft.com/office/drawing/2014/main" id="{A7F2B192-4303-4EC5-8659-102619F62562}"/>
               </a:ext>
             </a:extLst>
           </p:cNvPr>
@@ -26728,7 +26886,7 @@
           <p:cNvPr id="10" name="Ethernet">
             <a:extLst xmlns:a="http://schemas.openxmlformats.org/drawingml/2006/main">
               <a:ext uri="{FF2B5EF4-FFF2-40B4-BE49-F238E27FC236}">
-                <a16:creationId xmlns:a16="http://schemas.microsoft.com/office/drawing/2014/main" id="{7D9E3536-2CD2-4B27-B149-439E959C223A}"/>
+                <a16:creationId xmlns:a16="http://schemas.microsoft.com/office/drawing/2014/main" id="{C66D65B0-C2C7-46CE-8570-0BCA75B4E338}"/>
               </a:ext>
             </a:extLst>
           </p:cNvPr>
@@ -26886,7 +27044,7 @@
           <p:cNvPr id="12" name="SIP / RTP">
             <a:extLst xmlns:a="http://schemas.openxmlformats.org/drawingml/2006/main">
               <a:ext uri="{FF2B5EF4-FFF2-40B4-BE49-F238E27FC236}">
-                <a16:creationId xmlns:a16="http://schemas.microsoft.com/office/drawing/2014/main" id="{E56B4EAF-0DFE-4BF2-8D5D-63F93088545F}"/>
+                <a16:creationId xmlns:a16="http://schemas.microsoft.com/office/drawing/2014/main" id="{F4A547C8-C861-4D77-A4FE-F802F4D01A5C}"/>
               </a:ext>
             </a:extLst>
           </p:cNvPr>
@@ -27044,7 +27202,7 @@
           <p:cNvPr id="14" name="DHCP">
             <a:extLst xmlns:a="http://schemas.openxmlformats.org/drawingml/2006/main">
               <a:ext uri="{FF2B5EF4-FFF2-40B4-BE49-F238E27FC236}">
-                <a16:creationId xmlns:a16="http://schemas.microsoft.com/office/drawing/2014/main" id="{5581DA60-A3F1-4952-B2AB-440A962E2404}"/>
+                <a16:creationId xmlns:a16="http://schemas.microsoft.com/office/drawing/2014/main" id="{FF09364D-0C91-469E-8C46-1A76DCF79064}"/>
               </a:ext>
             </a:extLst>
           </p:cNvPr>
@@ -27202,7 +27360,7 @@
           <p:cNvPr id="16" name="download">
             <a:extLst xmlns:a="http://schemas.openxmlformats.org/drawingml/2006/main">
               <a:ext uri="{FF2B5EF4-FFF2-40B4-BE49-F238E27FC236}">
-                <a16:creationId xmlns:a16="http://schemas.microsoft.com/office/drawing/2014/main" id="{78831A5C-3D51-4C94-BDE7-75BEBB4CE5AC}"/>
+                <a16:creationId xmlns:a16="http://schemas.microsoft.com/office/drawing/2014/main" id="{799002A5-DEEE-452B-9DA2-B9B69640AE0C}"/>
               </a:ext>
             </a:extLst>
           </p:cNvPr>
@@ -27360,7 +27518,7 @@
           <p:cNvPr id="18" name="AMI&#10;SIP / RTP">
             <a:extLst xmlns:a="http://schemas.openxmlformats.org/drawingml/2006/main">
               <a:ext uri="{FF2B5EF4-FFF2-40B4-BE49-F238E27FC236}">
-                <a16:creationId xmlns:a16="http://schemas.microsoft.com/office/drawing/2014/main" id="{EBA3D6E9-BF96-4257-A6B5-2399CF3ACF5F}"/>
+                <a16:creationId xmlns:a16="http://schemas.microsoft.com/office/drawing/2014/main" id="{94DAD719-22D0-49F8-9F4A-F3B818EBE3CB}"/>
               </a:ext>
             </a:extLst>
           </p:cNvPr>
@@ -27541,7 +27699,7 @@
           <p:cNvPr id="19" name="Asterisk uses hostNetwork and one replica. HA opens the AMI conne">
             <a:extLst xmlns:a="http://schemas.openxmlformats.org/drawingml/2006/main">
               <a:ext uri="{FF2B5EF4-FFF2-40B4-BE49-F238E27FC236}">
-                <a16:creationId xmlns:a16="http://schemas.microsoft.com/office/drawing/2014/main" id="{7DB7ADF8-0514-4D18-B080-F70546D86ECF}"/>
+                <a16:creationId xmlns:a16="http://schemas.microsoft.com/office/drawing/2014/main" id="{FE9D1086-E38F-4AD5-B814-E8648DC18CFB}"/>
               </a:ext>
             </a:extLst>
           </p:cNvPr>
@@ -27720,7 +27878,7 @@
     </p:spTree>
     <p:extLst>
       <p:ext uri="{BB962C8B-B14F-4D97-AF65-F5344CB8AC3E}">
-        <p14:creationId xmlns:p14="http://schemas.microsoft.com/office/powerpoint/2010/main" val="626408807"/>
+        <p14:creationId xmlns:p14="http://schemas.microsoft.com/office/powerpoint/2010/main" val="1064215380"/>
       </p:ext>
     </p:extLst>
   </p:cSld>
@@ -27751,7 +27909,7 @@
           <p:cNvPr id="16" name="Signaling and audio ports">
             <a:extLst xmlns:a="http://schemas.openxmlformats.org/drawingml/2006/main">
               <a:ext uri="{FF2B5EF4-FFF2-40B4-BE49-F238E27FC236}">
-                <a16:creationId xmlns:a16="http://schemas.microsoft.com/office/drawing/2014/main" id="{36DA5A74-F7C9-4831-986C-598D316E263B}"/>
+                <a16:creationId xmlns:a16="http://schemas.microsoft.com/office/drawing/2014/main" id="{F12C7EB6-E970-489C-A22B-CE9FF39542E6}"/>
               </a:ext>
             </a:extLst>
           </p:cNvPr>
@@ -27909,7 +28067,7 @@
           <p:cNvPr id="2" name="04">
             <a:extLst xmlns:a="http://schemas.openxmlformats.org/drawingml/2006/main">
               <a:ext uri="{FF2B5EF4-FFF2-40B4-BE49-F238E27FC236}">
-                <a16:creationId xmlns:a16="http://schemas.microsoft.com/office/drawing/2014/main" id="{31254EAB-A7A8-44D8-874F-87D692A32EE7}"/>
+                <a16:creationId xmlns:a16="http://schemas.microsoft.com/office/drawing/2014/main" id="{7F3C645E-7D2D-4E34-B5F2-86E54B85A82D}"/>
               </a:ext>
             </a:extLst>
           </p:cNvPr>
@@ -28067,7 +28225,7 @@
           <p:cNvPr id="3" name="5060">
             <a:extLst xmlns:a="http://schemas.openxmlformats.org/drawingml/2006/main">
               <a:ext uri="{FF2B5EF4-FFF2-40B4-BE49-F238E27FC236}">
-                <a16:creationId xmlns:a16="http://schemas.microsoft.com/office/drawing/2014/main" id="{7B5BCFFA-1FA1-4554-AEE2-098AB73DAA42}"/>
+                <a16:creationId xmlns:a16="http://schemas.microsoft.com/office/drawing/2014/main" id="{BE4A8CC0-E1CE-4B0F-AD0C-1E6A09711F1D}"/>
               </a:ext>
             </a:extLst>
           </p:cNvPr>
@@ -28225,7 +28383,7 @@
           <p:cNvPr id="4" name="TCP / UDP">
             <a:extLst xmlns:a="http://schemas.openxmlformats.org/drawingml/2006/main">
               <a:ext uri="{FF2B5EF4-FFF2-40B4-BE49-F238E27FC236}">
-                <a16:creationId xmlns:a16="http://schemas.microsoft.com/office/drawing/2014/main" id="{C1B70CEA-FD12-40CB-87E9-014DBA4B4140}"/>
+                <a16:creationId xmlns:a16="http://schemas.microsoft.com/office/drawing/2014/main" id="{6CD45949-9727-4966-8A88-BF69D8F37E49}"/>
               </a:ext>
             </a:extLst>
           </p:cNvPr>
@@ -28383,7 +28541,7 @@
           <p:cNvPr id="5" name="SIP: Cisco TCP, HA UDP">
             <a:extLst xmlns:a="http://schemas.openxmlformats.org/drawingml/2006/main">
               <a:ext uri="{FF2B5EF4-FFF2-40B4-BE49-F238E27FC236}">
-                <a16:creationId xmlns:a16="http://schemas.microsoft.com/office/drawing/2014/main" id="{E53B88CA-0B2B-4B40-8C1B-B79672486930}"/>
+                <a16:creationId xmlns:a16="http://schemas.microsoft.com/office/drawing/2014/main" id="{C10CEA2F-9B76-4706-AB13-297FE688CF73}"/>
               </a:ext>
             </a:extLst>
           </p:cNvPr>
@@ -28541,7 +28699,7 @@
           <p:cNvPr id="6" name="10000–10199">
             <a:extLst xmlns:a="http://schemas.openxmlformats.org/drawingml/2006/main">
               <a:ext uri="{FF2B5EF4-FFF2-40B4-BE49-F238E27FC236}">
-                <a16:creationId xmlns:a16="http://schemas.microsoft.com/office/drawing/2014/main" id="{DAE76A24-A57E-4A59-A031-7EFC64216EF7}"/>
+                <a16:creationId xmlns:a16="http://schemas.microsoft.com/office/drawing/2014/main" id="{4E0C6152-026E-4A38-8B3D-633618611CB9}"/>
               </a:ext>
             </a:extLst>
           </p:cNvPr>
@@ -28699,7 +28857,7 @@
           <p:cNvPr id="7" name="UDP on PBX">
             <a:extLst xmlns:a="http://schemas.openxmlformats.org/drawingml/2006/main">
               <a:ext uri="{FF2B5EF4-FFF2-40B4-BE49-F238E27FC236}">
-                <a16:creationId xmlns:a16="http://schemas.microsoft.com/office/drawing/2014/main" id="{757BE8FF-0FA1-48A4-A0F1-754FA758B3F3}"/>
+                <a16:creationId xmlns:a16="http://schemas.microsoft.com/office/drawing/2014/main" id="{327FD561-462D-4741-AC08-6A4EED63A815}"/>
               </a:ext>
             </a:extLst>
           </p:cNvPr>
@@ -28857,7 +29015,7 @@
           <p:cNvPr id="8" name="RTP / audio">
             <a:extLst xmlns:a="http://schemas.openxmlformats.org/drawingml/2006/main">
               <a:ext uri="{FF2B5EF4-FFF2-40B4-BE49-F238E27FC236}">
-                <a16:creationId xmlns:a16="http://schemas.microsoft.com/office/drawing/2014/main" id="{35040A92-170C-4206-A0E5-D516BEF68DC3}"/>
+                <a16:creationId xmlns:a16="http://schemas.microsoft.com/office/drawing/2014/main" id="{A72DE1A6-08C3-4380-B1A3-E2F4D8B6966F}"/>
               </a:ext>
             </a:extLst>
           </p:cNvPr>
@@ -29015,7 +29173,7 @@
           <p:cNvPr id="9" name="5038">
             <a:extLst xmlns:a="http://schemas.openxmlformats.org/drawingml/2006/main">
               <a:ext uri="{FF2B5EF4-FFF2-40B4-BE49-F238E27FC236}">
-                <a16:creationId xmlns:a16="http://schemas.microsoft.com/office/drawing/2014/main" id="{7BE7FC2E-1768-4045-89C5-83BCB17EF66F}"/>
+                <a16:creationId xmlns:a16="http://schemas.microsoft.com/office/drawing/2014/main" id="{5FDEF7B1-E64F-425A-90B1-A28A069FBAA1}"/>
               </a:ext>
             </a:extLst>
           </p:cNvPr>
@@ -29173,7 +29331,7 @@
           <p:cNvPr id="10" name="TCP on PBX">
             <a:extLst xmlns:a="http://schemas.openxmlformats.org/drawingml/2006/main">
               <a:ext uri="{FF2B5EF4-FFF2-40B4-BE49-F238E27FC236}">
-                <a16:creationId xmlns:a16="http://schemas.microsoft.com/office/drawing/2014/main" id="{5209D094-91F8-4082-AC31-F8920FC2B282}"/>
+                <a16:creationId xmlns:a16="http://schemas.microsoft.com/office/drawing/2014/main" id="{53664C19-1262-4CF0-89CE-67A053357FC8}"/>
               </a:ext>
             </a:extLst>
           </p:cNvPr>
@@ -29331,7 +29489,7 @@
           <p:cNvPr id="11" name="AMI: HA / gateway /32">
             <a:extLst xmlns:a="http://schemas.openxmlformats.org/drawingml/2006/main">
               <a:ext uri="{FF2B5EF4-FFF2-40B4-BE49-F238E27FC236}">
-                <a16:creationId xmlns:a16="http://schemas.microsoft.com/office/drawing/2014/main" id="{CEA40994-49E2-490F-AEA0-6EFD3286B5EE}"/>
+                <a16:creationId xmlns:a16="http://schemas.microsoft.com/office/drawing/2014/main" id="{81665BAD-00AF-4283-914B-174E6BB6FF36}"/>
               </a:ext>
             </a:extLst>
           </p:cNvPr>
@@ -29489,7 +29647,7 @@
           <p:cNvPr id="12" name="69 + 20000–20031">
             <a:extLst xmlns:a="http://schemas.openxmlformats.org/drawingml/2006/main">
               <a:ext uri="{FF2B5EF4-FFF2-40B4-BE49-F238E27FC236}">
-                <a16:creationId xmlns:a16="http://schemas.microsoft.com/office/drawing/2014/main" id="{D3AC3EFD-9C3D-4ED0-B93A-ED37CF2508ED}"/>
+                <a16:creationId xmlns:a16="http://schemas.microsoft.com/office/drawing/2014/main" id="{00956BAF-7761-4C90-AF51-27ED5E9F6821}"/>
               </a:ext>
             </a:extLst>
           </p:cNvPr>
@@ -29647,7 +29805,7 @@
           <p:cNvPr id="13" name="UDP on PBX">
             <a:extLst xmlns:a="http://schemas.openxmlformats.org/drawingml/2006/main">
               <a:ext uri="{FF2B5EF4-FFF2-40B4-BE49-F238E27FC236}">
-                <a16:creationId xmlns:a16="http://schemas.microsoft.com/office/drawing/2014/main" id="{EA88BE0B-076C-472E-A790-37A9E5D22145}"/>
+                <a16:creationId xmlns:a16="http://schemas.microsoft.com/office/drawing/2014/main" id="{285391E9-961C-4773-9F9B-734E71CD3BE7}"/>
               </a:ext>
             </a:extLst>
           </p:cNvPr>
@@ -29805,7 +29963,7 @@
           <p:cNvPr id="14" name="Temporary TFTP">
             <a:extLst xmlns:a="http://schemas.openxmlformats.org/drawingml/2006/main">
               <a:ext uri="{FF2B5EF4-FFF2-40B4-BE49-F238E27FC236}">
-                <a16:creationId xmlns:a16="http://schemas.microsoft.com/office/drawing/2014/main" id="{D44B2D7E-27FC-449E-AC81-C2D3056DD4AF}"/>
+                <a16:creationId xmlns:a16="http://schemas.microsoft.com/office/drawing/2014/main" id="{ACCC779C-A5A3-44D7-B288-E66A8C0E1CB9}"/>
               </a:ext>
             </a:extLst>
           </p:cNvPr>
@@ -29963,7 +30121,7 @@
           <p:cNvPr id="15" name="HA uses dynamic RTP / RTCP ports. Restrict firewall rules to the ">
             <a:extLst xmlns:a="http://schemas.openxmlformats.org/drawingml/2006/main">
               <a:ext uri="{FF2B5EF4-FFF2-40B4-BE49-F238E27FC236}">
-                <a16:creationId xmlns:a16="http://schemas.microsoft.com/office/drawing/2014/main" id="{865F9729-059C-42EF-AABF-E8D65AB74C3F}"/>
+                <a16:creationId xmlns:a16="http://schemas.microsoft.com/office/drawing/2014/main" id="{5FB3D40E-2810-4113-8FAD-87E20CD6A740}"/>
               </a:ext>
             </a:extLst>
           </p:cNvPr>
@@ -30119,7 +30277,7 @@
     </p:spTree>
     <p:extLst>
       <p:ext uri="{BB962C8B-B14F-4D97-AF65-F5344CB8AC3E}">
-        <p14:creationId xmlns:p14="http://schemas.microsoft.com/office/powerpoint/2010/main" val="2062194378"/>
+        <p14:creationId xmlns:p14="http://schemas.microsoft.com/office/powerpoint/2010/main" val="125822084"/>
       </p:ext>
     </p:extLst>
   </p:cSld>
@@ -30150,7 +30308,7 @@
           <p:cNvPr id="12" name="">
             <a:extLst xmlns:a="http://schemas.openxmlformats.org/drawingml/2006/main">
               <a:ext uri="{FF2B5EF4-FFF2-40B4-BE49-F238E27FC236}">
-                <a16:creationId xmlns:a16="http://schemas.microsoft.com/office/drawing/2014/main" id="{123C9C0D-ECFB-4D4F-A9DD-546F778B8AC0}"/>
+                <a16:creationId xmlns:a16="http://schemas.microsoft.com/office/drawing/2014/main" id="{470723C9-52E5-4D41-9FB0-302C4867D07E}"/>
               </a:ext>
             </a:extLst>
           </p:cNvPr>
@@ -30181,7 +30339,7 @@
           <p:cNvPr id="10" name="">
             <a:extLst xmlns:a="http://schemas.openxmlformats.org/drawingml/2006/main">
               <a:ext uri="{FF2B5EF4-FFF2-40B4-BE49-F238E27FC236}">
-                <a16:creationId xmlns:a16="http://schemas.microsoft.com/office/drawing/2014/main" id="{D3B8E16B-97AD-475E-BFC7-AFE38991F3DC}"/>
+                <a16:creationId xmlns:a16="http://schemas.microsoft.com/office/drawing/2014/main" id="{9B9B164F-EF6F-42CB-85A2-40814F5B09E5}"/>
               </a:ext>
             </a:extLst>
           </p:cNvPr>
@@ -30212,7 +30370,7 @@
           <p:cNvPr id="8" name="">
             <a:extLst xmlns:a="http://schemas.openxmlformats.org/drawingml/2006/main">
               <a:ext uri="{FF2B5EF4-FFF2-40B4-BE49-F238E27FC236}">
-                <a16:creationId xmlns:a16="http://schemas.microsoft.com/office/drawing/2014/main" id="{72BF1FC1-EC3F-40EA-B0FF-4D6D69E6BC83}"/>
+                <a16:creationId xmlns:a16="http://schemas.microsoft.com/office/drawing/2014/main" id="{2F4F6D93-D97B-4189-9F03-116B41E0A846}"/>
               </a:ext>
             </a:extLst>
           </p:cNvPr>
@@ -30243,7 +30401,7 @@
           <p:cNvPr id="15" name="7945G has built-in PoE support">
             <a:extLst xmlns:a="http://schemas.openxmlformats.org/drawingml/2006/main">
               <a:ext uri="{FF2B5EF4-FFF2-40B4-BE49-F238E27FC236}">
-                <a16:creationId xmlns:a16="http://schemas.microsoft.com/office/drawing/2014/main" id="{E63E84E4-DBBD-4E6C-AE94-619DE9480D95}"/>
+                <a16:creationId xmlns:a16="http://schemas.microsoft.com/office/drawing/2014/main" id="{25E92350-28A6-4A3F-B110-3D14E69AD991}"/>
               </a:ext>
             </a:extLst>
           </p:cNvPr>
@@ -30401,7 +30559,7 @@
           <p:cNvPr id="2" name="05">
             <a:extLst xmlns:a="http://schemas.openxmlformats.org/drawingml/2006/main">
               <a:ext uri="{FF2B5EF4-FFF2-40B4-BE49-F238E27FC236}">
-                <a16:creationId xmlns:a16="http://schemas.microsoft.com/office/drawing/2014/main" id="{F7EB0D69-20D1-4987-922F-C275DF5F751F}"/>
+                <a16:creationId xmlns:a16="http://schemas.microsoft.com/office/drawing/2014/main" id="{0AD09B6E-ABFC-4DBF-A247-8C309F3EEDBE}"/>
               </a:ext>
             </a:extLst>
           </p:cNvPr>
@@ -30559,7 +30717,7 @@
           <p:cNvPr id="3" name="poe">
             <a:extLst xmlns:a="http://schemas.openxmlformats.org/drawingml/2006/main">
               <a:ext uri="{FF2B5EF4-FFF2-40B4-BE49-F238E27FC236}">
-                <a16:creationId xmlns:a16="http://schemas.microsoft.com/office/drawing/2014/main" id="{1561CBD6-8354-49B0-A782-E642A38D7EDA}"/>
+                <a16:creationId xmlns:a16="http://schemas.microsoft.com/office/drawing/2014/main" id="{5DDD99C8-317F-4EB9-84E0-A08698DD248D}"/>
               </a:ext>
             </a:extLst>
           </p:cNvPr>
@@ -30746,7 +30904,7 @@
           <p:cNvPr id="4" name="phone1">
             <a:extLst xmlns:a="http://schemas.openxmlformats.org/drawingml/2006/main">
               <a:ext uri="{FF2B5EF4-FFF2-40B4-BE49-F238E27FC236}">
-                <a16:creationId xmlns:a16="http://schemas.microsoft.com/office/drawing/2014/main" id="{64985894-9E18-4A0C-91FA-910F2A1242E9}"/>
+                <a16:creationId xmlns:a16="http://schemas.microsoft.com/office/drawing/2014/main" id="{1A8EAE15-35E3-48DD-BE08-68ABFBDE0734}"/>
               </a:ext>
             </a:extLst>
           </p:cNvPr>
@@ -30933,7 +31091,7 @@
           <p:cNvPr id="5" name="lan">
             <a:extLst xmlns:a="http://schemas.openxmlformats.org/drawingml/2006/main">
               <a:ext uri="{FF2B5EF4-FFF2-40B4-BE49-F238E27FC236}">
-                <a16:creationId xmlns:a16="http://schemas.microsoft.com/office/drawing/2014/main" id="{93A3454E-EE51-4693-83F4-E26019D86E2B}"/>
+                <a16:creationId xmlns:a16="http://schemas.microsoft.com/office/drawing/2014/main" id="{161BF4AA-5B71-43AC-B552-0BFD745788B5}"/>
               </a:ext>
             </a:extLst>
           </p:cNvPr>
@@ -31120,7 +31278,7 @@
           <p:cNvPr id="6" name="injector">
             <a:extLst xmlns:a="http://schemas.openxmlformats.org/drawingml/2006/main">
               <a:ext uri="{FF2B5EF4-FFF2-40B4-BE49-F238E27FC236}">
-                <a16:creationId xmlns:a16="http://schemas.microsoft.com/office/drawing/2014/main" id="{01EE1972-9FD7-407C-9635-26D1AB3696E0}"/>
+                <a16:creationId xmlns:a16="http://schemas.microsoft.com/office/drawing/2014/main" id="{103C1527-2E6F-4BDD-900D-FD5606731BF7}"/>
               </a:ext>
             </a:extLst>
           </p:cNvPr>
@@ -31307,7 +31465,7 @@
           <p:cNvPr id="7" name="phone2">
             <a:extLst xmlns:a="http://schemas.openxmlformats.org/drawingml/2006/main">
               <a:ext uri="{FF2B5EF4-FFF2-40B4-BE49-F238E27FC236}">
-                <a16:creationId xmlns:a16="http://schemas.microsoft.com/office/drawing/2014/main" id="{3556FE2F-EF4A-4C3A-AA64-2C117239CCCC}"/>
+                <a16:creationId xmlns:a16="http://schemas.microsoft.com/office/drawing/2014/main" id="{3CC7C9F5-C085-4564-BF4A-178C3785C0DF}"/>
               </a:ext>
             </a:extLst>
           </p:cNvPr>
@@ -31494,7 +31652,7 @@
           <p:cNvPr id="9" name="data + power">
             <a:extLst xmlns:a="http://schemas.openxmlformats.org/drawingml/2006/main">
               <a:ext uri="{FF2B5EF4-FFF2-40B4-BE49-F238E27FC236}">
-                <a16:creationId xmlns:a16="http://schemas.microsoft.com/office/drawing/2014/main" id="{323846DB-A2C7-4D04-90EB-2284D1BEC20E}"/>
+                <a16:creationId xmlns:a16="http://schemas.microsoft.com/office/drawing/2014/main" id="{00BC1690-D782-42AB-BBAB-64B32D79D477}"/>
               </a:ext>
             </a:extLst>
           </p:cNvPr>
@@ -31652,7 +31810,7 @@
           <p:cNvPr id="11" name="data">
             <a:extLst xmlns:a="http://schemas.openxmlformats.org/drawingml/2006/main">
               <a:ext uri="{FF2B5EF4-FFF2-40B4-BE49-F238E27FC236}">
-                <a16:creationId xmlns:a16="http://schemas.microsoft.com/office/drawing/2014/main" id="{EFCF0623-DB06-45D8-9A3B-0390A6B0F723}"/>
+                <a16:creationId xmlns:a16="http://schemas.microsoft.com/office/drawing/2014/main" id="{59C4AD76-DA18-41B1-8834-F6E6F4A9AAAD}"/>
               </a:ext>
             </a:extLst>
           </p:cNvPr>
@@ -31810,7 +31968,7 @@
           <p:cNvPr id="13" name="PoE">
             <a:extLst xmlns:a="http://schemas.openxmlformats.org/drawingml/2006/main">
               <a:ext uri="{FF2B5EF4-FFF2-40B4-BE49-F238E27FC236}">
-                <a16:creationId xmlns:a16="http://schemas.microsoft.com/office/drawing/2014/main" id="{9B8BB2C4-A6FE-44BC-B52B-0A74599BF581}"/>
+                <a16:creationId xmlns:a16="http://schemas.microsoft.com/office/drawing/2014/main" id="{93704B26-982E-400A-AFD6-92CB597BFCBB}"/>
               </a:ext>
             </a:extLst>
           </p:cNvPr>
@@ -31968,7 +32126,7 @@
           <p:cNvPr id="14" name="A passive 24 V injector is unsuitable. The UPS also needs to powe">
             <a:extLst xmlns:a="http://schemas.openxmlformats.org/drawingml/2006/main">
               <a:ext uri="{FF2B5EF4-FFF2-40B4-BE49-F238E27FC236}">
-                <a16:creationId xmlns:a16="http://schemas.microsoft.com/office/drawing/2014/main" id="{6A3D1533-7F25-4FC3-93A5-F0C882E295D4}"/>
+                <a16:creationId xmlns:a16="http://schemas.microsoft.com/office/drawing/2014/main" id="{DA99D0A5-2E1C-499C-A38D-004D5E0CF536}"/>
               </a:ext>
             </a:extLst>
           </p:cNvPr>
@@ -32124,7 +32282,7 @@
     </p:spTree>
     <p:extLst>
       <p:ext uri="{BB962C8B-B14F-4D97-AF65-F5344CB8AC3E}">
-        <p14:creationId xmlns:p14="http://schemas.microsoft.com/office/powerpoint/2010/main" val="1986188370"/>
+        <p14:creationId xmlns:p14="http://schemas.microsoft.com/office/powerpoint/2010/main" val="413904961"/>
       </p:ext>
     </p:extLst>
   </p:cSld>
@@ -32155,7 +32313,7 @@
           <p:cNvPr id="13" name="">
             <a:extLst xmlns:a="http://schemas.openxmlformats.org/drawingml/2006/main">
               <a:ext uri="{FF2B5EF4-FFF2-40B4-BE49-F238E27FC236}">
-                <a16:creationId xmlns:a16="http://schemas.microsoft.com/office/drawing/2014/main" id="{8CB7EFBA-BEAD-4DFF-905E-E388173AA0C3}"/>
+                <a16:creationId xmlns:a16="http://schemas.microsoft.com/office/drawing/2014/main" id="{9D6E3503-FEA0-47A7-857F-9503DC7CCCCB}"/>
               </a:ext>
             </a:extLst>
           </p:cNvPr>
@@ -32186,7 +32344,7 @@
           <p:cNvPr id="12" name="">
             <a:extLst xmlns:a="http://schemas.openxmlformats.org/drawingml/2006/main">
               <a:ext uri="{FF2B5EF4-FFF2-40B4-BE49-F238E27FC236}">
-                <a16:creationId xmlns:a16="http://schemas.microsoft.com/office/drawing/2014/main" id="{4848B036-E6B4-43F8-9BA2-CFBFBE2374B1}"/>
+                <a16:creationId xmlns:a16="http://schemas.microsoft.com/office/drawing/2014/main" id="{626BF1DA-1F29-4906-819B-29BAB245E944}"/>
               </a:ext>
             </a:extLst>
           </p:cNvPr>
@@ -32217,7 +32375,7 @@
           <p:cNvPr id="11" name="">
             <a:extLst xmlns:a="http://schemas.openxmlformats.org/drawingml/2006/main">
               <a:ext uri="{FF2B5EF4-FFF2-40B4-BE49-F238E27FC236}">
-                <a16:creationId xmlns:a16="http://schemas.microsoft.com/office/drawing/2014/main" id="{28AF98C0-C452-43AE-B5AA-287547D48C5F}"/>
+                <a16:creationId xmlns:a16="http://schemas.microsoft.com/office/drawing/2014/main" id="{0F7CA408-425C-4902-B483-F38FC38FABE2}"/>
               </a:ext>
             </a:extLst>
           </p:cNvPr>
@@ -32248,7 +32406,7 @@
           <p:cNvPr id="10" name="">
             <a:extLst xmlns:a="http://schemas.openxmlformats.org/drawingml/2006/main">
               <a:ext uri="{FF2B5EF4-FFF2-40B4-BE49-F238E27FC236}">
-                <a16:creationId xmlns:a16="http://schemas.microsoft.com/office/drawing/2014/main" id="{D74320BE-3AC7-450B-A274-080CF50CF77E}"/>
+                <a16:creationId xmlns:a16="http://schemas.microsoft.com/office/drawing/2014/main" id="{1934FF84-6F55-47A9-96A9-6D76774DEC15}"/>
               </a:ext>
             </a:extLst>
           </p:cNvPr>
@@ -32279,7 +32437,7 @@
           <p:cNvPr id="9" name="">
             <a:extLst xmlns:a="http://schemas.openxmlformats.org/drawingml/2006/main">
               <a:ext uri="{FF2B5EF4-FFF2-40B4-BE49-F238E27FC236}">
-                <a16:creationId xmlns:a16="http://schemas.microsoft.com/office/drawing/2014/main" id="{A1B9A0BE-5FA5-4ED1-94C7-99EF42E7BCDA}"/>
+                <a16:creationId xmlns:a16="http://schemas.microsoft.com/office/drawing/2014/main" id="{AD602CDE-6679-4B1A-BEDB-33A3A0D68639}"/>
               </a:ext>
             </a:extLst>
           </p:cNvPr>
@@ -32310,7 +32468,7 @@
           <p:cNvPr id="15" name="One pilot phone before the full fleet">
             <a:extLst xmlns:a="http://schemas.openxmlformats.org/drawingml/2006/main">
               <a:ext uri="{FF2B5EF4-FFF2-40B4-BE49-F238E27FC236}">
-                <a16:creationId xmlns:a16="http://schemas.microsoft.com/office/drawing/2014/main" id="{D381A7D3-4468-4982-B3B2-A1E0287B7226}"/>
+                <a16:creationId xmlns:a16="http://schemas.microsoft.com/office/drawing/2014/main" id="{E4638FD7-DE33-4FA5-B8F2-EDEC83BD9F57}"/>
               </a:ext>
             </a:extLst>
           </p:cNvPr>
@@ -32468,7 +32626,7 @@
           <p:cNvPr id="2" name="06">
             <a:extLst xmlns:a="http://schemas.openxmlformats.org/drawingml/2006/main">
               <a:ext uri="{FF2B5EF4-FFF2-40B4-BE49-F238E27FC236}">
-                <a16:creationId xmlns:a16="http://schemas.microsoft.com/office/drawing/2014/main" id="{D8A479D8-7178-4245-B385-9D37465D935D}"/>
+                <a16:creationId xmlns:a16="http://schemas.microsoft.com/office/drawing/2014/main" id="{B6337A1A-4F90-480F-B75F-88F9280EE822}"/>
               </a:ext>
             </a:extLst>
           </p:cNvPr>
@@ -32626,7 +32784,7 @@
           <p:cNvPr id="3" name="inventory">
             <a:extLst xmlns:a="http://schemas.openxmlformats.org/drawingml/2006/main">
               <a:ext uri="{FF2B5EF4-FFF2-40B4-BE49-F238E27FC236}">
-                <a16:creationId xmlns:a16="http://schemas.microsoft.com/office/drawing/2014/main" id="{DCFF4C67-5C57-4E1D-80A8-7FD7810E508F}"/>
+                <a16:creationId xmlns:a16="http://schemas.microsoft.com/office/drawing/2014/main" id="{4290091A-F925-4621-BD6A-9F656A877C18}"/>
               </a:ext>
             </a:extLst>
           </p:cNvPr>
@@ -32813,7 +32971,7 @@
           <p:cNvPr id="4" name="firmware">
             <a:extLst xmlns:a="http://schemas.openxmlformats.org/drawingml/2006/main">
               <a:ext uri="{FF2B5EF4-FFF2-40B4-BE49-F238E27FC236}">
-                <a16:creationId xmlns:a16="http://schemas.microsoft.com/office/drawing/2014/main" id="{E6AA1520-2849-4183-A8F4-969924D561FB}"/>
+                <a16:creationId xmlns:a16="http://schemas.microsoft.com/office/drawing/2014/main" id="{5991694C-F123-40BB-86D2-1A1AE8F977F3}"/>
               </a:ext>
             </a:extLst>
           </p:cNvPr>
@@ -33000,7 +33158,7 @@
           <p:cNvPr id="5" name="tftp">
             <a:extLst xmlns:a="http://schemas.openxmlformats.org/drawingml/2006/main">
               <a:ext uri="{FF2B5EF4-FFF2-40B4-BE49-F238E27FC236}">
-                <a16:creationId xmlns:a16="http://schemas.microsoft.com/office/drawing/2014/main" id="{CA43B387-5D5A-4C76-BB51-7FAB3B42242A}"/>
+                <a16:creationId xmlns:a16="http://schemas.microsoft.com/office/drawing/2014/main" id="{A533AFB8-9D95-44EA-AB88-F975FA903148}"/>
               </a:ext>
             </a:extLst>
           </p:cNvPr>
@@ -33187,7 +33345,7 @@
           <p:cNvPr id="6" name="pilot">
             <a:extLst xmlns:a="http://schemas.openxmlformats.org/drawingml/2006/main">
               <a:ext uri="{FF2B5EF4-FFF2-40B4-BE49-F238E27FC236}">
-                <a16:creationId xmlns:a16="http://schemas.microsoft.com/office/drawing/2014/main" id="{4994A53E-DCDE-45EC-BF61-D561D281F2A3}"/>
+                <a16:creationId xmlns:a16="http://schemas.microsoft.com/office/drawing/2014/main" id="{EC51D0D1-93CD-4DCD-83CB-B14925A5206D}"/>
               </a:ext>
             </a:extLst>
           </p:cNvPr>
@@ -33374,7 +33532,7 @@
           <p:cNvPr id="7" name="accept">
             <a:extLst xmlns:a="http://schemas.openxmlformats.org/drawingml/2006/main">
               <a:ext uri="{FF2B5EF4-FFF2-40B4-BE49-F238E27FC236}">
-                <a16:creationId xmlns:a16="http://schemas.microsoft.com/office/drawing/2014/main" id="{8181EA64-6DB4-43A9-89BD-66B1C44A549F}"/>
+                <a16:creationId xmlns:a16="http://schemas.microsoft.com/office/drawing/2014/main" id="{ED967023-FBBE-4F2A-A61F-16529F9C7BE8}"/>
               </a:ext>
             </a:extLst>
           </p:cNvPr>
@@ -33561,7 +33719,7 @@
           <p:cNvPr id="8" name="fleet">
             <a:extLst xmlns:a="http://schemas.openxmlformats.org/drawingml/2006/main">
               <a:ext uri="{FF2B5EF4-FFF2-40B4-BE49-F238E27FC236}">
-                <a16:creationId xmlns:a16="http://schemas.microsoft.com/office/drawing/2014/main" id="{CD1F521C-7015-4895-9BB6-FB54656BAA10}"/>
+                <a16:creationId xmlns:a16="http://schemas.microsoft.com/office/drawing/2014/main" id="{4FDAF5B4-96E6-460E-8076-39D16F8905C7}"/>
               </a:ext>
             </a:extLst>
           </p:cNvPr>
@@ -33748,7 +33906,7 @@
           <p:cNvPr id="14" name="HW 13.0+ requires at least 9.3(1)SR3. The upgrade path depends on">
             <a:extLst xmlns:a="http://schemas.openxmlformats.org/drawingml/2006/main">
               <a:ext uri="{FF2B5EF4-FFF2-40B4-BE49-F238E27FC236}">
-                <a16:creationId xmlns:a16="http://schemas.microsoft.com/office/drawing/2014/main" id="{D0DFA3DE-2911-47C0-B948-B13580D0A967}"/>
+                <a16:creationId xmlns:a16="http://schemas.microsoft.com/office/drawing/2014/main" id="{C3D50131-89D8-45C5-9607-E3B09A9E402F}"/>
               </a:ext>
             </a:extLst>
           </p:cNvPr>
@@ -33927,7 +34085,7 @@
     </p:spTree>
     <p:extLst>
       <p:ext uri="{BB962C8B-B14F-4D97-AF65-F5344CB8AC3E}">
-        <p14:creationId xmlns:p14="http://schemas.microsoft.com/office/powerpoint/2010/main" val="1012363617"/>
+        <p14:creationId xmlns:p14="http://schemas.microsoft.com/office/powerpoint/2010/main" val="18881597"/>
       </p:ext>
     </p:extLst>
   </p:cSld>
@@ -33958,7 +34116,7 @@
           <p:cNvPr id="8" name="TFTP preparation before restart">
             <a:extLst xmlns:a="http://schemas.openxmlformats.org/drawingml/2006/main">
               <a:ext uri="{FF2B5EF4-FFF2-40B4-BE49-F238E27FC236}">
-                <a16:creationId xmlns:a16="http://schemas.microsoft.com/office/drawing/2014/main" id="{D121789E-9C8C-4042-BC6C-F6D1893FEEE4}"/>
+                <a16:creationId xmlns:a16="http://schemas.microsoft.com/office/drawing/2014/main" id="{B5BA7561-368D-400E-A8B5-230907F71132}"/>
               </a:ext>
             </a:extLst>
           </p:cNvPr>
@@ -34116,7 +34274,7 @@
           <p:cNvPr id="2" name="07">
             <a:extLst xmlns:a="http://schemas.openxmlformats.org/drawingml/2006/main">
               <a:ext uri="{FF2B5EF4-FFF2-40B4-BE49-F238E27FC236}">
-                <a16:creationId xmlns:a16="http://schemas.microsoft.com/office/drawing/2014/main" id="{0422F7D5-2F0F-4C4D-BBA2-F123595AA4A3}"/>
+                <a16:creationId xmlns:a16="http://schemas.microsoft.com/office/drawing/2014/main" id="{BAC5A828-03FB-450B-A2CB-3B7124D1CE2C}"/>
               </a:ext>
             </a:extLst>
           </p:cNvPr>
@@ -34274,7 +34432,7 @@
           <p:cNvPr id="3" name="Complete official firmware bundle">
             <a:extLst xmlns:a="http://schemas.openxmlformats.org/drawingml/2006/main">
               <a:ext uri="{FF2B5EF4-FFF2-40B4-BE49-F238E27FC236}">
-                <a16:creationId xmlns:a16="http://schemas.microsoft.com/office/drawing/2014/main" id="{73BCE527-9339-4709-9B5C-357571F04536}"/>
+                <a16:creationId xmlns:a16="http://schemas.microsoft.com/office/drawing/2014/main" id="{AAC40E24-F536-4E2A-BFB0-12C5F8C5434A}"/>
               </a:ext>
             </a:extLst>
           </p:cNvPr>
@@ -34432,7 +34590,7 @@
           <p:cNvPr id="4" name=".loads and every referenced binary file&#10;with the original filenam">
             <a:extLst xmlns:a="http://schemas.openxmlformats.org/drawingml/2006/main">
               <a:ext uri="{FF2B5EF4-FFF2-40B4-BE49-F238E27FC236}">
-                <a16:creationId xmlns:a16="http://schemas.microsoft.com/office/drawing/2014/main" id="{3DD0297D-0441-4EBB-BFFF-C459A5D759D3}"/>
+                <a16:creationId xmlns:a16="http://schemas.microsoft.com/office/drawing/2014/main" id="{714DEB71-9016-4CCA-874C-49C3EE3F3884}"/>
               </a:ext>
             </a:extLst>
           </p:cNvPr>
@@ -34613,7 +34771,7 @@
           <p:cNvPr id="5" name="SEP&lt;MAC&gt;.cnf.xml">
             <a:extLst xmlns:a="http://schemas.openxmlformats.org/drawingml/2006/main">
               <a:ext uri="{FF2B5EF4-FFF2-40B4-BE49-F238E27FC236}">
-                <a16:creationId xmlns:a16="http://schemas.microsoft.com/office/drawing/2014/main" id="{8A2D981F-2F1A-433F-963D-8EEC6014DC50}"/>
+                <a16:creationId xmlns:a16="http://schemas.microsoft.com/office/drawing/2014/main" id="{0DC2CFD1-28A1-45AD-A03F-CE80B0581FC9}"/>
               </a:ext>
             </a:extLst>
           </p:cNvPr>
@@ -34771,7 +34929,7 @@
           <p:cNvPr id="6" name="SIP server, extension and a unique password&#10;Load ID from the sele">
             <a:extLst xmlns:a="http://schemas.openxmlformats.org/drawingml/2006/main">
               <a:ext uri="{FF2B5EF4-FFF2-40B4-BE49-F238E27FC236}">
-                <a16:creationId xmlns:a16="http://schemas.microsoft.com/office/drawing/2014/main" id="{6F753FE9-998C-450C-A05E-50153A02BD7D}"/>
+                <a16:creationId xmlns:a16="http://schemas.microsoft.com/office/drawing/2014/main" id="{B204DC95-DAD5-4E66-BB9D-4CE68CA87DDC}"/>
               </a:ext>
             </a:extLst>
           </p:cNvPr>
@@ -34952,7 +35110,7 @@
           <p:cNvPr id="7" name="Use DHCP option 150 on the home router or Alternate TFTP on the p">
             <a:extLst xmlns:a="http://schemas.openxmlformats.org/drawingml/2006/main">
               <a:ext uri="{FF2B5EF4-FFF2-40B4-BE49-F238E27FC236}">
-                <a16:creationId xmlns:a16="http://schemas.microsoft.com/office/drawing/2014/main" id="{C8289C49-7291-4E53-87A1-6C5032EF6104}"/>
+                <a16:creationId xmlns:a16="http://schemas.microsoft.com/office/drawing/2014/main" id="{31B02B04-8DA9-4EE5-93B0-40F394865ECD}"/>
               </a:ext>
             </a:extLst>
           </p:cNvPr>
@@ -35108,7 +35266,7 @@
     </p:spTree>
     <p:extLst>
       <p:ext uri="{BB962C8B-B14F-4D97-AF65-F5344CB8AC3E}">
-        <p14:creationId xmlns:p14="http://schemas.microsoft.com/office/powerpoint/2010/main" val="2056708704"/>
+        <p14:creationId xmlns:p14="http://schemas.microsoft.com/office/powerpoint/2010/main" val="1621828081"/>
       </p:ext>
     </p:extLst>
   </p:cSld>
@@ -35139,7 +35297,7 @@
           <p:cNvPr id="8" name="Asterisk: independent SIP lines">
             <a:extLst xmlns:a="http://schemas.openxmlformats.org/drawingml/2006/main">
               <a:ext uri="{FF2B5EF4-FFF2-40B4-BE49-F238E27FC236}">
-                <a16:creationId xmlns:a16="http://schemas.microsoft.com/office/drawing/2014/main" id="{A55D4030-EE85-4A4D-9C97-9321FD56CD4A}"/>
+                <a16:creationId xmlns:a16="http://schemas.microsoft.com/office/drawing/2014/main" id="{608E5B06-B842-46BF-AFC6-873DBDF0E46A}"/>
               </a:ext>
             </a:extLst>
           </p:cNvPr>
@@ -35297,7 +35455,7 @@
           <p:cNvPr id="2" name="08">
             <a:extLst xmlns:a="http://schemas.openxmlformats.org/drawingml/2006/main">
               <a:ext uri="{FF2B5EF4-FFF2-40B4-BE49-F238E27FC236}">
-                <a16:creationId xmlns:a16="http://schemas.microsoft.com/office/drawing/2014/main" id="{BB51C624-FEEC-499E-A6C7-93607785DA9F}"/>
+                <a16:creationId xmlns:a16="http://schemas.microsoft.com/office/drawing/2014/main" id="{B5545F1B-8DC1-4F2E-8894-D4CF311063FC}"/>
               </a:ext>
             </a:extLst>
           </p:cNvPr>
@@ -35455,7 +35613,7 @@
           <p:cNvPr id="3" name="201 / 202">
             <a:extLst xmlns:a="http://schemas.openxmlformats.org/drawingml/2006/main">
               <a:ext uri="{FF2B5EF4-FFF2-40B4-BE49-F238E27FC236}">
-                <a16:creationId xmlns:a16="http://schemas.microsoft.com/office/drawing/2014/main" id="{D6609192-D19B-4BF2-B266-E5E2709AF5B1}"/>
+                <a16:creationId xmlns:a16="http://schemas.microsoft.com/office/drawing/2014/main" id="{212AE5D7-7CCD-46ED-B5CD-832B79E41103}"/>
               </a:ext>
             </a:extLst>
           </p:cNvPr>
@@ -35613,7 +35771,7 @@
           <p:cNvPr id="4" name="one phone">
             <a:extLst xmlns:a="http://schemas.openxmlformats.org/drawingml/2006/main">
               <a:ext uri="{FF2B5EF4-FFF2-40B4-BE49-F238E27FC236}">
-                <a16:creationId xmlns:a16="http://schemas.microsoft.com/office/drawing/2014/main" id="{D2149388-87DE-4035-8819-E1059B7794EF}"/>
+                <a16:creationId xmlns:a16="http://schemas.microsoft.com/office/drawing/2014/main" id="{986627FC-3FC4-4F00-869D-2FCF3C51977B}"/>
               </a:ext>
             </a:extLst>
           </p:cNvPr>
@@ -35771,7 +35929,7 @@
           <p:cNvPr id="5" name="One endpoint, auth and AOR per line&#10;A unique password for each li">
             <a:extLst xmlns:a="http://schemas.openxmlformats.org/drawingml/2006/main">
               <a:ext uri="{FF2B5EF4-FFF2-40B4-BE49-F238E27FC236}">
-                <a16:creationId xmlns:a16="http://schemas.microsoft.com/office/drawing/2014/main" id="{B7240942-777C-472A-864D-2E252CD84B26}"/>
+                <a16:creationId xmlns:a16="http://schemas.microsoft.com/office/drawing/2014/main" id="{99BACE1B-E4E5-46C5-9E54-DEACAC9FB9C1}"/>
               </a:ext>
             </a:extLst>
           </p:cNvPr>
@@ -35952,7 +36110,7 @@
           <p:cNvPr id="6" name="G.711 ulaw / alaw&#10;direct_media=no keeps RTP on Asterisk">
             <a:extLst xmlns:a="http://schemas.openxmlformats.org/drawingml/2006/main">
               <a:ext uri="{FF2B5EF4-FFF2-40B4-BE49-F238E27FC236}">
-                <a16:creationId xmlns:a16="http://schemas.microsoft.com/office/drawing/2014/main" id="{17A1816F-6485-4E83-B6A4-FFCC54C34D61}"/>
+                <a16:creationId xmlns:a16="http://schemas.microsoft.com/office/drawing/2014/main" id="{2DFAC767-DCBC-4467-8B5C-DDE70A3B25B4}"/>
               </a:ext>
             </a:extLst>
           </p:cNvPr>
@@ -36133,7 +36291,7 @@
           <p:cNvPr id="7" name="600 echo, 601 tone, 620 ring group. Extension 630 requires Assist">
             <a:extLst xmlns:a="http://schemas.openxmlformats.org/drawingml/2006/main">
               <a:ext uri="{FF2B5EF4-FFF2-40B4-BE49-F238E27FC236}">
-                <a16:creationId xmlns:a16="http://schemas.microsoft.com/office/drawing/2014/main" id="{C1F2ECFD-52B7-4668-A8BF-30B68D02044F}"/>
+                <a16:creationId xmlns:a16="http://schemas.microsoft.com/office/drawing/2014/main" id="{3C3F9DD3-C358-45D6-8AA3-B865096E47F3}"/>
               </a:ext>
             </a:extLst>
           </p:cNvPr>
@@ -36289,7 +36447,7 @@
     </p:spTree>
     <p:extLst>
       <p:ext uri="{BB962C8B-B14F-4D97-AF65-F5344CB8AC3E}">
-        <p14:creationId xmlns:p14="http://schemas.microsoft.com/office/powerpoint/2010/main" val="2084766836"/>
+        <p14:creationId xmlns:p14="http://schemas.microsoft.com/office/powerpoint/2010/main" val="415517682"/>
       </p:ext>
     </p:extLst>
   </p:cSld>
@@ -36320,7 +36478,7 @@
           <p:cNvPr id="8" name="AMI: status and call control">
             <a:extLst xmlns:a="http://schemas.openxmlformats.org/drawingml/2006/main">
               <a:ext uri="{FF2B5EF4-FFF2-40B4-BE49-F238E27FC236}">
-                <a16:creationId xmlns:a16="http://schemas.microsoft.com/office/drawing/2014/main" id="{BA971710-F646-4791-9A08-479A5F72824C}"/>
+                <a16:creationId xmlns:a16="http://schemas.microsoft.com/office/drawing/2014/main" id="{DDAA42A9-FB90-45E0-B812-C9FF85903315}"/>
               </a:ext>
             </a:extLst>
           </p:cNvPr>
@@ -36478,7 +36636,7 @@
           <p:cNvPr id="2" name="09">
             <a:extLst xmlns:a="http://schemas.openxmlformats.org/drawingml/2006/main">
               <a:ext uri="{FF2B5EF4-FFF2-40B4-BE49-F238E27FC236}">
-                <a16:creationId xmlns:a16="http://schemas.microsoft.com/office/drawing/2014/main" id="{466F114C-89BF-49B7-A46E-56A8F450787C}"/>
+                <a16:creationId xmlns:a16="http://schemas.microsoft.com/office/drawing/2014/main" id="{244C8CBB-9FC0-4028-8EDB-D8884A4A2994}"/>
               </a:ext>
             </a:extLst>
           </p:cNvPr>
@@ -36636,7 +36794,7 @@
           <p:cNvPr id="3" name="Home Assistant connects to PBX:5038">
             <a:extLst xmlns:a="http://schemas.openxmlformats.org/drawingml/2006/main">
               <a:ext uri="{FF2B5EF4-FFF2-40B4-BE49-F238E27FC236}">
-                <a16:creationId xmlns:a16="http://schemas.microsoft.com/office/drawing/2014/main" id="{5E67E888-C76C-44B2-A6BB-B82DEEB5AEFC}"/>
+                <a16:creationId xmlns:a16="http://schemas.microsoft.com/office/drawing/2014/main" id="{8B3E53F6-B9AC-4CE4-A475-0DD17ADBB503}"/>
               </a:ext>
             </a:extLst>
           </p:cNvPr>
@@ -36794,7 +36952,7 @@
           <p:cNvPr id="4" name="Status, connected line and DTMF&#10;Actual entity IDs from your HA in">
             <a:extLst xmlns:a="http://schemas.openxmlformats.org/drawingml/2006/main">
               <a:ext uri="{FF2B5EF4-FFF2-40B4-BE49-F238E27FC236}">
-                <a16:creationId xmlns:a16="http://schemas.microsoft.com/office/drawing/2014/main" id="{B466EF99-84A6-43D4-8B68-702795F8B347}"/>
+                <a16:creationId xmlns:a16="http://schemas.microsoft.com/office/drawing/2014/main" id="{D7A3C109-CE27-49CE-8160-5D30A9EA584B}"/>
               </a:ext>
             </a:extLst>
           </p:cNvPr>
@@ -36975,7 +37133,7 @@
           <p:cNvPr id="5" name="Place calls and hang up a specific channel">
             <a:extLst xmlns:a="http://schemas.openxmlformats.org/drawingml/2006/main">
               <a:ext uri="{FF2B5EF4-FFF2-40B4-BE49-F238E27FC236}">
-                <a16:creationId xmlns:a16="http://schemas.microsoft.com/office/drawing/2014/main" id="{A45D67E9-A117-4F23-BCFE-A4C8BF6A3834}"/>
+                <a16:creationId xmlns:a16="http://schemas.microsoft.com/office/drawing/2014/main" id="{608CBB0D-FB61-4B29-AF1E-5C5C9C581072}"/>
               </a:ext>
             </a:extLst>
           </p:cNvPr>
@@ -37133,7 +37291,7 @@
           <p:cNvPr id="6" name="asterisk.send_action: Originate / Hangup&#10;The DTMF example sends a">
             <a:extLst xmlns:a="http://schemas.openxmlformats.org/drawingml/2006/main">
               <a:ext uri="{FF2B5EF4-FFF2-40B4-BE49-F238E27FC236}">
-                <a16:creationId xmlns:a16="http://schemas.microsoft.com/office/drawing/2014/main" id="{D9CE9CAA-C411-4148-BA15-F94545993208}"/>
+                <a16:creationId xmlns:a16="http://schemas.microsoft.com/office/drawing/2014/main" id="{73F4417D-D030-49DE-BB15-278DBE0CCD49}"/>
               </a:ext>
             </a:extLst>
           </p:cNvPr>
@@ -37314,7 +37472,7 @@
           <p:cNvPr id="7" name="Use a separate secret and a /32 ACL. The system permission allows">
             <a:extLst xmlns:a="http://schemas.openxmlformats.org/drawingml/2006/main">
               <a:ext uri="{FF2B5EF4-FFF2-40B4-BE49-F238E27FC236}">
-                <a16:creationId xmlns:a16="http://schemas.microsoft.com/office/drawing/2014/main" id="{2E546900-950C-42E4-BD85-51449C192582}"/>
+                <a16:creationId xmlns:a16="http://schemas.microsoft.com/office/drawing/2014/main" id="{BB8A9C39-5D69-4B78-8833-AFB40839B946}"/>
               </a:ext>
             </a:extLst>
           </p:cNvPr>
@@ -37470,7 +37628,7 @@
     </p:spTree>
     <p:extLst>
       <p:ext uri="{BB962C8B-B14F-4D97-AF65-F5344CB8AC3E}">
-        <p14:creationId xmlns:p14="http://schemas.microsoft.com/office/powerpoint/2010/main" val="1676028873"/>
+        <p14:creationId xmlns:p14="http://schemas.microsoft.com/office/powerpoint/2010/main" val="582710453"/>
       </p:ext>
     </p:extLst>
   </p:cSld>

--- a/docs/slides/cisco-home-telephony.pptx
+++ b/docs/slides/cisco-home-telephony.pptx
@@ -2,30 +2,31 @@
 <file path=ppt/presentation.xml><?xml version="1.0" encoding="utf-8"?>
 <p:presentation xmlns:p="http://schemas.openxmlformats.org/presentationml/2006/main">
   <p:sldMasterIdLst>
-    <p:sldMasterId xmlns:r="http://schemas.openxmlformats.org/officeDocument/2006/relationships" id="2147483648" r:id="R6b1d9439fcfc432d"/>
+    <p:sldMasterId xmlns:r="http://schemas.openxmlformats.org/officeDocument/2006/relationships" id="2147483648" r:id="R8c324fcf10bd4ed8"/>
   </p:sldMasterIdLst>
   <p:notesMasterIdLst>
-    <p:notesMasterId xmlns:r="http://schemas.openxmlformats.org/officeDocument/2006/relationships" r:id="Re762431093b2428b"/>
+    <p:notesMasterId xmlns:r="http://schemas.openxmlformats.org/officeDocument/2006/relationships" r:id="R444cf0df1beb445f"/>
   </p:notesMasterIdLst>
   <p:sldIdLst>
-    <p:sldId xmlns:r="http://schemas.openxmlformats.org/officeDocument/2006/relationships" id="256" r:id="R738a6ac365354f8f"/>
-    <p:sldId xmlns:r="http://schemas.openxmlformats.org/officeDocument/2006/relationships" id="257" r:id="R87a285ce105240d5"/>
-    <p:sldId xmlns:r="http://schemas.openxmlformats.org/officeDocument/2006/relationships" id="258" r:id="Rb05e1d6956c24400"/>
-    <p:sldId xmlns:r="http://schemas.openxmlformats.org/officeDocument/2006/relationships" id="259" r:id="R2eb1a21fe75c43e9"/>
-    <p:sldId xmlns:r="http://schemas.openxmlformats.org/officeDocument/2006/relationships" id="260" r:id="Rc6bb8c5a300446ff"/>
-    <p:sldId xmlns:r="http://schemas.openxmlformats.org/officeDocument/2006/relationships" id="261" r:id="R6acb425a66f64d77"/>
-    <p:sldId xmlns:r="http://schemas.openxmlformats.org/officeDocument/2006/relationships" id="262" r:id="R1974764f0de244d4"/>
-    <p:sldId xmlns:r="http://schemas.openxmlformats.org/officeDocument/2006/relationships" id="263" r:id="R5144dc86c67c4646"/>
-    <p:sldId xmlns:r="http://schemas.openxmlformats.org/officeDocument/2006/relationships" id="264" r:id="R9550e6cd3a8d435e"/>
-    <p:sldId xmlns:r="http://schemas.openxmlformats.org/officeDocument/2006/relationships" id="265" r:id="R3d13d94e4d4b41d0"/>
-    <p:sldId xmlns:r="http://schemas.openxmlformats.org/officeDocument/2006/relationships" id="266" r:id="Rb83da82ba9244179"/>
-    <p:sldId xmlns:r="http://schemas.openxmlformats.org/officeDocument/2006/relationships" id="267" r:id="R3c17022989f74b47"/>
-    <p:sldId xmlns:r="http://schemas.openxmlformats.org/officeDocument/2006/relationships" id="268" r:id="Rbbe016339ad74f1a"/>
-    <p:sldId xmlns:r="http://schemas.openxmlformats.org/officeDocument/2006/relationships" id="269" r:id="Rb701a190f29249da"/>
-    <p:sldId xmlns:r="http://schemas.openxmlformats.org/officeDocument/2006/relationships" id="270" r:id="Rbfea24c8d99a45c8"/>
-    <p:sldId xmlns:r="http://schemas.openxmlformats.org/officeDocument/2006/relationships" id="271" r:id="Rdde9d8f79934451a"/>
-    <p:sldId xmlns:r="http://schemas.openxmlformats.org/officeDocument/2006/relationships" id="272" r:id="Ree2640ddacdd424a"/>
-    <p:sldId xmlns:r="http://schemas.openxmlformats.org/officeDocument/2006/relationships" id="273" r:id="R8085a85832a94cb0"/>
+    <p:sldId xmlns:r="http://schemas.openxmlformats.org/officeDocument/2006/relationships" id="256" r:id="R6940bb60118e4f8e"/>
+    <p:sldId xmlns:r="http://schemas.openxmlformats.org/officeDocument/2006/relationships" id="257" r:id="R95dc18e723374903"/>
+    <p:sldId xmlns:r="http://schemas.openxmlformats.org/officeDocument/2006/relationships" id="258" r:id="Ra31cf8cbabf44732"/>
+    <p:sldId xmlns:r="http://schemas.openxmlformats.org/officeDocument/2006/relationships" id="259" r:id="R8680956067dd4b0c"/>
+    <p:sldId xmlns:r="http://schemas.openxmlformats.org/officeDocument/2006/relationships" id="260" r:id="R8070d54cda70427b"/>
+    <p:sldId xmlns:r="http://schemas.openxmlformats.org/officeDocument/2006/relationships" id="261" r:id="R900b1c3daac44613"/>
+    <p:sldId xmlns:r="http://schemas.openxmlformats.org/officeDocument/2006/relationships" id="262" r:id="R8cdff775d05a47b8"/>
+    <p:sldId xmlns:r="http://schemas.openxmlformats.org/officeDocument/2006/relationships" id="263" r:id="R4a55eee7a7e44143"/>
+    <p:sldId xmlns:r="http://schemas.openxmlformats.org/officeDocument/2006/relationships" id="264" r:id="R1fa776a2db1f401e"/>
+    <p:sldId xmlns:r="http://schemas.openxmlformats.org/officeDocument/2006/relationships" id="265" r:id="R30638fd33e4244c8"/>
+    <p:sldId xmlns:r="http://schemas.openxmlformats.org/officeDocument/2006/relationships" id="266" r:id="R6b69584018274ba4"/>
+    <p:sldId xmlns:r="http://schemas.openxmlformats.org/officeDocument/2006/relationships" id="267" r:id="R9348e4e62b704aa5"/>
+    <p:sldId xmlns:r="http://schemas.openxmlformats.org/officeDocument/2006/relationships" id="268" r:id="R4ddd4551f2f6425e"/>
+    <p:sldId xmlns:r="http://schemas.openxmlformats.org/officeDocument/2006/relationships" id="269" r:id="R25bd3384ad7b44a4"/>
+    <p:sldId xmlns:r="http://schemas.openxmlformats.org/officeDocument/2006/relationships" id="270" r:id="Rfd3340a97a8c4599"/>
+    <p:sldId xmlns:r="http://schemas.openxmlformats.org/officeDocument/2006/relationships" id="271" r:id="Rc5abce227edf438d"/>
+    <p:sldId xmlns:r="http://schemas.openxmlformats.org/officeDocument/2006/relationships" id="272" r:id="R10951156fbe941f4"/>
+    <p:sldId xmlns:r="http://schemas.openxmlformats.org/officeDocument/2006/relationships" id="273" r:id="Rf850f92b3e6b4b54"/>
+    <p:sldId xmlns:r="http://schemas.openxmlformats.org/officeDocument/2006/relationships" id="274" r:id="R2b490160e3684e56"/>
   </p:sldIdLst>
   <p:sldSz cx="12192000" cy="6858000"/>
   <p:notesSz cx="6858000" cy="9144000"/>
@@ -544,7 +545,7 @@
           </a:p>
           <a:p xmlns:a="http://schemas.openxmlformats.org/drawingml/2006/main">
             <a:r>
-              <a:t>Cisco 7945G uses G.711. The verified HA 2026.10.2 VoIP integration requires Opus. Asterisk transcodes audio in both directions through a module built from Wazo source. Translation-path and container smoke tests verify server components. Verify a real conversation on the household phone separately. SIP to Cisco defaults to TCP 5060. SIP to HA uses UDP 5060 or the selected port. PBX RTP uses 10000–10199. HA uses dynamic RTP/RTCP UDP ports. Enable Allow calls and select the pipeline for the discovered VoIP device. SIP From preserves the extension, including calls originated from HA. Test STT, the TTS reply, hangup and a repeat call. AMI carries events and commands, not audio.</a:t>
+              <a:t>Cisco 7945G uses G.711. The installed Home Assistant VoIP integration requires Opus. Asterisk transcodes audio in both directions through a module built from Wazo source. Translation-path and container smoke tests verify server components. Verify a real conversation on the household phone separately. SIP to Cisco defaults to TCP 5060. SIP to HA uses UDP 5060 or the selected port. PBX RTP uses 10000–10199. HA uses dynamic RTP/RTCP UDP ports. Use the primary line of each phone. Enable Allow calls and select its Russian Baya pipeline for the discovered VoIP device; repeat this one-time setup for each physical phone. Generic phone controls do not complete native voice setup. SIP From preserves the extension, including calls originated from HA. Test STT, the TTS reply, hangup and a repeat call. AMI carries events and commands, not audio.</a:t>
             </a:r>
           </a:p>
         </p:txBody>
@@ -899,7 +900,7 @@
           <a:lstStyle xmlns:a="http://schemas.openxmlformats.org/drawingml/2006/main"/>
           <a:p xmlns:a="http://schemas.openxmlformats.org/drawingml/2006/main">
             <a:r>
-              <a:t>Four Cisco 7945G phones now use two separately authenticated SIP identities each: 201/202, 203/204, 205/206 and 207/208. All eight contacts registered and local Echo600/HA Hangup checks passed. LakeDawn wallpaper and SSH authentication were verified on the added handsets. See docs/adding-phones.md and docs/server-validation.md for the dated evidence and outstanding human-audible and cross-phone checks. Ring group620 calls only the primary line of each physical phone and excludes PBX DND. Each primary identity has its own native HA VoIP device and selected Russian Assist pipeline. No private network or device identifiers appear here.</a:t>
+              <a:t>Ten configured Cisco identities retain independent SIP pairs 201/202, 203/204, 205/206, 207/208, 210/211, 212/213, 214/215, 216/217, 218/219 and 220/221. A Mac SIP client uses 209 separately, for 21 local endpoints in total. Configuration and credentials are retained when devices are unplugged or moved; current registration depends on which physical devices are connected. The tenth device completed an automatic upgrade without a PoE cycle. Its actual SIP application and SIP45.9-4-2SR4-3S version, both registrations, numeric labels, saved LakeDawn wallpaper, authenticated CGI and independently pinned SSH login were verified. Earlier added devices passed the same physical checks. Temporary TFTP was removed, the selected source window closed and its timer stopped without disturbing other firewall rules. Per-line call and Assist acceptance is recorded separately. The first four handsets previously registered all eight lines and passed local Echo 600/HA Hangup checks. Ring group 620 uses only each Cisco device's primary line and skips PBX DND. Mac 209 is excluded. See docs/adding-phones.md and docs/server-validation.md for dated evidence.</a:t>
             </a:r>
           </a:p>
         </p:txBody>
@@ -969,7 +970,7 @@
           <a:lstStyle xmlns:a="http://schemas.openxmlformats.org/drawingml/2006/main"/>
           <a:p xmlns:a="http://schemas.openxmlformats.org/drawingml/2006/main">
             <a:r>
-              <a:t>The updated four-phone integration defines 116 entities. Deployment and live acceptance of the revised alert contract are pending. It removes Alarm sound and Timer sound selectors and adds Stop alert. Timers and weekday alarms keep ringing until a person answers or rejects at the phone, presses Stop alert, cancels the active timer, or disables the active alarm. They never auto-answer and play no audio after answering. HA Answer is blocked for alert channels. The gateway persists alert identities and reconciles the same channels after a gateway restart without replaying events after PBX or power loss. Normal calls retain optional auto-answer, off by default. The separate TECH7Fox Asterisk and native HA VoIP integrations remain in use. Earlier finite-tone tests do not validate the new behavior. Existing saved pilot evidence covers normal gateway calls, exact-channel Hangup, DND and displayed text/PNG content. Sources: docs/server-validation.md, docs/phone-gateway.md and https://github.com/ha-homelab/asterisk-telephony/blob/main/docs/phone-controls.md .</a:t>
+              <a:t>The ten-phone Home Assistant installation has 290 controls and 143 Recorder exclusions. Post-restart verification preserved all 6,818 pre-expansion registry identities and confirmed three additional text privacy gates. Dashboard readback passed. Current online counts depend on which phones are connected. New per-line Echo, Hangup and native Assist acceptance is tracked separately. Native Assist for primary 218 remains undiscovered because its handset was unplugged before onboarding. Each phone requires its first 630 call, Allow calls and its Russian Baya pipeline; generic control installation is not voice acceptance. The revised alert contract is deployed with integration 0.2. Physical timer alerts ended when the user answered in two checks. A scheduled weekday alarm rang on a physical handset for more than 90 seconds. The corrected HA Stop alert route passed live acceptance and ended its owned alert. The Mac echo test also passed, including human listening. The updated HA integration removes Alarm sound and Timer sound selectors and adds Stop alert. Timers and weekday alarms keep ringing until a person answers or rejects at the phone, presses Stop alert, cancels the active timer, or disables the active alarm. They never auto-answer and play no audio after answering. HA Answer is blocked for alert channels. The gateway persists alert identities and reconciles the same channels after a gateway restart without replaying events after PBX or power loss. Normal calls retain optional auto-answer, off by default. The separate TECH7Fox Asterisk and native HA VoIP integrations remain in use. Earlier finite-tone tests do not validate the new behavior. Existing saved pilot evidence covers normal gateway calls, exact-channel Hangup, DND and displayed text/PNG content. Sources: docs/server-validation.md, docs/phone-gateway.md and https://github.com/ha-homelab/asterisk-telephony/blob/main/docs/phone-controls.md .</a:t>
             </a:r>
           </a:p>
         </p:txBody>
@@ -1039,7 +1040,7 @@
           <a:lstStyle xmlns:a="http://schemas.openxmlformats.org/drawingml/2006/main"/>
           <a:p xmlns:a="http://schemas.openxmlformats.org/drawingml/2006/main">
             <a:r>
-              <a:t>The new timer/alarm contract rings until a person answers, rejects or stops the alert. It never auto-answers or plays after-answer audio. Deployment and live acceptance of that revised behavior are pending. A private Asterisk Local helper omits Dial timeout, ignores forwarding and uses WaitForSignal without an interval. The five-second AMI timeout bounds only the initial Local answer, not handset ringing. Manual 640 remains a finite tone test and the old 20-second ring API remains a legacy finite call, neither used by the new scheduler. Radio is unchanged: an opt-in FFmpeg/AudioSocket worker runs only for the active call, with a default 30-minute limit and two concurrent streams. All seven official streams decoded in the saved probe, and radio 701 reached Up with increasing bidirectional RTP counters and exact-channel cleanup. Human confirmation of radio audibility remains separate. Sources: docs/server-validation.md and docs/radio-and-alarms.md . Official stations: https://matryoshka.fm/ , https://echofm.online/ , https://streams.radiobob.de/ , https://somafm.com/poptron/directstreamlinks.html , https://www.radyoviva.com.tr/ .</a:t>
+              <a:t>The new timer/alarm contract rings until a person answers, rejects or stops the alert. It never auto-answers or plays after-answer audio. The revised behavior is deployed. Manual physical timer dismissal and the corrected HA Stop alert route passed live checks. A scheduled weekday alarm rang on a physical phone beyond 90 seconds. Two timer checks ended by manual answer, with no gateway auto-answer operation. A private Asterisk Local helper omits Dial timeout, ignores forwarding and uses WaitForSignal without an interval. The five-second AMI timeout bounds only the initial Local answer, not handset ringing. Manual 640 remains a finite tone test and the old 20-second ring API remains a legacy finite call, neither used by the new scheduler. Radio is unchanged: an opt-in FFmpeg/AudioSocket worker runs only for the active call, with a default 30-minute limit and two concurrent streams. All seven official streams decoded in the saved probe, and radio 701 reached Up with increasing bidirectional RTP counters and exact-channel cleanup. The three new Deti FM channels 708–710 also decoded through the installed worker, and a listener confirmed music on 708. This does not establish audible playback for every station. Sources: docs/server-validation.md and docs/radio-and-alarms.md . Official stations: https://matryoshka.fm/ , https://echofm.online/ , https://streams.radiobob.de/ , https://somafm.com/poptron/directstreamlinks.html , https://www.radyoviva.com.tr/ .</a:t>
             </a:r>
           </a:p>
         </p:txBody>
@@ -1109,7 +1110,77 @@
           <a:lstStyle xmlns:a="http://schemas.openxmlformats.org/drawingml/2006/main"/>
           <a:p xmlns:a="http://schemas.openxmlformats.org/drawingml/2006/main">
             <a:r>
-              <a:t>Status snapshot: October 17, 2026. SIP2SIP, Callcentric and Linphone all reached Registered in the live Asterisk instance. Callcentric IP Freedom has a $0 plan and $0 balance, but outbound calls require provider risk review. Callcentric and Linphone remain registration-only with no active 801/803 route, and Linphone needs a verified free peer. The bounded SIP2SIP 802 call to its fixed 4444 echo destination answered and exchanged RTP in both directions. Local receive-loss counts increased from 42 to 91 between samples, reporting 49 additional missing packets. These samples do not establish an exact overall loss percentage or cause. Reported RTT was about 155 ms. All eight local lines remained available and owned channels were cleaned up. Human listening and satisfactory external audio quality are not claimed. Free accounts do not imply free PSTN. FWD stopped at its mandatory Verification Fee checkout. Google Voice supplies no official free generic Asterisk SIP trunk. Sources: https://sip2sip.info/help/ ; https://www.callcentric.com/rate/plans/ip_freedom/ ; https://www.callcentric.com/support/device/asterisk/17_pjsip ; https://www.linphone.org/en/faq/ ; https://www.fwdialup.com/mission ; https://knowledge.workspace.google.com/admin/voice/sip-link-requirements ; docs/server-validation.md and docs/external-sip.md .</a:t>
+              <a:t>Status snapshot: October 17, 2026. SIP2SIP, Callcentric and the Linphone SIP provider account all reached Registered in the live Asterisk instance. That external Linphone account is separate from the Mac client on extension 209. Callcentric IP Freedom has a $0 plan and $0 balance, but outbound calls require provider risk review. Callcentric and Linphone remain registration-only with no active 801/803 route, and Linphone needs a verified free peer. The bounded SIP2SIP 802 call to its fixed 4444 echo destination answered and exchanged RTP in both directions. Local receive-loss counts increased from 42 to 91 between samples, reporting 49 additional missing packets. These samples do not establish an exact overall loss percentage or cause. Reported RTT was about 155 ms. All eight local lines remained available and owned channels were cleaned up. Human listening and satisfactory external audio quality are not claimed. Free accounts do not imply free PSTN. FWD stopped at its mandatory Verification Fee checkout. Google Voice supplies no official free generic Asterisk SIP trunk. Sources: https://sip2sip.info/help/ ; https://www.callcentric.com/rate/plans/ip_freedom/ ; https://www.callcentric.com/support/device/asterisk/17_pjsip ; https://www.linphone.org/en/faq/ ; https://www.fwdialup.com/mission ; https://knowledge.workspace.google.com/admin/voice/sip-link-requirements ; docs/server-validation.md and docs/external-sip.md .</a:t>
+            </a:r>
+          </a:p>
+        </p:txBody>
+      </p:sp>
+      <p:sp>
+        <p:nvSpPr>
+          <p:cNvPr id="4" name="Slide Number Placeholder 3"/>
+          <p:cNvSpPr>
+            <a:spLocks xmlns:a="http://schemas.openxmlformats.org/drawingml/2006/main" noGrp="1"/>
+          </p:cNvSpPr>
+          <p:nvPr>
+            <p:ph type="sldNum" idx="5"/>
+          </p:nvPr>
+        </p:nvSpPr>
+        <p:spPr/>
+        <p:txBody>
+          <a:bodyPr xmlns:a="http://schemas.openxmlformats.org/drawingml/2006/main"/>
+          <a:lstStyle xmlns:a="http://schemas.openxmlformats.org/drawingml/2006/main"/>
+          <a:p xmlns:a="http://schemas.openxmlformats.org/drawingml/2006/main"/>
+        </p:txBody>
+      </p:sp>
+    </p:spTree>
+  </p:cSld>
+  <p:clrMapOvr>
+    <a:masterClrMapping xmlns:a="http://schemas.openxmlformats.org/drawingml/2006/main"/>
+  </p:clrMapOvr>
+</p:notes>
+</file>
+
+<file path=ppt/notesSlides/notesSlide19.xml><?xml version="1.0" encoding="utf-8"?>
+<p:notes xmlns:p="http://schemas.openxmlformats.org/presentationml/2006/main">
+  <p:cSld>
+    <p:spTree>
+      <p:nvGrpSpPr>
+        <p:cNvPr id="1" name=""/>
+        <p:cNvGrpSpPr/>
+        <p:nvPr/>
+      </p:nvGrpSpPr>
+      <p:grpSpPr>
+        <a:xfrm xmlns:a="http://schemas.openxmlformats.org/drawingml/2006/main"/>
+      </p:grpSpPr>
+      <p:sp>
+        <p:nvSpPr>
+          <p:cNvPr id="2" name="Slide Image Placeholder 1"/>
+          <p:cNvSpPr>
+            <a:spLocks xmlns:a="http://schemas.openxmlformats.org/drawingml/2006/main" noGrp="1"/>
+          </p:cNvSpPr>
+          <p:nvPr>
+            <p:ph type="sldImg" idx="0"/>
+          </p:nvPr>
+        </p:nvSpPr>
+        <p:spPr/>
+      </p:sp>
+      <p:sp>
+        <p:nvSpPr>
+          <p:cNvPr id="3" name="Notes Placeholder 2"/>
+          <p:cNvSpPr>
+            <a:spLocks xmlns:a="http://schemas.openxmlformats.org/drawingml/2006/main" noGrp="1"/>
+          </p:cNvSpPr>
+          <p:nvPr>
+            <p:ph type="body" idx="1"/>
+          </p:nvPr>
+        </p:nvSpPr>
+        <p:spPr/>
+        <p:txBody>
+          <a:bodyPr xmlns:a="http://schemas.openxmlformats.org/drawingml/2006/main"/>
+          <a:lstStyle xmlns:a="http://schemas.openxmlformats.org/drawingml/2006/main"/>
+          <a:p xmlns:a="http://schemas.openxmlformats.org/drawingml/2006/main">
+            <a:r>
+              <a:t>Extension 209 has a dedicated TCP/IPv4 account on the home PBX. Telephone registered, but numeric dialing stalled inside macOS Contacts authorization before any SIP call. Contacts access was not granted. The verified, notarized Linphone 6.2.3 app then registered over TCP using its documented local XML provisioning. A bounded 20-second 209-to-600 call reached Up/Echo with PCMU, increasing RTP in both directions and zero reported loss in the sampled counters. The owned call ended with zero channels. The user confirmed hearing the echo. A later PBX rollout briefly refused the connection; Linphone recovered through its normal registration retry without changing credentials. Later calls from 209 to 210 and 213 reached Ringing. Allow registration to recover after a restart before retrying. These ringing observations are not additional answered-media tests. The optional site.softphones entry has its own preserved secret and an exact source IPv4 ACL. It creates no Cisco XML, does not join ring group 620 and is not a Cisco gateway device. The three new radio definitions are official Deti FM channels: 708 toddler music (channel 327), 709 lullabies (channel 95), and 710 children’s songs (channel 93). All three passed bounded five-second stream decoding in the PBX namespace without calls. All three routes are deployed and produced PCM through the installed worker. A listener confirmed music on 708. With the handset down and speaker/headset off, type the full station number then press Dial, without first pressing a line key. This documented on-hook method can avoid a Cisco profile refresh or reboot; verify it on the installed firmware. No continuous download is required. Sources: https://www.linphone.org/en/docs/login-sip-account/ ; https://download.linphone.org/releases/macosx/app/ ; https://github.com/64characters/Telephone/blob/1.6/Telephone/ActiveAccountViewController.m ; https://detifm.ru/channel/327 ; https://detifm.ru/channel/95 ; https://detifm.ru/channel/93 ; docs/macos-softphone.md and docs/radio-and-alarms.md .</a:t>
             </a:r>
           </a:p>
         </p:txBody>
@@ -1791,7 +1862,7 @@
           <p:cNvPr id="3" name="Title">
             <a:extLst xmlns:a="http://schemas.openxmlformats.org/drawingml/2006/main">
               <a:ext uri="{FF2B5EF4-FFF2-40B4-BE49-F238E27FC236}">
-                <a16:creationId xmlns:a16="http://schemas.microsoft.com/office/drawing/2014/main" id="{8A4AE083-E773-4FCA-9A3F-15379D621CE2}"/>
+                <a16:creationId xmlns:a16="http://schemas.microsoft.com/office/drawing/2014/main" id="{81C21CCA-EDD2-4E4F-84F4-C1A346832F07}"/>
               </a:ext>
             </a:extLst>
           </p:cNvPr>
@@ -2020,7 +2091,7 @@
           <p:cNvPr id="2" name="Subtitle">
             <a:extLst xmlns:a="http://schemas.openxmlformats.org/drawingml/2006/main">
               <a:ext uri="{FF2B5EF4-FFF2-40B4-BE49-F238E27FC236}">
-                <a16:creationId xmlns:a16="http://schemas.microsoft.com/office/drawing/2014/main" id="{CF51AB31-9FC6-4775-87A1-DE09FE35EFAE}"/>
+                <a16:creationId xmlns:a16="http://schemas.microsoft.com/office/drawing/2014/main" id="{5AD15BE1-0700-4CA4-B398-EF08F9E64C57}"/>
               </a:ext>
             </a:extLst>
           </p:cNvPr>
@@ -2266,7 +2337,7 @@
           <p:cNvPr id="2" name="Section title">
             <a:extLst xmlns:a="http://schemas.openxmlformats.org/drawingml/2006/main">
               <a:ext uri="{FF2B5EF4-FFF2-40B4-BE49-F238E27FC236}">
-                <a16:creationId xmlns:a16="http://schemas.microsoft.com/office/drawing/2014/main" id="{C7FC7E64-167B-4C39-8671-F216B5DB5F20}"/>
+                <a16:creationId xmlns:a16="http://schemas.microsoft.com/office/drawing/2014/main" id="{C9EFEFE7-F76B-431D-BAF9-E0D8AC7D91A5}"/>
               </a:ext>
             </a:extLst>
           </p:cNvPr>
@@ -2512,7 +2583,7 @@
           <p:cNvPr id="3" name="Title">
             <a:extLst xmlns:a="http://schemas.openxmlformats.org/drawingml/2006/main">
               <a:ext uri="{FF2B5EF4-FFF2-40B4-BE49-F238E27FC236}">
-                <a16:creationId xmlns:a16="http://schemas.microsoft.com/office/drawing/2014/main" id="{87B066BE-A106-4BE0-BECA-D9927784AD6F}"/>
+                <a16:creationId xmlns:a16="http://schemas.microsoft.com/office/drawing/2014/main" id="{044E0FCD-764A-4C86-A1B8-39487E2D165F}"/>
               </a:ext>
             </a:extLst>
           </p:cNvPr>
@@ -2741,7 +2812,7 @@
           <p:cNvPr id="2" name="Body">
             <a:extLst xmlns:a="http://schemas.openxmlformats.org/drawingml/2006/main">
               <a:ext uri="{FF2B5EF4-FFF2-40B4-BE49-F238E27FC236}">
-                <a16:creationId xmlns:a16="http://schemas.microsoft.com/office/drawing/2014/main" id="{D594AE61-EE91-4925-BC7F-249734BA9D39}"/>
+                <a16:creationId xmlns:a16="http://schemas.microsoft.com/office/drawing/2014/main" id="{F43E20B6-B4AC-4325-A403-C717C1B88907}"/>
               </a:ext>
             </a:extLst>
           </p:cNvPr>
@@ -2987,7 +3058,7 @@
           <p:cNvPr id="4" name="Title">
             <a:extLst xmlns:a="http://schemas.openxmlformats.org/drawingml/2006/main">
               <a:ext uri="{FF2B5EF4-FFF2-40B4-BE49-F238E27FC236}">
-                <a16:creationId xmlns:a16="http://schemas.microsoft.com/office/drawing/2014/main" id="{B33D108E-1E13-49AA-82CC-2BE6928CBA43}"/>
+                <a16:creationId xmlns:a16="http://schemas.microsoft.com/office/drawing/2014/main" id="{F723B87C-88ED-41FA-B34D-B78468EA2557}"/>
               </a:ext>
             </a:extLst>
           </p:cNvPr>
@@ -3216,7 +3287,7 @@
           <p:cNvPr id="2" name="Left column">
             <a:extLst xmlns:a="http://schemas.openxmlformats.org/drawingml/2006/main">
               <a:ext uri="{FF2B5EF4-FFF2-40B4-BE49-F238E27FC236}">
-                <a16:creationId xmlns:a16="http://schemas.microsoft.com/office/drawing/2014/main" id="{C68AC5DE-15F9-4A6D-B145-C2E0C7968C55}"/>
+                <a16:creationId xmlns:a16="http://schemas.microsoft.com/office/drawing/2014/main" id="{111E49A8-275A-4032-8C96-824C28C5015F}"/>
               </a:ext>
             </a:extLst>
           </p:cNvPr>
@@ -3445,7 +3516,7 @@
           <p:cNvPr id="3" name="Right column">
             <a:extLst xmlns:a="http://schemas.openxmlformats.org/drawingml/2006/main">
               <a:ext uri="{FF2B5EF4-FFF2-40B4-BE49-F238E27FC236}">
-                <a16:creationId xmlns:a16="http://schemas.microsoft.com/office/drawing/2014/main" id="{AB9D3ADF-90C9-4962-93CB-C5E2688EE844}"/>
+                <a16:creationId xmlns:a16="http://schemas.microsoft.com/office/drawing/2014/main" id="{19104270-D40C-4456-A9C0-EF6D4FC1D6AE}"/>
               </a:ext>
             </a:extLst>
           </p:cNvPr>
@@ -3691,7 +3762,7 @@
           <p:cNvPr id="3" name="Title">
             <a:extLst xmlns:a="http://schemas.openxmlformats.org/drawingml/2006/main">
               <a:ext uri="{FF2B5EF4-FFF2-40B4-BE49-F238E27FC236}">
-                <a16:creationId xmlns:a16="http://schemas.microsoft.com/office/drawing/2014/main" id="{D021B72D-7A9D-42FC-973F-E7EAD54C04FE}"/>
+                <a16:creationId xmlns:a16="http://schemas.microsoft.com/office/drawing/2014/main" id="{4D8E9234-7903-427E-A721-2E8BE9050D81}"/>
               </a:ext>
             </a:extLst>
           </p:cNvPr>
@@ -3920,7 +3991,7 @@
           <p:cNvPr id="2" name="Left column">
             <a:extLst xmlns:a="http://schemas.openxmlformats.org/drawingml/2006/main">
               <a:ext uri="{FF2B5EF4-FFF2-40B4-BE49-F238E27FC236}">
-                <a16:creationId xmlns:a16="http://schemas.microsoft.com/office/drawing/2014/main" id="{D501A880-2006-4E84-9E45-6CD1C4F51D63}"/>
+                <a16:creationId xmlns:a16="http://schemas.microsoft.com/office/drawing/2014/main" id="{64FC12A3-A141-485C-A7DD-34B4084F22ED}"/>
               </a:ext>
             </a:extLst>
           </p:cNvPr>
@@ -4187,12 +4258,12 @@
   </p:cSld>
   <p:clrMap bg1="lt1" tx1="dk1" bg2="lt2" tx2="dk2" accent1="accent1" accent2="accent2" accent3="accent3" accent4="accent4" accent5="accent5" accent6="accent6" hlink="hlink" folHlink="folHlink"/>
   <p:sldLayoutIdLst>
-    <p:sldLayoutId xmlns:r="http://schemas.openxmlformats.org/officeDocument/2006/relationships" id="2147483649" r:id="R01bbb42a282b444a"/>
-    <p:sldLayoutId xmlns:r="http://schemas.openxmlformats.org/officeDocument/2006/relationships" id="2147483650" r:id="R17a9f149abda441d"/>
-    <p:sldLayoutId xmlns:r="http://schemas.openxmlformats.org/officeDocument/2006/relationships" id="2147483651" r:id="R7d05ba6bdf5e4253"/>
-    <p:sldLayoutId xmlns:r="http://schemas.openxmlformats.org/officeDocument/2006/relationships" id="2147483652" r:id="Rb4aa8b3c4d4e4f96"/>
-    <p:sldLayoutId xmlns:r="http://schemas.openxmlformats.org/officeDocument/2006/relationships" id="2147483653" r:id="R6b971fc6e0464367"/>
-    <p:sldLayoutId xmlns:r="http://schemas.openxmlformats.org/officeDocument/2006/relationships" id="2147483654" r:id="R7d2b9a81dbef4196"/>
+    <p:sldLayoutId xmlns:r="http://schemas.openxmlformats.org/officeDocument/2006/relationships" id="2147483649" r:id="Rb195eb865b184a55"/>
+    <p:sldLayoutId xmlns:r="http://schemas.openxmlformats.org/officeDocument/2006/relationships" id="2147483650" r:id="Rde171a2522634bbd"/>
+    <p:sldLayoutId xmlns:r="http://schemas.openxmlformats.org/officeDocument/2006/relationships" id="2147483651" r:id="Rf3944d2dc74247ec"/>
+    <p:sldLayoutId xmlns:r="http://schemas.openxmlformats.org/officeDocument/2006/relationships" id="2147483652" r:id="Rb4679f3a993244af"/>
+    <p:sldLayoutId xmlns:r="http://schemas.openxmlformats.org/officeDocument/2006/relationships" id="2147483653" r:id="R0af6b452b9414a1f"/>
+    <p:sldLayoutId xmlns:r="http://schemas.openxmlformats.org/officeDocument/2006/relationships" id="2147483654" r:id="R44a1a2ecb7fb4ac9"/>
   </p:sldLayoutIdLst>
   <p:txStyles>
     <p:titleStyle>
@@ -4743,7 +4814,7 @@
           <p:cNvPr id="7" name="">
             <a:extLst xmlns:a="http://schemas.openxmlformats.org/drawingml/2006/main">
               <a:ext uri="{FF2B5EF4-FFF2-40B4-BE49-F238E27FC236}">
-                <a16:creationId xmlns:a16="http://schemas.microsoft.com/office/drawing/2014/main" id="{1AADA708-8FE7-423D-A0C5-594AC3A2771B}"/>
+                <a16:creationId xmlns:a16="http://schemas.microsoft.com/office/drawing/2014/main" id="{D81C0469-AD99-457D-9EE0-EB7C7077C2CF}"/>
               </a:ext>
             </a:extLst>
           </p:cNvPr>
@@ -4883,7 +4954,7 @@
           <p:cNvPr id="2" name="01">
             <a:extLst xmlns:a="http://schemas.openxmlformats.org/drawingml/2006/main">
               <a:ext uri="{FF2B5EF4-FFF2-40B4-BE49-F238E27FC236}">
-                <a16:creationId xmlns:a16="http://schemas.microsoft.com/office/drawing/2014/main" id="{C23F6607-E4A4-415C-85E2-59377A50D274}"/>
+                <a16:creationId xmlns:a16="http://schemas.microsoft.com/office/drawing/2014/main" id="{24242900-1137-4043-9D29-34124124A5F3}"/>
               </a:ext>
             </a:extLst>
           </p:cNvPr>
@@ -5041,7 +5112,7 @@
           <p:cNvPr id="3" name="Cisco 7945G">
             <a:extLst xmlns:a="http://schemas.openxmlformats.org/drawingml/2006/main">
               <a:ext uri="{FF2B5EF4-FFF2-40B4-BE49-F238E27FC236}">
-                <a16:creationId xmlns:a16="http://schemas.microsoft.com/office/drawing/2014/main" id="{87F4F466-2743-4D70-88ED-BF900E44AD64}"/>
+                <a16:creationId xmlns:a16="http://schemas.microsoft.com/office/drawing/2014/main" id="{034F0DE2-0C41-47C3-9C10-095D39666884}"/>
               </a:ext>
             </a:extLst>
           </p:cNvPr>
@@ -5199,7 +5270,7 @@
           <p:cNvPr id="4" name="Home telephony">
             <a:extLst xmlns:a="http://schemas.openxmlformats.org/drawingml/2006/main">
               <a:ext uri="{FF2B5EF4-FFF2-40B4-BE49-F238E27FC236}">
-                <a16:creationId xmlns:a16="http://schemas.microsoft.com/office/drawing/2014/main" id="{6C280C33-2E90-4A0A-8B4B-D0DBBC04FCDF}"/>
+                <a16:creationId xmlns:a16="http://schemas.microsoft.com/office/drawing/2014/main" id="{80EBAE96-649A-41FA-9E3A-CA18A7C48A99}"/>
               </a:ext>
             </a:extLst>
           </p:cNvPr>
@@ -5357,7 +5428,7 @@
           <p:cNvPr id="5" name="Asterisk in k3s + Home Assistant">
             <a:extLst xmlns:a="http://schemas.openxmlformats.org/drawingml/2006/main">
               <a:ext uri="{FF2B5EF4-FFF2-40B4-BE49-F238E27FC236}">
-                <a16:creationId xmlns:a16="http://schemas.microsoft.com/office/drawing/2014/main" id="{2F777557-8AB4-4258-A014-2239C4AD23A7}"/>
+                <a16:creationId xmlns:a16="http://schemas.microsoft.com/office/drawing/2014/main" id="{15C96055-C072-4C28-B55B-F630CE3750EC}"/>
               </a:ext>
             </a:extLst>
           </p:cNvPr>
@@ -5515,7 +5586,7 @@
           <p:cNvPr id="6" name="Two SIP lines, color display and native PoE">
             <a:extLst xmlns:a="http://schemas.openxmlformats.org/drawingml/2006/main">
               <a:ext uri="{FF2B5EF4-FFF2-40B4-BE49-F238E27FC236}">
-                <a16:creationId xmlns:a16="http://schemas.microsoft.com/office/drawing/2014/main" id="{DF60E4C8-349D-4CAE-BE1D-3367BA7EB5E8}"/>
+                <a16:creationId xmlns:a16="http://schemas.microsoft.com/office/drawing/2014/main" id="{7244592F-CE5E-4882-9C01-BA45B25E7233}"/>
               </a:ext>
             </a:extLst>
           </p:cNvPr>
@@ -5671,7 +5742,7 @@
     </p:spTree>
     <p:extLst>
       <p:ext uri="{BB962C8B-B14F-4D97-AF65-F5344CB8AC3E}">
-        <p14:creationId xmlns:p14="http://schemas.microsoft.com/office/powerpoint/2010/main" val="1876094407"/>
+        <p14:creationId xmlns:p14="http://schemas.microsoft.com/office/powerpoint/2010/main" val="2011763152"/>
       </p:ext>
     </p:extLst>
   </p:cSld>
@@ -5702,7 +5773,7 @@
           <p:cNvPr id="8" name="">
             <a:extLst xmlns:a="http://schemas.openxmlformats.org/drawingml/2006/main">
               <a:ext uri="{FF2B5EF4-FFF2-40B4-BE49-F238E27FC236}">
-                <a16:creationId xmlns:a16="http://schemas.microsoft.com/office/drawing/2014/main" id="{71F3638D-5753-42B3-8776-ED988551E847}"/>
+                <a16:creationId xmlns:a16="http://schemas.microsoft.com/office/drawing/2014/main" id="{C9E72EFB-5E29-40BF-A384-1FAFF304F0B4}"/>
               </a:ext>
             </a:extLst>
           </p:cNvPr>
@@ -5734,7 +5805,7 @@
           <p:cNvPr id="6" name="">
             <a:extLst xmlns:a="http://schemas.openxmlformats.org/drawingml/2006/main">
               <a:ext uri="{FF2B5EF4-FFF2-40B4-BE49-F238E27FC236}">
-                <a16:creationId xmlns:a16="http://schemas.microsoft.com/office/drawing/2014/main" id="{87AD7674-32BD-49C4-9460-A4B70BA207B5}"/>
+                <a16:creationId xmlns:a16="http://schemas.microsoft.com/office/drawing/2014/main" id="{14F90424-FDBA-44EF-9D13-EE99D8011691}"/>
               </a:ext>
             </a:extLst>
           </p:cNvPr>
@@ -5766,7 +5837,7 @@
           <p:cNvPr id="12" name="630: voice assistant on the phone">
             <a:extLst xmlns:a="http://schemas.openxmlformats.org/drawingml/2006/main">
               <a:ext uri="{FF2B5EF4-FFF2-40B4-BE49-F238E27FC236}">
-                <a16:creationId xmlns:a16="http://schemas.microsoft.com/office/drawing/2014/main" id="{5FE4BFFD-0EF3-42D9-A183-8DBD38FF9272}"/>
+                <a16:creationId xmlns:a16="http://schemas.microsoft.com/office/drawing/2014/main" id="{02EFB659-E397-49E0-9B0E-FB452F6B8819}"/>
               </a:ext>
             </a:extLst>
           </p:cNvPr>
@@ -5924,7 +5995,7 @@
           <p:cNvPr id="2" name="10">
             <a:extLst xmlns:a="http://schemas.openxmlformats.org/drawingml/2006/main">
               <a:ext uri="{FF2B5EF4-FFF2-40B4-BE49-F238E27FC236}">
-                <a16:creationId xmlns:a16="http://schemas.microsoft.com/office/drawing/2014/main" id="{9740FD00-D03A-45E3-8CA8-053867DF616E}"/>
+                <a16:creationId xmlns:a16="http://schemas.microsoft.com/office/drawing/2014/main" id="{BE078BB7-A169-424C-8D43-F0CA4D121C72}"/>
               </a:ext>
             </a:extLst>
           </p:cNvPr>
@@ -6082,7 +6153,7 @@
           <p:cNvPr id="3" name="cisco">
             <a:extLst xmlns:a="http://schemas.openxmlformats.org/drawingml/2006/main">
               <a:ext uri="{FF2B5EF4-FFF2-40B4-BE49-F238E27FC236}">
-                <a16:creationId xmlns:a16="http://schemas.microsoft.com/office/drawing/2014/main" id="{4EB28B63-AC93-483B-824F-43D7C661192E}"/>
+                <a16:creationId xmlns:a16="http://schemas.microsoft.com/office/drawing/2014/main" id="{42F917B8-1D04-4EAF-95B6-6295C993547B}"/>
               </a:ext>
             </a:extLst>
           </p:cNvPr>
@@ -6292,7 +6363,7 @@
           <p:cNvPr id="4" name="codec">
             <a:extLst xmlns:a="http://schemas.openxmlformats.org/drawingml/2006/main">
               <a:ext uri="{FF2B5EF4-FFF2-40B4-BE49-F238E27FC236}">
-                <a16:creationId xmlns:a16="http://schemas.microsoft.com/office/drawing/2014/main" id="{70F68679-3C4B-4584-9F54-D356C659CB82}"/>
+                <a16:creationId xmlns:a16="http://schemas.microsoft.com/office/drawing/2014/main" id="{2A3107F3-2A1B-450C-BD42-2583565ADAE3}"/>
               </a:ext>
             </a:extLst>
           </p:cNvPr>
@@ -6502,7 +6573,7 @@
           <p:cNvPr id="5" name="assist">
             <a:extLst xmlns:a="http://schemas.openxmlformats.org/drawingml/2006/main">
               <a:ext uri="{FF2B5EF4-FFF2-40B4-BE49-F238E27FC236}">
-                <a16:creationId xmlns:a16="http://schemas.microsoft.com/office/drawing/2014/main" id="{C0155203-9CA4-4810-A946-56093ADF57C0}"/>
+                <a16:creationId xmlns:a16="http://schemas.microsoft.com/office/drawing/2014/main" id="{C399CD51-DA35-419B-B990-378F8EBEF14C}"/>
               </a:ext>
             </a:extLst>
           </p:cNvPr>
@@ -6712,7 +6783,7 @@
           <p:cNvPr id="7" name="SIP TCP&#10;RTP">
             <a:extLst xmlns:a="http://schemas.openxmlformats.org/drawingml/2006/main">
               <a:ext uri="{FF2B5EF4-FFF2-40B4-BE49-F238E27FC236}">
-                <a16:creationId xmlns:a16="http://schemas.microsoft.com/office/drawing/2014/main" id="{868EF98B-507F-4F1C-BC62-C8A15671FF85}"/>
+                <a16:creationId xmlns:a16="http://schemas.microsoft.com/office/drawing/2014/main" id="{1A27C7F0-0B9B-43B2-9794-47490842E51D}"/>
               </a:ext>
             </a:extLst>
           </p:cNvPr>
@@ -6893,7 +6964,7 @@
           <p:cNvPr id="9" name="SIP UDP&#10;RTP">
             <a:extLst xmlns:a="http://schemas.openxmlformats.org/drawingml/2006/main">
               <a:ext uri="{FF2B5EF4-FFF2-40B4-BE49-F238E27FC236}">
-                <a16:creationId xmlns:a16="http://schemas.microsoft.com/office/drawing/2014/main" id="{A8752E6B-6565-48A5-AE03-3C113E9C6AB4}"/>
+                <a16:creationId xmlns:a16="http://schemas.microsoft.com/office/drawing/2014/main" id="{2E9CAF76-D9A8-4789-B48B-3CFEA8CB312D}"/>
               </a:ext>
             </a:extLst>
           </p:cNvPr>
@@ -7074,7 +7145,7 @@
           <p:cNvPr id="10" name="First call: enable Allow calls and select a pipeline in HA.&#10;Then ">
             <a:extLst xmlns:a="http://schemas.openxmlformats.org/drawingml/2006/main">
               <a:ext uri="{FF2B5EF4-FFF2-40B4-BE49-F238E27FC236}">
-                <a16:creationId xmlns:a16="http://schemas.microsoft.com/office/drawing/2014/main" id="{435155FB-E3C8-4C79-BF45-9FA0290FF0D9}"/>
+                <a16:creationId xmlns:a16="http://schemas.microsoft.com/office/drawing/2014/main" id="{D65C11D8-D7E6-4AB7-97B2-B2CBBCFC5615}"/>
               </a:ext>
             </a:extLst>
           </p:cNvPr>
@@ -7255,7 +7326,7 @@
           <p:cNvPr id="11" name="SIP From retains the phone extension. HA uses dynamic UDP ports f">
             <a:extLst xmlns:a="http://schemas.openxmlformats.org/drawingml/2006/main">
               <a:ext uri="{FF2B5EF4-FFF2-40B4-BE49-F238E27FC236}">
-                <a16:creationId xmlns:a16="http://schemas.microsoft.com/office/drawing/2014/main" id="{C5A084BC-1C04-4056-8857-E19B62C5DC38}"/>
+                <a16:creationId xmlns:a16="http://schemas.microsoft.com/office/drawing/2014/main" id="{348A4007-6E56-45A0-9A79-092424D72C66}"/>
               </a:ext>
             </a:extLst>
           </p:cNvPr>
@@ -7434,7 +7505,7 @@
     </p:spTree>
     <p:extLst>
       <p:ext uri="{BB962C8B-B14F-4D97-AF65-F5344CB8AC3E}">
-        <p14:creationId xmlns:p14="http://schemas.microsoft.com/office/powerpoint/2010/main" val="2051003519"/>
+        <p14:creationId xmlns:p14="http://schemas.microsoft.com/office/powerpoint/2010/main" val="731273391"/>
       </p:ext>
     </p:extLst>
   </p:cSld>
@@ -7465,7 +7536,7 @@
           <p:cNvPr id="15" name="Deployment and commissioning">
             <a:extLst xmlns:a="http://schemas.openxmlformats.org/drawingml/2006/main">
               <a:ext uri="{FF2B5EF4-FFF2-40B4-BE49-F238E27FC236}">
-                <a16:creationId xmlns:a16="http://schemas.microsoft.com/office/drawing/2014/main" id="{71D6346B-3382-4CD1-90CC-4F08C4F72840}"/>
+                <a16:creationId xmlns:a16="http://schemas.microsoft.com/office/drawing/2014/main" id="{1DF64D8C-92AA-45AD-88B7-3681B71924A6}"/>
               </a:ext>
             </a:extLst>
           </p:cNvPr>
@@ -7623,7 +7694,7 @@
           <p:cNvPr id="2" name="11">
             <a:extLst xmlns:a="http://schemas.openxmlformats.org/drawingml/2006/main">
               <a:ext uri="{FF2B5EF4-FFF2-40B4-BE49-F238E27FC236}">
-                <a16:creationId xmlns:a16="http://schemas.microsoft.com/office/drawing/2014/main" id="{90BF3AE8-0BDC-4EFE-98D6-085E428FFAD9}"/>
+                <a16:creationId xmlns:a16="http://schemas.microsoft.com/office/drawing/2014/main" id="{C0D3CF69-BCBC-499E-A01D-746263BFB3D7}"/>
               </a:ext>
             </a:extLst>
           </p:cNvPr>
@@ -7781,7 +7852,7 @@
           <p:cNvPr id="3" name="01">
             <a:extLst xmlns:a="http://schemas.openxmlformats.org/drawingml/2006/main">
               <a:ext uri="{FF2B5EF4-FFF2-40B4-BE49-F238E27FC236}">
-                <a16:creationId xmlns:a16="http://schemas.microsoft.com/office/drawing/2014/main" id="{16DE0BCF-CCFD-40EA-9C25-3398219AE48E}"/>
+                <a16:creationId xmlns:a16="http://schemas.microsoft.com/office/drawing/2014/main" id="{DA368D37-A51D-4775-B035-E252BBCDF52C}"/>
               </a:ext>
             </a:extLst>
           </p:cNvPr>
@@ -7939,7 +8010,7 @@
           <p:cNvPr id="4" name="Server bootstrap">
             <a:extLst xmlns:a="http://schemas.openxmlformats.org/drawingml/2006/main">
               <a:ext uri="{FF2B5EF4-FFF2-40B4-BE49-F238E27FC236}">
-                <a16:creationId xmlns:a16="http://schemas.microsoft.com/office/drawing/2014/main" id="{99EFD531-EBD8-4973-A047-500EFAFCD4D2}"/>
+                <a16:creationId xmlns:a16="http://schemas.microsoft.com/office/drawing/2014/main" id="{FC445BC5-0C0F-44BB-97A1-57C8A6A6BA45}"/>
               </a:ext>
             </a:extLst>
           </p:cNvPr>
@@ -8097,7 +8168,7 @@
           <p:cNvPr id="5" name="Images, static IP, firewall, Asterisk and Opus">
             <a:extLst xmlns:a="http://schemas.openxmlformats.org/drawingml/2006/main">
               <a:ext uri="{FF2B5EF4-FFF2-40B4-BE49-F238E27FC236}">
-                <a16:creationId xmlns:a16="http://schemas.microsoft.com/office/drawing/2014/main" id="{4F737562-E2E1-487B-98A5-4A09DA45AC59}"/>
+                <a16:creationId xmlns:a16="http://schemas.microsoft.com/office/drawing/2014/main" id="{EE4BAF10-8468-44CB-892E-619F692B4D59}"/>
               </a:ext>
             </a:extLst>
           </p:cNvPr>
@@ -8255,7 +8326,7 @@
           <p:cNvPr id="6" name="02">
             <a:extLst xmlns:a="http://schemas.openxmlformats.org/drawingml/2006/main">
               <a:ext uri="{FF2B5EF4-FFF2-40B4-BE49-F238E27FC236}">
-                <a16:creationId xmlns:a16="http://schemas.microsoft.com/office/drawing/2014/main" id="{716EB2A6-5F64-4B02-A3A1-B758036FBA2C}"/>
+                <a16:creationId xmlns:a16="http://schemas.microsoft.com/office/drawing/2014/main" id="{5D3AF0D3-928F-416A-8DF8-A090908B3164}"/>
               </a:ext>
             </a:extLst>
           </p:cNvPr>
@@ -8413,7 +8484,7 @@
           <p:cNvPr id="7" name="Verified pilot phone">
             <a:extLst xmlns:a="http://schemas.openxmlformats.org/drawingml/2006/main">
               <a:ext uri="{FF2B5EF4-FFF2-40B4-BE49-F238E27FC236}">
-                <a16:creationId xmlns:a16="http://schemas.microsoft.com/office/drawing/2014/main" id="{48012EB7-E2A9-496F-88E2-D6632F6F7B18}"/>
+                <a16:creationId xmlns:a16="http://schemas.microsoft.com/office/drawing/2014/main" id="{ACA92AFC-A9EA-42D1-A741-E008B0ADD55C}"/>
               </a:ext>
             </a:extLst>
           </p:cNvPr>
@@ -8571,7 +8642,7 @@
           <p:cNvPr id="8" name="PID / HW / Load / MAC, SIP profile, temporary TFTP">
             <a:extLst xmlns:a="http://schemas.openxmlformats.org/drawingml/2006/main">
               <a:ext uri="{FF2B5EF4-FFF2-40B4-BE49-F238E27FC236}">
-                <a16:creationId xmlns:a16="http://schemas.microsoft.com/office/drawing/2014/main" id="{678C2B8B-103E-4EF0-8841-821F5E39EF0C}"/>
+                <a16:creationId xmlns:a16="http://schemas.microsoft.com/office/drawing/2014/main" id="{81B86B97-570A-438F-BF16-D68A075734D4}"/>
               </a:ext>
             </a:extLst>
           </p:cNvPr>
@@ -8729,7 +8800,7 @@
           <p:cNvPr id="9" name="03">
             <a:extLst xmlns:a="http://schemas.openxmlformats.org/drawingml/2006/main">
               <a:ext uri="{FF2B5EF4-FFF2-40B4-BE49-F238E27FC236}">
-                <a16:creationId xmlns:a16="http://schemas.microsoft.com/office/drawing/2014/main" id="{515E78CA-AD00-4EAF-841D-1ABE86EA68C3}"/>
+                <a16:creationId xmlns:a16="http://schemas.microsoft.com/office/drawing/2014/main" id="{123F9AC1-B1C5-4B56-A480-A1669EFF9480}"/>
               </a:ext>
             </a:extLst>
           </p:cNvPr>
@@ -8887,7 +8958,7 @@
           <p:cNvPr id="10" name="Home Assistant setup">
             <a:extLst xmlns:a="http://schemas.openxmlformats.org/drawingml/2006/main">
               <a:ext uri="{FF2B5EF4-FFF2-40B4-BE49-F238E27FC236}">
-                <a16:creationId xmlns:a16="http://schemas.microsoft.com/office/drawing/2014/main" id="{7EFBAFF6-7093-4666-957B-FB96B56C60B8}"/>
+                <a16:creationId xmlns:a16="http://schemas.microsoft.com/office/drawing/2014/main" id="{FAE4DB09-7D46-4568-820B-712104D66182}"/>
               </a:ext>
             </a:extLst>
           </p:cNvPr>
@@ -9045,7 +9116,7 @@
           <p:cNvPr id="11" name="AMI /32, secret, actual entity IDs and VoIP pipeline">
             <a:extLst xmlns:a="http://schemas.openxmlformats.org/drawingml/2006/main">
               <a:ext uri="{FF2B5EF4-FFF2-40B4-BE49-F238E27FC236}">
-                <a16:creationId xmlns:a16="http://schemas.microsoft.com/office/drawing/2014/main" id="{5AEF5BA0-5439-4EE8-9878-6CCCC6E55A56}"/>
+                <a16:creationId xmlns:a16="http://schemas.microsoft.com/office/drawing/2014/main" id="{18C6CB8E-5B7C-47DC-9531-E7A100DAE8EF}"/>
               </a:ext>
             </a:extLst>
           </p:cNvPr>
@@ -9203,7 +9274,7 @@
           <p:cNvPr id="12" name="04">
             <a:extLst xmlns:a="http://schemas.openxmlformats.org/drawingml/2006/main">
               <a:ext uri="{FF2B5EF4-FFF2-40B4-BE49-F238E27FC236}">
-                <a16:creationId xmlns:a16="http://schemas.microsoft.com/office/drawing/2014/main" id="{5A4FEDDE-0432-4BF7-852B-8E90E73337BB}"/>
+                <a16:creationId xmlns:a16="http://schemas.microsoft.com/office/drawing/2014/main" id="{CDE2475C-6868-4C87-9F17-0DEAE8B85C9F}"/>
               </a:ext>
             </a:extLst>
           </p:cNvPr>
@@ -9361,7 +9432,7 @@
           <p:cNvPr id="13" name="Acceptance and rollout">
             <a:extLst xmlns:a="http://schemas.openxmlformats.org/drawingml/2006/main">
               <a:ext uri="{FF2B5EF4-FFF2-40B4-BE49-F238E27FC236}">
-                <a16:creationId xmlns:a16="http://schemas.microsoft.com/office/drawing/2014/main" id="{53F4B4A8-3A34-4A06-A068-F969553D73AF}"/>
+                <a16:creationId xmlns:a16="http://schemas.microsoft.com/office/drawing/2014/main" id="{2E3C4FB1-CE76-4C8E-9784-29D0CF1ECB5D}"/>
               </a:ext>
             </a:extLst>
           </p:cNvPr>
@@ -9519,7 +9590,7 @@
           <p:cNvPr id="14" name="Two phones, a call to 630, then the remaining phones">
             <a:extLst xmlns:a="http://schemas.openxmlformats.org/drawingml/2006/main">
               <a:ext uri="{FF2B5EF4-FFF2-40B4-BE49-F238E27FC236}">
-                <a16:creationId xmlns:a16="http://schemas.microsoft.com/office/drawing/2014/main" id="{CC185171-23F3-4D7D-9AF3-9FECDF803581}"/>
+                <a16:creationId xmlns:a16="http://schemas.microsoft.com/office/drawing/2014/main" id="{6DBBFD03-ED55-4BCC-B6C3-79B9D4DEB215}"/>
               </a:ext>
             </a:extLst>
           </p:cNvPr>
@@ -9675,7 +9746,7 @@
     </p:spTree>
     <p:extLst>
       <p:ext uri="{BB962C8B-B14F-4D97-AF65-F5344CB8AC3E}">
-        <p14:creationId xmlns:p14="http://schemas.microsoft.com/office/powerpoint/2010/main" val="574822645"/>
+        <p14:creationId xmlns:p14="http://schemas.microsoft.com/office/powerpoint/2010/main" val="796105919"/>
       </p:ext>
     </p:extLst>
   </p:cSld>
@@ -9706,7 +9777,7 @@
           <p:cNvPr id="10" name="Acceptance tests on real phones">
             <a:extLst xmlns:a="http://schemas.openxmlformats.org/drawingml/2006/main">
               <a:ext uri="{FF2B5EF4-FFF2-40B4-BE49-F238E27FC236}">
-                <a16:creationId xmlns:a16="http://schemas.microsoft.com/office/drawing/2014/main" id="{0B3864ED-B5B2-4F87-A015-89F180A20480}"/>
+                <a16:creationId xmlns:a16="http://schemas.microsoft.com/office/drawing/2014/main" id="{2EE78E0A-89DE-4459-AC9D-85FF820B2008}"/>
               </a:ext>
             </a:extLst>
           </p:cNvPr>
@@ -9864,7 +9935,7 @@
           <p:cNvPr id="2" name="12">
             <a:extLst xmlns:a="http://schemas.openxmlformats.org/drawingml/2006/main">
               <a:ext uri="{FF2B5EF4-FFF2-40B4-BE49-F238E27FC236}">
-                <a16:creationId xmlns:a16="http://schemas.microsoft.com/office/drawing/2014/main" id="{E5568135-B418-4692-8188-6DD2B9C8F804}"/>
+                <a16:creationId xmlns:a16="http://schemas.microsoft.com/office/drawing/2014/main" id="{1DDFD031-62B0-4A7C-8224-9156271EA10A}"/>
               </a:ext>
             </a:extLst>
           </p:cNvPr>
@@ -10022,7 +10093,7 @@
           <p:cNvPr id="3" name="Telephony">
             <a:extLst xmlns:a="http://schemas.openxmlformats.org/drawingml/2006/main">
               <a:ext uri="{FF2B5EF4-FFF2-40B4-BE49-F238E27FC236}">
-                <a16:creationId xmlns:a16="http://schemas.microsoft.com/office/drawing/2014/main" id="{FE10E025-C93B-4053-8569-DFEFF7DA80E1}"/>
+                <a16:creationId xmlns:a16="http://schemas.microsoft.com/office/drawing/2014/main" id="{230406AF-666B-4986-ADDA-8511BC06EC61}"/>
               </a:ext>
             </a:extLst>
           </p:cNvPr>
@@ -10180,7 +10251,7 @@
           <p:cNvPr id="4" name="201 and 203: cross-phone audio, hold / transfer">
             <a:extLst xmlns:a="http://schemas.openxmlformats.org/drawingml/2006/main">
               <a:ext uri="{FF2B5EF4-FFF2-40B4-BE49-F238E27FC236}">
-                <a16:creationId xmlns:a16="http://schemas.microsoft.com/office/drawing/2014/main" id="{4D0FF99A-E008-4BF3-86A2-547F3D198CA4}"/>
+                <a16:creationId xmlns:a16="http://schemas.microsoft.com/office/drawing/2014/main" id="{60E79FAB-9D53-46EF-B94E-20E20A9F58F5}"/>
               </a:ext>
             </a:extLst>
           </p:cNvPr>
@@ -10338,7 +10409,7 @@
           <p:cNvPr id="5" name="Home Assistant">
             <a:extLst xmlns:a="http://schemas.openxmlformats.org/drawingml/2006/main">
               <a:ext uri="{FF2B5EF4-FFF2-40B4-BE49-F238E27FC236}">
-                <a16:creationId xmlns:a16="http://schemas.microsoft.com/office/drawing/2014/main" id="{121A8BCE-B7FB-40D2-892B-0175D7A34055}"/>
+                <a16:creationId xmlns:a16="http://schemas.microsoft.com/office/drawing/2014/main" id="{715349AB-2350-485F-A6AF-6238DDAA623A}"/>
               </a:ext>
             </a:extLst>
           </p:cNvPr>
@@ -10496,7 +10567,7 @@
           <p:cNvPr id="6" name="States, Originate, Hangup on the correct Channel, DTMF">
             <a:extLst xmlns:a="http://schemas.openxmlformats.org/drawingml/2006/main">
               <a:ext uri="{FF2B5EF4-FFF2-40B4-BE49-F238E27FC236}">
-                <a16:creationId xmlns:a16="http://schemas.microsoft.com/office/drawing/2014/main" id="{A7C0760D-7A0C-4AA5-A1EC-1AF608FF716E}"/>
+                <a16:creationId xmlns:a16="http://schemas.microsoft.com/office/drawing/2014/main" id="{06F2D24F-673D-4296-A404-FE85613E9C36}"/>
               </a:ext>
             </a:extLst>
           </p:cNvPr>
@@ -10654,7 +10725,7 @@
           <p:cNvPr id="7" name="Assist 630">
             <a:extLst xmlns:a="http://schemas.openxmlformats.org/drawingml/2006/main">
               <a:ext uri="{FF2B5EF4-FFF2-40B4-BE49-F238E27FC236}">
-                <a16:creationId xmlns:a16="http://schemas.microsoft.com/office/drawing/2014/main" id="{C538B1E4-A492-4898-9174-CF6CCAC41ACF}"/>
+                <a16:creationId xmlns:a16="http://schemas.microsoft.com/office/drawing/2014/main" id="{A1B834F6-80C9-47BA-800E-A47AB5A4E3D5}"/>
               </a:ext>
             </a:extLst>
           </p:cNvPr>
@@ -10812,7 +10883,7 @@
           <p:cNvPr id="8" name="Speech recognition, spoken reply and hangup">
             <a:extLst xmlns:a="http://schemas.openxmlformats.org/drawingml/2006/main">
               <a:ext uri="{FF2B5EF4-FFF2-40B4-BE49-F238E27FC236}">
-                <a16:creationId xmlns:a16="http://schemas.microsoft.com/office/drawing/2014/main" id="{F31C0FCD-8443-41F7-8EBC-355551556AAA}"/>
+                <a16:creationId xmlns:a16="http://schemas.microsoft.com/office/drawing/2014/main" id="{36B9B9D0-06CD-42EE-B9D6-27AAC2F7DD9A}"/>
               </a:ext>
             </a:extLst>
           </p:cNvPr>
@@ -10970,7 +11041,7 @@
           <p:cNvPr id="9" name="Repeat after phone, PBX and HA restarts. Readiness does not verif">
             <a:extLst xmlns:a="http://schemas.openxmlformats.org/drawingml/2006/main">
               <a:ext uri="{FF2B5EF4-FFF2-40B4-BE49-F238E27FC236}">
-                <a16:creationId xmlns:a16="http://schemas.microsoft.com/office/drawing/2014/main" id="{F52AE53E-C6AB-42B6-A156-E6457895ADFC}"/>
+                <a16:creationId xmlns:a16="http://schemas.microsoft.com/office/drawing/2014/main" id="{C8A4BF42-8A54-4466-9290-70A937643DE5}"/>
               </a:ext>
             </a:extLst>
           </p:cNvPr>
@@ -11126,7 +11197,7 @@
     </p:spTree>
     <p:extLst>
       <p:ext uri="{BB962C8B-B14F-4D97-AF65-F5344CB8AC3E}">
-        <p14:creationId xmlns:p14="http://schemas.microsoft.com/office/powerpoint/2010/main" val="1030009289"/>
+        <p14:creationId xmlns:p14="http://schemas.microsoft.com/office/powerpoint/2010/main" val="1865718998"/>
       </p:ext>
     </p:extLst>
   </p:cSld>
@@ -11157,7 +11228,7 @@
           <p:cNvPr id="8" name="Operations and recovery">
             <a:extLst xmlns:a="http://schemas.openxmlformats.org/drawingml/2006/main">
               <a:ext uri="{FF2B5EF4-FFF2-40B4-BE49-F238E27FC236}">
-                <a16:creationId xmlns:a16="http://schemas.microsoft.com/office/drawing/2014/main" id="{3617DF14-0C1F-47C5-84EA-9CD60E2464DF}"/>
+                <a16:creationId xmlns:a16="http://schemas.microsoft.com/office/drawing/2014/main" id="{61983A07-2E5C-4E2E-9786-6A440E696334}"/>
               </a:ext>
             </a:extLst>
           </p:cNvPr>
@@ -11315,7 +11386,7 @@
           <p:cNvPr id="2" name="13">
             <a:extLst xmlns:a="http://schemas.openxmlformats.org/drawingml/2006/main">
               <a:ext uri="{FF2B5EF4-FFF2-40B4-BE49-F238E27FC236}">
-                <a16:creationId xmlns:a16="http://schemas.microsoft.com/office/drawing/2014/main" id="{E3B6D3B1-D62B-482A-A82C-5E99FF62D3A3}"/>
+                <a16:creationId xmlns:a16="http://schemas.microsoft.com/office/drawing/2014/main" id="{EC34E619-93DF-42EB-9E3A-9EABF4258F52}"/>
               </a:ext>
             </a:extLst>
           </p:cNvPr>
@@ -11473,7 +11544,7 @@
           <p:cNvPr id="3" name="Private backups outside Git">
             <a:extLst xmlns:a="http://schemas.openxmlformats.org/drawingml/2006/main">
               <a:ext uri="{FF2B5EF4-FFF2-40B4-BE49-F238E27FC236}">
-                <a16:creationId xmlns:a16="http://schemas.microsoft.com/office/drawing/2014/main" id="{65D9903D-1E90-41C9-8276-B850F06C9BFA}"/>
+                <a16:creationId xmlns:a16="http://schemas.microsoft.com/office/drawing/2014/main" id="{0AC2F08E-B518-4C8C-B3B8-72764C2CFB47}"/>
               </a:ext>
             </a:extLst>
           </p:cNvPr>
@@ -11631,7 +11702,7 @@
           <p:cNvPr id="4" name="Inventory, SIP / AMI secrets and Asterisk data&#10;HA config / .stora">
             <a:extLst xmlns:a="http://schemas.openxmlformats.org/drawingml/2006/main">
               <a:ext uri="{FF2B5EF4-FFF2-40B4-BE49-F238E27FC236}">
-                <a16:creationId xmlns:a16="http://schemas.microsoft.com/office/drawing/2014/main" id="{8F2FEF72-3639-4D41-9030-CB53878C1573}"/>
+                <a16:creationId xmlns:a16="http://schemas.microsoft.com/office/drawing/2014/main" id="{BF9F9A88-9100-4139-B76E-6B5D3817A8F2}"/>
               </a:ext>
             </a:extLst>
           </p:cNvPr>
@@ -11812,7 +11883,7 @@
           <p:cNvPr id="5" name="One node is a single point of failure">
             <a:extLst xmlns:a="http://schemas.openxmlformats.org/drawingml/2006/main">
               <a:ext uri="{FF2B5EF4-FFF2-40B4-BE49-F238E27FC236}">
-                <a16:creationId xmlns:a16="http://schemas.microsoft.com/office/drawing/2014/main" id="{A4062DAE-9F02-4180-AD9D-392572F9915A}"/>
+                <a16:creationId xmlns:a16="http://schemas.microsoft.com/office/drawing/2014/main" id="{3793E5F8-ABBF-438A-963A-2C6C3A80BE1F}"/>
               </a:ext>
             </a:extLst>
           </p:cNvPr>
@@ -11970,7 +12041,7 @@
           <p:cNvPr id="6" name="UPS for network equipment and the k3s node&#10;A recovery plan that p">
             <a:extLst xmlns:a="http://schemas.openxmlformats.org/drawingml/2006/main">
               <a:ext uri="{FF2B5EF4-FFF2-40B4-BE49-F238E27FC236}">
-                <a16:creationId xmlns:a16="http://schemas.microsoft.com/office/drawing/2014/main" id="{EACF9DF1-CF73-4262-BCFE-A3CE2C18BC22}"/>
+                <a16:creationId xmlns:a16="http://schemas.microsoft.com/office/drawing/2014/main" id="{73C8DED1-2A6C-41DF-BB86-14BD06418759}"/>
               </a:ext>
             </a:extLst>
           </p:cNvPr>
@@ -12151,7 +12222,7 @@
           <p:cNvPr id="7" name="Exclude raw DTMF and connected-line data from Recorder. Review ex">
             <a:extLst xmlns:a="http://schemas.openxmlformats.org/drawingml/2006/main">
               <a:ext uri="{FF2B5EF4-FFF2-40B4-BE49-F238E27FC236}">
-                <a16:creationId xmlns:a16="http://schemas.microsoft.com/office/drawing/2014/main" id="{36AA9368-4C64-4660-A614-18E80191D9AC}"/>
+                <a16:creationId xmlns:a16="http://schemas.microsoft.com/office/drawing/2014/main" id="{90455F3B-EB1B-45EA-B729-DA522351DEFE}"/>
               </a:ext>
             </a:extLst>
           </p:cNvPr>
@@ -12307,7 +12378,7 @@
     </p:spTree>
     <p:extLst>
       <p:ext uri="{BB962C8B-B14F-4D97-AF65-F5344CB8AC3E}">
-        <p14:creationId xmlns:p14="http://schemas.microsoft.com/office/powerpoint/2010/main" val="1048075586"/>
+        <p14:creationId xmlns:p14="http://schemas.microsoft.com/office/powerpoint/2010/main" val="23234434"/>
       </p:ext>
     </p:extLst>
   </p:cSld>
@@ -12338,7 +12409,7 @@
           <p:cNvPr id="8" name="Server readiness and phone acceptance">
             <a:extLst xmlns:a="http://schemas.openxmlformats.org/drawingml/2006/main">
               <a:ext uri="{FF2B5EF4-FFF2-40B4-BE49-F238E27FC236}">
-                <a16:creationId xmlns:a16="http://schemas.microsoft.com/office/drawing/2014/main" id="{B8460912-EAB3-449A-B7AC-0E27622B5487}"/>
+                <a16:creationId xmlns:a16="http://schemas.microsoft.com/office/drawing/2014/main" id="{EC4D07BC-E90F-4C2C-9D9D-78744AB720FD}"/>
               </a:ext>
             </a:extLst>
           </p:cNvPr>
@@ -12496,7 +12567,7 @@
           <p:cNvPr id="2" name="14">
             <a:extLst xmlns:a="http://schemas.openxmlformats.org/drawingml/2006/main">
               <a:ext uri="{FF2B5EF4-FFF2-40B4-BE49-F238E27FC236}">
-                <a16:creationId xmlns:a16="http://schemas.microsoft.com/office/drawing/2014/main" id="{9EFAAB93-DD54-4F4C-A9C6-68ADDCDAC458}"/>
+                <a16:creationId xmlns:a16="http://schemas.microsoft.com/office/drawing/2014/main" id="{0440BC11-5CCC-4D68-ABF3-5A64C48D281E}"/>
               </a:ext>
             </a:extLst>
           </p:cNvPr>
@@ -12654,7 +12725,7 @@
           <p:cNvPr id="3" name="Server preparation can come first">
             <a:extLst xmlns:a="http://schemas.openxmlformats.org/drawingml/2006/main">
               <a:ext uri="{FF2B5EF4-FFF2-40B4-BE49-F238E27FC236}">
-                <a16:creationId xmlns:a16="http://schemas.microsoft.com/office/drawing/2014/main" id="{99AFC3E5-DEAF-49E5-B97B-08686116525B}"/>
+                <a16:creationId xmlns:a16="http://schemas.microsoft.com/office/drawing/2014/main" id="{4E26929E-2BD1-473A-BA91-8130A3A9F469}"/>
               </a:ext>
             </a:extLst>
           </p:cNvPr>
@@ -12812,7 +12883,7 @@
           <p:cNvPr id="4" name="Images, configuration, AMI and Opus&#10;Tests verify the server compo">
             <a:extLst xmlns:a="http://schemas.openxmlformats.org/drawingml/2006/main">
               <a:ext uri="{FF2B5EF4-FFF2-40B4-BE49-F238E27FC236}">
-                <a16:creationId xmlns:a16="http://schemas.microsoft.com/office/drawing/2014/main" id="{68671710-7B58-4C64-9607-A00F361E2B6E}"/>
+                <a16:creationId xmlns:a16="http://schemas.microsoft.com/office/drawing/2014/main" id="{4C62E49A-90FC-4402-801C-DF42B49955DE}"/>
               </a:ext>
             </a:extLst>
           </p:cNvPr>
@@ -12993,7 +13064,7 @@
           <p:cNvPr id="5" name="A pilot verifies the phone experience">
             <a:extLst xmlns:a="http://schemas.openxmlformats.org/drawingml/2006/main">
               <a:ext uri="{FF2B5EF4-FFF2-40B4-BE49-F238E27FC236}">
-                <a16:creationId xmlns:a16="http://schemas.microsoft.com/office/drawing/2014/main" id="{DF27BBE3-CE78-4B8A-BF02-D113EA79E56E}"/>
+                <a16:creationId xmlns:a16="http://schemas.microsoft.com/office/drawing/2014/main" id="{F6DC5F38-6086-4059-9B68-D30D7367EC60}"/>
               </a:ext>
             </a:extLst>
           </p:cNvPr>
@@ -13151,7 +13222,7 @@
           <p:cNvPr id="6" name="Phone inventory, a two-party call and Assist&#10;Add the remaining ph">
             <a:extLst xmlns:a="http://schemas.openxmlformats.org/drawingml/2006/main">
               <a:ext uri="{FF2B5EF4-FFF2-40B4-BE49-F238E27FC236}">
-                <a16:creationId xmlns:a16="http://schemas.microsoft.com/office/drawing/2014/main" id="{2BBB6678-AFC4-4708-9C99-2F0721E7BB19}"/>
+                <a16:creationId xmlns:a16="http://schemas.microsoft.com/office/drawing/2014/main" id="{AAF9A17B-9553-4E69-8B84-6505B1A52D61}"/>
               </a:ext>
             </a:extLst>
           </p:cNvPr>
@@ -13332,7 +13403,7 @@
           <p:cNvPr id="7" name="Physical acceptance is a separate step. Keep the results in the p">
             <a:extLst xmlns:a="http://schemas.openxmlformats.org/drawingml/2006/main">
               <a:ext uri="{FF2B5EF4-FFF2-40B4-BE49-F238E27FC236}">
-                <a16:creationId xmlns:a16="http://schemas.microsoft.com/office/drawing/2014/main" id="{55EE1244-065D-4904-AB30-9A6EF6457CEE}"/>
+                <a16:creationId xmlns:a16="http://schemas.microsoft.com/office/drawing/2014/main" id="{E9C24186-E0D5-4155-BA3F-ECF5FA78701C}"/>
               </a:ext>
             </a:extLst>
           </p:cNvPr>
@@ -13488,7 +13559,7 @@
     </p:spTree>
     <p:extLst>
       <p:ext uri="{BB962C8B-B14F-4D97-AF65-F5344CB8AC3E}">
-        <p14:creationId xmlns:p14="http://schemas.microsoft.com/office/powerpoint/2010/main" val="1263947407"/>
+        <p14:creationId xmlns:p14="http://schemas.microsoft.com/office/powerpoint/2010/main" val="1270079051"/>
       </p:ext>
     </p:extLst>
   </p:cSld>
@@ -13516,10 +13587,10 @@
       </p:grpSpPr>
       <p:sp>
         <p:nvSpPr>
-          <p:cNvPr id="18" name="Four phones, eight independent lines">
+          <p:cNvPr id="26" name="Ten Cisco identities, twenty lines">
             <a:extLst xmlns:a="http://schemas.openxmlformats.org/drawingml/2006/main">
               <a:ext uri="{FF2B5EF4-FFF2-40B4-BE49-F238E27FC236}">
-                <a16:creationId xmlns:a16="http://schemas.microsoft.com/office/drawing/2014/main" id="{715582E9-6622-4467-A6EB-E35D81300FD5}"/>
+                <a16:creationId xmlns:a16="http://schemas.microsoft.com/office/drawing/2014/main" id="{FA807565-EAE6-4E6D-9CAA-E583B1B599AF}"/>
               </a:ext>
             </a:extLst>
           </p:cNvPr>
@@ -13667,7 +13738,7 @@
                 <a:ea typeface="Arial"/>
                 <a:cs typeface="Arial"/>
               </a:rPr>
-              <a:t>Four phones, eight independent lines</a:t>
+              <a:t>Ten Cisco identities, twenty lines</a:t>
             </a:r>
           </a:p>
         </p:txBody>
@@ -13677,7 +13748,7 @@
           <p:cNvPr id="2" name="15">
             <a:extLst xmlns:a="http://schemas.openxmlformats.org/drawingml/2006/main">
               <a:ext uri="{FF2B5EF4-FFF2-40B4-BE49-F238E27FC236}">
-                <a16:creationId xmlns:a16="http://schemas.microsoft.com/office/drawing/2014/main" id="{53258F1E-9423-4A14-9CD2-7A455985C414}"/>
+                <a16:creationId xmlns:a16="http://schemas.microsoft.com/office/drawing/2014/main" id="{2BFD7B27-BCB5-4E11-81C8-8C6E54D846FD}"/>
               </a:ext>
             </a:extLst>
           </p:cNvPr>
@@ -13832,10 +13903,10 @@
       </p:sp>
       <p:sp>
         <p:nvSpPr>
-          <p:cNvPr id="3" name="PHONE A">
+          <p:cNvPr id="3" name="PHONE 1">
             <a:extLst xmlns:a="http://schemas.openxmlformats.org/drawingml/2006/main">
               <a:ext uri="{FF2B5EF4-FFF2-40B4-BE49-F238E27FC236}">
-                <a16:creationId xmlns:a16="http://schemas.microsoft.com/office/drawing/2014/main" id="{7A0AB815-2A94-4423-8CCA-3AADD64CA312}"/>
+                <a16:creationId xmlns:a16="http://schemas.microsoft.com/office/drawing/2014/main" id="{65A4D88E-FDAB-4E19-A53A-C5715E6DF8D3}"/>
               </a:ext>
             </a:extLst>
           </p:cNvPr>
@@ -13846,8 +13917,8 @@
         </p:nvSpPr>
         <p:spPr>
           <a:xfrm xmlns:a="http://schemas.openxmlformats.org/drawingml/2006/main">
-            <a:off x="571500" y="1619250"/>
-            <a:ext cx="2524125" cy="400050"/>
+            <a:off x="571500" y="1685925"/>
+            <a:ext cx="2095500" cy="333375"/>
           </a:xfrm>
           <a:prstGeom xmlns:a="http://schemas.openxmlformats.org/drawingml/2006/main" prst="rect">
             <a:avLst/>
@@ -13863,7 +13934,7 @@
           </a:bodyPr>
           <a:lstStyle xmlns:a="http://schemas.openxmlformats.org/drawingml/2006/main">
             <a:defPPr algn="l">
-              <a:defRPr sz="1875" b="1">
+              <a:defRPr sz="1350" b="0">
                 <a:solidFill>
                   <a:srgbClr val="AAB9D0"/>
                 </a:solidFill>
@@ -13873,7 +13944,7 @@
               </a:defRPr>
             </a:defPPr>
             <a:lvl1pPr algn="l">
-              <a:defRPr sz="1875" b="1">
+              <a:defRPr sz="1350" b="0">
                 <a:solidFill>
                   <a:srgbClr val="AAB9D0"/>
                 </a:solidFill>
@@ -13883,7 +13954,7 @@
               </a:defRPr>
             </a:lvl1pPr>
             <a:lvl2pPr algn="l">
-              <a:defRPr sz="1875" b="1">
+              <a:defRPr sz="1350" b="0">
                 <a:solidFill>
                   <a:srgbClr val="AAB9D0"/>
                 </a:solidFill>
@@ -13893,7 +13964,7 @@
               </a:defRPr>
             </a:lvl2pPr>
             <a:lvl3pPr algn="l">
-              <a:defRPr sz="1875" b="1">
+              <a:defRPr sz="1350" b="0">
                 <a:solidFill>
                   <a:srgbClr val="AAB9D0"/>
                 </a:solidFill>
@@ -13903,7 +13974,7 @@
               </a:defRPr>
             </a:lvl3pPr>
             <a:lvl4pPr algn="l">
-              <a:defRPr sz="1875" b="1">
+              <a:defRPr sz="1350" b="0">
                 <a:solidFill>
                   <a:srgbClr val="AAB9D0"/>
                 </a:solidFill>
@@ -13913,7 +13984,7 @@
               </a:defRPr>
             </a:lvl4pPr>
             <a:lvl5pPr algn="l">
-              <a:defRPr sz="1875" b="1">
+              <a:defRPr sz="1350" b="0">
                 <a:solidFill>
                   <a:srgbClr val="AAB9D0"/>
                 </a:solidFill>
@@ -13923,7 +13994,7 @@
               </a:defRPr>
             </a:lvl5pPr>
             <a:lvl6pPr algn="l">
-              <a:defRPr sz="1875" b="1">
+              <a:defRPr sz="1350" b="0">
                 <a:solidFill>
                   <a:srgbClr val="AAB9D0"/>
                 </a:solidFill>
@@ -13933,7 +14004,7 @@
               </a:defRPr>
             </a:lvl6pPr>
             <a:lvl7pPr algn="l">
-              <a:defRPr sz="1875" b="1">
+              <a:defRPr sz="1350" b="0">
                 <a:solidFill>
                   <a:srgbClr val="AAB9D0"/>
                 </a:solidFill>
@@ -13943,7 +14014,7 @@
               </a:defRPr>
             </a:lvl7pPr>
             <a:lvl8pPr algn="l">
-              <a:defRPr sz="1875" b="1">
+              <a:defRPr sz="1350" b="0">
                 <a:solidFill>
                   <a:srgbClr val="AAB9D0"/>
                 </a:solidFill>
@@ -13953,7 +14024,7 @@
               </a:defRPr>
             </a:lvl8pPr>
             <a:lvl9pPr algn="l">
-              <a:defRPr sz="1875" b="1">
+              <a:defRPr sz="1350" b="0">
                 <a:solidFill>
                   <a:srgbClr val="AAB9D0"/>
                 </a:solidFill>
@@ -13965,7 +14036,7 @@
           </a:lstStyle>
           <a:p xmlns:a="http://schemas.openxmlformats.org/drawingml/2006/main">
             <a:pPr algn="l">
-              <a:defRPr sz="1875" b="1">
+              <a:defRPr sz="1350" b="0">
                 <a:solidFill>
                   <a:srgbClr val="AAB9D0"/>
                 </a:solidFill>
@@ -13975,7 +14046,7 @@
               </a:defRPr>
             </a:pPr>
             <a:r>
-              <a:rPr sz="1875" b="1">
+              <a:rPr sz="1350" b="0">
                 <a:solidFill>
                   <a:srgbClr val="AAB9D0"/>
                 </a:solidFill>
@@ -13983,17 +14054,17 @@
                 <a:ea typeface="Arial"/>
                 <a:cs typeface="Arial"/>
               </a:rPr>
-              <a:t>PHONE A</a:t>
+              <a:t>PHONE 1</a:t>
             </a:r>
           </a:p>
         </p:txBody>
       </p:sp>
       <p:sp>
         <p:nvSpPr>
-          <p:cNvPr id="4" name="201">
+          <p:cNvPr id="4" name="201 / 202">
             <a:extLst xmlns:a="http://schemas.openxmlformats.org/drawingml/2006/main">
               <a:ext uri="{FF2B5EF4-FFF2-40B4-BE49-F238E27FC236}">
-                <a16:creationId xmlns:a16="http://schemas.microsoft.com/office/drawing/2014/main" id="{5A5FF80A-0703-4A87-BF96-6651D637F322}"/>
+                <a16:creationId xmlns:a16="http://schemas.microsoft.com/office/drawing/2014/main" id="{63AE5323-2B11-484E-AE45-894F4A5F4A0F}"/>
               </a:ext>
             </a:extLst>
           </p:cNvPr>
@@ -14004,8 +14075,8 @@
         </p:nvSpPr>
         <p:spPr>
           <a:xfrm xmlns:a="http://schemas.openxmlformats.org/drawingml/2006/main">
-            <a:off x="571500" y="2266950"/>
-            <a:ext cx="2524125" cy="838200"/>
+            <a:off x="571500" y="2114550"/>
+            <a:ext cx="2095500" cy="571500"/>
           </a:xfrm>
           <a:prstGeom xmlns:a="http://schemas.openxmlformats.org/drawingml/2006/main" prst="rect">
             <a:avLst/>
@@ -14021,7 +14092,7 @@
           </a:bodyPr>
           <a:lstStyle xmlns:a="http://schemas.openxmlformats.org/drawingml/2006/main">
             <a:defPPr algn="l">
-              <a:defRPr sz="5025" b="1">
+              <a:defRPr sz="2550" b="1">
                 <a:solidFill>
                   <a:srgbClr val="48DDCC"/>
                 </a:solidFill>
@@ -14031,7 +14102,7 @@
               </a:defRPr>
             </a:defPPr>
             <a:lvl1pPr algn="l">
-              <a:defRPr sz="5025" b="1">
+              <a:defRPr sz="2550" b="1">
                 <a:solidFill>
                   <a:srgbClr val="48DDCC"/>
                 </a:solidFill>
@@ -14041,7 +14112,7 @@
               </a:defRPr>
             </a:lvl1pPr>
             <a:lvl2pPr algn="l">
-              <a:defRPr sz="5025" b="1">
+              <a:defRPr sz="2550" b="1">
                 <a:solidFill>
                   <a:srgbClr val="48DDCC"/>
                 </a:solidFill>
@@ -14051,7 +14122,7 @@
               </a:defRPr>
             </a:lvl2pPr>
             <a:lvl3pPr algn="l">
-              <a:defRPr sz="5025" b="1">
+              <a:defRPr sz="2550" b="1">
                 <a:solidFill>
                   <a:srgbClr val="48DDCC"/>
                 </a:solidFill>
@@ -14061,7 +14132,7 @@
               </a:defRPr>
             </a:lvl3pPr>
             <a:lvl4pPr algn="l">
-              <a:defRPr sz="5025" b="1">
+              <a:defRPr sz="2550" b="1">
                 <a:solidFill>
                   <a:srgbClr val="48DDCC"/>
                 </a:solidFill>
@@ -14071,7 +14142,7 @@
               </a:defRPr>
             </a:lvl4pPr>
             <a:lvl5pPr algn="l">
-              <a:defRPr sz="5025" b="1">
+              <a:defRPr sz="2550" b="1">
                 <a:solidFill>
                   <a:srgbClr val="48DDCC"/>
                 </a:solidFill>
@@ -14081,7 +14152,7 @@
               </a:defRPr>
             </a:lvl5pPr>
             <a:lvl6pPr algn="l">
-              <a:defRPr sz="5025" b="1">
+              <a:defRPr sz="2550" b="1">
                 <a:solidFill>
                   <a:srgbClr val="48DDCC"/>
                 </a:solidFill>
@@ -14091,7 +14162,7 @@
               </a:defRPr>
             </a:lvl6pPr>
             <a:lvl7pPr algn="l">
-              <a:defRPr sz="5025" b="1">
+              <a:defRPr sz="2550" b="1">
                 <a:solidFill>
                   <a:srgbClr val="48DDCC"/>
                 </a:solidFill>
@@ -14101,7 +14172,7 @@
               </a:defRPr>
             </a:lvl7pPr>
             <a:lvl8pPr algn="l">
-              <a:defRPr sz="5025" b="1">
+              <a:defRPr sz="2550" b="1">
                 <a:solidFill>
                   <a:srgbClr val="48DDCC"/>
                 </a:solidFill>
@@ -14111,7 +14182,7 @@
               </a:defRPr>
             </a:lvl8pPr>
             <a:lvl9pPr algn="l">
-              <a:defRPr sz="5025" b="1">
+              <a:defRPr sz="2550" b="1">
                 <a:solidFill>
                   <a:srgbClr val="48DDCC"/>
                 </a:solidFill>
@@ -14123,7 +14194,7 @@
           </a:lstStyle>
           <a:p xmlns:a="http://schemas.openxmlformats.org/drawingml/2006/main">
             <a:pPr algn="l">
-              <a:defRPr sz="5025" b="1">
+              <a:defRPr sz="2550" b="1">
                 <a:solidFill>
                   <a:srgbClr val="48DDCC"/>
                 </a:solidFill>
@@ -14133,7 +14204,7 @@
               </a:defRPr>
             </a:pPr>
             <a:r>
-              <a:rPr sz="5025" b="1">
+              <a:rPr sz="2550" b="1">
                 <a:solidFill>
                   <a:srgbClr val="48DDCC"/>
                 </a:solidFill>
@@ -14141,17 +14212,17 @@
                 <a:ea typeface="Arial"/>
                 <a:cs typeface="Arial"/>
               </a:rPr>
-              <a:t>201</a:t>
+              <a:t>201 / 202</a:t>
             </a:r>
           </a:p>
         </p:txBody>
       </p:sp>
       <p:sp>
         <p:nvSpPr>
-          <p:cNvPr id="5" name="202">
+          <p:cNvPr id="5" name="PHONE 2">
             <a:extLst xmlns:a="http://schemas.openxmlformats.org/drawingml/2006/main">
               <a:ext uri="{FF2B5EF4-FFF2-40B4-BE49-F238E27FC236}">
-                <a16:creationId xmlns:a16="http://schemas.microsoft.com/office/drawing/2014/main" id="{3EB389CE-757C-4C13-9D76-B3C91766C12F}"/>
+                <a16:creationId xmlns:a16="http://schemas.microsoft.com/office/drawing/2014/main" id="{F3D9D387-2B18-4E5E-80B5-28459D4B3372}"/>
               </a:ext>
             </a:extLst>
           </p:cNvPr>
@@ -14162,8 +14233,8 @@
         </p:nvSpPr>
         <p:spPr>
           <a:xfrm xmlns:a="http://schemas.openxmlformats.org/drawingml/2006/main">
-            <a:off x="571500" y="3238500"/>
-            <a:ext cx="2524125" cy="838200"/>
+            <a:off x="2895600" y="1685925"/>
+            <a:ext cx="2095500" cy="333375"/>
           </a:xfrm>
           <a:prstGeom xmlns:a="http://schemas.openxmlformats.org/drawingml/2006/main" prst="rect">
             <a:avLst/>
@@ -14179,9 +14250,9 @@
           </a:bodyPr>
           <a:lstStyle xmlns:a="http://schemas.openxmlformats.org/drawingml/2006/main">
             <a:defPPr algn="l">
-              <a:defRPr sz="5025" b="1">
-                <a:solidFill>
-                  <a:srgbClr val="48DDCC"/>
+              <a:defRPr sz="1350" b="0">
+                <a:solidFill>
+                  <a:srgbClr val="AAB9D0"/>
                 </a:solidFill>
                 <a:latin typeface="Arial"/>
                 <a:ea typeface="Arial"/>
@@ -14189,9 +14260,9 @@
               </a:defRPr>
             </a:defPPr>
             <a:lvl1pPr algn="l">
-              <a:defRPr sz="5025" b="1">
-                <a:solidFill>
-                  <a:srgbClr val="48DDCC"/>
+              <a:defRPr sz="1350" b="0">
+                <a:solidFill>
+                  <a:srgbClr val="AAB9D0"/>
                 </a:solidFill>
                 <a:latin typeface="Arial"/>
                 <a:ea typeface="Arial"/>
@@ -14199,9 +14270,9 @@
               </a:defRPr>
             </a:lvl1pPr>
             <a:lvl2pPr algn="l">
-              <a:defRPr sz="5025" b="1">
-                <a:solidFill>
-                  <a:srgbClr val="48DDCC"/>
+              <a:defRPr sz="1350" b="0">
+                <a:solidFill>
+                  <a:srgbClr val="AAB9D0"/>
                 </a:solidFill>
                 <a:latin typeface="Arial"/>
                 <a:ea typeface="Arial"/>
@@ -14209,9 +14280,9 @@
               </a:defRPr>
             </a:lvl2pPr>
             <a:lvl3pPr algn="l">
-              <a:defRPr sz="5025" b="1">
-                <a:solidFill>
-                  <a:srgbClr val="48DDCC"/>
+              <a:defRPr sz="1350" b="0">
+                <a:solidFill>
+                  <a:srgbClr val="AAB9D0"/>
                 </a:solidFill>
                 <a:latin typeface="Arial"/>
                 <a:ea typeface="Arial"/>
@@ -14219,9 +14290,9 @@
               </a:defRPr>
             </a:lvl3pPr>
             <a:lvl4pPr algn="l">
-              <a:defRPr sz="5025" b="1">
-                <a:solidFill>
-                  <a:srgbClr val="48DDCC"/>
+              <a:defRPr sz="1350" b="0">
+                <a:solidFill>
+                  <a:srgbClr val="AAB9D0"/>
                 </a:solidFill>
                 <a:latin typeface="Arial"/>
                 <a:ea typeface="Arial"/>
@@ -14229,9 +14300,9 @@
               </a:defRPr>
             </a:lvl4pPr>
             <a:lvl5pPr algn="l">
-              <a:defRPr sz="5025" b="1">
-                <a:solidFill>
-                  <a:srgbClr val="48DDCC"/>
+              <a:defRPr sz="1350" b="0">
+                <a:solidFill>
+                  <a:srgbClr val="AAB9D0"/>
                 </a:solidFill>
                 <a:latin typeface="Arial"/>
                 <a:ea typeface="Arial"/>
@@ -14239,9 +14310,9 @@
               </a:defRPr>
             </a:lvl5pPr>
             <a:lvl6pPr algn="l">
-              <a:defRPr sz="5025" b="1">
-                <a:solidFill>
-                  <a:srgbClr val="48DDCC"/>
+              <a:defRPr sz="1350" b="0">
+                <a:solidFill>
+                  <a:srgbClr val="AAB9D0"/>
                 </a:solidFill>
                 <a:latin typeface="Arial"/>
                 <a:ea typeface="Arial"/>
@@ -14249,9 +14320,9 @@
               </a:defRPr>
             </a:lvl6pPr>
             <a:lvl7pPr algn="l">
-              <a:defRPr sz="5025" b="1">
-                <a:solidFill>
-                  <a:srgbClr val="48DDCC"/>
+              <a:defRPr sz="1350" b="0">
+                <a:solidFill>
+                  <a:srgbClr val="AAB9D0"/>
                 </a:solidFill>
                 <a:latin typeface="Arial"/>
                 <a:ea typeface="Arial"/>
@@ -14259,9 +14330,9 @@
               </a:defRPr>
             </a:lvl7pPr>
             <a:lvl8pPr algn="l">
-              <a:defRPr sz="5025" b="1">
-                <a:solidFill>
-                  <a:srgbClr val="48DDCC"/>
+              <a:defRPr sz="1350" b="0">
+                <a:solidFill>
+                  <a:srgbClr val="AAB9D0"/>
                 </a:solidFill>
                 <a:latin typeface="Arial"/>
                 <a:ea typeface="Arial"/>
@@ -14269,9 +14340,9 @@
               </a:defRPr>
             </a:lvl8pPr>
             <a:lvl9pPr algn="l">
-              <a:defRPr sz="5025" b="1">
-                <a:solidFill>
-                  <a:srgbClr val="48DDCC"/>
+              <a:defRPr sz="1350" b="0">
+                <a:solidFill>
+                  <a:srgbClr val="AAB9D0"/>
                 </a:solidFill>
                 <a:latin typeface="Arial"/>
                 <a:ea typeface="Arial"/>
@@ -14281,9 +14352,9 @@
           </a:lstStyle>
           <a:p xmlns:a="http://schemas.openxmlformats.org/drawingml/2006/main">
             <a:pPr algn="l">
-              <a:defRPr sz="5025" b="1">
-                <a:solidFill>
-                  <a:srgbClr val="48DDCC"/>
+              <a:defRPr sz="1350" b="0">
+                <a:solidFill>
+                  <a:srgbClr val="AAB9D0"/>
                 </a:solidFill>
                 <a:latin typeface="Arial"/>
                 <a:ea typeface="Arial"/>
@@ -14291,25 +14362,25 @@
               </a:defRPr>
             </a:pPr>
             <a:r>
-              <a:rPr sz="5025" b="1">
-                <a:solidFill>
-                  <a:srgbClr val="48DDCC"/>
+              <a:rPr sz="1350" b="0">
+                <a:solidFill>
+                  <a:srgbClr val="AAB9D0"/>
                 </a:solidFill>
                 <a:latin typeface="Arial"/>
                 <a:ea typeface="Arial"/>
                 <a:cs typeface="Arial"/>
               </a:rPr>
-              <a:t>202</a:t>
+              <a:t>PHONE 2</a:t>
             </a:r>
           </a:p>
         </p:txBody>
       </p:sp>
       <p:sp>
         <p:nvSpPr>
-          <p:cNvPr id="6" name="PHONE B">
+          <p:cNvPr id="6" name="203 / 204">
             <a:extLst xmlns:a="http://schemas.openxmlformats.org/drawingml/2006/main">
               <a:ext uri="{FF2B5EF4-FFF2-40B4-BE49-F238E27FC236}">
-                <a16:creationId xmlns:a16="http://schemas.microsoft.com/office/drawing/2014/main" id="{252675E0-72ED-4679-ACA4-C8B9750D7577}"/>
+                <a16:creationId xmlns:a16="http://schemas.microsoft.com/office/drawing/2014/main" id="{7BACA42B-7490-48E0-9311-BFE59B9D0086}"/>
               </a:ext>
             </a:extLst>
           </p:cNvPr>
@@ -14320,8 +14391,8 @@
         </p:nvSpPr>
         <p:spPr>
           <a:xfrm xmlns:a="http://schemas.openxmlformats.org/drawingml/2006/main">
-            <a:off x="3448050" y="1619250"/>
-            <a:ext cx="2524125" cy="400050"/>
+            <a:off x="2895600" y="2114550"/>
+            <a:ext cx="2095500" cy="571500"/>
           </a:xfrm>
           <a:prstGeom xmlns:a="http://schemas.openxmlformats.org/drawingml/2006/main" prst="rect">
             <a:avLst/>
@@ -14337,9 +14408,9 @@
           </a:bodyPr>
           <a:lstStyle xmlns:a="http://schemas.openxmlformats.org/drawingml/2006/main">
             <a:defPPr algn="l">
-              <a:defRPr sz="1875" b="1">
-                <a:solidFill>
-                  <a:srgbClr val="AAB9D0"/>
+              <a:defRPr sz="2550" b="1">
+                <a:solidFill>
+                  <a:srgbClr val="48DDCC"/>
                 </a:solidFill>
                 <a:latin typeface="Arial"/>
                 <a:ea typeface="Arial"/>
@@ -14347,9 +14418,9 @@
               </a:defRPr>
             </a:defPPr>
             <a:lvl1pPr algn="l">
-              <a:defRPr sz="1875" b="1">
-                <a:solidFill>
-                  <a:srgbClr val="AAB9D0"/>
+              <a:defRPr sz="2550" b="1">
+                <a:solidFill>
+                  <a:srgbClr val="48DDCC"/>
                 </a:solidFill>
                 <a:latin typeface="Arial"/>
                 <a:ea typeface="Arial"/>
@@ -14357,9 +14428,9 @@
               </a:defRPr>
             </a:lvl1pPr>
             <a:lvl2pPr algn="l">
-              <a:defRPr sz="1875" b="1">
-                <a:solidFill>
-                  <a:srgbClr val="AAB9D0"/>
+              <a:defRPr sz="2550" b="1">
+                <a:solidFill>
+                  <a:srgbClr val="48DDCC"/>
                 </a:solidFill>
                 <a:latin typeface="Arial"/>
                 <a:ea typeface="Arial"/>
@@ -14367,9 +14438,9 @@
               </a:defRPr>
             </a:lvl2pPr>
             <a:lvl3pPr algn="l">
-              <a:defRPr sz="1875" b="1">
-                <a:solidFill>
-                  <a:srgbClr val="AAB9D0"/>
+              <a:defRPr sz="2550" b="1">
+                <a:solidFill>
+                  <a:srgbClr val="48DDCC"/>
                 </a:solidFill>
                 <a:latin typeface="Arial"/>
                 <a:ea typeface="Arial"/>
@@ -14377,9 +14448,9 @@
               </a:defRPr>
             </a:lvl3pPr>
             <a:lvl4pPr algn="l">
-              <a:defRPr sz="1875" b="1">
-                <a:solidFill>
-                  <a:srgbClr val="AAB9D0"/>
+              <a:defRPr sz="2550" b="1">
+                <a:solidFill>
+                  <a:srgbClr val="48DDCC"/>
                 </a:solidFill>
                 <a:latin typeface="Arial"/>
                 <a:ea typeface="Arial"/>
@@ -14387,9 +14458,9 @@
               </a:defRPr>
             </a:lvl4pPr>
             <a:lvl5pPr algn="l">
-              <a:defRPr sz="1875" b="1">
-                <a:solidFill>
-                  <a:srgbClr val="AAB9D0"/>
+              <a:defRPr sz="2550" b="1">
+                <a:solidFill>
+                  <a:srgbClr val="48DDCC"/>
                 </a:solidFill>
                 <a:latin typeface="Arial"/>
                 <a:ea typeface="Arial"/>
@@ -14397,9 +14468,9 @@
               </a:defRPr>
             </a:lvl5pPr>
             <a:lvl6pPr algn="l">
-              <a:defRPr sz="1875" b="1">
-                <a:solidFill>
-                  <a:srgbClr val="AAB9D0"/>
+              <a:defRPr sz="2550" b="1">
+                <a:solidFill>
+                  <a:srgbClr val="48DDCC"/>
                 </a:solidFill>
                 <a:latin typeface="Arial"/>
                 <a:ea typeface="Arial"/>
@@ -14407,9 +14478,9 @@
               </a:defRPr>
             </a:lvl6pPr>
             <a:lvl7pPr algn="l">
-              <a:defRPr sz="1875" b="1">
-                <a:solidFill>
-                  <a:srgbClr val="AAB9D0"/>
+              <a:defRPr sz="2550" b="1">
+                <a:solidFill>
+                  <a:srgbClr val="48DDCC"/>
                 </a:solidFill>
                 <a:latin typeface="Arial"/>
                 <a:ea typeface="Arial"/>
@@ -14417,9 +14488,9 @@
               </a:defRPr>
             </a:lvl7pPr>
             <a:lvl8pPr algn="l">
-              <a:defRPr sz="1875" b="1">
-                <a:solidFill>
-                  <a:srgbClr val="AAB9D0"/>
+              <a:defRPr sz="2550" b="1">
+                <a:solidFill>
+                  <a:srgbClr val="48DDCC"/>
                 </a:solidFill>
                 <a:latin typeface="Arial"/>
                 <a:ea typeface="Arial"/>
@@ -14427,9 +14498,9 @@
               </a:defRPr>
             </a:lvl8pPr>
             <a:lvl9pPr algn="l">
-              <a:defRPr sz="1875" b="1">
-                <a:solidFill>
-                  <a:srgbClr val="AAB9D0"/>
+              <a:defRPr sz="2550" b="1">
+                <a:solidFill>
+                  <a:srgbClr val="48DDCC"/>
                 </a:solidFill>
                 <a:latin typeface="Arial"/>
                 <a:ea typeface="Arial"/>
@@ -14439,9 +14510,9 @@
           </a:lstStyle>
           <a:p xmlns:a="http://schemas.openxmlformats.org/drawingml/2006/main">
             <a:pPr algn="l">
-              <a:defRPr sz="1875" b="1">
-                <a:solidFill>
-                  <a:srgbClr val="AAB9D0"/>
+              <a:defRPr sz="2550" b="1">
+                <a:solidFill>
+                  <a:srgbClr val="48DDCC"/>
                 </a:solidFill>
                 <a:latin typeface="Arial"/>
                 <a:ea typeface="Arial"/>
@@ -14449,25 +14520,25 @@
               </a:defRPr>
             </a:pPr>
             <a:r>
-              <a:rPr sz="1875" b="1">
-                <a:solidFill>
-                  <a:srgbClr val="AAB9D0"/>
+              <a:rPr sz="2550" b="1">
+                <a:solidFill>
+                  <a:srgbClr val="48DDCC"/>
                 </a:solidFill>
                 <a:latin typeface="Arial"/>
                 <a:ea typeface="Arial"/>
                 <a:cs typeface="Arial"/>
               </a:rPr>
-              <a:t>PHONE B</a:t>
+              <a:t>203 / 204</a:t>
             </a:r>
           </a:p>
         </p:txBody>
       </p:sp>
       <p:sp>
         <p:nvSpPr>
-          <p:cNvPr id="7" name="203">
+          <p:cNvPr id="7" name="PHONE 3">
             <a:extLst xmlns:a="http://schemas.openxmlformats.org/drawingml/2006/main">
               <a:ext uri="{FF2B5EF4-FFF2-40B4-BE49-F238E27FC236}">
-                <a16:creationId xmlns:a16="http://schemas.microsoft.com/office/drawing/2014/main" id="{9B36E4D8-2641-4516-A7B9-E3B7B2E39CFB}"/>
+                <a16:creationId xmlns:a16="http://schemas.microsoft.com/office/drawing/2014/main" id="{996D611C-569E-4A91-9312-03AA3C5A6A23}"/>
               </a:ext>
             </a:extLst>
           </p:cNvPr>
@@ -14478,8 +14549,8 @@
         </p:nvSpPr>
         <p:spPr>
           <a:xfrm xmlns:a="http://schemas.openxmlformats.org/drawingml/2006/main">
-            <a:off x="3448050" y="2266950"/>
-            <a:ext cx="2524125" cy="838200"/>
+            <a:off x="5219700" y="1685925"/>
+            <a:ext cx="2095500" cy="333375"/>
           </a:xfrm>
           <a:prstGeom xmlns:a="http://schemas.openxmlformats.org/drawingml/2006/main" prst="rect">
             <a:avLst/>
@@ -14495,9 +14566,9 @@
           </a:bodyPr>
           <a:lstStyle xmlns:a="http://schemas.openxmlformats.org/drawingml/2006/main">
             <a:defPPr algn="l">
-              <a:defRPr sz="5025" b="1">
-                <a:solidFill>
-                  <a:srgbClr val="FF836D"/>
+              <a:defRPr sz="1350" b="0">
+                <a:solidFill>
+                  <a:srgbClr val="AAB9D0"/>
                 </a:solidFill>
                 <a:latin typeface="Arial"/>
                 <a:ea typeface="Arial"/>
@@ -14505,9 +14576,9 @@
               </a:defRPr>
             </a:defPPr>
             <a:lvl1pPr algn="l">
-              <a:defRPr sz="5025" b="1">
-                <a:solidFill>
-                  <a:srgbClr val="FF836D"/>
+              <a:defRPr sz="1350" b="0">
+                <a:solidFill>
+                  <a:srgbClr val="AAB9D0"/>
                 </a:solidFill>
                 <a:latin typeface="Arial"/>
                 <a:ea typeface="Arial"/>
@@ -14515,9 +14586,9 @@
               </a:defRPr>
             </a:lvl1pPr>
             <a:lvl2pPr algn="l">
-              <a:defRPr sz="5025" b="1">
-                <a:solidFill>
-                  <a:srgbClr val="FF836D"/>
+              <a:defRPr sz="1350" b="0">
+                <a:solidFill>
+                  <a:srgbClr val="AAB9D0"/>
                 </a:solidFill>
                 <a:latin typeface="Arial"/>
                 <a:ea typeface="Arial"/>
@@ -14525,9 +14596,9 @@
               </a:defRPr>
             </a:lvl2pPr>
             <a:lvl3pPr algn="l">
-              <a:defRPr sz="5025" b="1">
-                <a:solidFill>
-                  <a:srgbClr val="FF836D"/>
+              <a:defRPr sz="1350" b="0">
+                <a:solidFill>
+                  <a:srgbClr val="AAB9D0"/>
                 </a:solidFill>
                 <a:latin typeface="Arial"/>
                 <a:ea typeface="Arial"/>
@@ -14535,9 +14606,9 @@
               </a:defRPr>
             </a:lvl3pPr>
             <a:lvl4pPr algn="l">
-              <a:defRPr sz="5025" b="1">
-                <a:solidFill>
-                  <a:srgbClr val="FF836D"/>
+              <a:defRPr sz="1350" b="0">
+                <a:solidFill>
+                  <a:srgbClr val="AAB9D0"/>
                 </a:solidFill>
                 <a:latin typeface="Arial"/>
                 <a:ea typeface="Arial"/>
@@ -14545,9 +14616,9 @@
               </a:defRPr>
             </a:lvl4pPr>
             <a:lvl5pPr algn="l">
-              <a:defRPr sz="5025" b="1">
-                <a:solidFill>
-                  <a:srgbClr val="FF836D"/>
+              <a:defRPr sz="1350" b="0">
+                <a:solidFill>
+                  <a:srgbClr val="AAB9D0"/>
                 </a:solidFill>
                 <a:latin typeface="Arial"/>
                 <a:ea typeface="Arial"/>
@@ -14555,9 +14626,9 @@
               </a:defRPr>
             </a:lvl5pPr>
             <a:lvl6pPr algn="l">
-              <a:defRPr sz="5025" b="1">
-                <a:solidFill>
-                  <a:srgbClr val="FF836D"/>
+              <a:defRPr sz="1350" b="0">
+                <a:solidFill>
+                  <a:srgbClr val="AAB9D0"/>
                 </a:solidFill>
                 <a:latin typeface="Arial"/>
                 <a:ea typeface="Arial"/>
@@ -14565,9 +14636,9 @@
               </a:defRPr>
             </a:lvl6pPr>
             <a:lvl7pPr algn="l">
-              <a:defRPr sz="5025" b="1">
-                <a:solidFill>
-                  <a:srgbClr val="FF836D"/>
+              <a:defRPr sz="1350" b="0">
+                <a:solidFill>
+                  <a:srgbClr val="AAB9D0"/>
                 </a:solidFill>
                 <a:latin typeface="Arial"/>
                 <a:ea typeface="Arial"/>
@@ -14575,9 +14646,9 @@
               </a:defRPr>
             </a:lvl7pPr>
             <a:lvl8pPr algn="l">
-              <a:defRPr sz="5025" b="1">
-                <a:solidFill>
-                  <a:srgbClr val="FF836D"/>
+              <a:defRPr sz="1350" b="0">
+                <a:solidFill>
+                  <a:srgbClr val="AAB9D0"/>
                 </a:solidFill>
                 <a:latin typeface="Arial"/>
                 <a:ea typeface="Arial"/>
@@ -14585,9 +14656,9 @@
               </a:defRPr>
             </a:lvl8pPr>
             <a:lvl9pPr algn="l">
-              <a:defRPr sz="5025" b="1">
-                <a:solidFill>
-                  <a:srgbClr val="FF836D"/>
+              <a:defRPr sz="1350" b="0">
+                <a:solidFill>
+                  <a:srgbClr val="AAB9D0"/>
                 </a:solidFill>
                 <a:latin typeface="Arial"/>
                 <a:ea typeface="Arial"/>
@@ -14597,9 +14668,9 @@
           </a:lstStyle>
           <a:p xmlns:a="http://schemas.openxmlformats.org/drawingml/2006/main">
             <a:pPr algn="l">
-              <a:defRPr sz="5025" b="1">
-                <a:solidFill>
-                  <a:srgbClr val="FF836D"/>
+              <a:defRPr sz="1350" b="0">
+                <a:solidFill>
+                  <a:srgbClr val="AAB9D0"/>
                 </a:solidFill>
                 <a:latin typeface="Arial"/>
                 <a:ea typeface="Arial"/>
@@ -14607,25 +14678,25 @@
               </a:defRPr>
             </a:pPr>
             <a:r>
-              <a:rPr sz="5025" b="1">
-                <a:solidFill>
-                  <a:srgbClr val="FF836D"/>
+              <a:rPr sz="1350" b="0">
+                <a:solidFill>
+                  <a:srgbClr val="AAB9D0"/>
                 </a:solidFill>
                 <a:latin typeface="Arial"/>
                 <a:ea typeface="Arial"/>
                 <a:cs typeface="Arial"/>
               </a:rPr>
-              <a:t>203</a:t>
+              <a:t>PHONE 3</a:t>
             </a:r>
           </a:p>
         </p:txBody>
       </p:sp>
       <p:sp>
         <p:nvSpPr>
-          <p:cNvPr id="8" name="204">
+          <p:cNvPr id="8" name="205 / 206">
             <a:extLst xmlns:a="http://schemas.openxmlformats.org/drawingml/2006/main">
               <a:ext uri="{FF2B5EF4-FFF2-40B4-BE49-F238E27FC236}">
-                <a16:creationId xmlns:a16="http://schemas.microsoft.com/office/drawing/2014/main" id="{C5B072E6-A391-4AD9-A979-6A232CC0529E}"/>
+                <a16:creationId xmlns:a16="http://schemas.microsoft.com/office/drawing/2014/main" id="{1DAD76F8-9559-481F-AEEA-C87F37CB1A51}"/>
               </a:ext>
             </a:extLst>
           </p:cNvPr>
@@ -14636,8 +14707,8 @@
         </p:nvSpPr>
         <p:spPr>
           <a:xfrm xmlns:a="http://schemas.openxmlformats.org/drawingml/2006/main">
-            <a:off x="3448050" y="3238500"/>
-            <a:ext cx="2524125" cy="838200"/>
+            <a:off x="5219700" y="2114550"/>
+            <a:ext cx="2095500" cy="571500"/>
           </a:xfrm>
           <a:prstGeom xmlns:a="http://schemas.openxmlformats.org/drawingml/2006/main" prst="rect">
             <a:avLst/>
@@ -14653,9 +14724,9 @@
           </a:bodyPr>
           <a:lstStyle xmlns:a="http://schemas.openxmlformats.org/drawingml/2006/main">
             <a:defPPr algn="l">
-              <a:defRPr sz="5025" b="1">
-                <a:solidFill>
-                  <a:srgbClr val="FF836D"/>
+              <a:defRPr sz="2550" b="1">
+                <a:solidFill>
+                  <a:srgbClr val="48DDCC"/>
                 </a:solidFill>
                 <a:latin typeface="Arial"/>
                 <a:ea typeface="Arial"/>
@@ -14663,9 +14734,9 @@
               </a:defRPr>
             </a:defPPr>
             <a:lvl1pPr algn="l">
-              <a:defRPr sz="5025" b="1">
-                <a:solidFill>
-                  <a:srgbClr val="FF836D"/>
+              <a:defRPr sz="2550" b="1">
+                <a:solidFill>
+                  <a:srgbClr val="48DDCC"/>
                 </a:solidFill>
                 <a:latin typeface="Arial"/>
                 <a:ea typeface="Arial"/>
@@ -14673,9 +14744,9 @@
               </a:defRPr>
             </a:lvl1pPr>
             <a:lvl2pPr algn="l">
-              <a:defRPr sz="5025" b="1">
-                <a:solidFill>
-                  <a:srgbClr val="FF836D"/>
+              <a:defRPr sz="2550" b="1">
+                <a:solidFill>
+                  <a:srgbClr val="48DDCC"/>
                 </a:solidFill>
                 <a:latin typeface="Arial"/>
                 <a:ea typeface="Arial"/>
@@ -14683,9 +14754,9 @@
               </a:defRPr>
             </a:lvl2pPr>
             <a:lvl3pPr algn="l">
-              <a:defRPr sz="5025" b="1">
-                <a:solidFill>
-                  <a:srgbClr val="FF836D"/>
+              <a:defRPr sz="2550" b="1">
+                <a:solidFill>
+                  <a:srgbClr val="48DDCC"/>
                 </a:solidFill>
                 <a:latin typeface="Arial"/>
                 <a:ea typeface="Arial"/>
@@ -14693,9 +14764,9 @@
               </a:defRPr>
             </a:lvl3pPr>
             <a:lvl4pPr algn="l">
-              <a:defRPr sz="5025" b="1">
-                <a:solidFill>
-                  <a:srgbClr val="FF836D"/>
+              <a:defRPr sz="2550" b="1">
+                <a:solidFill>
+                  <a:srgbClr val="48DDCC"/>
                 </a:solidFill>
                 <a:latin typeface="Arial"/>
                 <a:ea typeface="Arial"/>
@@ -14703,9 +14774,9 @@
               </a:defRPr>
             </a:lvl4pPr>
             <a:lvl5pPr algn="l">
-              <a:defRPr sz="5025" b="1">
-                <a:solidFill>
-                  <a:srgbClr val="FF836D"/>
+              <a:defRPr sz="2550" b="1">
+                <a:solidFill>
+                  <a:srgbClr val="48DDCC"/>
                 </a:solidFill>
                 <a:latin typeface="Arial"/>
                 <a:ea typeface="Arial"/>
@@ -14713,9 +14784,9 @@
               </a:defRPr>
             </a:lvl5pPr>
             <a:lvl6pPr algn="l">
-              <a:defRPr sz="5025" b="1">
-                <a:solidFill>
-                  <a:srgbClr val="FF836D"/>
+              <a:defRPr sz="2550" b="1">
+                <a:solidFill>
+                  <a:srgbClr val="48DDCC"/>
                 </a:solidFill>
                 <a:latin typeface="Arial"/>
                 <a:ea typeface="Arial"/>
@@ -14723,9 +14794,9 @@
               </a:defRPr>
             </a:lvl6pPr>
             <a:lvl7pPr algn="l">
-              <a:defRPr sz="5025" b="1">
-                <a:solidFill>
-                  <a:srgbClr val="FF836D"/>
+              <a:defRPr sz="2550" b="1">
+                <a:solidFill>
+                  <a:srgbClr val="48DDCC"/>
                 </a:solidFill>
                 <a:latin typeface="Arial"/>
                 <a:ea typeface="Arial"/>
@@ -14733,9 +14804,9 @@
               </a:defRPr>
             </a:lvl7pPr>
             <a:lvl8pPr algn="l">
-              <a:defRPr sz="5025" b="1">
-                <a:solidFill>
-                  <a:srgbClr val="FF836D"/>
+              <a:defRPr sz="2550" b="1">
+                <a:solidFill>
+                  <a:srgbClr val="48DDCC"/>
                 </a:solidFill>
                 <a:latin typeface="Arial"/>
                 <a:ea typeface="Arial"/>
@@ -14743,9 +14814,9 @@
               </a:defRPr>
             </a:lvl8pPr>
             <a:lvl9pPr algn="l">
-              <a:defRPr sz="5025" b="1">
-                <a:solidFill>
-                  <a:srgbClr val="FF836D"/>
+              <a:defRPr sz="2550" b="1">
+                <a:solidFill>
+                  <a:srgbClr val="48DDCC"/>
                 </a:solidFill>
                 <a:latin typeface="Arial"/>
                 <a:ea typeface="Arial"/>
@@ -14755,9 +14826,9 @@
           </a:lstStyle>
           <a:p xmlns:a="http://schemas.openxmlformats.org/drawingml/2006/main">
             <a:pPr algn="l">
-              <a:defRPr sz="5025" b="1">
-                <a:solidFill>
-                  <a:srgbClr val="FF836D"/>
+              <a:defRPr sz="2550" b="1">
+                <a:solidFill>
+                  <a:srgbClr val="48DDCC"/>
                 </a:solidFill>
                 <a:latin typeface="Arial"/>
                 <a:ea typeface="Arial"/>
@@ -14765,25 +14836,25 @@
               </a:defRPr>
             </a:pPr>
             <a:r>
-              <a:rPr sz="5025" b="1">
-                <a:solidFill>
-                  <a:srgbClr val="FF836D"/>
+              <a:rPr sz="2550" b="1">
+                <a:solidFill>
+                  <a:srgbClr val="48DDCC"/>
                 </a:solidFill>
                 <a:latin typeface="Arial"/>
                 <a:ea typeface="Arial"/>
                 <a:cs typeface="Arial"/>
               </a:rPr>
-              <a:t>204</a:t>
+              <a:t>205 / 206</a:t>
             </a:r>
           </a:p>
         </p:txBody>
       </p:sp>
       <p:sp>
         <p:nvSpPr>
-          <p:cNvPr id="9" name="PHONE C">
+          <p:cNvPr id="9" name="PHONE 4">
             <a:extLst xmlns:a="http://schemas.openxmlformats.org/drawingml/2006/main">
               <a:ext uri="{FF2B5EF4-FFF2-40B4-BE49-F238E27FC236}">
-                <a16:creationId xmlns:a16="http://schemas.microsoft.com/office/drawing/2014/main" id="{9FA2A778-0409-4E00-9DA7-F4635D79DA6F}"/>
+                <a16:creationId xmlns:a16="http://schemas.microsoft.com/office/drawing/2014/main" id="{EA220445-A418-496B-ABAB-3E26F72985C3}"/>
               </a:ext>
             </a:extLst>
           </p:cNvPr>
@@ -14794,8 +14865,8 @@
         </p:nvSpPr>
         <p:spPr>
           <a:xfrm xmlns:a="http://schemas.openxmlformats.org/drawingml/2006/main">
-            <a:off x="6324600" y="1619250"/>
-            <a:ext cx="2524125" cy="400050"/>
+            <a:off x="7543800" y="1685925"/>
+            <a:ext cx="2095500" cy="333375"/>
           </a:xfrm>
           <a:prstGeom xmlns:a="http://schemas.openxmlformats.org/drawingml/2006/main" prst="rect">
             <a:avLst/>
@@ -14811,7 +14882,7 @@
           </a:bodyPr>
           <a:lstStyle xmlns:a="http://schemas.openxmlformats.org/drawingml/2006/main">
             <a:defPPr algn="l">
-              <a:defRPr sz="1875" b="1">
+              <a:defRPr sz="1350" b="0">
                 <a:solidFill>
                   <a:srgbClr val="AAB9D0"/>
                 </a:solidFill>
@@ -14821,7 +14892,7 @@
               </a:defRPr>
             </a:defPPr>
             <a:lvl1pPr algn="l">
-              <a:defRPr sz="1875" b="1">
+              <a:defRPr sz="1350" b="0">
                 <a:solidFill>
                   <a:srgbClr val="AAB9D0"/>
                 </a:solidFill>
@@ -14831,7 +14902,7 @@
               </a:defRPr>
             </a:lvl1pPr>
             <a:lvl2pPr algn="l">
-              <a:defRPr sz="1875" b="1">
+              <a:defRPr sz="1350" b="0">
                 <a:solidFill>
                   <a:srgbClr val="AAB9D0"/>
                 </a:solidFill>
@@ -14841,7 +14912,7 @@
               </a:defRPr>
             </a:lvl2pPr>
             <a:lvl3pPr algn="l">
-              <a:defRPr sz="1875" b="1">
+              <a:defRPr sz="1350" b="0">
                 <a:solidFill>
                   <a:srgbClr val="AAB9D0"/>
                 </a:solidFill>
@@ -14851,7 +14922,7 @@
               </a:defRPr>
             </a:lvl3pPr>
             <a:lvl4pPr algn="l">
-              <a:defRPr sz="1875" b="1">
+              <a:defRPr sz="1350" b="0">
                 <a:solidFill>
                   <a:srgbClr val="AAB9D0"/>
                 </a:solidFill>
@@ -14861,7 +14932,7 @@
               </a:defRPr>
             </a:lvl4pPr>
             <a:lvl5pPr algn="l">
-              <a:defRPr sz="1875" b="1">
+              <a:defRPr sz="1350" b="0">
                 <a:solidFill>
                   <a:srgbClr val="AAB9D0"/>
                 </a:solidFill>
@@ -14871,7 +14942,7 @@
               </a:defRPr>
             </a:lvl5pPr>
             <a:lvl6pPr algn="l">
-              <a:defRPr sz="1875" b="1">
+              <a:defRPr sz="1350" b="0">
                 <a:solidFill>
                   <a:srgbClr val="AAB9D0"/>
                 </a:solidFill>
@@ -14881,7 +14952,7 @@
               </a:defRPr>
             </a:lvl6pPr>
             <a:lvl7pPr algn="l">
-              <a:defRPr sz="1875" b="1">
+              <a:defRPr sz="1350" b="0">
                 <a:solidFill>
                   <a:srgbClr val="AAB9D0"/>
                 </a:solidFill>
@@ -14891,7 +14962,7 @@
               </a:defRPr>
             </a:lvl7pPr>
             <a:lvl8pPr algn="l">
-              <a:defRPr sz="1875" b="1">
+              <a:defRPr sz="1350" b="0">
                 <a:solidFill>
                   <a:srgbClr val="AAB9D0"/>
                 </a:solidFill>
@@ -14901,7 +14972,7 @@
               </a:defRPr>
             </a:lvl8pPr>
             <a:lvl9pPr algn="l">
-              <a:defRPr sz="1875" b="1">
+              <a:defRPr sz="1350" b="0">
                 <a:solidFill>
                   <a:srgbClr val="AAB9D0"/>
                 </a:solidFill>
@@ -14913,7 +14984,7 @@
           </a:lstStyle>
           <a:p xmlns:a="http://schemas.openxmlformats.org/drawingml/2006/main">
             <a:pPr algn="l">
-              <a:defRPr sz="1875" b="1">
+              <a:defRPr sz="1350" b="0">
                 <a:solidFill>
                   <a:srgbClr val="AAB9D0"/>
                 </a:solidFill>
@@ -14923,7 +14994,7 @@
               </a:defRPr>
             </a:pPr>
             <a:r>
-              <a:rPr sz="1875" b="1">
+              <a:rPr sz="1350" b="0">
                 <a:solidFill>
                   <a:srgbClr val="AAB9D0"/>
                 </a:solidFill>
@@ -14931,17 +15002,17 @@
                 <a:ea typeface="Arial"/>
                 <a:cs typeface="Arial"/>
               </a:rPr>
-              <a:t>PHONE C</a:t>
+              <a:t>PHONE 4</a:t>
             </a:r>
           </a:p>
         </p:txBody>
       </p:sp>
       <p:sp>
         <p:nvSpPr>
-          <p:cNvPr id="10" name="205">
+          <p:cNvPr id="10" name="207 / 208">
             <a:extLst xmlns:a="http://schemas.openxmlformats.org/drawingml/2006/main">
               <a:ext uri="{FF2B5EF4-FFF2-40B4-BE49-F238E27FC236}">
-                <a16:creationId xmlns:a16="http://schemas.microsoft.com/office/drawing/2014/main" id="{AD5D6962-B72E-48D5-8FC5-CFB6F071B0D4}"/>
+                <a16:creationId xmlns:a16="http://schemas.microsoft.com/office/drawing/2014/main" id="{CDAC0B28-27FC-4BFA-AEC4-8F4DF6988F48}"/>
               </a:ext>
             </a:extLst>
           </p:cNvPr>
@@ -14952,8 +15023,8 @@
         </p:nvSpPr>
         <p:spPr>
           <a:xfrm xmlns:a="http://schemas.openxmlformats.org/drawingml/2006/main">
-            <a:off x="6324600" y="2266950"/>
-            <a:ext cx="2524125" cy="838200"/>
+            <a:off x="7543800" y="2114550"/>
+            <a:ext cx="2095500" cy="571500"/>
           </a:xfrm>
           <a:prstGeom xmlns:a="http://schemas.openxmlformats.org/drawingml/2006/main" prst="rect">
             <a:avLst/>
@@ -14969,9 +15040,9 @@
           </a:bodyPr>
           <a:lstStyle xmlns:a="http://schemas.openxmlformats.org/drawingml/2006/main">
             <a:defPPr algn="l">
-              <a:defRPr sz="5025" b="1">
-                <a:solidFill>
-                  <a:srgbClr val="F7CB64"/>
+              <a:defRPr sz="2550" b="1">
+                <a:solidFill>
+                  <a:srgbClr val="48DDCC"/>
                 </a:solidFill>
                 <a:latin typeface="Arial"/>
                 <a:ea typeface="Arial"/>
@@ -14979,9 +15050,9 @@
               </a:defRPr>
             </a:defPPr>
             <a:lvl1pPr algn="l">
-              <a:defRPr sz="5025" b="1">
-                <a:solidFill>
-                  <a:srgbClr val="F7CB64"/>
+              <a:defRPr sz="2550" b="1">
+                <a:solidFill>
+                  <a:srgbClr val="48DDCC"/>
                 </a:solidFill>
                 <a:latin typeface="Arial"/>
                 <a:ea typeface="Arial"/>
@@ -14989,9 +15060,9 @@
               </a:defRPr>
             </a:lvl1pPr>
             <a:lvl2pPr algn="l">
-              <a:defRPr sz="5025" b="1">
-                <a:solidFill>
-                  <a:srgbClr val="F7CB64"/>
+              <a:defRPr sz="2550" b="1">
+                <a:solidFill>
+                  <a:srgbClr val="48DDCC"/>
                 </a:solidFill>
                 <a:latin typeface="Arial"/>
                 <a:ea typeface="Arial"/>
@@ -14999,9 +15070,9 @@
               </a:defRPr>
             </a:lvl2pPr>
             <a:lvl3pPr algn="l">
-              <a:defRPr sz="5025" b="1">
-                <a:solidFill>
-                  <a:srgbClr val="F7CB64"/>
+              <a:defRPr sz="2550" b="1">
+                <a:solidFill>
+                  <a:srgbClr val="48DDCC"/>
                 </a:solidFill>
                 <a:latin typeface="Arial"/>
                 <a:ea typeface="Arial"/>
@@ -15009,9 +15080,9 @@
               </a:defRPr>
             </a:lvl3pPr>
             <a:lvl4pPr algn="l">
-              <a:defRPr sz="5025" b="1">
-                <a:solidFill>
-                  <a:srgbClr val="F7CB64"/>
+              <a:defRPr sz="2550" b="1">
+                <a:solidFill>
+                  <a:srgbClr val="48DDCC"/>
                 </a:solidFill>
                 <a:latin typeface="Arial"/>
                 <a:ea typeface="Arial"/>
@@ -15019,9 +15090,9 @@
               </a:defRPr>
             </a:lvl4pPr>
             <a:lvl5pPr algn="l">
-              <a:defRPr sz="5025" b="1">
-                <a:solidFill>
-                  <a:srgbClr val="F7CB64"/>
+              <a:defRPr sz="2550" b="1">
+                <a:solidFill>
+                  <a:srgbClr val="48DDCC"/>
                 </a:solidFill>
                 <a:latin typeface="Arial"/>
                 <a:ea typeface="Arial"/>
@@ -15029,9 +15100,9 @@
               </a:defRPr>
             </a:lvl5pPr>
             <a:lvl6pPr algn="l">
-              <a:defRPr sz="5025" b="1">
-                <a:solidFill>
-                  <a:srgbClr val="F7CB64"/>
+              <a:defRPr sz="2550" b="1">
+                <a:solidFill>
+                  <a:srgbClr val="48DDCC"/>
                 </a:solidFill>
                 <a:latin typeface="Arial"/>
                 <a:ea typeface="Arial"/>
@@ -15039,9 +15110,9 @@
               </a:defRPr>
             </a:lvl6pPr>
             <a:lvl7pPr algn="l">
-              <a:defRPr sz="5025" b="1">
-                <a:solidFill>
-                  <a:srgbClr val="F7CB64"/>
+              <a:defRPr sz="2550" b="1">
+                <a:solidFill>
+                  <a:srgbClr val="48DDCC"/>
                 </a:solidFill>
                 <a:latin typeface="Arial"/>
                 <a:ea typeface="Arial"/>
@@ -15049,9 +15120,9 @@
               </a:defRPr>
             </a:lvl7pPr>
             <a:lvl8pPr algn="l">
-              <a:defRPr sz="5025" b="1">
-                <a:solidFill>
-                  <a:srgbClr val="F7CB64"/>
+              <a:defRPr sz="2550" b="1">
+                <a:solidFill>
+                  <a:srgbClr val="48DDCC"/>
                 </a:solidFill>
                 <a:latin typeface="Arial"/>
                 <a:ea typeface="Arial"/>
@@ -15059,9 +15130,9 @@
               </a:defRPr>
             </a:lvl8pPr>
             <a:lvl9pPr algn="l">
-              <a:defRPr sz="5025" b="1">
-                <a:solidFill>
-                  <a:srgbClr val="F7CB64"/>
+              <a:defRPr sz="2550" b="1">
+                <a:solidFill>
+                  <a:srgbClr val="48DDCC"/>
                 </a:solidFill>
                 <a:latin typeface="Arial"/>
                 <a:ea typeface="Arial"/>
@@ -15071,9 +15142,9 @@
           </a:lstStyle>
           <a:p xmlns:a="http://schemas.openxmlformats.org/drawingml/2006/main">
             <a:pPr algn="l">
-              <a:defRPr sz="5025" b="1">
-                <a:solidFill>
-                  <a:srgbClr val="F7CB64"/>
+              <a:defRPr sz="2550" b="1">
+                <a:solidFill>
+                  <a:srgbClr val="48DDCC"/>
                 </a:solidFill>
                 <a:latin typeface="Arial"/>
                 <a:ea typeface="Arial"/>
@@ -15081,25 +15152,25 @@
               </a:defRPr>
             </a:pPr>
             <a:r>
-              <a:rPr sz="5025" b="1">
-                <a:solidFill>
-                  <a:srgbClr val="F7CB64"/>
+              <a:rPr sz="2550" b="1">
+                <a:solidFill>
+                  <a:srgbClr val="48DDCC"/>
                 </a:solidFill>
                 <a:latin typeface="Arial"/>
                 <a:ea typeface="Arial"/>
                 <a:cs typeface="Arial"/>
               </a:rPr>
-              <a:t>205</a:t>
+              <a:t>207 / 208</a:t>
             </a:r>
           </a:p>
         </p:txBody>
       </p:sp>
       <p:sp>
         <p:nvSpPr>
-          <p:cNvPr id="11" name="206">
+          <p:cNvPr id="11" name="PHONE 5">
             <a:extLst xmlns:a="http://schemas.openxmlformats.org/drawingml/2006/main">
               <a:ext uri="{FF2B5EF4-FFF2-40B4-BE49-F238E27FC236}">
-                <a16:creationId xmlns:a16="http://schemas.microsoft.com/office/drawing/2014/main" id="{C50481F3-B843-46EA-96E9-7F08C55677BB}"/>
+                <a16:creationId xmlns:a16="http://schemas.microsoft.com/office/drawing/2014/main" id="{6FB2E825-CCE8-4774-9376-50C249DF59BE}"/>
               </a:ext>
             </a:extLst>
           </p:cNvPr>
@@ -15110,8 +15181,8 @@
         </p:nvSpPr>
         <p:spPr>
           <a:xfrm xmlns:a="http://schemas.openxmlformats.org/drawingml/2006/main">
-            <a:off x="6324600" y="3238500"/>
-            <a:ext cx="2524125" cy="838200"/>
+            <a:off x="9867900" y="1685925"/>
+            <a:ext cx="2095500" cy="333375"/>
           </a:xfrm>
           <a:prstGeom xmlns:a="http://schemas.openxmlformats.org/drawingml/2006/main" prst="rect">
             <a:avLst/>
@@ -15127,9 +15198,9 @@
           </a:bodyPr>
           <a:lstStyle xmlns:a="http://schemas.openxmlformats.org/drawingml/2006/main">
             <a:defPPr algn="l">
-              <a:defRPr sz="5025" b="1">
-                <a:solidFill>
-                  <a:srgbClr val="F7CB64"/>
+              <a:defRPr sz="1350" b="0">
+                <a:solidFill>
+                  <a:srgbClr val="AAB9D0"/>
                 </a:solidFill>
                 <a:latin typeface="Arial"/>
                 <a:ea typeface="Arial"/>
@@ -15137,9 +15208,9 @@
               </a:defRPr>
             </a:defPPr>
             <a:lvl1pPr algn="l">
-              <a:defRPr sz="5025" b="1">
-                <a:solidFill>
-                  <a:srgbClr val="F7CB64"/>
+              <a:defRPr sz="1350" b="0">
+                <a:solidFill>
+                  <a:srgbClr val="AAB9D0"/>
                 </a:solidFill>
                 <a:latin typeface="Arial"/>
                 <a:ea typeface="Arial"/>
@@ -15147,9 +15218,9 @@
               </a:defRPr>
             </a:lvl1pPr>
             <a:lvl2pPr algn="l">
-              <a:defRPr sz="5025" b="1">
-                <a:solidFill>
-                  <a:srgbClr val="F7CB64"/>
+              <a:defRPr sz="1350" b="0">
+                <a:solidFill>
+                  <a:srgbClr val="AAB9D0"/>
                 </a:solidFill>
                 <a:latin typeface="Arial"/>
                 <a:ea typeface="Arial"/>
@@ -15157,9 +15228,9 @@
               </a:defRPr>
             </a:lvl2pPr>
             <a:lvl3pPr algn="l">
-              <a:defRPr sz="5025" b="1">
-                <a:solidFill>
-                  <a:srgbClr val="F7CB64"/>
+              <a:defRPr sz="1350" b="0">
+                <a:solidFill>
+                  <a:srgbClr val="AAB9D0"/>
                 </a:solidFill>
                 <a:latin typeface="Arial"/>
                 <a:ea typeface="Arial"/>
@@ -15167,9 +15238,9 @@
               </a:defRPr>
             </a:lvl3pPr>
             <a:lvl4pPr algn="l">
-              <a:defRPr sz="5025" b="1">
-                <a:solidFill>
-                  <a:srgbClr val="F7CB64"/>
+              <a:defRPr sz="1350" b="0">
+                <a:solidFill>
+                  <a:srgbClr val="AAB9D0"/>
                 </a:solidFill>
                 <a:latin typeface="Arial"/>
                 <a:ea typeface="Arial"/>
@@ -15177,9 +15248,9 @@
               </a:defRPr>
             </a:lvl4pPr>
             <a:lvl5pPr algn="l">
-              <a:defRPr sz="5025" b="1">
-                <a:solidFill>
-                  <a:srgbClr val="F7CB64"/>
+              <a:defRPr sz="1350" b="0">
+                <a:solidFill>
+                  <a:srgbClr val="AAB9D0"/>
                 </a:solidFill>
                 <a:latin typeface="Arial"/>
                 <a:ea typeface="Arial"/>
@@ -15187,9 +15258,9 @@
               </a:defRPr>
             </a:lvl5pPr>
             <a:lvl6pPr algn="l">
-              <a:defRPr sz="5025" b="1">
-                <a:solidFill>
-                  <a:srgbClr val="F7CB64"/>
+              <a:defRPr sz="1350" b="0">
+                <a:solidFill>
+                  <a:srgbClr val="AAB9D0"/>
                 </a:solidFill>
                 <a:latin typeface="Arial"/>
                 <a:ea typeface="Arial"/>
@@ -15197,9 +15268,9 @@
               </a:defRPr>
             </a:lvl6pPr>
             <a:lvl7pPr algn="l">
-              <a:defRPr sz="5025" b="1">
-                <a:solidFill>
-                  <a:srgbClr val="F7CB64"/>
+              <a:defRPr sz="1350" b="0">
+                <a:solidFill>
+                  <a:srgbClr val="AAB9D0"/>
                 </a:solidFill>
                 <a:latin typeface="Arial"/>
                 <a:ea typeface="Arial"/>
@@ -15207,9 +15278,9 @@
               </a:defRPr>
             </a:lvl7pPr>
             <a:lvl8pPr algn="l">
-              <a:defRPr sz="5025" b="1">
-                <a:solidFill>
-                  <a:srgbClr val="F7CB64"/>
+              <a:defRPr sz="1350" b="0">
+                <a:solidFill>
+                  <a:srgbClr val="AAB9D0"/>
                 </a:solidFill>
                 <a:latin typeface="Arial"/>
                 <a:ea typeface="Arial"/>
@@ -15217,9 +15288,9 @@
               </a:defRPr>
             </a:lvl8pPr>
             <a:lvl9pPr algn="l">
-              <a:defRPr sz="5025" b="1">
-                <a:solidFill>
-                  <a:srgbClr val="F7CB64"/>
+              <a:defRPr sz="1350" b="0">
+                <a:solidFill>
+                  <a:srgbClr val="AAB9D0"/>
                 </a:solidFill>
                 <a:latin typeface="Arial"/>
                 <a:ea typeface="Arial"/>
@@ -15229,9 +15300,9 @@
           </a:lstStyle>
           <a:p xmlns:a="http://schemas.openxmlformats.org/drawingml/2006/main">
             <a:pPr algn="l">
-              <a:defRPr sz="5025" b="1">
-                <a:solidFill>
-                  <a:srgbClr val="F7CB64"/>
+              <a:defRPr sz="1350" b="0">
+                <a:solidFill>
+                  <a:srgbClr val="AAB9D0"/>
                 </a:solidFill>
                 <a:latin typeface="Arial"/>
                 <a:ea typeface="Arial"/>
@@ -15239,25 +15310,25 @@
               </a:defRPr>
             </a:pPr>
             <a:r>
-              <a:rPr sz="5025" b="1">
-                <a:solidFill>
-                  <a:srgbClr val="F7CB64"/>
+              <a:rPr sz="1350" b="0">
+                <a:solidFill>
+                  <a:srgbClr val="AAB9D0"/>
                 </a:solidFill>
                 <a:latin typeface="Arial"/>
                 <a:ea typeface="Arial"/>
                 <a:cs typeface="Arial"/>
               </a:rPr>
-              <a:t>206</a:t>
+              <a:t>PHONE 5</a:t>
             </a:r>
           </a:p>
         </p:txBody>
       </p:sp>
       <p:sp>
         <p:nvSpPr>
-          <p:cNvPr id="12" name="PHONE D">
+          <p:cNvPr id="12" name="210 / 211">
             <a:extLst xmlns:a="http://schemas.openxmlformats.org/drawingml/2006/main">
               <a:ext uri="{FF2B5EF4-FFF2-40B4-BE49-F238E27FC236}">
-                <a16:creationId xmlns:a16="http://schemas.microsoft.com/office/drawing/2014/main" id="{97A495A3-78FC-4BAA-AB7F-46443791709D}"/>
+                <a16:creationId xmlns:a16="http://schemas.microsoft.com/office/drawing/2014/main" id="{E87DB66B-4D26-4B8D-A513-BC74F0C03692}"/>
               </a:ext>
             </a:extLst>
           </p:cNvPr>
@@ -15268,8 +15339,8 @@
         </p:nvSpPr>
         <p:spPr>
           <a:xfrm xmlns:a="http://schemas.openxmlformats.org/drawingml/2006/main">
-            <a:off x="9201150" y="1619250"/>
-            <a:ext cx="2524125" cy="400050"/>
+            <a:off x="9867900" y="2114550"/>
+            <a:ext cx="2095500" cy="571500"/>
           </a:xfrm>
           <a:prstGeom xmlns:a="http://schemas.openxmlformats.org/drawingml/2006/main" prst="rect">
             <a:avLst/>
@@ -15285,9 +15356,9 @@
           </a:bodyPr>
           <a:lstStyle xmlns:a="http://schemas.openxmlformats.org/drawingml/2006/main">
             <a:defPPr algn="l">
-              <a:defRPr sz="1875" b="1">
-                <a:solidFill>
-                  <a:srgbClr val="AAB9D0"/>
+              <a:defRPr sz="2550" b="1">
+                <a:solidFill>
+                  <a:srgbClr val="48DDCC"/>
                 </a:solidFill>
                 <a:latin typeface="Arial"/>
                 <a:ea typeface="Arial"/>
@@ -15295,9 +15366,9 @@
               </a:defRPr>
             </a:defPPr>
             <a:lvl1pPr algn="l">
-              <a:defRPr sz="1875" b="1">
-                <a:solidFill>
-                  <a:srgbClr val="AAB9D0"/>
+              <a:defRPr sz="2550" b="1">
+                <a:solidFill>
+                  <a:srgbClr val="48DDCC"/>
                 </a:solidFill>
                 <a:latin typeface="Arial"/>
                 <a:ea typeface="Arial"/>
@@ -15305,9 +15376,9 @@
               </a:defRPr>
             </a:lvl1pPr>
             <a:lvl2pPr algn="l">
-              <a:defRPr sz="1875" b="1">
-                <a:solidFill>
-                  <a:srgbClr val="AAB9D0"/>
+              <a:defRPr sz="2550" b="1">
+                <a:solidFill>
+                  <a:srgbClr val="48DDCC"/>
                 </a:solidFill>
                 <a:latin typeface="Arial"/>
                 <a:ea typeface="Arial"/>
@@ -15315,9 +15386,9 @@
               </a:defRPr>
             </a:lvl2pPr>
             <a:lvl3pPr algn="l">
-              <a:defRPr sz="1875" b="1">
-                <a:solidFill>
-                  <a:srgbClr val="AAB9D0"/>
+              <a:defRPr sz="2550" b="1">
+                <a:solidFill>
+                  <a:srgbClr val="48DDCC"/>
                 </a:solidFill>
                 <a:latin typeface="Arial"/>
                 <a:ea typeface="Arial"/>
@@ -15325,9 +15396,9 @@
               </a:defRPr>
             </a:lvl3pPr>
             <a:lvl4pPr algn="l">
-              <a:defRPr sz="1875" b="1">
-                <a:solidFill>
-                  <a:srgbClr val="AAB9D0"/>
+              <a:defRPr sz="2550" b="1">
+                <a:solidFill>
+                  <a:srgbClr val="48DDCC"/>
                 </a:solidFill>
                 <a:latin typeface="Arial"/>
                 <a:ea typeface="Arial"/>
@@ -15335,9 +15406,9 @@
               </a:defRPr>
             </a:lvl4pPr>
             <a:lvl5pPr algn="l">
-              <a:defRPr sz="1875" b="1">
-                <a:solidFill>
-                  <a:srgbClr val="AAB9D0"/>
+              <a:defRPr sz="2550" b="1">
+                <a:solidFill>
+                  <a:srgbClr val="48DDCC"/>
                 </a:solidFill>
                 <a:latin typeface="Arial"/>
                 <a:ea typeface="Arial"/>
@@ -15345,9 +15416,9 @@
               </a:defRPr>
             </a:lvl5pPr>
             <a:lvl6pPr algn="l">
-              <a:defRPr sz="1875" b="1">
-                <a:solidFill>
-                  <a:srgbClr val="AAB9D0"/>
+              <a:defRPr sz="2550" b="1">
+                <a:solidFill>
+                  <a:srgbClr val="48DDCC"/>
                 </a:solidFill>
                 <a:latin typeface="Arial"/>
                 <a:ea typeface="Arial"/>
@@ -15355,9 +15426,9 @@
               </a:defRPr>
             </a:lvl6pPr>
             <a:lvl7pPr algn="l">
-              <a:defRPr sz="1875" b="1">
-                <a:solidFill>
-                  <a:srgbClr val="AAB9D0"/>
+              <a:defRPr sz="2550" b="1">
+                <a:solidFill>
+                  <a:srgbClr val="48DDCC"/>
                 </a:solidFill>
                 <a:latin typeface="Arial"/>
                 <a:ea typeface="Arial"/>
@@ -15365,9 +15436,9 @@
               </a:defRPr>
             </a:lvl7pPr>
             <a:lvl8pPr algn="l">
-              <a:defRPr sz="1875" b="1">
-                <a:solidFill>
-                  <a:srgbClr val="AAB9D0"/>
+              <a:defRPr sz="2550" b="1">
+                <a:solidFill>
+                  <a:srgbClr val="48DDCC"/>
                 </a:solidFill>
                 <a:latin typeface="Arial"/>
                 <a:ea typeface="Arial"/>
@@ -15375,9 +15446,9 @@
               </a:defRPr>
             </a:lvl8pPr>
             <a:lvl9pPr algn="l">
-              <a:defRPr sz="1875" b="1">
-                <a:solidFill>
-                  <a:srgbClr val="AAB9D0"/>
+              <a:defRPr sz="2550" b="1">
+                <a:solidFill>
+                  <a:srgbClr val="48DDCC"/>
                 </a:solidFill>
                 <a:latin typeface="Arial"/>
                 <a:ea typeface="Arial"/>
@@ -15387,9 +15458,9 @@
           </a:lstStyle>
           <a:p xmlns:a="http://schemas.openxmlformats.org/drawingml/2006/main">
             <a:pPr algn="l">
-              <a:defRPr sz="1875" b="1">
-                <a:solidFill>
-                  <a:srgbClr val="AAB9D0"/>
+              <a:defRPr sz="2550" b="1">
+                <a:solidFill>
+                  <a:srgbClr val="48DDCC"/>
                 </a:solidFill>
                 <a:latin typeface="Arial"/>
                 <a:ea typeface="Arial"/>
@@ -15397,25 +15468,25 @@
               </a:defRPr>
             </a:pPr>
             <a:r>
-              <a:rPr sz="1875" b="1">
-                <a:solidFill>
-                  <a:srgbClr val="AAB9D0"/>
+              <a:rPr sz="2550" b="1">
+                <a:solidFill>
+                  <a:srgbClr val="48DDCC"/>
                 </a:solidFill>
                 <a:latin typeface="Arial"/>
                 <a:ea typeface="Arial"/>
                 <a:cs typeface="Arial"/>
               </a:rPr>
-              <a:t>PHONE D</a:t>
+              <a:t>210 / 211</a:t>
             </a:r>
           </a:p>
         </p:txBody>
       </p:sp>
       <p:sp>
         <p:nvSpPr>
-          <p:cNvPr id="13" name="207">
+          <p:cNvPr id="13" name="PHONE 6">
             <a:extLst xmlns:a="http://schemas.openxmlformats.org/drawingml/2006/main">
               <a:ext uri="{FF2B5EF4-FFF2-40B4-BE49-F238E27FC236}">
-                <a16:creationId xmlns:a16="http://schemas.microsoft.com/office/drawing/2014/main" id="{76FF8D3D-E9FE-4A69-ABE1-A451D0C724FB}"/>
+                <a16:creationId xmlns:a16="http://schemas.microsoft.com/office/drawing/2014/main" id="{C5DD0690-7EC8-4FED-9449-463C87606549}"/>
               </a:ext>
             </a:extLst>
           </p:cNvPr>
@@ -15426,8 +15497,8 @@
         </p:nvSpPr>
         <p:spPr>
           <a:xfrm xmlns:a="http://schemas.openxmlformats.org/drawingml/2006/main">
-            <a:off x="9201150" y="2266950"/>
-            <a:ext cx="2524125" cy="838200"/>
+            <a:off x="571500" y="3124200"/>
+            <a:ext cx="2095500" cy="333375"/>
           </a:xfrm>
           <a:prstGeom xmlns:a="http://schemas.openxmlformats.org/drawingml/2006/main" prst="rect">
             <a:avLst/>
@@ -15443,9 +15514,9 @@
           </a:bodyPr>
           <a:lstStyle xmlns:a="http://schemas.openxmlformats.org/drawingml/2006/main">
             <a:defPPr algn="l">
-              <a:defRPr sz="5025" b="1">
-                <a:solidFill>
-                  <a:srgbClr val="48DDCC"/>
+              <a:defRPr sz="1350" b="0">
+                <a:solidFill>
+                  <a:srgbClr val="AAB9D0"/>
                 </a:solidFill>
                 <a:latin typeface="Arial"/>
                 <a:ea typeface="Arial"/>
@@ -15453,9 +15524,9 @@
               </a:defRPr>
             </a:defPPr>
             <a:lvl1pPr algn="l">
-              <a:defRPr sz="5025" b="1">
-                <a:solidFill>
-                  <a:srgbClr val="48DDCC"/>
+              <a:defRPr sz="1350" b="0">
+                <a:solidFill>
+                  <a:srgbClr val="AAB9D0"/>
                 </a:solidFill>
                 <a:latin typeface="Arial"/>
                 <a:ea typeface="Arial"/>
@@ -15463,9 +15534,9 @@
               </a:defRPr>
             </a:lvl1pPr>
             <a:lvl2pPr algn="l">
-              <a:defRPr sz="5025" b="1">
-                <a:solidFill>
-                  <a:srgbClr val="48DDCC"/>
+              <a:defRPr sz="1350" b="0">
+                <a:solidFill>
+                  <a:srgbClr val="AAB9D0"/>
                 </a:solidFill>
                 <a:latin typeface="Arial"/>
                 <a:ea typeface="Arial"/>
@@ -15473,9 +15544,9 @@
               </a:defRPr>
             </a:lvl2pPr>
             <a:lvl3pPr algn="l">
-              <a:defRPr sz="5025" b="1">
-                <a:solidFill>
-                  <a:srgbClr val="48DDCC"/>
+              <a:defRPr sz="1350" b="0">
+                <a:solidFill>
+                  <a:srgbClr val="AAB9D0"/>
                 </a:solidFill>
                 <a:latin typeface="Arial"/>
                 <a:ea typeface="Arial"/>
@@ -15483,9 +15554,9 @@
               </a:defRPr>
             </a:lvl3pPr>
             <a:lvl4pPr algn="l">
-              <a:defRPr sz="5025" b="1">
-                <a:solidFill>
-                  <a:srgbClr val="48DDCC"/>
+              <a:defRPr sz="1350" b="0">
+                <a:solidFill>
+                  <a:srgbClr val="AAB9D0"/>
                 </a:solidFill>
                 <a:latin typeface="Arial"/>
                 <a:ea typeface="Arial"/>
@@ -15493,9 +15564,9 @@
               </a:defRPr>
             </a:lvl4pPr>
             <a:lvl5pPr algn="l">
-              <a:defRPr sz="5025" b="1">
-                <a:solidFill>
-                  <a:srgbClr val="48DDCC"/>
+              <a:defRPr sz="1350" b="0">
+                <a:solidFill>
+                  <a:srgbClr val="AAB9D0"/>
                 </a:solidFill>
                 <a:latin typeface="Arial"/>
                 <a:ea typeface="Arial"/>
@@ -15503,9 +15574,9 @@
               </a:defRPr>
             </a:lvl5pPr>
             <a:lvl6pPr algn="l">
-              <a:defRPr sz="5025" b="1">
-                <a:solidFill>
-                  <a:srgbClr val="48DDCC"/>
+              <a:defRPr sz="1350" b="0">
+                <a:solidFill>
+                  <a:srgbClr val="AAB9D0"/>
                 </a:solidFill>
                 <a:latin typeface="Arial"/>
                 <a:ea typeface="Arial"/>
@@ -15513,9 +15584,9 @@
               </a:defRPr>
             </a:lvl6pPr>
             <a:lvl7pPr algn="l">
-              <a:defRPr sz="5025" b="1">
-                <a:solidFill>
-                  <a:srgbClr val="48DDCC"/>
+              <a:defRPr sz="1350" b="0">
+                <a:solidFill>
+                  <a:srgbClr val="AAB9D0"/>
                 </a:solidFill>
                 <a:latin typeface="Arial"/>
                 <a:ea typeface="Arial"/>
@@ -15523,9 +15594,9 @@
               </a:defRPr>
             </a:lvl7pPr>
             <a:lvl8pPr algn="l">
-              <a:defRPr sz="5025" b="1">
-                <a:solidFill>
-                  <a:srgbClr val="48DDCC"/>
+              <a:defRPr sz="1350" b="0">
+                <a:solidFill>
+                  <a:srgbClr val="AAB9D0"/>
                 </a:solidFill>
                 <a:latin typeface="Arial"/>
                 <a:ea typeface="Arial"/>
@@ -15533,9 +15604,9 @@
               </a:defRPr>
             </a:lvl8pPr>
             <a:lvl9pPr algn="l">
-              <a:defRPr sz="5025" b="1">
-                <a:solidFill>
-                  <a:srgbClr val="48DDCC"/>
+              <a:defRPr sz="1350" b="0">
+                <a:solidFill>
+                  <a:srgbClr val="AAB9D0"/>
                 </a:solidFill>
                 <a:latin typeface="Arial"/>
                 <a:ea typeface="Arial"/>
@@ -15545,9 +15616,9 @@
           </a:lstStyle>
           <a:p xmlns:a="http://schemas.openxmlformats.org/drawingml/2006/main">
             <a:pPr algn="l">
-              <a:defRPr sz="5025" b="1">
-                <a:solidFill>
-                  <a:srgbClr val="48DDCC"/>
+              <a:defRPr sz="1350" b="0">
+                <a:solidFill>
+                  <a:srgbClr val="AAB9D0"/>
                 </a:solidFill>
                 <a:latin typeface="Arial"/>
                 <a:ea typeface="Arial"/>
@@ -15555,25 +15626,25 @@
               </a:defRPr>
             </a:pPr>
             <a:r>
-              <a:rPr sz="5025" b="1">
-                <a:solidFill>
-                  <a:srgbClr val="48DDCC"/>
+              <a:rPr sz="1350" b="0">
+                <a:solidFill>
+                  <a:srgbClr val="AAB9D0"/>
                 </a:solidFill>
                 <a:latin typeface="Arial"/>
                 <a:ea typeface="Arial"/>
                 <a:cs typeface="Arial"/>
               </a:rPr>
-              <a:t>207</a:t>
+              <a:t>PHONE 6</a:t>
             </a:r>
           </a:p>
         </p:txBody>
       </p:sp>
       <p:sp>
         <p:nvSpPr>
-          <p:cNvPr id="14" name="208">
+          <p:cNvPr id="14" name="212 / 213">
             <a:extLst xmlns:a="http://schemas.openxmlformats.org/drawingml/2006/main">
               <a:ext uri="{FF2B5EF4-FFF2-40B4-BE49-F238E27FC236}">
-                <a16:creationId xmlns:a16="http://schemas.microsoft.com/office/drawing/2014/main" id="{3099E1AD-CB7A-4312-B4ED-31F5EA65C518}"/>
+                <a16:creationId xmlns:a16="http://schemas.microsoft.com/office/drawing/2014/main" id="{734DE2E9-7DE5-478E-A7D6-3C5BAA7F9C3F}"/>
               </a:ext>
             </a:extLst>
           </p:cNvPr>
@@ -15584,8 +15655,8 @@
         </p:nvSpPr>
         <p:spPr>
           <a:xfrm xmlns:a="http://schemas.openxmlformats.org/drawingml/2006/main">
-            <a:off x="9201150" y="3238500"/>
-            <a:ext cx="2524125" cy="838200"/>
+            <a:off x="571500" y="3552825"/>
+            <a:ext cx="2095500" cy="571500"/>
           </a:xfrm>
           <a:prstGeom xmlns:a="http://schemas.openxmlformats.org/drawingml/2006/main" prst="rect">
             <a:avLst/>
@@ -15601,7 +15672,7 @@
           </a:bodyPr>
           <a:lstStyle xmlns:a="http://schemas.openxmlformats.org/drawingml/2006/main">
             <a:defPPr algn="l">
-              <a:defRPr sz="5025" b="1">
+              <a:defRPr sz="2550" b="1">
                 <a:solidFill>
                   <a:srgbClr val="48DDCC"/>
                 </a:solidFill>
@@ -15611,7 +15682,7 @@
               </a:defRPr>
             </a:defPPr>
             <a:lvl1pPr algn="l">
-              <a:defRPr sz="5025" b="1">
+              <a:defRPr sz="2550" b="1">
                 <a:solidFill>
                   <a:srgbClr val="48DDCC"/>
                 </a:solidFill>
@@ -15621,7 +15692,7 @@
               </a:defRPr>
             </a:lvl1pPr>
             <a:lvl2pPr algn="l">
-              <a:defRPr sz="5025" b="1">
+              <a:defRPr sz="2550" b="1">
                 <a:solidFill>
                   <a:srgbClr val="48DDCC"/>
                 </a:solidFill>
@@ -15631,7 +15702,7 @@
               </a:defRPr>
             </a:lvl2pPr>
             <a:lvl3pPr algn="l">
-              <a:defRPr sz="5025" b="1">
+              <a:defRPr sz="2550" b="1">
                 <a:solidFill>
                   <a:srgbClr val="48DDCC"/>
                 </a:solidFill>
@@ -15641,7 +15712,7 @@
               </a:defRPr>
             </a:lvl3pPr>
             <a:lvl4pPr algn="l">
-              <a:defRPr sz="5025" b="1">
+              <a:defRPr sz="2550" b="1">
                 <a:solidFill>
                   <a:srgbClr val="48DDCC"/>
                 </a:solidFill>
@@ -15651,7 +15722,7 @@
               </a:defRPr>
             </a:lvl4pPr>
             <a:lvl5pPr algn="l">
-              <a:defRPr sz="5025" b="1">
+              <a:defRPr sz="2550" b="1">
                 <a:solidFill>
                   <a:srgbClr val="48DDCC"/>
                 </a:solidFill>
@@ -15661,7 +15732,7 @@
               </a:defRPr>
             </a:lvl5pPr>
             <a:lvl6pPr algn="l">
-              <a:defRPr sz="5025" b="1">
+              <a:defRPr sz="2550" b="1">
                 <a:solidFill>
                   <a:srgbClr val="48DDCC"/>
                 </a:solidFill>
@@ -15671,7 +15742,7 @@
               </a:defRPr>
             </a:lvl6pPr>
             <a:lvl7pPr algn="l">
-              <a:defRPr sz="5025" b="1">
+              <a:defRPr sz="2550" b="1">
                 <a:solidFill>
                   <a:srgbClr val="48DDCC"/>
                 </a:solidFill>
@@ -15681,7 +15752,7 @@
               </a:defRPr>
             </a:lvl7pPr>
             <a:lvl8pPr algn="l">
-              <a:defRPr sz="5025" b="1">
+              <a:defRPr sz="2550" b="1">
                 <a:solidFill>
                   <a:srgbClr val="48DDCC"/>
                 </a:solidFill>
@@ -15691,7 +15762,7 @@
               </a:defRPr>
             </a:lvl8pPr>
             <a:lvl9pPr algn="l">
-              <a:defRPr sz="5025" b="1">
+              <a:defRPr sz="2550" b="1">
                 <a:solidFill>
                   <a:srgbClr val="48DDCC"/>
                 </a:solidFill>
@@ -15703,7 +15774,7 @@
           </a:lstStyle>
           <a:p xmlns:a="http://schemas.openxmlformats.org/drawingml/2006/main">
             <a:pPr algn="l">
-              <a:defRPr sz="5025" b="1">
+              <a:defRPr sz="2550" b="1">
                 <a:solidFill>
                   <a:srgbClr val="48DDCC"/>
                 </a:solidFill>
@@ -15713,7 +15784,7 @@
               </a:defRPr>
             </a:pPr>
             <a:r>
-              <a:rPr sz="5025" b="1">
+              <a:rPr sz="2550" b="1">
                 <a:solidFill>
                   <a:srgbClr val="48DDCC"/>
                 </a:solidFill>
@@ -15721,17 +15792,17 @@
                 <a:ea typeface="Arial"/>
                 <a:cs typeface="Arial"/>
               </a:rPr>
-              <a:t>208</a:t>
+              <a:t>212 / 213</a:t>
             </a:r>
           </a:p>
         </p:txBody>
       </p:sp>
       <p:sp>
         <p:nvSpPr>
-          <p:cNvPr id="15" name="620 rings the primary line of each phone">
+          <p:cNvPr id="15" name="PHONE 7">
             <a:extLst xmlns:a="http://schemas.openxmlformats.org/drawingml/2006/main">
               <a:ext uri="{FF2B5EF4-FFF2-40B4-BE49-F238E27FC236}">
-                <a16:creationId xmlns:a16="http://schemas.microsoft.com/office/drawing/2014/main" id="{C4CA8DF7-A0DB-443A-B92D-53AD3509AF9C}"/>
+                <a16:creationId xmlns:a16="http://schemas.microsoft.com/office/drawing/2014/main" id="{64B46511-48E4-4EEE-B713-7A574DD32B78}"/>
               </a:ext>
             </a:extLst>
           </p:cNvPr>
@@ -15742,7 +15813,1271 @@
         </p:nvSpPr>
         <p:spPr>
           <a:xfrm xmlns:a="http://schemas.openxmlformats.org/drawingml/2006/main">
-            <a:off x="571500" y="4667250"/>
+            <a:off x="2895600" y="3124200"/>
+            <a:ext cx="2095500" cy="333375"/>
+          </a:xfrm>
+          <a:prstGeom xmlns:a="http://schemas.openxmlformats.org/drawingml/2006/main" prst="rect">
+            <a:avLst/>
+          </a:prstGeom>
+          <a:noFill xmlns:a="http://schemas.openxmlformats.org/drawingml/2006/main"/>
+          <a:ln xmlns:a="http://schemas.openxmlformats.org/drawingml/2006/main" w="0">
+            <a:noFill/>
+          </a:ln>
+        </p:spPr>
+        <p:txBody>
+          <a:bodyPr xmlns:a="http://schemas.openxmlformats.org/drawingml/2006/main" wrap="square" lIns="0" tIns="0" rIns="0" bIns="0" anchor="t">
+            <a:noAutofit/>
+          </a:bodyPr>
+          <a:lstStyle xmlns:a="http://schemas.openxmlformats.org/drawingml/2006/main">
+            <a:defPPr algn="l">
+              <a:defRPr sz="1350" b="0">
+                <a:solidFill>
+                  <a:srgbClr val="AAB9D0"/>
+                </a:solidFill>
+                <a:latin typeface="Arial"/>
+                <a:ea typeface="Arial"/>
+                <a:cs typeface="Arial"/>
+              </a:defRPr>
+            </a:defPPr>
+            <a:lvl1pPr algn="l">
+              <a:defRPr sz="1350" b="0">
+                <a:solidFill>
+                  <a:srgbClr val="AAB9D0"/>
+                </a:solidFill>
+                <a:latin typeface="Arial"/>
+                <a:ea typeface="Arial"/>
+                <a:cs typeface="Arial"/>
+              </a:defRPr>
+            </a:lvl1pPr>
+            <a:lvl2pPr algn="l">
+              <a:defRPr sz="1350" b="0">
+                <a:solidFill>
+                  <a:srgbClr val="AAB9D0"/>
+                </a:solidFill>
+                <a:latin typeface="Arial"/>
+                <a:ea typeface="Arial"/>
+                <a:cs typeface="Arial"/>
+              </a:defRPr>
+            </a:lvl2pPr>
+            <a:lvl3pPr algn="l">
+              <a:defRPr sz="1350" b="0">
+                <a:solidFill>
+                  <a:srgbClr val="AAB9D0"/>
+                </a:solidFill>
+                <a:latin typeface="Arial"/>
+                <a:ea typeface="Arial"/>
+                <a:cs typeface="Arial"/>
+              </a:defRPr>
+            </a:lvl3pPr>
+            <a:lvl4pPr algn="l">
+              <a:defRPr sz="1350" b="0">
+                <a:solidFill>
+                  <a:srgbClr val="AAB9D0"/>
+                </a:solidFill>
+                <a:latin typeface="Arial"/>
+                <a:ea typeface="Arial"/>
+                <a:cs typeface="Arial"/>
+              </a:defRPr>
+            </a:lvl4pPr>
+            <a:lvl5pPr algn="l">
+              <a:defRPr sz="1350" b="0">
+                <a:solidFill>
+                  <a:srgbClr val="AAB9D0"/>
+                </a:solidFill>
+                <a:latin typeface="Arial"/>
+                <a:ea typeface="Arial"/>
+                <a:cs typeface="Arial"/>
+              </a:defRPr>
+            </a:lvl5pPr>
+            <a:lvl6pPr algn="l">
+              <a:defRPr sz="1350" b="0">
+                <a:solidFill>
+                  <a:srgbClr val="AAB9D0"/>
+                </a:solidFill>
+                <a:latin typeface="Arial"/>
+                <a:ea typeface="Arial"/>
+                <a:cs typeface="Arial"/>
+              </a:defRPr>
+            </a:lvl6pPr>
+            <a:lvl7pPr algn="l">
+              <a:defRPr sz="1350" b="0">
+                <a:solidFill>
+                  <a:srgbClr val="AAB9D0"/>
+                </a:solidFill>
+                <a:latin typeface="Arial"/>
+                <a:ea typeface="Arial"/>
+                <a:cs typeface="Arial"/>
+              </a:defRPr>
+            </a:lvl7pPr>
+            <a:lvl8pPr algn="l">
+              <a:defRPr sz="1350" b="0">
+                <a:solidFill>
+                  <a:srgbClr val="AAB9D0"/>
+                </a:solidFill>
+                <a:latin typeface="Arial"/>
+                <a:ea typeface="Arial"/>
+                <a:cs typeface="Arial"/>
+              </a:defRPr>
+            </a:lvl8pPr>
+            <a:lvl9pPr algn="l">
+              <a:defRPr sz="1350" b="0">
+                <a:solidFill>
+                  <a:srgbClr val="AAB9D0"/>
+                </a:solidFill>
+                <a:latin typeface="Arial"/>
+                <a:ea typeface="Arial"/>
+                <a:cs typeface="Arial"/>
+              </a:defRPr>
+            </a:lvl9pPr>
+          </a:lstStyle>
+          <a:p xmlns:a="http://schemas.openxmlformats.org/drawingml/2006/main">
+            <a:pPr algn="l">
+              <a:defRPr sz="1350" b="0">
+                <a:solidFill>
+                  <a:srgbClr val="AAB9D0"/>
+                </a:solidFill>
+                <a:latin typeface="Arial"/>
+                <a:ea typeface="Arial"/>
+                <a:cs typeface="Arial"/>
+              </a:defRPr>
+            </a:pPr>
+            <a:r>
+              <a:rPr sz="1350" b="0">
+                <a:solidFill>
+                  <a:srgbClr val="AAB9D0"/>
+                </a:solidFill>
+                <a:latin typeface="Arial"/>
+                <a:ea typeface="Arial"/>
+                <a:cs typeface="Arial"/>
+              </a:rPr>
+              <a:t>PHONE 7</a:t>
+            </a:r>
+          </a:p>
+        </p:txBody>
+      </p:sp>
+      <p:sp>
+        <p:nvSpPr>
+          <p:cNvPr id="16" name="214 / 215">
+            <a:extLst xmlns:a="http://schemas.openxmlformats.org/drawingml/2006/main">
+              <a:ext uri="{FF2B5EF4-FFF2-40B4-BE49-F238E27FC236}">
+                <a16:creationId xmlns:a16="http://schemas.microsoft.com/office/drawing/2014/main" id="{DFC63E9B-C2FE-420A-AAC1-61BB0F8B7665}"/>
+              </a:ext>
+            </a:extLst>
+          </p:cNvPr>
+          <p:cNvSpPr>
+            <a:spLocks xmlns:a="http://schemas.openxmlformats.org/drawingml/2006/main" noGrp="1"/>
+          </p:cNvSpPr>
+          <p:nvPr/>
+        </p:nvSpPr>
+        <p:spPr>
+          <a:xfrm xmlns:a="http://schemas.openxmlformats.org/drawingml/2006/main">
+            <a:off x="2895600" y="3552825"/>
+            <a:ext cx="2095500" cy="571500"/>
+          </a:xfrm>
+          <a:prstGeom xmlns:a="http://schemas.openxmlformats.org/drawingml/2006/main" prst="rect">
+            <a:avLst/>
+          </a:prstGeom>
+          <a:noFill xmlns:a="http://schemas.openxmlformats.org/drawingml/2006/main"/>
+          <a:ln xmlns:a="http://schemas.openxmlformats.org/drawingml/2006/main" w="0">
+            <a:noFill/>
+          </a:ln>
+        </p:spPr>
+        <p:txBody>
+          <a:bodyPr xmlns:a="http://schemas.openxmlformats.org/drawingml/2006/main" wrap="square" lIns="0" tIns="0" rIns="0" bIns="0" anchor="t">
+            <a:noAutofit/>
+          </a:bodyPr>
+          <a:lstStyle xmlns:a="http://schemas.openxmlformats.org/drawingml/2006/main">
+            <a:defPPr algn="l">
+              <a:defRPr sz="2550" b="1">
+                <a:solidFill>
+                  <a:srgbClr val="48DDCC"/>
+                </a:solidFill>
+                <a:latin typeface="Arial"/>
+                <a:ea typeface="Arial"/>
+                <a:cs typeface="Arial"/>
+              </a:defRPr>
+            </a:defPPr>
+            <a:lvl1pPr algn="l">
+              <a:defRPr sz="2550" b="1">
+                <a:solidFill>
+                  <a:srgbClr val="48DDCC"/>
+                </a:solidFill>
+                <a:latin typeface="Arial"/>
+                <a:ea typeface="Arial"/>
+                <a:cs typeface="Arial"/>
+              </a:defRPr>
+            </a:lvl1pPr>
+            <a:lvl2pPr algn="l">
+              <a:defRPr sz="2550" b="1">
+                <a:solidFill>
+                  <a:srgbClr val="48DDCC"/>
+                </a:solidFill>
+                <a:latin typeface="Arial"/>
+                <a:ea typeface="Arial"/>
+                <a:cs typeface="Arial"/>
+              </a:defRPr>
+            </a:lvl2pPr>
+            <a:lvl3pPr algn="l">
+              <a:defRPr sz="2550" b="1">
+                <a:solidFill>
+                  <a:srgbClr val="48DDCC"/>
+                </a:solidFill>
+                <a:latin typeface="Arial"/>
+                <a:ea typeface="Arial"/>
+                <a:cs typeface="Arial"/>
+              </a:defRPr>
+            </a:lvl3pPr>
+            <a:lvl4pPr algn="l">
+              <a:defRPr sz="2550" b="1">
+                <a:solidFill>
+                  <a:srgbClr val="48DDCC"/>
+                </a:solidFill>
+                <a:latin typeface="Arial"/>
+                <a:ea typeface="Arial"/>
+                <a:cs typeface="Arial"/>
+              </a:defRPr>
+            </a:lvl4pPr>
+            <a:lvl5pPr algn="l">
+              <a:defRPr sz="2550" b="1">
+                <a:solidFill>
+                  <a:srgbClr val="48DDCC"/>
+                </a:solidFill>
+                <a:latin typeface="Arial"/>
+                <a:ea typeface="Arial"/>
+                <a:cs typeface="Arial"/>
+              </a:defRPr>
+            </a:lvl5pPr>
+            <a:lvl6pPr algn="l">
+              <a:defRPr sz="2550" b="1">
+                <a:solidFill>
+                  <a:srgbClr val="48DDCC"/>
+                </a:solidFill>
+                <a:latin typeface="Arial"/>
+                <a:ea typeface="Arial"/>
+                <a:cs typeface="Arial"/>
+              </a:defRPr>
+            </a:lvl6pPr>
+            <a:lvl7pPr algn="l">
+              <a:defRPr sz="2550" b="1">
+                <a:solidFill>
+                  <a:srgbClr val="48DDCC"/>
+                </a:solidFill>
+                <a:latin typeface="Arial"/>
+                <a:ea typeface="Arial"/>
+                <a:cs typeface="Arial"/>
+              </a:defRPr>
+            </a:lvl7pPr>
+            <a:lvl8pPr algn="l">
+              <a:defRPr sz="2550" b="1">
+                <a:solidFill>
+                  <a:srgbClr val="48DDCC"/>
+                </a:solidFill>
+                <a:latin typeface="Arial"/>
+                <a:ea typeface="Arial"/>
+                <a:cs typeface="Arial"/>
+              </a:defRPr>
+            </a:lvl8pPr>
+            <a:lvl9pPr algn="l">
+              <a:defRPr sz="2550" b="1">
+                <a:solidFill>
+                  <a:srgbClr val="48DDCC"/>
+                </a:solidFill>
+                <a:latin typeface="Arial"/>
+                <a:ea typeface="Arial"/>
+                <a:cs typeface="Arial"/>
+              </a:defRPr>
+            </a:lvl9pPr>
+          </a:lstStyle>
+          <a:p xmlns:a="http://schemas.openxmlformats.org/drawingml/2006/main">
+            <a:pPr algn="l">
+              <a:defRPr sz="2550" b="1">
+                <a:solidFill>
+                  <a:srgbClr val="48DDCC"/>
+                </a:solidFill>
+                <a:latin typeface="Arial"/>
+                <a:ea typeface="Arial"/>
+                <a:cs typeface="Arial"/>
+              </a:defRPr>
+            </a:pPr>
+            <a:r>
+              <a:rPr sz="2550" b="1">
+                <a:solidFill>
+                  <a:srgbClr val="48DDCC"/>
+                </a:solidFill>
+                <a:latin typeface="Arial"/>
+                <a:ea typeface="Arial"/>
+                <a:cs typeface="Arial"/>
+              </a:rPr>
+              <a:t>214 / 215</a:t>
+            </a:r>
+          </a:p>
+        </p:txBody>
+      </p:sp>
+      <p:sp>
+        <p:nvSpPr>
+          <p:cNvPr id="17" name="PHONE 8">
+            <a:extLst xmlns:a="http://schemas.openxmlformats.org/drawingml/2006/main">
+              <a:ext uri="{FF2B5EF4-FFF2-40B4-BE49-F238E27FC236}">
+                <a16:creationId xmlns:a16="http://schemas.microsoft.com/office/drawing/2014/main" id="{65F71913-BCD4-4932-B56A-216BD061F434}"/>
+              </a:ext>
+            </a:extLst>
+          </p:cNvPr>
+          <p:cNvSpPr>
+            <a:spLocks xmlns:a="http://schemas.openxmlformats.org/drawingml/2006/main" noGrp="1"/>
+          </p:cNvSpPr>
+          <p:nvPr/>
+        </p:nvSpPr>
+        <p:spPr>
+          <a:xfrm xmlns:a="http://schemas.openxmlformats.org/drawingml/2006/main">
+            <a:off x="5219700" y="3124200"/>
+            <a:ext cx="2095500" cy="333375"/>
+          </a:xfrm>
+          <a:prstGeom xmlns:a="http://schemas.openxmlformats.org/drawingml/2006/main" prst="rect">
+            <a:avLst/>
+          </a:prstGeom>
+          <a:noFill xmlns:a="http://schemas.openxmlformats.org/drawingml/2006/main"/>
+          <a:ln xmlns:a="http://schemas.openxmlformats.org/drawingml/2006/main" w="0">
+            <a:noFill/>
+          </a:ln>
+        </p:spPr>
+        <p:txBody>
+          <a:bodyPr xmlns:a="http://schemas.openxmlformats.org/drawingml/2006/main" wrap="square" lIns="0" tIns="0" rIns="0" bIns="0" anchor="t">
+            <a:noAutofit/>
+          </a:bodyPr>
+          <a:lstStyle xmlns:a="http://schemas.openxmlformats.org/drawingml/2006/main">
+            <a:defPPr algn="l">
+              <a:defRPr sz="1350" b="0">
+                <a:solidFill>
+                  <a:srgbClr val="AAB9D0"/>
+                </a:solidFill>
+                <a:latin typeface="Arial"/>
+                <a:ea typeface="Arial"/>
+                <a:cs typeface="Arial"/>
+              </a:defRPr>
+            </a:defPPr>
+            <a:lvl1pPr algn="l">
+              <a:defRPr sz="1350" b="0">
+                <a:solidFill>
+                  <a:srgbClr val="AAB9D0"/>
+                </a:solidFill>
+                <a:latin typeface="Arial"/>
+                <a:ea typeface="Arial"/>
+                <a:cs typeface="Arial"/>
+              </a:defRPr>
+            </a:lvl1pPr>
+            <a:lvl2pPr algn="l">
+              <a:defRPr sz="1350" b="0">
+                <a:solidFill>
+                  <a:srgbClr val="AAB9D0"/>
+                </a:solidFill>
+                <a:latin typeface="Arial"/>
+                <a:ea typeface="Arial"/>
+                <a:cs typeface="Arial"/>
+              </a:defRPr>
+            </a:lvl2pPr>
+            <a:lvl3pPr algn="l">
+              <a:defRPr sz="1350" b="0">
+                <a:solidFill>
+                  <a:srgbClr val="AAB9D0"/>
+                </a:solidFill>
+                <a:latin typeface="Arial"/>
+                <a:ea typeface="Arial"/>
+                <a:cs typeface="Arial"/>
+              </a:defRPr>
+            </a:lvl3pPr>
+            <a:lvl4pPr algn="l">
+              <a:defRPr sz="1350" b="0">
+                <a:solidFill>
+                  <a:srgbClr val="AAB9D0"/>
+                </a:solidFill>
+                <a:latin typeface="Arial"/>
+                <a:ea typeface="Arial"/>
+                <a:cs typeface="Arial"/>
+              </a:defRPr>
+            </a:lvl4pPr>
+            <a:lvl5pPr algn="l">
+              <a:defRPr sz="1350" b="0">
+                <a:solidFill>
+                  <a:srgbClr val="AAB9D0"/>
+                </a:solidFill>
+                <a:latin typeface="Arial"/>
+                <a:ea typeface="Arial"/>
+                <a:cs typeface="Arial"/>
+              </a:defRPr>
+            </a:lvl5pPr>
+            <a:lvl6pPr algn="l">
+              <a:defRPr sz="1350" b="0">
+                <a:solidFill>
+                  <a:srgbClr val="AAB9D0"/>
+                </a:solidFill>
+                <a:latin typeface="Arial"/>
+                <a:ea typeface="Arial"/>
+                <a:cs typeface="Arial"/>
+              </a:defRPr>
+            </a:lvl6pPr>
+            <a:lvl7pPr algn="l">
+              <a:defRPr sz="1350" b="0">
+                <a:solidFill>
+                  <a:srgbClr val="AAB9D0"/>
+                </a:solidFill>
+                <a:latin typeface="Arial"/>
+                <a:ea typeface="Arial"/>
+                <a:cs typeface="Arial"/>
+              </a:defRPr>
+            </a:lvl7pPr>
+            <a:lvl8pPr algn="l">
+              <a:defRPr sz="1350" b="0">
+                <a:solidFill>
+                  <a:srgbClr val="AAB9D0"/>
+                </a:solidFill>
+                <a:latin typeface="Arial"/>
+                <a:ea typeface="Arial"/>
+                <a:cs typeface="Arial"/>
+              </a:defRPr>
+            </a:lvl8pPr>
+            <a:lvl9pPr algn="l">
+              <a:defRPr sz="1350" b="0">
+                <a:solidFill>
+                  <a:srgbClr val="AAB9D0"/>
+                </a:solidFill>
+                <a:latin typeface="Arial"/>
+                <a:ea typeface="Arial"/>
+                <a:cs typeface="Arial"/>
+              </a:defRPr>
+            </a:lvl9pPr>
+          </a:lstStyle>
+          <a:p xmlns:a="http://schemas.openxmlformats.org/drawingml/2006/main">
+            <a:pPr algn="l">
+              <a:defRPr sz="1350" b="0">
+                <a:solidFill>
+                  <a:srgbClr val="AAB9D0"/>
+                </a:solidFill>
+                <a:latin typeface="Arial"/>
+                <a:ea typeface="Arial"/>
+                <a:cs typeface="Arial"/>
+              </a:defRPr>
+            </a:pPr>
+            <a:r>
+              <a:rPr sz="1350" b="0">
+                <a:solidFill>
+                  <a:srgbClr val="AAB9D0"/>
+                </a:solidFill>
+                <a:latin typeface="Arial"/>
+                <a:ea typeface="Arial"/>
+                <a:cs typeface="Arial"/>
+              </a:rPr>
+              <a:t>PHONE 8</a:t>
+            </a:r>
+          </a:p>
+        </p:txBody>
+      </p:sp>
+      <p:sp>
+        <p:nvSpPr>
+          <p:cNvPr id="18" name="216 / 217">
+            <a:extLst xmlns:a="http://schemas.openxmlformats.org/drawingml/2006/main">
+              <a:ext uri="{FF2B5EF4-FFF2-40B4-BE49-F238E27FC236}">
+                <a16:creationId xmlns:a16="http://schemas.microsoft.com/office/drawing/2014/main" id="{A0C78099-AB82-4778-AC49-16144EA7E394}"/>
+              </a:ext>
+            </a:extLst>
+          </p:cNvPr>
+          <p:cNvSpPr>
+            <a:spLocks xmlns:a="http://schemas.openxmlformats.org/drawingml/2006/main" noGrp="1"/>
+          </p:cNvSpPr>
+          <p:nvPr/>
+        </p:nvSpPr>
+        <p:spPr>
+          <a:xfrm xmlns:a="http://schemas.openxmlformats.org/drawingml/2006/main">
+            <a:off x="5219700" y="3552825"/>
+            <a:ext cx="2095500" cy="571500"/>
+          </a:xfrm>
+          <a:prstGeom xmlns:a="http://schemas.openxmlformats.org/drawingml/2006/main" prst="rect">
+            <a:avLst/>
+          </a:prstGeom>
+          <a:noFill xmlns:a="http://schemas.openxmlformats.org/drawingml/2006/main"/>
+          <a:ln xmlns:a="http://schemas.openxmlformats.org/drawingml/2006/main" w="0">
+            <a:noFill/>
+          </a:ln>
+        </p:spPr>
+        <p:txBody>
+          <a:bodyPr xmlns:a="http://schemas.openxmlformats.org/drawingml/2006/main" wrap="square" lIns="0" tIns="0" rIns="0" bIns="0" anchor="t">
+            <a:noAutofit/>
+          </a:bodyPr>
+          <a:lstStyle xmlns:a="http://schemas.openxmlformats.org/drawingml/2006/main">
+            <a:defPPr algn="l">
+              <a:defRPr sz="2550" b="1">
+                <a:solidFill>
+                  <a:srgbClr val="48DDCC"/>
+                </a:solidFill>
+                <a:latin typeface="Arial"/>
+                <a:ea typeface="Arial"/>
+                <a:cs typeface="Arial"/>
+              </a:defRPr>
+            </a:defPPr>
+            <a:lvl1pPr algn="l">
+              <a:defRPr sz="2550" b="1">
+                <a:solidFill>
+                  <a:srgbClr val="48DDCC"/>
+                </a:solidFill>
+                <a:latin typeface="Arial"/>
+                <a:ea typeface="Arial"/>
+                <a:cs typeface="Arial"/>
+              </a:defRPr>
+            </a:lvl1pPr>
+            <a:lvl2pPr algn="l">
+              <a:defRPr sz="2550" b="1">
+                <a:solidFill>
+                  <a:srgbClr val="48DDCC"/>
+                </a:solidFill>
+                <a:latin typeface="Arial"/>
+                <a:ea typeface="Arial"/>
+                <a:cs typeface="Arial"/>
+              </a:defRPr>
+            </a:lvl2pPr>
+            <a:lvl3pPr algn="l">
+              <a:defRPr sz="2550" b="1">
+                <a:solidFill>
+                  <a:srgbClr val="48DDCC"/>
+                </a:solidFill>
+                <a:latin typeface="Arial"/>
+                <a:ea typeface="Arial"/>
+                <a:cs typeface="Arial"/>
+              </a:defRPr>
+            </a:lvl3pPr>
+            <a:lvl4pPr algn="l">
+              <a:defRPr sz="2550" b="1">
+                <a:solidFill>
+                  <a:srgbClr val="48DDCC"/>
+                </a:solidFill>
+                <a:latin typeface="Arial"/>
+                <a:ea typeface="Arial"/>
+                <a:cs typeface="Arial"/>
+              </a:defRPr>
+            </a:lvl4pPr>
+            <a:lvl5pPr algn="l">
+              <a:defRPr sz="2550" b="1">
+                <a:solidFill>
+                  <a:srgbClr val="48DDCC"/>
+                </a:solidFill>
+                <a:latin typeface="Arial"/>
+                <a:ea typeface="Arial"/>
+                <a:cs typeface="Arial"/>
+              </a:defRPr>
+            </a:lvl5pPr>
+            <a:lvl6pPr algn="l">
+              <a:defRPr sz="2550" b="1">
+                <a:solidFill>
+                  <a:srgbClr val="48DDCC"/>
+                </a:solidFill>
+                <a:latin typeface="Arial"/>
+                <a:ea typeface="Arial"/>
+                <a:cs typeface="Arial"/>
+              </a:defRPr>
+            </a:lvl6pPr>
+            <a:lvl7pPr algn="l">
+              <a:defRPr sz="2550" b="1">
+                <a:solidFill>
+                  <a:srgbClr val="48DDCC"/>
+                </a:solidFill>
+                <a:latin typeface="Arial"/>
+                <a:ea typeface="Arial"/>
+                <a:cs typeface="Arial"/>
+              </a:defRPr>
+            </a:lvl7pPr>
+            <a:lvl8pPr algn="l">
+              <a:defRPr sz="2550" b="1">
+                <a:solidFill>
+                  <a:srgbClr val="48DDCC"/>
+                </a:solidFill>
+                <a:latin typeface="Arial"/>
+                <a:ea typeface="Arial"/>
+                <a:cs typeface="Arial"/>
+              </a:defRPr>
+            </a:lvl8pPr>
+            <a:lvl9pPr algn="l">
+              <a:defRPr sz="2550" b="1">
+                <a:solidFill>
+                  <a:srgbClr val="48DDCC"/>
+                </a:solidFill>
+                <a:latin typeface="Arial"/>
+                <a:ea typeface="Arial"/>
+                <a:cs typeface="Arial"/>
+              </a:defRPr>
+            </a:lvl9pPr>
+          </a:lstStyle>
+          <a:p xmlns:a="http://schemas.openxmlformats.org/drawingml/2006/main">
+            <a:pPr algn="l">
+              <a:defRPr sz="2550" b="1">
+                <a:solidFill>
+                  <a:srgbClr val="48DDCC"/>
+                </a:solidFill>
+                <a:latin typeface="Arial"/>
+                <a:ea typeface="Arial"/>
+                <a:cs typeface="Arial"/>
+              </a:defRPr>
+            </a:pPr>
+            <a:r>
+              <a:rPr sz="2550" b="1">
+                <a:solidFill>
+                  <a:srgbClr val="48DDCC"/>
+                </a:solidFill>
+                <a:latin typeface="Arial"/>
+                <a:ea typeface="Arial"/>
+                <a:cs typeface="Arial"/>
+              </a:rPr>
+              <a:t>216 / 217</a:t>
+            </a:r>
+          </a:p>
+        </p:txBody>
+      </p:sp>
+      <p:sp>
+        <p:nvSpPr>
+          <p:cNvPr id="19" name="PHONE 9">
+            <a:extLst xmlns:a="http://schemas.openxmlformats.org/drawingml/2006/main">
+              <a:ext uri="{FF2B5EF4-FFF2-40B4-BE49-F238E27FC236}">
+                <a16:creationId xmlns:a16="http://schemas.microsoft.com/office/drawing/2014/main" id="{0FEE3330-CE01-45D5-AFCE-31A2449224EB}"/>
+              </a:ext>
+            </a:extLst>
+          </p:cNvPr>
+          <p:cNvSpPr>
+            <a:spLocks xmlns:a="http://schemas.openxmlformats.org/drawingml/2006/main" noGrp="1"/>
+          </p:cNvSpPr>
+          <p:nvPr/>
+        </p:nvSpPr>
+        <p:spPr>
+          <a:xfrm xmlns:a="http://schemas.openxmlformats.org/drawingml/2006/main">
+            <a:off x="7543800" y="3124200"/>
+            <a:ext cx="2095500" cy="333375"/>
+          </a:xfrm>
+          <a:prstGeom xmlns:a="http://schemas.openxmlformats.org/drawingml/2006/main" prst="rect">
+            <a:avLst/>
+          </a:prstGeom>
+          <a:noFill xmlns:a="http://schemas.openxmlformats.org/drawingml/2006/main"/>
+          <a:ln xmlns:a="http://schemas.openxmlformats.org/drawingml/2006/main" w="0">
+            <a:noFill/>
+          </a:ln>
+        </p:spPr>
+        <p:txBody>
+          <a:bodyPr xmlns:a="http://schemas.openxmlformats.org/drawingml/2006/main" wrap="square" lIns="0" tIns="0" rIns="0" bIns="0" anchor="t">
+            <a:noAutofit/>
+          </a:bodyPr>
+          <a:lstStyle xmlns:a="http://schemas.openxmlformats.org/drawingml/2006/main">
+            <a:defPPr algn="l">
+              <a:defRPr sz="1350" b="0">
+                <a:solidFill>
+                  <a:srgbClr val="AAB9D0"/>
+                </a:solidFill>
+                <a:latin typeface="Arial"/>
+                <a:ea typeface="Arial"/>
+                <a:cs typeface="Arial"/>
+              </a:defRPr>
+            </a:defPPr>
+            <a:lvl1pPr algn="l">
+              <a:defRPr sz="1350" b="0">
+                <a:solidFill>
+                  <a:srgbClr val="AAB9D0"/>
+                </a:solidFill>
+                <a:latin typeface="Arial"/>
+                <a:ea typeface="Arial"/>
+                <a:cs typeface="Arial"/>
+              </a:defRPr>
+            </a:lvl1pPr>
+            <a:lvl2pPr algn="l">
+              <a:defRPr sz="1350" b="0">
+                <a:solidFill>
+                  <a:srgbClr val="AAB9D0"/>
+                </a:solidFill>
+                <a:latin typeface="Arial"/>
+                <a:ea typeface="Arial"/>
+                <a:cs typeface="Arial"/>
+              </a:defRPr>
+            </a:lvl2pPr>
+            <a:lvl3pPr algn="l">
+              <a:defRPr sz="1350" b="0">
+                <a:solidFill>
+                  <a:srgbClr val="AAB9D0"/>
+                </a:solidFill>
+                <a:latin typeface="Arial"/>
+                <a:ea typeface="Arial"/>
+                <a:cs typeface="Arial"/>
+              </a:defRPr>
+            </a:lvl3pPr>
+            <a:lvl4pPr algn="l">
+              <a:defRPr sz="1350" b="0">
+                <a:solidFill>
+                  <a:srgbClr val="AAB9D0"/>
+                </a:solidFill>
+                <a:latin typeface="Arial"/>
+                <a:ea typeface="Arial"/>
+                <a:cs typeface="Arial"/>
+              </a:defRPr>
+            </a:lvl4pPr>
+            <a:lvl5pPr algn="l">
+              <a:defRPr sz="1350" b="0">
+                <a:solidFill>
+                  <a:srgbClr val="AAB9D0"/>
+                </a:solidFill>
+                <a:latin typeface="Arial"/>
+                <a:ea typeface="Arial"/>
+                <a:cs typeface="Arial"/>
+              </a:defRPr>
+            </a:lvl5pPr>
+            <a:lvl6pPr algn="l">
+              <a:defRPr sz="1350" b="0">
+                <a:solidFill>
+                  <a:srgbClr val="AAB9D0"/>
+                </a:solidFill>
+                <a:latin typeface="Arial"/>
+                <a:ea typeface="Arial"/>
+                <a:cs typeface="Arial"/>
+              </a:defRPr>
+            </a:lvl6pPr>
+            <a:lvl7pPr algn="l">
+              <a:defRPr sz="1350" b="0">
+                <a:solidFill>
+                  <a:srgbClr val="AAB9D0"/>
+                </a:solidFill>
+                <a:latin typeface="Arial"/>
+                <a:ea typeface="Arial"/>
+                <a:cs typeface="Arial"/>
+              </a:defRPr>
+            </a:lvl7pPr>
+            <a:lvl8pPr algn="l">
+              <a:defRPr sz="1350" b="0">
+                <a:solidFill>
+                  <a:srgbClr val="AAB9D0"/>
+                </a:solidFill>
+                <a:latin typeface="Arial"/>
+                <a:ea typeface="Arial"/>
+                <a:cs typeface="Arial"/>
+              </a:defRPr>
+            </a:lvl8pPr>
+            <a:lvl9pPr algn="l">
+              <a:defRPr sz="1350" b="0">
+                <a:solidFill>
+                  <a:srgbClr val="AAB9D0"/>
+                </a:solidFill>
+                <a:latin typeface="Arial"/>
+                <a:ea typeface="Arial"/>
+                <a:cs typeface="Arial"/>
+              </a:defRPr>
+            </a:lvl9pPr>
+          </a:lstStyle>
+          <a:p xmlns:a="http://schemas.openxmlformats.org/drawingml/2006/main">
+            <a:pPr algn="l">
+              <a:defRPr sz="1350" b="0">
+                <a:solidFill>
+                  <a:srgbClr val="AAB9D0"/>
+                </a:solidFill>
+                <a:latin typeface="Arial"/>
+                <a:ea typeface="Arial"/>
+                <a:cs typeface="Arial"/>
+              </a:defRPr>
+            </a:pPr>
+            <a:r>
+              <a:rPr sz="1350" b="0">
+                <a:solidFill>
+                  <a:srgbClr val="AAB9D0"/>
+                </a:solidFill>
+                <a:latin typeface="Arial"/>
+                <a:ea typeface="Arial"/>
+                <a:cs typeface="Arial"/>
+              </a:rPr>
+              <a:t>PHONE 9</a:t>
+            </a:r>
+          </a:p>
+        </p:txBody>
+      </p:sp>
+      <p:sp>
+        <p:nvSpPr>
+          <p:cNvPr id="20" name="218 / 219">
+            <a:extLst xmlns:a="http://schemas.openxmlformats.org/drawingml/2006/main">
+              <a:ext uri="{FF2B5EF4-FFF2-40B4-BE49-F238E27FC236}">
+                <a16:creationId xmlns:a16="http://schemas.microsoft.com/office/drawing/2014/main" id="{C1F80EE4-1E7A-4C33-9232-DFA3DE9CF969}"/>
+              </a:ext>
+            </a:extLst>
+          </p:cNvPr>
+          <p:cNvSpPr>
+            <a:spLocks xmlns:a="http://schemas.openxmlformats.org/drawingml/2006/main" noGrp="1"/>
+          </p:cNvSpPr>
+          <p:nvPr/>
+        </p:nvSpPr>
+        <p:spPr>
+          <a:xfrm xmlns:a="http://schemas.openxmlformats.org/drawingml/2006/main">
+            <a:off x="7543800" y="3552825"/>
+            <a:ext cx="2095500" cy="571500"/>
+          </a:xfrm>
+          <a:prstGeom xmlns:a="http://schemas.openxmlformats.org/drawingml/2006/main" prst="rect">
+            <a:avLst/>
+          </a:prstGeom>
+          <a:noFill xmlns:a="http://schemas.openxmlformats.org/drawingml/2006/main"/>
+          <a:ln xmlns:a="http://schemas.openxmlformats.org/drawingml/2006/main" w="0">
+            <a:noFill/>
+          </a:ln>
+        </p:spPr>
+        <p:txBody>
+          <a:bodyPr xmlns:a="http://schemas.openxmlformats.org/drawingml/2006/main" wrap="square" lIns="0" tIns="0" rIns="0" bIns="0" anchor="t">
+            <a:noAutofit/>
+          </a:bodyPr>
+          <a:lstStyle xmlns:a="http://schemas.openxmlformats.org/drawingml/2006/main">
+            <a:defPPr algn="l">
+              <a:defRPr sz="2550" b="1">
+                <a:solidFill>
+                  <a:srgbClr val="48DDCC"/>
+                </a:solidFill>
+                <a:latin typeface="Arial"/>
+                <a:ea typeface="Arial"/>
+                <a:cs typeface="Arial"/>
+              </a:defRPr>
+            </a:defPPr>
+            <a:lvl1pPr algn="l">
+              <a:defRPr sz="2550" b="1">
+                <a:solidFill>
+                  <a:srgbClr val="48DDCC"/>
+                </a:solidFill>
+                <a:latin typeface="Arial"/>
+                <a:ea typeface="Arial"/>
+                <a:cs typeface="Arial"/>
+              </a:defRPr>
+            </a:lvl1pPr>
+            <a:lvl2pPr algn="l">
+              <a:defRPr sz="2550" b="1">
+                <a:solidFill>
+                  <a:srgbClr val="48DDCC"/>
+                </a:solidFill>
+                <a:latin typeface="Arial"/>
+                <a:ea typeface="Arial"/>
+                <a:cs typeface="Arial"/>
+              </a:defRPr>
+            </a:lvl2pPr>
+            <a:lvl3pPr algn="l">
+              <a:defRPr sz="2550" b="1">
+                <a:solidFill>
+                  <a:srgbClr val="48DDCC"/>
+                </a:solidFill>
+                <a:latin typeface="Arial"/>
+                <a:ea typeface="Arial"/>
+                <a:cs typeface="Arial"/>
+              </a:defRPr>
+            </a:lvl3pPr>
+            <a:lvl4pPr algn="l">
+              <a:defRPr sz="2550" b="1">
+                <a:solidFill>
+                  <a:srgbClr val="48DDCC"/>
+                </a:solidFill>
+                <a:latin typeface="Arial"/>
+                <a:ea typeface="Arial"/>
+                <a:cs typeface="Arial"/>
+              </a:defRPr>
+            </a:lvl4pPr>
+            <a:lvl5pPr algn="l">
+              <a:defRPr sz="2550" b="1">
+                <a:solidFill>
+                  <a:srgbClr val="48DDCC"/>
+                </a:solidFill>
+                <a:latin typeface="Arial"/>
+                <a:ea typeface="Arial"/>
+                <a:cs typeface="Arial"/>
+              </a:defRPr>
+            </a:lvl5pPr>
+            <a:lvl6pPr algn="l">
+              <a:defRPr sz="2550" b="1">
+                <a:solidFill>
+                  <a:srgbClr val="48DDCC"/>
+                </a:solidFill>
+                <a:latin typeface="Arial"/>
+                <a:ea typeface="Arial"/>
+                <a:cs typeface="Arial"/>
+              </a:defRPr>
+            </a:lvl6pPr>
+            <a:lvl7pPr algn="l">
+              <a:defRPr sz="2550" b="1">
+                <a:solidFill>
+                  <a:srgbClr val="48DDCC"/>
+                </a:solidFill>
+                <a:latin typeface="Arial"/>
+                <a:ea typeface="Arial"/>
+                <a:cs typeface="Arial"/>
+              </a:defRPr>
+            </a:lvl7pPr>
+            <a:lvl8pPr algn="l">
+              <a:defRPr sz="2550" b="1">
+                <a:solidFill>
+                  <a:srgbClr val="48DDCC"/>
+                </a:solidFill>
+                <a:latin typeface="Arial"/>
+                <a:ea typeface="Arial"/>
+                <a:cs typeface="Arial"/>
+              </a:defRPr>
+            </a:lvl8pPr>
+            <a:lvl9pPr algn="l">
+              <a:defRPr sz="2550" b="1">
+                <a:solidFill>
+                  <a:srgbClr val="48DDCC"/>
+                </a:solidFill>
+                <a:latin typeface="Arial"/>
+                <a:ea typeface="Arial"/>
+                <a:cs typeface="Arial"/>
+              </a:defRPr>
+            </a:lvl9pPr>
+          </a:lstStyle>
+          <a:p xmlns:a="http://schemas.openxmlformats.org/drawingml/2006/main">
+            <a:pPr algn="l">
+              <a:defRPr sz="2550" b="1">
+                <a:solidFill>
+                  <a:srgbClr val="48DDCC"/>
+                </a:solidFill>
+                <a:latin typeface="Arial"/>
+                <a:ea typeface="Arial"/>
+                <a:cs typeface="Arial"/>
+              </a:defRPr>
+            </a:pPr>
+            <a:r>
+              <a:rPr sz="2550" b="1">
+                <a:solidFill>
+                  <a:srgbClr val="48DDCC"/>
+                </a:solidFill>
+                <a:latin typeface="Arial"/>
+                <a:ea typeface="Arial"/>
+                <a:cs typeface="Arial"/>
+              </a:rPr>
+              <a:t>218 / 219</a:t>
+            </a:r>
+          </a:p>
+        </p:txBody>
+      </p:sp>
+      <p:sp>
+        <p:nvSpPr>
+          <p:cNvPr id="21" name="PHONE 10">
+            <a:extLst xmlns:a="http://schemas.openxmlformats.org/drawingml/2006/main">
+              <a:ext uri="{FF2B5EF4-FFF2-40B4-BE49-F238E27FC236}">
+                <a16:creationId xmlns:a16="http://schemas.microsoft.com/office/drawing/2014/main" id="{6D97C988-D121-4A77-97E1-492A53D6E041}"/>
+              </a:ext>
+            </a:extLst>
+          </p:cNvPr>
+          <p:cNvSpPr>
+            <a:spLocks xmlns:a="http://schemas.openxmlformats.org/drawingml/2006/main" noGrp="1"/>
+          </p:cNvSpPr>
+          <p:nvPr/>
+        </p:nvSpPr>
+        <p:spPr>
+          <a:xfrm xmlns:a="http://schemas.openxmlformats.org/drawingml/2006/main">
+            <a:off x="9867900" y="3124200"/>
+            <a:ext cx="2095500" cy="333375"/>
+          </a:xfrm>
+          <a:prstGeom xmlns:a="http://schemas.openxmlformats.org/drawingml/2006/main" prst="rect">
+            <a:avLst/>
+          </a:prstGeom>
+          <a:noFill xmlns:a="http://schemas.openxmlformats.org/drawingml/2006/main"/>
+          <a:ln xmlns:a="http://schemas.openxmlformats.org/drawingml/2006/main" w="0">
+            <a:noFill/>
+          </a:ln>
+        </p:spPr>
+        <p:txBody>
+          <a:bodyPr xmlns:a="http://schemas.openxmlformats.org/drawingml/2006/main" wrap="square" lIns="0" tIns="0" rIns="0" bIns="0" anchor="t">
+            <a:noAutofit/>
+          </a:bodyPr>
+          <a:lstStyle xmlns:a="http://schemas.openxmlformats.org/drawingml/2006/main">
+            <a:defPPr algn="l">
+              <a:defRPr sz="1350" b="0">
+                <a:solidFill>
+                  <a:srgbClr val="AAB9D0"/>
+                </a:solidFill>
+                <a:latin typeface="Arial"/>
+                <a:ea typeface="Arial"/>
+                <a:cs typeface="Arial"/>
+              </a:defRPr>
+            </a:defPPr>
+            <a:lvl1pPr algn="l">
+              <a:defRPr sz="1350" b="0">
+                <a:solidFill>
+                  <a:srgbClr val="AAB9D0"/>
+                </a:solidFill>
+                <a:latin typeface="Arial"/>
+                <a:ea typeface="Arial"/>
+                <a:cs typeface="Arial"/>
+              </a:defRPr>
+            </a:lvl1pPr>
+            <a:lvl2pPr algn="l">
+              <a:defRPr sz="1350" b="0">
+                <a:solidFill>
+                  <a:srgbClr val="AAB9D0"/>
+                </a:solidFill>
+                <a:latin typeface="Arial"/>
+                <a:ea typeface="Arial"/>
+                <a:cs typeface="Arial"/>
+              </a:defRPr>
+            </a:lvl2pPr>
+            <a:lvl3pPr algn="l">
+              <a:defRPr sz="1350" b="0">
+                <a:solidFill>
+                  <a:srgbClr val="AAB9D0"/>
+                </a:solidFill>
+                <a:latin typeface="Arial"/>
+                <a:ea typeface="Arial"/>
+                <a:cs typeface="Arial"/>
+              </a:defRPr>
+            </a:lvl3pPr>
+            <a:lvl4pPr algn="l">
+              <a:defRPr sz="1350" b="0">
+                <a:solidFill>
+                  <a:srgbClr val="AAB9D0"/>
+                </a:solidFill>
+                <a:latin typeface="Arial"/>
+                <a:ea typeface="Arial"/>
+                <a:cs typeface="Arial"/>
+              </a:defRPr>
+            </a:lvl4pPr>
+            <a:lvl5pPr algn="l">
+              <a:defRPr sz="1350" b="0">
+                <a:solidFill>
+                  <a:srgbClr val="AAB9D0"/>
+                </a:solidFill>
+                <a:latin typeface="Arial"/>
+                <a:ea typeface="Arial"/>
+                <a:cs typeface="Arial"/>
+              </a:defRPr>
+            </a:lvl5pPr>
+            <a:lvl6pPr algn="l">
+              <a:defRPr sz="1350" b="0">
+                <a:solidFill>
+                  <a:srgbClr val="AAB9D0"/>
+                </a:solidFill>
+                <a:latin typeface="Arial"/>
+                <a:ea typeface="Arial"/>
+                <a:cs typeface="Arial"/>
+              </a:defRPr>
+            </a:lvl6pPr>
+            <a:lvl7pPr algn="l">
+              <a:defRPr sz="1350" b="0">
+                <a:solidFill>
+                  <a:srgbClr val="AAB9D0"/>
+                </a:solidFill>
+                <a:latin typeface="Arial"/>
+                <a:ea typeface="Arial"/>
+                <a:cs typeface="Arial"/>
+              </a:defRPr>
+            </a:lvl7pPr>
+            <a:lvl8pPr algn="l">
+              <a:defRPr sz="1350" b="0">
+                <a:solidFill>
+                  <a:srgbClr val="AAB9D0"/>
+                </a:solidFill>
+                <a:latin typeface="Arial"/>
+                <a:ea typeface="Arial"/>
+                <a:cs typeface="Arial"/>
+              </a:defRPr>
+            </a:lvl8pPr>
+            <a:lvl9pPr algn="l">
+              <a:defRPr sz="1350" b="0">
+                <a:solidFill>
+                  <a:srgbClr val="AAB9D0"/>
+                </a:solidFill>
+                <a:latin typeface="Arial"/>
+                <a:ea typeface="Arial"/>
+                <a:cs typeface="Arial"/>
+              </a:defRPr>
+            </a:lvl9pPr>
+          </a:lstStyle>
+          <a:p xmlns:a="http://schemas.openxmlformats.org/drawingml/2006/main">
+            <a:pPr algn="l">
+              <a:defRPr sz="1350" b="0">
+                <a:solidFill>
+                  <a:srgbClr val="AAB9D0"/>
+                </a:solidFill>
+                <a:latin typeface="Arial"/>
+                <a:ea typeface="Arial"/>
+                <a:cs typeface="Arial"/>
+              </a:defRPr>
+            </a:pPr>
+            <a:r>
+              <a:rPr sz="1350" b="0">
+                <a:solidFill>
+                  <a:srgbClr val="AAB9D0"/>
+                </a:solidFill>
+                <a:latin typeface="Arial"/>
+                <a:ea typeface="Arial"/>
+                <a:cs typeface="Arial"/>
+              </a:rPr>
+              <a:t>PHONE 10</a:t>
+            </a:r>
+          </a:p>
+        </p:txBody>
+      </p:sp>
+      <p:sp>
+        <p:nvSpPr>
+          <p:cNvPr id="22" name="220 / 221">
+            <a:extLst xmlns:a="http://schemas.openxmlformats.org/drawingml/2006/main">
+              <a:ext uri="{FF2B5EF4-FFF2-40B4-BE49-F238E27FC236}">
+                <a16:creationId xmlns:a16="http://schemas.microsoft.com/office/drawing/2014/main" id="{9F94D026-B3AE-4C1F-A545-5653B68E963B}"/>
+              </a:ext>
+            </a:extLst>
+          </p:cNvPr>
+          <p:cNvSpPr>
+            <a:spLocks xmlns:a="http://schemas.openxmlformats.org/drawingml/2006/main" noGrp="1"/>
+          </p:cNvSpPr>
+          <p:nvPr/>
+        </p:nvSpPr>
+        <p:spPr>
+          <a:xfrm xmlns:a="http://schemas.openxmlformats.org/drawingml/2006/main">
+            <a:off x="9867900" y="3552825"/>
+            <a:ext cx="2095500" cy="571500"/>
+          </a:xfrm>
+          <a:prstGeom xmlns:a="http://schemas.openxmlformats.org/drawingml/2006/main" prst="rect">
+            <a:avLst/>
+          </a:prstGeom>
+          <a:noFill xmlns:a="http://schemas.openxmlformats.org/drawingml/2006/main"/>
+          <a:ln xmlns:a="http://schemas.openxmlformats.org/drawingml/2006/main" w="0">
+            <a:noFill/>
+          </a:ln>
+        </p:spPr>
+        <p:txBody>
+          <a:bodyPr xmlns:a="http://schemas.openxmlformats.org/drawingml/2006/main" wrap="square" lIns="0" tIns="0" rIns="0" bIns="0" anchor="t">
+            <a:noAutofit/>
+          </a:bodyPr>
+          <a:lstStyle xmlns:a="http://schemas.openxmlformats.org/drawingml/2006/main">
+            <a:defPPr algn="l">
+              <a:defRPr sz="2550" b="1">
+                <a:solidFill>
+                  <a:srgbClr val="48DDCC"/>
+                </a:solidFill>
+                <a:latin typeface="Arial"/>
+                <a:ea typeface="Arial"/>
+                <a:cs typeface="Arial"/>
+              </a:defRPr>
+            </a:defPPr>
+            <a:lvl1pPr algn="l">
+              <a:defRPr sz="2550" b="1">
+                <a:solidFill>
+                  <a:srgbClr val="48DDCC"/>
+                </a:solidFill>
+                <a:latin typeface="Arial"/>
+                <a:ea typeface="Arial"/>
+                <a:cs typeface="Arial"/>
+              </a:defRPr>
+            </a:lvl1pPr>
+            <a:lvl2pPr algn="l">
+              <a:defRPr sz="2550" b="1">
+                <a:solidFill>
+                  <a:srgbClr val="48DDCC"/>
+                </a:solidFill>
+                <a:latin typeface="Arial"/>
+                <a:ea typeface="Arial"/>
+                <a:cs typeface="Arial"/>
+              </a:defRPr>
+            </a:lvl2pPr>
+            <a:lvl3pPr algn="l">
+              <a:defRPr sz="2550" b="1">
+                <a:solidFill>
+                  <a:srgbClr val="48DDCC"/>
+                </a:solidFill>
+                <a:latin typeface="Arial"/>
+                <a:ea typeface="Arial"/>
+                <a:cs typeface="Arial"/>
+              </a:defRPr>
+            </a:lvl3pPr>
+            <a:lvl4pPr algn="l">
+              <a:defRPr sz="2550" b="1">
+                <a:solidFill>
+                  <a:srgbClr val="48DDCC"/>
+                </a:solidFill>
+                <a:latin typeface="Arial"/>
+                <a:ea typeface="Arial"/>
+                <a:cs typeface="Arial"/>
+              </a:defRPr>
+            </a:lvl4pPr>
+            <a:lvl5pPr algn="l">
+              <a:defRPr sz="2550" b="1">
+                <a:solidFill>
+                  <a:srgbClr val="48DDCC"/>
+                </a:solidFill>
+                <a:latin typeface="Arial"/>
+                <a:ea typeface="Arial"/>
+                <a:cs typeface="Arial"/>
+              </a:defRPr>
+            </a:lvl5pPr>
+            <a:lvl6pPr algn="l">
+              <a:defRPr sz="2550" b="1">
+                <a:solidFill>
+                  <a:srgbClr val="48DDCC"/>
+                </a:solidFill>
+                <a:latin typeface="Arial"/>
+                <a:ea typeface="Arial"/>
+                <a:cs typeface="Arial"/>
+              </a:defRPr>
+            </a:lvl6pPr>
+            <a:lvl7pPr algn="l">
+              <a:defRPr sz="2550" b="1">
+                <a:solidFill>
+                  <a:srgbClr val="48DDCC"/>
+                </a:solidFill>
+                <a:latin typeface="Arial"/>
+                <a:ea typeface="Arial"/>
+                <a:cs typeface="Arial"/>
+              </a:defRPr>
+            </a:lvl7pPr>
+            <a:lvl8pPr algn="l">
+              <a:defRPr sz="2550" b="1">
+                <a:solidFill>
+                  <a:srgbClr val="48DDCC"/>
+                </a:solidFill>
+                <a:latin typeface="Arial"/>
+                <a:ea typeface="Arial"/>
+                <a:cs typeface="Arial"/>
+              </a:defRPr>
+            </a:lvl8pPr>
+            <a:lvl9pPr algn="l">
+              <a:defRPr sz="2550" b="1">
+                <a:solidFill>
+                  <a:srgbClr val="48DDCC"/>
+                </a:solidFill>
+                <a:latin typeface="Arial"/>
+                <a:ea typeface="Arial"/>
+                <a:cs typeface="Arial"/>
+              </a:defRPr>
+            </a:lvl9pPr>
+          </a:lstStyle>
+          <a:p xmlns:a="http://schemas.openxmlformats.org/drawingml/2006/main">
+            <a:pPr algn="l">
+              <a:defRPr sz="2550" b="1">
+                <a:solidFill>
+                  <a:srgbClr val="48DDCC"/>
+                </a:solidFill>
+                <a:latin typeface="Arial"/>
+                <a:ea typeface="Arial"/>
+                <a:cs typeface="Arial"/>
+              </a:defRPr>
+            </a:pPr>
+            <a:r>
+              <a:rPr sz="2550" b="1">
+                <a:solidFill>
+                  <a:srgbClr val="48DDCC"/>
+                </a:solidFill>
+                <a:latin typeface="Arial"/>
+                <a:ea typeface="Arial"/>
+                <a:cs typeface="Arial"/>
+              </a:rPr>
+              <a:t>220 / 221</a:t>
+            </a:r>
+          </a:p>
+        </p:txBody>
+      </p:sp>
+      <p:sp>
+        <p:nvSpPr>
+          <p:cNvPr id="23" name="620: one primary line per Cisco device">
+            <a:extLst xmlns:a="http://schemas.openxmlformats.org/drawingml/2006/main">
+              <a:ext uri="{FF2B5EF4-FFF2-40B4-BE49-F238E27FC236}">
+                <a16:creationId xmlns:a16="http://schemas.microsoft.com/office/drawing/2014/main" id="{8A83306E-5E00-4729-A204-307AA19B3B93}"/>
+              </a:ext>
+            </a:extLst>
+          </p:cNvPr>
+          <p:cNvSpPr>
+            <a:spLocks xmlns:a="http://schemas.openxmlformats.org/drawingml/2006/main" noGrp="1"/>
+          </p:cNvSpPr>
+          <p:nvPr/>
+        </p:nvSpPr>
+        <p:spPr>
+          <a:xfrm xmlns:a="http://schemas.openxmlformats.org/drawingml/2006/main">
+            <a:off x="571500" y="4886325"/>
             <a:ext cx="10953750" cy="819150"/>
           </a:xfrm>
           <a:prstGeom xmlns:a="http://schemas.openxmlformats.org/drawingml/2006/main" prst="rect">
@@ -15759,7 +17094,7 @@
           </a:bodyPr>
           <a:lstStyle xmlns:a="http://schemas.openxmlformats.org/drawingml/2006/main">
             <a:defPPr algn="l">
-              <a:defRPr sz="2400" b="1">
+              <a:defRPr sz="2250" b="1">
                 <a:solidFill>
                   <a:srgbClr val="F5F7FB"/>
                 </a:solidFill>
@@ -15769,7 +17104,7 @@
               </a:defRPr>
             </a:defPPr>
             <a:lvl1pPr algn="l">
-              <a:defRPr sz="2400" b="1">
+              <a:defRPr sz="2250" b="1">
                 <a:solidFill>
                   <a:srgbClr val="F5F7FB"/>
                 </a:solidFill>
@@ -15779,7 +17114,7 @@
               </a:defRPr>
             </a:lvl1pPr>
             <a:lvl2pPr algn="l">
-              <a:defRPr sz="2400" b="1">
+              <a:defRPr sz="2250" b="1">
                 <a:solidFill>
                   <a:srgbClr val="F5F7FB"/>
                 </a:solidFill>
@@ -15789,7 +17124,7 @@
               </a:defRPr>
             </a:lvl2pPr>
             <a:lvl3pPr algn="l">
-              <a:defRPr sz="2400" b="1">
+              <a:defRPr sz="2250" b="1">
                 <a:solidFill>
                   <a:srgbClr val="F5F7FB"/>
                 </a:solidFill>
@@ -15799,7 +17134,7 @@
               </a:defRPr>
             </a:lvl3pPr>
             <a:lvl4pPr algn="l">
-              <a:defRPr sz="2400" b="1">
+              <a:defRPr sz="2250" b="1">
                 <a:solidFill>
                   <a:srgbClr val="F5F7FB"/>
                 </a:solidFill>
@@ -15809,7 +17144,7 @@
               </a:defRPr>
             </a:lvl4pPr>
             <a:lvl5pPr algn="l">
-              <a:defRPr sz="2400" b="1">
+              <a:defRPr sz="2250" b="1">
                 <a:solidFill>
                   <a:srgbClr val="F5F7FB"/>
                 </a:solidFill>
@@ -15819,7 +17154,7 @@
               </a:defRPr>
             </a:lvl5pPr>
             <a:lvl6pPr algn="l">
-              <a:defRPr sz="2400" b="1">
+              <a:defRPr sz="2250" b="1">
                 <a:solidFill>
                   <a:srgbClr val="F5F7FB"/>
                 </a:solidFill>
@@ -15829,7 +17164,7 @@
               </a:defRPr>
             </a:lvl6pPr>
             <a:lvl7pPr algn="l">
-              <a:defRPr sz="2400" b="1">
+              <a:defRPr sz="2250" b="1">
                 <a:solidFill>
                   <a:srgbClr val="F5F7FB"/>
                 </a:solidFill>
@@ -15839,7 +17174,7 @@
               </a:defRPr>
             </a:lvl7pPr>
             <a:lvl8pPr algn="l">
-              <a:defRPr sz="2400" b="1">
+              <a:defRPr sz="2250" b="1">
                 <a:solidFill>
                   <a:srgbClr val="F5F7FB"/>
                 </a:solidFill>
@@ -15849,7 +17184,7 @@
               </a:defRPr>
             </a:lvl8pPr>
             <a:lvl9pPr algn="l">
-              <a:defRPr sz="2400" b="1">
+              <a:defRPr sz="2250" b="1">
                 <a:solidFill>
                   <a:srgbClr val="F5F7FB"/>
                 </a:solidFill>
@@ -15861,7 +17196,7 @@
           </a:lstStyle>
           <a:p xmlns:a="http://schemas.openxmlformats.org/drawingml/2006/main">
             <a:pPr algn="l">
-              <a:defRPr sz="2400" b="1">
+              <a:defRPr sz="2250" b="1">
                 <a:solidFill>
                   <a:srgbClr val="F5F7FB"/>
                 </a:solidFill>
@@ -15871,7 +17206,7 @@
               </a:defRPr>
             </a:pPr>
             <a:r>
-              <a:rPr sz="2400" b="1">
+              <a:rPr sz="2250" b="1">
                 <a:solidFill>
                   <a:srgbClr val="F5F7FB"/>
                 </a:solidFill>
@@ -15879,17 +17214,17 @@
                 <a:ea typeface="Arial"/>
                 <a:cs typeface="Arial"/>
               </a:rPr>
-              <a:t>620 rings the primary line of each phone</a:t>
+              <a:t>620: one primary line per Cisco device</a:t>
             </a:r>
           </a:p>
         </p:txBody>
       </p:sp>
       <p:sp>
         <p:nvSpPr>
-          <p:cNvPr id="16" name="201, 203, 205 and 207 share the group. DND skips that phone.">
+          <p:cNvPr id="24" name="201 · 203 · 205 · 207 · 210 · 212 · 214 · 216 · 218 · 220">
             <a:extLst xmlns:a="http://schemas.openxmlformats.org/drawingml/2006/main">
               <a:ext uri="{FF2B5EF4-FFF2-40B4-BE49-F238E27FC236}">
-                <a16:creationId xmlns:a16="http://schemas.microsoft.com/office/drawing/2014/main" id="{AC80570C-E62B-4C93-93E5-4D77455596EE}"/>
+                <a16:creationId xmlns:a16="http://schemas.microsoft.com/office/drawing/2014/main" id="{21B0FF67-4360-4ACD-BB62-B467BD5A27C4}"/>
               </a:ext>
             </a:extLst>
           </p:cNvPr>
@@ -15900,8 +17235,8 @@
         </p:nvSpPr>
         <p:spPr>
           <a:xfrm xmlns:a="http://schemas.openxmlformats.org/drawingml/2006/main">
-            <a:off x="571500" y="5248275"/>
-            <a:ext cx="10953750" cy="457200"/>
+            <a:off x="571500" y="5353050"/>
+            <a:ext cx="10953750" cy="419100"/>
           </a:xfrm>
           <a:prstGeom xmlns:a="http://schemas.openxmlformats.org/drawingml/2006/main" prst="rect">
             <a:avLst/>
@@ -16037,17 +17372,17 @@
                 <a:ea typeface="Arial"/>
                 <a:cs typeface="Arial"/>
               </a:rPr>
-              <a:t>201, 203, 205 and 207 share the group. DND skips that phone.</a:t>
+              <a:t>201 · 203 · 205 · 207 · 210 · 212 · 214 · 216 · 218 · 220</a:t>
             </a:r>
           </a:p>
         </p:txBody>
       </p:sp>
       <p:sp>
         <p:nvSpPr>
-          <p:cNvPr id="17" name="Eight registrations and local call checks passed. Cross-phone tes">
+          <p:cNvPr id="25" name="Keep each device’s identity and credentials when unplugged. Onlin">
             <a:extLst xmlns:a="http://schemas.openxmlformats.org/drawingml/2006/main">
               <a:ext uri="{FF2B5EF4-FFF2-40B4-BE49-F238E27FC236}">
-                <a16:creationId xmlns:a16="http://schemas.microsoft.com/office/drawing/2014/main" id="{ECC84B2D-9B5D-475B-B220-0AEB5A028975}"/>
+                <a16:creationId xmlns:a16="http://schemas.microsoft.com/office/drawing/2014/main" id="{439BE5F6-150F-4E9E-A44A-32CA2BD5EF1E}"/>
               </a:ext>
             </a:extLst>
           </p:cNvPr>
@@ -16195,7 +17530,7 @@
                 <a:ea typeface="Arial"/>
                 <a:cs typeface="Arial"/>
               </a:rPr>
-              <a:t>Eight registrations and local call checks passed. Cross-phone tests remain separate.</a:t>
+              <a:t>Keep each device’s identity and credentials when unplugged. Online status follows the connected phones.</a:t>
             </a:r>
           </a:p>
         </p:txBody>
@@ -16203,7 +17538,7 @@
     </p:spTree>
     <p:extLst>
       <p:ext uri="{BB962C8B-B14F-4D97-AF65-F5344CB8AC3E}">
-        <p14:creationId xmlns:p14="http://schemas.microsoft.com/office/powerpoint/2010/main" val="1990192390"/>
+        <p14:creationId xmlns:p14="http://schemas.microsoft.com/office/powerpoint/2010/main" val="1102724630"/>
       </p:ext>
     </p:extLst>
   </p:cSld>
@@ -16234,7 +17569,7 @@
           <p:cNvPr id="14" name="Home Assistant phone controls">
             <a:extLst xmlns:a="http://schemas.openxmlformats.org/drawingml/2006/main">
               <a:ext uri="{FF2B5EF4-FFF2-40B4-BE49-F238E27FC236}">
-                <a16:creationId xmlns:a16="http://schemas.microsoft.com/office/drawing/2014/main" id="{3A91B740-6F4E-4E3C-8CED-A12D4CEE83E8}"/>
+                <a16:creationId xmlns:a16="http://schemas.microsoft.com/office/drawing/2014/main" id="{40F27DFA-7B0E-4F21-8807-665A20D711F4}"/>
               </a:ext>
             </a:extLst>
           </p:cNvPr>
@@ -16392,7 +17727,7 @@
           <p:cNvPr id="2" name="16">
             <a:extLst xmlns:a="http://schemas.openxmlformats.org/drawingml/2006/main">
               <a:ext uri="{FF2B5EF4-FFF2-40B4-BE49-F238E27FC236}">
-                <a16:creationId xmlns:a16="http://schemas.microsoft.com/office/drawing/2014/main" id="{BA606C63-00B3-40C6-95A0-E3C6B4ABB3A0}"/>
+                <a16:creationId xmlns:a16="http://schemas.microsoft.com/office/drawing/2014/main" id="{C7B279E1-5DC9-4EE9-9173-53DB826A89A7}"/>
               </a:ext>
             </a:extLst>
           </p:cNvPr>
@@ -16547,10 +17882,10 @@
       </p:sp>
       <p:sp>
         <p:nvSpPr>
-          <p:cNvPr id="3" name="116">
+          <p:cNvPr id="3" name="290">
             <a:extLst xmlns:a="http://schemas.openxmlformats.org/drawingml/2006/main">
               <a:ext uri="{FF2B5EF4-FFF2-40B4-BE49-F238E27FC236}">
-                <a16:creationId xmlns:a16="http://schemas.microsoft.com/office/drawing/2014/main" id="{CE523432-D045-4212-AE35-019B91964C4A}"/>
+                <a16:creationId xmlns:a16="http://schemas.microsoft.com/office/drawing/2014/main" id="{BEBEC94B-8C1C-4B24-B1A0-4183486CE6E7}"/>
               </a:ext>
             </a:extLst>
           </p:cNvPr>
@@ -16698,17 +18033,17 @@
                 <a:ea typeface="Arial"/>
                 <a:cs typeface="Arial"/>
               </a:rPr>
-              <a:t>116</a:t>
+              <a:t>290</a:t>
             </a:r>
           </a:p>
         </p:txBody>
       </p:sp>
       <p:sp>
         <p:nvSpPr>
-          <p:cNvPr id="4" name="control entities">
+          <p:cNvPr id="4" name="controls across ten phones">
             <a:extLst xmlns:a="http://schemas.openxmlformats.org/drawingml/2006/main">
               <a:ext uri="{FF2B5EF4-FFF2-40B4-BE49-F238E27FC236}">
-                <a16:creationId xmlns:a16="http://schemas.microsoft.com/office/drawing/2014/main" id="{E5FFD2B9-94C1-4364-8EB8-AC63BBABAC13}"/>
+                <a16:creationId xmlns:a16="http://schemas.microsoft.com/office/drawing/2014/main" id="{D39E2F4D-79F2-4021-BDDB-AB4C3E3BDD98}"/>
               </a:ext>
             </a:extLst>
           </p:cNvPr>
@@ -16720,7 +18055,7 @@
         <p:spPr>
           <a:xfrm xmlns:a="http://schemas.openxmlformats.org/drawingml/2006/main">
             <a:off x="619125" y="3409950"/>
-            <a:ext cx="3714750" cy="523875"/>
+            <a:ext cx="3714750" cy="904875"/>
           </a:xfrm>
           <a:prstGeom xmlns:a="http://schemas.openxmlformats.org/drawingml/2006/main" prst="rect">
             <a:avLst/>
@@ -16736,7 +18071,7 @@
           </a:bodyPr>
           <a:lstStyle xmlns:a="http://schemas.openxmlformats.org/drawingml/2006/main">
             <a:defPPr algn="l">
-              <a:defRPr sz="2250" b="0">
+              <a:defRPr sz="2100" b="0">
                 <a:solidFill>
                   <a:srgbClr val="AAB9D0"/>
                 </a:solidFill>
@@ -16746,7 +18081,7 @@
               </a:defRPr>
             </a:defPPr>
             <a:lvl1pPr algn="l">
-              <a:defRPr sz="2250" b="0">
+              <a:defRPr sz="2100" b="0">
                 <a:solidFill>
                   <a:srgbClr val="AAB9D0"/>
                 </a:solidFill>
@@ -16756,7 +18091,7 @@
               </a:defRPr>
             </a:lvl1pPr>
             <a:lvl2pPr algn="l">
-              <a:defRPr sz="2250" b="0">
+              <a:defRPr sz="2100" b="0">
                 <a:solidFill>
                   <a:srgbClr val="AAB9D0"/>
                 </a:solidFill>
@@ -16766,7 +18101,7 @@
               </a:defRPr>
             </a:lvl2pPr>
             <a:lvl3pPr algn="l">
-              <a:defRPr sz="2250" b="0">
+              <a:defRPr sz="2100" b="0">
                 <a:solidFill>
                   <a:srgbClr val="AAB9D0"/>
                 </a:solidFill>
@@ -16776,7 +18111,7 @@
               </a:defRPr>
             </a:lvl3pPr>
             <a:lvl4pPr algn="l">
-              <a:defRPr sz="2250" b="0">
+              <a:defRPr sz="2100" b="0">
                 <a:solidFill>
                   <a:srgbClr val="AAB9D0"/>
                 </a:solidFill>
@@ -16786,7 +18121,7 @@
               </a:defRPr>
             </a:lvl4pPr>
             <a:lvl5pPr algn="l">
-              <a:defRPr sz="2250" b="0">
+              <a:defRPr sz="2100" b="0">
                 <a:solidFill>
                   <a:srgbClr val="AAB9D0"/>
                 </a:solidFill>
@@ -16796,7 +18131,7 @@
               </a:defRPr>
             </a:lvl5pPr>
             <a:lvl6pPr algn="l">
-              <a:defRPr sz="2250" b="0">
+              <a:defRPr sz="2100" b="0">
                 <a:solidFill>
                   <a:srgbClr val="AAB9D0"/>
                 </a:solidFill>
@@ -16806,7 +18141,7 @@
               </a:defRPr>
             </a:lvl6pPr>
             <a:lvl7pPr algn="l">
-              <a:defRPr sz="2250" b="0">
+              <a:defRPr sz="2100" b="0">
                 <a:solidFill>
                   <a:srgbClr val="AAB9D0"/>
                 </a:solidFill>
@@ -16816,7 +18151,7 @@
               </a:defRPr>
             </a:lvl7pPr>
             <a:lvl8pPr algn="l">
-              <a:defRPr sz="2250" b="0">
+              <a:defRPr sz="2100" b="0">
                 <a:solidFill>
                   <a:srgbClr val="AAB9D0"/>
                 </a:solidFill>
@@ -16826,7 +18161,7 @@
               </a:defRPr>
             </a:lvl8pPr>
             <a:lvl9pPr algn="l">
-              <a:defRPr sz="2250" b="0">
+              <a:defRPr sz="2100" b="0">
                 <a:solidFill>
                   <a:srgbClr val="AAB9D0"/>
                 </a:solidFill>
@@ -16838,7 +18173,7 @@
           </a:lstStyle>
           <a:p xmlns:a="http://schemas.openxmlformats.org/drawingml/2006/main">
             <a:pPr algn="l">
-              <a:defRPr sz="2250" b="0">
+              <a:defRPr sz="2100" b="0">
                 <a:solidFill>
                   <a:srgbClr val="AAB9D0"/>
                 </a:solidFill>
@@ -16848,7 +18183,7 @@
               </a:defRPr>
             </a:pPr>
             <a:r>
-              <a:rPr sz="2250" b="0">
+              <a:rPr sz="2100" b="0">
                 <a:solidFill>
                   <a:srgbClr val="AAB9D0"/>
                 </a:solidFill>
@@ -16856,7 +18191,7 @@
                 <a:ea typeface="Arial"/>
                 <a:cs typeface="Arial"/>
               </a:rPr>
-              <a:t>control entities</a:t>
+              <a:t>controls across ten phones</a:t>
             </a:r>
           </a:p>
         </p:txBody>
@@ -16866,7 +18201,7 @@
           <p:cNvPr id="5" name="Call controls">
             <a:extLst xmlns:a="http://schemas.openxmlformats.org/drawingml/2006/main">
               <a:ext uri="{FF2B5EF4-FFF2-40B4-BE49-F238E27FC236}">
-                <a16:creationId xmlns:a16="http://schemas.microsoft.com/office/drawing/2014/main" id="{A23B0723-44B6-42E7-8248-8BDF1C70EEB2}"/>
+                <a16:creationId xmlns:a16="http://schemas.microsoft.com/office/drawing/2014/main" id="{CCB6B624-843F-4B03-85A2-FE27E4436787}"/>
               </a:ext>
             </a:extLst>
           </p:cNvPr>
@@ -17024,7 +18359,7 @@
           <p:cNvPr id="6" name="Line, dial, answer and exact-channel hangup">
             <a:extLst xmlns:a="http://schemas.openxmlformats.org/drawingml/2006/main">
               <a:ext uri="{FF2B5EF4-FFF2-40B4-BE49-F238E27FC236}">
-                <a16:creationId xmlns:a16="http://schemas.microsoft.com/office/drawing/2014/main" id="{5E4C5AB1-3189-483B-84C8-F5B30BB25C6F}"/>
+                <a16:creationId xmlns:a16="http://schemas.microsoft.com/office/drawing/2014/main" id="{DE76919C-F6D8-4300-9399-B344A8743BA6}"/>
               </a:ext>
             </a:extLst>
           </p:cNvPr>
@@ -17182,7 +18517,7 @@
           <p:cNvPr id="7" name="Personal settings">
             <a:extLst xmlns:a="http://schemas.openxmlformats.org/drawingml/2006/main">
               <a:ext uri="{FF2B5EF4-FFF2-40B4-BE49-F238E27FC236}">
-                <a16:creationId xmlns:a16="http://schemas.microsoft.com/office/drawing/2014/main" id="{30D88A6F-E57A-433F-A162-38108A56941F}"/>
+                <a16:creationId xmlns:a16="http://schemas.microsoft.com/office/drawing/2014/main" id="{418145F6-E562-4EBB-8998-E1EE63B89680}"/>
               </a:ext>
             </a:extLst>
           </p:cNvPr>
@@ -17340,7 +18675,7 @@
           <p:cNvPr id="8" name="PBX DND and optional normal-call auto-answer">
             <a:extLst xmlns:a="http://schemas.openxmlformats.org/drawingml/2006/main">
               <a:ext uri="{FF2B5EF4-FFF2-40B4-BE49-F238E27FC236}">
-                <a16:creationId xmlns:a16="http://schemas.microsoft.com/office/drawing/2014/main" id="{C7D1A554-6EC3-4105-9281-C4E68C2018B4}"/>
+                <a16:creationId xmlns:a16="http://schemas.microsoft.com/office/drawing/2014/main" id="{7649DC98-2FEE-4455-AB11-72C8849348B1}"/>
               </a:ext>
             </a:extLst>
           </p:cNvPr>
@@ -17498,7 +18833,7 @@
           <p:cNvPr id="9" name="Schedules">
             <a:extLst xmlns:a="http://schemas.openxmlformats.org/drawingml/2006/main">
               <a:ext uri="{FF2B5EF4-FFF2-40B4-BE49-F238E27FC236}">
-                <a16:creationId xmlns:a16="http://schemas.microsoft.com/office/drawing/2014/main" id="{AB52DBF3-4716-4C98-BBC3-F305EF1CDB56}"/>
+                <a16:creationId xmlns:a16="http://schemas.microsoft.com/office/drawing/2014/main" id="{353CB8E8-A776-4692-87F2-D4F66B2F9583}"/>
               </a:ext>
             </a:extLst>
           </p:cNvPr>
@@ -17656,7 +18991,7 @@
           <p:cNvPr id="10" name="Timers and weekdays with a Stop alert control">
             <a:extLst xmlns:a="http://schemas.openxmlformats.org/drawingml/2006/main">
               <a:ext uri="{FF2B5EF4-FFF2-40B4-BE49-F238E27FC236}">
-                <a16:creationId xmlns:a16="http://schemas.microsoft.com/office/drawing/2014/main" id="{18D52542-F49C-4543-A443-D179BC43A4FD}"/>
+                <a16:creationId xmlns:a16="http://schemas.microsoft.com/office/drawing/2014/main" id="{811D499D-E215-4DF6-9CEA-EF73CC8E4D27}"/>
               </a:ext>
             </a:extLst>
           </p:cNvPr>
@@ -17814,7 +19149,7 @@
           <p:cNvPr id="11" name="Phone screen">
             <a:extLst xmlns:a="http://schemas.openxmlformats.org/drawingml/2006/main">
               <a:ext uri="{FF2B5EF4-FFF2-40B4-BE49-F238E27FC236}">
-                <a16:creationId xmlns:a16="http://schemas.microsoft.com/office/drawing/2014/main" id="{D0571B3B-79BD-4BAE-A075-B1AEFB85A3C6}"/>
+                <a16:creationId xmlns:a16="http://schemas.microsoft.com/office/drawing/2014/main" id="{24E2C84C-C62D-44A8-9C42-8E00E3A76229}"/>
               </a:ext>
             </a:extLst>
           </p:cNvPr>
@@ -17972,7 +19307,7 @@
           <p:cNvPr id="12" name="Authenticated text and approved images">
             <a:extLst xmlns:a="http://schemas.openxmlformats.org/drawingml/2006/main">
               <a:ext uri="{FF2B5EF4-FFF2-40B4-BE49-F238E27FC236}">
-                <a16:creationId xmlns:a16="http://schemas.microsoft.com/office/drawing/2014/main" id="{8EAD403B-283A-4A5F-BBDC-CF66510AE4F5}"/>
+                <a16:creationId xmlns:a16="http://schemas.microsoft.com/office/drawing/2014/main" id="{501D263D-4BE4-401A-AB42-A844F627ED3A}"/>
               </a:ext>
             </a:extLst>
           </p:cNvPr>
@@ -18127,10 +19462,10 @@
       </p:sp>
       <p:sp>
         <p:nvSpPr>
-          <p:cNvPr id="13" name="New alert controls await deployment and live acceptance.">
+          <p:cNvPr id="13" name="Manual timer dismissal and HA Stop passed. A scheduled alarm rang">
             <a:extLst xmlns:a="http://schemas.openxmlformats.org/drawingml/2006/main">
               <a:ext uri="{FF2B5EF4-FFF2-40B4-BE49-F238E27FC236}">
-                <a16:creationId xmlns:a16="http://schemas.microsoft.com/office/drawing/2014/main" id="{87A6F19F-4606-41A3-9A69-98CB3397EC96}"/>
+                <a16:creationId xmlns:a16="http://schemas.microsoft.com/office/drawing/2014/main" id="{32230F4C-683F-4C0D-80C1-E87C4A886C7E}"/>
               </a:ext>
             </a:extLst>
           </p:cNvPr>
@@ -18278,7 +19613,7 @@
                 <a:ea typeface="Arial"/>
                 <a:cs typeface="Arial"/>
               </a:rPr>
-              <a:t>New alert controls await deployment and live acceptance.</a:t>
+              <a:t>Manual timer dismissal and HA Stop passed. A scheduled alarm rang beyond 90 seconds.</a:t>
             </a:r>
           </a:p>
         </p:txBody>
@@ -18286,7 +19621,7 @@
     </p:spTree>
     <p:extLst>
       <p:ext uri="{BB962C8B-B14F-4D97-AF65-F5344CB8AC3E}">
-        <p14:creationId xmlns:p14="http://schemas.microsoft.com/office/powerpoint/2010/main" val="695774530"/>
+        <p14:creationId xmlns:p14="http://schemas.microsoft.com/office/powerpoint/2010/main" val="580646971"/>
       </p:ext>
     </p:extLst>
   </p:cSld>
@@ -18317,7 +19652,7 @@
           <p:cNvPr id="22" name="Radio and scheduled alerts">
             <a:extLst xmlns:a="http://schemas.openxmlformats.org/drawingml/2006/main">
               <a:ext uri="{FF2B5EF4-FFF2-40B4-BE49-F238E27FC236}">
-                <a16:creationId xmlns:a16="http://schemas.microsoft.com/office/drawing/2014/main" id="{B81178FB-1116-4785-9BB5-F9EC27D6C809}"/>
+                <a16:creationId xmlns:a16="http://schemas.microsoft.com/office/drawing/2014/main" id="{FF6AFE0E-FD62-43D1-8FC6-52891345BAE7}"/>
               </a:ext>
             </a:extLst>
           </p:cNvPr>
@@ -18475,7 +19810,7 @@
           <p:cNvPr id="2" name="17">
             <a:extLst xmlns:a="http://schemas.openxmlformats.org/drawingml/2006/main">
               <a:ext uri="{FF2B5EF4-FFF2-40B4-BE49-F238E27FC236}">
-                <a16:creationId xmlns:a16="http://schemas.microsoft.com/office/drawing/2014/main" id="{34163F6C-A776-4248-A35A-F487C1344B95}"/>
+                <a16:creationId xmlns:a16="http://schemas.microsoft.com/office/drawing/2014/main" id="{7903173A-823D-4DCE-8995-791A15AABA06}"/>
               </a:ext>
             </a:extLst>
           </p:cNvPr>
@@ -18633,7 +19968,7 @@
           <p:cNvPr id="3" name="RING">
             <a:extLst xmlns:a="http://schemas.openxmlformats.org/drawingml/2006/main">
               <a:ext uri="{FF2B5EF4-FFF2-40B4-BE49-F238E27FC236}">
-                <a16:creationId xmlns:a16="http://schemas.microsoft.com/office/drawing/2014/main" id="{1BEFDFEB-AA97-4A92-B2E8-1BFB945F5B31}"/>
+                <a16:creationId xmlns:a16="http://schemas.microsoft.com/office/drawing/2014/main" id="{F57CA1BC-1EBF-46C6-82EA-3596C33C0392}"/>
               </a:ext>
             </a:extLst>
           </p:cNvPr>
@@ -18791,7 +20126,7 @@
           <p:cNvPr id="4" name="Until you stop it">
             <a:extLst xmlns:a="http://schemas.openxmlformats.org/drawingml/2006/main">
               <a:ext uri="{FF2B5EF4-FFF2-40B4-BE49-F238E27FC236}">
-                <a16:creationId xmlns:a16="http://schemas.microsoft.com/office/drawing/2014/main" id="{A878FFAE-C628-4FA7-AC52-FA6911F6F3FB}"/>
+                <a16:creationId xmlns:a16="http://schemas.microsoft.com/office/drawing/2014/main" id="{3AB3C5C8-F9A0-441C-BD72-A9D56A841384}"/>
               </a:ext>
             </a:extLst>
           </p:cNvPr>
@@ -18949,7 +20284,7 @@
           <p:cNvPr id="5" name="Answer / reject&#10;or press Stop alert">
             <a:extLst xmlns:a="http://schemas.openxmlformats.org/drawingml/2006/main">
               <a:ext uri="{FF2B5EF4-FFF2-40B4-BE49-F238E27FC236}">
-                <a16:creationId xmlns:a16="http://schemas.microsoft.com/office/drawing/2014/main" id="{2358550B-1FCB-4083-9B5E-31A614C0955B}"/>
+                <a16:creationId xmlns:a16="http://schemas.microsoft.com/office/drawing/2014/main" id="{689D8CFA-2344-4040-B0A1-AC32597473BE}"/>
               </a:ext>
             </a:extLst>
           </p:cNvPr>
@@ -19130,7 +20465,7 @@
           <p:cNvPr id="6" name="No auto-answer&#10;No after-answer audio">
             <a:extLst xmlns:a="http://schemas.openxmlformats.org/drawingml/2006/main">
               <a:ext uri="{FF2B5EF4-FFF2-40B4-BE49-F238E27FC236}">
-                <a16:creationId xmlns:a16="http://schemas.microsoft.com/office/drawing/2014/main" id="{FF721422-B5B4-4A08-8C4E-D7D84E5CF695}"/>
+                <a16:creationId xmlns:a16="http://schemas.microsoft.com/office/drawing/2014/main" id="{7C73A448-8988-4C03-A7A8-3D3591930726}"/>
               </a:ext>
             </a:extLst>
           </p:cNvPr>
@@ -19311,7 +20646,7 @@
           <p:cNvPr id="7" name="701">
             <a:extLst xmlns:a="http://schemas.openxmlformats.org/drawingml/2006/main">
               <a:ext uri="{FF2B5EF4-FFF2-40B4-BE49-F238E27FC236}">
-                <a16:creationId xmlns:a16="http://schemas.microsoft.com/office/drawing/2014/main" id="{2493BAA6-7778-4724-832E-83FE0F20069C}"/>
+                <a16:creationId xmlns:a16="http://schemas.microsoft.com/office/drawing/2014/main" id="{A1830092-299E-4F75-98F1-3400C3083F25}"/>
               </a:ext>
             </a:extLst>
           </p:cNvPr>
@@ -19469,7 +20804,7 @@
           <p:cNvPr id="8" name="Matryoshka Radio">
             <a:extLst xmlns:a="http://schemas.openxmlformats.org/drawingml/2006/main">
               <a:ext uri="{FF2B5EF4-FFF2-40B4-BE49-F238E27FC236}">
-                <a16:creationId xmlns:a16="http://schemas.microsoft.com/office/drawing/2014/main" id="{4449D4E5-3372-4A8B-A665-9ACE4848A053}"/>
+                <a16:creationId xmlns:a16="http://schemas.microsoft.com/office/drawing/2014/main" id="{C2106D29-7D0F-41DA-94E2-3685AD322152}"/>
               </a:ext>
             </a:extLst>
           </p:cNvPr>
@@ -19627,7 +20962,7 @@
           <p:cNvPr id="9" name="702">
             <a:extLst xmlns:a="http://schemas.openxmlformats.org/drawingml/2006/main">
               <a:ext uri="{FF2B5EF4-FFF2-40B4-BE49-F238E27FC236}">
-                <a16:creationId xmlns:a16="http://schemas.microsoft.com/office/drawing/2014/main" id="{EF407A98-762C-430A-A3F8-783BAF62CCB2}"/>
+                <a16:creationId xmlns:a16="http://schemas.microsoft.com/office/drawing/2014/main" id="{5879A2CC-A06A-4A98-87F7-DDC2D011F4EC}"/>
               </a:ext>
             </a:extLst>
           </p:cNvPr>
@@ -19785,7 +21120,7 @@
           <p:cNvPr id="10" name="Echo online">
             <a:extLst xmlns:a="http://schemas.openxmlformats.org/drawingml/2006/main">
               <a:ext uri="{FF2B5EF4-FFF2-40B4-BE49-F238E27FC236}">
-                <a16:creationId xmlns:a16="http://schemas.microsoft.com/office/drawing/2014/main" id="{5D80B8FD-A2B1-4F00-A7F7-9412093764CE}"/>
+                <a16:creationId xmlns:a16="http://schemas.microsoft.com/office/drawing/2014/main" id="{3B2D170D-883A-473F-8ECB-B7EBC60851AD}"/>
               </a:ext>
             </a:extLst>
           </p:cNvPr>
@@ -19943,7 +21278,7 @@
           <p:cNvPr id="11" name="703">
             <a:extLst xmlns:a="http://schemas.openxmlformats.org/drawingml/2006/main">
               <a:ext uri="{FF2B5EF4-FFF2-40B4-BE49-F238E27FC236}">
-                <a16:creationId xmlns:a16="http://schemas.microsoft.com/office/drawing/2014/main" id="{49533832-32BF-4065-80C2-40C3289E03D3}"/>
+                <a16:creationId xmlns:a16="http://schemas.microsoft.com/office/drawing/2014/main" id="{3987D1FA-7DF1-43FE-BBBC-8C6FAFCCA439}"/>
               </a:ext>
             </a:extLst>
           </p:cNvPr>
@@ -20101,7 +21436,7 @@
           <p:cNvPr id="12" name="RADIO BOB! Rock">
             <a:extLst xmlns:a="http://schemas.openxmlformats.org/drawingml/2006/main">
               <a:ext uri="{FF2B5EF4-FFF2-40B4-BE49-F238E27FC236}">
-                <a16:creationId xmlns:a16="http://schemas.microsoft.com/office/drawing/2014/main" id="{5D611BF4-4F4D-4DC8-8C55-67762B47EEB4}"/>
+                <a16:creationId xmlns:a16="http://schemas.microsoft.com/office/drawing/2014/main" id="{516A8BD0-6F53-4569-AE22-B069B50DDBE3}"/>
               </a:ext>
             </a:extLst>
           </p:cNvPr>
@@ -20259,7 +21594,7 @@
           <p:cNvPr id="13" name="704">
             <a:extLst xmlns:a="http://schemas.openxmlformats.org/drawingml/2006/main">
               <a:ext uri="{FF2B5EF4-FFF2-40B4-BE49-F238E27FC236}">
-                <a16:creationId xmlns:a16="http://schemas.microsoft.com/office/drawing/2014/main" id="{99AF90E4-B08C-4C32-889D-926F9B04C9F5}"/>
+                <a16:creationId xmlns:a16="http://schemas.microsoft.com/office/drawing/2014/main" id="{7CB2CA66-0810-4299-914A-B3DA83E7E41D}"/>
               </a:ext>
             </a:extLst>
           </p:cNvPr>
@@ -20417,7 +21752,7 @@
           <p:cNvPr id="14" name="RADIO BOB! Metal">
             <a:extLst xmlns:a="http://schemas.openxmlformats.org/drawingml/2006/main">
               <a:ext uri="{FF2B5EF4-FFF2-40B4-BE49-F238E27FC236}">
-                <a16:creationId xmlns:a16="http://schemas.microsoft.com/office/drawing/2014/main" id="{0F094306-08CC-4C86-A96F-84E6796A9C9A}"/>
+                <a16:creationId xmlns:a16="http://schemas.microsoft.com/office/drawing/2014/main" id="{3F6E2328-35D5-434F-9597-9DA366A991CC}"/>
               </a:ext>
             </a:extLst>
           </p:cNvPr>
@@ -20575,7 +21910,7 @@
           <p:cNvPr id="15" name="705">
             <a:extLst xmlns:a="http://schemas.openxmlformats.org/drawingml/2006/main">
               <a:ext uri="{FF2B5EF4-FFF2-40B4-BE49-F238E27FC236}">
-                <a16:creationId xmlns:a16="http://schemas.microsoft.com/office/drawing/2014/main" id="{1D256B4C-47FC-4AE5-ACA0-56575CE995E8}"/>
+                <a16:creationId xmlns:a16="http://schemas.microsoft.com/office/drawing/2014/main" id="{6FA3452F-F7AD-4F9D-971A-1E6B18267819}"/>
               </a:ext>
             </a:extLst>
           </p:cNvPr>
@@ -20733,7 +22068,7 @@
           <p:cNvPr id="16" name="RADIO BOB! Gothic">
             <a:extLst xmlns:a="http://schemas.openxmlformats.org/drawingml/2006/main">
               <a:ext uri="{FF2B5EF4-FFF2-40B4-BE49-F238E27FC236}">
-                <a16:creationId xmlns:a16="http://schemas.microsoft.com/office/drawing/2014/main" id="{33D51150-CCC3-4F74-8A9C-641F3089823D}"/>
+                <a16:creationId xmlns:a16="http://schemas.microsoft.com/office/drawing/2014/main" id="{BA940802-9D5F-4306-9B48-4C6682398FC2}"/>
               </a:ext>
             </a:extLst>
           </p:cNvPr>
@@ -20891,7 +22226,7 @@
           <p:cNvPr id="17" name="706">
             <a:extLst xmlns:a="http://schemas.openxmlformats.org/drawingml/2006/main">
               <a:ext uri="{FF2B5EF4-FFF2-40B4-BE49-F238E27FC236}">
-                <a16:creationId xmlns:a16="http://schemas.microsoft.com/office/drawing/2014/main" id="{4B4831E2-C979-456D-ADF8-F27F61C5A766}"/>
+                <a16:creationId xmlns:a16="http://schemas.microsoft.com/office/drawing/2014/main" id="{58B81A2B-560A-4A32-B46C-85E4BE93348A}"/>
               </a:ext>
             </a:extLst>
           </p:cNvPr>
@@ -21049,7 +22384,7 @@
           <p:cNvPr id="18" name="SomaFM PopTron">
             <a:extLst xmlns:a="http://schemas.openxmlformats.org/drawingml/2006/main">
               <a:ext uri="{FF2B5EF4-FFF2-40B4-BE49-F238E27FC236}">
-                <a16:creationId xmlns:a16="http://schemas.microsoft.com/office/drawing/2014/main" id="{5B2CDE62-82A5-40B3-A58F-6E1C8B231440}"/>
+                <a16:creationId xmlns:a16="http://schemas.microsoft.com/office/drawing/2014/main" id="{98E3D311-5CF9-47DB-B428-94984F7CFEC8}"/>
               </a:ext>
             </a:extLst>
           </p:cNvPr>
@@ -21207,7 +22542,7 @@
           <p:cNvPr id="19" name="707">
             <a:extLst xmlns:a="http://schemas.openxmlformats.org/drawingml/2006/main">
               <a:ext uri="{FF2B5EF4-FFF2-40B4-BE49-F238E27FC236}">
-                <a16:creationId xmlns:a16="http://schemas.microsoft.com/office/drawing/2014/main" id="{EE8BE85C-2D99-4A4C-9669-CB1F911C8200}"/>
+                <a16:creationId xmlns:a16="http://schemas.microsoft.com/office/drawing/2014/main" id="{C7BB58F4-F9F9-4FFF-BA3A-A647B140FC34}"/>
               </a:ext>
             </a:extLst>
           </p:cNvPr>
@@ -21365,7 +22700,7 @@
           <p:cNvPr id="20" name="Radyo Viva / Turkish">
             <a:extLst xmlns:a="http://schemas.openxmlformats.org/drawingml/2006/main">
               <a:ext uri="{FF2B5EF4-FFF2-40B4-BE49-F238E27FC236}">
-                <a16:creationId xmlns:a16="http://schemas.microsoft.com/office/drawing/2014/main" id="{61B9343B-9FBB-4492-9D63-9CD8D2D84A33}"/>
+                <a16:creationId xmlns:a16="http://schemas.microsoft.com/office/drawing/2014/main" id="{BA7ED548-1923-46AC-8D77-EA47AF768DC8}"/>
               </a:ext>
             </a:extLst>
           </p:cNvPr>
@@ -21520,10 +22855,10 @@
       </p:sp>
       <p:sp>
         <p:nvSpPr>
-          <p:cNvPr id="21" name="640 remains a manual tone test. New alert behavior awaits deploym">
+          <p:cNvPr id="21" name="For 708–710: handset down, speaker off, enter all digits, then pr">
             <a:extLst xmlns:a="http://schemas.openxmlformats.org/drawingml/2006/main">
               <a:ext uri="{FF2B5EF4-FFF2-40B4-BE49-F238E27FC236}">
-                <a16:creationId xmlns:a16="http://schemas.microsoft.com/office/drawing/2014/main" id="{7F112327-5FB4-469D-81A2-9A1D3FCCF767}"/>
+                <a16:creationId xmlns:a16="http://schemas.microsoft.com/office/drawing/2014/main" id="{E792BC59-7E9E-4A95-91B6-CBA0B03262C4}"/>
               </a:ext>
             </a:extLst>
           </p:cNvPr>
@@ -21671,7 +23006,7 @@
                 <a:ea typeface="Arial"/>
                 <a:cs typeface="Arial"/>
               </a:rPr>
-              <a:t>640 remains a manual tone test. New alert behavior awaits deployment and live acceptance.</a:t>
+              <a:t>For 708–710: handset down, speaker off, enter all digits, then press Dial.</a:t>
             </a:r>
           </a:p>
         </p:txBody>
@@ -21679,7 +23014,7 @@
     </p:spTree>
     <p:extLst>
       <p:ext uri="{BB962C8B-B14F-4D97-AF65-F5344CB8AC3E}">
-        <p14:creationId xmlns:p14="http://schemas.microsoft.com/office/powerpoint/2010/main" val="492685547"/>
+        <p14:creationId xmlns:p14="http://schemas.microsoft.com/office/powerpoint/2010/main" val="441315074"/>
       </p:ext>
     </p:extLst>
   </p:cSld>
@@ -21710,7 +23045,7 @@
           <p:cNvPr id="14" name="Free SIP account status">
             <a:extLst xmlns:a="http://schemas.openxmlformats.org/drawingml/2006/main">
               <a:ext uri="{FF2B5EF4-FFF2-40B4-BE49-F238E27FC236}">
-                <a16:creationId xmlns:a16="http://schemas.microsoft.com/office/drawing/2014/main" id="{10CA7F7D-D3F8-4249-B599-51575CA32150}"/>
+                <a16:creationId xmlns:a16="http://schemas.microsoft.com/office/drawing/2014/main" id="{F904BC32-9772-4C32-BAB0-9F05FE1DFA35}"/>
               </a:ext>
             </a:extLst>
           </p:cNvPr>
@@ -21868,7 +23203,7 @@
           <p:cNvPr id="2" name="18">
             <a:extLst xmlns:a="http://schemas.openxmlformats.org/drawingml/2006/main">
               <a:ext uri="{FF2B5EF4-FFF2-40B4-BE49-F238E27FC236}">
-                <a16:creationId xmlns:a16="http://schemas.microsoft.com/office/drawing/2014/main" id="{8A08B38D-A66C-42F0-898A-A150F07B787D}"/>
+                <a16:creationId xmlns:a16="http://schemas.microsoft.com/office/drawing/2014/main" id="{31E4F00E-E3A2-4123-8250-943D440E0F82}"/>
               </a:ext>
             </a:extLst>
           </p:cNvPr>
@@ -22026,7 +23361,7 @@
           <p:cNvPr id="3" name="SIP2SIP">
             <a:extLst xmlns:a="http://schemas.openxmlformats.org/drawingml/2006/main">
               <a:ext uri="{FF2B5EF4-FFF2-40B4-BE49-F238E27FC236}">
-                <a16:creationId xmlns:a16="http://schemas.microsoft.com/office/drawing/2014/main" id="{2A51D442-9F07-4033-8DE7-BB3C57AB885E}"/>
+                <a16:creationId xmlns:a16="http://schemas.microsoft.com/office/drawing/2014/main" id="{36194E7D-C466-4DA1-80F2-49DDB1379029}"/>
               </a:ext>
             </a:extLst>
           </p:cNvPr>
@@ -22184,7 +23519,7 @@
           <p:cNvPr id="4" name="Echo answered, RTP loss observed">
             <a:extLst xmlns:a="http://schemas.openxmlformats.org/drawingml/2006/main">
               <a:ext uri="{FF2B5EF4-FFF2-40B4-BE49-F238E27FC236}">
-                <a16:creationId xmlns:a16="http://schemas.microsoft.com/office/drawing/2014/main" id="{8A94B71F-7B66-4ECA-B9FF-EECF89BDCBA1}"/>
+                <a16:creationId xmlns:a16="http://schemas.microsoft.com/office/drawing/2014/main" id="{D2D2114A-8E1B-454F-84E2-4A21DA5A96A7}"/>
               </a:ext>
             </a:extLst>
           </p:cNvPr>
@@ -22342,7 +23677,7 @@
           <p:cNvPr id="5" name="Callcentric">
             <a:extLst xmlns:a="http://schemas.openxmlformats.org/drawingml/2006/main">
               <a:ext uri="{FF2B5EF4-FFF2-40B4-BE49-F238E27FC236}">
-                <a16:creationId xmlns:a16="http://schemas.microsoft.com/office/drawing/2014/main" id="{54EEFE34-3C33-4D4F-82CC-832650836B9C}"/>
+                <a16:creationId xmlns:a16="http://schemas.microsoft.com/office/drawing/2014/main" id="{12E6F7D4-644C-42A6-9E6F-850487BC5673}"/>
               </a:ext>
             </a:extLst>
           </p:cNvPr>
@@ -22500,7 +23835,7 @@
           <p:cNvPr id="6" name="Registered, outbound review required">
             <a:extLst xmlns:a="http://schemas.openxmlformats.org/drawingml/2006/main">
               <a:ext uri="{FF2B5EF4-FFF2-40B4-BE49-F238E27FC236}">
-                <a16:creationId xmlns:a16="http://schemas.microsoft.com/office/drawing/2014/main" id="{55ACC906-0FF8-40B4-B38A-D62E34FC447F}"/>
+                <a16:creationId xmlns:a16="http://schemas.microsoft.com/office/drawing/2014/main" id="{29E717F3-AA64-4CED-90CA-250057247831}"/>
               </a:ext>
             </a:extLst>
           </p:cNvPr>
@@ -22655,10 +23990,10 @@
       </p:sp>
       <p:sp>
         <p:nvSpPr>
-          <p:cNvPr id="7" name="Linphone">
+          <p:cNvPr id="7" name="Linphone SIP">
             <a:extLst xmlns:a="http://schemas.openxmlformats.org/drawingml/2006/main">
               <a:ext uri="{FF2B5EF4-FFF2-40B4-BE49-F238E27FC236}">
-                <a16:creationId xmlns:a16="http://schemas.microsoft.com/office/drawing/2014/main" id="{5CBC1CC4-5B72-4CBB-BF97-862A3C6D16B1}"/>
+                <a16:creationId xmlns:a16="http://schemas.microsoft.com/office/drawing/2014/main" id="{A476CC3A-3F03-40B3-BE95-47726D46962F}"/>
               </a:ext>
             </a:extLst>
           </p:cNvPr>
@@ -22806,7 +24141,7 @@
                 <a:ea typeface="Arial"/>
                 <a:cs typeface="Arial"/>
               </a:rPr>
-              <a:t>Linphone</a:t>
+              <a:t>Linphone SIP</a:t>
             </a:r>
           </a:p>
         </p:txBody>
@@ -22816,7 +24151,7 @@
           <p:cNvPr id="8" name="Registered, verified peer still needed">
             <a:extLst xmlns:a="http://schemas.openxmlformats.org/drawingml/2006/main">
               <a:ext uri="{FF2B5EF4-FFF2-40B4-BE49-F238E27FC236}">
-                <a16:creationId xmlns:a16="http://schemas.microsoft.com/office/drawing/2014/main" id="{F45F6876-940D-4EB6-9DBC-CE71014ECA5B}"/>
+                <a16:creationId xmlns:a16="http://schemas.microsoft.com/office/drawing/2014/main" id="{E2FC7E5D-7B51-43AA-9626-8B934FD01ABE}"/>
               </a:ext>
             </a:extLst>
           </p:cNvPr>
@@ -22974,7 +24309,7 @@
           <p:cNvPr id="9" name="FWD">
             <a:extLst xmlns:a="http://schemas.openxmlformats.org/drawingml/2006/main">
               <a:ext uri="{FF2B5EF4-FFF2-40B4-BE49-F238E27FC236}">
-                <a16:creationId xmlns:a16="http://schemas.microsoft.com/office/drawing/2014/main" id="{1A8858C2-30A1-4E06-8DDA-39D4660791B2}"/>
+                <a16:creationId xmlns:a16="http://schemas.microsoft.com/office/drawing/2014/main" id="{0C76474C-D5AA-4850-B4E5-7333ABA36FE6}"/>
               </a:ext>
             </a:extLst>
           </p:cNvPr>
@@ -23132,7 +24467,7 @@
           <p:cNvPr id="10" name="Stopped at mandatory Verification Fee">
             <a:extLst xmlns:a="http://schemas.openxmlformats.org/drawingml/2006/main">
               <a:ext uri="{FF2B5EF4-FFF2-40B4-BE49-F238E27FC236}">
-                <a16:creationId xmlns:a16="http://schemas.microsoft.com/office/drawing/2014/main" id="{2ACAF121-710A-4DB6-BCE8-5F1107C72B57}"/>
+                <a16:creationId xmlns:a16="http://schemas.microsoft.com/office/drawing/2014/main" id="{760A4083-D174-4454-AA8A-1D16AEB04583}"/>
               </a:ext>
             </a:extLst>
           </p:cNvPr>
@@ -23290,7 +24625,7 @@
           <p:cNvPr id="11" name="Google Voice">
             <a:extLst xmlns:a="http://schemas.openxmlformats.org/drawingml/2006/main">
               <a:ext uri="{FF2B5EF4-FFF2-40B4-BE49-F238E27FC236}">
-                <a16:creationId xmlns:a16="http://schemas.microsoft.com/office/drawing/2014/main" id="{FA599304-FBBD-4765-B09B-C2B228B4C6FE}"/>
+                <a16:creationId xmlns:a16="http://schemas.microsoft.com/office/drawing/2014/main" id="{F6A284D4-058A-4CC4-940D-68DA52877EBB}"/>
               </a:ext>
             </a:extLst>
           </p:cNvPr>
@@ -23448,7 +24783,7 @@
           <p:cNvPr id="12" name="No official free Asterisk SIP trunk">
             <a:extLst xmlns:a="http://schemas.openxmlformats.org/drawingml/2006/main">
               <a:ext uri="{FF2B5EF4-FFF2-40B4-BE49-F238E27FC236}">
-                <a16:creationId xmlns:a16="http://schemas.microsoft.com/office/drawing/2014/main" id="{2D3E0154-72DF-4FC3-832F-900D7ED0B921}"/>
+                <a16:creationId xmlns:a16="http://schemas.microsoft.com/office/drawing/2014/main" id="{D32E82E9-12BA-4E3B-858A-FEC7DE6804BF}"/>
               </a:ext>
             </a:extLst>
           </p:cNvPr>
@@ -23606,7 +24941,7 @@
           <p:cNvPr id="13" name="Three providers registered. External media quality still needs ve">
             <a:extLst xmlns:a="http://schemas.openxmlformats.org/drawingml/2006/main">
               <a:ext uri="{FF2B5EF4-FFF2-40B4-BE49-F238E27FC236}">
-                <a16:creationId xmlns:a16="http://schemas.microsoft.com/office/drawing/2014/main" id="{1D5C1C08-452F-4CF3-AA34-49628FDC1344}"/>
+                <a16:creationId xmlns:a16="http://schemas.microsoft.com/office/drawing/2014/main" id="{C3DE8324-CF09-4380-83BF-05351AB87457}"/>
               </a:ext>
             </a:extLst>
           </p:cNvPr>
@@ -23762,7 +25097,2136 @@
     </p:spTree>
     <p:extLst>
       <p:ext uri="{BB962C8B-B14F-4D97-AF65-F5344CB8AC3E}">
-        <p14:creationId xmlns:p14="http://schemas.microsoft.com/office/powerpoint/2010/main" val="1544945871"/>
+        <p14:creationId xmlns:p14="http://schemas.microsoft.com/office/powerpoint/2010/main" val="659624510"/>
+      </p:ext>
+    </p:extLst>
+  </p:cSld>
+</p:sld>
+</file>
+
+<file path=ppt/slides/slide19.xml><?xml version="1.0" encoding="utf-8"?>
+<p:sld xmlns:p="http://schemas.openxmlformats.org/presentationml/2006/main">
+  <p:cSld>
+    <p:bg>
+      <p:bgPr>
+        <a:solidFill xmlns:a="http://schemas.openxmlformats.org/drawingml/2006/main">
+          <a:srgbClr val="101C34"/>
+        </a:solidFill>
+      </p:bgPr>
+    </p:bg>
+    <p:spTree>
+      <p:nvGrpSpPr>
+        <p:cNvPr id="1" name=""/>
+        <p:cNvGrpSpPr/>
+        <p:nvPr/>
+      </p:nvGrpSpPr>
+      <p:grpSpPr>
+        <a:xfrm xmlns:a="http://schemas.openxmlformats.org/drawingml/2006/main"/>
+      </p:grpSpPr>
+      <p:sp>
+        <p:nvSpPr>
+          <p:cNvPr id="14" name="Mac calling and children’s radio">
+            <a:extLst xmlns:a="http://schemas.openxmlformats.org/drawingml/2006/main">
+              <a:ext uri="{FF2B5EF4-FFF2-40B4-BE49-F238E27FC236}">
+                <a16:creationId xmlns:a16="http://schemas.microsoft.com/office/drawing/2014/main" id="{C63F208E-810D-48CA-A696-434A4AB9497A}"/>
+              </a:ext>
+            </a:extLst>
+          </p:cNvPr>
+          <p:cNvSpPr>
+            <a:spLocks xmlns:a="http://schemas.openxmlformats.org/drawingml/2006/main" noGrp="1"/>
+          </p:cNvSpPr>
+          <p:nvPr/>
+        </p:nvSpPr>
+        <p:spPr>
+          <a:xfrm xmlns:a="http://schemas.openxmlformats.org/drawingml/2006/main">
+            <a:off x="571500" y="419100"/>
+            <a:ext cx="10953750" cy="1000125"/>
+          </a:xfrm>
+          <a:prstGeom xmlns:a="http://schemas.openxmlformats.org/drawingml/2006/main" prst="rect">
+            <a:avLst/>
+          </a:prstGeom>
+          <a:noFill xmlns:a="http://schemas.openxmlformats.org/drawingml/2006/main"/>
+          <a:ln xmlns:a="http://schemas.openxmlformats.org/drawingml/2006/main" w="0">
+            <a:noFill/>
+          </a:ln>
+        </p:spPr>
+        <p:txBody>
+          <a:bodyPr xmlns:a="http://schemas.openxmlformats.org/drawingml/2006/main" wrap="square" lIns="0" tIns="0" rIns="0" bIns="0" anchor="t">
+            <a:noAutofit/>
+          </a:bodyPr>
+          <a:lstStyle xmlns:a="http://schemas.openxmlformats.org/drawingml/2006/main">
+            <a:defPPr algn="l">
+              <a:defRPr sz="3375" b="1">
+                <a:solidFill>
+                  <a:srgbClr val="F5F7FB"/>
+                </a:solidFill>
+                <a:latin typeface="Arial"/>
+                <a:ea typeface="Arial"/>
+                <a:cs typeface="Arial"/>
+              </a:defRPr>
+            </a:defPPr>
+            <a:lvl1pPr algn="l">
+              <a:defRPr sz="3375" b="1">
+                <a:solidFill>
+                  <a:srgbClr val="F5F7FB"/>
+                </a:solidFill>
+                <a:latin typeface="Arial"/>
+                <a:ea typeface="Arial"/>
+                <a:cs typeface="Arial"/>
+              </a:defRPr>
+            </a:lvl1pPr>
+            <a:lvl2pPr algn="l">
+              <a:defRPr sz="3375" b="1">
+                <a:solidFill>
+                  <a:srgbClr val="F5F7FB"/>
+                </a:solidFill>
+                <a:latin typeface="Arial"/>
+                <a:ea typeface="Arial"/>
+                <a:cs typeface="Arial"/>
+              </a:defRPr>
+            </a:lvl2pPr>
+            <a:lvl3pPr algn="l">
+              <a:defRPr sz="3375" b="1">
+                <a:solidFill>
+                  <a:srgbClr val="F5F7FB"/>
+                </a:solidFill>
+                <a:latin typeface="Arial"/>
+                <a:ea typeface="Arial"/>
+                <a:cs typeface="Arial"/>
+              </a:defRPr>
+            </a:lvl3pPr>
+            <a:lvl4pPr algn="l">
+              <a:defRPr sz="3375" b="1">
+                <a:solidFill>
+                  <a:srgbClr val="F5F7FB"/>
+                </a:solidFill>
+                <a:latin typeface="Arial"/>
+                <a:ea typeface="Arial"/>
+                <a:cs typeface="Arial"/>
+              </a:defRPr>
+            </a:lvl4pPr>
+            <a:lvl5pPr algn="l">
+              <a:defRPr sz="3375" b="1">
+                <a:solidFill>
+                  <a:srgbClr val="F5F7FB"/>
+                </a:solidFill>
+                <a:latin typeface="Arial"/>
+                <a:ea typeface="Arial"/>
+                <a:cs typeface="Arial"/>
+              </a:defRPr>
+            </a:lvl5pPr>
+            <a:lvl6pPr algn="l">
+              <a:defRPr sz="3375" b="1">
+                <a:solidFill>
+                  <a:srgbClr val="F5F7FB"/>
+                </a:solidFill>
+                <a:latin typeface="Arial"/>
+                <a:ea typeface="Arial"/>
+                <a:cs typeface="Arial"/>
+              </a:defRPr>
+            </a:lvl6pPr>
+            <a:lvl7pPr algn="l">
+              <a:defRPr sz="3375" b="1">
+                <a:solidFill>
+                  <a:srgbClr val="F5F7FB"/>
+                </a:solidFill>
+                <a:latin typeface="Arial"/>
+                <a:ea typeface="Arial"/>
+                <a:cs typeface="Arial"/>
+              </a:defRPr>
+            </a:lvl7pPr>
+            <a:lvl8pPr algn="l">
+              <a:defRPr sz="3375" b="1">
+                <a:solidFill>
+                  <a:srgbClr val="F5F7FB"/>
+                </a:solidFill>
+                <a:latin typeface="Arial"/>
+                <a:ea typeface="Arial"/>
+                <a:cs typeface="Arial"/>
+              </a:defRPr>
+            </a:lvl8pPr>
+            <a:lvl9pPr algn="l">
+              <a:defRPr sz="3375" b="1">
+                <a:solidFill>
+                  <a:srgbClr val="F5F7FB"/>
+                </a:solidFill>
+                <a:latin typeface="Arial"/>
+                <a:ea typeface="Arial"/>
+                <a:cs typeface="Arial"/>
+              </a:defRPr>
+            </a:lvl9pPr>
+          </a:lstStyle>
+          <a:p xmlns:a="http://schemas.openxmlformats.org/drawingml/2006/main">
+            <a:pPr algn="l">
+              <a:defRPr sz="3375" b="1">
+                <a:solidFill>
+                  <a:srgbClr val="F5F7FB"/>
+                </a:solidFill>
+                <a:latin typeface="Arial"/>
+                <a:ea typeface="Arial"/>
+                <a:cs typeface="Arial"/>
+              </a:defRPr>
+            </a:pPr>
+            <a:r>
+              <a:rPr sz="3375" b="1">
+                <a:solidFill>
+                  <a:srgbClr val="F5F7FB"/>
+                </a:solidFill>
+                <a:latin typeface="Arial"/>
+                <a:ea typeface="Arial"/>
+                <a:cs typeface="Arial"/>
+              </a:rPr>
+              <a:t>Mac calling and children’s radio</a:t>
+            </a:r>
+          </a:p>
+        </p:txBody>
+      </p:sp>
+      <p:sp>
+        <p:nvSpPr>
+          <p:cNvPr id="2" name="19">
+            <a:extLst xmlns:a="http://schemas.openxmlformats.org/drawingml/2006/main">
+              <a:ext uri="{FF2B5EF4-FFF2-40B4-BE49-F238E27FC236}">
+                <a16:creationId xmlns:a16="http://schemas.microsoft.com/office/drawing/2014/main" id="{508D7607-FC81-433F-983A-C5000389C567}"/>
+              </a:ext>
+            </a:extLst>
+          </p:cNvPr>
+          <p:cNvSpPr>
+            <a:spLocks xmlns:a="http://schemas.openxmlformats.org/drawingml/2006/main" noGrp="1"/>
+          </p:cNvSpPr>
+          <p:nvPr/>
+        </p:nvSpPr>
+        <p:spPr>
+          <a:xfrm xmlns:a="http://schemas.openxmlformats.org/drawingml/2006/main">
+            <a:off x="11049000" y="6362700"/>
+            <a:ext cx="571500" cy="209550"/>
+          </a:xfrm>
+          <a:prstGeom xmlns:a="http://schemas.openxmlformats.org/drawingml/2006/main" prst="rect">
+            <a:avLst/>
+          </a:prstGeom>
+          <a:noFill xmlns:a="http://schemas.openxmlformats.org/drawingml/2006/main"/>
+          <a:ln xmlns:a="http://schemas.openxmlformats.org/drawingml/2006/main" w="0">
+            <a:noFill/>
+          </a:ln>
+        </p:spPr>
+        <p:txBody>
+          <a:bodyPr xmlns:a="http://schemas.openxmlformats.org/drawingml/2006/main" wrap="square" lIns="0" tIns="0" rIns="0" bIns="0" anchor="t">
+            <a:noAutofit/>
+          </a:bodyPr>
+          <a:lstStyle xmlns:a="http://schemas.openxmlformats.org/drawingml/2006/main">
+            <a:defPPr algn="r">
+              <a:defRPr sz="1275" b="0">
+                <a:solidFill>
+                  <a:srgbClr val="AAB9D0"/>
+                </a:solidFill>
+                <a:latin typeface="Arial"/>
+                <a:ea typeface="Arial"/>
+                <a:cs typeface="Arial"/>
+              </a:defRPr>
+            </a:defPPr>
+            <a:lvl1pPr algn="r">
+              <a:defRPr sz="1275" b="0">
+                <a:solidFill>
+                  <a:srgbClr val="AAB9D0"/>
+                </a:solidFill>
+                <a:latin typeface="Arial"/>
+                <a:ea typeface="Arial"/>
+                <a:cs typeface="Arial"/>
+              </a:defRPr>
+            </a:lvl1pPr>
+            <a:lvl2pPr algn="r">
+              <a:defRPr sz="1275" b="0">
+                <a:solidFill>
+                  <a:srgbClr val="AAB9D0"/>
+                </a:solidFill>
+                <a:latin typeface="Arial"/>
+                <a:ea typeface="Arial"/>
+                <a:cs typeface="Arial"/>
+              </a:defRPr>
+            </a:lvl2pPr>
+            <a:lvl3pPr algn="r">
+              <a:defRPr sz="1275" b="0">
+                <a:solidFill>
+                  <a:srgbClr val="AAB9D0"/>
+                </a:solidFill>
+                <a:latin typeface="Arial"/>
+                <a:ea typeface="Arial"/>
+                <a:cs typeface="Arial"/>
+              </a:defRPr>
+            </a:lvl3pPr>
+            <a:lvl4pPr algn="r">
+              <a:defRPr sz="1275" b="0">
+                <a:solidFill>
+                  <a:srgbClr val="AAB9D0"/>
+                </a:solidFill>
+                <a:latin typeface="Arial"/>
+                <a:ea typeface="Arial"/>
+                <a:cs typeface="Arial"/>
+              </a:defRPr>
+            </a:lvl4pPr>
+            <a:lvl5pPr algn="r">
+              <a:defRPr sz="1275" b="0">
+                <a:solidFill>
+                  <a:srgbClr val="AAB9D0"/>
+                </a:solidFill>
+                <a:latin typeface="Arial"/>
+                <a:ea typeface="Arial"/>
+                <a:cs typeface="Arial"/>
+              </a:defRPr>
+            </a:lvl5pPr>
+            <a:lvl6pPr algn="r">
+              <a:defRPr sz="1275" b="0">
+                <a:solidFill>
+                  <a:srgbClr val="AAB9D0"/>
+                </a:solidFill>
+                <a:latin typeface="Arial"/>
+                <a:ea typeface="Arial"/>
+                <a:cs typeface="Arial"/>
+              </a:defRPr>
+            </a:lvl6pPr>
+            <a:lvl7pPr algn="r">
+              <a:defRPr sz="1275" b="0">
+                <a:solidFill>
+                  <a:srgbClr val="AAB9D0"/>
+                </a:solidFill>
+                <a:latin typeface="Arial"/>
+                <a:ea typeface="Arial"/>
+                <a:cs typeface="Arial"/>
+              </a:defRPr>
+            </a:lvl7pPr>
+            <a:lvl8pPr algn="r">
+              <a:defRPr sz="1275" b="0">
+                <a:solidFill>
+                  <a:srgbClr val="AAB9D0"/>
+                </a:solidFill>
+                <a:latin typeface="Arial"/>
+                <a:ea typeface="Arial"/>
+                <a:cs typeface="Arial"/>
+              </a:defRPr>
+            </a:lvl8pPr>
+            <a:lvl9pPr algn="r">
+              <a:defRPr sz="1275" b="0">
+                <a:solidFill>
+                  <a:srgbClr val="AAB9D0"/>
+                </a:solidFill>
+                <a:latin typeface="Arial"/>
+                <a:ea typeface="Arial"/>
+                <a:cs typeface="Arial"/>
+              </a:defRPr>
+            </a:lvl9pPr>
+          </a:lstStyle>
+          <a:p xmlns:a="http://schemas.openxmlformats.org/drawingml/2006/main">
+            <a:pPr algn="r">
+              <a:defRPr sz="1275" b="0">
+                <a:solidFill>
+                  <a:srgbClr val="AAB9D0"/>
+                </a:solidFill>
+                <a:latin typeface="Arial"/>
+                <a:ea typeface="Arial"/>
+                <a:cs typeface="Arial"/>
+              </a:defRPr>
+            </a:pPr>
+            <a:r>
+              <a:rPr sz="1275" b="0">
+                <a:solidFill>
+                  <a:srgbClr val="AAB9D0"/>
+                </a:solidFill>
+                <a:latin typeface="Arial"/>
+                <a:ea typeface="Arial"/>
+                <a:cs typeface="Arial"/>
+              </a:rPr>
+              <a:t>19</a:t>
+            </a:r>
+          </a:p>
+        </p:txBody>
+      </p:sp>
+      <p:sp>
+        <p:nvSpPr>
+          <p:cNvPr id="3" name="209">
+            <a:extLst xmlns:a="http://schemas.openxmlformats.org/drawingml/2006/main">
+              <a:ext uri="{FF2B5EF4-FFF2-40B4-BE49-F238E27FC236}">
+                <a16:creationId xmlns:a16="http://schemas.microsoft.com/office/drawing/2014/main" id="{6F3FFD38-CF14-4526-9A44-78E340966066}"/>
+              </a:ext>
+            </a:extLst>
+          </p:cNvPr>
+          <p:cNvSpPr>
+            <a:spLocks xmlns:a="http://schemas.openxmlformats.org/drawingml/2006/main" noGrp="1"/>
+          </p:cNvSpPr>
+          <p:nvPr/>
+        </p:nvSpPr>
+        <p:spPr>
+          <a:xfrm xmlns:a="http://schemas.openxmlformats.org/drawingml/2006/main">
+            <a:off x="571500" y="1666875"/>
+            <a:ext cx="3905250" cy="1333500"/>
+          </a:xfrm>
+          <a:prstGeom xmlns:a="http://schemas.openxmlformats.org/drawingml/2006/main" prst="rect">
+            <a:avLst/>
+          </a:prstGeom>
+          <a:noFill xmlns:a="http://schemas.openxmlformats.org/drawingml/2006/main"/>
+          <a:ln xmlns:a="http://schemas.openxmlformats.org/drawingml/2006/main" w="0">
+            <a:noFill/>
+          </a:ln>
+        </p:spPr>
+        <p:txBody>
+          <a:bodyPr xmlns:a="http://schemas.openxmlformats.org/drawingml/2006/main" wrap="square" lIns="0" tIns="0" rIns="0" bIns="0" anchor="t">
+            <a:noAutofit/>
+          </a:bodyPr>
+          <a:lstStyle xmlns:a="http://schemas.openxmlformats.org/drawingml/2006/main">
+            <a:defPPr algn="l">
+              <a:defRPr sz="8250" b="1">
+                <a:solidFill>
+                  <a:srgbClr val="48DDCC"/>
+                </a:solidFill>
+                <a:latin typeface="Arial"/>
+                <a:ea typeface="Arial"/>
+                <a:cs typeface="Arial"/>
+              </a:defRPr>
+            </a:defPPr>
+            <a:lvl1pPr algn="l">
+              <a:defRPr sz="8250" b="1">
+                <a:solidFill>
+                  <a:srgbClr val="48DDCC"/>
+                </a:solidFill>
+                <a:latin typeface="Arial"/>
+                <a:ea typeface="Arial"/>
+                <a:cs typeface="Arial"/>
+              </a:defRPr>
+            </a:lvl1pPr>
+            <a:lvl2pPr algn="l">
+              <a:defRPr sz="8250" b="1">
+                <a:solidFill>
+                  <a:srgbClr val="48DDCC"/>
+                </a:solidFill>
+                <a:latin typeface="Arial"/>
+                <a:ea typeface="Arial"/>
+                <a:cs typeface="Arial"/>
+              </a:defRPr>
+            </a:lvl2pPr>
+            <a:lvl3pPr algn="l">
+              <a:defRPr sz="8250" b="1">
+                <a:solidFill>
+                  <a:srgbClr val="48DDCC"/>
+                </a:solidFill>
+                <a:latin typeface="Arial"/>
+                <a:ea typeface="Arial"/>
+                <a:cs typeface="Arial"/>
+              </a:defRPr>
+            </a:lvl3pPr>
+            <a:lvl4pPr algn="l">
+              <a:defRPr sz="8250" b="1">
+                <a:solidFill>
+                  <a:srgbClr val="48DDCC"/>
+                </a:solidFill>
+                <a:latin typeface="Arial"/>
+                <a:ea typeface="Arial"/>
+                <a:cs typeface="Arial"/>
+              </a:defRPr>
+            </a:lvl4pPr>
+            <a:lvl5pPr algn="l">
+              <a:defRPr sz="8250" b="1">
+                <a:solidFill>
+                  <a:srgbClr val="48DDCC"/>
+                </a:solidFill>
+                <a:latin typeface="Arial"/>
+                <a:ea typeface="Arial"/>
+                <a:cs typeface="Arial"/>
+              </a:defRPr>
+            </a:lvl5pPr>
+            <a:lvl6pPr algn="l">
+              <a:defRPr sz="8250" b="1">
+                <a:solidFill>
+                  <a:srgbClr val="48DDCC"/>
+                </a:solidFill>
+                <a:latin typeface="Arial"/>
+                <a:ea typeface="Arial"/>
+                <a:cs typeface="Arial"/>
+              </a:defRPr>
+            </a:lvl6pPr>
+            <a:lvl7pPr algn="l">
+              <a:defRPr sz="8250" b="1">
+                <a:solidFill>
+                  <a:srgbClr val="48DDCC"/>
+                </a:solidFill>
+                <a:latin typeface="Arial"/>
+                <a:ea typeface="Arial"/>
+                <a:cs typeface="Arial"/>
+              </a:defRPr>
+            </a:lvl7pPr>
+            <a:lvl8pPr algn="l">
+              <a:defRPr sz="8250" b="1">
+                <a:solidFill>
+                  <a:srgbClr val="48DDCC"/>
+                </a:solidFill>
+                <a:latin typeface="Arial"/>
+                <a:ea typeface="Arial"/>
+                <a:cs typeface="Arial"/>
+              </a:defRPr>
+            </a:lvl8pPr>
+            <a:lvl9pPr algn="l">
+              <a:defRPr sz="8250" b="1">
+                <a:solidFill>
+                  <a:srgbClr val="48DDCC"/>
+                </a:solidFill>
+                <a:latin typeface="Arial"/>
+                <a:ea typeface="Arial"/>
+                <a:cs typeface="Arial"/>
+              </a:defRPr>
+            </a:lvl9pPr>
+          </a:lstStyle>
+          <a:p xmlns:a="http://schemas.openxmlformats.org/drawingml/2006/main">
+            <a:pPr algn="l">
+              <a:defRPr sz="8250" b="1">
+                <a:solidFill>
+                  <a:srgbClr val="48DDCC"/>
+                </a:solidFill>
+                <a:latin typeface="Arial"/>
+                <a:ea typeface="Arial"/>
+                <a:cs typeface="Arial"/>
+              </a:defRPr>
+            </a:pPr>
+            <a:r>
+              <a:rPr sz="8250" b="1">
+                <a:solidFill>
+                  <a:srgbClr val="48DDCC"/>
+                </a:solidFill>
+                <a:latin typeface="Arial"/>
+                <a:ea typeface="Arial"/>
+                <a:cs typeface="Arial"/>
+              </a:rPr>
+              <a:t>209</a:t>
+            </a:r>
+          </a:p>
+        </p:txBody>
+      </p:sp>
+      <p:sp>
+        <p:nvSpPr>
+          <p:cNvPr id="4" name="Mac SIP client · 209">
+            <a:extLst xmlns:a="http://schemas.openxmlformats.org/drawingml/2006/main">
+              <a:ext uri="{FF2B5EF4-FFF2-40B4-BE49-F238E27FC236}">
+                <a16:creationId xmlns:a16="http://schemas.microsoft.com/office/drawing/2014/main" id="{FB9F9631-463D-440C-BE3E-E39B700B567E}"/>
+              </a:ext>
+            </a:extLst>
+          </p:cNvPr>
+          <p:cNvSpPr>
+            <a:spLocks xmlns:a="http://schemas.openxmlformats.org/drawingml/2006/main" noGrp="1"/>
+          </p:cNvSpPr>
+          <p:nvPr/>
+        </p:nvSpPr>
+        <p:spPr>
+          <a:xfrm xmlns:a="http://schemas.openxmlformats.org/drawingml/2006/main">
+            <a:off x="571500" y="3190875"/>
+            <a:ext cx="4191000" cy="819150"/>
+          </a:xfrm>
+          <a:prstGeom xmlns:a="http://schemas.openxmlformats.org/drawingml/2006/main" prst="rect">
+            <a:avLst/>
+          </a:prstGeom>
+          <a:noFill xmlns:a="http://schemas.openxmlformats.org/drawingml/2006/main"/>
+          <a:ln xmlns:a="http://schemas.openxmlformats.org/drawingml/2006/main" w="0">
+            <a:noFill/>
+          </a:ln>
+        </p:spPr>
+        <p:txBody>
+          <a:bodyPr xmlns:a="http://schemas.openxmlformats.org/drawingml/2006/main" wrap="square" lIns="0" tIns="0" rIns="0" bIns="0" anchor="t">
+            <a:noAutofit/>
+          </a:bodyPr>
+          <a:lstStyle xmlns:a="http://schemas.openxmlformats.org/drawingml/2006/main">
+            <a:defPPr algn="l">
+              <a:defRPr sz="2250" b="1">
+                <a:solidFill>
+                  <a:srgbClr val="F5F7FB"/>
+                </a:solidFill>
+                <a:latin typeface="Arial"/>
+                <a:ea typeface="Arial"/>
+                <a:cs typeface="Arial"/>
+              </a:defRPr>
+            </a:defPPr>
+            <a:lvl1pPr algn="l">
+              <a:defRPr sz="2250" b="1">
+                <a:solidFill>
+                  <a:srgbClr val="F5F7FB"/>
+                </a:solidFill>
+                <a:latin typeface="Arial"/>
+                <a:ea typeface="Arial"/>
+                <a:cs typeface="Arial"/>
+              </a:defRPr>
+            </a:lvl1pPr>
+            <a:lvl2pPr algn="l">
+              <a:defRPr sz="2250" b="1">
+                <a:solidFill>
+                  <a:srgbClr val="F5F7FB"/>
+                </a:solidFill>
+                <a:latin typeface="Arial"/>
+                <a:ea typeface="Arial"/>
+                <a:cs typeface="Arial"/>
+              </a:defRPr>
+            </a:lvl2pPr>
+            <a:lvl3pPr algn="l">
+              <a:defRPr sz="2250" b="1">
+                <a:solidFill>
+                  <a:srgbClr val="F5F7FB"/>
+                </a:solidFill>
+                <a:latin typeface="Arial"/>
+                <a:ea typeface="Arial"/>
+                <a:cs typeface="Arial"/>
+              </a:defRPr>
+            </a:lvl3pPr>
+            <a:lvl4pPr algn="l">
+              <a:defRPr sz="2250" b="1">
+                <a:solidFill>
+                  <a:srgbClr val="F5F7FB"/>
+                </a:solidFill>
+                <a:latin typeface="Arial"/>
+                <a:ea typeface="Arial"/>
+                <a:cs typeface="Arial"/>
+              </a:defRPr>
+            </a:lvl4pPr>
+            <a:lvl5pPr algn="l">
+              <a:defRPr sz="2250" b="1">
+                <a:solidFill>
+                  <a:srgbClr val="F5F7FB"/>
+                </a:solidFill>
+                <a:latin typeface="Arial"/>
+                <a:ea typeface="Arial"/>
+                <a:cs typeface="Arial"/>
+              </a:defRPr>
+            </a:lvl5pPr>
+            <a:lvl6pPr algn="l">
+              <a:defRPr sz="2250" b="1">
+                <a:solidFill>
+                  <a:srgbClr val="F5F7FB"/>
+                </a:solidFill>
+                <a:latin typeface="Arial"/>
+                <a:ea typeface="Arial"/>
+                <a:cs typeface="Arial"/>
+              </a:defRPr>
+            </a:lvl6pPr>
+            <a:lvl7pPr algn="l">
+              <a:defRPr sz="2250" b="1">
+                <a:solidFill>
+                  <a:srgbClr val="F5F7FB"/>
+                </a:solidFill>
+                <a:latin typeface="Arial"/>
+                <a:ea typeface="Arial"/>
+                <a:cs typeface="Arial"/>
+              </a:defRPr>
+            </a:lvl7pPr>
+            <a:lvl8pPr algn="l">
+              <a:defRPr sz="2250" b="1">
+                <a:solidFill>
+                  <a:srgbClr val="F5F7FB"/>
+                </a:solidFill>
+                <a:latin typeface="Arial"/>
+                <a:ea typeface="Arial"/>
+                <a:cs typeface="Arial"/>
+              </a:defRPr>
+            </a:lvl8pPr>
+            <a:lvl9pPr algn="l">
+              <a:defRPr sz="2250" b="1">
+                <a:solidFill>
+                  <a:srgbClr val="F5F7FB"/>
+                </a:solidFill>
+                <a:latin typeface="Arial"/>
+                <a:ea typeface="Arial"/>
+                <a:cs typeface="Arial"/>
+              </a:defRPr>
+            </a:lvl9pPr>
+          </a:lstStyle>
+          <a:p xmlns:a="http://schemas.openxmlformats.org/drawingml/2006/main">
+            <a:pPr algn="l">
+              <a:defRPr sz="2250" b="1">
+                <a:solidFill>
+                  <a:srgbClr val="F5F7FB"/>
+                </a:solidFill>
+                <a:latin typeface="Arial"/>
+                <a:ea typeface="Arial"/>
+                <a:cs typeface="Arial"/>
+              </a:defRPr>
+            </a:pPr>
+            <a:r>
+              <a:rPr sz="2250" b="1">
+                <a:solidFill>
+                  <a:srgbClr val="F5F7FB"/>
+                </a:solidFill>
+                <a:latin typeface="Arial"/>
+                <a:ea typeface="Arial"/>
+                <a:cs typeface="Arial"/>
+              </a:rPr>
+              <a:t>Mac SIP client · 209</a:t>
+            </a:r>
+          </a:p>
+        </p:txBody>
+      </p:sp>
+      <p:sp>
+        <p:nvSpPr>
+          <p:cNvPr id="5" name="Own SIP identity&#10;Internal calls and services&#10;Excluded from ring g">
+            <a:extLst xmlns:a="http://schemas.openxmlformats.org/drawingml/2006/main">
+              <a:ext uri="{FF2B5EF4-FFF2-40B4-BE49-F238E27FC236}">
+                <a16:creationId xmlns:a16="http://schemas.microsoft.com/office/drawing/2014/main" id="{6D43C98B-AD87-43CB-93B7-65EF2CE0BA70}"/>
+              </a:ext>
+            </a:extLst>
+          </p:cNvPr>
+          <p:cNvSpPr>
+            <a:spLocks xmlns:a="http://schemas.openxmlformats.org/drawingml/2006/main" noGrp="1"/>
+          </p:cNvSpPr>
+          <p:nvPr/>
+        </p:nvSpPr>
+        <p:spPr>
+          <a:xfrm xmlns:a="http://schemas.openxmlformats.org/drawingml/2006/main">
+            <a:off x="571500" y="3876675"/>
+            <a:ext cx="4429125" cy="1285875"/>
+          </a:xfrm>
+          <a:prstGeom xmlns:a="http://schemas.openxmlformats.org/drawingml/2006/main" prst="rect">
+            <a:avLst/>
+          </a:prstGeom>
+          <a:noFill xmlns:a="http://schemas.openxmlformats.org/drawingml/2006/main"/>
+          <a:ln xmlns:a="http://schemas.openxmlformats.org/drawingml/2006/main" w="0">
+            <a:noFill/>
+          </a:ln>
+        </p:spPr>
+        <p:txBody>
+          <a:bodyPr xmlns:a="http://schemas.openxmlformats.org/drawingml/2006/main" wrap="square" lIns="0" tIns="0" rIns="0" bIns="0" anchor="t">
+            <a:noAutofit/>
+          </a:bodyPr>
+          <a:lstStyle xmlns:a="http://schemas.openxmlformats.org/drawingml/2006/main">
+            <a:defPPr algn="l">
+              <a:defRPr sz="1950" b="0">
+                <a:solidFill>
+                  <a:srgbClr val="AAB9D0"/>
+                </a:solidFill>
+                <a:latin typeface="Arial"/>
+                <a:ea typeface="Arial"/>
+                <a:cs typeface="Arial"/>
+              </a:defRPr>
+            </a:defPPr>
+            <a:lvl1pPr algn="l">
+              <a:defRPr sz="1950" b="0">
+                <a:solidFill>
+                  <a:srgbClr val="AAB9D0"/>
+                </a:solidFill>
+                <a:latin typeface="Arial"/>
+                <a:ea typeface="Arial"/>
+                <a:cs typeface="Arial"/>
+              </a:defRPr>
+            </a:lvl1pPr>
+            <a:lvl2pPr algn="l">
+              <a:defRPr sz="1950" b="0">
+                <a:solidFill>
+                  <a:srgbClr val="AAB9D0"/>
+                </a:solidFill>
+                <a:latin typeface="Arial"/>
+                <a:ea typeface="Arial"/>
+                <a:cs typeface="Arial"/>
+              </a:defRPr>
+            </a:lvl2pPr>
+            <a:lvl3pPr algn="l">
+              <a:defRPr sz="1950" b="0">
+                <a:solidFill>
+                  <a:srgbClr val="AAB9D0"/>
+                </a:solidFill>
+                <a:latin typeface="Arial"/>
+                <a:ea typeface="Arial"/>
+                <a:cs typeface="Arial"/>
+              </a:defRPr>
+            </a:lvl3pPr>
+            <a:lvl4pPr algn="l">
+              <a:defRPr sz="1950" b="0">
+                <a:solidFill>
+                  <a:srgbClr val="AAB9D0"/>
+                </a:solidFill>
+                <a:latin typeface="Arial"/>
+                <a:ea typeface="Arial"/>
+                <a:cs typeface="Arial"/>
+              </a:defRPr>
+            </a:lvl4pPr>
+            <a:lvl5pPr algn="l">
+              <a:defRPr sz="1950" b="0">
+                <a:solidFill>
+                  <a:srgbClr val="AAB9D0"/>
+                </a:solidFill>
+                <a:latin typeface="Arial"/>
+                <a:ea typeface="Arial"/>
+                <a:cs typeface="Arial"/>
+              </a:defRPr>
+            </a:lvl5pPr>
+            <a:lvl6pPr algn="l">
+              <a:defRPr sz="1950" b="0">
+                <a:solidFill>
+                  <a:srgbClr val="AAB9D0"/>
+                </a:solidFill>
+                <a:latin typeface="Arial"/>
+                <a:ea typeface="Arial"/>
+                <a:cs typeface="Arial"/>
+              </a:defRPr>
+            </a:lvl6pPr>
+            <a:lvl7pPr algn="l">
+              <a:defRPr sz="1950" b="0">
+                <a:solidFill>
+                  <a:srgbClr val="AAB9D0"/>
+                </a:solidFill>
+                <a:latin typeface="Arial"/>
+                <a:ea typeface="Arial"/>
+                <a:cs typeface="Arial"/>
+              </a:defRPr>
+            </a:lvl7pPr>
+            <a:lvl8pPr algn="l">
+              <a:defRPr sz="1950" b="0">
+                <a:solidFill>
+                  <a:srgbClr val="AAB9D0"/>
+                </a:solidFill>
+                <a:latin typeface="Arial"/>
+                <a:ea typeface="Arial"/>
+                <a:cs typeface="Arial"/>
+              </a:defRPr>
+            </a:lvl8pPr>
+            <a:lvl9pPr algn="l">
+              <a:defRPr sz="1950" b="0">
+                <a:solidFill>
+                  <a:srgbClr val="AAB9D0"/>
+                </a:solidFill>
+                <a:latin typeface="Arial"/>
+                <a:ea typeface="Arial"/>
+                <a:cs typeface="Arial"/>
+              </a:defRPr>
+            </a:lvl9pPr>
+          </a:lstStyle>
+          <a:p xmlns:a="http://schemas.openxmlformats.org/drawingml/2006/main">
+            <a:pPr algn="l">
+              <a:defRPr sz="1950" b="0">
+                <a:solidFill>
+                  <a:srgbClr val="AAB9D0"/>
+                </a:solidFill>
+                <a:latin typeface="Arial"/>
+                <a:ea typeface="Arial"/>
+                <a:cs typeface="Arial"/>
+              </a:defRPr>
+            </a:pPr>
+            <a:r>
+              <a:rPr sz="1950" b="0">
+                <a:solidFill>
+                  <a:srgbClr val="AAB9D0"/>
+                </a:solidFill>
+                <a:latin typeface="Arial"/>
+                <a:ea typeface="Arial"/>
+                <a:cs typeface="Arial"/>
+              </a:rPr>
+              <a:t>Own SIP identity</a:t>
+            </a:r>
+          </a:p>
+          <a:p xmlns:a="http://schemas.openxmlformats.org/drawingml/2006/main">
+            <a:pPr algn="l">
+              <a:defRPr sz="1950" b="0">
+                <a:solidFill>
+                  <a:srgbClr val="AAB9D0"/>
+                </a:solidFill>
+                <a:latin typeface="Arial"/>
+                <a:ea typeface="Arial"/>
+                <a:cs typeface="Arial"/>
+              </a:defRPr>
+            </a:pPr>
+            <a:r>
+              <a:rPr sz="1950" b="0">
+                <a:solidFill>
+                  <a:srgbClr val="AAB9D0"/>
+                </a:solidFill>
+                <a:latin typeface="Arial"/>
+                <a:ea typeface="Arial"/>
+                <a:cs typeface="Arial"/>
+              </a:rPr>
+              <a:t>Internal calls and services</a:t>
+            </a:r>
+          </a:p>
+          <a:p xmlns:a="http://schemas.openxmlformats.org/drawingml/2006/main">
+            <a:pPr algn="l">
+              <a:defRPr sz="1950" b="0">
+                <a:solidFill>
+                  <a:srgbClr val="AAB9D0"/>
+                </a:solidFill>
+                <a:latin typeface="Arial"/>
+                <a:ea typeface="Arial"/>
+                <a:cs typeface="Arial"/>
+              </a:defRPr>
+            </a:pPr>
+            <a:r>
+              <a:rPr sz="1950" b="0">
+                <a:solidFill>
+                  <a:srgbClr val="AAB9D0"/>
+                </a:solidFill>
+                <a:latin typeface="Arial"/>
+                <a:ea typeface="Arial"/>
+                <a:cs typeface="Arial"/>
+              </a:rPr>
+              <a:t>Excluded from ring group 620</a:t>
+            </a:r>
+          </a:p>
+        </p:txBody>
+      </p:sp>
+      <p:sp>
+        <p:nvSpPr>
+          <p:cNvPr id="6" name="708">
+            <a:extLst xmlns:a="http://schemas.openxmlformats.org/drawingml/2006/main">
+              <a:ext uri="{FF2B5EF4-FFF2-40B4-BE49-F238E27FC236}">
+                <a16:creationId xmlns:a16="http://schemas.microsoft.com/office/drawing/2014/main" id="{6F804300-9B92-46C9-8F81-1893CBA07BED}"/>
+              </a:ext>
+            </a:extLst>
+          </p:cNvPr>
+          <p:cNvSpPr>
+            <a:spLocks xmlns:a="http://schemas.openxmlformats.org/drawingml/2006/main" noGrp="1"/>
+          </p:cNvSpPr>
+          <p:nvPr/>
+        </p:nvSpPr>
+        <p:spPr>
+          <a:xfrm xmlns:a="http://schemas.openxmlformats.org/drawingml/2006/main">
+            <a:off x="6191250" y="1733550"/>
+            <a:ext cx="1381125" cy="619125"/>
+          </a:xfrm>
+          <a:prstGeom xmlns:a="http://schemas.openxmlformats.org/drawingml/2006/main" prst="rect">
+            <a:avLst/>
+          </a:prstGeom>
+          <a:noFill xmlns:a="http://schemas.openxmlformats.org/drawingml/2006/main"/>
+          <a:ln xmlns:a="http://schemas.openxmlformats.org/drawingml/2006/main" w="0">
+            <a:noFill/>
+          </a:ln>
+        </p:spPr>
+        <p:txBody>
+          <a:bodyPr xmlns:a="http://schemas.openxmlformats.org/drawingml/2006/main" wrap="square" lIns="0" tIns="0" rIns="0" bIns="0" anchor="t">
+            <a:noAutofit/>
+          </a:bodyPr>
+          <a:lstStyle xmlns:a="http://schemas.openxmlformats.org/drawingml/2006/main">
+            <a:defPPr algn="l">
+              <a:defRPr sz="3375" b="1">
+                <a:solidFill>
+                  <a:srgbClr val="FF836D"/>
+                </a:solidFill>
+                <a:latin typeface="Arial"/>
+                <a:ea typeface="Arial"/>
+                <a:cs typeface="Arial"/>
+              </a:defRPr>
+            </a:defPPr>
+            <a:lvl1pPr algn="l">
+              <a:defRPr sz="3375" b="1">
+                <a:solidFill>
+                  <a:srgbClr val="FF836D"/>
+                </a:solidFill>
+                <a:latin typeface="Arial"/>
+                <a:ea typeface="Arial"/>
+                <a:cs typeface="Arial"/>
+              </a:defRPr>
+            </a:lvl1pPr>
+            <a:lvl2pPr algn="l">
+              <a:defRPr sz="3375" b="1">
+                <a:solidFill>
+                  <a:srgbClr val="FF836D"/>
+                </a:solidFill>
+                <a:latin typeface="Arial"/>
+                <a:ea typeface="Arial"/>
+                <a:cs typeface="Arial"/>
+              </a:defRPr>
+            </a:lvl2pPr>
+            <a:lvl3pPr algn="l">
+              <a:defRPr sz="3375" b="1">
+                <a:solidFill>
+                  <a:srgbClr val="FF836D"/>
+                </a:solidFill>
+                <a:latin typeface="Arial"/>
+                <a:ea typeface="Arial"/>
+                <a:cs typeface="Arial"/>
+              </a:defRPr>
+            </a:lvl3pPr>
+            <a:lvl4pPr algn="l">
+              <a:defRPr sz="3375" b="1">
+                <a:solidFill>
+                  <a:srgbClr val="FF836D"/>
+                </a:solidFill>
+                <a:latin typeface="Arial"/>
+                <a:ea typeface="Arial"/>
+                <a:cs typeface="Arial"/>
+              </a:defRPr>
+            </a:lvl4pPr>
+            <a:lvl5pPr algn="l">
+              <a:defRPr sz="3375" b="1">
+                <a:solidFill>
+                  <a:srgbClr val="FF836D"/>
+                </a:solidFill>
+                <a:latin typeface="Arial"/>
+                <a:ea typeface="Arial"/>
+                <a:cs typeface="Arial"/>
+              </a:defRPr>
+            </a:lvl5pPr>
+            <a:lvl6pPr algn="l">
+              <a:defRPr sz="3375" b="1">
+                <a:solidFill>
+                  <a:srgbClr val="FF836D"/>
+                </a:solidFill>
+                <a:latin typeface="Arial"/>
+                <a:ea typeface="Arial"/>
+                <a:cs typeface="Arial"/>
+              </a:defRPr>
+            </a:lvl6pPr>
+            <a:lvl7pPr algn="l">
+              <a:defRPr sz="3375" b="1">
+                <a:solidFill>
+                  <a:srgbClr val="FF836D"/>
+                </a:solidFill>
+                <a:latin typeface="Arial"/>
+                <a:ea typeface="Arial"/>
+                <a:cs typeface="Arial"/>
+              </a:defRPr>
+            </a:lvl7pPr>
+            <a:lvl8pPr algn="l">
+              <a:defRPr sz="3375" b="1">
+                <a:solidFill>
+                  <a:srgbClr val="FF836D"/>
+                </a:solidFill>
+                <a:latin typeface="Arial"/>
+                <a:ea typeface="Arial"/>
+                <a:cs typeface="Arial"/>
+              </a:defRPr>
+            </a:lvl8pPr>
+            <a:lvl9pPr algn="l">
+              <a:defRPr sz="3375" b="1">
+                <a:solidFill>
+                  <a:srgbClr val="FF836D"/>
+                </a:solidFill>
+                <a:latin typeface="Arial"/>
+                <a:ea typeface="Arial"/>
+                <a:cs typeface="Arial"/>
+              </a:defRPr>
+            </a:lvl9pPr>
+          </a:lstStyle>
+          <a:p xmlns:a="http://schemas.openxmlformats.org/drawingml/2006/main">
+            <a:pPr algn="l">
+              <a:defRPr sz="3375" b="1">
+                <a:solidFill>
+                  <a:srgbClr val="FF836D"/>
+                </a:solidFill>
+                <a:latin typeface="Arial"/>
+                <a:ea typeface="Arial"/>
+                <a:cs typeface="Arial"/>
+              </a:defRPr>
+            </a:pPr>
+            <a:r>
+              <a:rPr sz="3375" b="1">
+                <a:solidFill>
+                  <a:srgbClr val="FF836D"/>
+                </a:solidFill>
+                <a:latin typeface="Arial"/>
+                <a:ea typeface="Arial"/>
+                <a:cs typeface="Arial"/>
+              </a:rPr>
+              <a:t>708</a:t>
+            </a:r>
+          </a:p>
+        </p:txBody>
+      </p:sp>
+      <p:sp>
+        <p:nvSpPr>
+          <p:cNvPr id="7" name="Toddler music">
+            <a:extLst xmlns:a="http://schemas.openxmlformats.org/drawingml/2006/main">
+              <a:ext uri="{FF2B5EF4-FFF2-40B4-BE49-F238E27FC236}">
+                <a16:creationId xmlns:a16="http://schemas.microsoft.com/office/drawing/2014/main" id="{1148DD89-333D-44DE-95DC-488EEF79F129}"/>
+              </a:ext>
+            </a:extLst>
+          </p:cNvPr>
+          <p:cNvSpPr>
+            <a:spLocks xmlns:a="http://schemas.openxmlformats.org/drawingml/2006/main" noGrp="1"/>
+          </p:cNvSpPr>
+          <p:nvPr/>
+        </p:nvSpPr>
+        <p:spPr>
+          <a:xfrm xmlns:a="http://schemas.openxmlformats.org/drawingml/2006/main">
+            <a:off x="7810500" y="1800225"/>
+            <a:ext cx="3714750" cy="571500"/>
+          </a:xfrm>
+          <a:prstGeom xmlns:a="http://schemas.openxmlformats.org/drawingml/2006/main" prst="rect">
+            <a:avLst/>
+          </a:prstGeom>
+          <a:noFill xmlns:a="http://schemas.openxmlformats.org/drawingml/2006/main"/>
+          <a:ln xmlns:a="http://schemas.openxmlformats.org/drawingml/2006/main" w="0">
+            <a:noFill/>
+          </a:ln>
+        </p:spPr>
+        <p:txBody>
+          <a:bodyPr xmlns:a="http://schemas.openxmlformats.org/drawingml/2006/main" wrap="square" lIns="0" tIns="0" rIns="0" bIns="0" anchor="t">
+            <a:noAutofit/>
+          </a:bodyPr>
+          <a:lstStyle xmlns:a="http://schemas.openxmlformats.org/drawingml/2006/main">
+            <a:defPPr algn="l">
+              <a:defRPr sz="2175" b="1">
+                <a:solidFill>
+                  <a:srgbClr val="F5F7FB"/>
+                </a:solidFill>
+                <a:latin typeface="Arial"/>
+                <a:ea typeface="Arial"/>
+                <a:cs typeface="Arial"/>
+              </a:defRPr>
+            </a:defPPr>
+            <a:lvl1pPr algn="l">
+              <a:defRPr sz="2175" b="1">
+                <a:solidFill>
+                  <a:srgbClr val="F5F7FB"/>
+                </a:solidFill>
+                <a:latin typeface="Arial"/>
+                <a:ea typeface="Arial"/>
+                <a:cs typeface="Arial"/>
+              </a:defRPr>
+            </a:lvl1pPr>
+            <a:lvl2pPr algn="l">
+              <a:defRPr sz="2175" b="1">
+                <a:solidFill>
+                  <a:srgbClr val="F5F7FB"/>
+                </a:solidFill>
+                <a:latin typeface="Arial"/>
+                <a:ea typeface="Arial"/>
+                <a:cs typeface="Arial"/>
+              </a:defRPr>
+            </a:lvl2pPr>
+            <a:lvl3pPr algn="l">
+              <a:defRPr sz="2175" b="1">
+                <a:solidFill>
+                  <a:srgbClr val="F5F7FB"/>
+                </a:solidFill>
+                <a:latin typeface="Arial"/>
+                <a:ea typeface="Arial"/>
+                <a:cs typeface="Arial"/>
+              </a:defRPr>
+            </a:lvl3pPr>
+            <a:lvl4pPr algn="l">
+              <a:defRPr sz="2175" b="1">
+                <a:solidFill>
+                  <a:srgbClr val="F5F7FB"/>
+                </a:solidFill>
+                <a:latin typeface="Arial"/>
+                <a:ea typeface="Arial"/>
+                <a:cs typeface="Arial"/>
+              </a:defRPr>
+            </a:lvl4pPr>
+            <a:lvl5pPr algn="l">
+              <a:defRPr sz="2175" b="1">
+                <a:solidFill>
+                  <a:srgbClr val="F5F7FB"/>
+                </a:solidFill>
+                <a:latin typeface="Arial"/>
+                <a:ea typeface="Arial"/>
+                <a:cs typeface="Arial"/>
+              </a:defRPr>
+            </a:lvl5pPr>
+            <a:lvl6pPr algn="l">
+              <a:defRPr sz="2175" b="1">
+                <a:solidFill>
+                  <a:srgbClr val="F5F7FB"/>
+                </a:solidFill>
+                <a:latin typeface="Arial"/>
+                <a:ea typeface="Arial"/>
+                <a:cs typeface="Arial"/>
+              </a:defRPr>
+            </a:lvl6pPr>
+            <a:lvl7pPr algn="l">
+              <a:defRPr sz="2175" b="1">
+                <a:solidFill>
+                  <a:srgbClr val="F5F7FB"/>
+                </a:solidFill>
+                <a:latin typeface="Arial"/>
+                <a:ea typeface="Arial"/>
+                <a:cs typeface="Arial"/>
+              </a:defRPr>
+            </a:lvl7pPr>
+            <a:lvl8pPr algn="l">
+              <a:defRPr sz="2175" b="1">
+                <a:solidFill>
+                  <a:srgbClr val="F5F7FB"/>
+                </a:solidFill>
+                <a:latin typeface="Arial"/>
+                <a:ea typeface="Arial"/>
+                <a:cs typeface="Arial"/>
+              </a:defRPr>
+            </a:lvl8pPr>
+            <a:lvl9pPr algn="l">
+              <a:defRPr sz="2175" b="1">
+                <a:solidFill>
+                  <a:srgbClr val="F5F7FB"/>
+                </a:solidFill>
+                <a:latin typeface="Arial"/>
+                <a:ea typeface="Arial"/>
+                <a:cs typeface="Arial"/>
+              </a:defRPr>
+            </a:lvl9pPr>
+          </a:lstStyle>
+          <a:p xmlns:a="http://schemas.openxmlformats.org/drawingml/2006/main">
+            <a:pPr algn="l">
+              <a:defRPr sz="2175" b="1">
+                <a:solidFill>
+                  <a:srgbClr val="F5F7FB"/>
+                </a:solidFill>
+                <a:latin typeface="Arial"/>
+                <a:ea typeface="Arial"/>
+                <a:cs typeface="Arial"/>
+              </a:defRPr>
+            </a:pPr>
+            <a:r>
+              <a:rPr sz="2175" b="1">
+                <a:solidFill>
+                  <a:srgbClr val="F5F7FB"/>
+                </a:solidFill>
+                <a:latin typeface="Arial"/>
+                <a:ea typeface="Arial"/>
+                <a:cs typeface="Arial"/>
+              </a:rPr>
+              <a:t>Toddler music</a:t>
+            </a:r>
+          </a:p>
+        </p:txBody>
+      </p:sp>
+      <p:sp>
+        <p:nvSpPr>
+          <p:cNvPr id="8" name="709">
+            <a:extLst xmlns:a="http://schemas.openxmlformats.org/drawingml/2006/main">
+              <a:ext uri="{FF2B5EF4-FFF2-40B4-BE49-F238E27FC236}">
+                <a16:creationId xmlns:a16="http://schemas.microsoft.com/office/drawing/2014/main" id="{4BA5CD88-F87C-4C3B-A503-1485434D7A2C}"/>
+              </a:ext>
+            </a:extLst>
+          </p:cNvPr>
+          <p:cNvSpPr>
+            <a:spLocks xmlns:a="http://schemas.openxmlformats.org/drawingml/2006/main" noGrp="1"/>
+          </p:cNvSpPr>
+          <p:nvPr/>
+        </p:nvSpPr>
+        <p:spPr>
+          <a:xfrm xmlns:a="http://schemas.openxmlformats.org/drawingml/2006/main">
+            <a:off x="6191250" y="2886075"/>
+            <a:ext cx="1381125" cy="619125"/>
+          </a:xfrm>
+          <a:prstGeom xmlns:a="http://schemas.openxmlformats.org/drawingml/2006/main" prst="rect">
+            <a:avLst/>
+          </a:prstGeom>
+          <a:noFill xmlns:a="http://schemas.openxmlformats.org/drawingml/2006/main"/>
+          <a:ln xmlns:a="http://schemas.openxmlformats.org/drawingml/2006/main" w="0">
+            <a:noFill/>
+          </a:ln>
+        </p:spPr>
+        <p:txBody>
+          <a:bodyPr xmlns:a="http://schemas.openxmlformats.org/drawingml/2006/main" wrap="square" lIns="0" tIns="0" rIns="0" bIns="0" anchor="t">
+            <a:noAutofit/>
+          </a:bodyPr>
+          <a:lstStyle xmlns:a="http://schemas.openxmlformats.org/drawingml/2006/main">
+            <a:defPPr algn="l">
+              <a:defRPr sz="3375" b="1">
+                <a:solidFill>
+                  <a:srgbClr val="F7CB64"/>
+                </a:solidFill>
+                <a:latin typeface="Arial"/>
+                <a:ea typeface="Arial"/>
+                <a:cs typeface="Arial"/>
+              </a:defRPr>
+            </a:defPPr>
+            <a:lvl1pPr algn="l">
+              <a:defRPr sz="3375" b="1">
+                <a:solidFill>
+                  <a:srgbClr val="F7CB64"/>
+                </a:solidFill>
+                <a:latin typeface="Arial"/>
+                <a:ea typeface="Arial"/>
+                <a:cs typeface="Arial"/>
+              </a:defRPr>
+            </a:lvl1pPr>
+            <a:lvl2pPr algn="l">
+              <a:defRPr sz="3375" b="1">
+                <a:solidFill>
+                  <a:srgbClr val="F7CB64"/>
+                </a:solidFill>
+                <a:latin typeface="Arial"/>
+                <a:ea typeface="Arial"/>
+                <a:cs typeface="Arial"/>
+              </a:defRPr>
+            </a:lvl2pPr>
+            <a:lvl3pPr algn="l">
+              <a:defRPr sz="3375" b="1">
+                <a:solidFill>
+                  <a:srgbClr val="F7CB64"/>
+                </a:solidFill>
+                <a:latin typeface="Arial"/>
+                <a:ea typeface="Arial"/>
+                <a:cs typeface="Arial"/>
+              </a:defRPr>
+            </a:lvl3pPr>
+            <a:lvl4pPr algn="l">
+              <a:defRPr sz="3375" b="1">
+                <a:solidFill>
+                  <a:srgbClr val="F7CB64"/>
+                </a:solidFill>
+                <a:latin typeface="Arial"/>
+                <a:ea typeface="Arial"/>
+                <a:cs typeface="Arial"/>
+              </a:defRPr>
+            </a:lvl4pPr>
+            <a:lvl5pPr algn="l">
+              <a:defRPr sz="3375" b="1">
+                <a:solidFill>
+                  <a:srgbClr val="F7CB64"/>
+                </a:solidFill>
+                <a:latin typeface="Arial"/>
+                <a:ea typeface="Arial"/>
+                <a:cs typeface="Arial"/>
+              </a:defRPr>
+            </a:lvl5pPr>
+            <a:lvl6pPr algn="l">
+              <a:defRPr sz="3375" b="1">
+                <a:solidFill>
+                  <a:srgbClr val="F7CB64"/>
+                </a:solidFill>
+                <a:latin typeface="Arial"/>
+                <a:ea typeface="Arial"/>
+                <a:cs typeface="Arial"/>
+              </a:defRPr>
+            </a:lvl6pPr>
+            <a:lvl7pPr algn="l">
+              <a:defRPr sz="3375" b="1">
+                <a:solidFill>
+                  <a:srgbClr val="F7CB64"/>
+                </a:solidFill>
+                <a:latin typeface="Arial"/>
+                <a:ea typeface="Arial"/>
+                <a:cs typeface="Arial"/>
+              </a:defRPr>
+            </a:lvl7pPr>
+            <a:lvl8pPr algn="l">
+              <a:defRPr sz="3375" b="1">
+                <a:solidFill>
+                  <a:srgbClr val="F7CB64"/>
+                </a:solidFill>
+                <a:latin typeface="Arial"/>
+                <a:ea typeface="Arial"/>
+                <a:cs typeface="Arial"/>
+              </a:defRPr>
+            </a:lvl8pPr>
+            <a:lvl9pPr algn="l">
+              <a:defRPr sz="3375" b="1">
+                <a:solidFill>
+                  <a:srgbClr val="F7CB64"/>
+                </a:solidFill>
+                <a:latin typeface="Arial"/>
+                <a:ea typeface="Arial"/>
+                <a:cs typeface="Arial"/>
+              </a:defRPr>
+            </a:lvl9pPr>
+          </a:lstStyle>
+          <a:p xmlns:a="http://schemas.openxmlformats.org/drawingml/2006/main">
+            <a:pPr algn="l">
+              <a:defRPr sz="3375" b="1">
+                <a:solidFill>
+                  <a:srgbClr val="F7CB64"/>
+                </a:solidFill>
+                <a:latin typeface="Arial"/>
+                <a:ea typeface="Arial"/>
+                <a:cs typeface="Arial"/>
+              </a:defRPr>
+            </a:pPr>
+            <a:r>
+              <a:rPr sz="3375" b="1">
+                <a:solidFill>
+                  <a:srgbClr val="F7CB64"/>
+                </a:solidFill>
+                <a:latin typeface="Arial"/>
+                <a:ea typeface="Arial"/>
+                <a:cs typeface="Arial"/>
+              </a:rPr>
+              <a:t>709</a:t>
+            </a:r>
+          </a:p>
+        </p:txBody>
+      </p:sp>
+      <p:sp>
+        <p:nvSpPr>
+          <p:cNvPr id="9" name="Lullabies">
+            <a:extLst xmlns:a="http://schemas.openxmlformats.org/drawingml/2006/main">
+              <a:ext uri="{FF2B5EF4-FFF2-40B4-BE49-F238E27FC236}">
+                <a16:creationId xmlns:a16="http://schemas.microsoft.com/office/drawing/2014/main" id="{C32D4E51-189D-4601-A7C2-F8177C79E08E}"/>
+              </a:ext>
+            </a:extLst>
+          </p:cNvPr>
+          <p:cNvSpPr>
+            <a:spLocks xmlns:a="http://schemas.openxmlformats.org/drawingml/2006/main" noGrp="1"/>
+          </p:cNvSpPr>
+          <p:nvPr/>
+        </p:nvSpPr>
+        <p:spPr>
+          <a:xfrm xmlns:a="http://schemas.openxmlformats.org/drawingml/2006/main">
+            <a:off x="7810500" y="2952750"/>
+            <a:ext cx="3714750" cy="571500"/>
+          </a:xfrm>
+          <a:prstGeom xmlns:a="http://schemas.openxmlformats.org/drawingml/2006/main" prst="rect">
+            <a:avLst/>
+          </a:prstGeom>
+          <a:noFill xmlns:a="http://schemas.openxmlformats.org/drawingml/2006/main"/>
+          <a:ln xmlns:a="http://schemas.openxmlformats.org/drawingml/2006/main" w="0">
+            <a:noFill/>
+          </a:ln>
+        </p:spPr>
+        <p:txBody>
+          <a:bodyPr xmlns:a="http://schemas.openxmlformats.org/drawingml/2006/main" wrap="square" lIns="0" tIns="0" rIns="0" bIns="0" anchor="t">
+            <a:noAutofit/>
+          </a:bodyPr>
+          <a:lstStyle xmlns:a="http://schemas.openxmlformats.org/drawingml/2006/main">
+            <a:defPPr algn="l">
+              <a:defRPr sz="2175" b="1">
+                <a:solidFill>
+                  <a:srgbClr val="F5F7FB"/>
+                </a:solidFill>
+                <a:latin typeface="Arial"/>
+                <a:ea typeface="Arial"/>
+                <a:cs typeface="Arial"/>
+              </a:defRPr>
+            </a:defPPr>
+            <a:lvl1pPr algn="l">
+              <a:defRPr sz="2175" b="1">
+                <a:solidFill>
+                  <a:srgbClr val="F5F7FB"/>
+                </a:solidFill>
+                <a:latin typeface="Arial"/>
+                <a:ea typeface="Arial"/>
+                <a:cs typeface="Arial"/>
+              </a:defRPr>
+            </a:lvl1pPr>
+            <a:lvl2pPr algn="l">
+              <a:defRPr sz="2175" b="1">
+                <a:solidFill>
+                  <a:srgbClr val="F5F7FB"/>
+                </a:solidFill>
+                <a:latin typeface="Arial"/>
+                <a:ea typeface="Arial"/>
+                <a:cs typeface="Arial"/>
+              </a:defRPr>
+            </a:lvl2pPr>
+            <a:lvl3pPr algn="l">
+              <a:defRPr sz="2175" b="1">
+                <a:solidFill>
+                  <a:srgbClr val="F5F7FB"/>
+                </a:solidFill>
+                <a:latin typeface="Arial"/>
+                <a:ea typeface="Arial"/>
+                <a:cs typeface="Arial"/>
+              </a:defRPr>
+            </a:lvl3pPr>
+            <a:lvl4pPr algn="l">
+              <a:defRPr sz="2175" b="1">
+                <a:solidFill>
+                  <a:srgbClr val="F5F7FB"/>
+                </a:solidFill>
+                <a:latin typeface="Arial"/>
+                <a:ea typeface="Arial"/>
+                <a:cs typeface="Arial"/>
+              </a:defRPr>
+            </a:lvl4pPr>
+            <a:lvl5pPr algn="l">
+              <a:defRPr sz="2175" b="1">
+                <a:solidFill>
+                  <a:srgbClr val="F5F7FB"/>
+                </a:solidFill>
+                <a:latin typeface="Arial"/>
+                <a:ea typeface="Arial"/>
+                <a:cs typeface="Arial"/>
+              </a:defRPr>
+            </a:lvl5pPr>
+            <a:lvl6pPr algn="l">
+              <a:defRPr sz="2175" b="1">
+                <a:solidFill>
+                  <a:srgbClr val="F5F7FB"/>
+                </a:solidFill>
+                <a:latin typeface="Arial"/>
+                <a:ea typeface="Arial"/>
+                <a:cs typeface="Arial"/>
+              </a:defRPr>
+            </a:lvl6pPr>
+            <a:lvl7pPr algn="l">
+              <a:defRPr sz="2175" b="1">
+                <a:solidFill>
+                  <a:srgbClr val="F5F7FB"/>
+                </a:solidFill>
+                <a:latin typeface="Arial"/>
+                <a:ea typeface="Arial"/>
+                <a:cs typeface="Arial"/>
+              </a:defRPr>
+            </a:lvl7pPr>
+            <a:lvl8pPr algn="l">
+              <a:defRPr sz="2175" b="1">
+                <a:solidFill>
+                  <a:srgbClr val="F5F7FB"/>
+                </a:solidFill>
+                <a:latin typeface="Arial"/>
+                <a:ea typeface="Arial"/>
+                <a:cs typeface="Arial"/>
+              </a:defRPr>
+            </a:lvl8pPr>
+            <a:lvl9pPr algn="l">
+              <a:defRPr sz="2175" b="1">
+                <a:solidFill>
+                  <a:srgbClr val="F5F7FB"/>
+                </a:solidFill>
+                <a:latin typeface="Arial"/>
+                <a:ea typeface="Arial"/>
+                <a:cs typeface="Arial"/>
+              </a:defRPr>
+            </a:lvl9pPr>
+          </a:lstStyle>
+          <a:p xmlns:a="http://schemas.openxmlformats.org/drawingml/2006/main">
+            <a:pPr algn="l">
+              <a:defRPr sz="2175" b="1">
+                <a:solidFill>
+                  <a:srgbClr val="F5F7FB"/>
+                </a:solidFill>
+                <a:latin typeface="Arial"/>
+                <a:ea typeface="Arial"/>
+                <a:cs typeface="Arial"/>
+              </a:defRPr>
+            </a:pPr>
+            <a:r>
+              <a:rPr sz="2175" b="1">
+                <a:solidFill>
+                  <a:srgbClr val="F5F7FB"/>
+                </a:solidFill>
+                <a:latin typeface="Arial"/>
+                <a:ea typeface="Arial"/>
+                <a:cs typeface="Arial"/>
+              </a:rPr>
+              <a:t>Lullabies</a:t>
+            </a:r>
+          </a:p>
+        </p:txBody>
+      </p:sp>
+      <p:sp>
+        <p:nvSpPr>
+          <p:cNvPr id="10" name="710">
+            <a:extLst xmlns:a="http://schemas.openxmlformats.org/drawingml/2006/main">
+              <a:ext uri="{FF2B5EF4-FFF2-40B4-BE49-F238E27FC236}">
+                <a16:creationId xmlns:a16="http://schemas.microsoft.com/office/drawing/2014/main" id="{8912D8B8-143F-4AA3-9B1A-564ABCAE8033}"/>
+              </a:ext>
+            </a:extLst>
+          </p:cNvPr>
+          <p:cNvSpPr>
+            <a:spLocks xmlns:a="http://schemas.openxmlformats.org/drawingml/2006/main" noGrp="1"/>
+          </p:cNvSpPr>
+          <p:nvPr/>
+        </p:nvSpPr>
+        <p:spPr>
+          <a:xfrm xmlns:a="http://schemas.openxmlformats.org/drawingml/2006/main">
+            <a:off x="6191250" y="4038600"/>
+            <a:ext cx="1381125" cy="619125"/>
+          </a:xfrm>
+          <a:prstGeom xmlns:a="http://schemas.openxmlformats.org/drawingml/2006/main" prst="rect">
+            <a:avLst/>
+          </a:prstGeom>
+          <a:noFill xmlns:a="http://schemas.openxmlformats.org/drawingml/2006/main"/>
+          <a:ln xmlns:a="http://schemas.openxmlformats.org/drawingml/2006/main" w="0">
+            <a:noFill/>
+          </a:ln>
+        </p:spPr>
+        <p:txBody>
+          <a:bodyPr xmlns:a="http://schemas.openxmlformats.org/drawingml/2006/main" wrap="square" lIns="0" tIns="0" rIns="0" bIns="0" anchor="t">
+            <a:noAutofit/>
+          </a:bodyPr>
+          <a:lstStyle xmlns:a="http://schemas.openxmlformats.org/drawingml/2006/main">
+            <a:defPPr algn="l">
+              <a:defRPr sz="3375" b="1">
+                <a:solidFill>
+                  <a:srgbClr val="48DDCC"/>
+                </a:solidFill>
+                <a:latin typeface="Arial"/>
+                <a:ea typeface="Arial"/>
+                <a:cs typeface="Arial"/>
+              </a:defRPr>
+            </a:defPPr>
+            <a:lvl1pPr algn="l">
+              <a:defRPr sz="3375" b="1">
+                <a:solidFill>
+                  <a:srgbClr val="48DDCC"/>
+                </a:solidFill>
+                <a:latin typeface="Arial"/>
+                <a:ea typeface="Arial"/>
+                <a:cs typeface="Arial"/>
+              </a:defRPr>
+            </a:lvl1pPr>
+            <a:lvl2pPr algn="l">
+              <a:defRPr sz="3375" b="1">
+                <a:solidFill>
+                  <a:srgbClr val="48DDCC"/>
+                </a:solidFill>
+                <a:latin typeface="Arial"/>
+                <a:ea typeface="Arial"/>
+                <a:cs typeface="Arial"/>
+              </a:defRPr>
+            </a:lvl2pPr>
+            <a:lvl3pPr algn="l">
+              <a:defRPr sz="3375" b="1">
+                <a:solidFill>
+                  <a:srgbClr val="48DDCC"/>
+                </a:solidFill>
+                <a:latin typeface="Arial"/>
+                <a:ea typeface="Arial"/>
+                <a:cs typeface="Arial"/>
+              </a:defRPr>
+            </a:lvl3pPr>
+            <a:lvl4pPr algn="l">
+              <a:defRPr sz="3375" b="1">
+                <a:solidFill>
+                  <a:srgbClr val="48DDCC"/>
+                </a:solidFill>
+                <a:latin typeface="Arial"/>
+                <a:ea typeface="Arial"/>
+                <a:cs typeface="Arial"/>
+              </a:defRPr>
+            </a:lvl4pPr>
+            <a:lvl5pPr algn="l">
+              <a:defRPr sz="3375" b="1">
+                <a:solidFill>
+                  <a:srgbClr val="48DDCC"/>
+                </a:solidFill>
+                <a:latin typeface="Arial"/>
+                <a:ea typeface="Arial"/>
+                <a:cs typeface="Arial"/>
+              </a:defRPr>
+            </a:lvl5pPr>
+            <a:lvl6pPr algn="l">
+              <a:defRPr sz="3375" b="1">
+                <a:solidFill>
+                  <a:srgbClr val="48DDCC"/>
+                </a:solidFill>
+                <a:latin typeface="Arial"/>
+                <a:ea typeface="Arial"/>
+                <a:cs typeface="Arial"/>
+              </a:defRPr>
+            </a:lvl6pPr>
+            <a:lvl7pPr algn="l">
+              <a:defRPr sz="3375" b="1">
+                <a:solidFill>
+                  <a:srgbClr val="48DDCC"/>
+                </a:solidFill>
+                <a:latin typeface="Arial"/>
+                <a:ea typeface="Arial"/>
+                <a:cs typeface="Arial"/>
+              </a:defRPr>
+            </a:lvl7pPr>
+            <a:lvl8pPr algn="l">
+              <a:defRPr sz="3375" b="1">
+                <a:solidFill>
+                  <a:srgbClr val="48DDCC"/>
+                </a:solidFill>
+                <a:latin typeface="Arial"/>
+                <a:ea typeface="Arial"/>
+                <a:cs typeface="Arial"/>
+              </a:defRPr>
+            </a:lvl8pPr>
+            <a:lvl9pPr algn="l">
+              <a:defRPr sz="3375" b="1">
+                <a:solidFill>
+                  <a:srgbClr val="48DDCC"/>
+                </a:solidFill>
+                <a:latin typeface="Arial"/>
+                <a:ea typeface="Arial"/>
+                <a:cs typeface="Arial"/>
+              </a:defRPr>
+            </a:lvl9pPr>
+          </a:lstStyle>
+          <a:p xmlns:a="http://schemas.openxmlformats.org/drawingml/2006/main">
+            <a:pPr algn="l">
+              <a:defRPr sz="3375" b="1">
+                <a:solidFill>
+                  <a:srgbClr val="48DDCC"/>
+                </a:solidFill>
+                <a:latin typeface="Arial"/>
+                <a:ea typeface="Arial"/>
+                <a:cs typeface="Arial"/>
+              </a:defRPr>
+            </a:pPr>
+            <a:r>
+              <a:rPr sz="3375" b="1">
+                <a:solidFill>
+                  <a:srgbClr val="48DDCC"/>
+                </a:solidFill>
+                <a:latin typeface="Arial"/>
+                <a:ea typeface="Arial"/>
+                <a:cs typeface="Arial"/>
+              </a:rPr>
+              <a:t>710</a:t>
+            </a:r>
+          </a:p>
+        </p:txBody>
+      </p:sp>
+      <p:sp>
+        <p:nvSpPr>
+          <p:cNvPr id="11" name="Children’s songs">
+            <a:extLst xmlns:a="http://schemas.openxmlformats.org/drawingml/2006/main">
+              <a:ext uri="{FF2B5EF4-FFF2-40B4-BE49-F238E27FC236}">
+                <a16:creationId xmlns:a16="http://schemas.microsoft.com/office/drawing/2014/main" id="{424CC106-2C02-44EF-8F83-D658DFE852BB}"/>
+              </a:ext>
+            </a:extLst>
+          </p:cNvPr>
+          <p:cNvSpPr>
+            <a:spLocks xmlns:a="http://schemas.openxmlformats.org/drawingml/2006/main" noGrp="1"/>
+          </p:cNvSpPr>
+          <p:nvPr/>
+        </p:nvSpPr>
+        <p:spPr>
+          <a:xfrm xmlns:a="http://schemas.openxmlformats.org/drawingml/2006/main">
+            <a:off x="7810500" y="4105275"/>
+            <a:ext cx="3714750" cy="571500"/>
+          </a:xfrm>
+          <a:prstGeom xmlns:a="http://schemas.openxmlformats.org/drawingml/2006/main" prst="rect">
+            <a:avLst/>
+          </a:prstGeom>
+          <a:noFill xmlns:a="http://schemas.openxmlformats.org/drawingml/2006/main"/>
+          <a:ln xmlns:a="http://schemas.openxmlformats.org/drawingml/2006/main" w="0">
+            <a:noFill/>
+          </a:ln>
+        </p:spPr>
+        <p:txBody>
+          <a:bodyPr xmlns:a="http://schemas.openxmlformats.org/drawingml/2006/main" wrap="square" lIns="0" tIns="0" rIns="0" bIns="0" anchor="t">
+            <a:noAutofit/>
+          </a:bodyPr>
+          <a:lstStyle xmlns:a="http://schemas.openxmlformats.org/drawingml/2006/main">
+            <a:defPPr algn="l">
+              <a:defRPr sz="2175" b="1">
+                <a:solidFill>
+                  <a:srgbClr val="F5F7FB"/>
+                </a:solidFill>
+                <a:latin typeface="Arial"/>
+                <a:ea typeface="Arial"/>
+                <a:cs typeface="Arial"/>
+              </a:defRPr>
+            </a:defPPr>
+            <a:lvl1pPr algn="l">
+              <a:defRPr sz="2175" b="1">
+                <a:solidFill>
+                  <a:srgbClr val="F5F7FB"/>
+                </a:solidFill>
+                <a:latin typeface="Arial"/>
+                <a:ea typeface="Arial"/>
+                <a:cs typeface="Arial"/>
+              </a:defRPr>
+            </a:lvl1pPr>
+            <a:lvl2pPr algn="l">
+              <a:defRPr sz="2175" b="1">
+                <a:solidFill>
+                  <a:srgbClr val="F5F7FB"/>
+                </a:solidFill>
+                <a:latin typeface="Arial"/>
+                <a:ea typeface="Arial"/>
+                <a:cs typeface="Arial"/>
+              </a:defRPr>
+            </a:lvl2pPr>
+            <a:lvl3pPr algn="l">
+              <a:defRPr sz="2175" b="1">
+                <a:solidFill>
+                  <a:srgbClr val="F5F7FB"/>
+                </a:solidFill>
+                <a:latin typeface="Arial"/>
+                <a:ea typeface="Arial"/>
+                <a:cs typeface="Arial"/>
+              </a:defRPr>
+            </a:lvl3pPr>
+            <a:lvl4pPr algn="l">
+              <a:defRPr sz="2175" b="1">
+                <a:solidFill>
+                  <a:srgbClr val="F5F7FB"/>
+                </a:solidFill>
+                <a:latin typeface="Arial"/>
+                <a:ea typeface="Arial"/>
+                <a:cs typeface="Arial"/>
+              </a:defRPr>
+            </a:lvl4pPr>
+            <a:lvl5pPr algn="l">
+              <a:defRPr sz="2175" b="1">
+                <a:solidFill>
+                  <a:srgbClr val="F5F7FB"/>
+                </a:solidFill>
+                <a:latin typeface="Arial"/>
+                <a:ea typeface="Arial"/>
+                <a:cs typeface="Arial"/>
+              </a:defRPr>
+            </a:lvl5pPr>
+            <a:lvl6pPr algn="l">
+              <a:defRPr sz="2175" b="1">
+                <a:solidFill>
+                  <a:srgbClr val="F5F7FB"/>
+                </a:solidFill>
+                <a:latin typeface="Arial"/>
+                <a:ea typeface="Arial"/>
+                <a:cs typeface="Arial"/>
+              </a:defRPr>
+            </a:lvl6pPr>
+            <a:lvl7pPr algn="l">
+              <a:defRPr sz="2175" b="1">
+                <a:solidFill>
+                  <a:srgbClr val="F5F7FB"/>
+                </a:solidFill>
+                <a:latin typeface="Arial"/>
+                <a:ea typeface="Arial"/>
+                <a:cs typeface="Arial"/>
+              </a:defRPr>
+            </a:lvl7pPr>
+            <a:lvl8pPr algn="l">
+              <a:defRPr sz="2175" b="1">
+                <a:solidFill>
+                  <a:srgbClr val="F5F7FB"/>
+                </a:solidFill>
+                <a:latin typeface="Arial"/>
+                <a:ea typeface="Arial"/>
+                <a:cs typeface="Arial"/>
+              </a:defRPr>
+            </a:lvl8pPr>
+            <a:lvl9pPr algn="l">
+              <a:defRPr sz="2175" b="1">
+                <a:solidFill>
+                  <a:srgbClr val="F5F7FB"/>
+                </a:solidFill>
+                <a:latin typeface="Arial"/>
+                <a:ea typeface="Arial"/>
+                <a:cs typeface="Arial"/>
+              </a:defRPr>
+            </a:lvl9pPr>
+          </a:lstStyle>
+          <a:p xmlns:a="http://schemas.openxmlformats.org/drawingml/2006/main">
+            <a:pPr algn="l">
+              <a:defRPr sz="2175" b="1">
+                <a:solidFill>
+                  <a:srgbClr val="F5F7FB"/>
+                </a:solidFill>
+                <a:latin typeface="Arial"/>
+                <a:ea typeface="Arial"/>
+                <a:cs typeface="Arial"/>
+              </a:defRPr>
+            </a:pPr>
+            <a:r>
+              <a:rPr sz="2175" b="1">
+                <a:solidFill>
+                  <a:srgbClr val="F5F7FB"/>
+                </a:solidFill>
+                <a:latin typeface="Arial"/>
+                <a:ea typeface="Arial"/>
+                <a:cs typeface="Arial"/>
+              </a:rPr>
+              <a:t>Children’s songs</a:t>
+            </a:r>
+          </a:p>
+        </p:txBody>
+      </p:sp>
+      <p:sp>
+        <p:nvSpPr>
+          <p:cNvPr id="12" name="Official Deti FM channels">
+            <a:extLst xmlns:a="http://schemas.openxmlformats.org/drawingml/2006/main">
+              <a:ext uri="{FF2B5EF4-FFF2-40B4-BE49-F238E27FC236}">
+                <a16:creationId xmlns:a16="http://schemas.microsoft.com/office/drawing/2014/main" id="{1BC4A3CC-0FC9-4BCF-987A-E7E9D28A1683}"/>
+              </a:ext>
+            </a:extLst>
+          </p:cNvPr>
+          <p:cNvSpPr>
+            <a:spLocks xmlns:a="http://schemas.openxmlformats.org/drawingml/2006/main" noGrp="1"/>
+          </p:cNvSpPr>
+          <p:nvPr/>
+        </p:nvSpPr>
+        <p:spPr>
+          <a:xfrm xmlns:a="http://schemas.openxmlformats.org/drawingml/2006/main">
+            <a:off x="6191250" y="5276850"/>
+            <a:ext cx="5286375" cy="428625"/>
+          </a:xfrm>
+          <a:prstGeom xmlns:a="http://schemas.openxmlformats.org/drawingml/2006/main" prst="rect">
+            <a:avLst/>
+          </a:prstGeom>
+          <a:noFill xmlns:a="http://schemas.openxmlformats.org/drawingml/2006/main"/>
+          <a:ln xmlns:a="http://schemas.openxmlformats.org/drawingml/2006/main" w="0">
+            <a:noFill/>
+          </a:ln>
+        </p:spPr>
+        <p:txBody>
+          <a:bodyPr xmlns:a="http://schemas.openxmlformats.org/drawingml/2006/main" wrap="square" lIns="0" tIns="0" rIns="0" bIns="0" anchor="t">
+            <a:noAutofit/>
+          </a:bodyPr>
+          <a:lstStyle xmlns:a="http://schemas.openxmlformats.org/drawingml/2006/main">
+            <a:defPPr algn="l">
+              <a:defRPr sz="1800" b="0">
+                <a:solidFill>
+                  <a:srgbClr val="AAB9D0"/>
+                </a:solidFill>
+                <a:latin typeface="Arial"/>
+                <a:ea typeface="Arial"/>
+                <a:cs typeface="Arial"/>
+              </a:defRPr>
+            </a:defPPr>
+            <a:lvl1pPr algn="l">
+              <a:defRPr sz="1800" b="0">
+                <a:solidFill>
+                  <a:srgbClr val="AAB9D0"/>
+                </a:solidFill>
+                <a:latin typeface="Arial"/>
+                <a:ea typeface="Arial"/>
+                <a:cs typeface="Arial"/>
+              </a:defRPr>
+            </a:lvl1pPr>
+            <a:lvl2pPr algn="l">
+              <a:defRPr sz="1800" b="0">
+                <a:solidFill>
+                  <a:srgbClr val="AAB9D0"/>
+                </a:solidFill>
+                <a:latin typeface="Arial"/>
+                <a:ea typeface="Arial"/>
+                <a:cs typeface="Arial"/>
+              </a:defRPr>
+            </a:lvl2pPr>
+            <a:lvl3pPr algn="l">
+              <a:defRPr sz="1800" b="0">
+                <a:solidFill>
+                  <a:srgbClr val="AAB9D0"/>
+                </a:solidFill>
+                <a:latin typeface="Arial"/>
+                <a:ea typeface="Arial"/>
+                <a:cs typeface="Arial"/>
+              </a:defRPr>
+            </a:lvl3pPr>
+            <a:lvl4pPr algn="l">
+              <a:defRPr sz="1800" b="0">
+                <a:solidFill>
+                  <a:srgbClr val="AAB9D0"/>
+                </a:solidFill>
+                <a:latin typeface="Arial"/>
+                <a:ea typeface="Arial"/>
+                <a:cs typeface="Arial"/>
+              </a:defRPr>
+            </a:lvl4pPr>
+            <a:lvl5pPr algn="l">
+              <a:defRPr sz="1800" b="0">
+                <a:solidFill>
+                  <a:srgbClr val="AAB9D0"/>
+                </a:solidFill>
+                <a:latin typeface="Arial"/>
+                <a:ea typeface="Arial"/>
+                <a:cs typeface="Arial"/>
+              </a:defRPr>
+            </a:lvl5pPr>
+            <a:lvl6pPr algn="l">
+              <a:defRPr sz="1800" b="0">
+                <a:solidFill>
+                  <a:srgbClr val="AAB9D0"/>
+                </a:solidFill>
+                <a:latin typeface="Arial"/>
+                <a:ea typeface="Arial"/>
+                <a:cs typeface="Arial"/>
+              </a:defRPr>
+            </a:lvl6pPr>
+            <a:lvl7pPr algn="l">
+              <a:defRPr sz="1800" b="0">
+                <a:solidFill>
+                  <a:srgbClr val="AAB9D0"/>
+                </a:solidFill>
+                <a:latin typeface="Arial"/>
+                <a:ea typeface="Arial"/>
+                <a:cs typeface="Arial"/>
+              </a:defRPr>
+            </a:lvl7pPr>
+            <a:lvl8pPr algn="l">
+              <a:defRPr sz="1800" b="0">
+                <a:solidFill>
+                  <a:srgbClr val="AAB9D0"/>
+                </a:solidFill>
+                <a:latin typeface="Arial"/>
+                <a:ea typeface="Arial"/>
+                <a:cs typeface="Arial"/>
+              </a:defRPr>
+            </a:lvl8pPr>
+            <a:lvl9pPr algn="l">
+              <a:defRPr sz="1800" b="0">
+                <a:solidFill>
+                  <a:srgbClr val="AAB9D0"/>
+                </a:solidFill>
+                <a:latin typeface="Arial"/>
+                <a:ea typeface="Arial"/>
+                <a:cs typeface="Arial"/>
+              </a:defRPr>
+            </a:lvl9pPr>
+          </a:lstStyle>
+          <a:p xmlns:a="http://schemas.openxmlformats.org/drawingml/2006/main">
+            <a:pPr algn="l">
+              <a:defRPr sz="1800" b="0">
+                <a:solidFill>
+                  <a:srgbClr val="AAB9D0"/>
+                </a:solidFill>
+                <a:latin typeface="Arial"/>
+                <a:ea typeface="Arial"/>
+                <a:cs typeface="Arial"/>
+              </a:defRPr>
+            </a:pPr>
+            <a:r>
+              <a:rPr sz="1800" b="0">
+                <a:solidFill>
+                  <a:srgbClr val="AAB9D0"/>
+                </a:solidFill>
+                <a:latin typeface="Arial"/>
+                <a:ea typeface="Arial"/>
+                <a:cs typeface="Arial"/>
+              </a:rPr>
+              <a:t>Official Deti FM channels</a:t>
+            </a:r>
+          </a:p>
+        </p:txBody>
+      </p:sp>
+      <p:sp>
+        <p:nvSpPr>
+          <p:cNvPr id="13" name="Mac 209 echo: RTP and human listening passed. All three stations ">
+            <a:extLst xmlns:a="http://schemas.openxmlformats.org/drawingml/2006/main">
+              <a:ext uri="{FF2B5EF4-FFF2-40B4-BE49-F238E27FC236}">
+                <a16:creationId xmlns:a16="http://schemas.microsoft.com/office/drawing/2014/main" id="{0E1CEF75-2CB7-41BD-BD33-479F11CD8921}"/>
+              </a:ext>
+            </a:extLst>
+          </p:cNvPr>
+          <p:cNvSpPr>
+            <a:spLocks xmlns:a="http://schemas.openxmlformats.org/drawingml/2006/main" noGrp="1"/>
+          </p:cNvSpPr>
+          <p:nvPr/>
+        </p:nvSpPr>
+        <p:spPr>
+          <a:xfrm xmlns:a="http://schemas.openxmlformats.org/drawingml/2006/main">
+            <a:off x="571500" y="5953125"/>
+            <a:ext cx="10191750" cy="457200"/>
+          </a:xfrm>
+          <a:prstGeom xmlns:a="http://schemas.openxmlformats.org/drawingml/2006/main" prst="rect">
+            <a:avLst/>
+          </a:prstGeom>
+          <a:noFill xmlns:a="http://schemas.openxmlformats.org/drawingml/2006/main"/>
+          <a:ln xmlns:a="http://schemas.openxmlformats.org/drawingml/2006/main" w="0">
+            <a:noFill/>
+          </a:ln>
+        </p:spPr>
+        <p:txBody>
+          <a:bodyPr xmlns:a="http://schemas.openxmlformats.org/drawingml/2006/main" wrap="square" lIns="0" tIns="0" rIns="0" bIns="0" anchor="t">
+            <a:noAutofit/>
+          </a:bodyPr>
+          <a:lstStyle xmlns:a="http://schemas.openxmlformats.org/drawingml/2006/main">
+            <a:defPPr algn="l">
+              <a:defRPr sz="1425" b="0">
+                <a:solidFill>
+                  <a:srgbClr val="AAB9D0"/>
+                </a:solidFill>
+                <a:latin typeface="Arial"/>
+                <a:ea typeface="Arial"/>
+                <a:cs typeface="Arial"/>
+              </a:defRPr>
+            </a:defPPr>
+            <a:lvl1pPr algn="l">
+              <a:defRPr sz="1425" b="0">
+                <a:solidFill>
+                  <a:srgbClr val="AAB9D0"/>
+                </a:solidFill>
+                <a:latin typeface="Arial"/>
+                <a:ea typeface="Arial"/>
+                <a:cs typeface="Arial"/>
+              </a:defRPr>
+            </a:lvl1pPr>
+            <a:lvl2pPr algn="l">
+              <a:defRPr sz="1425" b="0">
+                <a:solidFill>
+                  <a:srgbClr val="AAB9D0"/>
+                </a:solidFill>
+                <a:latin typeface="Arial"/>
+                <a:ea typeface="Arial"/>
+                <a:cs typeface="Arial"/>
+              </a:defRPr>
+            </a:lvl2pPr>
+            <a:lvl3pPr algn="l">
+              <a:defRPr sz="1425" b="0">
+                <a:solidFill>
+                  <a:srgbClr val="AAB9D0"/>
+                </a:solidFill>
+                <a:latin typeface="Arial"/>
+                <a:ea typeface="Arial"/>
+                <a:cs typeface="Arial"/>
+              </a:defRPr>
+            </a:lvl3pPr>
+            <a:lvl4pPr algn="l">
+              <a:defRPr sz="1425" b="0">
+                <a:solidFill>
+                  <a:srgbClr val="AAB9D0"/>
+                </a:solidFill>
+                <a:latin typeface="Arial"/>
+                <a:ea typeface="Arial"/>
+                <a:cs typeface="Arial"/>
+              </a:defRPr>
+            </a:lvl4pPr>
+            <a:lvl5pPr algn="l">
+              <a:defRPr sz="1425" b="0">
+                <a:solidFill>
+                  <a:srgbClr val="AAB9D0"/>
+                </a:solidFill>
+                <a:latin typeface="Arial"/>
+                <a:ea typeface="Arial"/>
+                <a:cs typeface="Arial"/>
+              </a:defRPr>
+            </a:lvl5pPr>
+            <a:lvl6pPr algn="l">
+              <a:defRPr sz="1425" b="0">
+                <a:solidFill>
+                  <a:srgbClr val="AAB9D0"/>
+                </a:solidFill>
+                <a:latin typeface="Arial"/>
+                <a:ea typeface="Arial"/>
+                <a:cs typeface="Arial"/>
+              </a:defRPr>
+            </a:lvl6pPr>
+            <a:lvl7pPr algn="l">
+              <a:defRPr sz="1425" b="0">
+                <a:solidFill>
+                  <a:srgbClr val="AAB9D0"/>
+                </a:solidFill>
+                <a:latin typeface="Arial"/>
+                <a:ea typeface="Arial"/>
+                <a:cs typeface="Arial"/>
+              </a:defRPr>
+            </a:lvl7pPr>
+            <a:lvl8pPr algn="l">
+              <a:defRPr sz="1425" b="0">
+                <a:solidFill>
+                  <a:srgbClr val="AAB9D0"/>
+                </a:solidFill>
+                <a:latin typeface="Arial"/>
+                <a:ea typeface="Arial"/>
+                <a:cs typeface="Arial"/>
+              </a:defRPr>
+            </a:lvl8pPr>
+            <a:lvl9pPr algn="l">
+              <a:defRPr sz="1425" b="0">
+                <a:solidFill>
+                  <a:srgbClr val="AAB9D0"/>
+                </a:solidFill>
+                <a:latin typeface="Arial"/>
+                <a:ea typeface="Arial"/>
+                <a:cs typeface="Arial"/>
+              </a:defRPr>
+            </a:lvl9pPr>
+          </a:lstStyle>
+          <a:p xmlns:a="http://schemas.openxmlformats.org/drawingml/2006/main">
+            <a:pPr algn="l">
+              <a:defRPr sz="1425" b="0">
+                <a:solidFill>
+                  <a:srgbClr val="AAB9D0"/>
+                </a:solidFill>
+                <a:latin typeface="Arial"/>
+                <a:ea typeface="Arial"/>
+                <a:cs typeface="Arial"/>
+              </a:defRPr>
+            </a:pPr>
+            <a:r>
+              <a:rPr sz="1425" b="0">
+                <a:solidFill>
+                  <a:srgbClr val="AAB9D0"/>
+                </a:solidFill>
+                <a:latin typeface="Arial"/>
+                <a:ea typeface="Arial"/>
+                <a:cs typeface="Arial"/>
+              </a:rPr>
+              <a:t>Mac 209 echo: RTP and human listening passed. All three stations are deployed; 708 was heard.</a:t>
+            </a:r>
+          </a:p>
+        </p:txBody>
+      </p:sp>
+    </p:spTree>
+    <p:extLst>
+      <p:ext uri="{BB962C8B-B14F-4D97-AF65-F5344CB8AC3E}">
+        <p14:creationId xmlns:p14="http://schemas.microsoft.com/office/powerpoint/2010/main" val="1736495284"/>
       </p:ext>
     </p:extLst>
   </p:cSld>
@@ -23793,7 +27257,7 @@
           <p:cNvPr id="10" name="Cisco 7945G: model and inventory">
             <a:extLst xmlns:a="http://schemas.openxmlformats.org/drawingml/2006/main">
               <a:ext uri="{FF2B5EF4-FFF2-40B4-BE49-F238E27FC236}">
-                <a16:creationId xmlns:a16="http://schemas.microsoft.com/office/drawing/2014/main" id="{EA7F30C2-ADBC-4599-AE0B-993411115035}"/>
+                <a16:creationId xmlns:a16="http://schemas.microsoft.com/office/drawing/2014/main" id="{15EF9766-090A-46A6-B489-EB50BBF251D1}"/>
               </a:ext>
             </a:extLst>
           </p:cNvPr>
@@ -23951,7 +27415,7 @@
           <p:cNvPr id="2" name="02">
             <a:extLst xmlns:a="http://schemas.openxmlformats.org/drawingml/2006/main">
               <a:ext uri="{FF2B5EF4-FFF2-40B4-BE49-F238E27FC236}">
-                <a16:creationId xmlns:a16="http://schemas.microsoft.com/office/drawing/2014/main" id="{565E4BBB-1CD7-4B7F-93CE-3A9C84123272}"/>
+                <a16:creationId xmlns:a16="http://schemas.microsoft.com/office/drawing/2014/main" id="{CE6257AC-A53B-4D56-8908-7EB09A561EB9}"/>
               </a:ext>
             </a:extLst>
           </p:cNvPr>
@@ -24109,7 +27573,7 @@
           <p:cNvPr id="3" name="2">
             <a:extLst xmlns:a="http://schemas.openxmlformats.org/drawingml/2006/main">
               <a:ext uri="{FF2B5EF4-FFF2-40B4-BE49-F238E27FC236}">
-                <a16:creationId xmlns:a16="http://schemas.microsoft.com/office/drawing/2014/main" id="{087518B4-AB4F-43CD-87A2-21D30B17C945}"/>
+                <a16:creationId xmlns:a16="http://schemas.microsoft.com/office/drawing/2014/main" id="{28ABBF32-5475-4D66-A0A8-997916124CF2}"/>
               </a:ext>
             </a:extLst>
           </p:cNvPr>
@@ -24267,7 +27731,7 @@
           <p:cNvPr id="4" name="SIP lines">
             <a:extLst xmlns:a="http://schemas.openxmlformats.org/drawingml/2006/main">
               <a:ext uri="{FF2B5EF4-FFF2-40B4-BE49-F238E27FC236}">
-                <a16:creationId xmlns:a16="http://schemas.microsoft.com/office/drawing/2014/main" id="{B959A578-D332-415D-9B6B-C2E11175144C}"/>
+                <a16:creationId xmlns:a16="http://schemas.microsoft.com/office/drawing/2014/main" id="{DA7299C4-9651-4BFB-B4E0-3E32ABC21444}"/>
               </a:ext>
             </a:extLst>
           </p:cNvPr>
@@ -24425,7 +27889,7 @@
           <p:cNvPr id="5" name="Native 802.3af">
             <a:extLst xmlns:a="http://schemas.openxmlformats.org/drawingml/2006/main">
               <a:ext uri="{FF2B5EF4-FFF2-40B4-BE49-F238E27FC236}">
-                <a16:creationId xmlns:a16="http://schemas.microsoft.com/office/drawing/2014/main" id="{42CEB3B2-BBD5-49B6-BE2A-1CE4E6574E69}"/>
+                <a16:creationId xmlns:a16="http://schemas.microsoft.com/office/drawing/2014/main" id="{4B7A3058-835F-4304-8178-DBA2E37C6EEB}"/>
               </a:ext>
             </a:extLst>
           </p:cNvPr>
@@ -24583,7 +28047,7 @@
           <p:cNvPr id="6" name="7945_7965 SIP firmware family">
             <a:extLst xmlns:a="http://schemas.openxmlformats.org/drawingml/2006/main">
               <a:ext uri="{FF2B5EF4-FFF2-40B4-BE49-F238E27FC236}">
-                <a16:creationId xmlns:a16="http://schemas.microsoft.com/office/drawing/2014/main" id="{255DE698-683F-4948-9E97-510EA7839021}"/>
+                <a16:creationId xmlns:a16="http://schemas.microsoft.com/office/drawing/2014/main" id="{57EAABA4-DA4E-4006-94C9-2323B35B1D38}"/>
               </a:ext>
             </a:extLst>
           </p:cNvPr>
@@ -24741,7 +28205,7 @@
           <p:cNvPr id="7" name="A phone running SCCP needs SIP firmware.&#10;This model does not need">
             <a:extLst xmlns:a="http://schemas.openxmlformats.org/drawingml/2006/main">
               <a:ext uri="{FF2B5EF4-FFF2-40B4-BE49-F238E27FC236}">
-                <a16:creationId xmlns:a16="http://schemas.microsoft.com/office/drawing/2014/main" id="{54F53E53-68DF-4A7D-96D4-D4D9FC598245}"/>
+                <a16:creationId xmlns:a16="http://schemas.microsoft.com/office/drawing/2014/main" id="{7A833FB9-6E15-450B-8CEE-DBF2475F0024}"/>
               </a:ext>
             </a:extLst>
           </p:cNvPr>
@@ -24922,7 +28386,7 @@
           <p:cNvPr id="8" name="Before starting">
             <a:extLst xmlns:a="http://schemas.openxmlformats.org/drawingml/2006/main">
               <a:ext uri="{FF2B5EF4-FFF2-40B4-BE49-F238E27FC236}">
-                <a16:creationId xmlns:a16="http://schemas.microsoft.com/office/drawing/2014/main" id="{FE2BBD6F-C1B7-474A-A072-03AE8AC9979C}"/>
+                <a16:creationId xmlns:a16="http://schemas.microsoft.com/office/drawing/2014/main" id="{04514A9C-B431-4400-819F-F26CEF6FFEB6}"/>
               </a:ext>
             </a:extLst>
           </p:cNvPr>
@@ -25080,7 +28544,7 @@
           <p:cNvPr id="9" name="Record PID, VID/HW, MAC, App Load,&#10;Boot Load, IP and TFTP for eve">
             <a:extLst xmlns:a="http://schemas.openxmlformats.org/drawingml/2006/main">
               <a:ext uri="{FF2B5EF4-FFF2-40B4-BE49-F238E27FC236}">
-                <a16:creationId xmlns:a16="http://schemas.microsoft.com/office/drawing/2014/main" id="{9C6FDD4E-A84F-49F6-9440-F577C78B4D21}"/>
+                <a16:creationId xmlns:a16="http://schemas.microsoft.com/office/drawing/2014/main" id="{3149A48E-1AF5-4371-A220-DADD01800726}"/>
               </a:ext>
             </a:extLst>
           </p:cNvPr>
@@ -25259,7 +28723,7 @@
     </p:spTree>
     <p:extLst>
       <p:ext uri="{BB962C8B-B14F-4D97-AF65-F5344CB8AC3E}">
-        <p14:creationId xmlns:p14="http://schemas.microsoft.com/office/powerpoint/2010/main" val="2049865143"/>
+        <p14:creationId xmlns:p14="http://schemas.microsoft.com/office/powerpoint/2010/main" val="1536221638"/>
       </p:ext>
     </p:extLst>
   </p:cSld>
@@ -25290,7 +28754,7 @@
           <p:cNvPr id="17" name="">
             <a:extLst xmlns:a="http://schemas.openxmlformats.org/drawingml/2006/main">
               <a:ext uri="{FF2B5EF4-FFF2-40B4-BE49-F238E27FC236}">
-                <a16:creationId xmlns:a16="http://schemas.microsoft.com/office/drawing/2014/main" id="{E86DB7DF-B13D-4F73-BE32-FB84E9AC6CF3}"/>
+                <a16:creationId xmlns:a16="http://schemas.microsoft.com/office/drawing/2014/main" id="{18BC9DFD-F53E-4FB1-9ADA-93F1C5E992A2}"/>
               </a:ext>
             </a:extLst>
           </p:cNvPr>
@@ -25322,7 +28786,7 @@
           <p:cNvPr id="15" name="">
             <a:extLst xmlns:a="http://schemas.openxmlformats.org/drawingml/2006/main">
               <a:ext uri="{FF2B5EF4-FFF2-40B4-BE49-F238E27FC236}">
-                <a16:creationId xmlns:a16="http://schemas.microsoft.com/office/drawing/2014/main" id="{00CB4E05-E778-4B7A-9BE6-43D8E4414E89}"/>
+                <a16:creationId xmlns:a16="http://schemas.microsoft.com/office/drawing/2014/main" id="{4D019C30-C99D-4A98-99C0-081CECA00624}"/>
               </a:ext>
             </a:extLst>
           </p:cNvPr>
@@ -25353,7 +28817,7 @@
           <p:cNvPr id="13" name="">
             <a:extLst xmlns:a="http://schemas.openxmlformats.org/drawingml/2006/main">
               <a:ext uri="{FF2B5EF4-FFF2-40B4-BE49-F238E27FC236}">
-                <a16:creationId xmlns:a16="http://schemas.microsoft.com/office/drawing/2014/main" id="{40E763BD-0F50-436A-8C26-F3ACCC23C7B1}"/>
+                <a16:creationId xmlns:a16="http://schemas.microsoft.com/office/drawing/2014/main" id="{708C1BE8-1FA2-470F-BE53-749EEB931014}"/>
               </a:ext>
             </a:extLst>
           </p:cNvPr>
@@ -25384,7 +28848,7 @@
           <p:cNvPr id="11" name="">
             <a:extLst xmlns:a="http://schemas.openxmlformats.org/drawingml/2006/main">
               <a:ext uri="{FF2B5EF4-FFF2-40B4-BE49-F238E27FC236}">
-                <a16:creationId xmlns:a16="http://schemas.microsoft.com/office/drawing/2014/main" id="{13F66212-6E94-4910-9FA9-8B3A32DFB782}"/>
+                <a16:creationId xmlns:a16="http://schemas.microsoft.com/office/drawing/2014/main" id="{B35B6F64-2E32-43AD-A491-269C320F4223}"/>
               </a:ext>
             </a:extLst>
           </p:cNvPr>
@@ -25416,7 +28880,7 @@
           <p:cNvPr id="9" name="">
             <a:extLst xmlns:a="http://schemas.openxmlformats.org/drawingml/2006/main">
               <a:ext uri="{FF2B5EF4-FFF2-40B4-BE49-F238E27FC236}">
-                <a16:creationId xmlns:a16="http://schemas.microsoft.com/office/drawing/2014/main" id="{7351127B-A954-4213-81DE-BB77D7A4B9F8}"/>
+                <a16:creationId xmlns:a16="http://schemas.microsoft.com/office/drawing/2014/main" id="{B23046B7-9D71-4E2A-AC16-DF5605A36051}"/>
               </a:ext>
             </a:extLst>
           </p:cNvPr>
@@ -25448,7 +28912,7 @@
           <p:cNvPr id="20" name="Cisco, Asterisk and Home Assistant">
             <a:extLst xmlns:a="http://schemas.openxmlformats.org/drawingml/2006/main">
               <a:ext uri="{FF2B5EF4-FFF2-40B4-BE49-F238E27FC236}">
-                <a16:creationId xmlns:a16="http://schemas.microsoft.com/office/drawing/2014/main" id="{A7A35E63-F20A-41FF-9BA1-DB971B388669}"/>
+                <a16:creationId xmlns:a16="http://schemas.microsoft.com/office/drawing/2014/main" id="{64499B19-2F31-4A54-8C81-D8A3892841B9}"/>
               </a:ext>
             </a:extLst>
           </p:cNvPr>
@@ -25606,7 +29070,7 @@
           <p:cNvPr id="2" name="03">
             <a:extLst xmlns:a="http://schemas.openxmlformats.org/drawingml/2006/main">
               <a:ext uri="{FF2B5EF4-FFF2-40B4-BE49-F238E27FC236}">
-                <a16:creationId xmlns:a16="http://schemas.microsoft.com/office/drawing/2014/main" id="{682B9FA1-2276-425E-A6E7-65EF69AD8636}"/>
+                <a16:creationId xmlns:a16="http://schemas.microsoft.com/office/drawing/2014/main" id="{632905B5-31AC-4219-A952-BDE8CBB143CA}"/>
               </a:ext>
             </a:extLst>
           </p:cNvPr>
@@ -25764,7 +29228,7 @@
           <p:cNvPr id="3" name="phones">
             <a:extLst xmlns:a="http://schemas.openxmlformats.org/drawingml/2006/main">
               <a:ext uri="{FF2B5EF4-FFF2-40B4-BE49-F238E27FC236}">
-                <a16:creationId xmlns:a16="http://schemas.microsoft.com/office/drawing/2014/main" id="{AE5DAFC7-6E32-4C3B-9978-FC2913A03536}"/>
+                <a16:creationId xmlns:a16="http://schemas.microsoft.com/office/drawing/2014/main" id="{15BE453A-C13A-4EC2-AA92-732B9124B6C2}"/>
               </a:ext>
             </a:extLst>
           </p:cNvPr>
@@ -25918,7 +29382,7 @@
                 <a:ea typeface="Arial"/>
                 <a:cs typeface="Arial"/>
               </a:rPr>
-              <a:t>10 × Cisco 7945G</a:t>
+              <a:t>Cisco 7945G</a:t>
             </a:r>
           </a:p>
           <a:p xmlns:a="http://schemas.openxmlformats.org/drawingml/2006/main">
@@ -25951,7 +29415,7 @@
           <p:cNvPr id="4" name="switch">
             <a:extLst xmlns:a="http://schemas.openxmlformats.org/drawingml/2006/main">
               <a:ext uri="{FF2B5EF4-FFF2-40B4-BE49-F238E27FC236}">
-                <a16:creationId xmlns:a16="http://schemas.microsoft.com/office/drawing/2014/main" id="{97E1CB08-C1A9-4809-946D-C7463329BAE8}"/>
+                <a16:creationId xmlns:a16="http://schemas.microsoft.com/office/drawing/2014/main" id="{685CC3DA-8372-4E23-9448-8798495FC798}"/>
               </a:ext>
             </a:extLst>
           </p:cNvPr>
@@ -26138,7 +29602,7 @@
           <p:cNvPr id="5" name="ast">
             <a:extLst xmlns:a="http://schemas.openxmlformats.org/drawingml/2006/main">
               <a:ext uri="{FF2B5EF4-FFF2-40B4-BE49-F238E27FC236}">
-                <a16:creationId xmlns:a16="http://schemas.microsoft.com/office/drawing/2014/main" id="{3E2F9064-05C9-4169-BB8C-AF9BB3E0C162}"/>
+                <a16:creationId xmlns:a16="http://schemas.microsoft.com/office/drawing/2014/main" id="{90D70199-9CD2-42A4-9868-60561037E805}"/>
               </a:ext>
             </a:extLst>
           </p:cNvPr>
@@ -26325,7 +29789,7 @@
           <p:cNvPr id="6" name="router">
             <a:extLst xmlns:a="http://schemas.openxmlformats.org/drawingml/2006/main">
               <a:ext uri="{FF2B5EF4-FFF2-40B4-BE49-F238E27FC236}">
-                <a16:creationId xmlns:a16="http://schemas.microsoft.com/office/drawing/2014/main" id="{9B7DB5F8-289F-4732-B41E-E4DAEFB88ACB}"/>
+                <a16:creationId xmlns:a16="http://schemas.microsoft.com/office/drawing/2014/main" id="{9B70D400-2878-4EB3-8592-6B616052CD45}"/>
               </a:ext>
             </a:extLst>
           </p:cNvPr>
@@ -26512,7 +29976,7 @@
           <p:cNvPr id="7" name="tftp">
             <a:extLst xmlns:a="http://schemas.openxmlformats.org/drawingml/2006/main">
               <a:ext uri="{FF2B5EF4-FFF2-40B4-BE49-F238E27FC236}">
-                <a16:creationId xmlns:a16="http://schemas.microsoft.com/office/drawing/2014/main" id="{80BF09A9-EBD2-4A75-AE2D-E3580104F179}"/>
+                <a16:creationId xmlns:a16="http://schemas.microsoft.com/office/drawing/2014/main" id="{40FAD31E-F617-4547-84FE-939CB8A4656B}"/>
               </a:ext>
             </a:extLst>
           </p:cNvPr>
@@ -26699,7 +30163,7 @@
           <p:cNvPr id="8" name="ha">
             <a:extLst xmlns:a="http://schemas.openxmlformats.org/drawingml/2006/main">
               <a:ext uri="{FF2B5EF4-FFF2-40B4-BE49-F238E27FC236}">
-                <a16:creationId xmlns:a16="http://schemas.microsoft.com/office/drawing/2014/main" id="{A7F2B192-4303-4EC5-8659-102619F62562}"/>
+                <a16:creationId xmlns:a16="http://schemas.microsoft.com/office/drawing/2014/main" id="{E66BF2F2-EB0B-434A-B727-00441617792A}"/>
               </a:ext>
             </a:extLst>
           </p:cNvPr>
@@ -26886,7 +30350,7 @@
           <p:cNvPr id="10" name="Ethernet">
             <a:extLst xmlns:a="http://schemas.openxmlformats.org/drawingml/2006/main">
               <a:ext uri="{FF2B5EF4-FFF2-40B4-BE49-F238E27FC236}">
-                <a16:creationId xmlns:a16="http://schemas.microsoft.com/office/drawing/2014/main" id="{C66D65B0-C2C7-46CE-8570-0BCA75B4E338}"/>
+                <a16:creationId xmlns:a16="http://schemas.microsoft.com/office/drawing/2014/main" id="{7B56B320-CE95-49D7-BBBB-9DD7EBFD756C}"/>
               </a:ext>
             </a:extLst>
           </p:cNvPr>
@@ -27044,7 +30508,7 @@
           <p:cNvPr id="12" name="SIP / RTP">
             <a:extLst xmlns:a="http://schemas.openxmlformats.org/drawingml/2006/main">
               <a:ext uri="{FF2B5EF4-FFF2-40B4-BE49-F238E27FC236}">
-                <a16:creationId xmlns:a16="http://schemas.microsoft.com/office/drawing/2014/main" id="{F4A547C8-C861-4D77-A4FE-F802F4D01A5C}"/>
+                <a16:creationId xmlns:a16="http://schemas.microsoft.com/office/drawing/2014/main" id="{4FE26089-D36C-4624-A10D-C77707A3AD2E}"/>
               </a:ext>
             </a:extLst>
           </p:cNvPr>
@@ -27202,7 +30666,7 @@
           <p:cNvPr id="14" name="DHCP">
             <a:extLst xmlns:a="http://schemas.openxmlformats.org/drawingml/2006/main">
               <a:ext uri="{FF2B5EF4-FFF2-40B4-BE49-F238E27FC236}">
-                <a16:creationId xmlns:a16="http://schemas.microsoft.com/office/drawing/2014/main" id="{FF09364D-0C91-469E-8C46-1A76DCF79064}"/>
+                <a16:creationId xmlns:a16="http://schemas.microsoft.com/office/drawing/2014/main" id="{57D97531-D4BA-4BCE-B8E7-7D0ABB3F318F}"/>
               </a:ext>
             </a:extLst>
           </p:cNvPr>
@@ -27360,7 +30824,7 @@
           <p:cNvPr id="16" name="download">
             <a:extLst xmlns:a="http://schemas.openxmlformats.org/drawingml/2006/main">
               <a:ext uri="{FF2B5EF4-FFF2-40B4-BE49-F238E27FC236}">
-                <a16:creationId xmlns:a16="http://schemas.microsoft.com/office/drawing/2014/main" id="{799002A5-DEEE-452B-9DA2-B9B69640AE0C}"/>
+                <a16:creationId xmlns:a16="http://schemas.microsoft.com/office/drawing/2014/main" id="{C1DD3A92-E636-439A-B423-398058C163DC}"/>
               </a:ext>
             </a:extLst>
           </p:cNvPr>
@@ -27518,7 +30982,7 @@
           <p:cNvPr id="18" name="AMI&#10;SIP / RTP">
             <a:extLst xmlns:a="http://schemas.openxmlformats.org/drawingml/2006/main">
               <a:ext uri="{FF2B5EF4-FFF2-40B4-BE49-F238E27FC236}">
-                <a16:creationId xmlns:a16="http://schemas.microsoft.com/office/drawing/2014/main" id="{94DAD719-22D0-49F8-9F4A-F3B818EBE3CB}"/>
+                <a16:creationId xmlns:a16="http://schemas.microsoft.com/office/drawing/2014/main" id="{84A45B16-7140-493D-B9DA-E5D11E034E48}"/>
               </a:ext>
             </a:extLst>
           </p:cNvPr>
@@ -27699,7 +31163,7 @@
           <p:cNvPr id="19" name="Asterisk uses hostNetwork and one replica. HA opens the AMI conne">
             <a:extLst xmlns:a="http://schemas.openxmlformats.org/drawingml/2006/main">
               <a:ext uri="{FF2B5EF4-FFF2-40B4-BE49-F238E27FC236}">
-                <a16:creationId xmlns:a16="http://schemas.microsoft.com/office/drawing/2014/main" id="{FE9D1086-E38F-4AD5-B814-E8648DC18CFB}"/>
+                <a16:creationId xmlns:a16="http://schemas.microsoft.com/office/drawing/2014/main" id="{9861F5BB-19E0-454B-B136-0EE39EB71161}"/>
               </a:ext>
             </a:extLst>
           </p:cNvPr>
@@ -27878,7 +31342,7 @@
     </p:spTree>
     <p:extLst>
       <p:ext uri="{BB962C8B-B14F-4D97-AF65-F5344CB8AC3E}">
-        <p14:creationId xmlns:p14="http://schemas.microsoft.com/office/powerpoint/2010/main" val="1064215380"/>
+        <p14:creationId xmlns:p14="http://schemas.microsoft.com/office/powerpoint/2010/main" val="1130143453"/>
       </p:ext>
     </p:extLst>
   </p:cSld>
@@ -27909,7 +31373,7 @@
           <p:cNvPr id="16" name="Signaling and audio ports">
             <a:extLst xmlns:a="http://schemas.openxmlformats.org/drawingml/2006/main">
               <a:ext uri="{FF2B5EF4-FFF2-40B4-BE49-F238E27FC236}">
-                <a16:creationId xmlns:a16="http://schemas.microsoft.com/office/drawing/2014/main" id="{F12C7EB6-E970-489C-A22B-CE9FF39542E6}"/>
+                <a16:creationId xmlns:a16="http://schemas.microsoft.com/office/drawing/2014/main" id="{02FBA9FA-E602-4DAA-9B4A-37F888795313}"/>
               </a:ext>
             </a:extLst>
           </p:cNvPr>
@@ -28067,7 +31531,7 @@
           <p:cNvPr id="2" name="04">
             <a:extLst xmlns:a="http://schemas.openxmlformats.org/drawingml/2006/main">
               <a:ext uri="{FF2B5EF4-FFF2-40B4-BE49-F238E27FC236}">
-                <a16:creationId xmlns:a16="http://schemas.microsoft.com/office/drawing/2014/main" id="{7F3C645E-7D2D-4E34-B5F2-86E54B85A82D}"/>
+                <a16:creationId xmlns:a16="http://schemas.microsoft.com/office/drawing/2014/main" id="{2CCD3C0A-C458-4480-ADD8-BA011EB923AF}"/>
               </a:ext>
             </a:extLst>
           </p:cNvPr>
@@ -28225,7 +31689,7 @@
           <p:cNvPr id="3" name="5060">
             <a:extLst xmlns:a="http://schemas.openxmlformats.org/drawingml/2006/main">
               <a:ext uri="{FF2B5EF4-FFF2-40B4-BE49-F238E27FC236}">
-                <a16:creationId xmlns:a16="http://schemas.microsoft.com/office/drawing/2014/main" id="{BE4A8CC0-E1CE-4B0F-AD0C-1E6A09711F1D}"/>
+                <a16:creationId xmlns:a16="http://schemas.microsoft.com/office/drawing/2014/main" id="{C6713FE2-19A8-4C93-9465-6843D11EA182}"/>
               </a:ext>
             </a:extLst>
           </p:cNvPr>
@@ -28383,7 +31847,7 @@
           <p:cNvPr id="4" name="TCP / UDP">
             <a:extLst xmlns:a="http://schemas.openxmlformats.org/drawingml/2006/main">
               <a:ext uri="{FF2B5EF4-FFF2-40B4-BE49-F238E27FC236}">
-                <a16:creationId xmlns:a16="http://schemas.microsoft.com/office/drawing/2014/main" id="{6CD45949-9727-4966-8A88-BF69D8F37E49}"/>
+                <a16:creationId xmlns:a16="http://schemas.microsoft.com/office/drawing/2014/main" id="{988DE252-B2D4-40F9-8D7A-B4051FEA5889}"/>
               </a:ext>
             </a:extLst>
           </p:cNvPr>
@@ -28541,7 +32005,7 @@
           <p:cNvPr id="5" name="SIP: Cisco TCP, HA UDP">
             <a:extLst xmlns:a="http://schemas.openxmlformats.org/drawingml/2006/main">
               <a:ext uri="{FF2B5EF4-FFF2-40B4-BE49-F238E27FC236}">
-                <a16:creationId xmlns:a16="http://schemas.microsoft.com/office/drawing/2014/main" id="{C10CEA2F-9B76-4706-AB13-297FE688CF73}"/>
+                <a16:creationId xmlns:a16="http://schemas.microsoft.com/office/drawing/2014/main" id="{2A7FE69A-3C19-4B26-928F-CBD6B1D9C7B9}"/>
               </a:ext>
             </a:extLst>
           </p:cNvPr>
@@ -28699,7 +32163,7 @@
           <p:cNvPr id="6" name="10000–10199">
             <a:extLst xmlns:a="http://schemas.openxmlformats.org/drawingml/2006/main">
               <a:ext uri="{FF2B5EF4-FFF2-40B4-BE49-F238E27FC236}">
-                <a16:creationId xmlns:a16="http://schemas.microsoft.com/office/drawing/2014/main" id="{4E0C6152-026E-4A38-8B3D-633618611CB9}"/>
+                <a16:creationId xmlns:a16="http://schemas.microsoft.com/office/drawing/2014/main" id="{716F4B58-D328-4E48-93FE-154D01FAF1A7}"/>
               </a:ext>
             </a:extLst>
           </p:cNvPr>
@@ -28857,7 +32321,7 @@
           <p:cNvPr id="7" name="UDP on PBX">
             <a:extLst xmlns:a="http://schemas.openxmlformats.org/drawingml/2006/main">
               <a:ext uri="{FF2B5EF4-FFF2-40B4-BE49-F238E27FC236}">
-                <a16:creationId xmlns:a16="http://schemas.microsoft.com/office/drawing/2014/main" id="{327FD561-462D-4741-AC08-6A4EED63A815}"/>
+                <a16:creationId xmlns:a16="http://schemas.microsoft.com/office/drawing/2014/main" id="{1AE030F9-457E-45D8-A41E-58EDC8D2D16B}"/>
               </a:ext>
             </a:extLst>
           </p:cNvPr>
@@ -29015,7 +32479,7 @@
           <p:cNvPr id="8" name="RTP / audio">
             <a:extLst xmlns:a="http://schemas.openxmlformats.org/drawingml/2006/main">
               <a:ext uri="{FF2B5EF4-FFF2-40B4-BE49-F238E27FC236}">
-                <a16:creationId xmlns:a16="http://schemas.microsoft.com/office/drawing/2014/main" id="{A72DE1A6-08C3-4380-B1A3-E2F4D8B6966F}"/>
+                <a16:creationId xmlns:a16="http://schemas.microsoft.com/office/drawing/2014/main" id="{377A2E9F-4AC0-4AD1-B1D8-288A507FAB9E}"/>
               </a:ext>
             </a:extLst>
           </p:cNvPr>
@@ -29173,7 +32637,7 @@
           <p:cNvPr id="9" name="5038">
             <a:extLst xmlns:a="http://schemas.openxmlformats.org/drawingml/2006/main">
               <a:ext uri="{FF2B5EF4-FFF2-40B4-BE49-F238E27FC236}">
-                <a16:creationId xmlns:a16="http://schemas.microsoft.com/office/drawing/2014/main" id="{5FDEF7B1-E64F-425A-90B1-A28A069FBAA1}"/>
+                <a16:creationId xmlns:a16="http://schemas.microsoft.com/office/drawing/2014/main" id="{3039C12F-B282-4C5F-B5DF-FE2327DEBF7B}"/>
               </a:ext>
             </a:extLst>
           </p:cNvPr>
@@ -29331,7 +32795,7 @@
           <p:cNvPr id="10" name="TCP on PBX">
             <a:extLst xmlns:a="http://schemas.openxmlformats.org/drawingml/2006/main">
               <a:ext uri="{FF2B5EF4-FFF2-40B4-BE49-F238E27FC236}">
-                <a16:creationId xmlns:a16="http://schemas.microsoft.com/office/drawing/2014/main" id="{53664C19-1262-4CF0-89CE-67A053357FC8}"/>
+                <a16:creationId xmlns:a16="http://schemas.microsoft.com/office/drawing/2014/main" id="{E45B483B-F89A-4548-AB71-207B14CF14B6}"/>
               </a:ext>
             </a:extLst>
           </p:cNvPr>
@@ -29489,7 +32953,7 @@
           <p:cNvPr id="11" name="AMI: HA / gateway /32">
             <a:extLst xmlns:a="http://schemas.openxmlformats.org/drawingml/2006/main">
               <a:ext uri="{FF2B5EF4-FFF2-40B4-BE49-F238E27FC236}">
-                <a16:creationId xmlns:a16="http://schemas.microsoft.com/office/drawing/2014/main" id="{81665BAD-00AF-4283-914B-174E6BB6FF36}"/>
+                <a16:creationId xmlns:a16="http://schemas.microsoft.com/office/drawing/2014/main" id="{C780E3E4-1805-4C18-BE5E-61F7B171F030}"/>
               </a:ext>
             </a:extLst>
           </p:cNvPr>
@@ -29647,7 +33111,7 @@
           <p:cNvPr id="12" name="69 + 20000–20031">
             <a:extLst xmlns:a="http://schemas.openxmlformats.org/drawingml/2006/main">
               <a:ext uri="{FF2B5EF4-FFF2-40B4-BE49-F238E27FC236}">
-                <a16:creationId xmlns:a16="http://schemas.microsoft.com/office/drawing/2014/main" id="{00956BAF-7761-4C90-AF51-27ED5E9F6821}"/>
+                <a16:creationId xmlns:a16="http://schemas.microsoft.com/office/drawing/2014/main" id="{361DDF65-361B-4681-BDD3-71913463D258}"/>
               </a:ext>
             </a:extLst>
           </p:cNvPr>
@@ -29805,7 +33269,7 @@
           <p:cNvPr id="13" name="UDP on PBX">
             <a:extLst xmlns:a="http://schemas.openxmlformats.org/drawingml/2006/main">
               <a:ext uri="{FF2B5EF4-FFF2-40B4-BE49-F238E27FC236}">
-                <a16:creationId xmlns:a16="http://schemas.microsoft.com/office/drawing/2014/main" id="{285391E9-961C-4773-9F9B-734E71CD3BE7}"/>
+                <a16:creationId xmlns:a16="http://schemas.microsoft.com/office/drawing/2014/main" id="{E86189F7-77AD-4880-AA15-2A4369264739}"/>
               </a:ext>
             </a:extLst>
           </p:cNvPr>
@@ -29963,7 +33427,7 @@
           <p:cNvPr id="14" name="Temporary TFTP">
             <a:extLst xmlns:a="http://schemas.openxmlformats.org/drawingml/2006/main">
               <a:ext uri="{FF2B5EF4-FFF2-40B4-BE49-F238E27FC236}">
-                <a16:creationId xmlns:a16="http://schemas.microsoft.com/office/drawing/2014/main" id="{ACCC779C-A5A3-44D7-B288-E66A8C0E1CB9}"/>
+                <a16:creationId xmlns:a16="http://schemas.microsoft.com/office/drawing/2014/main" id="{AB29F116-F4D9-49FF-A2AC-3678B65E36AC}"/>
               </a:ext>
             </a:extLst>
           </p:cNvPr>
@@ -30121,7 +33585,7 @@
           <p:cNvPr id="15" name="HA uses dynamic RTP / RTCP ports. Restrict firewall rules to the ">
             <a:extLst xmlns:a="http://schemas.openxmlformats.org/drawingml/2006/main">
               <a:ext uri="{FF2B5EF4-FFF2-40B4-BE49-F238E27FC236}">
-                <a16:creationId xmlns:a16="http://schemas.microsoft.com/office/drawing/2014/main" id="{5FB3D40E-2810-4113-8FAD-87E20CD6A740}"/>
+                <a16:creationId xmlns:a16="http://schemas.microsoft.com/office/drawing/2014/main" id="{B6DD4733-7DE5-4F30-9F32-0793C4FB7E6A}"/>
               </a:ext>
             </a:extLst>
           </p:cNvPr>
@@ -30277,7 +33741,7 @@
     </p:spTree>
     <p:extLst>
       <p:ext uri="{BB962C8B-B14F-4D97-AF65-F5344CB8AC3E}">
-        <p14:creationId xmlns:p14="http://schemas.microsoft.com/office/powerpoint/2010/main" val="125822084"/>
+        <p14:creationId xmlns:p14="http://schemas.microsoft.com/office/powerpoint/2010/main" val="1539451525"/>
       </p:ext>
     </p:extLst>
   </p:cSld>
@@ -30308,7 +33772,7 @@
           <p:cNvPr id="12" name="">
             <a:extLst xmlns:a="http://schemas.openxmlformats.org/drawingml/2006/main">
               <a:ext uri="{FF2B5EF4-FFF2-40B4-BE49-F238E27FC236}">
-                <a16:creationId xmlns:a16="http://schemas.microsoft.com/office/drawing/2014/main" id="{470723C9-52E5-4D41-9FB0-302C4867D07E}"/>
+                <a16:creationId xmlns:a16="http://schemas.microsoft.com/office/drawing/2014/main" id="{D651970D-577F-4017-8147-E9CA8F997769}"/>
               </a:ext>
             </a:extLst>
           </p:cNvPr>
@@ -30339,7 +33803,7 @@
           <p:cNvPr id="10" name="">
             <a:extLst xmlns:a="http://schemas.openxmlformats.org/drawingml/2006/main">
               <a:ext uri="{FF2B5EF4-FFF2-40B4-BE49-F238E27FC236}">
-                <a16:creationId xmlns:a16="http://schemas.microsoft.com/office/drawing/2014/main" id="{9B9B164F-EF6F-42CB-85A2-40814F5B09E5}"/>
+                <a16:creationId xmlns:a16="http://schemas.microsoft.com/office/drawing/2014/main" id="{59D2B0A9-B027-45AD-98B4-AE99BEE208F5}"/>
               </a:ext>
             </a:extLst>
           </p:cNvPr>
@@ -30370,7 +33834,7 @@
           <p:cNvPr id="8" name="">
             <a:extLst xmlns:a="http://schemas.openxmlformats.org/drawingml/2006/main">
               <a:ext uri="{FF2B5EF4-FFF2-40B4-BE49-F238E27FC236}">
-                <a16:creationId xmlns:a16="http://schemas.microsoft.com/office/drawing/2014/main" id="{2F4F6D93-D97B-4189-9F03-116B41E0A846}"/>
+                <a16:creationId xmlns:a16="http://schemas.microsoft.com/office/drawing/2014/main" id="{3BE57381-13CB-4510-B80C-602235D477AE}"/>
               </a:ext>
             </a:extLst>
           </p:cNvPr>
@@ -30401,7 +33865,7 @@
           <p:cNvPr id="15" name="7945G has built-in PoE support">
             <a:extLst xmlns:a="http://schemas.openxmlformats.org/drawingml/2006/main">
               <a:ext uri="{FF2B5EF4-FFF2-40B4-BE49-F238E27FC236}">
-                <a16:creationId xmlns:a16="http://schemas.microsoft.com/office/drawing/2014/main" id="{25E92350-28A6-4A3F-B110-3D14E69AD991}"/>
+                <a16:creationId xmlns:a16="http://schemas.microsoft.com/office/drawing/2014/main" id="{31E97BF2-3617-4FBE-B52E-DFB71CF77357}"/>
               </a:ext>
             </a:extLst>
           </p:cNvPr>
@@ -30559,7 +34023,7 @@
           <p:cNvPr id="2" name="05">
             <a:extLst xmlns:a="http://schemas.openxmlformats.org/drawingml/2006/main">
               <a:ext uri="{FF2B5EF4-FFF2-40B4-BE49-F238E27FC236}">
-                <a16:creationId xmlns:a16="http://schemas.microsoft.com/office/drawing/2014/main" id="{0AD09B6E-ABFC-4DBF-A247-8C309F3EEDBE}"/>
+                <a16:creationId xmlns:a16="http://schemas.microsoft.com/office/drawing/2014/main" id="{F9533124-FD76-417A-B3CA-0576D312D2BE}"/>
               </a:ext>
             </a:extLst>
           </p:cNvPr>
@@ -30717,7 +34181,7 @@
           <p:cNvPr id="3" name="poe">
             <a:extLst xmlns:a="http://schemas.openxmlformats.org/drawingml/2006/main">
               <a:ext uri="{FF2B5EF4-FFF2-40B4-BE49-F238E27FC236}">
-                <a16:creationId xmlns:a16="http://schemas.microsoft.com/office/drawing/2014/main" id="{5DDD99C8-317F-4EB9-84E0-A08698DD248D}"/>
+                <a16:creationId xmlns:a16="http://schemas.microsoft.com/office/drawing/2014/main" id="{E62AA785-D7EA-4D2A-8527-16379E4DBEE7}"/>
               </a:ext>
             </a:extLst>
           </p:cNvPr>
@@ -30904,7 +34368,7 @@
           <p:cNvPr id="4" name="phone1">
             <a:extLst xmlns:a="http://schemas.openxmlformats.org/drawingml/2006/main">
               <a:ext uri="{FF2B5EF4-FFF2-40B4-BE49-F238E27FC236}">
-                <a16:creationId xmlns:a16="http://schemas.microsoft.com/office/drawing/2014/main" id="{1A8EAE15-35E3-48DD-BE08-68ABFBDE0734}"/>
+                <a16:creationId xmlns:a16="http://schemas.microsoft.com/office/drawing/2014/main" id="{D29821C0-F62B-4335-A7B0-D7DF4C8C5570}"/>
               </a:ext>
             </a:extLst>
           </p:cNvPr>
@@ -31091,7 +34555,7 @@
           <p:cNvPr id="5" name="lan">
             <a:extLst xmlns:a="http://schemas.openxmlformats.org/drawingml/2006/main">
               <a:ext uri="{FF2B5EF4-FFF2-40B4-BE49-F238E27FC236}">
-                <a16:creationId xmlns:a16="http://schemas.microsoft.com/office/drawing/2014/main" id="{161BF4AA-5B71-43AC-B552-0BFD745788B5}"/>
+                <a16:creationId xmlns:a16="http://schemas.microsoft.com/office/drawing/2014/main" id="{63B15D34-97B6-4C61-95C5-2173B4F6EB01}"/>
               </a:ext>
             </a:extLst>
           </p:cNvPr>
@@ -31278,7 +34742,7 @@
           <p:cNvPr id="6" name="injector">
             <a:extLst xmlns:a="http://schemas.openxmlformats.org/drawingml/2006/main">
               <a:ext uri="{FF2B5EF4-FFF2-40B4-BE49-F238E27FC236}">
-                <a16:creationId xmlns:a16="http://schemas.microsoft.com/office/drawing/2014/main" id="{103C1527-2E6F-4BDD-900D-FD5606731BF7}"/>
+                <a16:creationId xmlns:a16="http://schemas.microsoft.com/office/drawing/2014/main" id="{4278423D-91C6-4E25-8828-6CD5DBDF611A}"/>
               </a:ext>
             </a:extLst>
           </p:cNvPr>
@@ -31465,7 +34929,7 @@
           <p:cNvPr id="7" name="phone2">
             <a:extLst xmlns:a="http://schemas.openxmlformats.org/drawingml/2006/main">
               <a:ext uri="{FF2B5EF4-FFF2-40B4-BE49-F238E27FC236}">
-                <a16:creationId xmlns:a16="http://schemas.microsoft.com/office/drawing/2014/main" id="{3CC7C9F5-C085-4564-BF4A-178C3785C0DF}"/>
+                <a16:creationId xmlns:a16="http://schemas.microsoft.com/office/drawing/2014/main" id="{55FCD764-DCB3-4D61-A3D7-9987F7E5957B}"/>
               </a:ext>
             </a:extLst>
           </p:cNvPr>
@@ -31652,7 +35116,7 @@
           <p:cNvPr id="9" name="data + power">
             <a:extLst xmlns:a="http://schemas.openxmlformats.org/drawingml/2006/main">
               <a:ext uri="{FF2B5EF4-FFF2-40B4-BE49-F238E27FC236}">
-                <a16:creationId xmlns:a16="http://schemas.microsoft.com/office/drawing/2014/main" id="{00BC1690-D782-42AB-BBAB-64B32D79D477}"/>
+                <a16:creationId xmlns:a16="http://schemas.microsoft.com/office/drawing/2014/main" id="{2AF88158-A4EE-4CAD-A60F-2976BF23F5E3}"/>
               </a:ext>
             </a:extLst>
           </p:cNvPr>
@@ -31810,7 +35274,7 @@
           <p:cNvPr id="11" name="data">
             <a:extLst xmlns:a="http://schemas.openxmlformats.org/drawingml/2006/main">
               <a:ext uri="{FF2B5EF4-FFF2-40B4-BE49-F238E27FC236}">
-                <a16:creationId xmlns:a16="http://schemas.microsoft.com/office/drawing/2014/main" id="{59C4AD76-DA18-41B1-8834-F6E6F4A9AAAD}"/>
+                <a16:creationId xmlns:a16="http://schemas.microsoft.com/office/drawing/2014/main" id="{3050FB94-0AD2-4519-B8CF-AB0FC23EF353}"/>
               </a:ext>
             </a:extLst>
           </p:cNvPr>
@@ -31968,7 +35432,7 @@
           <p:cNvPr id="13" name="PoE">
             <a:extLst xmlns:a="http://schemas.openxmlformats.org/drawingml/2006/main">
               <a:ext uri="{FF2B5EF4-FFF2-40B4-BE49-F238E27FC236}">
-                <a16:creationId xmlns:a16="http://schemas.microsoft.com/office/drawing/2014/main" id="{93704B26-982E-400A-AFD6-92CB597BFCBB}"/>
+                <a16:creationId xmlns:a16="http://schemas.microsoft.com/office/drawing/2014/main" id="{9C30E92E-A239-49A4-AAFB-9C410AE9ED0F}"/>
               </a:ext>
             </a:extLst>
           </p:cNvPr>
@@ -32126,7 +35590,7 @@
           <p:cNvPr id="14" name="A passive 24 V injector is unsuitable. The UPS also needs to powe">
             <a:extLst xmlns:a="http://schemas.openxmlformats.org/drawingml/2006/main">
               <a:ext uri="{FF2B5EF4-FFF2-40B4-BE49-F238E27FC236}">
-                <a16:creationId xmlns:a16="http://schemas.microsoft.com/office/drawing/2014/main" id="{DA99D0A5-2E1C-499C-A38D-004D5E0CF536}"/>
+                <a16:creationId xmlns:a16="http://schemas.microsoft.com/office/drawing/2014/main" id="{307DB303-EED6-4CF1-97FC-56D6D2964C42}"/>
               </a:ext>
             </a:extLst>
           </p:cNvPr>
@@ -32282,7 +35746,7 @@
     </p:spTree>
     <p:extLst>
       <p:ext uri="{BB962C8B-B14F-4D97-AF65-F5344CB8AC3E}">
-        <p14:creationId xmlns:p14="http://schemas.microsoft.com/office/powerpoint/2010/main" val="413904961"/>
+        <p14:creationId xmlns:p14="http://schemas.microsoft.com/office/powerpoint/2010/main" val="182533156"/>
       </p:ext>
     </p:extLst>
   </p:cSld>
@@ -32313,7 +35777,7 @@
           <p:cNvPr id="13" name="">
             <a:extLst xmlns:a="http://schemas.openxmlformats.org/drawingml/2006/main">
               <a:ext uri="{FF2B5EF4-FFF2-40B4-BE49-F238E27FC236}">
-                <a16:creationId xmlns:a16="http://schemas.microsoft.com/office/drawing/2014/main" id="{9D6E3503-FEA0-47A7-857F-9503DC7CCCCB}"/>
+                <a16:creationId xmlns:a16="http://schemas.microsoft.com/office/drawing/2014/main" id="{251C3059-CA4C-4DA6-B88A-FEF2C7339BFE}"/>
               </a:ext>
             </a:extLst>
           </p:cNvPr>
@@ -32344,7 +35808,7 @@
           <p:cNvPr id="12" name="">
             <a:extLst xmlns:a="http://schemas.openxmlformats.org/drawingml/2006/main">
               <a:ext uri="{FF2B5EF4-FFF2-40B4-BE49-F238E27FC236}">
-                <a16:creationId xmlns:a16="http://schemas.microsoft.com/office/drawing/2014/main" id="{626BF1DA-1F29-4906-819B-29BAB245E944}"/>
+                <a16:creationId xmlns:a16="http://schemas.microsoft.com/office/drawing/2014/main" id="{44177214-185C-4092-8217-E35068936F26}"/>
               </a:ext>
             </a:extLst>
           </p:cNvPr>
@@ -32375,7 +35839,7 @@
           <p:cNvPr id="11" name="">
             <a:extLst xmlns:a="http://schemas.openxmlformats.org/drawingml/2006/main">
               <a:ext uri="{FF2B5EF4-FFF2-40B4-BE49-F238E27FC236}">
-                <a16:creationId xmlns:a16="http://schemas.microsoft.com/office/drawing/2014/main" id="{0F7CA408-425C-4902-B483-F38FC38FABE2}"/>
+                <a16:creationId xmlns:a16="http://schemas.microsoft.com/office/drawing/2014/main" id="{73F9E4BF-3B0E-4B45-BC15-D14E4407C0CF}"/>
               </a:ext>
             </a:extLst>
           </p:cNvPr>
@@ -32406,7 +35870,7 @@
           <p:cNvPr id="10" name="">
             <a:extLst xmlns:a="http://schemas.openxmlformats.org/drawingml/2006/main">
               <a:ext uri="{FF2B5EF4-FFF2-40B4-BE49-F238E27FC236}">
-                <a16:creationId xmlns:a16="http://schemas.microsoft.com/office/drawing/2014/main" id="{1934FF84-6F55-47A9-96A9-6D76774DEC15}"/>
+                <a16:creationId xmlns:a16="http://schemas.microsoft.com/office/drawing/2014/main" id="{6D31C885-5881-43D4-AC1B-C6FA6527A981}"/>
               </a:ext>
             </a:extLst>
           </p:cNvPr>
@@ -32437,7 +35901,7 @@
           <p:cNvPr id="9" name="">
             <a:extLst xmlns:a="http://schemas.openxmlformats.org/drawingml/2006/main">
               <a:ext uri="{FF2B5EF4-FFF2-40B4-BE49-F238E27FC236}">
-                <a16:creationId xmlns:a16="http://schemas.microsoft.com/office/drawing/2014/main" id="{AD602CDE-6679-4B1A-BEDB-33A3A0D68639}"/>
+                <a16:creationId xmlns:a16="http://schemas.microsoft.com/office/drawing/2014/main" id="{BC8F885C-52C8-40AC-94AF-D4F3956B6F10}"/>
               </a:ext>
             </a:extLst>
           </p:cNvPr>
@@ -32468,7 +35932,7 @@
           <p:cNvPr id="15" name="One pilot phone before the full fleet">
             <a:extLst xmlns:a="http://schemas.openxmlformats.org/drawingml/2006/main">
               <a:ext uri="{FF2B5EF4-FFF2-40B4-BE49-F238E27FC236}">
-                <a16:creationId xmlns:a16="http://schemas.microsoft.com/office/drawing/2014/main" id="{E4638FD7-DE33-4FA5-B8F2-EDEC83BD9F57}"/>
+                <a16:creationId xmlns:a16="http://schemas.microsoft.com/office/drawing/2014/main" id="{A3113D57-686E-4FCF-8A9D-4A8EB1D90D6D}"/>
               </a:ext>
             </a:extLst>
           </p:cNvPr>
@@ -32626,7 +36090,7 @@
           <p:cNvPr id="2" name="06">
             <a:extLst xmlns:a="http://schemas.openxmlformats.org/drawingml/2006/main">
               <a:ext uri="{FF2B5EF4-FFF2-40B4-BE49-F238E27FC236}">
-                <a16:creationId xmlns:a16="http://schemas.microsoft.com/office/drawing/2014/main" id="{B6337A1A-4F90-480F-B75F-88F9280EE822}"/>
+                <a16:creationId xmlns:a16="http://schemas.microsoft.com/office/drawing/2014/main" id="{9B3B119F-1F61-4C69-A80B-E32FF5951F3C}"/>
               </a:ext>
             </a:extLst>
           </p:cNvPr>
@@ -32784,7 +36248,7 @@
           <p:cNvPr id="3" name="inventory">
             <a:extLst xmlns:a="http://schemas.openxmlformats.org/drawingml/2006/main">
               <a:ext uri="{FF2B5EF4-FFF2-40B4-BE49-F238E27FC236}">
-                <a16:creationId xmlns:a16="http://schemas.microsoft.com/office/drawing/2014/main" id="{4290091A-F925-4621-BD6A-9F656A877C18}"/>
+                <a16:creationId xmlns:a16="http://schemas.microsoft.com/office/drawing/2014/main" id="{88DBBD88-BC4E-4AA4-80FA-CAA27DED89FD}"/>
               </a:ext>
             </a:extLst>
           </p:cNvPr>
@@ -32971,7 +36435,7 @@
           <p:cNvPr id="4" name="firmware">
             <a:extLst xmlns:a="http://schemas.openxmlformats.org/drawingml/2006/main">
               <a:ext uri="{FF2B5EF4-FFF2-40B4-BE49-F238E27FC236}">
-                <a16:creationId xmlns:a16="http://schemas.microsoft.com/office/drawing/2014/main" id="{5991694C-F123-40BB-86D2-1A1AE8F977F3}"/>
+                <a16:creationId xmlns:a16="http://schemas.microsoft.com/office/drawing/2014/main" id="{8D8D1C49-F214-495E-8954-2C666DBCDE8E}"/>
               </a:ext>
             </a:extLst>
           </p:cNvPr>
@@ -33158,7 +36622,7 @@
           <p:cNvPr id="5" name="tftp">
             <a:extLst xmlns:a="http://schemas.openxmlformats.org/drawingml/2006/main">
               <a:ext uri="{FF2B5EF4-FFF2-40B4-BE49-F238E27FC236}">
-                <a16:creationId xmlns:a16="http://schemas.microsoft.com/office/drawing/2014/main" id="{A533AFB8-9D95-44EA-AB88-F975FA903148}"/>
+                <a16:creationId xmlns:a16="http://schemas.microsoft.com/office/drawing/2014/main" id="{495591E8-C97C-442F-B52E-A1681BB71A3A}"/>
               </a:ext>
             </a:extLst>
           </p:cNvPr>
@@ -33345,7 +36809,7 @@
           <p:cNvPr id="6" name="pilot">
             <a:extLst xmlns:a="http://schemas.openxmlformats.org/drawingml/2006/main">
               <a:ext uri="{FF2B5EF4-FFF2-40B4-BE49-F238E27FC236}">
-                <a16:creationId xmlns:a16="http://schemas.microsoft.com/office/drawing/2014/main" id="{EC51D0D1-93CD-4DCD-83CB-B14925A5206D}"/>
+                <a16:creationId xmlns:a16="http://schemas.microsoft.com/office/drawing/2014/main" id="{713FEE86-F675-43EA-BC72-72674EB79C49}"/>
               </a:ext>
             </a:extLst>
           </p:cNvPr>
@@ -33532,7 +36996,7 @@
           <p:cNvPr id="7" name="accept">
             <a:extLst xmlns:a="http://schemas.openxmlformats.org/drawingml/2006/main">
               <a:ext uri="{FF2B5EF4-FFF2-40B4-BE49-F238E27FC236}">
-                <a16:creationId xmlns:a16="http://schemas.microsoft.com/office/drawing/2014/main" id="{ED967023-FBBE-4F2A-A61F-16529F9C7BE8}"/>
+                <a16:creationId xmlns:a16="http://schemas.microsoft.com/office/drawing/2014/main" id="{58387E37-B062-416C-B331-FB3D19CAE28C}"/>
               </a:ext>
             </a:extLst>
           </p:cNvPr>
@@ -33719,7 +37183,7 @@
           <p:cNvPr id="8" name="fleet">
             <a:extLst xmlns:a="http://schemas.openxmlformats.org/drawingml/2006/main">
               <a:ext uri="{FF2B5EF4-FFF2-40B4-BE49-F238E27FC236}">
-                <a16:creationId xmlns:a16="http://schemas.microsoft.com/office/drawing/2014/main" id="{4FDAF5B4-96E6-460E-8076-39D16F8905C7}"/>
+                <a16:creationId xmlns:a16="http://schemas.microsoft.com/office/drawing/2014/main" id="{5CE594E6-12DE-48FF-BA6E-69A334F47226}"/>
               </a:ext>
             </a:extLst>
           </p:cNvPr>
@@ -33906,7 +37370,7 @@
           <p:cNvPr id="14" name="HW 13.0+ requires at least 9.3(1)SR3. The upgrade path depends on">
             <a:extLst xmlns:a="http://schemas.openxmlformats.org/drawingml/2006/main">
               <a:ext uri="{FF2B5EF4-FFF2-40B4-BE49-F238E27FC236}">
-                <a16:creationId xmlns:a16="http://schemas.microsoft.com/office/drawing/2014/main" id="{C3D50131-89D8-45C5-9607-E3B09A9E402F}"/>
+                <a16:creationId xmlns:a16="http://schemas.microsoft.com/office/drawing/2014/main" id="{99A841C0-34A7-480C-9CB0-CC68D3A2900E}"/>
               </a:ext>
             </a:extLst>
           </p:cNvPr>
@@ -34085,7 +37549,7 @@
     </p:spTree>
     <p:extLst>
       <p:ext uri="{BB962C8B-B14F-4D97-AF65-F5344CB8AC3E}">
-        <p14:creationId xmlns:p14="http://schemas.microsoft.com/office/powerpoint/2010/main" val="18881597"/>
+        <p14:creationId xmlns:p14="http://schemas.microsoft.com/office/powerpoint/2010/main" val="1437108232"/>
       </p:ext>
     </p:extLst>
   </p:cSld>
@@ -34116,7 +37580,7 @@
           <p:cNvPr id="8" name="TFTP preparation before restart">
             <a:extLst xmlns:a="http://schemas.openxmlformats.org/drawingml/2006/main">
               <a:ext uri="{FF2B5EF4-FFF2-40B4-BE49-F238E27FC236}">
-                <a16:creationId xmlns:a16="http://schemas.microsoft.com/office/drawing/2014/main" id="{B5BA7561-368D-400E-A8B5-230907F71132}"/>
+                <a16:creationId xmlns:a16="http://schemas.microsoft.com/office/drawing/2014/main" id="{4B9B8745-C16B-4B49-B91A-42C5ED9538CF}"/>
               </a:ext>
             </a:extLst>
           </p:cNvPr>
@@ -34274,7 +37738,7 @@
           <p:cNvPr id="2" name="07">
             <a:extLst xmlns:a="http://schemas.openxmlformats.org/drawingml/2006/main">
               <a:ext uri="{FF2B5EF4-FFF2-40B4-BE49-F238E27FC236}">
-                <a16:creationId xmlns:a16="http://schemas.microsoft.com/office/drawing/2014/main" id="{BAC5A828-03FB-450B-A2CB-3B7124D1CE2C}"/>
+                <a16:creationId xmlns:a16="http://schemas.microsoft.com/office/drawing/2014/main" id="{D50B9C09-6D0D-4FA1-B076-9830197D4A27}"/>
               </a:ext>
             </a:extLst>
           </p:cNvPr>
@@ -34432,7 +37896,7 @@
           <p:cNvPr id="3" name="Complete official firmware bundle">
             <a:extLst xmlns:a="http://schemas.openxmlformats.org/drawingml/2006/main">
               <a:ext uri="{FF2B5EF4-FFF2-40B4-BE49-F238E27FC236}">
-                <a16:creationId xmlns:a16="http://schemas.microsoft.com/office/drawing/2014/main" id="{AAC40E24-F536-4E2A-BFB0-12C5F8C5434A}"/>
+                <a16:creationId xmlns:a16="http://schemas.microsoft.com/office/drawing/2014/main" id="{B81F4F2F-3D5A-47A8-A290-F9C420A8F882}"/>
               </a:ext>
             </a:extLst>
           </p:cNvPr>
@@ -34590,7 +38054,7 @@
           <p:cNvPr id="4" name=".loads and every referenced binary file&#10;with the original filenam">
             <a:extLst xmlns:a="http://schemas.openxmlformats.org/drawingml/2006/main">
               <a:ext uri="{FF2B5EF4-FFF2-40B4-BE49-F238E27FC236}">
-                <a16:creationId xmlns:a16="http://schemas.microsoft.com/office/drawing/2014/main" id="{714DEB71-9016-4CCA-874C-49C3EE3F3884}"/>
+                <a16:creationId xmlns:a16="http://schemas.microsoft.com/office/drawing/2014/main" id="{00FE1FCA-ECDF-434A-AC2D-6701A8F4AA09}"/>
               </a:ext>
             </a:extLst>
           </p:cNvPr>
@@ -34771,7 +38235,7 @@
           <p:cNvPr id="5" name="SEP&lt;MAC&gt;.cnf.xml">
             <a:extLst xmlns:a="http://schemas.openxmlformats.org/drawingml/2006/main">
               <a:ext uri="{FF2B5EF4-FFF2-40B4-BE49-F238E27FC236}">
-                <a16:creationId xmlns:a16="http://schemas.microsoft.com/office/drawing/2014/main" id="{0DC2CFD1-28A1-45AD-A03F-CE80B0581FC9}"/>
+                <a16:creationId xmlns:a16="http://schemas.microsoft.com/office/drawing/2014/main" id="{054F2B88-2F27-4FC9-9932-9F33DCB1238F}"/>
               </a:ext>
             </a:extLst>
           </p:cNvPr>
@@ -34929,7 +38393,7 @@
           <p:cNvPr id="6" name="SIP server, extension and a unique password&#10;Load ID from the sele">
             <a:extLst xmlns:a="http://schemas.openxmlformats.org/drawingml/2006/main">
               <a:ext uri="{FF2B5EF4-FFF2-40B4-BE49-F238E27FC236}">
-                <a16:creationId xmlns:a16="http://schemas.microsoft.com/office/drawing/2014/main" id="{B204DC95-DAD5-4E66-BB9D-4CE68CA87DDC}"/>
+                <a16:creationId xmlns:a16="http://schemas.microsoft.com/office/drawing/2014/main" id="{CC41FCA7-3FFE-4B4F-8E9E-F5C7785EE17E}"/>
               </a:ext>
             </a:extLst>
           </p:cNvPr>
@@ -35110,7 +38574,7 @@
           <p:cNvPr id="7" name="Use DHCP option 150 on the home router or Alternate TFTP on the p">
             <a:extLst xmlns:a="http://schemas.openxmlformats.org/drawingml/2006/main">
               <a:ext uri="{FF2B5EF4-FFF2-40B4-BE49-F238E27FC236}">
-                <a16:creationId xmlns:a16="http://schemas.microsoft.com/office/drawing/2014/main" id="{31B02B04-8DA9-4EE5-93B0-40F394865ECD}"/>
+                <a16:creationId xmlns:a16="http://schemas.microsoft.com/office/drawing/2014/main" id="{C582834F-171A-4E6E-890A-D6CB7EFB9CEA}"/>
               </a:ext>
             </a:extLst>
           </p:cNvPr>
@@ -35266,7 +38730,7 @@
     </p:spTree>
     <p:extLst>
       <p:ext uri="{BB962C8B-B14F-4D97-AF65-F5344CB8AC3E}">
-        <p14:creationId xmlns:p14="http://schemas.microsoft.com/office/powerpoint/2010/main" val="1621828081"/>
+        <p14:creationId xmlns:p14="http://schemas.microsoft.com/office/powerpoint/2010/main" val="384114579"/>
       </p:ext>
     </p:extLst>
   </p:cSld>
@@ -35297,7 +38761,7 @@
           <p:cNvPr id="8" name="Asterisk: independent SIP lines">
             <a:extLst xmlns:a="http://schemas.openxmlformats.org/drawingml/2006/main">
               <a:ext uri="{FF2B5EF4-FFF2-40B4-BE49-F238E27FC236}">
-                <a16:creationId xmlns:a16="http://schemas.microsoft.com/office/drawing/2014/main" id="{608E5B06-B842-46BF-AFC6-873DBDF0E46A}"/>
+                <a16:creationId xmlns:a16="http://schemas.microsoft.com/office/drawing/2014/main" id="{D3BC15EC-D970-45C7-8F69-FE3E115AE318}"/>
               </a:ext>
             </a:extLst>
           </p:cNvPr>
@@ -35455,7 +38919,7 @@
           <p:cNvPr id="2" name="08">
             <a:extLst xmlns:a="http://schemas.openxmlformats.org/drawingml/2006/main">
               <a:ext uri="{FF2B5EF4-FFF2-40B4-BE49-F238E27FC236}">
-                <a16:creationId xmlns:a16="http://schemas.microsoft.com/office/drawing/2014/main" id="{B5545F1B-8DC1-4F2E-8894-D4CF311063FC}"/>
+                <a16:creationId xmlns:a16="http://schemas.microsoft.com/office/drawing/2014/main" id="{DD3D1ABB-8764-4D3D-B5AD-CAE0C998F2F5}"/>
               </a:ext>
             </a:extLst>
           </p:cNvPr>
@@ -35613,7 +39077,7 @@
           <p:cNvPr id="3" name="201 / 202">
             <a:extLst xmlns:a="http://schemas.openxmlformats.org/drawingml/2006/main">
               <a:ext uri="{FF2B5EF4-FFF2-40B4-BE49-F238E27FC236}">
-                <a16:creationId xmlns:a16="http://schemas.microsoft.com/office/drawing/2014/main" id="{212AE5D7-7CCD-46ED-B5CD-832B79E41103}"/>
+                <a16:creationId xmlns:a16="http://schemas.microsoft.com/office/drawing/2014/main" id="{1BFA9D4B-8C58-4663-A7DB-C80D9ED11D39}"/>
               </a:ext>
             </a:extLst>
           </p:cNvPr>
@@ -35771,7 +39235,7 @@
           <p:cNvPr id="4" name="one phone">
             <a:extLst xmlns:a="http://schemas.openxmlformats.org/drawingml/2006/main">
               <a:ext uri="{FF2B5EF4-FFF2-40B4-BE49-F238E27FC236}">
-                <a16:creationId xmlns:a16="http://schemas.microsoft.com/office/drawing/2014/main" id="{986627FC-3FC4-4F00-869D-2FCF3C51977B}"/>
+                <a16:creationId xmlns:a16="http://schemas.microsoft.com/office/drawing/2014/main" id="{F5F3C217-745F-4C19-8433-E89AC4895477}"/>
               </a:ext>
             </a:extLst>
           </p:cNvPr>
@@ -35929,7 +39393,7 @@
           <p:cNvPr id="5" name="One endpoint, auth and AOR per line&#10;A unique password for each li">
             <a:extLst xmlns:a="http://schemas.openxmlformats.org/drawingml/2006/main">
               <a:ext uri="{FF2B5EF4-FFF2-40B4-BE49-F238E27FC236}">
-                <a16:creationId xmlns:a16="http://schemas.microsoft.com/office/drawing/2014/main" id="{99BACE1B-E4E5-46C5-9E54-DEACAC9FB9C1}"/>
+                <a16:creationId xmlns:a16="http://schemas.microsoft.com/office/drawing/2014/main" id="{FDD88CFE-2C7E-436C-B921-BB31B9EA3BFC}"/>
               </a:ext>
             </a:extLst>
           </p:cNvPr>
@@ -36110,7 +39574,7 @@
           <p:cNvPr id="6" name="G.711 ulaw / alaw&#10;direct_media=no keeps RTP on Asterisk">
             <a:extLst xmlns:a="http://schemas.openxmlformats.org/drawingml/2006/main">
               <a:ext uri="{FF2B5EF4-FFF2-40B4-BE49-F238E27FC236}">
-                <a16:creationId xmlns:a16="http://schemas.microsoft.com/office/drawing/2014/main" id="{2DFAC767-DCBC-4467-8B5C-DDE70A3B25B4}"/>
+                <a16:creationId xmlns:a16="http://schemas.microsoft.com/office/drawing/2014/main" id="{5225C6E4-3246-4D7F-B967-7CCFFF3EAC84}"/>
               </a:ext>
             </a:extLst>
           </p:cNvPr>
@@ -36291,7 +39755,7 @@
           <p:cNvPr id="7" name="600 echo, 601 tone, 620 ring group. Extension 630 requires Assist">
             <a:extLst xmlns:a="http://schemas.openxmlformats.org/drawingml/2006/main">
               <a:ext uri="{FF2B5EF4-FFF2-40B4-BE49-F238E27FC236}">
-                <a16:creationId xmlns:a16="http://schemas.microsoft.com/office/drawing/2014/main" id="{3C3F9DD3-C358-45D6-8AA3-B865096E47F3}"/>
+                <a16:creationId xmlns:a16="http://schemas.microsoft.com/office/drawing/2014/main" id="{A74AD764-558F-429A-B1DF-A68AEB64EF66}"/>
               </a:ext>
             </a:extLst>
           </p:cNvPr>
@@ -36447,7 +39911,7 @@
     </p:spTree>
     <p:extLst>
       <p:ext uri="{BB962C8B-B14F-4D97-AF65-F5344CB8AC3E}">
-        <p14:creationId xmlns:p14="http://schemas.microsoft.com/office/powerpoint/2010/main" val="415517682"/>
+        <p14:creationId xmlns:p14="http://schemas.microsoft.com/office/powerpoint/2010/main" val="411781559"/>
       </p:ext>
     </p:extLst>
   </p:cSld>
@@ -36478,7 +39942,7 @@
           <p:cNvPr id="8" name="AMI: status and call control">
             <a:extLst xmlns:a="http://schemas.openxmlformats.org/drawingml/2006/main">
               <a:ext uri="{FF2B5EF4-FFF2-40B4-BE49-F238E27FC236}">
-                <a16:creationId xmlns:a16="http://schemas.microsoft.com/office/drawing/2014/main" id="{DDAA42A9-FB90-45E0-B812-C9FF85903315}"/>
+                <a16:creationId xmlns:a16="http://schemas.microsoft.com/office/drawing/2014/main" id="{DB3ABA55-C8CD-471E-881F-214B1803D3A3}"/>
               </a:ext>
             </a:extLst>
           </p:cNvPr>
@@ -36636,7 +40100,7 @@
           <p:cNvPr id="2" name="09">
             <a:extLst xmlns:a="http://schemas.openxmlformats.org/drawingml/2006/main">
               <a:ext uri="{FF2B5EF4-FFF2-40B4-BE49-F238E27FC236}">
-                <a16:creationId xmlns:a16="http://schemas.microsoft.com/office/drawing/2014/main" id="{244C8CBB-9FC0-4028-8EDB-D8884A4A2994}"/>
+                <a16:creationId xmlns:a16="http://schemas.microsoft.com/office/drawing/2014/main" id="{662298C5-6ED3-4607-86D4-A8580F7C46D7}"/>
               </a:ext>
             </a:extLst>
           </p:cNvPr>
@@ -36794,7 +40258,7 @@
           <p:cNvPr id="3" name="Home Assistant connects to PBX:5038">
             <a:extLst xmlns:a="http://schemas.openxmlformats.org/drawingml/2006/main">
               <a:ext uri="{FF2B5EF4-FFF2-40B4-BE49-F238E27FC236}">
-                <a16:creationId xmlns:a16="http://schemas.microsoft.com/office/drawing/2014/main" id="{8B3E53F6-B9AC-4CE4-A475-0DD17ADBB503}"/>
+                <a16:creationId xmlns:a16="http://schemas.microsoft.com/office/drawing/2014/main" id="{2C14E1D9-B98B-4B8D-A68F-E214C3908578}"/>
               </a:ext>
             </a:extLst>
           </p:cNvPr>
@@ -36952,7 +40416,7 @@
           <p:cNvPr id="4" name="Status, connected line and DTMF&#10;Actual entity IDs from your HA in">
             <a:extLst xmlns:a="http://schemas.openxmlformats.org/drawingml/2006/main">
               <a:ext uri="{FF2B5EF4-FFF2-40B4-BE49-F238E27FC236}">
-                <a16:creationId xmlns:a16="http://schemas.microsoft.com/office/drawing/2014/main" id="{D7A3C109-CE27-49CE-8160-5D30A9EA584B}"/>
+                <a16:creationId xmlns:a16="http://schemas.microsoft.com/office/drawing/2014/main" id="{F98E2C5A-E4A0-4728-AEF2-C44614D98898}"/>
               </a:ext>
             </a:extLst>
           </p:cNvPr>
@@ -37133,7 +40597,7 @@
           <p:cNvPr id="5" name="Place calls and hang up a specific channel">
             <a:extLst xmlns:a="http://schemas.openxmlformats.org/drawingml/2006/main">
               <a:ext uri="{FF2B5EF4-FFF2-40B4-BE49-F238E27FC236}">
-                <a16:creationId xmlns:a16="http://schemas.microsoft.com/office/drawing/2014/main" id="{608CBB0D-FB61-4B29-AF1E-5C5C9C581072}"/>
+                <a16:creationId xmlns:a16="http://schemas.microsoft.com/office/drawing/2014/main" id="{E7D89A30-ED69-4C95-8BF5-90ACFB36C676}"/>
               </a:ext>
             </a:extLst>
           </p:cNvPr>
@@ -37291,7 +40755,7 @@
           <p:cNvPr id="6" name="asterisk.send_action: Originate / Hangup&#10;The DTMF example sends a">
             <a:extLst xmlns:a="http://schemas.openxmlformats.org/drawingml/2006/main">
               <a:ext uri="{FF2B5EF4-FFF2-40B4-BE49-F238E27FC236}">
-                <a16:creationId xmlns:a16="http://schemas.microsoft.com/office/drawing/2014/main" id="{73F4417D-D030-49DE-BB15-278DBE0CCD49}"/>
+                <a16:creationId xmlns:a16="http://schemas.microsoft.com/office/drawing/2014/main" id="{CB48CFF7-9CAF-429B-A6C5-4F4AB6FF5ACE}"/>
               </a:ext>
             </a:extLst>
           </p:cNvPr>
@@ -37472,7 +40936,7 @@
           <p:cNvPr id="7" name="Use a separate secret and a /32 ACL. The system permission allows">
             <a:extLst xmlns:a="http://schemas.openxmlformats.org/drawingml/2006/main">
               <a:ext uri="{FF2B5EF4-FFF2-40B4-BE49-F238E27FC236}">
-                <a16:creationId xmlns:a16="http://schemas.microsoft.com/office/drawing/2014/main" id="{BB8A9C39-5D69-4B78-8833-AFB40839B946}"/>
+                <a16:creationId xmlns:a16="http://schemas.microsoft.com/office/drawing/2014/main" id="{3918F16C-79A8-46F3-9183-28678A54F829}"/>
               </a:ext>
             </a:extLst>
           </p:cNvPr>
@@ -37628,7 +41092,7 @@
     </p:spTree>
     <p:extLst>
       <p:ext uri="{BB962C8B-B14F-4D97-AF65-F5344CB8AC3E}">
-        <p14:creationId xmlns:p14="http://schemas.microsoft.com/office/powerpoint/2010/main" val="582710453"/>
+        <p14:creationId xmlns:p14="http://schemas.microsoft.com/office/powerpoint/2010/main" val="1693943508"/>
       </p:ext>
     </p:extLst>
   </p:cSld>

--- a/docs/slides/cisco-home-telephony.pptx
+++ b/docs/slides/cisco-home-telephony.pptx
@@ -2,31 +2,31 @@
 <file path=ppt/presentation.xml><?xml version="1.0" encoding="utf-8"?>
 <p:presentation xmlns:p="http://schemas.openxmlformats.org/presentationml/2006/main">
   <p:sldMasterIdLst>
-    <p:sldMasterId xmlns:r="http://schemas.openxmlformats.org/officeDocument/2006/relationships" id="2147483648" r:id="R8c324fcf10bd4ed8"/>
+    <p:sldMasterId xmlns:r="http://schemas.openxmlformats.org/officeDocument/2006/relationships" id="2147483648" r:id="R4fbc7cc7224849d1"/>
   </p:sldMasterIdLst>
   <p:notesMasterIdLst>
-    <p:notesMasterId xmlns:r="http://schemas.openxmlformats.org/officeDocument/2006/relationships" r:id="R444cf0df1beb445f"/>
+    <p:notesMasterId xmlns:r="http://schemas.openxmlformats.org/officeDocument/2006/relationships" r:id="R5ce350475c304b3e"/>
   </p:notesMasterIdLst>
   <p:sldIdLst>
-    <p:sldId xmlns:r="http://schemas.openxmlformats.org/officeDocument/2006/relationships" id="256" r:id="R6940bb60118e4f8e"/>
-    <p:sldId xmlns:r="http://schemas.openxmlformats.org/officeDocument/2006/relationships" id="257" r:id="R95dc18e723374903"/>
-    <p:sldId xmlns:r="http://schemas.openxmlformats.org/officeDocument/2006/relationships" id="258" r:id="Ra31cf8cbabf44732"/>
-    <p:sldId xmlns:r="http://schemas.openxmlformats.org/officeDocument/2006/relationships" id="259" r:id="R8680956067dd4b0c"/>
-    <p:sldId xmlns:r="http://schemas.openxmlformats.org/officeDocument/2006/relationships" id="260" r:id="R8070d54cda70427b"/>
-    <p:sldId xmlns:r="http://schemas.openxmlformats.org/officeDocument/2006/relationships" id="261" r:id="R900b1c3daac44613"/>
-    <p:sldId xmlns:r="http://schemas.openxmlformats.org/officeDocument/2006/relationships" id="262" r:id="R8cdff775d05a47b8"/>
-    <p:sldId xmlns:r="http://schemas.openxmlformats.org/officeDocument/2006/relationships" id="263" r:id="R4a55eee7a7e44143"/>
-    <p:sldId xmlns:r="http://schemas.openxmlformats.org/officeDocument/2006/relationships" id="264" r:id="R1fa776a2db1f401e"/>
-    <p:sldId xmlns:r="http://schemas.openxmlformats.org/officeDocument/2006/relationships" id="265" r:id="R30638fd33e4244c8"/>
-    <p:sldId xmlns:r="http://schemas.openxmlformats.org/officeDocument/2006/relationships" id="266" r:id="R6b69584018274ba4"/>
-    <p:sldId xmlns:r="http://schemas.openxmlformats.org/officeDocument/2006/relationships" id="267" r:id="R9348e4e62b704aa5"/>
-    <p:sldId xmlns:r="http://schemas.openxmlformats.org/officeDocument/2006/relationships" id="268" r:id="R4ddd4551f2f6425e"/>
-    <p:sldId xmlns:r="http://schemas.openxmlformats.org/officeDocument/2006/relationships" id="269" r:id="R25bd3384ad7b44a4"/>
-    <p:sldId xmlns:r="http://schemas.openxmlformats.org/officeDocument/2006/relationships" id="270" r:id="Rfd3340a97a8c4599"/>
-    <p:sldId xmlns:r="http://schemas.openxmlformats.org/officeDocument/2006/relationships" id="271" r:id="Rc5abce227edf438d"/>
-    <p:sldId xmlns:r="http://schemas.openxmlformats.org/officeDocument/2006/relationships" id="272" r:id="R10951156fbe941f4"/>
-    <p:sldId xmlns:r="http://schemas.openxmlformats.org/officeDocument/2006/relationships" id="273" r:id="Rf850f92b3e6b4b54"/>
-    <p:sldId xmlns:r="http://schemas.openxmlformats.org/officeDocument/2006/relationships" id="274" r:id="R2b490160e3684e56"/>
+    <p:sldId xmlns:r="http://schemas.openxmlformats.org/officeDocument/2006/relationships" id="256" r:id="Red386c2da8c24505"/>
+    <p:sldId xmlns:r="http://schemas.openxmlformats.org/officeDocument/2006/relationships" id="257" r:id="R335f044b586444c8"/>
+    <p:sldId xmlns:r="http://schemas.openxmlformats.org/officeDocument/2006/relationships" id="258" r:id="R46e2264b22e24288"/>
+    <p:sldId xmlns:r="http://schemas.openxmlformats.org/officeDocument/2006/relationships" id="259" r:id="R22ae03e864784bcf"/>
+    <p:sldId xmlns:r="http://schemas.openxmlformats.org/officeDocument/2006/relationships" id="260" r:id="R0ee53d8b62e64515"/>
+    <p:sldId xmlns:r="http://schemas.openxmlformats.org/officeDocument/2006/relationships" id="261" r:id="Re7ac3fa008354b67"/>
+    <p:sldId xmlns:r="http://schemas.openxmlformats.org/officeDocument/2006/relationships" id="262" r:id="R6a613117d9c343d7"/>
+    <p:sldId xmlns:r="http://schemas.openxmlformats.org/officeDocument/2006/relationships" id="263" r:id="Rb2b329141e254b36"/>
+    <p:sldId xmlns:r="http://schemas.openxmlformats.org/officeDocument/2006/relationships" id="264" r:id="R8c1c68ba5a094325"/>
+    <p:sldId xmlns:r="http://schemas.openxmlformats.org/officeDocument/2006/relationships" id="265" r:id="R04f72f59ef8e4e73"/>
+    <p:sldId xmlns:r="http://schemas.openxmlformats.org/officeDocument/2006/relationships" id="266" r:id="R390a9dae28854831"/>
+    <p:sldId xmlns:r="http://schemas.openxmlformats.org/officeDocument/2006/relationships" id="267" r:id="R949df3a169da40c3"/>
+    <p:sldId xmlns:r="http://schemas.openxmlformats.org/officeDocument/2006/relationships" id="268" r:id="R3df9e6bd8bcb443d"/>
+    <p:sldId xmlns:r="http://schemas.openxmlformats.org/officeDocument/2006/relationships" id="269" r:id="Rc7267b4ab18f42a3"/>
+    <p:sldId xmlns:r="http://schemas.openxmlformats.org/officeDocument/2006/relationships" id="270" r:id="Rdb0010c170344030"/>
+    <p:sldId xmlns:r="http://schemas.openxmlformats.org/officeDocument/2006/relationships" id="271" r:id="R74e106278818460a"/>
+    <p:sldId xmlns:r="http://schemas.openxmlformats.org/officeDocument/2006/relationships" id="272" r:id="Rd639cdbb878f4676"/>
+    <p:sldId xmlns:r="http://schemas.openxmlformats.org/officeDocument/2006/relationships" id="273" r:id="R92089b7f29f14e53"/>
+    <p:sldId xmlns:r="http://schemas.openxmlformats.org/officeDocument/2006/relationships" id="274" r:id="R7c77d463c3e94153"/>
   </p:sldIdLst>
   <p:sldSz cx="12192000" cy="6858000"/>
   <p:notesSz cx="6858000" cy="9144000"/>
@@ -1110,7 +1110,7 @@
           <a:lstStyle xmlns:a="http://schemas.openxmlformats.org/drawingml/2006/main"/>
           <a:p xmlns:a="http://schemas.openxmlformats.org/drawingml/2006/main">
             <a:r>
-              <a:t>Status snapshot: October 17, 2026. SIP2SIP, Callcentric and the Linphone SIP provider account all reached Registered in the live Asterisk instance. That external Linphone account is separate from the Mac client on extension 209. Callcentric IP Freedom has a $0 plan and $0 balance, but outbound calls require provider risk review. Callcentric and Linphone remain registration-only with no active 801/803 route, and Linphone needs a verified free peer. The bounded SIP2SIP 802 call to its fixed 4444 echo destination answered and exchanged RTP in both directions. Local receive-loss counts increased from 42 to 91 between samples, reporting 49 additional missing packets. These samples do not establish an exact overall loss percentage or cause. Reported RTT was about 155 ms. All eight local lines remained available and owned channels were cleaned up. Human listening and satisfactory external audio quality are not claimed. Free accounts do not imply free PSTN. FWD stopped at its mandatory Verification Fee checkout. Google Voice supplies no official free generic Asterisk SIP trunk. Sources: https://sip2sip.info/help/ ; https://www.callcentric.com/rate/plans/ip_freedom/ ; https://www.callcentric.com/support/device/asterisk/17_pjsip ; https://www.linphone.org/en/faq/ ; https://www.fwdialup.com/mission ; https://knowledge.workspace.google.com/admin/voice/sip-link-requirements ; docs/server-validation.md and docs/external-sip.md .</a:t>
+              <a:t>Status snapshot: October 17, 2026. SIP2SIP, Callcentric and the Linphone SIP provider account all reached Registered in the live Asterisk instance. That external Linphone account is separate from the Mac client on extension 209. Callcentric IP Freedom has a $0 plan and $0 balance, but outbound calls require provider risk review. Callcentric remains registration-only with 801 withheld. The deployed Linphone profile uses the independently published The Test Call peer, sip:thetestcall@sip.linphone.org, for 803. A bounded live pilot answered and exchanged RTP in both directions: transmitted packets increased from 252 to 503 and received packets from 222 to 429, while locally reported receive loss stayed at zero in both samples. The latest bounded SIP2SIP 802 pilot to fixed echo destination 4444 also answered, with transmitted packets increasing from 260 to 510 and received packets from 214 to 416. Its local receive-loss counter increased from 44 to 91. These samples establish answered calls and packet exchange, not an exact overall loss percentage, cause, voice quality or working DTMF menu. Both tests ended with zero active channels after exact cleanup. Human listening and DTMF menu interaction remain untested. Free accounts do not imply free PSTN. FWD stopped at its mandatory Verification Fee checkout. Google Voice supplies no official free generic Asterisk SIP trunk. Sources: https://sip2sip.info/help/ ; https://www.callcentric.com/rate/plans/ip_freedom/ ; https://www.callcentric.com/support/device/asterisk/17_pjsip ; https://www.linphone.org/en/faq/ ; https://thetestcall.blogspot.com/ ; https://www.fwdialup.com/mission ; https://knowledge.workspace.google.com/admin/voice/sip-link-requirements ; docs/server-validation.md and docs/external-sip.md .</a:t>
             </a:r>
           </a:p>
         </p:txBody>
@@ -1180,7 +1180,7 @@
           <a:lstStyle xmlns:a="http://schemas.openxmlformats.org/drawingml/2006/main"/>
           <a:p xmlns:a="http://schemas.openxmlformats.org/drawingml/2006/main">
             <a:r>
-              <a:t>Extension 209 has a dedicated TCP/IPv4 account on the home PBX. Telephone registered, but numeric dialing stalled inside macOS Contacts authorization before any SIP call. Contacts access was not granted. The verified, notarized Linphone 6.2.3 app then registered over TCP using its documented local XML provisioning. A bounded 20-second 209-to-600 call reached Up/Echo with PCMU, increasing RTP in both directions and zero reported loss in the sampled counters. The owned call ended with zero channels. The user confirmed hearing the echo. A later PBX rollout briefly refused the connection; Linphone recovered through its normal registration retry without changing credentials. Later calls from 209 to 210 and 213 reached Ringing. Allow registration to recover after a restart before retrying. These ringing observations are not additional answered-media tests. The optional site.softphones entry has its own preserved secret and an exact source IPv4 ACL. It creates no Cisco XML, does not join ring group 620 and is not a Cisco gateway device. The three new radio definitions are official Deti FM channels: 708 toddler music (channel 327), 709 lullabies (channel 95), and 710 children’s songs (channel 93). All three passed bounded five-second stream decoding in the PBX namespace without calls. All three routes are deployed and produced PCM through the installed worker. A listener confirmed music on 708. With the handset down and speaker/headset off, type the full station number then press Dial, without first pressing a line key. This documented on-hook method can avoid a Cisco profile refresh or reboot; verify it on the installed firmware. No continuous download is required. Sources: https://www.linphone.org/en/docs/login-sip-account/ ; https://download.linphone.org/releases/macosx/app/ ; https://github.com/64characters/Telephone/blob/1.6/Telephone/ActiveAccountViewController.m ; https://detifm.ru/channel/327 ; https://detifm.ru/channel/95 ; https://detifm.ru/channel/93 ; docs/macos-softphone.md and docs/radio-and-alarms.md .</a:t>
+              <a:t>Extension 209 has a dedicated TCP/IPv4 account on the home PBX. Zoiper5 is the current compact Mac client, replacing the earlier Telephone and Linphone trials. Zoiper registration and an echo call to 600 passed, and the user confirmed audible echo. Earlier Linphone 6.2.3 tests reached Up/Echo with PCMU and increasing RTP in both directions; those are historical tests of the same independent PBX account. Allow registration to recover after a PBX restart before retrying a call. The optional site.softphones entry has its own preserved secret and an exact source IPv4 ACL. It creates no Cisco XML, does not join ring group 620 and is not a Cisco gateway device. The optional incoming group 621 can include this client through explicit private membership. The three Deti FM channels are 708 toddler music (channel 327), 709 lullabies (channel 95), and 710 children's songs (channel 93). All three passed bounded stream decoding in the PBX namespace and produced PCM through the installed worker. A listener confirmed music on 708; this does not establish human-audible playback for every station. With the Cisco handset down and speaker/headset off, type the full station number then press Dial, without first pressing a line key. No continuous download is required. Sources: https://www.zoiper.com/en/voip-softphone/download/current ; https://detifm.ru/channel/327 ; https://detifm.ru/channel/95 ; https://detifm.ru/channel/93 ; docs/macos-softphone.md and docs/radio-and-alarms.md .</a:t>
             </a:r>
           </a:p>
         </p:txBody>
@@ -1862,7 +1862,7 @@
           <p:cNvPr id="3" name="Title">
             <a:extLst xmlns:a="http://schemas.openxmlformats.org/drawingml/2006/main">
               <a:ext uri="{FF2B5EF4-FFF2-40B4-BE49-F238E27FC236}">
-                <a16:creationId xmlns:a16="http://schemas.microsoft.com/office/drawing/2014/main" id="{81C21CCA-EDD2-4E4F-84F4-C1A346832F07}"/>
+                <a16:creationId xmlns:a16="http://schemas.microsoft.com/office/drawing/2014/main" id="{22A01C0E-3CE8-4A60-83D1-3E2F86CE4F83}"/>
               </a:ext>
             </a:extLst>
           </p:cNvPr>
@@ -2091,7 +2091,7 @@
           <p:cNvPr id="2" name="Subtitle">
             <a:extLst xmlns:a="http://schemas.openxmlformats.org/drawingml/2006/main">
               <a:ext uri="{FF2B5EF4-FFF2-40B4-BE49-F238E27FC236}">
-                <a16:creationId xmlns:a16="http://schemas.microsoft.com/office/drawing/2014/main" id="{5AD15BE1-0700-4CA4-B398-EF08F9E64C57}"/>
+                <a16:creationId xmlns:a16="http://schemas.microsoft.com/office/drawing/2014/main" id="{D05D0ACD-E211-43A3-ABC2-E9542FA056DF}"/>
               </a:ext>
             </a:extLst>
           </p:cNvPr>
@@ -2337,7 +2337,7 @@
           <p:cNvPr id="2" name="Section title">
             <a:extLst xmlns:a="http://schemas.openxmlformats.org/drawingml/2006/main">
               <a:ext uri="{FF2B5EF4-FFF2-40B4-BE49-F238E27FC236}">
-                <a16:creationId xmlns:a16="http://schemas.microsoft.com/office/drawing/2014/main" id="{C9EFEFE7-F76B-431D-BAF9-E0D8AC7D91A5}"/>
+                <a16:creationId xmlns:a16="http://schemas.microsoft.com/office/drawing/2014/main" id="{3F488EBB-98C8-4228-BAE5-C22C0111A12A}"/>
               </a:ext>
             </a:extLst>
           </p:cNvPr>
@@ -2583,7 +2583,7 @@
           <p:cNvPr id="3" name="Title">
             <a:extLst xmlns:a="http://schemas.openxmlformats.org/drawingml/2006/main">
               <a:ext uri="{FF2B5EF4-FFF2-40B4-BE49-F238E27FC236}">
-                <a16:creationId xmlns:a16="http://schemas.microsoft.com/office/drawing/2014/main" id="{044E0FCD-764A-4C86-A1B8-39487E2D165F}"/>
+                <a16:creationId xmlns:a16="http://schemas.microsoft.com/office/drawing/2014/main" id="{BD4E175D-5311-4404-9752-C37B959BA1CC}"/>
               </a:ext>
             </a:extLst>
           </p:cNvPr>
@@ -2812,7 +2812,7 @@
           <p:cNvPr id="2" name="Body">
             <a:extLst xmlns:a="http://schemas.openxmlformats.org/drawingml/2006/main">
               <a:ext uri="{FF2B5EF4-FFF2-40B4-BE49-F238E27FC236}">
-                <a16:creationId xmlns:a16="http://schemas.microsoft.com/office/drawing/2014/main" id="{F43E20B6-B4AC-4325-A403-C717C1B88907}"/>
+                <a16:creationId xmlns:a16="http://schemas.microsoft.com/office/drawing/2014/main" id="{9D2598A3-AB05-45BB-AAFF-1B4E519A698C}"/>
               </a:ext>
             </a:extLst>
           </p:cNvPr>
@@ -3058,7 +3058,7 @@
           <p:cNvPr id="4" name="Title">
             <a:extLst xmlns:a="http://schemas.openxmlformats.org/drawingml/2006/main">
               <a:ext uri="{FF2B5EF4-FFF2-40B4-BE49-F238E27FC236}">
-                <a16:creationId xmlns:a16="http://schemas.microsoft.com/office/drawing/2014/main" id="{F723B87C-88ED-41FA-B34D-B78468EA2557}"/>
+                <a16:creationId xmlns:a16="http://schemas.microsoft.com/office/drawing/2014/main" id="{230495B7-694B-4C77-8372-627C28D05B51}"/>
               </a:ext>
             </a:extLst>
           </p:cNvPr>
@@ -3287,7 +3287,7 @@
           <p:cNvPr id="2" name="Left column">
             <a:extLst xmlns:a="http://schemas.openxmlformats.org/drawingml/2006/main">
               <a:ext uri="{FF2B5EF4-FFF2-40B4-BE49-F238E27FC236}">
-                <a16:creationId xmlns:a16="http://schemas.microsoft.com/office/drawing/2014/main" id="{111E49A8-275A-4032-8C96-824C28C5015F}"/>
+                <a16:creationId xmlns:a16="http://schemas.microsoft.com/office/drawing/2014/main" id="{4A39E6F3-AF8B-4D92-BAEB-CD8327871CD6}"/>
               </a:ext>
             </a:extLst>
           </p:cNvPr>
@@ -3516,7 +3516,7 @@
           <p:cNvPr id="3" name="Right column">
             <a:extLst xmlns:a="http://schemas.openxmlformats.org/drawingml/2006/main">
               <a:ext uri="{FF2B5EF4-FFF2-40B4-BE49-F238E27FC236}">
-                <a16:creationId xmlns:a16="http://schemas.microsoft.com/office/drawing/2014/main" id="{19104270-D40C-4456-A9C0-EF6D4FC1D6AE}"/>
+                <a16:creationId xmlns:a16="http://schemas.microsoft.com/office/drawing/2014/main" id="{9CBFF9DA-BC24-46C7-8577-DB772F7D9853}"/>
               </a:ext>
             </a:extLst>
           </p:cNvPr>
@@ -3762,7 +3762,7 @@
           <p:cNvPr id="3" name="Title">
             <a:extLst xmlns:a="http://schemas.openxmlformats.org/drawingml/2006/main">
               <a:ext uri="{FF2B5EF4-FFF2-40B4-BE49-F238E27FC236}">
-                <a16:creationId xmlns:a16="http://schemas.microsoft.com/office/drawing/2014/main" id="{4D8E9234-7903-427E-A721-2E8BE9050D81}"/>
+                <a16:creationId xmlns:a16="http://schemas.microsoft.com/office/drawing/2014/main" id="{71EE0351-D177-4E9F-B49E-6F17E3AC46CC}"/>
               </a:ext>
             </a:extLst>
           </p:cNvPr>
@@ -3991,7 +3991,7 @@
           <p:cNvPr id="2" name="Left column">
             <a:extLst xmlns:a="http://schemas.openxmlformats.org/drawingml/2006/main">
               <a:ext uri="{FF2B5EF4-FFF2-40B4-BE49-F238E27FC236}">
-                <a16:creationId xmlns:a16="http://schemas.microsoft.com/office/drawing/2014/main" id="{64FC12A3-A141-485C-A7DD-34B4084F22ED}"/>
+                <a16:creationId xmlns:a16="http://schemas.microsoft.com/office/drawing/2014/main" id="{BD8BFE7E-9CC7-41D0-939A-3640EAB43952}"/>
               </a:ext>
             </a:extLst>
           </p:cNvPr>
@@ -4258,12 +4258,12 @@
   </p:cSld>
   <p:clrMap bg1="lt1" tx1="dk1" bg2="lt2" tx2="dk2" accent1="accent1" accent2="accent2" accent3="accent3" accent4="accent4" accent5="accent5" accent6="accent6" hlink="hlink" folHlink="folHlink"/>
   <p:sldLayoutIdLst>
-    <p:sldLayoutId xmlns:r="http://schemas.openxmlformats.org/officeDocument/2006/relationships" id="2147483649" r:id="Rb195eb865b184a55"/>
-    <p:sldLayoutId xmlns:r="http://schemas.openxmlformats.org/officeDocument/2006/relationships" id="2147483650" r:id="Rde171a2522634bbd"/>
-    <p:sldLayoutId xmlns:r="http://schemas.openxmlformats.org/officeDocument/2006/relationships" id="2147483651" r:id="Rf3944d2dc74247ec"/>
-    <p:sldLayoutId xmlns:r="http://schemas.openxmlformats.org/officeDocument/2006/relationships" id="2147483652" r:id="Rb4679f3a993244af"/>
-    <p:sldLayoutId xmlns:r="http://schemas.openxmlformats.org/officeDocument/2006/relationships" id="2147483653" r:id="R0af6b452b9414a1f"/>
-    <p:sldLayoutId xmlns:r="http://schemas.openxmlformats.org/officeDocument/2006/relationships" id="2147483654" r:id="R44a1a2ecb7fb4ac9"/>
+    <p:sldLayoutId xmlns:r="http://schemas.openxmlformats.org/officeDocument/2006/relationships" id="2147483649" r:id="R33bec5f0cc4343cd"/>
+    <p:sldLayoutId xmlns:r="http://schemas.openxmlformats.org/officeDocument/2006/relationships" id="2147483650" r:id="R5486869e699446c9"/>
+    <p:sldLayoutId xmlns:r="http://schemas.openxmlformats.org/officeDocument/2006/relationships" id="2147483651" r:id="Rb8bd293f8ac44f93"/>
+    <p:sldLayoutId xmlns:r="http://schemas.openxmlformats.org/officeDocument/2006/relationships" id="2147483652" r:id="R3611584d22244f80"/>
+    <p:sldLayoutId xmlns:r="http://schemas.openxmlformats.org/officeDocument/2006/relationships" id="2147483653" r:id="R6ad9c7a75fc14f16"/>
+    <p:sldLayoutId xmlns:r="http://schemas.openxmlformats.org/officeDocument/2006/relationships" id="2147483654" r:id="R0c5386029a824baf"/>
   </p:sldLayoutIdLst>
   <p:txStyles>
     <p:titleStyle>
@@ -4814,7 +4814,7 @@
           <p:cNvPr id="7" name="">
             <a:extLst xmlns:a="http://schemas.openxmlformats.org/drawingml/2006/main">
               <a:ext uri="{FF2B5EF4-FFF2-40B4-BE49-F238E27FC236}">
-                <a16:creationId xmlns:a16="http://schemas.microsoft.com/office/drawing/2014/main" id="{D81C0469-AD99-457D-9EE0-EB7C7077C2CF}"/>
+                <a16:creationId xmlns:a16="http://schemas.microsoft.com/office/drawing/2014/main" id="{BB5E20A6-DE54-465A-BB8E-377EDA87CED2}"/>
               </a:ext>
             </a:extLst>
           </p:cNvPr>
@@ -4954,7 +4954,7 @@
           <p:cNvPr id="2" name="01">
             <a:extLst xmlns:a="http://schemas.openxmlformats.org/drawingml/2006/main">
               <a:ext uri="{FF2B5EF4-FFF2-40B4-BE49-F238E27FC236}">
-                <a16:creationId xmlns:a16="http://schemas.microsoft.com/office/drawing/2014/main" id="{24242900-1137-4043-9D29-34124124A5F3}"/>
+                <a16:creationId xmlns:a16="http://schemas.microsoft.com/office/drawing/2014/main" id="{E50B0C3C-5413-4B51-BB88-97743557FAC6}"/>
               </a:ext>
             </a:extLst>
           </p:cNvPr>
@@ -5112,7 +5112,7 @@
           <p:cNvPr id="3" name="Cisco 7945G">
             <a:extLst xmlns:a="http://schemas.openxmlformats.org/drawingml/2006/main">
               <a:ext uri="{FF2B5EF4-FFF2-40B4-BE49-F238E27FC236}">
-                <a16:creationId xmlns:a16="http://schemas.microsoft.com/office/drawing/2014/main" id="{034F0DE2-0C41-47C3-9C10-095D39666884}"/>
+                <a16:creationId xmlns:a16="http://schemas.microsoft.com/office/drawing/2014/main" id="{EFF3AAEF-92B6-4CAB-9FB5-F3A874F9E167}"/>
               </a:ext>
             </a:extLst>
           </p:cNvPr>
@@ -5270,7 +5270,7 @@
           <p:cNvPr id="4" name="Home telephony">
             <a:extLst xmlns:a="http://schemas.openxmlformats.org/drawingml/2006/main">
               <a:ext uri="{FF2B5EF4-FFF2-40B4-BE49-F238E27FC236}">
-                <a16:creationId xmlns:a16="http://schemas.microsoft.com/office/drawing/2014/main" id="{80EBAE96-649A-41FA-9E3A-CA18A7C48A99}"/>
+                <a16:creationId xmlns:a16="http://schemas.microsoft.com/office/drawing/2014/main" id="{B3BCE3E8-4C83-40BB-8BDA-95256F7AD5AE}"/>
               </a:ext>
             </a:extLst>
           </p:cNvPr>
@@ -5428,7 +5428,7 @@
           <p:cNvPr id="5" name="Asterisk in k3s + Home Assistant">
             <a:extLst xmlns:a="http://schemas.openxmlformats.org/drawingml/2006/main">
               <a:ext uri="{FF2B5EF4-FFF2-40B4-BE49-F238E27FC236}">
-                <a16:creationId xmlns:a16="http://schemas.microsoft.com/office/drawing/2014/main" id="{15C96055-C072-4C28-B55B-F630CE3750EC}"/>
+                <a16:creationId xmlns:a16="http://schemas.microsoft.com/office/drawing/2014/main" id="{F7662E04-DBE8-49AE-BBE1-6AF4B810BFAF}"/>
               </a:ext>
             </a:extLst>
           </p:cNvPr>
@@ -5586,7 +5586,7 @@
           <p:cNvPr id="6" name="Two SIP lines, color display and native PoE">
             <a:extLst xmlns:a="http://schemas.openxmlformats.org/drawingml/2006/main">
               <a:ext uri="{FF2B5EF4-FFF2-40B4-BE49-F238E27FC236}">
-                <a16:creationId xmlns:a16="http://schemas.microsoft.com/office/drawing/2014/main" id="{7244592F-CE5E-4882-9C01-BA45B25E7233}"/>
+                <a16:creationId xmlns:a16="http://schemas.microsoft.com/office/drawing/2014/main" id="{9DB5FC79-EC5C-4C14-8095-7B78F6997997}"/>
               </a:ext>
             </a:extLst>
           </p:cNvPr>
@@ -5742,7 +5742,7 @@
     </p:spTree>
     <p:extLst>
       <p:ext uri="{BB962C8B-B14F-4D97-AF65-F5344CB8AC3E}">
-        <p14:creationId xmlns:p14="http://schemas.microsoft.com/office/powerpoint/2010/main" val="2011763152"/>
+        <p14:creationId xmlns:p14="http://schemas.microsoft.com/office/powerpoint/2010/main" val="631718349"/>
       </p:ext>
     </p:extLst>
   </p:cSld>
@@ -5773,7 +5773,7 @@
           <p:cNvPr id="8" name="">
             <a:extLst xmlns:a="http://schemas.openxmlformats.org/drawingml/2006/main">
               <a:ext uri="{FF2B5EF4-FFF2-40B4-BE49-F238E27FC236}">
-                <a16:creationId xmlns:a16="http://schemas.microsoft.com/office/drawing/2014/main" id="{C9E72EFB-5E29-40BF-A384-1FAFF304F0B4}"/>
+                <a16:creationId xmlns:a16="http://schemas.microsoft.com/office/drawing/2014/main" id="{8ADB44BE-6D64-4308-8CA5-5C4DFEB543F2}"/>
               </a:ext>
             </a:extLst>
           </p:cNvPr>
@@ -5805,7 +5805,7 @@
           <p:cNvPr id="6" name="">
             <a:extLst xmlns:a="http://schemas.openxmlformats.org/drawingml/2006/main">
               <a:ext uri="{FF2B5EF4-FFF2-40B4-BE49-F238E27FC236}">
-                <a16:creationId xmlns:a16="http://schemas.microsoft.com/office/drawing/2014/main" id="{14F90424-FDBA-44EF-9D13-EE99D8011691}"/>
+                <a16:creationId xmlns:a16="http://schemas.microsoft.com/office/drawing/2014/main" id="{AE0C7104-9444-4033-9F1A-632FAEEF7DD7}"/>
               </a:ext>
             </a:extLst>
           </p:cNvPr>
@@ -5837,7 +5837,7 @@
           <p:cNvPr id="12" name="630: voice assistant on the phone">
             <a:extLst xmlns:a="http://schemas.openxmlformats.org/drawingml/2006/main">
               <a:ext uri="{FF2B5EF4-FFF2-40B4-BE49-F238E27FC236}">
-                <a16:creationId xmlns:a16="http://schemas.microsoft.com/office/drawing/2014/main" id="{02EFB659-E397-49E0-9B0E-FB452F6B8819}"/>
+                <a16:creationId xmlns:a16="http://schemas.microsoft.com/office/drawing/2014/main" id="{AEC9B0ED-EED8-48DC-BE47-A578ADC52387}"/>
               </a:ext>
             </a:extLst>
           </p:cNvPr>
@@ -5995,7 +5995,7 @@
           <p:cNvPr id="2" name="10">
             <a:extLst xmlns:a="http://schemas.openxmlformats.org/drawingml/2006/main">
               <a:ext uri="{FF2B5EF4-FFF2-40B4-BE49-F238E27FC236}">
-                <a16:creationId xmlns:a16="http://schemas.microsoft.com/office/drawing/2014/main" id="{BE078BB7-A169-424C-8D43-F0CA4D121C72}"/>
+                <a16:creationId xmlns:a16="http://schemas.microsoft.com/office/drawing/2014/main" id="{41839F6C-BE86-49CD-981B-5266EB858CD5}"/>
               </a:ext>
             </a:extLst>
           </p:cNvPr>
@@ -6153,7 +6153,7 @@
           <p:cNvPr id="3" name="cisco">
             <a:extLst xmlns:a="http://schemas.openxmlformats.org/drawingml/2006/main">
               <a:ext uri="{FF2B5EF4-FFF2-40B4-BE49-F238E27FC236}">
-                <a16:creationId xmlns:a16="http://schemas.microsoft.com/office/drawing/2014/main" id="{42F917B8-1D04-4EAF-95B6-6295C993547B}"/>
+                <a16:creationId xmlns:a16="http://schemas.microsoft.com/office/drawing/2014/main" id="{C605C14E-EC96-4F2A-A0E1-14850E109389}"/>
               </a:ext>
             </a:extLst>
           </p:cNvPr>
@@ -6363,7 +6363,7 @@
           <p:cNvPr id="4" name="codec">
             <a:extLst xmlns:a="http://schemas.openxmlformats.org/drawingml/2006/main">
               <a:ext uri="{FF2B5EF4-FFF2-40B4-BE49-F238E27FC236}">
-                <a16:creationId xmlns:a16="http://schemas.microsoft.com/office/drawing/2014/main" id="{2A3107F3-2A1B-450C-BD42-2583565ADAE3}"/>
+                <a16:creationId xmlns:a16="http://schemas.microsoft.com/office/drawing/2014/main" id="{8FBFC649-707F-4995-AFAE-A4BC54588B71}"/>
               </a:ext>
             </a:extLst>
           </p:cNvPr>
@@ -6573,7 +6573,7 @@
           <p:cNvPr id="5" name="assist">
             <a:extLst xmlns:a="http://schemas.openxmlformats.org/drawingml/2006/main">
               <a:ext uri="{FF2B5EF4-FFF2-40B4-BE49-F238E27FC236}">
-                <a16:creationId xmlns:a16="http://schemas.microsoft.com/office/drawing/2014/main" id="{C399CD51-DA35-419B-B990-378F8EBEF14C}"/>
+                <a16:creationId xmlns:a16="http://schemas.microsoft.com/office/drawing/2014/main" id="{E8F9AAD9-4690-47F2-A9AC-F251C1FD592D}"/>
               </a:ext>
             </a:extLst>
           </p:cNvPr>
@@ -6783,7 +6783,7 @@
           <p:cNvPr id="7" name="SIP TCP&#10;RTP">
             <a:extLst xmlns:a="http://schemas.openxmlformats.org/drawingml/2006/main">
               <a:ext uri="{FF2B5EF4-FFF2-40B4-BE49-F238E27FC236}">
-                <a16:creationId xmlns:a16="http://schemas.microsoft.com/office/drawing/2014/main" id="{1A27C7F0-0B9B-43B2-9794-47490842E51D}"/>
+                <a16:creationId xmlns:a16="http://schemas.microsoft.com/office/drawing/2014/main" id="{470DB8BF-F0B1-4E8D-AB3D-0369EE7E23C8}"/>
               </a:ext>
             </a:extLst>
           </p:cNvPr>
@@ -6964,7 +6964,7 @@
           <p:cNvPr id="9" name="SIP UDP&#10;RTP">
             <a:extLst xmlns:a="http://schemas.openxmlformats.org/drawingml/2006/main">
               <a:ext uri="{FF2B5EF4-FFF2-40B4-BE49-F238E27FC236}">
-                <a16:creationId xmlns:a16="http://schemas.microsoft.com/office/drawing/2014/main" id="{2E9CAF76-D9A8-4789-B48B-3CFEA8CB312D}"/>
+                <a16:creationId xmlns:a16="http://schemas.microsoft.com/office/drawing/2014/main" id="{39FDE56A-2EB3-4EB8-91FC-6FAA4927FF25}"/>
               </a:ext>
             </a:extLst>
           </p:cNvPr>
@@ -7145,7 +7145,7 @@
           <p:cNvPr id="10" name="First call: enable Allow calls and select a pipeline in HA.&#10;Then ">
             <a:extLst xmlns:a="http://schemas.openxmlformats.org/drawingml/2006/main">
               <a:ext uri="{FF2B5EF4-FFF2-40B4-BE49-F238E27FC236}">
-                <a16:creationId xmlns:a16="http://schemas.microsoft.com/office/drawing/2014/main" id="{D65C11D8-D7E6-4AB7-97B2-B2CBBCFC5615}"/>
+                <a16:creationId xmlns:a16="http://schemas.microsoft.com/office/drawing/2014/main" id="{1E68F88D-F993-4526-B7C6-C2504CD079A1}"/>
               </a:ext>
             </a:extLst>
           </p:cNvPr>
@@ -7326,7 +7326,7 @@
           <p:cNvPr id="11" name="SIP From retains the phone extension. HA uses dynamic UDP ports f">
             <a:extLst xmlns:a="http://schemas.openxmlformats.org/drawingml/2006/main">
               <a:ext uri="{FF2B5EF4-FFF2-40B4-BE49-F238E27FC236}">
-                <a16:creationId xmlns:a16="http://schemas.microsoft.com/office/drawing/2014/main" id="{348A4007-6E56-45A0-9A79-092424D72C66}"/>
+                <a16:creationId xmlns:a16="http://schemas.microsoft.com/office/drawing/2014/main" id="{E0A02A38-14AF-4E53-9865-31FB0AA65C33}"/>
               </a:ext>
             </a:extLst>
           </p:cNvPr>
@@ -7505,7 +7505,7 @@
     </p:spTree>
     <p:extLst>
       <p:ext uri="{BB962C8B-B14F-4D97-AF65-F5344CB8AC3E}">
-        <p14:creationId xmlns:p14="http://schemas.microsoft.com/office/powerpoint/2010/main" val="731273391"/>
+        <p14:creationId xmlns:p14="http://schemas.microsoft.com/office/powerpoint/2010/main" val="11594150"/>
       </p:ext>
     </p:extLst>
   </p:cSld>
@@ -7536,7 +7536,7 @@
           <p:cNvPr id="15" name="Deployment and commissioning">
             <a:extLst xmlns:a="http://schemas.openxmlformats.org/drawingml/2006/main">
               <a:ext uri="{FF2B5EF4-FFF2-40B4-BE49-F238E27FC236}">
-                <a16:creationId xmlns:a16="http://schemas.microsoft.com/office/drawing/2014/main" id="{1DF64D8C-92AA-45AD-88B7-3681B71924A6}"/>
+                <a16:creationId xmlns:a16="http://schemas.microsoft.com/office/drawing/2014/main" id="{C9BC0E38-B5E2-409A-8977-9793A8F0C676}"/>
               </a:ext>
             </a:extLst>
           </p:cNvPr>
@@ -7694,7 +7694,7 @@
           <p:cNvPr id="2" name="11">
             <a:extLst xmlns:a="http://schemas.openxmlformats.org/drawingml/2006/main">
               <a:ext uri="{FF2B5EF4-FFF2-40B4-BE49-F238E27FC236}">
-                <a16:creationId xmlns:a16="http://schemas.microsoft.com/office/drawing/2014/main" id="{C0D3CF69-BCBC-499E-A01D-746263BFB3D7}"/>
+                <a16:creationId xmlns:a16="http://schemas.microsoft.com/office/drawing/2014/main" id="{E6A7E217-0B66-41CC-ADFE-83DBE908B2F2}"/>
               </a:ext>
             </a:extLst>
           </p:cNvPr>
@@ -7852,7 +7852,7 @@
           <p:cNvPr id="3" name="01">
             <a:extLst xmlns:a="http://schemas.openxmlformats.org/drawingml/2006/main">
               <a:ext uri="{FF2B5EF4-FFF2-40B4-BE49-F238E27FC236}">
-                <a16:creationId xmlns:a16="http://schemas.microsoft.com/office/drawing/2014/main" id="{DA368D37-A51D-4775-B035-E252BBCDF52C}"/>
+                <a16:creationId xmlns:a16="http://schemas.microsoft.com/office/drawing/2014/main" id="{10A244A6-2798-4CC6-A8FE-57AE97BD1B55}"/>
               </a:ext>
             </a:extLst>
           </p:cNvPr>
@@ -8010,7 +8010,7 @@
           <p:cNvPr id="4" name="Server bootstrap">
             <a:extLst xmlns:a="http://schemas.openxmlformats.org/drawingml/2006/main">
               <a:ext uri="{FF2B5EF4-FFF2-40B4-BE49-F238E27FC236}">
-                <a16:creationId xmlns:a16="http://schemas.microsoft.com/office/drawing/2014/main" id="{FC445BC5-0C0F-44BB-97A1-57C8A6A6BA45}"/>
+                <a16:creationId xmlns:a16="http://schemas.microsoft.com/office/drawing/2014/main" id="{63BAED3C-6850-4691-A8DE-6B9EF29CD7FC}"/>
               </a:ext>
             </a:extLst>
           </p:cNvPr>
@@ -8168,7 +8168,7 @@
           <p:cNvPr id="5" name="Images, static IP, firewall, Asterisk and Opus">
             <a:extLst xmlns:a="http://schemas.openxmlformats.org/drawingml/2006/main">
               <a:ext uri="{FF2B5EF4-FFF2-40B4-BE49-F238E27FC236}">
-                <a16:creationId xmlns:a16="http://schemas.microsoft.com/office/drawing/2014/main" id="{EE4BAF10-8468-44CB-892E-619F692B4D59}"/>
+                <a16:creationId xmlns:a16="http://schemas.microsoft.com/office/drawing/2014/main" id="{BFDAB3B1-9E97-4CF5-9CF1-B0D693DE7CB2}"/>
               </a:ext>
             </a:extLst>
           </p:cNvPr>
@@ -8326,7 +8326,7 @@
           <p:cNvPr id="6" name="02">
             <a:extLst xmlns:a="http://schemas.openxmlformats.org/drawingml/2006/main">
               <a:ext uri="{FF2B5EF4-FFF2-40B4-BE49-F238E27FC236}">
-                <a16:creationId xmlns:a16="http://schemas.microsoft.com/office/drawing/2014/main" id="{5D3AF0D3-928F-416A-8DF8-A090908B3164}"/>
+                <a16:creationId xmlns:a16="http://schemas.microsoft.com/office/drawing/2014/main" id="{2D3455E1-B692-4416-A8C4-49060D2885E3}"/>
               </a:ext>
             </a:extLst>
           </p:cNvPr>
@@ -8484,7 +8484,7 @@
           <p:cNvPr id="7" name="Verified pilot phone">
             <a:extLst xmlns:a="http://schemas.openxmlformats.org/drawingml/2006/main">
               <a:ext uri="{FF2B5EF4-FFF2-40B4-BE49-F238E27FC236}">
-                <a16:creationId xmlns:a16="http://schemas.microsoft.com/office/drawing/2014/main" id="{ACA92AFC-A9EA-42D1-A741-E008B0ADD55C}"/>
+                <a16:creationId xmlns:a16="http://schemas.microsoft.com/office/drawing/2014/main" id="{414DEA84-39BC-469A-BB7B-76FEF56194E4}"/>
               </a:ext>
             </a:extLst>
           </p:cNvPr>
@@ -8642,7 +8642,7 @@
           <p:cNvPr id="8" name="PID / HW / Load / MAC, SIP profile, temporary TFTP">
             <a:extLst xmlns:a="http://schemas.openxmlformats.org/drawingml/2006/main">
               <a:ext uri="{FF2B5EF4-FFF2-40B4-BE49-F238E27FC236}">
-                <a16:creationId xmlns:a16="http://schemas.microsoft.com/office/drawing/2014/main" id="{81B86B97-570A-438F-BF16-D68A075734D4}"/>
+                <a16:creationId xmlns:a16="http://schemas.microsoft.com/office/drawing/2014/main" id="{D3182C5A-C890-4225-8F5B-3C0BB2902982}"/>
               </a:ext>
             </a:extLst>
           </p:cNvPr>
@@ -8800,7 +8800,7 @@
           <p:cNvPr id="9" name="03">
             <a:extLst xmlns:a="http://schemas.openxmlformats.org/drawingml/2006/main">
               <a:ext uri="{FF2B5EF4-FFF2-40B4-BE49-F238E27FC236}">
-                <a16:creationId xmlns:a16="http://schemas.microsoft.com/office/drawing/2014/main" id="{123F9AC1-B1C5-4B56-A480-A1669EFF9480}"/>
+                <a16:creationId xmlns:a16="http://schemas.microsoft.com/office/drawing/2014/main" id="{DE984E86-2133-4028-B0E1-880F1C737135}"/>
               </a:ext>
             </a:extLst>
           </p:cNvPr>
@@ -8958,7 +8958,7 @@
           <p:cNvPr id="10" name="Home Assistant setup">
             <a:extLst xmlns:a="http://schemas.openxmlformats.org/drawingml/2006/main">
               <a:ext uri="{FF2B5EF4-FFF2-40B4-BE49-F238E27FC236}">
-                <a16:creationId xmlns:a16="http://schemas.microsoft.com/office/drawing/2014/main" id="{FAE4DB09-7D46-4568-820B-712104D66182}"/>
+                <a16:creationId xmlns:a16="http://schemas.microsoft.com/office/drawing/2014/main" id="{5FCCCD68-EDBD-4E86-9CDC-F19CF3ECF5B1}"/>
               </a:ext>
             </a:extLst>
           </p:cNvPr>
@@ -9116,7 +9116,7 @@
           <p:cNvPr id="11" name="AMI /32, secret, actual entity IDs and VoIP pipeline">
             <a:extLst xmlns:a="http://schemas.openxmlformats.org/drawingml/2006/main">
               <a:ext uri="{FF2B5EF4-FFF2-40B4-BE49-F238E27FC236}">
-                <a16:creationId xmlns:a16="http://schemas.microsoft.com/office/drawing/2014/main" id="{18C6CB8E-5B7C-47DC-9531-E7A100DAE8EF}"/>
+                <a16:creationId xmlns:a16="http://schemas.microsoft.com/office/drawing/2014/main" id="{87F0D3FA-CE1F-4D9D-833D-AA2D201163CE}"/>
               </a:ext>
             </a:extLst>
           </p:cNvPr>
@@ -9274,7 +9274,7 @@
           <p:cNvPr id="12" name="04">
             <a:extLst xmlns:a="http://schemas.openxmlformats.org/drawingml/2006/main">
               <a:ext uri="{FF2B5EF4-FFF2-40B4-BE49-F238E27FC236}">
-                <a16:creationId xmlns:a16="http://schemas.microsoft.com/office/drawing/2014/main" id="{CDE2475C-6868-4C87-9F17-0DEAE8B85C9F}"/>
+                <a16:creationId xmlns:a16="http://schemas.microsoft.com/office/drawing/2014/main" id="{4503E7FE-01D3-4E7D-8514-F59EC9E8F7CA}"/>
               </a:ext>
             </a:extLst>
           </p:cNvPr>
@@ -9432,7 +9432,7 @@
           <p:cNvPr id="13" name="Acceptance and rollout">
             <a:extLst xmlns:a="http://schemas.openxmlformats.org/drawingml/2006/main">
               <a:ext uri="{FF2B5EF4-FFF2-40B4-BE49-F238E27FC236}">
-                <a16:creationId xmlns:a16="http://schemas.microsoft.com/office/drawing/2014/main" id="{2E3C4FB1-CE76-4C8E-9784-29D0CF1ECB5D}"/>
+                <a16:creationId xmlns:a16="http://schemas.microsoft.com/office/drawing/2014/main" id="{1C615C94-6AC1-46CD-A9E5-EF2861064357}"/>
               </a:ext>
             </a:extLst>
           </p:cNvPr>
@@ -9590,7 +9590,7 @@
           <p:cNvPr id="14" name="Two phones, a call to 630, then the remaining phones">
             <a:extLst xmlns:a="http://schemas.openxmlformats.org/drawingml/2006/main">
               <a:ext uri="{FF2B5EF4-FFF2-40B4-BE49-F238E27FC236}">
-                <a16:creationId xmlns:a16="http://schemas.microsoft.com/office/drawing/2014/main" id="{6DBBFD03-ED55-4BCC-B6C3-79B9D4DEB215}"/>
+                <a16:creationId xmlns:a16="http://schemas.microsoft.com/office/drawing/2014/main" id="{39EEA17B-AD1B-4B1B-ADCB-A7DD3A3483C9}"/>
               </a:ext>
             </a:extLst>
           </p:cNvPr>
@@ -9746,7 +9746,7 @@
     </p:spTree>
     <p:extLst>
       <p:ext uri="{BB962C8B-B14F-4D97-AF65-F5344CB8AC3E}">
-        <p14:creationId xmlns:p14="http://schemas.microsoft.com/office/powerpoint/2010/main" val="796105919"/>
+        <p14:creationId xmlns:p14="http://schemas.microsoft.com/office/powerpoint/2010/main" val="1642776518"/>
       </p:ext>
     </p:extLst>
   </p:cSld>
@@ -9777,7 +9777,7 @@
           <p:cNvPr id="10" name="Acceptance tests on real phones">
             <a:extLst xmlns:a="http://schemas.openxmlformats.org/drawingml/2006/main">
               <a:ext uri="{FF2B5EF4-FFF2-40B4-BE49-F238E27FC236}">
-                <a16:creationId xmlns:a16="http://schemas.microsoft.com/office/drawing/2014/main" id="{2EE78E0A-89DE-4459-AC9D-85FF820B2008}"/>
+                <a16:creationId xmlns:a16="http://schemas.microsoft.com/office/drawing/2014/main" id="{7B0B210B-BED8-4A91-AFBD-3D4826C9243C}"/>
               </a:ext>
             </a:extLst>
           </p:cNvPr>
@@ -9935,7 +9935,7 @@
           <p:cNvPr id="2" name="12">
             <a:extLst xmlns:a="http://schemas.openxmlformats.org/drawingml/2006/main">
               <a:ext uri="{FF2B5EF4-FFF2-40B4-BE49-F238E27FC236}">
-                <a16:creationId xmlns:a16="http://schemas.microsoft.com/office/drawing/2014/main" id="{1DDFD031-62B0-4A7C-8224-9156271EA10A}"/>
+                <a16:creationId xmlns:a16="http://schemas.microsoft.com/office/drawing/2014/main" id="{C93DB9C3-BC79-4984-9699-50D75248A8F0}"/>
               </a:ext>
             </a:extLst>
           </p:cNvPr>
@@ -10093,7 +10093,7 @@
           <p:cNvPr id="3" name="Telephony">
             <a:extLst xmlns:a="http://schemas.openxmlformats.org/drawingml/2006/main">
               <a:ext uri="{FF2B5EF4-FFF2-40B4-BE49-F238E27FC236}">
-                <a16:creationId xmlns:a16="http://schemas.microsoft.com/office/drawing/2014/main" id="{230406AF-666B-4986-ADDA-8511BC06EC61}"/>
+                <a16:creationId xmlns:a16="http://schemas.microsoft.com/office/drawing/2014/main" id="{B7F3E9ED-89C3-4314-818E-A9F4C1457339}"/>
               </a:ext>
             </a:extLst>
           </p:cNvPr>
@@ -10251,7 +10251,7 @@
           <p:cNvPr id="4" name="201 and 203: cross-phone audio, hold / transfer">
             <a:extLst xmlns:a="http://schemas.openxmlformats.org/drawingml/2006/main">
               <a:ext uri="{FF2B5EF4-FFF2-40B4-BE49-F238E27FC236}">
-                <a16:creationId xmlns:a16="http://schemas.microsoft.com/office/drawing/2014/main" id="{60E79FAB-9D53-46EF-B94E-20E20A9F58F5}"/>
+                <a16:creationId xmlns:a16="http://schemas.microsoft.com/office/drawing/2014/main" id="{A8FD8E7D-EBCD-4201-B662-8D17F46939EE}"/>
               </a:ext>
             </a:extLst>
           </p:cNvPr>
@@ -10409,7 +10409,7 @@
           <p:cNvPr id="5" name="Home Assistant">
             <a:extLst xmlns:a="http://schemas.openxmlformats.org/drawingml/2006/main">
               <a:ext uri="{FF2B5EF4-FFF2-40B4-BE49-F238E27FC236}">
-                <a16:creationId xmlns:a16="http://schemas.microsoft.com/office/drawing/2014/main" id="{715349AB-2350-485F-A6AF-6238DDAA623A}"/>
+                <a16:creationId xmlns:a16="http://schemas.microsoft.com/office/drawing/2014/main" id="{5AE3BE67-4500-4A08-9C0C-04ACBBFC1979}"/>
               </a:ext>
             </a:extLst>
           </p:cNvPr>
@@ -10567,7 +10567,7 @@
           <p:cNvPr id="6" name="States, Originate, Hangup on the correct Channel, DTMF">
             <a:extLst xmlns:a="http://schemas.openxmlformats.org/drawingml/2006/main">
               <a:ext uri="{FF2B5EF4-FFF2-40B4-BE49-F238E27FC236}">
-                <a16:creationId xmlns:a16="http://schemas.microsoft.com/office/drawing/2014/main" id="{06F2D24F-673D-4296-A404-FE85613E9C36}"/>
+                <a16:creationId xmlns:a16="http://schemas.microsoft.com/office/drawing/2014/main" id="{28445DA8-1464-45D6-90DB-CBFA27D71F08}"/>
               </a:ext>
             </a:extLst>
           </p:cNvPr>
@@ -10725,7 +10725,7 @@
           <p:cNvPr id="7" name="Assist 630">
             <a:extLst xmlns:a="http://schemas.openxmlformats.org/drawingml/2006/main">
               <a:ext uri="{FF2B5EF4-FFF2-40B4-BE49-F238E27FC236}">
-                <a16:creationId xmlns:a16="http://schemas.microsoft.com/office/drawing/2014/main" id="{A1B834F6-80C9-47BA-800E-A47AB5A4E3D5}"/>
+                <a16:creationId xmlns:a16="http://schemas.microsoft.com/office/drawing/2014/main" id="{D984E452-3B1C-41BD-849E-11E82B55615B}"/>
               </a:ext>
             </a:extLst>
           </p:cNvPr>
@@ -10883,7 +10883,7 @@
           <p:cNvPr id="8" name="Speech recognition, spoken reply and hangup">
             <a:extLst xmlns:a="http://schemas.openxmlformats.org/drawingml/2006/main">
               <a:ext uri="{FF2B5EF4-FFF2-40B4-BE49-F238E27FC236}">
-                <a16:creationId xmlns:a16="http://schemas.microsoft.com/office/drawing/2014/main" id="{36B9B9D0-06CD-42EE-B9D6-27AAC2F7DD9A}"/>
+                <a16:creationId xmlns:a16="http://schemas.microsoft.com/office/drawing/2014/main" id="{A5518DEA-6F26-4FF7-8D06-F4871B82FBDF}"/>
               </a:ext>
             </a:extLst>
           </p:cNvPr>
@@ -11041,7 +11041,7 @@
           <p:cNvPr id="9" name="Repeat after phone, PBX and HA restarts. Readiness does not verif">
             <a:extLst xmlns:a="http://schemas.openxmlformats.org/drawingml/2006/main">
               <a:ext uri="{FF2B5EF4-FFF2-40B4-BE49-F238E27FC236}">
-                <a16:creationId xmlns:a16="http://schemas.microsoft.com/office/drawing/2014/main" id="{C8A4BF42-8A54-4466-9290-70A937643DE5}"/>
+                <a16:creationId xmlns:a16="http://schemas.microsoft.com/office/drawing/2014/main" id="{B83BDDD4-8B38-4BB0-9575-83EB1337DDD8}"/>
               </a:ext>
             </a:extLst>
           </p:cNvPr>
@@ -11197,7 +11197,7 @@
     </p:spTree>
     <p:extLst>
       <p:ext uri="{BB962C8B-B14F-4D97-AF65-F5344CB8AC3E}">
-        <p14:creationId xmlns:p14="http://schemas.microsoft.com/office/powerpoint/2010/main" val="1865718998"/>
+        <p14:creationId xmlns:p14="http://schemas.microsoft.com/office/powerpoint/2010/main" val="587425156"/>
       </p:ext>
     </p:extLst>
   </p:cSld>
@@ -11228,7 +11228,7 @@
           <p:cNvPr id="8" name="Operations and recovery">
             <a:extLst xmlns:a="http://schemas.openxmlformats.org/drawingml/2006/main">
               <a:ext uri="{FF2B5EF4-FFF2-40B4-BE49-F238E27FC236}">
-                <a16:creationId xmlns:a16="http://schemas.microsoft.com/office/drawing/2014/main" id="{61983A07-2E5C-4E2E-9786-6A440E696334}"/>
+                <a16:creationId xmlns:a16="http://schemas.microsoft.com/office/drawing/2014/main" id="{0AC030EC-8DEB-4CE3-8FC1-8EBE6B05BB9D}"/>
               </a:ext>
             </a:extLst>
           </p:cNvPr>
@@ -11386,7 +11386,7 @@
           <p:cNvPr id="2" name="13">
             <a:extLst xmlns:a="http://schemas.openxmlformats.org/drawingml/2006/main">
               <a:ext uri="{FF2B5EF4-FFF2-40B4-BE49-F238E27FC236}">
-                <a16:creationId xmlns:a16="http://schemas.microsoft.com/office/drawing/2014/main" id="{EC34E619-93DF-42EB-9E3A-9EABF4258F52}"/>
+                <a16:creationId xmlns:a16="http://schemas.microsoft.com/office/drawing/2014/main" id="{199EBCAE-FB07-4DE6-87FD-C7B0AAD5E2FE}"/>
               </a:ext>
             </a:extLst>
           </p:cNvPr>
@@ -11544,7 +11544,7 @@
           <p:cNvPr id="3" name="Private backups outside Git">
             <a:extLst xmlns:a="http://schemas.openxmlformats.org/drawingml/2006/main">
               <a:ext uri="{FF2B5EF4-FFF2-40B4-BE49-F238E27FC236}">
-                <a16:creationId xmlns:a16="http://schemas.microsoft.com/office/drawing/2014/main" id="{0AC2F08E-B518-4C8C-B3B8-72764C2CFB47}"/>
+                <a16:creationId xmlns:a16="http://schemas.microsoft.com/office/drawing/2014/main" id="{C89A7E4F-2518-430B-98ED-893629929E51}"/>
               </a:ext>
             </a:extLst>
           </p:cNvPr>
@@ -11702,7 +11702,7 @@
           <p:cNvPr id="4" name="Inventory, SIP / AMI secrets and Asterisk data&#10;HA config / .stora">
             <a:extLst xmlns:a="http://schemas.openxmlformats.org/drawingml/2006/main">
               <a:ext uri="{FF2B5EF4-FFF2-40B4-BE49-F238E27FC236}">
-                <a16:creationId xmlns:a16="http://schemas.microsoft.com/office/drawing/2014/main" id="{BF9F9A88-9100-4139-B76E-6B5D3817A8F2}"/>
+                <a16:creationId xmlns:a16="http://schemas.microsoft.com/office/drawing/2014/main" id="{33037C33-D923-466D-AC50-976C2C5671D4}"/>
               </a:ext>
             </a:extLst>
           </p:cNvPr>
@@ -11883,7 +11883,7 @@
           <p:cNvPr id="5" name="One node is a single point of failure">
             <a:extLst xmlns:a="http://schemas.openxmlformats.org/drawingml/2006/main">
               <a:ext uri="{FF2B5EF4-FFF2-40B4-BE49-F238E27FC236}">
-                <a16:creationId xmlns:a16="http://schemas.microsoft.com/office/drawing/2014/main" id="{3793E5F8-ABBF-438A-963A-2C6C3A80BE1F}"/>
+                <a16:creationId xmlns:a16="http://schemas.microsoft.com/office/drawing/2014/main" id="{7F26D8D5-56EB-4DFD-9573-0400E457371F}"/>
               </a:ext>
             </a:extLst>
           </p:cNvPr>
@@ -12041,7 +12041,7 @@
           <p:cNvPr id="6" name="UPS for network equipment and the k3s node&#10;A recovery plan that p">
             <a:extLst xmlns:a="http://schemas.openxmlformats.org/drawingml/2006/main">
               <a:ext uri="{FF2B5EF4-FFF2-40B4-BE49-F238E27FC236}">
-                <a16:creationId xmlns:a16="http://schemas.microsoft.com/office/drawing/2014/main" id="{73C8DED1-2A6C-41DF-BB86-14BD06418759}"/>
+                <a16:creationId xmlns:a16="http://schemas.microsoft.com/office/drawing/2014/main" id="{0C9F6D44-5DAE-4037-BF65-779299E46085}"/>
               </a:ext>
             </a:extLst>
           </p:cNvPr>
@@ -12222,7 +12222,7 @@
           <p:cNvPr id="7" name="Exclude raw DTMF and connected-line data from Recorder. Review ex">
             <a:extLst xmlns:a="http://schemas.openxmlformats.org/drawingml/2006/main">
               <a:ext uri="{FF2B5EF4-FFF2-40B4-BE49-F238E27FC236}">
-                <a16:creationId xmlns:a16="http://schemas.microsoft.com/office/drawing/2014/main" id="{90455F3B-EB1B-45EA-B729-DA522351DEFE}"/>
+                <a16:creationId xmlns:a16="http://schemas.microsoft.com/office/drawing/2014/main" id="{9B776210-1008-4D12-A1A6-7DDD144802F5}"/>
               </a:ext>
             </a:extLst>
           </p:cNvPr>
@@ -12378,7 +12378,7 @@
     </p:spTree>
     <p:extLst>
       <p:ext uri="{BB962C8B-B14F-4D97-AF65-F5344CB8AC3E}">
-        <p14:creationId xmlns:p14="http://schemas.microsoft.com/office/powerpoint/2010/main" val="23234434"/>
+        <p14:creationId xmlns:p14="http://schemas.microsoft.com/office/powerpoint/2010/main" val="1234771222"/>
       </p:ext>
     </p:extLst>
   </p:cSld>
@@ -12409,7 +12409,7 @@
           <p:cNvPr id="8" name="Server readiness and phone acceptance">
             <a:extLst xmlns:a="http://schemas.openxmlformats.org/drawingml/2006/main">
               <a:ext uri="{FF2B5EF4-FFF2-40B4-BE49-F238E27FC236}">
-                <a16:creationId xmlns:a16="http://schemas.microsoft.com/office/drawing/2014/main" id="{EC4D07BC-E90F-4C2C-9D9D-78744AB720FD}"/>
+                <a16:creationId xmlns:a16="http://schemas.microsoft.com/office/drawing/2014/main" id="{1E4C3B8E-4334-4E24-B02E-F5B4954291A7}"/>
               </a:ext>
             </a:extLst>
           </p:cNvPr>
@@ -12567,7 +12567,7 @@
           <p:cNvPr id="2" name="14">
             <a:extLst xmlns:a="http://schemas.openxmlformats.org/drawingml/2006/main">
               <a:ext uri="{FF2B5EF4-FFF2-40B4-BE49-F238E27FC236}">
-                <a16:creationId xmlns:a16="http://schemas.microsoft.com/office/drawing/2014/main" id="{0440BC11-5CCC-4D68-ABF3-5A64C48D281E}"/>
+                <a16:creationId xmlns:a16="http://schemas.microsoft.com/office/drawing/2014/main" id="{08D1E2DB-4E50-4A60-8902-BED8306FDB21}"/>
               </a:ext>
             </a:extLst>
           </p:cNvPr>
@@ -12725,7 +12725,7 @@
           <p:cNvPr id="3" name="Server preparation can come first">
             <a:extLst xmlns:a="http://schemas.openxmlformats.org/drawingml/2006/main">
               <a:ext uri="{FF2B5EF4-FFF2-40B4-BE49-F238E27FC236}">
-                <a16:creationId xmlns:a16="http://schemas.microsoft.com/office/drawing/2014/main" id="{4E26929E-2BD1-473A-BA91-8130A3A9F469}"/>
+                <a16:creationId xmlns:a16="http://schemas.microsoft.com/office/drawing/2014/main" id="{46ADDE3C-8D8D-4A3E-BAAE-E5541AC2DB0F}"/>
               </a:ext>
             </a:extLst>
           </p:cNvPr>
@@ -12883,7 +12883,7 @@
           <p:cNvPr id="4" name="Images, configuration, AMI and Opus&#10;Tests verify the server compo">
             <a:extLst xmlns:a="http://schemas.openxmlformats.org/drawingml/2006/main">
               <a:ext uri="{FF2B5EF4-FFF2-40B4-BE49-F238E27FC236}">
-                <a16:creationId xmlns:a16="http://schemas.microsoft.com/office/drawing/2014/main" id="{4C62E49A-90FC-4402-801C-DF42B49955DE}"/>
+                <a16:creationId xmlns:a16="http://schemas.microsoft.com/office/drawing/2014/main" id="{BB2E98FF-08AD-48B8-8528-2234CBF5F567}"/>
               </a:ext>
             </a:extLst>
           </p:cNvPr>
@@ -13064,7 +13064,7 @@
           <p:cNvPr id="5" name="A pilot verifies the phone experience">
             <a:extLst xmlns:a="http://schemas.openxmlformats.org/drawingml/2006/main">
               <a:ext uri="{FF2B5EF4-FFF2-40B4-BE49-F238E27FC236}">
-                <a16:creationId xmlns:a16="http://schemas.microsoft.com/office/drawing/2014/main" id="{F6DC5F38-6086-4059-9B68-D30D7367EC60}"/>
+                <a16:creationId xmlns:a16="http://schemas.microsoft.com/office/drawing/2014/main" id="{79CA457D-9C3D-4ECC-AE1B-A0AE3E853C98}"/>
               </a:ext>
             </a:extLst>
           </p:cNvPr>
@@ -13222,7 +13222,7 @@
           <p:cNvPr id="6" name="Phone inventory, a two-party call and Assist&#10;Add the remaining ph">
             <a:extLst xmlns:a="http://schemas.openxmlformats.org/drawingml/2006/main">
               <a:ext uri="{FF2B5EF4-FFF2-40B4-BE49-F238E27FC236}">
-                <a16:creationId xmlns:a16="http://schemas.microsoft.com/office/drawing/2014/main" id="{AAF9A17B-9553-4E69-8B84-6505B1A52D61}"/>
+                <a16:creationId xmlns:a16="http://schemas.microsoft.com/office/drawing/2014/main" id="{F18389F7-70E7-40BF-8F09-0E738BB4D7F5}"/>
               </a:ext>
             </a:extLst>
           </p:cNvPr>
@@ -13403,7 +13403,7 @@
           <p:cNvPr id="7" name="Physical acceptance is a separate step. Keep the results in the p">
             <a:extLst xmlns:a="http://schemas.openxmlformats.org/drawingml/2006/main">
               <a:ext uri="{FF2B5EF4-FFF2-40B4-BE49-F238E27FC236}">
-                <a16:creationId xmlns:a16="http://schemas.microsoft.com/office/drawing/2014/main" id="{E9C24186-E0D5-4155-BA3F-ECF5FA78701C}"/>
+                <a16:creationId xmlns:a16="http://schemas.microsoft.com/office/drawing/2014/main" id="{4620321D-0B33-4A8F-A60B-E342BDD74F22}"/>
               </a:ext>
             </a:extLst>
           </p:cNvPr>
@@ -13559,7 +13559,7 @@
     </p:spTree>
     <p:extLst>
       <p:ext uri="{BB962C8B-B14F-4D97-AF65-F5344CB8AC3E}">
-        <p14:creationId xmlns:p14="http://schemas.microsoft.com/office/powerpoint/2010/main" val="1270079051"/>
+        <p14:creationId xmlns:p14="http://schemas.microsoft.com/office/powerpoint/2010/main" val="1132689489"/>
       </p:ext>
     </p:extLst>
   </p:cSld>
@@ -13590,7 +13590,7 @@
           <p:cNvPr id="26" name="Ten Cisco identities, twenty lines">
             <a:extLst xmlns:a="http://schemas.openxmlformats.org/drawingml/2006/main">
               <a:ext uri="{FF2B5EF4-FFF2-40B4-BE49-F238E27FC236}">
-                <a16:creationId xmlns:a16="http://schemas.microsoft.com/office/drawing/2014/main" id="{FA807565-EAE6-4E6D-9CAA-E583B1B599AF}"/>
+                <a16:creationId xmlns:a16="http://schemas.microsoft.com/office/drawing/2014/main" id="{5BB4ECCF-2C6E-4077-8008-812FB4246B55}"/>
               </a:ext>
             </a:extLst>
           </p:cNvPr>
@@ -13748,7 +13748,7 @@
           <p:cNvPr id="2" name="15">
             <a:extLst xmlns:a="http://schemas.openxmlformats.org/drawingml/2006/main">
               <a:ext uri="{FF2B5EF4-FFF2-40B4-BE49-F238E27FC236}">
-                <a16:creationId xmlns:a16="http://schemas.microsoft.com/office/drawing/2014/main" id="{2BFD7B27-BCB5-4E11-81C8-8C6E54D846FD}"/>
+                <a16:creationId xmlns:a16="http://schemas.microsoft.com/office/drawing/2014/main" id="{E5F0AB46-0010-4743-A144-013D6AFB6AC2}"/>
               </a:ext>
             </a:extLst>
           </p:cNvPr>
@@ -13906,7 +13906,7 @@
           <p:cNvPr id="3" name="PHONE 1">
             <a:extLst xmlns:a="http://schemas.openxmlformats.org/drawingml/2006/main">
               <a:ext uri="{FF2B5EF4-FFF2-40B4-BE49-F238E27FC236}">
-                <a16:creationId xmlns:a16="http://schemas.microsoft.com/office/drawing/2014/main" id="{65A4D88E-FDAB-4E19-A53A-C5715E6DF8D3}"/>
+                <a16:creationId xmlns:a16="http://schemas.microsoft.com/office/drawing/2014/main" id="{7CA74B6F-528E-4D64-A497-11729A3894D0}"/>
               </a:ext>
             </a:extLst>
           </p:cNvPr>
@@ -14064,7 +14064,7 @@
           <p:cNvPr id="4" name="201 / 202">
             <a:extLst xmlns:a="http://schemas.openxmlformats.org/drawingml/2006/main">
               <a:ext uri="{FF2B5EF4-FFF2-40B4-BE49-F238E27FC236}">
-                <a16:creationId xmlns:a16="http://schemas.microsoft.com/office/drawing/2014/main" id="{63AE5323-2B11-484E-AE45-894F4A5F4A0F}"/>
+                <a16:creationId xmlns:a16="http://schemas.microsoft.com/office/drawing/2014/main" id="{A11CC33A-8269-42E4-AC32-725C28A0E69F}"/>
               </a:ext>
             </a:extLst>
           </p:cNvPr>
@@ -14222,7 +14222,7 @@
           <p:cNvPr id="5" name="PHONE 2">
             <a:extLst xmlns:a="http://schemas.openxmlformats.org/drawingml/2006/main">
               <a:ext uri="{FF2B5EF4-FFF2-40B4-BE49-F238E27FC236}">
-                <a16:creationId xmlns:a16="http://schemas.microsoft.com/office/drawing/2014/main" id="{F3D9D387-2B18-4E5E-80B5-28459D4B3372}"/>
+                <a16:creationId xmlns:a16="http://schemas.microsoft.com/office/drawing/2014/main" id="{0EA936A1-341D-46D9-A4F9-661B817CC15A}"/>
               </a:ext>
             </a:extLst>
           </p:cNvPr>
@@ -14380,7 +14380,7 @@
           <p:cNvPr id="6" name="203 / 204">
             <a:extLst xmlns:a="http://schemas.openxmlformats.org/drawingml/2006/main">
               <a:ext uri="{FF2B5EF4-FFF2-40B4-BE49-F238E27FC236}">
-                <a16:creationId xmlns:a16="http://schemas.microsoft.com/office/drawing/2014/main" id="{7BACA42B-7490-48E0-9311-BFE59B9D0086}"/>
+                <a16:creationId xmlns:a16="http://schemas.microsoft.com/office/drawing/2014/main" id="{46CDD23B-DAD2-4BC7-BB95-F64FA89DEF41}"/>
               </a:ext>
             </a:extLst>
           </p:cNvPr>
@@ -14538,7 +14538,7 @@
           <p:cNvPr id="7" name="PHONE 3">
             <a:extLst xmlns:a="http://schemas.openxmlformats.org/drawingml/2006/main">
               <a:ext uri="{FF2B5EF4-FFF2-40B4-BE49-F238E27FC236}">
-                <a16:creationId xmlns:a16="http://schemas.microsoft.com/office/drawing/2014/main" id="{996D611C-569E-4A91-9312-03AA3C5A6A23}"/>
+                <a16:creationId xmlns:a16="http://schemas.microsoft.com/office/drawing/2014/main" id="{5E7594A2-B83B-40F4-9DE4-888AE9651910}"/>
               </a:ext>
             </a:extLst>
           </p:cNvPr>
@@ -14696,7 +14696,7 @@
           <p:cNvPr id="8" name="205 / 206">
             <a:extLst xmlns:a="http://schemas.openxmlformats.org/drawingml/2006/main">
               <a:ext uri="{FF2B5EF4-FFF2-40B4-BE49-F238E27FC236}">
-                <a16:creationId xmlns:a16="http://schemas.microsoft.com/office/drawing/2014/main" id="{1DAD76F8-9559-481F-AEEA-C87F37CB1A51}"/>
+                <a16:creationId xmlns:a16="http://schemas.microsoft.com/office/drawing/2014/main" id="{C94B378B-4159-45F7-9FB1-F07F953E50C0}"/>
               </a:ext>
             </a:extLst>
           </p:cNvPr>
@@ -14854,7 +14854,7 @@
           <p:cNvPr id="9" name="PHONE 4">
             <a:extLst xmlns:a="http://schemas.openxmlformats.org/drawingml/2006/main">
               <a:ext uri="{FF2B5EF4-FFF2-40B4-BE49-F238E27FC236}">
-                <a16:creationId xmlns:a16="http://schemas.microsoft.com/office/drawing/2014/main" id="{EA220445-A418-496B-ABAB-3E26F72985C3}"/>
+                <a16:creationId xmlns:a16="http://schemas.microsoft.com/office/drawing/2014/main" id="{FBE020A9-851E-489C-82F5-A801430C9E28}"/>
               </a:ext>
             </a:extLst>
           </p:cNvPr>
@@ -15012,7 +15012,7 @@
           <p:cNvPr id="10" name="207 / 208">
             <a:extLst xmlns:a="http://schemas.openxmlformats.org/drawingml/2006/main">
               <a:ext uri="{FF2B5EF4-FFF2-40B4-BE49-F238E27FC236}">
-                <a16:creationId xmlns:a16="http://schemas.microsoft.com/office/drawing/2014/main" id="{CDAC0B28-27FC-4BFA-AEC4-8F4DF6988F48}"/>
+                <a16:creationId xmlns:a16="http://schemas.microsoft.com/office/drawing/2014/main" id="{77C2E2C2-54F3-43C3-A131-60419C37C48A}"/>
               </a:ext>
             </a:extLst>
           </p:cNvPr>
@@ -15170,7 +15170,7 @@
           <p:cNvPr id="11" name="PHONE 5">
             <a:extLst xmlns:a="http://schemas.openxmlformats.org/drawingml/2006/main">
               <a:ext uri="{FF2B5EF4-FFF2-40B4-BE49-F238E27FC236}">
-                <a16:creationId xmlns:a16="http://schemas.microsoft.com/office/drawing/2014/main" id="{6FB2E825-CCE8-4774-9376-50C249DF59BE}"/>
+                <a16:creationId xmlns:a16="http://schemas.microsoft.com/office/drawing/2014/main" id="{54F4CB82-F5E5-48EE-A828-23CCC2F38A01}"/>
               </a:ext>
             </a:extLst>
           </p:cNvPr>
@@ -15328,7 +15328,7 @@
           <p:cNvPr id="12" name="210 / 211">
             <a:extLst xmlns:a="http://schemas.openxmlformats.org/drawingml/2006/main">
               <a:ext uri="{FF2B5EF4-FFF2-40B4-BE49-F238E27FC236}">
-                <a16:creationId xmlns:a16="http://schemas.microsoft.com/office/drawing/2014/main" id="{E87DB66B-4D26-4B8D-A513-BC74F0C03692}"/>
+                <a16:creationId xmlns:a16="http://schemas.microsoft.com/office/drawing/2014/main" id="{5530985C-3873-478A-B056-30122728F8AD}"/>
               </a:ext>
             </a:extLst>
           </p:cNvPr>
@@ -15486,7 +15486,7 @@
           <p:cNvPr id="13" name="PHONE 6">
             <a:extLst xmlns:a="http://schemas.openxmlformats.org/drawingml/2006/main">
               <a:ext uri="{FF2B5EF4-FFF2-40B4-BE49-F238E27FC236}">
-                <a16:creationId xmlns:a16="http://schemas.microsoft.com/office/drawing/2014/main" id="{C5DD0690-7EC8-4FED-9449-463C87606549}"/>
+                <a16:creationId xmlns:a16="http://schemas.microsoft.com/office/drawing/2014/main" id="{F74677E5-97E1-4ECF-A815-C5622FA593B8}"/>
               </a:ext>
             </a:extLst>
           </p:cNvPr>
@@ -15644,7 +15644,7 @@
           <p:cNvPr id="14" name="212 / 213">
             <a:extLst xmlns:a="http://schemas.openxmlformats.org/drawingml/2006/main">
               <a:ext uri="{FF2B5EF4-FFF2-40B4-BE49-F238E27FC236}">
-                <a16:creationId xmlns:a16="http://schemas.microsoft.com/office/drawing/2014/main" id="{734DE2E9-7DE5-478E-A7D6-3C5BAA7F9C3F}"/>
+                <a16:creationId xmlns:a16="http://schemas.microsoft.com/office/drawing/2014/main" id="{974C4F1D-CED9-4822-A785-03DF9EBC9F25}"/>
               </a:ext>
             </a:extLst>
           </p:cNvPr>
@@ -15802,7 +15802,7 @@
           <p:cNvPr id="15" name="PHONE 7">
             <a:extLst xmlns:a="http://schemas.openxmlformats.org/drawingml/2006/main">
               <a:ext uri="{FF2B5EF4-FFF2-40B4-BE49-F238E27FC236}">
-                <a16:creationId xmlns:a16="http://schemas.microsoft.com/office/drawing/2014/main" id="{64B46511-48E4-4EEE-B713-7A574DD32B78}"/>
+                <a16:creationId xmlns:a16="http://schemas.microsoft.com/office/drawing/2014/main" id="{6D3863DC-D02F-41AD-B7A3-627E564A1D93}"/>
               </a:ext>
             </a:extLst>
           </p:cNvPr>
@@ -15960,7 +15960,7 @@
           <p:cNvPr id="16" name="214 / 215">
             <a:extLst xmlns:a="http://schemas.openxmlformats.org/drawingml/2006/main">
               <a:ext uri="{FF2B5EF4-FFF2-40B4-BE49-F238E27FC236}">
-                <a16:creationId xmlns:a16="http://schemas.microsoft.com/office/drawing/2014/main" id="{DFC63E9B-C2FE-420A-AAC1-61BB0F8B7665}"/>
+                <a16:creationId xmlns:a16="http://schemas.microsoft.com/office/drawing/2014/main" id="{EDAA8015-B567-4CD6-8415-1DFEFB76464E}"/>
               </a:ext>
             </a:extLst>
           </p:cNvPr>
@@ -16118,7 +16118,7 @@
           <p:cNvPr id="17" name="PHONE 8">
             <a:extLst xmlns:a="http://schemas.openxmlformats.org/drawingml/2006/main">
               <a:ext uri="{FF2B5EF4-FFF2-40B4-BE49-F238E27FC236}">
-                <a16:creationId xmlns:a16="http://schemas.microsoft.com/office/drawing/2014/main" id="{65F71913-BCD4-4932-B56A-216BD061F434}"/>
+                <a16:creationId xmlns:a16="http://schemas.microsoft.com/office/drawing/2014/main" id="{E898EDA6-72D6-4CB6-9F15-896B416C595B}"/>
               </a:ext>
             </a:extLst>
           </p:cNvPr>
@@ -16276,7 +16276,7 @@
           <p:cNvPr id="18" name="216 / 217">
             <a:extLst xmlns:a="http://schemas.openxmlformats.org/drawingml/2006/main">
               <a:ext uri="{FF2B5EF4-FFF2-40B4-BE49-F238E27FC236}">
-                <a16:creationId xmlns:a16="http://schemas.microsoft.com/office/drawing/2014/main" id="{A0C78099-AB82-4778-AC49-16144EA7E394}"/>
+                <a16:creationId xmlns:a16="http://schemas.microsoft.com/office/drawing/2014/main" id="{3ACCF647-D5C2-4194-8FF0-65E4E19E43EB}"/>
               </a:ext>
             </a:extLst>
           </p:cNvPr>
@@ -16434,7 +16434,7 @@
           <p:cNvPr id="19" name="PHONE 9">
             <a:extLst xmlns:a="http://schemas.openxmlformats.org/drawingml/2006/main">
               <a:ext uri="{FF2B5EF4-FFF2-40B4-BE49-F238E27FC236}">
-                <a16:creationId xmlns:a16="http://schemas.microsoft.com/office/drawing/2014/main" id="{0FEE3330-CE01-45D5-AFCE-31A2449224EB}"/>
+                <a16:creationId xmlns:a16="http://schemas.microsoft.com/office/drawing/2014/main" id="{53AE9983-2736-4EA5-8723-AB341145598E}"/>
               </a:ext>
             </a:extLst>
           </p:cNvPr>
@@ -16592,7 +16592,7 @@
           <p:cNvPr id="20" name="218 / 219">
             <a:extLst xmlns:a="http://schemas.openxmlformats.org/drawingml/2006/main">
               <a:ext uri="{FF2B5EF4-FFF2-40B4-BE49-F238E27FC236}">
-                <a16:creationId xmlns:a16="http://schemas.microsoft.com/office/drawing/2014/main" id="{C1F80EE4-1E7A-4C33-9232-DFA3DE9CF969}"/>
+                <a16:creationId xmlns:a16="http://schemas.microsoft.com/office/drawing/2014/main" id="{79CD1D77-CF27-487F-B16A-DA8F55059BE1}"/>
               </a:ext>
             </a:extLst>
           </p:cNvPr>
@@ -16750,7 +16750,7 @@
           <p:cNvPr id="21" name="PHONE 10">
             <a:extLst xmlns:a="http://schemas.openxmlformats.org/drawingml/2006/main">
               <a:ext uri="{FF2B5EF4-FFF2-40B4-BE49-F238E27FC236}">
-                <a16:creationId xmlns:a16="http://schemas.microsoft.com/office/drawing/2014/main" id="{6D97C988-D121-4A77-97E1-492A53D6E041}"/>
+                <a16:creationId xmlns:a16="http://schemas.microsoft.com/office/drawing/2014/main" id="{D7EFE6CA-1C08-4924-9F7A-390E1F24E2B3}"/>
               </a:ext>
             </a:extLst>
           </p:cNvPr>
@@ -16908,7 +16908,7 @@
           <p:cNvPr id="22" name="220 / 221">
             <a:extLst xmlns:a="http://schemas.openxmlformats.org/drawingml/2006/main">
               <a:ext uri="{FF2B5EF4-FFF2-40B4-BE49-F238E27FC236}">
-                <a16:creationId xmlns:a16="http://schemas.microsoft.com/office/drawing/2014/main" id="{9F94D026-B3AE-4C1F-A545-5653B68E963B}"/>
+                <a16:creationId xmlns:a16="http://schemas.microsoft.com/office/drawing/2014/main" id="{76D1B84E-E131-4795-A5EF-B9C579A339EB}"/>
               </a:ext>
             </a:extLst>
           </p:cNvPr>
@@ -17066,7 +17066,7 @@
           <p:cNvPr id="23" name="620: one primary line per Cisco device">
             <a:extLst xmlns:a="http://schemas.openxmlformats.org/drawingml/2006/main">
               <a:ext uri="{FF2B5EF4-FFF2-40B4-BE49-F238E27FC236}">
-                <a16:creationId xmlns:a16="http://schemas.microsoft.com/office/drawing/2014/main" id="{8A83306E-5E00-4729-A204-307AA19B3B93}"/>
+                <a16:creationId xmlns:a16="http://schemas.microsoft.com/office/drawing/2014/main" id="{6638A719-D86F-4F33-9F9C-5F9311CE4924}"/>
               </a:ext>
             </a:extLst>
           </p:cNvPr>
@@ -17224,7 +17224,7 @@
           <p:cNvPr id="24" name="201 · 203 · 205 · 207 · 210 · 212 · 214 · 216 · 218 · 220">
             <a:extLst xmlns:a="http://schemas.openxmlformats.org/drawingml/2006/main">
               <a:ext uri="{FF2B5EF4-FFF2-40B4-BE49-F238E27FC236}">
-                <a16:creationId xmlns:a16="http://schemas.microsoft.com/office/drawing/2014/main" id="{21B0FF67-4360-4ACD-BB62-B467BD5A27C4}"/>
+                <a16:creationId xmlns:a16="http://schemas.microsoft.com/office/drawing/2014/main" id="{DF7A30E1-D1EC-414C-826A-CA11FEBB2905}"/>
               </a:ext>
             </a:extLst>
           </p:cNvPr>
@@ -17382,7 +17382,7 @@
           <p:cNvPr id="25" name="Keep each device’s identity and credentials when unplugged. Onlin">
             <a:extLst xmlns:a="http://schemas.openxmlformats.org/drawingml/2006/main">
               <a:ext uri="{FF2B5EF4-FFF2-40B4-BE49-F238E27FC236}">
-                <a16:creationId xmlns:a16="http://schemas.microsoft.com/office/drawing/2014/main" id="{439BE5F6-150F-4E9E-A44A-32CA2BD5EF1E}"/>
+                <a16:creationId xmlns:a16="http://schemas.microsoft.com/office/drawing/2014/main" id="{34F62ED1-6E62-416A-9D4A-2A18475CE85B}"/>
               </a:ext>
             </a:extLst>
           </p:cNvPr>
@@ -17538,7 +17538,7 @@
     </p:spTree>
     <p:extLst>
       <p:ext uri="{BB962C8B-B14F-4D97-AF65-F5344CB8AC3E}">
-        <p14:creationId xmlns:p14="http://schemas.microsoft.com/office/powerpoint/2010/main" val="1102724630"/>
+        <p14:creationId xmlns:p14="http://schemas.microsoft.com/office/powerpoint/2010/main" val="1487893156"/>
       </p:ext>
     </p:extLst>
   </p:cSld>
@@ -17569,7 +17569,7 @@
           <p:cNvPr id="14" name="Home Assistant phone controls">
             <a:extLst xmlns:a="http://schemas.openxmlformats.org/drawingml/2006/main">
               <a:ext uri="{FF2B5EF4-FFF2-40B4-BE49-F238E27FC236}">
-                <a16:creationId xmlns:a16="http://schemas.microsoft.com/office/drawing/2014/main" id="{40F27DFA-7B0E-4F21-8807-665A20D711F4}"/>
+                <a16:creationId xmlns:a16="http://schemas.microsoft.com/office/drawing/2014/main" id="{1A3673CD-42A2-4963-9341-BEEAD71119CA}"/>
               </a:ext>
             </a:extLst>
           </p:cNvPr>
@@ -17727,7 +17727,7 @@
           <p:cNvPr id="2" name="16">
             <a:extLst xmlns:a="http://schemas.openxmlformats.org/drawingml/2006/main">
               <a:ext uri="{FF2B5EF4-FFF2-40B4-BE49-F238E27FC236}">
-                <a16:creationId xmlns:a16="http://schemas.microsoft.com/office/drawing/2014/main" id="{C7B279E1-5DC9-4EE9-9173-53DB826A89A7}"/>
+                <a16:creationId xmlns:a16="http://schemas.microsoft.com/office/drawing/2014/main" id="{EF6D2B23-4405-499D-92A6-F642DA64588C}"/>
               </a:ext>
             </a:extLst>
           </p:cNvPr>
@@ -17885,7 +17885,7 @@
           <p:cNvPr id="3" name="290">
             <a:extLst xmlns:a="http://schemas.openxmlformats.org/drawingml/2006/main">
               <a:ext uri="{FF2B5EF4-FFF2-40B4-BE49-F238E27FC236}">
-                <a16:creationId xmlns:a16="http://schemas.microsoft.com/office/drawing/2014/main" id="{BEBEC94B-8C1C-4B24-B1A0-4183486CE6E7}"/>
+                <a16:creationId xmlns:a16="http://schemas.microsoft.com/office/drawing/2014/main" id="{4930C3D5-8B6D-4380-8D2F-ED70B510DF2D}"/>
               </a:ext>
             </a:extLst>
           </p:cNvPr>
@@ -18043,7 +18043,7 @@
           <p:cNvPr id="4" name="controls across ten phones">
             <a:extLst xmlns:a="http://schemas.openxmlformats.org/drawingml/2006/main">
               <a:ext uri="{FF2B5EF4-FFF2-40B4-BE49-F238E27FC236}">
-                <a16:creationId xmlns:a16="http://schemas.microsoft.com/office/drawing/2014/main" id="{D39E2F4D-79F2-4021-BDDB-AB4C3E3BDD98}"/>
+                <a16:creationId xmlns:a16="http://schemas.microsoft.com/office/drawing/2014/main" id="{E4FC546C-5F36-4042-8785-103ECA935AEC}"/>
               </a:ext>
             </a:extLst>
           </p:cNvPr>
@@ -18201,7 +18201,7 @@
           <p:cNvPr id="5" name="Call controls">
             <a:extLst xmlns:a="http://schemas.openxmlformats.org/drawingml/2006/main">
               <a:ext uri="{FF2B5EF4-FFF2-40B4-BE49-F238E27FC236}">
-                <a16:creationId xmlns:a16="http://schemas.microsoft.com/office/drawing/2014/main" id="{CCB6B624-843F-4B03-85A2-FE27E4436787}"/>
+                <a16:creationId xmlns:a16="http://schemas.microsoft.com/office/drawing/2014/main" id="{8A5E9300-4CD5-45A7-BE59-EB5552335638}"/>
               </a:ext>
             </a:extLst>
           </p:cNvPr>
@@ -18359,7 +18359,7 @@
           <p:cNvPr id="6" name="Line, dial, answer and exact-channel hangup">
             <a:extLst xmlns:a="http://schemas.openxmlformats.org/drawingml/2006/main">
               <a:ext uri="{FF2B5EF4-FFF2-40B4-BE49-F238E27FC236}">
-                <a16:creationId xmlns:a16="http://schemas.microsoft.com/office/drawing/2014/main" id="{DE76919C-F6D8-4300-9399-B344A8743BA6}"/>
+                <a16:creationId xmlns:a16="http://schemas.microsoft.com/office/drawing/2014/main" id="{2EC007B7-01F5-4DC2-9C70-27D16F38EECB}"/>
               </a:ext>
             </a:extLst>
           </p:cNvPr>
@@ -18517,7 +18517,7 @@
           <p:cNvPr id="7" name="Personal settings">
             <a:extLst xmlns:a="http://schemas.openxmlformats.org/drawingml/2006/main">
               <a:ext uri="{FF2B5EF4-FFF2-40B4-BE49-F238E27FC236}">
-                <a16:creationId xmlns:a16="http://schemas.microsoft.com/office/drawing/2014/main" id="{418145F6-E562-4EBB-8998-E1EE63B89680}"/>
+                <a16:creationId xmlns:a16="http://schemas.microsoft.com/office/drawing/2014/main" id="{D44A5596-B5C7-41EB-BD13-BBE76A372A8D}"/>
               </a:ext>
             </a:extLst>
           </p:cNvPr>
@@ -18675,7 +18675,7 @@
           <p:cNvPr id="8" name="PBX DND and optional normal-call auto-answer">
             <a:extLst xmlns:a="http://schemas.openxmlformats.org/drawingml/2006/main">
               <a:ext uri="{FF2B5EF4-FFF2-40B4-BE49-F238E27FC236}">
-                <a16:creationId xmlns:a16="http://schemas.microsoft.com/office/drawing/2014/main" id="{7649DC98-2FEE-4455-AB11-72C8849348B1}"/>
+                <a16:creationId xmlns:a16="http://schemas.microsoft.com/office/drawing/2014/main" id="{990DE7B4-3327-444A-AD8C-F3F7CCE7DD27}"/>
               </a:ext>
             </a:extLst>
           </p:cNvPr>
@@ -18833,7 +18833,7 @@
           <p:cNvPr id="9" name="Schedules">
             <a:extLst xmlns:a="http://schemas.openxmlformats.org/drawingml/2006/main">
               <a:ext uri="{FF2B5EF4-FFF2-40B4-BE49-F238E27FC236}">
-                <a16:creationId xmlns:a16="http://schemas.microsoft.com/office/drawing/2014/main" id="{353CB8E8-A776-4692-87F2-D4F66B2F9583}"/>
+                <a16:creationId xmlns:a16="http://schemas.microsoft.com/office/drawing/2014/main" id="{7651EC92-8DDF-4318-BD87-2A6E1DB0AF06}"/>
               </a:ext>
             </a:extLst>
           </p:cNvPr>
@@ -18991,7 +18991,7 @@
           <p:cNvPr id="10" name="Timers and weekdays with a Stop alert control">
             <a:extLst xmlns:a="http://schemas.openxmlformats.org/drawingml/2006/main">
               <a:ext uri="{FF2B5EF4-FFF2-40B4-BE49-F238E27FC236}">
-                <a16:creationId xmlns:a16="http://schemas.microsoft.com/office/drawing/2014/main" id="{811D499D-E215-4DF6-9CEA-EF73CC8E4D27}"/>
+                <a16:creationId xmlns:a16="http://schemas.microsoft.com/office/drawing/2014/main" id="{901EA246-C030-493C-B875-AFFAEDD9232F}"/>
               </a:ext>
             </a:extLst>
           </p:cNvPr>
@@ -19149,7 +19149,7 @@
           <p:cNvPr id="11" name="Phone screen">
             <a:extLst xmlns:a="http://schemas.openxmlformats.org/drawingml/2006/main">
               <a:ext uri="{FF2B5EF4-FFF2-40B4-BE49-F238E27FC236}">
-                <a16:creationId xmlns:a16="http://schemas.microsoft.com/office/drawing/2014/main" id="{24E2C84C-C62D-44A8-9C42-8E00E3A76229}"/>
+                <a16:creationId xmlns:a16="http://schemas.microsoft.com/office/drawing/2014/main" id="{A6F52BDB-2D9A-4E0E-8BD8-834B08638C55}"/>
               </a:ext>
             </a:extLst>
           </p:cNvPr>
@@ -19307,7 +19307,7 @@
           <p:cNvPr id="12" name="Authenticated text and approved images">
             <a:extLst xmlns:a="http://schemas.openxmlformats.org/drawingml/2006/main">
               <a:ext uri="{FF2B5EF4-FFF2-40B4-BE49-F238E27FC236}">
-                <a16:creationId xmlns:a16="http://schemas.microsoft.com/office/drawing/2014/main" id="{501D263D-4BE4-401A-AB42-A844F627ED3A}"/>
+                <a16:creationId xmlns:a16="http://schemas.microsoft.com/office/drawing/2014/main" id="{44E1277B-06C2-45DD-AD82-64EFDFC909BB}"/>
               </a:ext>
             </a:extLst>
           </p:cNvPr>
@@ -19465,7 +19465,7 @@
           <p:cNvPr id="13" name="Manual timer dismissal and HA Stop passed. A scheduled alarm rang">
             <a:extLst xmlns:a="http://schemas.openxmlformats.org/drawingml/2006/main">
               <a:ext uri="{FF2B5EF4-FFF2-40B4-BE49-F238E27FC236}">
-                <a16:creationId xmlns:a16="http://schemas.microsoft.com/office/drawing/2014/main" id="{32230F4C-683F-4C0D-80C1-E87C4A886C7E}"/>
+                <a16:creationId xmlns:a16="http://schemas.microsoft.com/office/drawing/2014/main" id="{7C934FA8-CAD3-4DBC-A02B-39A84D2190FB}"/>
               </a:ext>
             </a:extLst>
           </p:cNvPr>
@@ -19621,7 +19621,7 @@
     </p:spTree>
     <p:extLst>
       <p:ext uri="{BB962C8B-B14F-4D97-AF65-F5344CB8AC3E}">
-        <p14:creationId xmlns:p14="http://schemas.microsoft.com/office/powerpoint/2010/main" val="580646971"/>
+        <p14:creationId xmlns:p14="http://schemas.microsoft.com/office/powerpoint/2010/main" val="793155246"/>
       </p:ext>
     </p:extLst>
   </p:cSld>
@@ -19652,7 +19652,7 @@
           <p:cNvPr id="22" name="Radio and scheduled alerts">
             <a:extLst xmlns:a="http://schemas.openxmlformats.org/drawingml/2006/main">
               <a:ext uri="{FF2B5EF4-FFF2-40B4-BE49-F238E27FC236}">
-                <a16:creationId xmlns:a16="http://schemas.microsoft.com/office/drawing/2014/main" id="{FF6AFE0E-FD62-43D1-8FC6-52891345BAE7}"/>
+                <a16:creationId xmlns:a16="http://schemas.microsoft.com/office/drawing/2014/main" id="{09ECAE1C-480C-4DD7-A2DD-8B517EE3FA0C}"/>
               </a:ext>
             </a:extLst>
           </p:cNvPr>
@@ -19810,7 +19810,7 @@
           <p:cNvPr id="2" name="17">
             <a:extLst xmlns:a="http://schemas.openxmlformats.org/drawingml/2006/main">
               <a:ext uri="{FF2B5EF4-FFF2-40B4-BE49-F238E27FC236}">
-                <a16:creationId xmlns:a16="http://schemas.microsoft.com/office/drawing/2014/main" id="{7903173A-823D-4DCE-8995-791A15AABA06}"/>
+                <a16:creationId xmlns:a16="http://schemas.microsoft.com/office/drawing/2014/main" id="{9455C9E6-DC2D-41F1-9A80-F660462704DC}"/>
               </a:ext>
             </a:extLst>
           </p:cNvPr>
@@ -19968,7 +19968,7 @@
           <p:cNvPr id="3" name="RING">
             <a:extLst xmlns:a="http://schemas.openxmlformats.org/drawingml/2006/main">
               <a:ext uri="{FF2B5EF4-FFF2-40B4-BE49-F238E27FC236}">
-                <a16:creationId xmlns:a16="http://schemas.microsoft.com/office/drawing/2014/main" id="{F57CA1BC-1EBF-46C6-82EA-3596C33C0392}"/>
+                <a16:creationId xmlns:a16="http://schemas.microsoft.com/office/drawing/2014/main" id="{7D71BBFE-E306-43D7-9117-3A2DCE725E8D}"/>
               </a:ext>
             </a:extLst>
           </p:cNvPr>
@@ -20126,7 +20126,7 @@
           <p:cNvPr id="4" name="Until you stop it">
             <a:extLst xmlns:a="http://schemas.openxmlformats.org/drawingml/2006/main">
               <a:ext uri="{FF2B5EF4-FFF2-40B4-BE49-F238E27FC236}">
-                <a16:creationId xmlns:a16="http://schemas.microsoft.com/office/drawing/2014/main" id="{3AB3C5C8-F9A0-441C-BD72-A9D56A841384}"/>
+                <a16:creationId xmlns:a16="http://schemas.microsoft.com/office/drawing/2014/main" id="{73047626-D6BE-444A-997E-EDA6347A1BF5}"/>
               </a:ext>
             </a:extLst>
           </p:cNvPr>
@@ -20284,7 +20284,7 @@
           <p:cNvPr id="5" name="Answer / reject&#10;or press Stop alert">
             <a:extLst xmlns:a="http://schemas.openxmlformats.org/drawingml/2006/main">
               <a:ext uri="{FF2B5EF4-FFF2-40B4-BE49-F238E27FC236}">
-                <a16:creationId xmlns:a16="http://schemas.microsoft.com/office/drawing/2014/main" id="{689D8CFA-2344-4040-B0A1-AC32597473BE}"/>
+                <a16:creationId xmlns:a16="http://schemas.microsoft.com/office/drawing/2014/main" id="{11732E58-998E-45CD-A9A4-93E1A1924695}"/>
               </a:ext>
             </a:extLst>
           </p:cNvPr>
@@ -20465,7 +20465,7 @@
           <p:cNvPr id="6" name="No auto-answer&#10;No after-answer audio">
             <a:extLst xmlns:a="http://schemas.openxmlformats.org/drawingml/2006/main">
               <a:ext uri="{FF2B5EF4-FFF2-40B4-BE49-F238E27FC236}">
-                <a16:creationId xmlns:a16="http://schemas.microsoft.com/office/drawing/2014/main" id="{7C73A448-8988-4C03-A7A8-3D3591930726}"/>
+                <a16:creationId xmlns:a16="http://schemas.microsoft.com/office/drawing/2014/main" id="{38157446-4798-467A-84EC-C8191E2232E8}"/>
               </a:ext>
             </a:extLst>
           </p:cNvPr>
@@ -20646,7 +20646,7 @@
           <p:cNvPr id="7" name="701">
             <a:extLst xmlns:a="http://schemas.openxmlformats.org/drawingml/2006/main">
               <a:ext uri="{FF2B5EF4-FFF2-40B4-BE49-F238E27FC236}">
-                <a16:creationId xmlns:a16="http://schemas.microsoft.com/office/drawing/2014/main" id="{A1830092-299E-4F75-98F1-3400C3083F25}"/>
+                <a16:creationId xmlns:a16="http://schemas.microsoft.com/office/drawing/2014/main" id="{811E6D17-9BFB-43FB-8905-1AD85A2AC6B8}"/>
               </a:ext>
             </a:extLst>
           </p:cNvPr>
@@ -20804,7 +20804,7 @@
           <p:cNvPr id="8" name="Matryoshka Radio">
             <a:extLst xmlns:a="http://schemas.openxmlformats.org/drawingml/2006/main">
               <a:ext uri="{FF2B5EF4-FFF2-40B4-BE49-F238E27FC236}">
-                <a16:creationId xmlns:a16="http://schemas.microsoft.com/office/drawing/2014/main" id="{C2106D29-7D0F-41DA-94E2-3685AD322152}"/>
+                <a16:creationId xmlns:a16="http://schemas.microsoft.com/office/drawing/2014/main" id="{719C81B0-DA92-493C-B500-4AA87A392B06}"/>
               </a:ext>
             </a:extLst>
           </p:cNvPr>
@@ -20962,7 +20962,7 @@
           <p:cNvPr id="9" name="702">
             <a:extLst xmlns:a="http://schemas.openxmlformats.org/drawingml/2006/main">
               <a:ext uri="{FF2B5EF4-FFF2-40B4-BE49-F238E27FC236}">
-                <a16:creationId xmlns:a16="http://schemas.microsoft.com/office/drawing/2014/main" id="{5879A2CC-A06A-4A98-87F7-DDC2D011F4EC}"/>
+                <a16:creationId xmlns:a16="http://schemas.microsoft.com/office/drawing/2014/main" id="{BA13D973-EB38-475B-9734-999977744FB2}"/>
               </a:ext>
             </a:extLst>
           </p:cNvPr>
@@ -21120,7 +21120,7 @@
           <p:cNvPr id="10" name="Echo online">
             <a:extLst xmlns:a="http://schemas.openxmlformats.org/drawingml/2006/main">
               <a:ext uri="{FF2B5EF4-FFF2-40B4-BE49-F238E27FC236}">
-                <a16:creationId xmlns:a16="http://schemas.microsoft.com/office/drawing/2014/main" id="{3B2D170D-883A-473F-8ECB-B7EBC60851AD}"/>
+                <a16:creationId xmlns:a16="http://schemas.microsoft.com/office/drawing/2014/main" id="{F378653F-ECD2-41E4-8335-D37EC9C8D856}"/>
               </a:ext>
             </a:extLst>
           </p:cNvPr>
@@ -21278,7 +21278,7 @@
           <p:cNvPr id="11" name="703">
             <a:extLst xmlns:a="http://schemas.openxmlformats.org/drawingml/2006/main">
               <a:ext uri="{FF2B5EF4-FFF2-40B4-BE49-F238E27FC236}">
-                <a16:creationId xmlns:a16="http://schemas.microsoft.com/office/drawing/2014/main" id="{3987D1FA-7DF1-43FE-BBBC-8C6FAFCCA439}"/>
+                <a16:creationId xmlns:a16="http://schemas.microsoft.com/office/drawing/2014/main" id="{81676892-4DFD-4776-B274-51DAD5FA6A01}"/>
               </a:ext>
             </a:extLst>
           </p:cNvPr>
@@ -21436,7 +21436,7 @@
           <p:cNvPr id="12" name="RADIO BOB! Rock">
             <a:extLst xmlns:a="http://schemas.openxmlformats.org/drawingml/2006/main">
               <a:ext uri="{FF2B5EF4-FFF2-40B4-BE49-F238E27FC236}">
-                <a16:creationId xmlns:a16="http://schemas.microsoft.com/office/drawing/2014/main" id="{516A8BD0-6F53-4569-AE22-B069B50DDBE3}"/>
+                <a16:creationId xmlns:a16="http://schemas.microsoft.com/office/drawing/2014/main" id="{7CCB9A09-085C-46C6-91D5-24B991A234CA}"/>
               </a:ext>
             </a:extLst>
           </p:cNvPr>
@@ -21594,7 +21594,7 @@
           <p:cNvPr id="13" name="704">
             <a:extLst xmlns:a="http://schemas.openxmlformats.org/drawingml/2006/main">
               <a:ext uri="{FF2B5EF4-FFF2-40B4-BE49-F238E27FC236}">
-                <a16:creationId xmlns:a16="http://schemas.microsoft.com/office/drawing/2014/main" id="{7CB2CA66-0810-4299-914A-B3DA83E7E41D}"/>
+                <a16:creationId xmlns:a16="http://schemas.microsoft.com/office/drawing/2014/main" id="{B6995497-03AA-4813-81E0-79F21A86816F}"/>
               </a:ext>
             </a:extLst>
           </p:cNvPr>
@@ -21752,7 +21752,7 @@
           <p:cNvPr id="14" name="RADIO BOB! Metal">
             <a:extLst xmlns:a="http://schemas.openxmlformats.org/drawingml/2006/main">
               <a:ext uri="{FF2B5EF4-FFF2-40B4-BE49-F238E27FC236}">
-                <a16:creationId xmlns:a16="http://schemas.microsoft.com/office/drawing/2014/main" id="{3F6E2328-35D5-434F-9597-9DA366A991CC}"/>
+                <a16:creationId xmlns:a16="http://schemas.microsoft.com/office/drawing/2014/main" id="{328924B0-249A-41FC-8C03-F369ADDB4792}"/>
               </a:ext>
             </a:extLst>
           </p:cNvPr>
@@ -21910,7 +21910,7 @@
           <p:cNvPr id="15" name="705">
             <a:extLst xmlns:a="http://schemas.openxmlformats.org/drawingml/2006/main">
               <a:ext uri="{FF2B5EF4-FFF2-40B4-BE49-F238E27FC236}">
-                <a16:creationId xmlns:a16="http://schemas.microsoft.com/office/drawing/2014/main" id="{6FA3452F-F7AD-4F9D-971A-1E6B18267819}"/>
+                <a16:creationId xmlns:a16="http://schemas.microsoft.com/office/drawing/2014/main" id="{D08B25FD-963E-4297-81F8-3A5A7D988783}"/>
               </a:ext>
             </a:extLst>
           </p:cNvPr>
@@ -22068,7 +22068,7 @@
           <p:cNvPr id="16" name="RADIO BOB! Gothic">
             <a:extLst xmlns:a="http://schemas.openxmlformats.org/drawingml/2006/main">
               <a:ext uri="{FF2B5EF4-FFF2-40B4-BE49-F238E27FC236}">
-                <a16:creationId xmlns:a16="http://schemas.microsoft.com/office/drawing/2014/main" id="{BA940802-9D5F-4306-9B48-4C6682398FC2}"/>
+                <a16:creationId xmlns:a16="http://schemas.microsoft.com/office/drawing/2014/main" id="{DF096786-1027-405A-AAC0-20AFCE9C2E62}"/>
               </a:ext>
             </a:extLst>
           </p:cNvPr>
@@ -22226,7 +22226,7 @@
           <p:cNvPr id="17" name="706">
             <a:extLst xmlns:a="http://schemas.openxmlformats.org/drawingml/2006/main">
               <a:ext uri="{FF2B5EF4-FFF2-40B4-BE49-F238E27FC236}">
-                <a16:creationId xmlns:a16="http://schemas.microsoft.com/office/drawing/2014/main" id="{58B81A2B-560A-4A32-B46C-85E4BE93348A}"/>
+                <a16:creationId xmlns:a16="http://schemas.microsoft.com/office/drawing/2014/main" id="{550EE60B-F2F2-4206-B4BC-AAE63377C684}"/>
               </a:ext>
             </a:extLst>
           </p:cNvPr>
@@ -22384,7 +22384,7 @@
           <p:cNvPr id="18" name="SomaFM PopTron">
             <a:extLst xmlns:a="http://schemas.openxmlformats.org/drawingml/2006/main">
               <a:ext uri="{FF2B5EF4-FFF2-40B4-BE49-F238E27FC236}">
-                <a16:creationId xmlns:a16="http://schemas.microsoft.com/office/drawing/2014/main" id="{98E3D311-5CF9-47DB-B428-94984F7CFEC8}"/>
+                <a16:creationId xmlns:a16="http://schemas.microsoft.com/office/drawing/2014/main" id="{C158BA92-C076-4B1C-941C-DBC36826D5E2}"/>
               </a:ext>
             </a:extLst>
           </p:cNvPr>
@@ -22542,7 +22542,7 @@
           <p:cNvPr id="19" name="707">
             <a:extLst xmlns:a="http://schemas.openxmlformats.org/drawingml/2006/main">
               <a:ext uri="{FF2B5EF4-FFF2-40B4-BE49-F238E27FC236}">
-                <a16:creationId xmlns:a16="http://schemas.microsoft.com/office/drawing/2014/main" id="{C7BB58F4-F9F9-4FFF-BA3A-A647B140FC34}"/>
+                <a16:creationId xmlns:a16="http://schemas.microsoft.com/office/drawing/2014/main" id="{B8DBE793-92FF-4680-98C3-0148FD13B2AE}"/>
               </a:ext>
             </a:extLst>
           </p:cNvPr>
@@ -22700,7 +22700,7 @@
           <p:cNvPr id="20" name="Radyo Viva / Turkish">
             <a:extLst xmlns:a="http://schemas.openxmlformats.org/drawingml/2006/main">
               <a:ext uri="{FF2B5EF4-FFF2-40B4-BE49-F238E27FC236}">
-                <a16:creationId xmlns:a16="http://schemas.microsoft.com/office/drawing/2014/main" id="{BA7ED548-1923-46AC-8D77-EA47AF768DC8}"/>
+                <a16:creationId xmlns:a16="http://schemas.microsoft.com/office/drawing/2014/main" id="{879937EB-3316-48E2-9413-F7803963FD31}"/>
               </a:ext>
             </a:extLst>
           </p:cNvPr>
@@ -22858,7 +22858,7 @@
           <p:cNvPr id="21" name="For 708–710: handset down, speaker off, enter all digits, then pr">
             <a:extLst xmlns:a="http://schemas.openxmlformats.org/drawingml/2006/main">
               <a:ext uri="{FF2B5EF4-FFF2-40B4-BE49-F238E27FC236}">
-                <a16:creationId xmlns:a16="http://schemas.microsoft.com/office/drawing/2014/main" id="{E792BC59-7E9E-4A95-91B6-CBA0B03262C4}"/>
+                <a16:creationId xmlns:a16="http://schemas.microsoft.com/office/drawing/2014/main" id="{2017C009-91B2-4E55-BDDC-FD88FB244D89}"/>
               </a:ext>
             </a:extLst>
           </p:cNvPr>
@@ -23014,7 +23014,7 @@
     </p:spTree>
     <p:extLst>
       <p:ext uri="{BB962C8B-B14F-4D97-AF65-F5344CB8AC3E}">
-        <p14:creationId xmlns:p14="http://schemas.microsoft.com/office/powerpoint/2010/main" val="441315074"/>
+        <p14:creationId xmlns:p14="http://schemas.microsoft.com/office/powerpoint/2010/main" val="2011674757"/>
       </p:ext>
     </p:extLst>
   </p:cSld>
@@ -23045,7 +23045,7 @@
           <p:cNvPr id="14" name="Free SIP account status">
             <a:extLst xmlns:a="http://schemas.openxmlformats.org/drawingml/2006/main">
               <a:ext uri="{FF2B5EF4-FFF2-40B4-BE49-F238E27FC236}">
-                <a16:creationId xmlns:a16="http://schemas.microsoft.com/office/drawing/2014/main" id="{F904BC32-9772-4C32-BAB0-9F05FE1DFA35}"/>
+                <a16:creationId xmlns:a16="http://schemas.microsoft.com/office/drawing/2014/main" id="{EC36BE38-2DE1-42E9-AEA7-D2E66755A6EA}"/>
               </a:ext>
             </a:extLst>
           </p:cNvPr>
@@ -23203,7 +23203,7 @@
           <p:cNvPr id="2" name="18">
             <a:extLst xmlns:a="http://schemas.openxmlformats.org/drawingml/2006/main">
               <a:ext uri="{FF2B5EF4-FFF2-40B4-BE49-F238E27FC236}">
-                <a16:creationId xmlns:a16="http://schemas.microsoft.com/office/drawing/2014/main" id="{31E4F00E-E3A2-4123-8250-943D440E0F82}"/>
+                <a16:creationId xmlns:a16="http://schemas.microsoft.com/office/drawing/2014/main" id="{6F57057D-A734-4050-BA34-F62FB2EC7C0B}"/>
               </a:ext>
             </a:extLst>
           </p:cNvPr>
@@ -23361,7 +23361,7 @@
           <p:cNvPr id="3" name="SIP2SIP">
             <a:extLst xmlns:a="http://schemas.openxmlformats.org/drawingml/2006/main">
               <a:ext uri="{FF2B5EF4-FFF2-40B4-BE49-F238E27FC236}">
-                <a16:creationId xmlns:a16="http://schemas.microsoft.com/office/drawing/2014/main" id="{36194E7D-C466-4DA1-80F2-49DDB1379029}"/>
+                <a16:creationId xmlns:a16="http://schemas.microsoft.com/office/drawing/2014/main" id="{2A89D0C6-8696-48F6-860B-95998C4B0EA7}"/>
               </a:ext>
             </a:extLst>
           </p:cNvPr>
@@ -23519,7 +23519,7 @@
           <p:cNvPr id="4" name="Echo answered, RTP loss observed">
             <a:extLst xmlns:a="http://schemas.openxmlformats.org/drawingml/2006/main">
               <a:ext uri="{FF2B5EF4-FFF2-40B4-BE49-F238E27FC236}">
-                <a16:creationId xmlns:a16="http://schemas.microsoft.com/office/drawing/2014/main" id="{D2D2114A-8E1B-454F-84E2-4A21DA5A96A7}"/>
+                <a16:creationId xmlns:a16="http://schemas.microsoft.com/office/drawing/2014/main" id="{6072E77A-14DB-4E98-B594-34C97A1BF8C9}"/>
               </a:ext>
             </a:extLst>
           </p:cNvPr>
@@ -23677,7 +23677,7 @@
           <p:cNvPr id="5" name="Callcentric">
             <a:extLst xmlns:a="http://schemas.openxmlformats.org/drawingml/2006/main">
               <a:ext uri="{FF2B5EF4-FFF2-40B4-BE49-F238E27FC236}">
-                <a16:creationId xmlns:a16="http://schemas.microsoft.com/office/drawing/2014/main" id="{12E6F7D4-644C-42A6-9E6F-850487BC5673}"/>
+                <a16:creationId xmlns:a16="http://schemas.microsoft.com/office/drawing/2014/main" id="{E2088791-52CB-4738-9FD5-DC700D9B305C}"/>
               </a:ext>
             </a:extLst>
           </p:cNvPr>
@@ -23835,7 +23835,7 @@
           <p:cNvPr id="6" name="Registered, outbound review required">
             <a:extLst xmlns:a="http://schemas.openxmlformats.org/drawingml/2006/main">
               <a:ext uri="{FF2B5EF4-FFF2-40B4-BE49-F238E27FC236}">
-                <a16:creationId xmlns:a16="http://schemas.microsoft.com/office/drawing/2014/main" id="{29E717F3-AA64-4CED-90CA-250057247831}"/>
+                <a16:creationId xmlns:a16="http://schemas.microsoft.com/office/drawing/2014/main" id="{91BBE654-6FA8-4CAD-A892-612F199FB136}"/>
               </a:ext>
             </a:extLst>
           </p:cNvPr>
@@ -23993,7 +23993,7 @@
           <p:cNvPr id="7" name="Linphone SIP">
             <a:extLst xmlns:a="http://schemas.openxmlformats.org/drawingml/2006/main">
               <a:ext uri="{FF2B5EF4-FFF2-40B4-BE49-F238E27FC236}">
-                <a16:creationId xmlns:a16="http://schemas.microsoft.com/office/drawing/2014/main" id="{A476CC3A-3F03-40B3-BE95-47726D46962F}"/>
+                <a16:creationId xmlns:a16="http://schemas.microsoft.com/office/drawing/2014/main" id="{EE67323A-08F0-49AE-9606-5672EB419819}"/>
               </a:ext>
             </a:extLst>
           </p:cNvPr>
@@ -24148,10 +24148,10 @@
       </p:sp>
       <p:sp>
         <p:nvSpPr>
-          <p:cNvPr id="8" name="Registered, verified peer still needed">
+          <p:cNvPr id="8" name="803 answered, two-way RTP observed">
             <a:extLst xmlns:a="http://schemas.openxmlformats.org/drawingml/2006/main">
               <a:ext uri="{FF2B5EF4-FFF2-40B4-BE49-F238E27FC236}">
-                <a16:creationId xmlns:a16="http://schemas.microsoft.com/office/drawing/2014/main" id="{E2FC7E5D-7B51-43AA-9626-8B934FD01ABE}"/>
+                <a16:creationId xmlns:a16="http://schemas.microsoft.com/office/drawing/2014/main" id="{40B23534-F2D4-4F35-90F7-AF4A0187FCF3}"/>
               </a:ext>
             </a:extLst>
           </p:cNvPr>
@@ -24299,7 +24299,7 @@
                 <a:ea typeface="Arial"/>
                 <a:cs typeface="Arial"/>
               </a:rPr>
-              <a:t>Registered, verified peer still needed</a:t>
+              <a:t>803 answered, two-way RTP observed</a:t>
             </a:r>
           </a:p>
         </p:txBody>
@@ -24309,7 +24309,7 @@
           <p:cNvPr id="9" name="FWD">
             <a:extLst xmlns:a="http://schemas.openxmlformats.org/drawingml/2006/main">
               <a:ext uri="{FF2B5EF4-FFF2-40B4-BE49-F238E27FC236}">
-                <a16:creationId xmlns:a16="http://schemas.microsoft.com/office/drawing/2014/main" id="{0C76474C-D5AA-4850-B4E5-7333ABA36FE6}"/>
+                <a16:creationId xmlns:a16="http://schemas.microsoft.com/office/drawing/2014/main" id="{5728C391-F57F-4B86-8CC1-888678CA1898}"/>
               </a:ext>
             </a:extLst>
           </p:cNvPr>
@@ -24467,7 +24467,7 @@
           <p:cNvPr id="10" name="Stopped at mandatory Verification Fee">
             <a:extLst xmlns:a="http://schemas.openxmlformats.org/drawingml/2006/main">
               <a:ext uri="{FF2B5EF4-FFF2-40B4-BE49-F238E27FC236}">
-                <a16:creationId xmlns:a16="http://schemas.microsoft.com/office/drawing/2014/main" id="{760A4083-D174-4454-AA8A-1D16AEB04583}"/>
+                <a16:creationId xmlns:a16="http://schemas.microsoft.com/office/drawing/2014/main" id="{E21BDE49-FC89-4809-B654-46C5F447051F}"/>
               </a:ext>
             </a:extLst>
           </p:cNvPr>
@@ -24625,7 +24625,7 @@
           <p:cNvPr id="11" name="Google Voice">
             <a:extLst xmlns:a="http://schemas.openxmlformats.org/drawingml/2006/main">
               <a:ext uri="{FF2B5EF4-FFF2-40B4-BE49-F238E27FC236}">
-                <a16:creationId xmlns:a16="http://schemas.microsoft.com/office/drawing/2014/main" id="{F6A284D4-058A-4CC4-940D-68DA52877EBB}"/>
+                <a16:creationId xmlns:a16="http://schemas.microsoft.com/office/drawing/2014/main" id="{4A0DCF52-4A1B-4976-B34F-A5E89C28E625}"/>
               </a:ext>
             </a:extLst>
           </p:cNvPr>
@@ -24783,7 +24783,7 @@
           <p:cNvPr id="12" name="No official free Asterisk SIP trunk">
             <a:extLst xmlns:a="http://schemas.openxmlformats.org/drawingml/2006/main">
               <a:ext uri="{FF2B5EF4-FFF2-40B4-BE49-F238E27FC236}">
-                <a16:creationId xmlns:a16="http://schemas.microsoft.com/office/drawing/2014/main" id="{D32E82E9-12BA-4E3B-858A-FEC7DE6804BF}"/>
+                <a16:creationId xmlns:a16="http://schemas.microsoft.com/office/drawing/2014/main" id="{A18BDCCC-9670-44F9-A4B3-8DB2FCA61AC0}"/>
               </a:ext>
             </a:extLst>
           </p:cNvPr>
@@ -24938,10 +24938,10 @@
       </p:sp>
       <p:sp>
         <p:nvSpPr>
-          <p:cNvPr id="13" name="Three providers registered. External media quality still needs ve">
+          <p:cNvPr id="13" name="Answered calls and RTP verified. Human listening and DTMF menu te">
             <a:extLst xmlns:a="http://schemas.openxmlformats.org/drawingml/2006/main">
               <a:ext uri="{FF2B5EF4-FFF2-40B4-BE49-F238E27FC236}">
-                <a16:creationId xmlns:a16="http://schemas.microsoft.com/office/drawing/2014/main" id="{C3DE8324-CF09-4380-83BF-05351AB87457}"/>
+                <a16:creationId xmlns:a16="http://schemas.microsoft.com/office/drawing/2014/main" id="{57C9345D-44D6-4C1E-BD29-C0298BA2614F}"/>
               </a:ext>
             </a:extLst>
           </p:cNvPr>
@@ -25089,7 +25089,7 @@
                 <a:ea typeface="Arial"/>
                 <a:cs typeface="Arial"/>
               </a:rPr>
-              <a:t>Three providers registered. External media quality still needs verification.</a:t>
+              <a:t>Answered calls and RTP verified. Human listening and DTMF menu tests remain pending.</a:t>
             </a:r>
           </a:p>
         </p:txBody>
@@ -25097,7 +25097,7 @@
     </p:spTree>
     <p:extLst>
       <p:ext uri="{BB962C8B-B14F-4D97-AF65-F5344CB8AC3E}">
-        <p14:creationId xmlns:p14="http://schemas.microsoft.com/office/powerpoint/2010/main" val="659624510"/>
+        <p14:creationId xmlns:p14="http://schemas.microsoft.com/office/powerpoint/2010/main" val="1721707131"/>
       </p:ext>
     </p:extLst>
   </p:cSld>
@@ -25128,7 +25128,7 @@
           <p:cNvPr id="14" name="Mac calling and children’s radio">
             <a:extLst xmlns:a="http://schemas.openxmlformats.org/drawingml/2006/main">
               <a:ext uri="{FF2B5EF4-FFF2-40B4-BE49-F238E27FC236}">
-                <a16:creationId xmlns:a16="http://schemas.microsoft.com/office/drawing/2014/main" id="{C63F208E-810D-48CA-A696-434A4AB9497A}"/>
+                <a16:creationId xmlns:a16="http://schemas.microsoft.com/office/drawing/2014/main" id="{E464D958-FD74-455E-B279-0BD169F63DD5}"/>
               </a:ext>
             </a:extLst>
           </p:cNvPr>
@@ -25286,7 +25286,7 @@
           <p:cNvPr id="2" name="19">
             <a:extLst xmlns:a="http://schemas.openxmlformats.org/drawingml/2006/main">
               <a:ext uri="{FF2B5EF4-FFF2-40B4-BE49-F238E27FC236}">
-                <a16:creationId xmlns:a16="http://schemas.microsoft.com/office/drawing/2014/main" id="{508D7607-FC81-433F-983A-C5000389C567}"/>
+                <a16:creationId xmlns:a16="http://schemas.microsoft.com/office/drawing/2014/main" id="{D0B6E547-806B-4CD1-8249-04A870734D99}"/>
               </a:ext>
             </a:extLst>
           </p:cNvPr>
@@ -25444,7 +25444,7 @@
           <p:cNvPr id="3" name="209">
             <a:extLst xmlns:a="http://schemas.openxmlformats.org/drawingml/2006/main">
               <a:ext uri="{FF2B5EF4-FFF2-40B4-BE49-F238E27FC236}">
-                <a16:creationId xmlns:a16="http://schemas.microsoft.com/office/drawing/2014/main" id="{6F3FFD38-CF14-4526-9A44-78E340966066}"/>
+                <a16:creationId xmlns:a16="http://schemas.microsoft.com/office/drawing/2014/main" id="{80100A12-D796-422D-83AA-D1F3A6475CC3}"/>
               </a:ext>
             </a:extLst>
           </p:cNvPr>
@@ -25599,10 +25599,10 @@
       </p:sp>
       <p:sp>
         <p:nvSpPr>
-          <p:cNvPr id="4" name="Mac SIP client · 209">
+          <p:cNvPr id="4" name="Zoiper5 · Mac 209">
             <a:extLst xmlns:a="http://schemas.openxmlformats.org/drawingml/2006/main">
               <a:ext uri="{FF2B5EF4-FFF2-40B4-BE49-F238E27FC236}">
-                <a16:creationId xmlns:a16="http://schemas.microsoft.com/office/drawing/2014/main" id="{FB9F9631-463D-440C-BE3E-E39B700B567E}"/>
+                <a16:creationId xmlns:a16="http://schemas.microsoft.com/office/drawing/2014/main" id="{828FCEDC-EA65-45CD-A2CA-E606ACBE1D78}"/>
               </a:ext>
             </a:extLst>
           </p:cNvPr>
@@ -25750,7 +25750,7 @@
                 <a:ea typeface="Arial"/>
                 <a:cs typeface="Arial"/>
               </a:rPr>
-              <a:t>Mac SIP client · 209</a:t>
+              <a:t>Zoiper5 · Mac 209</a:t>
             </a:r>
           </a:p>
         </p:txBody>
@@ -25760,7 +25760,7 @@
           <p:cNvPr id="5" name="Own SIP identity&#10;Internal calls and services&#10;Excluded from ring g">
             <a:extLst xmlns:a="http://schemas.openxmlformats.org/drawingml/2006/main">
               <a:ext uri="{FF2B5EF4-FFF2-40B4-BE49-F238E27FC236}">
-                <a16:creationId xmlns:a16="http://schemas.microsoft.com/office/drawing/2014/main" id="{6D43C98B-AD87-43CB-93B7-65EF2CE0BA70}"/>
+                <a16:creationId xmlns:a16="http://schemas.microsoft.com/office/drawing/2014/main" id="{27A6F9B2-F9B4-4CE1-85BD-581A2B3162BD}"/>
               </a:ext>
             </a:extLst>
           </p:cNvPr>
@@ -25964,7 +25964,7 @@
           <p:cNvPr id="6" name="708">
             <a:extLst xmlns:a="http://schemas.openxmlformats.org/drawingml/2006/main">
               <a:ext uri="{FF2B5EF4-FFF2-40B4-BE49-F238E27FC236}">
-                <a16:creationId xmlns:a16="http://schemas.microsoft.com/office/drawing/2014/main" id="{6F804300-9B92-46C9-8F81-1893CBA07BED}"/>
+                <a16:creationId xmlns:a16="http://schemas.microsoft.com/office/drawing/2014/main" id="{AA163A3F-79B4-4B09-8693-4B0FF61DC58B}"/>
               </a:ext>
             </a:extLst>
           </p:cNvPr>
@@ -26122,7 +26122,7 @@
           <p:cNvPr id="7" name="Toddler music">
             <a:extLst xmlns:a="http://schemas.openxmlformats.org/drawingml/2006/main">
               <a:ext uri="{FF2B5EF4-FFF2-40B4-BE49-F238E27FC236}">
-                <a16:creationId xmlns:a16="http://schemas.microsoft.com/office/drawing/2014/main" id="{1148DD89-333D-44DE-95DC-488EEF79F129}"/>
+                <a16:creationId xmlns:a16="http://schemas.microsoft.com/office/drawing/2014/main" id="{A7130485-8E03-4088-8A6D-D6E73632D6EF}"/>
               </a:ext>
             </a:extLst>
           </p:cNvPr>
@@ -26280,7 +26280,7 @@
           <p:cNvPr id="8" name="709">
             <a:extLst xmlns:a="http://schemas.openxmlformats.org/drawingml/2006/main">
               <a:ext uri="{FF2B5EF4-FFF2-40B4-BE49-F238E27FC236}">
-                <a16:creationId xmlns:a16="http://schemas.microsoft.com/office/drawing/2014/main" id="{4BA5CD88-F87C-4C3B-A503-1485434D7A2C}"/>
+                <a16:creationId xmlns:a16="http://schemas.microsoft.com/office/drawing/2014/main" id="{B060FD1F-2AEC-4788-B1D1-8D4180F55EA6}"/>
               </a:ext>
             </a:extLst>
           </p:cNvPr>
@@ -26438,7 +26438,7 @@
           <p:cNvPr id="9" name="Lullabies">
             <a:extLst xmlns:a="http://schemas.openxmlformats.org/drawingml/2006/main">
               <a:ext uri="{FF2B5EF4-FFF2-40B4-BE49-F238E27FC236}">
-                <a16:creationId xmlns:a16="http://schemas.microsoft.com/office/drawing/2014/main" id="{C32D4E51-189D-4601-A7C2-F8177C79E08E}"/>
+                <a16:creationId xmlns:a16="http://schemas.microsoft.com/office/drawing/2014/main" id="{C418A6C3-CA76-4267-913D-31B85A495448}"/>
               </a:ext>
             </a:extLst>
           </p:cNvPr>
@@ -26596,7 +26596,7 @@
           <p:cNvPr id="10" name="710">
             <a:extLst xmlns:a="http://schemas.openxmlformats.org/drawingml/2006/main">
               <a:ext uri="{FF2B5EF4-FFF2-40B4-BE49-F238E27FC236}">
-                <a16:creationId xmlns:a16="http://schemas.microsoft.com/office/drawing/2014/main" id="{8912D8B8-143F-4AA3-9B1A-564ABCAE8033}"/>
+                <a16:creationId xmlns:a16="http://schemas.microsoft.com/office/drawing/2014/main" id="{3CB46B8E-97C0-4CDC-AEE1-587DBA09711B}"/>
               </a:ext>
             </a:extLst>
           </p:cNvPr>
@@ -26754,7 +26754,7 @@
           <p:cNvPr id="11" name="Children’s songs">
             <a:extLst xmlns:a="http://schemas.openxmlformats.org/drawingml/2006/main">
               <a:ext uri="{FF2B5EF4-FFF2-40B4-BE49-F238E27FC236}">
-                <a16:creationId xmlns:a16="http://schemas.microsoft.com/office/drawing/2014/main" id="{424CC106-2C02-44EF-8F83-D658DFE852BB}"/>
+                <a16:creationId xmlns:a16="http://schemas.microsoft.com/office/drawing/2014/main" id="{42990231-1A29-4483-9FD1-8BEEBE48D12E}"/>
               </a:ext>
             </a:extLst>
           </p:cNvPr>
@@ -26912,7 +26912,7 @@
           <p:cNvPr id="12" name="Official Deti FM channels">
             <a:extLst xmlns:a="http://schemas.openxmlformats.org/drawingml/2006/main">
               <a:ext uri="{FF2B5EF4-FFF2-40B4-BE49-F238E27FC236}">
-                <a16:creationId xmlns:a16="http://schemas.microsoft.com/office/drawing/2014/main" id="{1BC4A3CC-0FC9-4BCF-987A-E7E9D28A1683}"/>
+                <a16:creationId xmlns:a16="http://schemas.microsoft.com/office/drawing/2014/main" id="{268301FE-FA91-4A65-9B41-E40AC3634657}"/>
               </a:ext>
             </a:extLst>
           </p:cNvPr>
@@ -27070,7 +27070,7 @@
           <p:cNvPr id="13" name="Mac 209 echo: RTP and human listening passed. All three stations ">
             <a:extLst xmlns:a="http://schemas.openxmlformats.org/drawingml/2006/main">
               <a:ext uri="{FF2B5EF4-FFF2-40B4-BE49-F238E27FC236}">
-                <a16:creationId xmlns:a16="http://schemas.microsoft.com/office/drawing/2014/main" id="{0E1CEF75-2CB7-41BD-BD33-479F11CD8921}"/>
+                <a16:creationId xmlns:a16="http://schemas.microsoft.com/office/drawing/2014/main" id="{1362F38A-0DC3-4115-B125-9C5F63CC56E0}"/>
               </a:ext>
             </a:extLst>
           </p:cNvPr>
@@ -27226,7 +27226,7 @@
     </p:spTree>
     <p:extLst>
       <p:ext uri="{BB962C8B-B14F-4D97-AF65-F5344CB8AC3E}">
-        <p14:creationId xmlns:p14="http://schemas.microsoft.com/office/powerpoint/2010/main" val="1736495284"/>
+        <p14:creationId xmlns:p14="http://schemas.microsoft.com/office/powerpoint/2010/main" val="1165751207"/>
       </p:ext>
     </p:extLst>
   </p:cSld>
@@ -27257,7 +27257,7 @@
           <p:cNvPr id="10" name="Cisco 7945G: model and inventory">
             <a:extLst xmlns:a="http://schemas.openxmlformats.org/drawingml/2006/main">
               <a:ext uri="{FF2B5EF4-FFF2-40B4-BE49-F238E27FC236}">
-                <a16:creationId xmlns:a16="http://schemas.microsoft.com/office/drawing/2014/main" id="{15EF9766-090A-46A6-B489-EB50BBF251D1}"/>
+                <a16:creationId xmlns:a16="http://schemas.microsoft.com/office/drawing/2014/main" id="{E9A9820C-AE34-4D4F-B3F8-E1F693999BB6}"/>
               </a:ext>
             </a:extLst>
           </p:cNvPr>
@@ -27415,7 +27415,7 @@
           <p:cNvPr id="2" name="02">
             <a:extLst xmlns:a="http://schemas.openxmlformats.org/drawingml/2006/main">
               <a:ext uri="{FF2B5EF4-FFF2-40B4-BE49-F238E27FC236}">
-                <a16:creationId xmlns:a16="http://schemas.microsoft.com/office/drawing/2014/main" id="{CE6257AC-A53B-4D56-8908-7EB09A561EB9}"/>
+                <a16:creationId xmlns:a16="http://schemas.microsoft.com/office/drawing/2014/main" id="{8AB7DCC8-4B7D-4CA1-AEF1-535F9D431AEC}"/>
               </a:ext>
             </a:extLst>
           </p:cNvPr>
@@ -27573,7 +27573,7 @@
           <p:cNvPr id="3" name="2">
             <a:extLst xmlns:a="http://schemas.openxmlformats.org/drawingml/2006/main">
               <a:ext uri="{FF2B5EF4-FFF2-40B4-BE49-F238E27FC236}">
-                <a16:creationId xmlns:a16="http://schemas.microsoft.com/office/drawing/2014/main" id="{28ABBF32-5475-4D66-A0A8-997916124CF2}"/>
+                <a16:creationId xmlns:a16="http://schemas.microsoft.com/office/drawing/2014/main" id="{8A9C1CCD-86A8-46D0-910F-68DF8706BD02}"/>
               </a:ext>
             </a:extLst>
           </p:cNvPr>
@@ -27731,7 +27731,7 @@
           <p:cNvPr id="4" name="SIP lines">
             <a:extLst xmlns:a="http://schemas.openxmlformats.org/drawingml/2006/main">
               <a:ext uri="{FF2B5EF4-FFF2-40B4-BE49-F238E27FC236}">
-                <a16:creationId xmlns:a16="http://schemas.microsoft.com/office/drawing/2014/main" id="{DA7299C4-9651-4BFB-B4E0-3E32ABC21444}"/>
+                <a16:creationId xmlns:a16="http://schemas.microsoft.com/office/drawing/2014/main" id="{499DF222-476D-4BE7-96E2-66F96D30EBC6}"/>
               </a:ext>
             </a:extLst>
           </p:cNvPr>
@@ -27889,7 +27889,7 @@
           <p:cNvPr id="5" name="Native 802.3af">
             <a:extLst xmlns:a="http://schemas.openxmlformats.org/drawingml/2006/main">
               <a:ext uri="{FF2B5EF4-FFF2-40B4-BE49-F238E27FC236}">
-                <a16:creationId xmlns:a16="http://schemas.microsoft.com/office/drawing/2014/main" id="{4B7A3058-835F-4304-8178-DBA2E37C6EEB}"/>
+                <a16:creationId xmlns:a16="http://schemas.microsoft.com/office/drawing/2014/main" id="{6CA4C9C3-4A53-4858-9015-D01A2CE2476A}"/>
               </a:ext>
             </a:extLst>
           </p:cNvPr>
@@ -28047,7 +28047,7 @@
           <p:cNvPr id="6" name="7945_7965 SIP firmware family">
             <a:extLst xmlns:a="http://schemas.openxmlformats.org/drawingml/2006/main">
               <a:ext uri="{FF2B5EF4-FFF2-40B4-BE49-F238E27FC236}">
-                <a16:creationId xmlns:a16="http://schemas.microsoft.com/office/drawing/2014/main" id="{57EAABA4-DA4E-4006-94C9-2323B35B1D38}"/>
+                <a16:creationId xmlns:a16="http://schemas.microsoft.com/office/drawing/2014/main" id="{9E104A18-6002-40BD-894D-60A2FFB8DFB4}"/>
               </a:ext>
             </a:extLst>
           </p:cNvPr>
@@ -28205,7 +28205,7 @@
           <p:cNvPr id="7" name="A phone running SCCP needs SIP firmware.&#10;This model does not need">
             <a:extLst xmlns:a="http://schemas.openxmlformats.org/drawingml/2006/main">
               <a:ext uri="{FF2B5EF4-FFF2-40B4-BE49-F238E27FC236}">
-                <a16:creationId xmlns:a16="http://schemas.microsoft.com/office/drawing/2014/main" id="{7A833FB9-6E15-450B-8CEE-DBF2475F0024}"/>
+                <a16:creationId xmlns:a16="http://schemas.microsoft.com/office/drawing/2014/main" id="{BCBF52C7-35BD-444B-A9E4-B2136C6E74BA}"/>
               </a:ext>
             </a:extLst>
           </p:cNvPr>
@@ -28386,7 +28386,7 @@
           <p:cNvPr id="8" name="Before starting">
             <a:extLst xmlns:a="http://schemas.openxmlformats.org/drawingml/2006/main">
               <a:ext uri="{FF2B5EF4-FFF2-40B4-BE49-F238E27FC236}">
-                <a16:creationId xmlns:a16="http://schemas.microsoft.com/office/drawing/2014/main" id="{04514A9C-B431-4400-819F-F26CEF6FFEB6}"/>
+                <a16:creationId xmlns:a16="http://schemas.microsoft.com/office/drawing/2014/main" id="{6CD01270-6FE6-4421-BF9B-9DB915C0238F}"/>
               </a:ext>
             </a:extLst>
           </p:cNvPr>
@@ -28544,7 +28544,7 @@
           <p:cNvPr id="9" name="Record PID, VID/HW, MAC, App Load,&#10;Boot Load, IP and TFTP for eve">
             <a:extLst xmlns:a="http://schemas.openxmlformats.org/drawingml/2006/main">
               <a:ext uri="{FF2B5EF4-FFF2-40B4-BE49-F238E27FC236}">
-                <a16:creationId xmlns:a16="http://schemas.microsoft.com/office/drawing/2014/main" id="{3149A48E-1AF5-4371-A220-DADD01800726}"/>
+                <a16:creationId xmlns:a16="http://schemas.microsoft.com/office/drawing/2014/main" id="{5ACFAA04-3D0A-4226-9637-19B455554032}"/>
               </a:ext>
             </a:extLst>
           </p:cNvPr>
@@ -28723,7 +28723,7 @@
     </p:spTree>
     <p:extLst>
       <p:ext uri="{BB962C8B-B14F-4D97-AF65-F5344CB8AC3E}">
-        <p14:creationId xmlns:p14="http://schemas.microsoft.com/office/powerpoint/2010/main" val="1536221638"/>
+        <p14:creationId xmlns:p14="http://schemas.microsoft.com/office/powerpoint/2010/main" val="1006207186"/>
       </p:ext>
     </p:extLst>
   </p:cSld>
@@ -28754,7 +28754,7 @@
           <p:cNvPr id="17" name="">
             <a:extLst xmlns:a="http://schemas.openxmlformats.org/drawingml/2006/main">
               <a:ext uri="{FF2B5EF4-FFF2-40B4-BE49-F238E27FC236}">
-                <a16:creationId xmlns:a16="http://schemas.microsoft.com/office/drawing/2014/main" id="{18BC9DFD-F53E-4FB1-9ADA-93F1C5E992A2}"/>
+                <a16:creationId xmlns:a16="http://schemas.microsoft.com/office/drawing/2014/main" id="{8810B0B0-70BA-4D03-B574-38C1905B64A0}"/>
               </a:ext>
             </a:extLst>
           </p:cNvPr>
@@ -28786,7 +28786,7 @@
           <p:cNvPr id="15" name="">
             <a:extLst xmlns:a="http://schemas.openxmlformats.org/drawingml/2006/main">
               <a:ext uri="{FF2B5EF4-FFF2-40B4-BE49-F238E27FC236}">
-                <a16:creationId xmlns:a16="http://schemas.microsoft.com/office/drawing/2014/main" id="{4D019C30-C99D-4A98-99C0-081CECA00624}"/>
+                <a16:creationId xmlns:a16="http://schemas.microsoft.com/office/drawing/2014/main" id="{FEA30716-FD6D-44E7-9BFB-77E787D5FB62}"/>
               </a:ext>
             </a:extLst>
           </p:cNvPr>
@@ -28817,7 +28817,7 @@
           <p:cNvPr id="13" name="">
             <a:extLst xmlns:a="http://schemas.openxmlformats.org/drawingml/2006/main">
               <a:ext uri="{FF2B5EF4-FFF2-40B4-BE49-F238E27FC236}">
-                <a16:creationId xmlns:a16="http://schemas.microsoft.com/office/drawing/2014/main" id="{708C1BE8-1FA2-470F-BE53-749EEB931014}"/>
+                <a16:creationId xmlns:a16="http://schemas.microsoft.com/office/drawing/2014/main" id="{B7265C4C-C624-4953-9E45-EDC5E7E672B2}"/>
               </a:ext>
             </a:extLst>
           </p:cNvPr>
@@ -28848,7 +28848,7 @@
           <p:cNvPr id="11" name="">
             <a:extLst xmlns:a="http://schemas.openxmlformats.org/drawingml/2006/main">
               <a:ext uri="{FF2B5EF4-FFF2-40B4-BE49-F238E27FC236}">
-                <a16:creationId xmlns:a16="http://schemas.microsoft.com/office/drawing/2014/main" id="{B35B6F64-2E32-43AD-A491-269C320F4223}"/>
+                <a16:creationId xmlns:a16="http://schemas.microsoft.com/office/drawing/2014/main" id="{DA7E9AAA-DCAB-4173-96A4-02A7274971A0}"/>
               </a:ext>
             </a:extLst>
           </p:cNvPr>
@@ -28880,7 +28880,7 @@
           <p:cNvPr id="9" name="">
             <a:extLst xmlns:a="http://schemas.openxmlformats.org/drawingml/2006/main">
               <a:ext uri="{FF2B5EF4-FFF2-40B4-BE49-F238E27FC236}">
-                <a16:creationId xmlns:a16="http://schemas.microsoft.com/office/drawing/2014/main" id="{B23046B7-9D71-4E2A-AC16-DF5605A36051}"/>
+                <a16:creationId xmlns:a16="http://schemas.microsoft.com/office/drawing/2014/main" id="{D2008A28-9AF9-443B-98F9-6679FF7FF3A6}"/>
               </a:ext>
             </a:extLst>
           </p:cNvPr>
@@ -28912,7 +28912,7 @@
           <p:cNvPr id="20" name="Cisco, Asterisk and Home Assistant">
             <a:extLst xmlns:a="http://schemas.openxmlformats.org/drawingml/2006/main">
               <a:ext uri="{FF2B5EF4-FFF2-40B4-BE49-F238E27FC236}">
-                <a16:creationId xmlns:a16="http://schemas.microsoft.com/office/drawing/2014/main" id="{64499B19-2F31-4A54-8C81-D8A3892841B9}"/>
+                <a16:creationId xmlns:a16="http://schemas.microsoft.com/office/drawing/2014/main" id="{1871254C-565E-415B-954F-FD71D3985359}"/>
               </a:ext>
             </a:extLst>
           </p:cNvPr>
@@ -29070,7 +29070,7 @@
           <p:cNvPr id="2" name="03">
             <a:extLst xmlns:a="http://schemas.openxmlformats.org/drawingml/2006/main">
               <a:ext uri="{FF2B5EF4-FFF2-40B4-BE49-F238E27FC236}">
-                <a16:creationId xmlns:a16="http://schemas.microsoft.com/office/drawing/2014/main" id="{632905B5-31AC-4219-A952-BDE8CBB143CA}"/>
+                <a16:creationId xmlns:a16="http://schemas.microsoft.com/office/drawing/2014/main" id="{055A42B9-F81E-4AEF-A240-47A36A631CA5}"/>
               </a:ext>
             </a:extLst>
           </p:cNvPr>
@@ -29228,7 +29228,7 @@
           <p:cNvPr id="3" name="phones">
             <a:extLst xmlns:a="http://schemas.openxmlformats.org/drawingml/2006/main">
               <a:ext uri="{FF2B5EF4-FFF2-40B4-BE49-F238E27FC236}">
-                <a16:creationId xmlns:a16="http://schemas.microsoft.com/office/drawing/2014/main" id="{15BE453A-C13A-4EC2-AA92-732B9124B6C2}"/>
+                <a16:creationId xmlns:a16="http://schemas.microsoft.com/office/drawing/2014/main" id="{E22360F7-6486-44C0-94DB-ABF3C7A05544}"/>
               </a:ext>
             </a:extLst>
           </p:cNvPr>
@@ -29415,7 +29415,7 @@
           <p:cNvPr id="4" name="switch">
             <a:extLst xmlns:a="http://schemas.openxmlformats.org/drawingml/2006/main">
               <a:ext uri="{FF2B5EF4-FFF2-40B4-BE49-F238E27FC236}">
-                <a16:creationId xmlns:a16="http://schemas.microsoft.com/office/drawing/2014/main" id="{685CC3DA-8372-4E23-9448-8798495FC798}"/>
+                <a16:creationId xmlns:a16="http://schemas.microsoft.com/office/drawing/2014/main" id="{D4F20B57-739E-41B2-931F-57A80A7A71BE}"/>
               </a:ext>
             </a:extLst>
           </p:cNvPr>
@@ -29602,7 +29602,7 @@
           <p:cNvPr id="5" name="ast">
             <a:extLst xmlns:a="http://schemas.openxmlformats.org/drawingml/2006/main">
               <a:ext uri="{FF2B5EF4-FFF2-40B4-BE49-F238E27FC236}">
-                <a16:creationId xmlns:a16="http://schemas.microsoft.com/office/drawing/2014/main" id="{90D70199-9CD2-42A4-9868-60561037E805}"/>
+                <a16:creationId xmlns:a16="http://schemas.microsoft.com/office/drawing/2014/main" id="{63017F86-A46D-41F4-BD33-3AF619EA0EBB}"/>
               </a:ext>
             </a:extLst>
           </p:cNvPr>
@@ -29789,7 +29789,7 @@
           <p:cNvPr id="6" name="router">
             <a:extLst xmlns:a="http://schemas.openxmlformats.org/drawingml/2006/main">
               <a:ext uri="{FF2B5EF4-FFF2-40B4-BE49-F238E27FC236}">
-                <a16:creationId xmlns:a16="http://schemas.microsoft.com/office/drawing/2014/main" id="{9B70D400-2878-4EB3-8592-6B616052CD45}"/>
+                <a16:creationId xmlns:a16="http://schemas.microsoft.com/office/drawing/2014/main" id="{183B6B48-315C-4C10-A539-AF83CFC6AF44}"/>
               </a:ext>
             </a:extLst>
           </p:cNvPr>
@@ -29976,7 +29976,7 @@
           <p:cNvPr id="7" name="tftp">
             <a:extLst xmlns:a="http://schemas.openxmlformats.org/drawingml/2006/main">
               <a:ext uri="{FF2B5EF4-FFF2-40B4-BE49-F238E27FC236}">
-                <a16:creationId xmlns:a16="http://schemas.microsoft.com/office/drawing/2014/main" id="{40FAD31E-F617-4547-84FE-939CB8A4656B}"/>
+                <a16:creationId xmlns:a16="http://schemas.microsoft.com/office/drawing/2014/main" id="{97BA39D5-1819-4C2D-9093-C6328600288B}"/>
               </a:ext>
             </a:extLst>
           </p:cNvPr>
@@ -30163,7 +30163,7 @@
           <p:cNvPr id="8" name="ha">
             <a:extLst xmlns:a="http://schemas.openxmlformats.org/drawingml/2006/main">
               <a:ext uri="{FF2B5EF4-FFF2-40B4-BE49-F238E27FC236}">
-                <a16:creationId xmlns:a16="http://schemas.microsoft.com/office/drawing/2014/main" id="{E66BF2F2-EB0B-434A-B727-00441617792A}"/>
+                <a16:creationId xmlns:a16="http://schemas.microsoft.com/office/drawing/2014/main" id="{BFBC58DE-B4FA-4AAA-9BFA-814EFDA0645C}"/>
               </a:ext>
             </a:extLst>
           </p:cNvPr>
@@ -30350,7 +30350,7 @@
           <p:cNvPr id="10" name="Ethernet">
             <a:extLst xmlns:a="http://schemas.openxmlformats.org/drawingml/2006/main">
               <a:ext uri="{FF2B5EF4-FFF2-40B4-BE49-F238E27FC236}">
-                <a16:creationId xmlns:a16="http://schemas.microsoft.com/office/drawing/2014/main" id="{7B56B320-CE95-49D7-BBBB-9DD7EBFD756C}"/>
+                <a16:creationId xmlns:a16="http://schemas.microsoft.com/office/drawing/2014/main" id="{DB44BEF6-EF13-4914-AE62-08F84EE1813D}"/>
               </a:ext>
             </a:extLst>
           </p:cNvPr>
@@ -30508,7 +30508,7 @@
           <p:cNvPr id="12" name="SIP / RTP">
             <a:extLst xmlns:a="http://schemas.openxmlformats.org/drawingml/2006/main">
               <a:ext uri="{FF2B5EF4-FFF2-40B4-BE49-F238E27FC236}">
-                <a16:creationId xmlns:a16="http://schemas.microsoft.com/office/drawing/2014/main" id="{4FE26089-D36C-4624-A10D-C77707A3AD2E}"/>
+                <a16:creationId xmlns:a16="http://schemas.microsoft.com/office/drawing/2014/main" id="{207F6FCD-0346-4090-BED8-455D753D3093}"/>
               </a:ext>
             </a:extLst>
           </p:cNvPr>
@@ -30666,7 +30666,7 @@
           <p:cNvPr id="14" name="DHCP">
             <a:extLst xmlns:a="http://schemas.openxmlformats.org/drawingml/2006/main">
               <a:ext uri="{FF2B5EF4-FFF2-40B4-BE49-F238E27FC236}">
-                <a16:creationId xmlns:a16="http://schemas.microsoft.com/office/drawing/2014/main" id="{57D97531-D4BA-4BCE-B8E7-7D0ABB3F318F}"/>
+                <a16:creationId xmlns:a16="http://schemas.microsoft.com/office/drawing/2014/main" id="{1D6BA198-276B-43C6-82D7-F19D92CAA184}"/>
               </a:ext>
             </a:extLst>
           </p:cNvPr>
@@ -30824,7 +30824,7 @@
           <p:cNvPr id="16" name="download">
             <a:extLst xmlns:a="http://schemas.openxmlformats.org/drawingml/2006/main">
               <a:ext uri="{FF2B5EF4-FFF2-40B4-BE49-F238E27FC236}">
-                <a16:creationId xmlns:a16="http://schemas.microsoft.com/office/drawing/2014/main" id="{C1DD3A92-E636-439A-B423-398058C163DC}"/>
+                <a16:creationId xmlns:a16="http://schemas.microsoft.com/office/drawing/2014/main" id="{93B9D7C5-DE70-4E4D-BA74-5A5724AF298F}"/>
               </a:ext>
             </a:extLst>
           </p:cNvPr>
@@ -30982,7 +30982,7 @@
           <p:cNvPr id="18" name="AMI&#10;SIP / RTP">
             <a:extLst xmlns:a="http://schemas.openxmlformats.org/drawingml/2006/main">
               <a:ext uri="{FF2B5EF4-FFF2-40B4-BE49-F238E27FC236}">
-                <a16:creationId xmlns:a16="http://schemas.microsoft.com/office/drawing/2014/main" id="{84A45B16-7140-493D-B9DA-E5D11E034E48}"/>
+                <a16:creationId xmlns:a16="http://schemas.microsoft.com/office/drawing/2014/main" id="{D35A3813-D6A4-4714-9862-26604F6F84C1}"/>
               </a:ext>
             </a:extLst>
           </p:cNvPr>
@@ -31163,7 +31163,7 @@
           <p:cNvPr id="19" name="Asterisk uses hostNetwork and one replica. HA opens the AMI conne">
             <a:extLst xmlns:a="http://schemas.openxmlformats.org/drawingml/2006/main">
               <a:ext uri="{FF2B5EF4-FFF2-40B4-BE49-F238E27FC236}">
-                <a16:creationId xmlns:a16="http://schemas.microsoft.com/office/drawing/2014/main" id="{9861F5BB-19E0-454B-B136-0EE39EB71161}"/>
+                <a16:creationId xmlns:a16="http://schemas.microsoft.com/office/drawing/2014/main" id="{32A3C9B8-2A1B-4BDB-87DF-6699D72758F0}"/>
               </a:ext>
             </a:extLst>
           </p:cNvPr>
@@ -31342,7 +31342,7 @@
     </p:spTree>
     <p:extLst>
       <p:ext uri="{BB962C8B-B14F-4D97-AF65-F5344CB8AC3E}">
-        <p14:creationId xmlns:p14="http://schemas.microsoft.com/office/powerpoint/2010/main" val="1130143453"/>
+        <p14:creationId xmlns:p14="http://schemas.microsoft.com/office/powerpoint/2010/main" val="986772296"/>
       </p:ext>
     </p:extLst>
   </p:cSld>
@@ -31373,7 +31373,7 @@
           <p:cNvPr id="16" name="Signaling and audio ports">
             <a:extLst xmlns:a="http://schemas.openxmlformats.org/drawingml/2006/main">
               <a:ext uri="{FF2B5EF4-FFF2-40B4-BE49-F238E27FC236}">
-                <a16:creationId xmlns:a16="http://schemas.microsoft.com/office/drawing/2014/main" id="{02FBA9FA-E602-4DAA-9B4A-37F888795313}"/>
+                <a16:creationId xmlns:a16="http://schemas.microsoft.com/office/drawing/2014/main" id="{ADFB3144-41BB-4B5C-8ACD-EBBFD36F925C}"/>
               </a:ext>
             </a:extLst>
           </p:cNvPr>
@@ -31531,7 +31531,7 @@
           <p:cNvPr id="2" name="04">
             <a:extLst xmlns:a="http://schemas.openxmlformats.org/drawingml/2006/main">
               <a:ext uri="{FF2B5EF4-FFF2-40B4-BE49-F238E27FC236}">
-                <a16:creationId xmlns:a16="http://schemas.microsoft.com/office/drawing/2014/main" id="{2CCD3C0A-C458-4480-ADD8-BA011EB923AF}"/>
+                <a16:creationId xmlns:a16="http://schemas.microsoft.com/office/drawing/2014/main" id="{F3DC872E-BAA9-4A56-B12D-F2752D4D2405}"/>
               </a:ext>
             </a:extLst>
           </p:cNvPr>
@@ -31689,7 +31689,7 @@
           <p:cNvPr id="3" name="5060">
             <a:extLst xmlns:a="http://schemas.openxmlformats.org/drawingml/2006/main">
               <a:ext uri="{FF2B5EF4-FFF2-40B4-BE49-F238E27FC236}">
-                <a16:creationId xmlns:a16="http://schemas.microsoft.com/office/drawing/2014/main" id="{C6713FE2-19A8-4C93-9465-6843D11EA182}"/>
+                <a16:creationId xmlns:a16="http://schemas.microsoft.com/office/drawing/2014/main" id="{AFE992A6-B141-44DC-A8A2-5586C56C56E6}"/>
               </a:ext>
             </a:extLst>
           </p:cNvPr>
@@ -31847,7 +31847,7 @@
           <p:cNvPr id="4" name="TCP / UDP">
             <a:extLst xmlns:a="http://schemas.openxmlformats.org/drawingml/2006/main">
               <a:ext uri="{FF2B5EF4-FFF2-40B4-BE49-F238E27FC236}">
-                <a16:creationId xmlns:a16="http://schemas.microsoft.com/office/drawing/2014/main" id="{988DE252-B2D4-40F9-8D7A-B4051FEA5889}"/>
+                <a16:creationId xmlns:a16="http://schemas.microsoft.com/office/drawing/2014/main" id="{C4718C9F-8000-4C81-9899-0F7C23E75407}"/>
               </a:ext>
             </a:extLst>
           </p:cNvPr>
@@ -32005,7 +32005,7 @@
           <p:cNvPr id="5" name="SIP: Cisco TCP, HA UDP">
             <a:extLst xmlns:a="http://schemas.openxmlformats.org/drawingml/2006/main">
               <a:ext uri="{FF2B5EF4-FFF2-40B4-BE49-F238E27FC236}">
-                <a16:creationId xmlns:a16="http://schemas.microsoft.com/office/drawing/2014/main" id="{2A7FE69A-3C19-4B26-928F-CBD6B1D9C7B9}"/>
+                <a16:creationId xmlns:a16="http://schemas.microsoft.com/office/drawing/2014/main" id="{0A913162-B37D-48E8-9AE2-199597644B87}"/>
               </a:ext>
             </a:extLst>
           </p:cNvPr>
@@ -32163,7 +32163,7 @@
           <p:cNvPr id="6" name="10000–10199">
             <a:extLst xmlns:a="http://schemas.openxmlformats.org/drawingml/2006/main">
               <a:ext uri="{FF2B5EF4-FFF2-40B4-BE49-F238E27FC236}">
-                <a16:creationId xmlns:a16="http://schemas.microsoft.com/office/drawing/2014/main" id="{716F4B58-D328-4E48-93FE-154D01FAF1A7}"/>
+                <a16:creationId xmlns:a16="http://schemas.microsoft.com/office/drawing/2014/main" id="{1A5D1114-DE2C-4FBF-9208-5EAC4C66D499}"/>
               </a:ext>
             </a:extLst>
           </p:cNvPr>
@@ -32321,7 +32321,7 @@
           <p:cNvPr id="7" name="UDP on PBX">
             <a:extLst xmlns:a="http://schemas.openxmlformats.org/drawingml/2006/main">
               <a:ext uri="{FF2B5EF4-FFF2-40B4-BE49-F238E27FC236}">
-                <a16:creationId xmlns:a16="http://schemas.microsoft.com/office/drawing/2014/main" id="{1AE030F9-457E-45D8-A41E-58EDC8D2D16B}"/>
+                <a16:creationId xmlns:a16="http://schemas.microsoft.com/office/drawing/2014/main" id="{F781C6B1-C17C-45B1-9FD6-170F4FDF0B66}"/>
               </a:ext>
             </a:extLst>
           </p:cNvPr>
@@ -32479,7 +32479,7 @@
           <p:cNvPr id="8" name="RTP / audio">
             <a:extLst xmlns:a="http://schemas.openxmlformats.org/drawingml/2006/main">
               <a:ext uri="{FF2B5EF4-FFF2-40B4-BE49-F238E27FC236}">
-                <a16:creationId xmlns:a16="http://schemas.microsoft.com/office/drawing/2014/main" id="{377A2E9F-4AC0-4AD1-B1D8-288A507FAB9E}"/>
+                <a16:creationId xmlns:a16="http://schemas.microsoft.com/office/drawing/2014/main" id="{749C2385-F20C-4664-BC95-28C400DEEFE7}"/>
               </a:ext>
             </a:extLst>
           </p:cNvPr>
@@ -32637,7 +32637,7 @@
           <p:cNvPr id="9" name="5038">
             <a:extLst xmlns:a="http://schemas.openxmlformats.org/drawingml/2006/main">
               <a:ext uri="{FF2B5EF4-FFF2-40B4-BE49-F238E27FC236}">
-                <a16:creationId xmlns:a16="http://schemas.microsoft.com/office/drawing/2014/main" id="{3039C12F-B282-4C5F-B5DF-FE2327DEBF7B}"/>
+                <a16:creationId xmlns:a16="http://schemas.microsoft.com/office/drawing/2014/main" id="{ED47606E-B600-4392-84DF-0C6D430EB423}"/>
               </a:ext>
             </a:extLst>
           </p:cNvPr>
@@ -32795,7 +32795,7 @@
           <p:cNvPr id="10" name="TCP on PBX">
             <a:extLst xmlns:a="http://schemas.openxmlformats.org/drawingml/2006/main">
               <a:ext uri="{FF2B5EF4-FFF2-40B4-BE49-F238E27FC236}">
-                <a16:creationId xmlns:a16="http://schemas.microsoft.com/office/drawing/2014/main" id="{E45B483B-F89A-4548-AB71-207B14CF14B6}"/>
+                <a16:creationId xmlns:a16="http://schemas.microsoft.com/office/drawing/2014/main" id="{3FA8DF12-E4C3-4D54-AD93-F82FCA445916}"/>
               </a:ext>
             </a:extLst>
           </p:cNvPr>
@@ -32953,7 +32953,7 @@
           <p:cNvPr id="11" name="AMI: HA / gateway /32">
             <a:extLst xmlns:a="http://schemas.openxmlformats.org/drawingml/2006/main">
               <a:ext uri="{FF2B5EF4-FFF2-40B4-BE49-F238E27FC236}">
-                <a16:creationId xmlns:a16="http://schemas.microsoft.com/office/drawing/2014/main" id="{C780E3E4-1805-4C18-BE5E-61F7B171F030}"/>
+                <a16:creationId xmlns:a16="http://schemas.microsoft.com/office/drawing/2014/main" id="{D1E900A9-81A2-4C07-A783-2031E0955051}"/>
               </a:ext>
             </a:extLst>
           </p:cNvPr>
@@ -33111,7 +33111,7 @@
           <p:cNvPr id="12" name="69 + 20000–20031">
             <a:extLst xmlns:a="http://schemas.openxmlformats.org/drawingml/2006/main">
               <a:ext uri="{FF2B5EF4-FFF2-40B4-BE49-F238E27FC236}">
-                <a16:creationId xmlns:a16="http://schemas.microsoft.com/office/drawing/2014/main" id="{361DDF65-361B-4681-BDD3-71913463D258}"/>
+                <a16:creationId xmlns:a16="http://schemas.microsoft.com/office/drawing/2014/main" id="{B459CB49-6EBE-4A54-8E58-090B73D162A4}"/>
               </a:ext>
             </a:extLst>
           </p:cNvPr>
@@ -33269,7 +33269,7 @@
           <p:cNvPr id="13" name="UDP on PBX">
             <a:extLst xmlns:a="http://schemas.openxmlformats.org/drawingml/2006/main">
               <a:ext uri="{FF2B5EF4-FFF2-40B4-BE49-F238E27FC236}">
-                <a16:creationId xmlns:a16="http://schemas.microsoft.com/office/drawing/2014/main" id="{E86189F7-77AD-4880-AA15-2A4369264739}"/>
+                <a16:creationId xmlns:a16="http://schemas.microsoft.com/office/drawing/2014/main" id="{9AEA1A8D-822D-46C8-9F19-38A709939E77}"/>
               </a:ext>
             </a:extLst>
           </p:cNvPr>
@@ -33427,7 +33427,7 @@
           <p:cNvPr id="14" name="Temporary TFTP">
             <a:extLst xmlns:a="http://schemas.openxmlformats.org/drawingml/2006/main">
               <a:ext uri="{FF2B5EF4-FFF2-40B4-BE49-F238E27FC236}">
-                <a16:creationId xmlns:a16="http://schemas.microsoft.com/office/drawing/2014/main" id="{AB29F116-F4D9-49FF-A2AC-3678B65E36AC}"/>
+                <a16:creationId xmlns:a16="http://schemas.microsoft.com/office/drawing/2014/main" id="{6869902D-D676-4B0B-8DC3-A76469F9F016}"/>
               </a:ext>
             </a:extLst>
           </p:cNvPr>
@@ -33585,7 +33585,7 @@
           <p:cNvPr id="15" name="HA uses dynamic RTP / RTCP ports. Restrict firewall rules to the ">
             <a:extLst xmlns:a="http://schemas.openxmlformats.org/drawingml/2006/main">
               <a:ext uri="{FF2B5EF4-FFF2-40B4-BE49-F238E27FC236}">
-                <a16:creationId xmlns:a16="http://schemas.microsoft.com/office/drawing/2014/main" id="{B6DD4733-7DE5-4F30-9F32-0793C4FB7E6A}"/>
+                <a16:creationId xmlns:a16="http://schemas.microsoft.com/office/drawing/2014/main" id="{C29160F1-0FD7-4FBB-AEA7-5E77C66E6F3C}"/>
               </a:ext>
             </a:extLst>
           </p:cNvPr>
@@ -33741,7 +33741,7 @@
     </p:spTree>
     <p:extLst>
       <p:ext uri="{BB962C8B-B14F-4D97-AF65-F5344CB8AC3E}">
-        <p14:creationId xmlns:p14="http://schemas.microsoft.com/office/powerpoint/2010/main" val="1539451525"/>
+        <p14:creationId xmlns:p14="http://schemas.microsoft.com/office/powerpoint/2010/main" val="618140235"/>
       </p:ext>
     </p:extLst>
   </p:cSld>
@@ -33772,7 +33772,7 @@
           <p:cNvPr id="12" name="">
             <a:extLst xmlns:a="http://schemas.openxmlformats.org/drawingml/2006/main">
               <a:ext uri="{FF2B5EF4-FFF2-40B4-BE49-F238E27FC236}">
-                <a16:creationId xmlns:a16="http://schemas.microsoft.com/office/drawing/2014/main" id="{D651970D-577F-4017-8147-E9CA8F997769}"/>
+                <a16:creationId xmlns:a16="http://schemas.microsoft.com/office/drawing/2014/main" id="{CF03186D-2341-484C-9087-D1D920A182D0}"/>
               </a:ext>
             </a:extLst>
           </p:cNvPr>
@@ -33803,7 +33803,7 @@
           <p:cNvPr id="10" name="">
             <a:extLst xmlns:a="http://schemas.openxmlformats.org/drawingml/2006/main">
               <a:ext uri="{FF2B5EF4-FFF2-40B4-BE49-F238E27FC236}">
-                <a16:creationId xmlns:a16="http://schemas.microsoft.com/office/drawing/2014/main" id="{59D2B0A9-B027-45AD-98B4-AE99BEE208F5}"/>
+                <a16:creationId xmlns:a16="http://schemas.microsoft.com/office/drawing/2014/main" id="{7057982E-9C0D-4B69-966D-BAD6215B6F19}"/>
               </a:ext>
             </a:extLst>
           </p:cNvPr>
@@ -33834,7 +33834,7 @@
           <p:cNvPr id="8" name="">
             <a:extLst xmlns:a="http://schemas.openxmlformats.org/drawingml/2006/main">
               <a:ext uri="{FF2B5EF4-FFF2-40B4-BE49-F238E27FC236}">
-                <a16:creationId xmlns:a16="http://schemas.microsoft.com/office/drawing/2014/main" id="{3BE57381-13CB-4510-B80C-602235D477AE}"/>
+                <a16:creationId xmlns:a16="http://schemas.microsoft.com/office/drawing/2014/main" id="{782EF5CC-898A-4AAA-B7CF-8419D053DF16}"/>
               </a:ext>
             </a:extLst>
           </p:cNvPr>
@@ -33865,7 +33865,7 @@
           <p:cNvPr id="15" name="7945G has built-in PoE support">
             <a:extLst xmlns:a="http://schemas.openxmlformats.org/drawingml/2006/main">
               <a:ext uri="{FF2B5EF4-FFF2-40B4-BE49-F238E27FC236}">
-                <a16:creationId xmlns:a16="http://schemas.microsoft.com/office/drawing/2014/main" id="{31E97BF2-3617-4FBE-B52E-DFB71CF77357}"/>
+                <a16:creationId xmlns:a16="http://schemas.microsoft.com/office/drawing/2014/main" id="{1F532AD0-5B12-4290-B313-C14461E84BEC}"/>
               </a:ext>
             </a:extLst>
           </p:cNvPr>
@@ -34023,7 +34023,7 @@
           <p:cNvPr id="2" name="05">
             <a:extLst xmlns:a="http://schemas.openxmlformats.org/drawingml/2006/main">
               <a:ext uri="{FF2B5EF4-FFF2-40B4-BE49-F238E27FC236}">
-                <a16:creationId xmlns:a16="http://schemas.microsoft.com/office/drawing/2014/main" id="{F9533124-FD76-417A-B3CA-0576D312D2BE}"/>
+                <a16:creationId xmlns:a16="http://schemas.microsoft.com/office/drawing/2014/main" id="{FDE7E7B7-CEE3-4CA3-85E3-CB7A696BB3CB}"/>
               </a:ext>
             </a:extLst>
           </p:cNvPr>
@@ -34181,7 +34181,7 @@
           <p:cNvPr id="3" name="poe">
             <a:extLst xmlns:a="http://schemas.openxmlformats.org/drawingml/2006/main">
               <a:ext uri="{FF2B5EF4-FFF2-40B4-BE49-F238E27FC236}">
-                <a16:creationId xmlns:a16="http://schemas.microsoft.com/office/drawing/2014/main" id="{E62AA785-D7EA-4D2A-8527-16379E4DBEE7}"/>
+                <a16:creationId xmlns:a16="http://schemas.microsoft.com/office/drawing/2014/main" id="{913256D3-1157-4D0E-B1C6-0A9AC20FA030}"/>
               </a:ext>
             </a:extLst>
           </p:cNvPr>
@@ -34368,7 +34368,7 @@
           <p:cNvPr id="4" name="phone1">
             <a:extLst xmlns:a="http://schemas.openxmlformats.org/drawingml/2006/main">
               <a:ext uri="{FF2B5EF4-FFF2-40B4-BE49-F238E27FC236}">
-                <a16:creationId xmlns:a16="http://schemas.microsoft.com/office/drawing/2014/main" id="{D29821C0-F62B-4335-A7B0-D7DF4C8C5570}"/>
+                <a16:creationId xmlns:a16="http://schemas.microsoft.com/office/drawing/2014/main" id="{4C4F0EA2-2973-42E4-863F-E0AB5B7E4B22}"/>
               </a:ext>
             </a:extLst>
           </p:cNvPr>
@@ -34555,7 +34555,7 @@
           <p:cNvPr id="5" name="lan">
             <a:extLst xmlns:a="http://schemas.openxmlformats.org/drawingml/2006/main">
               <a:ext uri="{FF2B5EF4-FFF2-40B4-BE49-F238E27FC236}">
-                <a16:creationId xmlns:a16="http://schemas.microsoft.com/office/drawing/2014/main" id="{63B15D34-97B6-4C61-95C5-2173B4F6EB01}"/>
+                <a16:creationId xmlns:a16="http://schemas.microsoft.com/office/drawing/2014/main" id="{18C166E8-02EA-438C-B3E7-7C14CCB308DF}"/>
               </a:ext>
             </a:extLst>
           </p:cNvPr>
@@ -34742,7 +34742,7 @@
           <p:cNvPr id="6" name="injector">
             <a:extLst xmlns:a="http://schemas.openxmlformats.org/drawingml/2006/main">
               <a:ext uri="{FF2B5EF4-FFF2-40B4-BE49-F238E27FC236}">
-                <a16:creationId xmlns:a16="http://schemas.microsoft.com/office/drawing/2014/main" id="{4278423D-91C6-4E25-8828-6CD5DBDF611A}"/>
+                <a16:creationId xmlns:a16="http://schemas.microsoft.com/office/drawing/2014/main" id="{4ED16FB4-516B-41EE-95E6-3F5BCB0C3169}"/>
               </a:ext>
             </a:extLst>
           </p:cNvPr>
@@ -34929,7 +34929,7 @@
           <p:cNvPr id="7" name="phone2">
             <a:extLst xmlns:a="http://schemas.openxmlformats.org/drawingml/2006/main">
               <a:ext uri="{FF2B5EF4-FFF2-40B4-BE49-F238E27FC236}">
-                <a16:creationId xmlns:a16="http://schemas.microsoft.com/office/drawing/2014/main" id="{55FCD764-DCB3-4D61-A3D7-9987F7E5957B}"/>
+                <a16:creationId xmlns:a16="http://schemas.microsoft.com/office/drawing/2014/main" id="{B0E6109A-3F30-4717-8938-A770191A191D}"/>
               </a:ext>
             </a:extLst>
           </p:cNvPr>
@@ -35116,7 +35116,7 @@
           <p:cNvPr id="9" name="data + power">
             <a:extLst xmlns:a="http://schemas.openxmlformats.org/drawingml/2006/main">
               <a:ext uri="{FF2B5EF4-FFF2-40B4-BE49-F238E27FC236}">
-                <a16:creationId xmlns:a16="http://schemas.microsoft.com/office/drawing/2014/main" id="{2AF88158-A4EE-4CAD-A60F-2976BF23F5E3}"/>
+                <a16:creationId xmlns:a16="http://schemas.microsoft.com/office/drawing/2014/main" id="{DEACA30B-B670-409A-A138-3CE25581A60E}"/>
               </a:ext>
             </a:extLst>
           </p:cNvPr>
@@ -35274,7 +35274,7 @@
           <p:cNvPr id="11" name="data">
             <a:extLst xmlns:a="http://schemas.openxmlformats.org/drawingml/2006/main">
               <a:ext uri="{FF2B5EF4-FFF2-40B4-BE49-F238E27FC236}">
-                <a16:creationId xmlns:a16="http://schemas.microsoft.com/office/drawing/2014/main" id="{3050FB94-0AD2-4519-B8CF-AB0FC23EF353}"/>
+                <a16:creationId xmlns:a16="http://schemas.microsoft.com/office/drawing/2014/main" id="{4A637FF0-32C4-433D-BF6D-0AC20422B09C}"/>
               </a:ext>
             </a:extLst>
           </p:cNvPr>
@@ -35432,7 +35432,7 @@
           <p:cNvPr id="13" name="PoE">
             <a:extLst xmlns:a="http://schemas.openxmlformats.org/drawingml/2006/main">
               <a:ext uri="{FF2B5EF4-FFF2-40B4-BE49-F238E27FC236}">
-                <a16:creationId xmlns:a16="http://schemas.microsoft.com/office/drawing/2014/main" id="{9C30E92E-A239-49A4-AAFB-9C410AE9ED0F}"/>
+                <a16:creationId xmlns:a16="http://schemas.microsoft.com/office/drawing/2014/main" id="{B20DF461-30FE-4CAB-91CD-B5FBDEC4F59A}"/>
               </a:ext>
             </a:extLst>
           </p:cNvPr>
@@ -35590,7 +35590,7 @@
           <p:cNvPr id="14" name="A passive 24 V injector is unsuitable. The UPS also needs to powe">
             <a:extLst xmlns:a="http://schemas.openxmlformats.org/drawingml/2006/main">
               <a:ext uri="{FF2B5EF4-FFF2-40B4-BE49-F238E27FC236}">
-                <a16:creationId xmlns:a16="http://schemas.microsoft.com/office/drawing/2014/main" id="{307DB303-EED6-4CF1-97FC-56D6D2964C42}"/>
+                <a16:creationId xmlns:a16="http://schemas.microsoft.com/office/drawing/2014/main" id="{530BCB0A-8770-4D67-AC9A-382AE0CEC04F}"/>
               </a:ext>
             </a:extLst>
           </p:cNvPr>
@@ -35746,7 +35746,7 @@
     </p:spTree>
     <p:extLst>
       <p:ext uri="{BB962C8B-B14F-4D97-AF65-F5344CB8AC3E}">
-        <p14:creationId xmlns:p14="http://schemas.microsoft.com/office/powerpoint/2010/main" val="182533156"/>
+        <p14:creationId xmlns:p14="http://schemas.microsoft.com/office/powerpoint/2010/main" val="1410708371"/>
       </p:ext>
     </p:extLst>
   </p:cSld>
@@ -35777,7 +35777,7 @@
           <p:cNvPr id="13" name="">
             <a:extLst xmlns:a="http://schemas.openxmlformats.org/drawingml/2006/main">
               <a:ext uri="{FF2B5EF4-FFF2-40B4-BE49-F238E27FC236}">
-                <a16:creationId xmlns:a16="http://schemas.microsoft.com/office/drawing/2014/main" id="{251C3059-CA4C-4DA6-B88A-FEF2C7339BFE}"/>
+                <a16:creationId xmlns:a16="http://schemas.microsoft.com/office/drawing/2014/main" id="{77F10AD4-769A-4F4A-8862-77373C564535}"/>
               </a:ext>
             </a:extLst>
           </p:cNvPr>
@@ -35808,7 +35808,7 @@
           <p:cNvPr id="12" name="">
             <a:extLst xmlns:a="http://schemas.openxmlformats.org/drawingml/2006/main">
               <a:ext uri="{FF2B5EF4-FFF2-40B4-BE49-F238E27FC236}">
-                <a16:creationId xmlns:a16="http://schemas.microsoft.com/office/drawing/2014/main" id="{44177214-185C-4092-8217-E35068936F26}"/>
+                <a16:creationId xmlns:a16="http://schemas.microsoft.com/office/drawing/2014/main" id="{D70085A4-7D08-4B81-8FD0-65E3E97395F7}"/>
               </a:ext>
             </a:extLst>
           </p:cNvPr>
@@ -35839,7 +35839,7 @@
           <p:cNvPr id="11" name="">
             <a:extLst xmlns:a="http://schemas.openxmlformats.org/drawingml/2006/main">
               <a:ext uri="{FF2B5EF4-FFF2-40B4-BE49-F238E27FC236}">
-                <a16:creationId xmlns:a16="http://schemas.microsoft.com/office/drawing/2014/main" id="{73F9E4BF-3B0E-4B45-BC15-D14E4407C0CF}"/>
+                <a16:creationId xmlns:a16="http://schemas.microsoft.com/office/drawing/2014/main" id="{4B26F8A8-6DBE-4980-9E8D-E9F269C6F68D}"/>
               </a:ext>
             </a:extLst>
           </p:cNvPr>
@@ -35870,7 +35870,7 @@
           <p:cNvPr id="10" name="">
             <a:extLst xmlns:a="http://schemas.openxmlformats.org/drawingml/2006/main">
               <a:ext uri="{FF2B5EF4-FFF2-40B4-BE49-F238E27FC236}">
-                <a16:creationId xmlns:a16="http://schemas.microsoft.com/office/drawing/2014/main" id="{6D31C885-5881-43D4-AC1B-C6FA6527A981}"/>
+                <a16:creationId xmlns:a16="http://schemas.microsoft.com/office/drawing/2014/main" id="{F73E6DD4-542F-44AE-94EA-A63639F5C741}"/>
               </a:ext>
             </a:extLst>
           </p:cNvPr>
@@ -35901,7 +35901,7 @@
           <p:cNvPr id="9" name="">
             <a:extLst xmlns:a="http://schemas.openxmlformats.org/drawingml/2006/main">
               <a:ext uri="{FF2B5EF4-FFF2-40B4-BE49-F238E27FC236}">
-                <a16:creationId xmlns:a16="http://schemas.microsoft.com/office/drawing/2014/main" id="{BC8F885C-52C8-40AC-94AF-D4F3956B6F10}"/>
+                <a16:creationId xmlns:a16="http://schemas.microsoft.com/office/drawing/2014/main" id="{8B93A437-E255-49E1-A924-456C7B52645B}"/>
               </a:ext>
             </a:extLst>
           </p:cNvPr>
@@ -35932,7 +35932,7 @@
           <p:cNvPr id="15" name="One pilot phone before the full fleet">
             <a:extLst xmlns:a="http://schemas.openxmlformats.org/drawingml/2006/main">
               <a:ext uri="{FF2B5EF4-FFF2-40B4-BE49-F238E27FC236}">
-                <a16:creationId xmlns:a16="http://schemas.microsoft.com/office/drawing/2014/main" id="{A3113D57-686E-4FCF-8A9D-4A8EB1D90D6D}"/>
+                <a16:creationId xmlns:a16="http://schemas.microsoft.com/office/drawing/2014/main" id="{04AF5CB7-A82E-41F3-A401-4713675F3021}"/>
               </a:ext>
             </a:extLst>
           </p:cNvPr>
@@ -36090,7 +36090,7 @@
           <p:cNvPr id="2" name="06">
             <a:extLst xmlns:a="http://schemas.openxmlformats.org/drawingml/2006/main">
               <a:ext uri="{FF2B5EF4-FFF2-40B4-BE49-F238E27FC236}">
-                <a16:creationId xmlns:a16="http://schemas.microsoft.com/office/drawing/2014/main" id="{9B3B119F-1F61-4C69-A80B-E32FF5951F3C}"/>
+                <a16:creationId xmlns:a16="http://schemas.microsoft.com/office/drawing/2014/main" id="{BA13F99E-C84E-44FE-97EB-2FF4A3BC81FF}"/>
               </a:ext>
             </a:extLst>
           </p:cNvPr>
@@ -36248,7 +36248,7 @@
           <p:cNvPr id="3" name="inventory">
             <a:extLst xmlns:a="http://schemas.openxmlformats.org/drawingml/2006/main">
               <a:ext uri="{FF2B5EF4-FFF2-40B4-BE49-F238E27FC236}">
-                <a16:creationId xmlns:a16="http://schemas.microsoft.com/office/drawing/2014/main" id="{88DBBD88-BC4E-4AA4-80FA-CAA27DED89FD}"/>
+                <a16:creationId xmlns:a16="http://schemas.microsoft.com/office/drawing/2014/main" id="{B1483B0B-AF0E-4FB9-BE94-D262D807B212}"/>
               </a:ext>
             </a:extLst>
           </p:cNvPr>
@@ -36435,7 +36435,7 @@
           <p:cNvPr id="4" name="firmware">
             <a:extLst xmlns:a="http://schemas.openxmlformats.org/drawingml/2006/main">
               <a:ext uri="{FF2B5EF4-FFF2-40B4-BE49-F238E27FC236}">
-                <a16:creationId xmlns:a16="http://schemas.microsoft.com/office/drawing/2014/main" id="{8D8D1C49-F214-495E-8954-2C666DBCDE8E}"/>
+                <a16:creationId xmlns:a16="http://schemas.microsoft.com/office/drawing/2014/main" id="{DD0F6E91-8B71-4E21-932F-42EE0825C7BF}"/>
               </a:ext>
             </a:extLst>
           </p:cNvPr>
@@ -36622,7 +36622,7 @@
           <p:cNvPr id="5" name="tftp">
             <a:extLst xmlns:a="http://schemas.openxmlformats.org/drawingml/2006/main">
               <a:ext uri="{FF2B5EF4-FFF2-40B4-BE49-F238E27FC236}">
-                <a16:creationId xmlns:a16="http://schemas.microsoft.com/office/drawing/2014/main" id="{495591E8-C97C-442F-B52E-A1681BB71A3A}"/>
+                <a16:creationId xmlns:a16="http://schemas.microsoft.com/office/drawing/2014/main" id="{C640A1A7-7560-425B-A884-007AFD06BAA1}"/>
               </a:ext>
             </a:extLst>
           </p:cNvPr>
@@ -36809,7 +36809,7 @@
           <p:cNvPr id="6" name="pilot">
             <a:extLst xmlns:a="http://schemas.openxmlformats.org/drawingml/2006/main">
               <a:ext uri="{FF2B5EF4-FFF2-40B4-BE49-F238E27FC236}">
-                <a16:creationId xmlns:a16="http://schemas.microsoft.com/office/drawing/2014/main" id="{713FEE86-F675-43EA-BC72-72674EB79C49}"/>
+                <a16:creationId xmlns:a16="http://schemas.microsoft.com/office/drawing/2014/main" id="{0C533D11-1372-46D7-B019-26B60CE2FB48}"/>
               </a:ext>
             </a:extLst>
           </p:cNvPr>
@@ -36996,7 +36996,7 @@
           <p:cNvPr id="7" name="accept">
             <a:extLst xmlns:a="http://schemas.openxmlformats.org/drawingml/2006/main">
               <a:ext uri="{FF2B5EF4-FFF2-40B4-BE49-F238E27FC236}">
-                <a16:creationId xmlns:a16="http://schemas.microsoft.com/office/drawing/2014/main" id="{58387E37-B062-416C-B331-FB3D19CAE28C}"/>
+                <a16:creationId xmlns:a16="http://schemas.microsoft.com/office/drawing/2014/main" id="{DE2329A5-CD81-4447-8A34-BFDBC4F7506B}"/>
               </a:ext>
             </a:extLst>
           </p:cNvPr>
@@ -37183,7 +37183,7 @@
           <p:cNvPr id="8" name="fleet">
             <a:extLst xmlns:a="http://schemas.openxmlformats.org/drawingml/2006/main">
               <a:ext uri="{FF2B5EF4-FFF2-40B4-BE49-F238E27FC236}">
-                <a16:creationId xmlns:a16="http://schemas.microsoft.com/office/drawing/2014/main" id="{5CE594E6-12DE-48FF-BA6E-69A334F47226}"/>
+                <a16:creationId xmlns:a16="http://schemas.microsoft.com/office/drawing/2014/main" id="{6BF02383-56A2-4858-AE3D-F657593ABF44}"/>
               </a:ext>
             </a:extLst>
           </p:cNvPr>
@@ -37370,7 +37370,7 @@
           <p:cNvPr id="14" name="HW 13.0+ requires at least 9.3(1)SR3. The upgrade path depends on">
             <a:extLst xmlns:a="http://schemas.openxmlformats.org/drawingml/2006/main">
               <a:ext uri="{FF2B5EF4-FFF2-40B4-BE49-F238E27FC236}">
-                <a16:creationId xmlns:a16="http://schemas.microsoft.com/office/drawing/2014/main" id="{99A841C0-34A7-480C-9CB0-CC68D3A2900E}"/>
+                <a16:creationId xmlns:a16="http://schemas.microsoft.com/office/drawing/2014/main" id="{39225B8C-8E56-4F9C-8ED9-4C304FDBD368}"/>
               </a:ext>
             </a:extLst>
           </p:cNvPr>
@@ -37549,7 +37549,7 @@
     </p:spTree>
     <p:extLst>
       <p:ext uri="{BB962C8B-B14F-4D97-AF65-F5344CB8AC3E}">
-        <p14:creationId xmlns:p14="http://schemas.microsoft.com/office/powerpoint/2010/main" val="1437108232"/>
+        <p14:creationId xmlns:p14="http://schemas.microsoft.com/office/powerpoint/2010/main" val="1975334921"/>
       </p:ext>
     </p:extLst>
   </p:cSld>
@@ -37580,7 +37580,7 @@
           <p:cNvPr id="8" name="TFTP preparation before restart">
             <a:extLst xmlns:a="http://schemas.openxmlformats.org/drawingml/2006/main">
               <a:ext uri="{FF2B5EF4-FFF2-40B4-BE49-F238E27FC236}">
-                <a16:creationId xmlns:a16="http://schemas.microsoft.com/office/drawing/2014/main" id="{4B9B8745-C16B-4B49-B91A-42C5ED9538CF}"/>
+                <a16:creationId xmlns:a16="http://schemas.microsoft.com/office/drawing/2014/main" id="{6A512294-3BE1-4163-9A18-2D02D7765185}"/>
               </a:ext>
             </a:extLst>
           </p:cNvPr>
@@ -37738,7 +37738,7 @@
           <p:cNvPr id="2" name="07">
             <a:extLst xmlns:a="http://schemas.openxmlformats.org/drawingml/2006/main">
               <a:ext uri="{FF2B5EF4-FFF2-40B4-BE49-F238E27FC236}">
-                <a16:creationId xmlns:a16="http://schemas.microsoft.com/office/drawing/2014/main" id="{D50B9C09-6D0D-4FA1-B076-9830197D4A27}"/>
+                <a16:creationId xmlns:a16="http://schemas.microsoft.com/office/drawing/2014/main" id="{44065361-0207-42E4-9D17-4C53551E2ADF}"/>
               </a:ext>
             </a:extLst>
           </p:cNvPr>
@@ -37896,7 +37896,7 @@
           <p:cNvPr id="3" name="Complete official firmware bundle">
             <a:extLst xmlns:a="http://schemas.openxmlformats.org/drawingml/2006/main">
               <a:ext uri="{FF2B5EF4-FFF2-40B4-BE49-F238E27FC236}">
-                <a16:creationId xmlns:a16="http://schemas.microsoft.com/office/drawing/2014/main" id="{B81F4F2F-3D5A-47A8-A290-F9C420A8F882}"/>
+                <a16:creationId xmlns:a16="http://schemas.microsoft.com/office/drawing/2014/main" id="{455C4AE9-0E6D-4A9B-86B0-84A3AB6DF690}"/>
               </a:ext>
             </a:extLst>
           </p:cNvPr>
@@ -38054,7 +38054,7 @@
           <p:cNvPr id="4" name=".loads and every referenced binary file&#10;with the original filenam">
             <a:extLst xmlns:a="http://schemas.openxmlformats.org/drawingml/2006/main">
               <a:ext uri="{FF2B5EF4-FFF2-40B4-BE49-F238E27FC236}">
-                <a16:creationId xmlns:a16="http://schemas.microsoft.com/office/drawing/2014/main" id="{00FE1FCA-ECDF-434A-AC2D-6701A8F4AA09}"/>
+                <a16:creationId xmlns:a16="http://schemas.microsoft.com/office/drawing/2014/main" id="{AE3DE605-C46D-496B-8F4E-F564CE3AF61F}"/>
               </a:ext>
             </a:extLst>
           </p:cNvPr>
@@ -38235,7 +38235,7 @@
           <p:cNvPr id="5" name="SEP&lt;MAC&gt;.cnf.xml">
             <a:extLst xmlns:a="http://schemas.openxmlformats.org/drawingml/2006/main">
               <a:ext uri="{FF2B5EF4-FFF2-40B4-BE49-F238E27FC236}">
-                <a16:creationId xmlns:a16="http://schemas.microsoft.com/office/drawing/2014/main" id="{054F2B88-2F27-4FC9-9932-9F33DCB1238F}"/>
+                <a16:creationId xmlns:a16="http://schemas.microsoft.com/office/drawing/2014/main" id="{3AEA0BDB-DF6A-414C-B665-E596CC112F89}"/>
               </a:ext>
             </a:extLst>
           </p:cNvPr>
@@ -38393,7 +38393,7 @@
           <p:cNvPr id="6" name="SIP server, extension and a unique password&#10;Load ID from the sele">
             <a:extLst xmlns:a="http://schemas.openxmlformats.org/drawingml/2006/main">
               <a:ext uri="{FF2B5EF4-FFF2-40B4-BE49-F238E27FC236}">
-                <a16:creationId xmlns:a16="http://schemas.microsoft.com/office/drawing/2014/main" id="{CC41FCA7-3FFE-4B4F-8E9E-F5C7785EE17E}"/>
+                <a16:creationId xmlns:a16="http://schemas.microsoft.com/office/drawing/2014/main" id="{A95C44B6-0E15-4B24-BE2A-AB57039CE12E}"/>
               </a:ext>
             </a:extLst>
           </p:cNvPr>
@@ -38574,7 +38574,7 @@
           <p:cNvPr id="7" name="Use DHCP option 150 on the home router or Alternate TFTP on the p">
             <a:extLst xmlns:a="http://schemas.openxmlformats.org/drawingml/2006/main">
               <a:ext uri="{FF2B5EF4-FFF2-40B4-BE49-F238E27FC236}">
-                <a16:creationId xmlns:a16="http://schemas.microsoft.com/office/drawing/2014/main" id="{C582834F-171A-4E6E-890A-D6CB7EFB9CEA}"/>
+                <a16:creationId xmlns:a16="http://schemas.microsoft.com/office/drawing/2014/main" id="{F1DCFAC5-DF95-4814-A780-5D336F1D4E1A}"/>
               </a:ext>
             </a:extLst>
           </p:cNvPr>
@@ -38730,7 +38730,7 @@
     </p:spTree>
     <p:extLst>
       <p:ext uri="{BB962C8B-B14F-4D97-AF65-F5344CB8AC3E}">
-        <p14:creationId xmlns:p14="http://schemas.microsoft.com/office/powerpoint/2010/main" val="384114579"/>
+        <p14:creationId xmlns:p14="http://schemas.microsoft.com/office/powerpoint/2010/main" val="1801680276"/>
       </p:ext>
     </p:extLst>
   </p:cSld>
@@ -38761,7 +38761,7 @@
           <p:cNvPr id="8" name="Asterisk: independent SIP lines">
             <a:extLst xmlns:a="http://schemas.openxmlformats.org/drawingml/2006/main">
               <a:ext uri="{FF2B5EF4-FFF2-40B4-BE49-F238E27FC236}">
-                <a16:creationId xmlns:a16="http://schemas.microsoft.com/office/drawing/2014/main" id="{D3BC15EC-D970-45C7-8F69-FE3E115AE318}"/>
+                <a16:creationId xmlns:a16="http://schemas.microsoft.com/office/drawing/2014/main" id="{BEB9D201-FB62-498E-ADE3-B54F0C05F470}"/>
               </a:ext>
             </a:extLst>
           </p:cNvPr>
@@ -38919,7 +38919,7 @@
           <p:cNvPr id="2" name="08">
             <a:extLst xmlns:a="http://schemas.openxmlformats.org/drawingml/2006/main">
               <a:ext uri="{FF2B5EF4-FFF2-40B4-BE49-F238E27FC236}">
-                <a16:creationId xmlns:a16="http://schemas.microsoft.com/office/drawing/2014/main" id="{DD3D1ABB-8764-4D3D-B5AD-CAE0C998F2F5}"/>
+                <a16:creationId xmlns:a16="http://schemas.microsoft.com/office/drawing/2014/main" id="{12FC38A1-406B-4FFE-AF31-F1B59611E560}"/>
               </a:ext>
             </a:extLst>
           </p:cNvPr>
@@ -39077,7 +39077,7 @@
           <p:cNvPr id="3" name="201 / 202">
             <a:extLst xmlns:a="http://schemas.openxmlformats.org/drawingml/2006/main">
               <a:ext uri="{FF2B5EF4-FFF2-40B4-BE49-F238E27FC236}">
-                <a16:creationId xmlns:a16="http://schemas.microsoft.com/office/drawing/2014/main" id="{1BFA9D4B-8C58-4663-A7DB-C80D9ED11D39}"/>
+                <a16:creationId xmlns:a16="http://schemas.microsoft.com/office/drawing/2014/main" id="{2D343321-BF00-41C7-90AF-4921DB33425C}"/>
               </a:ext>
             </a:extLst>
           </p:cNvPr>
@@ -39235,7 +39235,7 @@
           <p:cNvPr id="4" name="one phone">
             <a:extLst xmlns:a="http://schemas.openxmlformats.org/drawingml/2006/main">
               <a:ext uri="{FF2B5EF4-FFF2-40B4-BE49-F238E27FC236}">
-                <a16:creationId xmlns:a16="http://schemas.microsoft.com/office/drawing/2014/main" id="{F5F3C217-745F-4C19-8433-E89AC4895477}"/>
+                <a16:creationId xmlns:a16="http://schemas.microsoft.com/office/drawing/2014/main" id="{E597754A-ADFB-4865-961D-B1C6680E519D}"/>
               </a:ext>
             </a:extLst>
           </p:cNvPr>
@@ -39393,7 +39393,7 @@
           <p:cNvPr id="5" name="One endpoint, auth and AOR per line&#10;A unique password for each li">
             <a:extLst xmlns:a="http://schemas.openxmlformats.org/drawingml/2006/main">
               <a:ext uri="{FF2B5EF4-FFF2-40B4-BE49-F238E27FC236}">
-                <a16:creationId xmlns:a16="http://schemas.microsoft.com/office/drawing/2014/main" id="{FDD88CFE-2C7E-436C-B921-BB31B9EA3BFC}"/>
+                <a16:creationId xmlns:a16="http://schemas.microsoft.com/office/drawing/2014/main" id="{D442CB34-E740-4315-9925-F054FD671ACF}"/>
               </a:ext>
             </a:extLst>
           </p:cNvPr>
@@ -39574,7 +39574,7 @@
           <p:cNvPr id="6" name="G.711 ulaw / alaw&#10;direct_media=no keeps RTP on Asterisk">
             <a:extLst xmlns:a="http://schemas.openxmlformats.org/drawingml/2006/main">
               <a:ext uri="{FF2B5EF4-FFF2-40B4-BE49-F238E27FC236}">
-                <a16:creationId xmlns:a16="http://schemas.microsoft.com/office/drawing/2014/main" id="{5225C6E4-3246-4D7F-B967-7CCFFF3EAC84}"/>
+                <a16:creationId xmlns:a16="http://schemas.microsoft.com/office/drawing/2014/main" id="{51D2E950-EE68-44AD-8E4F-1AE9E02450E9}"/>
               </a:ext>
             </a:extLst>
           </p:cNvPr>
@@ -39755,7 +39755,7 @@
           <p:cNvPr id="7" name="600 echo, 601 tone, 620 ring group. Extension 630 requires Assist">
             <a:extLst xmlns:a="http://schemas.openxmlformats.org/drawingml/2006/main">
               <a:ext uri="{FF2B5EF4-FFF2-40B4-BE49-F238E27FC236}">
-                <a16:creationId xmlns:a16="http://schemas.microsoft.com/office/drawing/2014/main" id="{A74AD764-558F-429A-B1DF-A68AEB64EF66}"/>
+                <a16:creationId xmlns:a16="http://schemas.microsoft.com/office/drawing/2014/main" id="{96F401B3-B24E-45C1-BBB5-FF46A347D12A}"/>
               </a:ext>
             </a:extLst>
           </p:cNvPr>
@@ -39911,7 +39911,7 @@
     </p:spTree>
     <p:extLst>
       <p:ext uri="{BB962C8B-B14F-4D97-AF65-F5344CB8AC3E}">
-        <p14:creationId xmlns:p14="http://schemas.microsoft.com/office/powerpoint/2010/main" val="411781559"/>
+        <p14:creationId xmlns:p14="http://schemas.microsoft.com/office/powerpoint/2010/main" val="1365858718"/>
       </p:ext>
     </p:extLst>
   </p:cSld>
@@ -39942,7 +39942,7 @@
           <p:cNvPr id="8" name="AMI: status and call control">
             <a:extLst xmlns:a="http://schemas.openxmlformats.org/drawingml/2006/main">
               <a:ext uri="{FF2B5EF4-FFF2-40B4-BE49-F238E27FC236}">
-                <a16:creationId xmlns:a16="http://schemas.microsoft.com/office/drawing/2014/main" id="{DB3ABA55-C8CD-471E-881F-214B1803D3A3}"/>
+                <a16:creationId xmlns:a16="http://schemas.microsoft.com/office/drawing/2014/main" id="{2650EE70-B5E7-4C68-B6F1-2BBEEA9CEE92}"/>
               </a:ext>
             </a:extLst>
           </p:cNvPr>
@@ -40100,7 +40100,7 @@
           <p:cNvPr id="2" name="09">
             <a:extLst xmlns:a="http://schemas.openxmlformats.org/drawingml/2006/main">
               <a:ext uri="{FF2B5EF4-FFF2-40B4-BE49-F238E27FC236}">
-                <a16:creationId xmlns:a16="http://schemas.microsoft.com/office/drawing/2014/main" id="{662298C5-6ED3-4607-86D4-A8580F7C46D7}"/>
+                <a16:creationId xmlns:a16="http://schemas.microsoft.com/office/drawing/2014/main" id="{6BD4CBD9-D3FD-4483-80AC-6D4A22F84753}"/>
               </a:ext>
             </a:extLst>
           </p:cNvPr>
@@ -40258,7 +40258,7 @@
           <p:cNvPr id="3" name="Home Assistant connects to PBX:5038">
             <a:extLst xmlns:a="http://schemas.openxmlformats.org/drawingml/2006/main">
               <a:ext uri="{FF2B5EF4-FFF2-40B4-BE49-F238E27FC236}">
-                <a16:creationId xmlns:a16="http://schemas.microsoft.com/office/drawing/2014/main" id="{2C14E1D9-B98B-4B8D-A68F-E214C3908578}"/>
+                <a16:creationId xmlns:a16="http://schemas.microsoft.com/office/drawing/2014/main" id="{3B433A05-D2C3-4484-B317-C16AA0987D4D}"/>
               </a:ext>
             </a:extLst>
           </p:cNvPr>
@@ -40416,7 +40416,7 @@
           <p:cNvPr id="4" name="Status, connected line and DTMF&#10;Actual entity IDs from your HA in">
             <a:extLst xmlns:a="http://schemas.openxmlformats.org/drawingml/2006/main">
               <a:ext uri="{FF2B5EF4-FFF2-40B4-BE49-F238E27FC236}">
-                <a16:creationId xmlns:a16="http://schemas.microsoft.com/office/drawing/2014/main" id="{F98E2C5A-E4A0-4728-AEF2-C44614D98898}"/>
+                <a16:creationId xmlns:a16="http://schemas.microsoft.com/office/drawing/2014/main" id="{D2BBE51F-AC24-427A-A04F-F7079AEFC7AD}"/>
               </a:ext>
             </a:extLst>
           </p:cNvPr>
@@ -40597,7 +40597,7 @@
           <p:cNvPr id="5" name="Place calls and hang up a specific channel">
             <a:extLst xmlns:a="http://schemas.openxmlformats.org/drawingml/2006/main">
               <a:ext uri="{FF2B5EF4-FFF2-40B4-BE49-F238E27FC236}">
-                <a16:creationId xmlns:a16="http://schemas.microsoft.com/office/drawing/2014/main" id="{E7D89A30-ED69-4C95-8BF5-90ACFB36C676}"/>
+                <a16:creationId xmlns:a16="http://schemas.microsoft.com/office/drawing/2014/main" id="{3156EC23-0CB1-422C-83E4-B627CA75A7CA}"/>
               </a:ext>
             </a:extLst>
           </p:cNvPr>
@@ -40755,7 +40755,7 @@
           <p:cNvPr id="6" name="asterisk.send_action: Originate / Hangup&#10;The DTMF example sends a">
             <a:extLst xmlns:a="http://schemas.openxmlformats.org/drawingml/2006/main">
               <a:ext uri="{FF2B5EF4-FFF2-40B4-BE49-F238E27FC236}">
-                <a16:creationId xmlns:a16="http://schemas.microsoft.com/office/drawing/2014/main" id="{CB48CFF7-9CAF-429B-A6C5-4F4AB6FF5ACE}"/>
+                <a16:creationId xmlns:a16="http://schemas.microsoft.com/office/drawing/2014/main" id="{274B6124-549B-41A7-B18F-C372ECFB5F9B}"/>
               </a:ext>
             </a:extLst>
           </p:cNvPr>
@@ -40936,7 +40936,7 @@
           <p:cNvPr id="7" name="Use a separate secret and a /32 ACL. The system permission allows">
             <a:extLst xmlns:a="http://schemas.openxmlformats.org/drawingml/2006/main">
               <a:ext uri="{FF2B5EF4-FFF2-40B4-BE49-F238E27FC236}">
-                <a16:creationId xmlns:a16="http://schemas.microsoft.com/office/drawing/2014/main" id="{3918F16C-79A8-46F3-9183-28678A54F829}"/>
+                <a16:creationId xmlns:a16="http://schemas.microsoft.com/office/drawing/2014/main" id="{A12CB9B7-7D32-44C3-B7CC-9FD8B57E3C26}"/>
               </a:ext>
             </a:extLst>
           </p:cNvPr>
@@ -41092,7 +41092,7 @@
     </p:spTree>
     <p:extLst>
       <p:ext uri="{BB962C8B-B14F-4D97-AF65-F5344CB8AC3E}">
-        <p14:creationId xmlns:p14="http://schemas.microsoft.com/office/powerpoint/2010/main" val="1693943508"/>
+        <p14:creationId xmlns:p14="http://schemas.microsoft.com/office/powerpoint/2010/main" val="41986417"/>
       </p:ext>
     </p:extLst>
   </p:cSld>
